--- a/docs/examples/reference-architectures.pptx
+++ b/docs/examples/reference-architectures.pptx
@@ -13697,10 +13697,10 @@
         </p:nvGrpSpPr>
         <p:grpSpPr>
           <a:xfrm>
-            <a:off x="-715791" y="999381"/>
-            <a:ext cx="12691443" cy="5545037"/>
-            <a:chOff x="-715791" y="999381"/>
-            <a:chExt cx="12691443" cy="5545037"/>
+            <a:off x="381000" y="999067"/>
+            <a:ext cx="11657541" cy="5590116"/>
+            <a:chOff x="381000" y="999067"/>
+            <a:chExt cx="11657541" cy="5590116"/>
           </a:xfrm>
         </p:grpSpPr>
         <p:sp>
@@ -13711,14 +13711,14 @@
           </p:nvSpPr>
           <p:spPr>
             <a:xfrm>
-              <a:off x="359755" y="999381"/>
-              <a:ext cx="10580186" cy="5545037"/>
-            </a:xfrm>
-            <a:prstGeom prst="rect">
-              <a:avLst/>
-            </a:prstGeom>
-            <a:noFill/>
-            <a:ln w="21245">
+              <a:off x="381000" y="999067"/>
+              <a:ext cx="10625667" cy="5270500"/>
+            </a:xfrm>
+            <a:prstGeom prst="rect">
+              <a:avLst/>
+            </a:prstGeom>
+            <a:noFill/>
+            <a:ln w="21167">
               <a:solidFill>
                 <a:srgbClr val="232F3E"/>
               </a:solidFill>
@@ -13756,8 +13756,8 @@
           </p:blipFill>
           <p:spPr>
             <a:xfrm>
-              <a:off x="359755" y="999381"/>
-              <a:ext cx="339926" cy="339926"/>
+              <a:off x="381000" y="999067"/>
+              <a:ext cx="338667" cy="338667"/>
             </a:xfrm>
             <a:prstGeom prst="rect">
               <a:avLst/>
@@ -13772,8 +13772,8 @@
           </p:nvSpPr>
           <p:spPr>
             <a:xfrm>
-              <a:off x="805907" y="1081707"/>
-              <a:ext cx="1145257" cy="207142"/>
+              <a:off x="825500" y="1081088"/>
+              <a:ext cx="1141016" cy="206375"/>
             </a:xfrm>
             <a:prstGeom prst="rect">
               <a:avLst/>
@@ -13792,7 +13792,7 @@
                 </a:lnSpc>
               </a:pPr>
               <a:r>
-                <a:rPr sz="1254" b="1" lang="ko-KR">
+                <a:rPr sz="1250" b="1" lang="ko-KR">
                   <a:solidFill>
                     <a:srgbClr val="232F3E"/>
                   </a:solidFill>
@@ -13813,14 +13813,14 @@
           </p:nvSpPr>
           <p:spPr>
             <a:xfrm>
-              <a:off x="572208" y="1381798"/>
-              <a:ext cx="10155279" cy="5035149"/>
-            </a:xfrm>
-            <a:prstGeom prst="rect">
-              <a:avLst/>
-            </a:prstGeom>
-            <a:noFill/>
-            <a:ln w="21245">
+              <a:off x="592667" y="1380067"/>
+              <a:ext cx="10202333" cy="4847167"/>
+            </a:xfrm>
+            <a:prstGeom prst="rect">
+              <a:avLst/>
+            </a:prstGeom>
+            <a:noFill/>
+            <a:ln w="21167">
               <a:solidFill>
                 <a:srgbClr val="00A4A6"/>
               </a:solidFill>
@@ -13860,8 +13860,8 @@
           </p:blipFill>
           <p:spPr>
             <a:xfrm>
-              <a:off x="572208" y="1381798"/>
-              <a:ext cx="254944" cy="254944"/>
+              <a:off x="592667" y="1380067"/>
+              <a:ext cx="254000" cy="254000"/>
             </a:xfrm>
             <a:prstGeom prst="rect">
               <a:avLst/>
@@ -13876,8 +13876,8 @@
           </p:nvSpPr>
           <p:spPr>
             <a:xfrm>
-              <a:off x="912134" y="1431724"/>
-              <a:ext cx="2295826" cy="193333"/>
+              <a:off x="931333" y="1429808"/>
+              <a:ext cx="2287323" cy="192617"/>
             </a:xfrm>
             <a:prstGeom prst="rect">
               <a:avLst/>
@@ -13896,7 +13896,7 @@
                 </a:lnSpc>
               </a:pPr>
               <a:r>
-                <a:rPr sz="1171" b="1" lang="ko-KR">
+                <a:rPr sz="1166" b="1" lang="ko-KR">
                   <a:solidFill>
                     <a:srgbClr val="00A4A6"/>
                   </a:solidFill>
@@ -13917,14 +13917,14 @@
           </p:nvSpPr>
           <p:spPr>
             <a:xfrm>
-              <a:off x="742171" y="1912932"/>
-              <a:ext cx="2124535" cy="1487175"/>
-            </a:xfrm>
-            <a:prstGeom prst="rect">
-              <a:avLst/>
-            </a:prstGeom>
-            <a:noFill/>
-            <a:ln w="21245">
+              <a:off x="762000" y="1909233"/>
+              <a:ext cx="2116667" cy="1481667"/>
+            </a:xfrm>
+            <a:prstGeom prst="rect">
+              <a:avLst/>
+            </a:prstGeom>
+            <a:noFill/>
+            <a:ln w="21167">
               <a:solidFill>
                 <a:srgbClr val="8C4FFF"/>
               </a:solidFill>
@@ -13962,8 +13962,8 @@
           </p:blipFill>
           <p:spPr>
             <a:xfrm>
-              <a:off x="742171" y="1912932"/>
-              <a:ext cx="254944" cy="254944"/>
+              <a:off x="762000" y="1909233"/>
+              <a:ext cx="254000" cy="254000"/>
             </a:xfrm>
             <a:prstGeom prst="rect">
               <a:avLst/>
@@ -13978,8 +13978,8 @@
           </p:nvSpPr>
           <p:spPr>
             <a:xfrm>
-              <a:off x="1082097" y="1962858"/>
-              <a:ext cx="1886853" cy="193333"/>
+              <a:off x="1100667" y="1958975"/>
+              <a:ext cx="1879865" cy="192617"/>
             </a:xfrm>
             <a:prstGeom prst="rect">
               <a:avLst/>
@@ -13998,7 +13998,7 @@
                 </a:lnSpc>
               </a:pPr>
               <a:r>
-                <a:rPr sz="1171" b="1" lang="ko-KR">
+                <a:rPr sz="1166" b="1" lang="ko-KR">
                   <a:solidFill>
                     <a:srgbClr val="8C4FFF"/>
                   </a:solidFill>
@@ -14019,14 +14019,14 @@
           </p:nvSpPr>
           <p:spPr>
             <a:xfrm>
-              <a:off x="869643" y="2210367"/>
-              <a:ext cx="1869591" cy="1104758"/>
-            </a:xfrm>
-            <a:prstGeom prst="rect">
-              <a:avLst/>
-            </a:prstGeom>
-            <a:noFill/>
-            <a:ln w="15934">
+              <a:off x="889000" y="2205567"/>
+              <a:ext cx="1862667" cy="1100667"/>
+            </a:xfrm>
+            <a:prstGeom prst="rect">
+              <a:avLst/>
+            </a:prstGeom>
+            <a:noFill/>
+            <a:ln w="15875">
               <a:solidFill>
                 <a:srgbClr val="00A4A6"/>
               </a:solidFill>
@@ -14064,8 +14064,8 @@
           </p:blipFill>
           <p:spPr>
             <a:xfrm>
-              <a:off x="869643" y="2210367"/>
-              <a:ext cx="254944" cy="254944"/>
+              <a:off x="889000" y="2205567"/>
+              <a:ext cx="254000" cy="254000"/>
             </a:xfrm>
             <a:prstGeom prst="rect">
               <a:avLst/>
@@ -14080,8 +14080,8 @@
           </p:nvSpPr>
           <p:spPr>
             <a:xfrm>
-              <a:off x="1209569" y="2260293"/>
-              <a:ext cx="1171150" cy="193333"/>
+              <a:off x="1227667" y="2255308"/>
+              <a:ext cx="1166813" cy="192617"/>
             </a:xfrm>
             <a:prstGeom prst="rect">
               <a:avLst/>
@@ -14100,7 +14100,7 @@
                 </a:lnSpc>
               </a:pPr>
               <a:r>
-                <a:rPr sz="1171" b="1" lang="ko-KR">
+                <a:rPr sz="1166" b="1" lang="ko-KR">
                   <a:solidFill>
                     <a:srgbClr val="00A4A6"/>
                   </a:solidFill>
@@ -14135,8 +14135,8 @@
           </p:blipFill>
           <p:spPr>
             <a:xfrm>
-              <a:off x="1549494" y="2507801"/>
-              <a:ext cx="509888" cy="509888"/>
+              <a:off x="1566333" y="2501900"/>
+              <a:ext cx="508000" cy="508000"/>
             </a:xfrm>
             <a:prstGeom prst="rect">
               <a:avLst/>
@@ -14151,8 +14151,8 @@
           </p:nvSpPr>
           <p:spPr>
             <a:xfrm>
-              <a:off x="1576715" y="3067617"/>
-              <a:ext cx="455447" cy="193333"/>
+              <a:off x="1593453" y="3059642"/>
+              <a:ext cx="453760" cy="192617"/>
             </a:xfrm>
             <a:prstGeom prst="rect">
               <a:avLst/>
@@ -14171,7 +14171,7 @@
                 </a:lnSpc>
               </a:pPr>
               <a:r>
-                <a:rPr sz="1171" b="0" lang="ko-KR">
+                <a:rPr sz="1166" b="0" lang="ko-KR">
                   <a:solidFill>
                     <a:srgbClr val="232F3E"/>
                   </a:solidFill>
@@ -14192,14 +14192,14 @@
           </p:nvSpPr>
           <p:spPr>
             <a:xfrm>
-              <a:off x="742171" y="4526110"/>
-              <a:ext cx="2124535" cy="1487175"/>
-            </a:xfrm>
-            <a:prstGeom prst="rect">
-              <a:avLst/>
-            </a:prstGeom>
-            <a:noFill/>
-            <a:ln w="21245">
+              <a:off x="762000" y="4512733"/>
+              <a:ext cx="2116667" cy="1481667"/>
+            </a:xfrm>
+            <a:prstGeom prst="rect">
+              <a:avLst/>
+            </a:prstGeom>
+            <a:noFill/>
+            <a:ln w="21167">
               <a:solidFill>
                 <a:srgbClr val="8C4FFF"/>
               </a:solidFill>
@@ -14237,8 +14237,8 @@
           </p:blipFill>
           <p:spPr>
             <a:xfrm>
-              <a:off x="742171" y="4526110"/>
-              <a:ext cx="254944" cy="254944"/>
+              <a:off x="762000" y="4512733"/>
+              <a:ext cx="254000" cy="254000"/>
             </a:xfrm>
             <a:prstGeom prst="rect">
               <a:avLst/>
@@ -14253,8 +14253,8 @@
           </p:nvSpPr>
           <p:spPr>
             <a:xfrm>
-              <a:off x="1082097" y="4576037"/>
-              <a:ext cx="1886853" cy="193333"/>
+              <a:off x="1100667" y="4562475"/>
+              <a:ext cx="1879865" cy="192617"/>
             </a:xfrm>
             <a:prstGeom prst="rect">
               <a:avLst/>
@@ -14273,7 +14273,7 @@
                 </a:lnSpc>
               </a:pPr>
               <a:r>
-                <a:rPr sz="1171" b="1" lang="ko-KR">
+                <a:rPr sz="1166" b="1" lang="ko-KR">
                   <a:solidFill>
                     <a:srgbClr val="8C4FFF"/>
                   </a:solidFill>
@@ -14294,14 +14294,14 @@
           </p:nvSpPr>
           <p:spPr>
             <a:xfrm>
-              <a:off x="869643" y="4823545"/>
-              <a:ext cx="1869591" cy="1104758"/>
-            </a:xfrm>
-            <a:prstGeom prst="rect">
-              <a:avLst/>
-            </a:prstGeom>
-            <a:noFill/>
-            <a:ln w="15934">
+              <a:off x="889000" y="4809067"/>
+              <a:ext cx="1862667" cy="1100667"/>
+            </a:xfrm>
+            <a:prstGeom prst="rect">
+              <a:avLst/>
+            </a:prstGeom>
+            <a:noFill/>
+            <a:ln w="15875">
               <a:solidFill>
                 <a:srgbClr val="00A4A6"/>
               </a:solidFill>
@@ -14339,8 +14339,8 @@
           </p:blipFill>
           <p:spPr>
             <a:xfrm>
-              <a:off x="869643" y="4823545"/>
-              <a:ext cx="254944" cy="254944"/>
+              <a:off x="889000" y="4809067"/>
+              <a:ext cx="254000" cy="254000"/>
             </a:xfrm>
             <a:prstGeom prst="rect">
               <a:avLst/>
@@ -14355,8 +14355,8 @@
           </p:nvSpPr>
           <p:spPr>
             <a:xfrm>
-              <a:off x="1209569" y="4873472"/>
-              <a:ext cx="1171150" cy="193333"/>
+              <a:off x="1227667" y="4858808"/>
+              <a:ext cx="1166813" cy="192617"/>
             </a:xfrm>
             <a:prstGeom prst="rect">
               <a:avLst/>
@@ -14375,7 +14375,7 @@
                 </a:lnSpc>
               </a:pPr>
               <a:r>
-                <a:rPr sz="1171" b="1" lang="ko-KR">
+                <a:rPr sz="1166" b="1" lang="ko-KR">
                   <a:solidFill>
                     <a:srgbClr val="00A4A6"/>
                   </a:solidFill>
@@ -14410,8 +14410,8 @@
           </p:blipFill>
           <p:spPr>
             <a:xfrm>
-              <a:off x="1549494" y="5120980"/>
-              <a:ext cx="509888" cy="509888"/>
+              <a:off x="1566333" y="5105400"/>
+              <a:ext cx="508000" cy="508000"/>
             </a:xfrm>
             <a:prstGeom prst="rect">
               <a:avLst/>
@@ -14426,8 +14426,8 @@
           </p:nvSpPr>
           <p:spPr>
             <a:xfrm>
-              <a:off x="1576715" y="5680795"/>
-              <a:ext cx="455447" cy="193333"/>
+              <a:off x="1593453" y="5663142"/>
+              <a:ext cx="453760" cy="192617"/>
             </a:xfrm>
             <a:prstGeom prst="rect">
               <a:avLst/>
@@ -14446,7 +14446,7 @@
                 </a:lnSpc>
               </a:pPr>
               <a:r>
-                <a:rPr sz="1171" b="0" lang="ko-KR">
+                <a:rPr sz="1166" b="0" lang="ko-KR">
                   <a:solidFill>
                     <a:srgbClr val="232F3E"/>
                   </a:solidFill>
@@ -14481,8 +14481,8 @@
           </p:blipFill>
           <p:spPr>
             <a:xfrm>
-              <a:off x="3525312" y="3740032"/>
-              <a:ext cx="509888" cy="509888"/>
+              <a:off x="3534833" y="3729567"/>
+              <a:ext cx="508000" cy="508000"/>
             </a:xfrm>
             <a:prstGeom prst="rect">
               <a:avLst/>
@@ -14497,8 +14497,8 @@
           </p:nvSpPr>
           <p:spPr>
             <a:xfrm>
-              <a:off x="3552533" y="4299847"/>
-              <a:ext cx="455447" cy="193333"/>
+              <a:off x="3561953" y="4287308"/>
+              <a:ext cx="453760" cy="192617"/>
             </a:xfrm>
             <a:prstGeom prst="rect">
               <a:avLst/>
@@ -14517,7 +14517,7 @@
                 </a:lnSpc>
               </a:pPr>
               <a:r>
-                <a:rPr sz="1171" b="0" lang="ko-KR">
+                <a:rPr sz="1166" b="0" lang="ko-KR">
                   <a:solidFill>
                     <a:srgbClr val="232F3E"/>
                   </a:solidFill>
@@ -14552,8 +14552,8 @@
           </p:blipFill>
           <p:spPr>
             <a:xfrm>
-              <a:off x="3525312" y="2507801"/>
-              <a:ext cx="509888" cy="509888"/>
+              <a:off x="3534833" y="2501900"/>
+              <a:ext cx="508000" cy="508000"/>
             </a:xfrm>
             <a:prstGeom prst="rect">
               <a:avLst/>
@@ -14568,8 +14568,8 @@
           </p:nvSpPr>
           <p:spPr>
             <a:xfrm>
-              <a:off x="3143560" y="3067617"/>
-              <a:ext cx="1273393" cy="193333"/>
+              <a:off x="3154495" y="3059642"/>
+              <a:ext cx="1268677" cy="192617"/>
             </a:xfrm>
             <a:prstGeom prst="rect">
               <a:avLst/>
@@ -14588,7 +14588,7 @@
                 </a:lnSpc>
               </a:pPr>
               <a:r>
-                <a:rPr sz="1171" b="0" lang="ko-KR">
+                <a:rPr sz="1166" b="0" lang="ko-KR">
                   <a:solidFill>
                     <a:srgbClr val="232F3E"/>
                   </a:solidFill>
@@ -14609,8 +14609,8 @@
           </p:nvSpPr>
           <p:spPr>
             <a:xfrm>
-              <a:off x="3118995" y="3257762"/>
-              <a:ext cx="1322523" cy="165714"/>
+              <a:off x="3130021" y="3249083"/>
+              <a:ext cx="1317625" cy="165100"/>
             </a:xfrm>
             <a:prstGeom prst="rect">
               <a:avLst/>
@@ -14629,7 +14629,7 @@
                 </a:lnSpc>
               </a:pPr>
               <a:r>
-                <a:rPr sz="1003" b="0" lang="ko-KR">
+                <a:rPr sz="1000" b="0" lang="ko-KR">
                   <a:solidFill>
                     <a:srgbClr val="545B64"/>
                   </a:solidFill>
@@ -14664,8 +14664,8 @@
           </p:blipFill>
           <p:spPr>
             <a:xfrm>
-              <a:off x="3525312" y="5120980"/>
-              <a:ext cx="509888" cy="509888"/>
+              <a:off x="3534833" y="5105400"/>
+              <a:ext cx="508000" cy="508000"/>
             </a:xfrm>
             <a:prstGeom prst="rect">
               <a:avLst/>
@@ -14680,8 +14680,8 @@
           </p:nvSpPr>
           <p:spPr>
             <a:xfrm>
-              <a:off x="3296925" y="5680795"/>
-              <a:ext cx="966664" cy="193333"/>
+              <a:off x="3307292" y="5663142"/>
+              <a:ext cx="963083" cy="192617"/>
             </a:xfrm>
             <a:prstGeom prst="rect">
               <a:avLst/>
@@ -14700,7 +14700,7 @@
                 </a:lnSpc>
               </a:pPr>
               <a:r>
-                <a:rPr sz="1171" b="0" lang="ko-KR">
+                <a:rPr sz="1166" b="0" lang="ko-KR">
                   <a:solidFill>
                     <a:srgbClr val="232F3E"/>
                   </a:solidFill>
@@ -14721,8 +14721,8 @@
           </p:nvSpPr>
           <p:spPr>
             <a:xfrm>
-              <a:off x="3118995" y="5870941"/>
-              <a:ext cx="1322523" cy="165714"/>
+              <a:off x="3130021" y="5852583"/>
+              <a:ext cx="1317625" cy="165100"/>
             </a:xfrm>
             <a:prstGeom prst="rect">
               <a:avLst/>
@@ -14741,7 +14741,7 @@
                 </a:lnSpc>
               </a:pPr>
               <a:r>
-                <a:rPr sz="1003" b="0" lang="ko-KR">
+                <a:rPr sz="1000" b="0" lang="ko-KR">
                   <a:solidFill>
                     <a:srgbClr val="545B64"/>
                   </a:solidFill>
@@ -14762,8 +14762,8 @@
           </p:nvSpPr>
           <p:spPr>
             <a:xfrm>
-              <a:off x="2909197" y="2762746"/>
-              <a:ext cx="573625" cy="1147249"/>
+              <a:off x="2921000" y="2755900"/>
+              <a:ext cx="571500" cy="1143000"/>
             </a:xfrm>
             <a:custGeom>
               <a:avLst/>
@@ -14772,24 +14772,24 @@
               <a:cxnLst/>
               <a:rect l="l" t="t" r="r" b="b"/>
               <a:pathLst>
-                <a:path w="573625" h="1147249">
+                <a:path w="571500" h="1143000">
                   <a:moveTo>
                     <a:pt x="0" y="0"/>
                   </a:moveTo>
                   <a:lnTo>
-                    <a:pt x="254944" y="0"/>
+                    <a:pt x="254000" y="0"/>
                   </a:lnTo>
                   <a:lnTo>
-                    <a:pt x="254944" y="1147249"/>
+                    <a:pt x="254000" y="1143000"/>
                   </a:lnTo>
                   <a:lnTo>
-                    <a:pt x="573625" y="1147249"/>
+                    <a:pt x="571500" y="1143000"/>
                   </a:lnTo>
                 </a:path>
               </a:pathLst>
             </a:custGeom>
             <a:noFill/>
-            <a:ln w="15934">
+            <a:ln w="15875">
               <a:solidFill>
                 <a:srgbClr val="232F3E"/>
               </a:solidFill>
@@ -14815,8 +14815,8 @@
           </p:nvSpPr>
           <p:spPr>
             <a:xfrm>
-              <a:off x="2909197" y="4079958"/>
-              <a:ext cx="573625" cy="1295966"/>
+              <a:off x="2921000" y="4068233"/>
+              <a:ext cx="571500" cy="1291167"/>
             </a:xfrm>
             <a:custGeom>
               <a:avLst/>
@@ -14825,24 +14825,24 @@
               <a:cxnLst/>
               <a:rect l="l" t="t" r="r" b="b"/>
               <a:pathLst>
-                <a:path w="573625" h="1295966">
+                <a:path w="571500" h="1291167">
                   <a:moveTo>
-                    <a:pt x="0" y="1295966"/>
+                    <a:pt x="0" y="1291167"/>
                   </a:moveTo>
                   <a:lnTo>
-                    <a:pt x="254944" y="1295966"/>
+                    <a:pt x="254000" y="1291167"/>
                   </a:lnTo>
                   <a:lnTo>
-                    <a:pt x="254944" y="0"/>
+                    <a:pt x="254000" y="0"/>
                   </a:lnTo>
                   <a:lnTo>
-                    <a:pt x="573625" y="0"/>
+                    <a:pt x="571500" y="0"/>
                   </a:lnTo>
                 </a:path>
               </a:pathLst>
             </a:custGeom>
             <a:noFill/>
-            <a:ln w="15934">
+            <a:ln w="15875">
               <a:solidFill>
                 <a:srgbClr val="232F3E"/>
               </a:solidFill>
@@ -14868,14 +14868,14 @@
           </p:nvSpPr>
           <p:spPr>
             <a:xfrm>
-              <a:off x="4566335" y="1679233"/>
-              <a:ext cx="5736245" cy="4440279"/>
-            </a:xfrm>
-            <a:prstGeom prst="rect">
-              <a:avLst/>
-            </a:prstGeom>
-            <a:noFill/>
-            <a:ln w="21245">
+              <a:off x="4572000" y="1676400"/>
+              <a:ext cx="5799667" cy="4423833"/>
+            </a:xfrm>
+            <a:prstGeom prst="rect">
+              <a:avLst/>
+            </a:prstGeom>
+            <a:noFill/>
+            <a:ln w="21167">
               <a:solidFill>
                 <a:srgbClr val="8C4FFF"/>
               </a:solidFill>
@@ -14913,8 +14913,8 @@
           </p:blipFill>
           <p:spPr>
             <a:xfrm>
-              <a:off x="4566335" y="1679233"/>
-              <a:ext cx="254944" cy="254944"/>
+              <a:off x="4572000" y="1676400"/>
+              <a:ext cx="254000" cy="254000"/>
             </a:xfrm>
             <a:prstGeom prst="rect">
               <a:avLst/>
@@ -14929,8 +14929,8 @@
           </p:nvSpPr>
           <p:spPr>
             <a:xfrm>
-              <a:off x="4906260" y="1729159"/>
-              <a:ext cx="3011529" cy="193333"/>
+              <a:off x="4910667" y="1726142"/>
+              <a:ext cx="3000375" cy="192617"/>
             </a:xfrm>
             <a:prstGeom prst="rect">
               <a:avLst/>
@@ -14949,7 +14949,7 @@
                 </a:lnSpc>
               </a:pPr>
               <a:r>
-                <a:rPr sz="1171" b="1" lang="ko-KR">
+                <a:rPr sz="1166" b="1" lang="ko-KR">
                   <a:solidFill>
                     <a:srgbClr val="8C4FFF"/>
                   </a:solidFill>
@@ -14970,14 +14970,14 @@
           </p:nvSpPr>
           <p:spPr>
             <a:xfrm>
-              <a:off x="4736297" y="1976668"/>
-              <a:ext cx="5396320" cy="1423439"/>
-            </a:xfrm>
-            <a:prstGeom prst="rect">
-              <a:avLst/>
-            </a:prstGeom>
-            <a:noFill/>
-            <a:ln w="15934">
+              <a:off x="4741333" y="1972733"/>
+              <a:ext cx="5037667" cy="1418167"/>
+            </a:xfrm>
+            <a:prstGeom prst="rect">
+              <a:avLst/>
+            </a:prstGeom>
+            <a:noFill/>
+            <a:ln w="15875">
               <a:solidFill>
                 <a:srgbClr val="00A4A6"/>
               </a:solidFill>
@@ -15003,8 +15003,8 @@
           </p:nvSpPr>
           <p:spPr>
             <a:xfrm>
-              <a:off x="4863770" y="2005349"/>
-              <a:ext cx="2091339" cy="193333"/>
+              <a:off x="4868333" y="2001308"/>
+              <a:ext cx="2083594" cy="192617"/>
             </a:xfrm>
             <a:prstGeom prst="rect">
               <a:avLst/>
@@ -15023,7 +15023,7 @@
                 </a:lnSpc>
               </a:pPr>
               <a:r>
-                <a:rPr sz="1171" b="1" lang="ko-KR">
+                <a:rPr sz="1166" b="1" lang="ko-KR">
                   <a:solidFill>
                     <a:srgbClr val="00A4A6"/>
                   </a:solidFill>
@@ -15044,14 +15044,14 @@
           </p:nvSpPr>
           <p:spPr>
             <a:xfrm>
-              <a:off x="4736297" y="4589846"/>
-              <a:ext cx="5396320" cy="1423439"/>
-            </a:xfrm>
-            <a:prstGeom prst="rect">
-              <a:avLst/>
-            </a:prstGeom>
-            <a:noFill/>
-            <a:ln w="15934">
+              <a:off x="4741333" y="4576233"/>
+              <a:ext cx="5037667" cy="1418167"/>
+            </a:xfrm>
+            <a:prstGeom prst="rect">
+              <a:avLst/>
+            </a:prstGeom>
+            <a:noFill/>
+            <a:ln w="15875">
               <a:solidFill>
                 <a:srgbClr val="00A4A6"/>
               </a:solidFill>
@@ -15077,8 +15077,8 @@
           </p:nvSpPr>
           <p:spPr>
             <a:xfrm>
-              <a:off x="4863770" y="4618527"/>
-              <a:ext cx="2091339" cy="193333"/>
+              <a:off x="4868333" y="4604808"/>
+              <a:ext cx="2083594" cy="192617"/>
             </a:xfrm>
             <a:prstGeom prst="rect">
               <a:avLst/>
@@ -15097,7 +15097,7 @@
                 </a:lnSpc>
               </a:pPr>
               <a:r>
-                <a:rPr sz="1171" b="1" lang="ko-KR">
+                <a:rPr sz="1166" b="1" lang="ko-KR">
                   <a:solidFill>
                     <a:srgbClr val="00A4A6"/>
                   </a:solidFill>
@@ -15118,14 +15118,14 @@
           </p:nvSpPr>
           <p:spPr>
             <a:xfrm>
-              <a:off x="4863770" y="2210367"/>
-              <a:ext cx="1444684" cy="1104758"/>
-            </a:xfrm>
-            <a:prstGeom prst="rect">
-              <a:avLst/>
-            </a:prstGeom>
-            <a:noFill/>
-            <a:ln w="15934">
+              <a:off x="4868333" y="2205567"/>
+              <a:ext cx="1439333" cy="1100667"/>
+            </a:xfrm>
+            <a:prstGeom prst="rect">
+              <a:avLst/>
+            </a:prstGeom>
+            <a:noFill/>
+            <a:ln w="15875">
               <a:solidFill>
                 <a:srgbClr val="00A4A6"/>
               </a:solidFill>
@@ -15163,8 +15163,8 @@
           </p:blipFill>
           <p:spPr>
             <a:xfrm>
-              <a:off x="4863770" y="2210367"/>
-              <a:ext cx="254944" cy="254944"/>
+              <a:off x="4868333" y="2205567"/>
+              <a:ext cx="254000" cy="254000"/>
             </a:xfrm>
             <a:prstGeom prst="rect">
               <a:avLst/>
@@ -15179,8 +15179,8 @@
           </p:nvSpPr>
           <p:spPr>
             <a:xfrm>
-              <a:off x="5203695" y="2260293"/>
-              <a:ext cx="1171150" cy="193333"/>
+              <a:off x="5207000" y="2255308"/>
+              <a:ext cx="1166813" cy="192617"/>
             </a:xfrm>
             <a:prstGeom prst="rect">
               <a:avLst/>
@@ -15199,7 +15199,7 @@
                 </a:lnSpc>
               </a:pPr>
               <a:r>
-                <a:rPr sz="1171" b="1" lang="ko-KR">
+                <a:rPr sz="1166" b="1" lang="ko-KR">
                   <a:solidFill>
                     <a:srgbClr val="00A4A6"/>
                   </a:solidFill>
@@ -15220,14 +15220,14 @@
           </p:nvSpPr>
           <p:spPr>
             <a:xfrm>
-              <a:off x="6478416" y="2210367"/>
-              <a:ext cx="1742119" cy="1104758"/>
-            </a:xfrm>
-            <a:prstGeom prst="rect">
-              <a:avLst/>
-            </a:prstGeom>
-            <a:noFill/>
-            <a:ln w="15934">
+              <a:off x="6434667" y="2205567"/>
+              <a:ext cx="1608667" cy="1100667"/>
+            </a:xfrm>
+            <a:prstGeom prst="rect">
+              <a:avLst/>
+            </a:prstGeom>
+            <a:noFill/>
+            <a:ln w="15875">
               <a:solidFill>
                 <a:srgbClr val="00A4A6"/>
               </a:solidFill>
@@ -15265,8 +15265,8 @@
           </p:blipFill>
           <p:spPr>
             <a:xfrm>
-              <a:off x="6478416" y="2210367"/>
-              <a:ext cx="254944" cy="254944"/>
+              <a:off x="6434667" y="2205567"/>
+              <a:ext cx="254000" cy="254000"/>
             </a:xfrm>
             <a:prstGeom prst="rect">
               <a:avLst/>
@@ -15281,8 +15281,8 @@
           </p:nvSpPr>
           <p:spPr>
             <a:xfrm>
-              <a:off x="6818342" y="2260293"/>
-              <a:ext cx="1682366" cy="193333"/>
+              <a:off x="6773333" y="2255308"/>
+              <a:ext cx="1676135" cy="192617"/>
             </a:xfrm>
             <a:prstGeom prst="rect">
               <a:avLst/>
@@ -15301,7 +15301,7 @@
                 </a:lnSpc>
               </a:pPr>
               <a:r>
-                <a:rPr sz="1171" b="1" lang="ko-KR">
+                <a:rPr sz="1166" b="1" lang="ko-KR">
                   <a:solidFill>
                     <a:srgbClr val="00A4A6"/>
                   </a:solidFill>
@@ -15322,14 +15322,14 @@
           </p:nvSpPr>
           <p:spPr>
             <a:xfrm>
-              <a:off x="8390498" y="2210367"/>
-              <a:ext cx="1572156" cy="1104758"/>
-            </a:xfrm>
-            <a:prstGeom prst="rect">
-              <a:avLst/>
-            </a:prstGeom>
-            <a:noFill/>
-            <a:ln w="15934">
+              <a:off x="8170333" y="2205567"/>
+              <a:ext cx="1481667" cy="1100667"/>
+            </a:xfrm>
+            <a:prstGeom prst="rect">
+              <a:avLst/>
+            </a:prstGeom>
+            <a:noFill/>
+            <a:ln w="15875">
               <a:solidFill>
                 <a:srgbClr val="7AA116"/>
               </a:solidFill>
@@ -15367,8 +15367,8 @@
           </p:blipFill>
           <p:spPr>
             <a:xfrm>
-              <a:off x="8390498" y="2210367"/>
-              <a:ext cx="254944" cy="254944"/>
+              <a:off x="8170333" y="2205567"/>
+              <a:ext cx="254000" cy="254000"/>
             </a:xfrm>
             <a:prstGeom prst="rect">
               <a:avLst/>
@@ -15383,8 +15383,8 @@
           </p:nvSpPr>
           <p:spPr>
             <a:xfrm>
-              <a:off x="8730424" y="2260293"/>
-              <a:ext cx="1477880" cy="193333"/>
+              <a:off x="8509000" y="2255308"/>
+              <a:ext cx="1472406" cy="192617"/>
             </a:xfrm>
             <a:prstGeom prst="rect">
               <a:avLst/>
@@ -15403,7 +15403,7 @@
                 </a:lnSpc>
               </a:pPr>
               <a:r>
-                <a:rPr sz="1171" b="1" lang="ko-KR">
+                <a:rPr sz="1166" b="1" lang="ko-KR">
                   <a:solidFill>
                     <a:srgbClr val="7AA116"/>
                   </a:solidFill>
@@ -15424,14 +15424,14 @@
           </p:nvSpPr>
           <p:spPr>
             <a:xfrm>
-              <a:off x="4863770" y="4823545"/>
-              <a:ext cx="1444684" cy="1104758"/>
-            </a:xfrm>
-            <a:prstGeom prst="rect">
-              <a:avLst/>
-            </a:prstGeom>
-            <a:noFill/>
-            <a:ln w="15934">
+              <a:off x="4868333" y="4809067"/>
+              <a:ext cx="1439333" cy="1100667"/>
+            </a:xfrm>
+            <a:prstGeom prst="rect">
+              <a:avLst/>
+            </a:prstGeom>
+            <a:noFill/>
+            <a:ln w="15875">
               <a:solidFill>
                 <a:srgbClr val="00A4A6"/>
               </a:solidFill>
@@ -15469,8 +15469,8 @@
           </p:blipFill>
           <p:spPr>
             <a:xfrm>
-              <a:off x="4863770" y="4823545"/>
-              <a:ext cx="254944" cy="254944"/>
+              <a:off x="4868333" y="4809067"/>
+              <a:ext cx="254000" cy="254000"/>
             </a:xfrm>
             <a:prstGeom prst="rect">
               <a:avLst/>
@@ -15485,8 +15485,8 @@
           </p:nvSpPr>
           <p:spPr>
             <a:xfrm>
-              <a:off x="5203695" y="4873472"/>
-              <a:ext cx="1171150" cy="193333"/>
+              <a:off x="5207000" y="4858808"/>
+              <a:ext cx="1166813" cy="192617"/>
             </a:xfrm>
             <a:prstGeom prst="rect">
               <a:avLst/>
@@ -15505,7 +15505,7 @@
                 </a:lnSpc>
               </a:pPr>
               <a:r>
-                <a:rPr sz="1171" b="1" lang="ko-KR">
+                <a:rPr sz="1166" b="1" lang="ko-KR">
                   <a:solidFill>
                     <a:srgbClr val="00A4A6"/>
                   </a:solidFill>
@@ -15526,14 +15526,14 @@
           </p:nvSpPr>
           <p:spPr>
             <a:xfrm>
-              <a:off x="6478416" y="4823545"/>
-              <a:ext cx="1742119" cy="1104758"/>
-            </a:xfrm>
-            <a:prstGeom prst="rect">
-              <a:avLst/>
-            </a:prstGeom>
-            <a:noFill/>
-            <a:ln w="15934">
+              <a:off x="6434667" y="4809067"/>
+              <a:ext cx="1608667" cy="1100667"/>
+            </a:xfrm>
+            <a:prstGeom prst="rect">
+              <a:avLst/>
+            </a:prstGeom>
+            <a:noFill/>
+            <a:ln w="15875">
               <a:solidFill>
                 <a:srgbClr val="00A4A6"/>
               </a:solidFill>
@@ -15571,8 +15571,8 @@
           </p:blipFill>
           <p:spPr>
             <a:xfrm>
-              <a:off x="6478416" y="4823545"/>
-              <a:ext cx="254944" cy="254944"/>
+              <a:off x="6434667" y="4809067"/>
+              <a:ext cx="254000" cy="254000"/>
             </a:xfrm>
             <a:prstGeom prst="rect">
               <a:avLst/>
@@ -15587,8 +15587,8 @@
           </p:nvSpPr>
           <p:spPr>
             <a:xfrm>
-              <a:off x="6818342" y="4873472"/>
-              <a:ext cx="1682366" cy="193333"/>
+              <a:off x="6773333" y="4858808"/>
+              <a:ext cx="1676135" cy="192617"/>
             </a:xfrm>
             <a:prstGeom prst="rect">
               <a:avLst/>
@@ -15607,7 +15607,7 @@
                 </a:lnSpc>
               </a:pPr>
               <a:r>
-                <a:rPr sz="1171" b="1" lang="ko-KR">
+                <a:rPr sz="1166" b="1" lang="ko-KR">
                   <a:solidFill>
                     <a:srgbClr val="00A4A6"/>
                   </a:solidFill>
@@ -15628,14 +15628,14 @@
           </p:nvSpPr>
           <p:spPr>
             <a:xfrm>
-              <a:off x="8390498" y="4823545"/>
-              <a:ext cx="1572156" cy="1104758"/>
-            </a:xfrm>
-            <a:prstGeom prst="rect">
-              <a:avLst/>
-            </a:prstGeom>
-            <a:noFill/>
-            <a:ln w="15934">
+              <a:off x="8170333" y="4809067"/>
+              <a:ext cx="1481667" cy="1100667"/>
+            </a:xfrm>
+            <a:prstGeom prst="rect">
+              <a:avLst/>
+            </a:prstGeom>
+            <a:noFill/>
+            <a:ln w="15875">
               <a:solidFill>
                 <a:srgbClr val="7AA116"/>
               </a:solidFill>
@@ -15673,8 +15673,8 @@
           </p:blipFill>
           <p:spPr>
             <a:xfrm>
-              <a:off x="8390498" y="4823545"/>
-              <a:ext cx="254944" cy="254944"/>
+              <a:off x="8170333" y="4809067"/>
+              <a:ext cx="254000" cy="254000"/>
             </a:xfrm>
             <a:prstGeom prst="rect">
               <a:avLst/>
@@ -15689,8 +15689,8 @@
           </p:nvSpPr>
           <p:spPr>
             <a:xfrm>
-              <a:off x="8730424" y="4873472"/>
-              <a:ext cx="1477880" cy="193333"/>
+              <a:off x="8509000" y="4858808"/>
+              <a:ext cx="1472406" cy="192617"/>
             </a:xfrm>
             <a:prstGeom prst="rect">
               <a:avLst/>
@@ -15709,7 +15709,7 @@
                 </a:lnSpc>
               </a:pPr>
               <a:r>
-                <a:rPr sz="1171" b="1" lang="ko-KR">
+                <a:rPr sz="1166" b="1" lang="ko-KR">
                   <a:solidFill>
                     <a:srgbClr val="7AA116"/>
                   </a:solidFill>
@@ -15744,8 +15744,8 @@
           </p:blipFill>
           <p:spPr>
             <a:xfrm>
-              <a:off x="5331167" y="2507801"/>
-              <a:ext cx="509888" cy="509888"/>
+              <a:off x="5334000" y="2501900"/>
+              <a:ext cx="508000" cy="508000"/>
             </a:xfrm>
             <a:prstGeom prst="rect">
               <a:avLst/>
@@ -15760,8 +15760,8 @@
           </p:nvSpPr>
           <p:spPr>
             <a:xfrm>
-              <a:off x="5153901" y="3067617"/>
-              <a:ext cx="864420" cy="193333"/>
+              <a:off x="5157391" y="3059642"/>
+              <a:ext cx="861219" cy="192617"/>
             </a:xfrm>
             <a:prstGeom prst="rect">
               <a:avLst/>
@@ -15780,7 +15780,7 @@
                 </a:lnSpc>
               </a:pPr>
               <a:r>
-                <a:rPr sz="1171" b="0" lang="ko-KR">
+                <a:rPr sz="1166" b="0" lang="ko-KR">
                   <a:solidFill>
                     <a:srgbClr val="232F3E"/>
                   </a:solidFill>
@@ -15815,8 +15815,8 @@
           </p:blipFill>
           <p:spPr>
             <a:xfrm>
-              <a:off x="7094532" y="2507801"/>
-              <a:ext cx="509888" cy="509888"/>
+              <a:off x="6985000" y="2501900"/>
+              <a:ext cx="508000" cy="508000"/>
             </a:xfrm>
             <a:prstGeom prst="rect">
               <a:avLst/>
@@ -15831,8 +15831,8 @@
           </p:nvSpPr>
           <p:spPr>
             <a:xfrm>
-              <a:off x="6406049" y="3067617"/>
-              <a:ext cx="1886853" cy="193333"/>
+              <a:off x="6299068" y="3059642"/>
+              <a:ext cx="1879865" cy="192617"/>
             </a:xfrm>
             <a:prstGeom prst="rect">
               <a:avLst/>
@@ -15851,7 +15851,7 @@
                 </a:lnSpc>
               </a:pPr>
               <a:r>
-                <a:rPr sz="1171" b="0" lang="ko-KR">
+                <a:rPr sz="1166" b="0" lang="ko-KR">
                   <a:solidFill>
                     <a:srgbClr val="232F3E"/>
                   </a:solidFill>
@@ -15886,8 +15886,8 @@
           </p:blipFill>
           <p:spPr>
             <a:xfrm>
-              <a:off x="8921632" y="2507801"/>
-              <a:ext cx="509888" cy="509888"/>
+              <a:off x="8657167" y="2501900"/>
+              <a:ext cx="508000" cy="508000"/>
             </a:xfrm>
             <a:prstGeom prst="rect">
               <a:avLst/>
@@ -15902,8 +15902,8 @@
           </p:nvSpPr>
           <p:spPr>
             <a:xfrm>
-              <a:off x="8539880" y="3067617"/>
-              <a:ext cx="1273393" cy="193333"/>
+              <a:off x="8276828" y="3059642"/>
+              <a:ext cx="1268677" cy="192617"/>
             </a:xfrm>
             <a:prstGeom prst="rect">
               <a:avLst/>
@@ -15922,7 +15922,7 @@
                 </a:lnSpc>
               </a:pPr>
               <a:r>
-                <a:rPr sz="1171" b="0" lang="ko-KR">
+                <a:rPr sz="1166" b="0" lang="ko-KR">
                   <a:solidFill>
                     <a:srgbClr val="232F3E"/>
                   </a:solidFill>
@@ -15957,8 +15957,8 @@
           </p:blipFill>
           <p:spPr>
             <a:xfrm>
-              <a:off x="5331167" y="5120980"/>
-              <a:ext cx="509888" cy="509888"/>
+              <a:off x="5334000" y="5105400"/>
+              <a:ext cx="508000" cy="508000"/>
             </a:xfrm>
             <a:prstGeom prst="rect">
               <a:avLst/>
@@ -15973,8 +15973,8 @@
           </p:nvSpPr>
           <p:spPr>
             <a:xfrm>
-              <a:off x="5153901" y="5680795"/>
-              <a:ext cx="864420" cy="193333"/>
+              <a:off x="5157391" y="5663142"/>
+              <a:ext cx="861219" cy="192617"/>
             </a:xfrm>
             <a:prstGeom prst="rect">
               <a:avLst/>
@@ -15993,7 +15993,7 @@
                 </a:lnSpc>
               </a:pPr>
               <a:r>
-                <a:rPr sz="1171" b="0" lang="ko-KR">
+                <a:rPr sz="1166" b="0" lang="ko-KR">
                   <a:solidFill>
                     <a:srgbClr val="232F3E"/>
                   </a:solidFill>
@@ -16028,8 +16028,8 @@
           </p:blipFill>
           <p:spPr>
             <a:xfrm>
-              <a:off x="7094532" y="5120980"/>
-              <a:ext cx="509888" cy="509888"/>
+              <a:off x="6985000" y="5105400"/>
+              <a:ext cx="508000" cy="508000"/>
             </a:xfrm>
             <a:prstGeom prst="rect">
               <a:avLst/>
@@ -16044,8 +16044,8 @@
           </p:nvSpPr>
           <p:spPr>
             <a:xfrm>
-              <a:off x="6406049" y="5680795"/>
-              <a:ext cx="1886853" cy="193333"/>
+              <a:off x="6299068" y="5663142"/>
+              <a:ext cx="1879865" cy="192617"/>
             </a:xfrm>
             <a:prstGeom prst="rect">
               <a:avLst/>
@@ -16064,7 +16064,7 @@
                 </a:lnSpc>
               </a:pPr>
               <a:r>
-                <a:rPr sz="1171" b="0" lang="ko-KR">
+                <a:rPr sz="1166" b="0" lang="ko-KR">
                   <a:solidFill>
                     <a:srgbClr val="232F3E"/>
                   </a:solidFill>
@@ -16099,8 +16099,8 @@
           </p:blipFill>
           <p:spPr>
             <a:xfrm>
-              <a:off x="8921632" y="5120980"/>
-              <a:ext cx="509888" cy="509888"/>
+              <a:off x="8657167" y="5105400"/>
+              <a:ext cx="508000" cy="508000"/>
             </a:xfrm>
             <a:prstGeom prst="rect">
               <a:avLst/>
@@ -16115,8 +16115,8 @@
           </p:nvSpPr>
           <p:spPr>
             <a:xfrm>
-              <a:off x="8539880" y="5680795"/>
-              <a:ext cx="1273393" cy="193333"/>
+              <a:off x="8276828" y="5663142"/>
+              <a:ext cx="1268677" cy="192617"/>
             </a:xfrm>
             <a:prstGeom prst="rect">
               <a:avLst/>
@@ -16135,7 +16135,7 @@
                 </a:lnSpc>
               </a:pPr>
               <a:r>
-                <a:rPr sz="1171" b="0" lang="ko-KR">
+                <a:rPr sz="1166" b="0" lang="ko-KR">
                   <a:solidFill>
                     <a:srgbClr val="232F3E"/>
                   </a:solidFill>
@@ -16170,8 +16170,8 @@
           </p:blipFill>
           <p:spPr>
             <a:xfrm>
-              <a:off x="7094532" y="3740032"/>
-              <a:ext cx="509888" cy="509888"/>
+              <a:off x="6985000" y="3729567"/>
+              <a:ext cx="508000" cy="508000"/>
             </a:xfrm>
             <a:prstGeom prst="rect">
               <a:avLst/>
@@ -16186,8 +16186,8 @@
           </p:nvSpPr>
           <p:spPr>
             <a:xfrm>
-              <a:off x="6252684" y="4299847"/>
-              <a:ext cx="2193583" cy="193333"/>
+              <a:off x="6146271" y="4287308"/>
+              <a:ext cx="2185458" cy="192617"/>
             </a:xfrm>
             <a:prstGeom prst="rect">
               <a:avLst/>
@@ -16206,7 +16206,7 @@
                 </a:lnSpc>
               </a:pPr>
               <a:r>
-                <a:rPr sz="1171" b="0" lang="ko-KR">
+                <a:rPr sz="1166" b="0" lang="ko-KR">
                   <a:solidFill>
                     <a:srgbClr val="232F3E"/>
                   </a:solidFill>
@@ -16227,8 +16227,8 @@
           </p:nvSpPr>
           <p:spPr>
             <a:xfrm>
-              <a:off x="10047636" y="3740032"/>
-              <a:ext cx="509888" cy="743587"/>
+              <a:off x="10117667" y="3729567"/>
+              <a:ext cx="508000" cy="740833"/>
             </a:xfrm>
             <a:prstGeom prst="rect">
               <a:avLst/>
@@ -16270,8 +16270,8 @@
           </p:blipFill>
           <p:spPr>
             <a:xfrm>
-              <a:off x="10047636" y="3740032"/>
-              <a:ext cx="509888" cy="509888"/>
+              <a:off x="10117667" y="3729567"/>
+              <a:ext cx="508000" cy="508000"/>
             </a:xfrm>
             <a:prstGeom prst="rect">
               <a:avLst/>
@@ -16286,8 +16286,8 @@
           </p:nvSpPr>
           <p:spPr>
             <a:xfrm>
-              <a:off x="10074856" y="4299847"/>
-              <a:ext cx="455447" cy="193333"/>
+              <a:off x="10144786" y="4287308"/>
+              <a:ext cx="453760" cy="192617"/>
             </a:xfrm>
             <a:prstGeom prst="rect">
               <a:avLst/>
@@ -16306,7 +16306,7 @@
                 </a:lnSpc>
               </a:pPr>
               <a:r>
-                <a:rPr sz="1171" b="0" lang="ko-KR">
+                <a:rPr sz="1166" b="0" lang="ko-KR">
                   <a:solidFill>
                     <a:srgbClr val="232F3E"/>
                   </a:solidFill>
@@ -16327,8 +16327,8 @@
           </p:nvSpPr>
           <p:spPr>
             <a:xfrm>
-              <a:off x="4077691" y="2762746"/>
-              <a:ext cx="1210986" cy="1147249"/>
+              <a:off x="4085167" y="2755900"/>
+              <a:ext cx="1206500" cy="1143000"/>
             </a:xfrm>
             <a:custGeom>
               <a:avLst/>
@@ -16337,24 +16337,24 @@
               <a:cxnLst/>
               <a:rect l="l" t="t" r="r" b="b"/>
               <a:pathLst>
-                <a:path w="1210986" h="1147249">
+                <a:path w="1206500" h="1143000">
                   <a:moveTo>
-                    <a:pt x="0" y="1147249"/>
+                    <a:pt x="0" y="1143000"/>
                   </a:moveTo>
                   <a:lnTo>
-                    <a:pt x="318681" y="1147249"/>
+                    <a:pt x="317500" y="1143000"/>
                   </a:lnTo>
                   <a:lnTo>
-                    <a:pt x="318681" y="0"/>
+                    <a:pt x="317500" y="0"/>
                   </a:lnTo>
                   <a:lnTo>
-                    <a:pt x="1210986" y="0"/>
+                    <a:pt x="1206500" y="0"/>
                   </a:lnTo>
                 </a:path>
               </a:pathLst>
             </a:custGeom>
             <a:noFill/>
-            <a:ln w="15934">
+            <a:ln w="15875">
               <a:solidFill>
                 <a:srgbClr val="232F3E"/>
               </a:solidFill>
@@ -16380,8 +16380,8 @@
           </p:nvSpPr>
           <p:spPr>
             <a:xfrm>
-              <a:off x="4077691" y="4079958"/>
-              <a:ext cx="1210986" cy="1295966"/>
+              <a:off x="4085167" y="4068233"/>
+              <a:ext cx="1206500" cy="1291167"/>
             </a:xfrm>
             <a:custGeom>
               <a:avLst/>
@@ -16390,24 +16390,24 @@
               <a:cxnLst/>
               <a:rect l="l" t="t" r="r" b="b"/>
               <a:pathLst>
-                <a:path w="1210986" h="1295966">
+                <a:path w="1206500" h="1291167">
                   <a:moveTo>
                     <a:pt x="0" y="0"/>
                   </a:moveTo>
                   <a:lnTo>
-                    <a:pt x="318681" y="0"/>
+                    <a:pt x="317500" y="0"/>
                   </a:lnTo>
                   <a:lnTo>
-                    <a:pt x="318681" y="1295966"/>
+                    <a:pt x="317500" y="1291167"/>
                   </a:lnTo>
                   <a:lnTo>
-                    <a:pt x="1210986" y="1295966"/>
+                    <a:pt x="1206500" y="1291167"/>
                   </a:lnTo>
                 </a:path>
               </a:pathLst>
             </a:custGeom>
             <a:noFill/>
-            <a:ln w="15934">
+            <a:ln w="15875">
               <a:solidFill>
                 <a:srgbClr val="232F3E"/>
               </a:solidFill>
@@ -16433,13 +16433,13 @@
           </p:nvCxnSpPr>
           <p:spPr>
             <a:xfrm>
-              <a:off x="5883546" y="2762746"/>
-              <a:ext cx="1168495" cy="0"/>
+              <a:off x="5884333" y="2755900"/>
+              <a:ext cx="1058334" cy="0"/>
             </a:xfrm>
             <a:prstGeom prst="line">
               <a:avLst/>
             </a:prstGeom>
-            <a:ln w="15934">
+            <a:ln w="15875">
               <a:solidFill>
                 <a:srgbClr val="232F3E"/>
               </a:solidFill>
@@ -16458,13 +16458,13 @@
           </p:nvCxnSpPr>
           <p:spPr>
             <a:xfrm>
-              <a:off x="5883546" y="5375924"/>
-              <a:ext cx="1168495" cy="0"/>
+              <a:off x="5884333" y="5359400"/>
+              <a:ext cx="1058334" cy="0"/>
             </a:xfrm>
             <a:prstGeom prst="line">
               <a:avLst/>
             </a:prstGeom>
-            <a:ln w="15934">
+            <a:ln w="15875">
               <a:solidFill>
                 <a:srgbClr val="232F3E"/>
               </a:solidFill>
@@ -16483,13 +16483,13 @@
           </p:nvCxnSpPr>
           <p:spPr>
             <a:xfrm>
-              <a:off x="7646911" y="2762746"/>
-              <a:ext cx="1232230" cy="0"/>
+              <a:off x="7535333" y="2755900"/>
+              <a:ext cx="1079500" cy="0"/>
             </a:xfrm>
             <a:prstGeom prst="line">
               <a:avLst/>
             </a:prstGeom>
-            <a:ln w="15934">
+            <a:ln w="15875">
               <a:solidFill>
                 <a:srgbClr val="232F3E"/>
               </a:solidFill>
@@ -16507,13 +16507,13 @@
           </p:nvCxnSpPr>
           <p:spPr>
             <a:xfrm>
-              <a:off x="7646911" y="5375924"/>
-              <a:ext cx="1232230" cy="0"/>
+              <a:off x="7535333" y="5359400"/>
+              <a:ext cx="1079500" cy="0"/>
             </a:xfrm>
             <a:prstGeom prst="line">
               <a:avLst/>
             </a:prstGeom>
-            <a:ln w="15934">
+            <a:ln w="15875">
               <a:solidFill>
                 <a:srgbClr val="232F3E"/>
               </a:solidFill>
@@ -16531,8 +16531,8 @@
           </p:nvSpPr>
           <p:spPr>
             <a:xfrm>
-              <a:off x="9474011" y="2762746"/>
-              <a:ext cx="531134" cy="1232230"/>
+              <a:off x="9207500" y="2755900"/>
+              <a:ext cx="867833" cy="1227667"/>
             </a:xfrm>
             <a:custGeom>
               <a:avLst/>
@@ -16541,24 +16541,24 @@
               <a:cxnLst/>
               <a:rect l="l" t="t" r="r" b="b"/>
               <a:pathLst>
-                <a:path w="531134" h="1232230">
+                <a:path w="867833" h="1227667">
                   <a:moveTo>
                     <a:pt x="0" y="0"/>
                   </a:moveTo>
                   <a:lnTo>
-                    <a:pt x="403662" y="0"/>
+                    <a:pt x="656167" y="0"/>
                   </a:lnTo>
                   <a:lnTo>
-                    <a:pt x="403662" y="1232230"/>
+                    <a:pt x="656167" y="1227667"/>
                   </a:lnTo>
                   <a:lnTo>
-                    <a:pt x="531134" y="1232230"/>
+                    <a:pt x="867833" y="1227667"/>
                   </a:lnTo>
                 </a:path>
               </a:pathLst>
             </a:custGeom>
             <a:noFill/>
-            <a:ln w="15934">
+            <a:ln w="15875">
               <a:solidFill>
                 <a:srgbClr val="232F3E"/>
               </a:solidFill>
@@ -16583,8 +16583,8 @@
           </p:nvSpPr>
           <p:spPr>
             <a:xfrm>
-              <a:off x="9474011" y="3994976"/>
-              <a:ext cx="403662" cy="1380948"/>
+              <a:off x="9207500" y="3983567"/>
+              <a:ext cx="656167" cy="1375833"/>
             </a:xfrm>
             <a:custGeom>
               <a:avLst/>
@@ -16593,21 +16593,21 @@
               <a:cxnLst/>
               <a:rect l="l" t="t" r="r" b="b"/>
               <a:pathLst>
-                <a:path w="403662" h="1380948">
+                <a:path w="656167" h="1375833">
                   <a:moveTo>
-                    <a:pt x="0" y="1380948"/>
+                    <a:pt x="0" y="1375833"/>
                   </a:moveTo>
                   <a:lnTo>
-                    <a:pt x="403662" y="1380948"/>
+                    <a:pt x="656167" y="1375833"/>
                   </a:lnTo>
                   <a:lnTo>
-                    <a:pt x="403662" y="0"/>
+                    <a:pt x="656167" y="0"/>
                   </a:lnTo>
                 </a:path>
               </a:pathLst>
             </a:custGeom>
             <a:noFill/>
-            <a:ln w="15934">
+            <a:ln w="15875">
               <a:solidFill>
                 <a:srgbClr val="232F3E"/>
               </a:solidFill>
@@ -16645,8 +16645,8 @@
           </p:blipFill>
           <p:spPr>
             <a:xfrm>
-              <a:off x="11237375" y="3740032"/>
-              <a:ext cx="509888" cy="509888"/>
+              <a:off x="11303000" y="3729567"/>
+              <a:ext cx="508000" cy="508000"/>
             </a:xfrm>
             <a:prstGeom prst="rect">
               <a:avLst/>
@@ -16661,8 +16661,8 @@
           </p:nvSpPr>
           <p:spPr>
             <a:xfrm>
-              <a:off x="11008988" y="4299847"/>
-              <a:ext cx="966664" cy="193333"/>
+              <a:off x="11075458" y="4287308"/>
+              <a:ext cx="963083" cy="192617"/>
             </a:xfrm>
             <a:prstGeom prst="rect">
               <a:avLst/>
@@ -16681,7 +16681,7 @@
                 </a:lnSpc>
               </a:pPr>
               <a:r>
-                <a:rPr sz="1171" b="0" lang="ko-KR">
+                <a:rPr sz="1166" b="0" lang="ko-KR">
                   <a:solidFill>
                     <a:srgbClr val="232F3E"/>
                   </a:solidFill>
@@ -16702,13 +16702,13 @@
           </p:nvCxnSpPr>
           <p:spPr>
             <a:xfrm>
-              <a:off x="10600015" y="3994976"/>
-              <a:ext cx="594870" cy="0"/>
+              <a:off x="10668000" y="3983567"/>
+              <a:ext cx="592667" cy="0"/>
             </a:xfrm>
             <a:prstGeom prst="line">
               <a:avLst/>
             </a:prstGeom>
-            <a:ln w="15934">
+            <a:ln w="15875">
               <a:solidFill>
                 <a:srgbClr val="232F3E"/>
               </a:solidFill>
@@ -16726,8 +16726,8 @@
           </p:nvSpPr>
           <p:spPr>
             <a:xfrm>
-              <a:off x="3249123" y="3463842"/>
-              <a:ext cx="212454" cy="212454"/>
+              <a:off x="3259667" y="3454400"/>
+              <a:ext cx="211667" cy="211667"/>
             </a:xfrm>
             <a:prstGeom prst="ellipse">
               <a:avLst/>
@@ -16755,8 +16755,8 @@
           </p:nvSpPr>
           <p:spPr>
             <a:xfrm>
-              <a:off x="3247795" y="3491461"/>
-              <a:ext cx="215109" cy="165714"/>
+              <a:off x="3258344" y="3481917"/>
+              <a:ext cx="214312" cy="165100"/>
             </a:xfrm>
             <a:prstGeom prst="rect">
               <a:avLst/>
@@ -16775,7 +16775,7 @@
                 </a:lnSpc>
               </a:pPr>
               <a:r>
-                <a:rPr sz="1003" b="1" lang="ko-KR">
+                <a:rPr sz="1000" b="1" lang="ko-KR">
                   <a:solidFill>
                     <a:srgbClr val="FFFFFF"/>
                   </a:solidFill>
@@ -16796,8 +16796,8 @@
           </p:nvSpPr>
           <p:spPr>
             <a:xfrm>
-              <a:off x="4120182" y="3463842"/>
-              <a:ext cx="212454" cy="212454"/>
+              <a:off x="4127500" y="3454400"/>
+              <a:ext cx="211667" cy="211667"/>
             </a:xfrm>
             <a:prstGeom prst="ellipse">
               <a:avLst/>
@@ -16825,8 +16825,8 @@
           </p:nvSpPr>
           <p:spPr>
             <a:xfrm>
-              <a:off x="4118854" y="3491461"/>
-              <a:ext cx="215109" cy="165714"/>
+              <a:off x="4126177" y="3481917"/>
+              <a:ext cx="214312" cy="165100"/>
             </a:xfrm>
             <a:prstGeom prst="rect">
               <a:avLst/>
@@ -16845,7 +16845,7 @@
                 </a:lnSpc>
               </a:pPr>
               <a:r>
-                <a:rPr sz="1003" b="1" lang="ko-KR">
+                <a:rPr sz="1000" b="1" lang="ko-KR">
                   <a:solidFill>
                     <a:srgbClr val="FFFFFF"/>
                   </a:solidFill>
@@ -16866,8 +16866,8 @@
           </p:nvSpPr>
           <p:spPr>
             <a:xfrm>
-              <a:off x="7731892" y="3463842"/>
-              <a:ext cx="212454" cy="212454"/>
+              <a:off x="8001000" y="3454400"/>
+              <a:ext cx="211667" cy="211667"/>
             </a:xfrm>
             <a:prstGeom prst="ellipse">
               <a:avLst/>
@@ -16895,8 +16895,8 @@
           </p:nvSpPr>
           <p:spPr>
             <a:xfrm>
-              <a:off x="7730564" y="3491461"/>
-              <a:ext cx="215109" cy="165714"/>
+              <a:off x="7999677" y="3481917"/>
+              <a:ext cx="214312" cy="165100"/>
             </a:xfrm>
             <a:prstGeom prst="rect">
               <a:avLst/>
@@ -16915,7 +16915,7 @@
                 </a:lnSpc>
               </a:pPr>
               <a:r>
-                <a:rPr sz="1003" b="1" lang="ko-KR">
+                <a:rPr sz="1000" b="1" lang="ko-KR">
                   <a:solidFill>
                     <a:srgbClr val="FFFFFF"/>
                   </a:solidFill>
@@ -16936,8 +16936,8 @@
           </p:nvSpPr>
           <p:spPr>
             <a:xfrm>
-              <a:off x="9474011" y="3463842"/>
-              <a:ext cx="212454" cy="212454"/>
+              <a:off x="9419167" y="3454400"/>
+              <a:ext cx="211667" cy="211667"/>
             </a:xfrm>
             <a:prstGeom prst="ellipse">
               <a:avLst/>
@@ -16965,8 +16965,8 @@
           </p:nvSpPr>
           <p:spPr>
             <a:xfrm>
-              <a:off x="9472683" y="3491461"/>
-              <a:ext cx="215109" cy="165714"/>
+              <a:off x="9417844" y="3481917"/>
+              <a:ext cx="214312" cy="165100"/>
             </a:xfrm>
             <a:prstGeom prst="rect">
               <a:avLst/>
@@ -16985,7 +16985,7 @@
                 </a:lnSpc>
               </a:pPr>
               <a:r>
-                <a:rPr sz="1003" b="1" lang="ko-KR">
+                <a:rPr sz="1000" b="1" lang="ko-KR">
                   <a:solidFill>
                     <a:srgbClr val="FFFFFF"/>
                   </a:solidFill>
@@ -17006,8 +17006,8 @@
           </p:nvSpPr>
           <p:spPr>
             <a:xfrm>
-              <a:off x="-715791" y="6189621"/>
-              <a:ext cx="11273316" cy="165714"/>
+              <a:off x="381000" y="6424083"/>
+              <a:ext cx="11231563" cy="165100"/>
             </a:xfrm>
             <a:prstGeom prst="rect">
               <a:avLst/>
@@ -17020,13 +17020,13 @@
             </a:bodyPr>
             <a:lstStyle/>
             <a:p>
-              <a:pPr algn="r">
+              <a:pPr algn="l">
                 <a:lnSpc>
                   <a:spcPct val="100000"/>
                 </a:lnSpc>
               </a:pPr>
               <a:r>
-                <a:rPr sz="1003" b="0" lang="ko-KR">
+                <a:rPr sz="1000" b="0" lang="ko-KR">
                   <a:solidFill>
                     <a:srgbClr val="545B64"/>
                   </a:solidFill>

--- a/docs/examples/reference-architectures.pptx
+++ b/docs/examples/reference-architectures.pptx
@@ -3136,10 +3136,10 @@
         </p:nvGrpSpPr>
         <p:grpSpPr>
           <a:xfrm>
-            <a:off x="412089" y="977900"/>
-            <a:ext cx="11335411" cy="5588000"/>
-            <a:chOff x="412089" y="977900"/>
-            <a:chExt cx="11335411" cy="5588000"/>
+            <a:off x="750755" y="956733"/>
+            <a:ext cx="10658078" cy="5674784"/>
+            <a:chOff x="750755" y="956733"/>
+            <a:chExt cx="10658078" cy="5674784"/>
           </a:xfrm>
         </p:grpSpPr>
         <p:pic>
@@ -3164,7 +3164,7 @@
           </p:blipFill>
           <p:spPr>
             <a:xfrm>
-              <a:off x="486833" y="3845983"/>
+              <a:off x="825500" y="3666067"/>
               <a:ext cx="508000" cy="508000"/>
             </a:xfrm>
             <a:prstGeom prst="rect">
@@ -3180,7 +3180,7 @@
           </p:nvSpPr>
           <p:spPr>
             <a:xfrm>
-              <a:off x="412089" y="4403725"/>
+              <a:off x="750755" y="4223808"/>
               <a:ext cx="657490" cy="192617"/>
             </a:xfrm>
             <a:prstGeom prst="rect">
@@ -3221,8 +3221,8 @@
           </p:nvSpPr>
           <p:spPr>
             <a:xfrm>
-              <a:off x="1714500" y="977900"/>
-              <a:ext cx="10033000" cy="5588000"/>
+              <a:off x="2137833" y="956733"/>
+              <a:ext cx="9271000" cy="5439833"/>
             </a:xfrm>
             <a:prstGeom prst="rect">
               <a:avLst/>
@@ -3266,7 +3266,7 @@
           </p:blipFill>
           <p:spPr>
             <a:xfrm>
-              <a:off x="1714500" y="977900"/>
+              <a:off x="2137833" y="956733"/>
               <a:ext cx="338667" cy="338667"/>
             </a:xfrm>
             <a:prstGeom prst="rect">
@@ -3282,7 +3282,7 @@
           </p:nvSpPr>
           <p:spPr>
             <a:xfrm>
-              <a:off x="2159000" y="1059921"/>
+              <a:off x="2582333" y="1038754"/>
               <a:ext cx="1141016" cy="206375"/>
             </a:xfrm>
             <a:prstGeom prst="rect">
@@ -3315,42 +3315,9 @@
             </a:p>
           </p:txBody>
         </p:sp>
-        <p:sp>
-          <p:nvSpPr>
-            <p:cNvPr id="9" name="Rectangle 8"/>
-            <p:cNvSpPr/>
-            <p:nvPr/>
-          </p:nvSpPr>
-          <p:spPr>
-            <a:xfrm>
-              <a:off x="1883833" y="1358900"/>
-              <a:ext cx="9694333" cy="5122333"/>
-            </a:xfrm>
-            <a:prstGeom prst="rect">
-              <a:avLst/>
-            </a:prstGeom>
-            <a:noFill/>
-            <a:ln w="21167">
-              <a:solidFill>
-                <a:srgbClr val="00A4A6"/>
-              </a:solidFill>
-              <a:custDash>
-                <a:ds d="150000" sp="150000"/>
-              </a:custDash>
-              <a:miter lim="800000"/>
-            </a:ln>
-          </p:spPr>
-          <p:txBody>
-            <a:bodyPr rtlCol="0" anchor="ctr"/>
-            <a:lstStyle/>
-            <a:p>
-              <a:pPr algn="ctr"/>
-            </a:p>
-          </p:txBody>
-        </p:sp>
         <p:pic>
           <p:nvPicPr>
-            <p:cNvPr id="10" name="Region_32" descr="Region_32"/>
+            <p:cNvPr id="9" name="Amazon-Route-53" descr="Amazon Route 53"/>
             <p:cNvPicPr>
               <a:picLocks noChangeAspect="1"/>
             </p:cNvPicPr>
@@ -3370,14 +3337,55 @@
           </p:blipFill>
           <p:spPr>
             <a:xfrm>
-              <a:off x="1883833" y="1358900"/>
-              <a:ext cx="254000" cy="254000"/>
+              <a:off x="2455333" y="2671233"/>
+              <a:ext cx="508000" cy="508000"/>
             </a:xfrm>
             <a:prstGeom prst="rect">
               <a:avLst/>
             </a:prstGeom>
           </p:spPr>
         </p:pic>
+        <p:sp>
+          <p:nvSpPr>
+            <p:cNvPr id="10" name="TextBox 9"/>
+            <p:cNvSpPr txBox="1"/>
+            <p:nvPr/>
+          </p:nvSpPr>
+          <p:spPr>
+            <a:xfrm>
+              <a:off x="2227792" y="3228975"/>
+              <a:ext cx="963083" cy="192617"/>
+            </a:xfrm>
+            <a:prstGeom prst="rect">
+              <a:avLst/>
+            </a:prstGeom>
+            <a:noFill/>
+          </p:spPr>
+          <p:txBody>
+            <a:bodyPr wrap="none" lIns="0" rIns="0" tIns="0" bIns="0" anchor="t">
+              <a:noAutofit/>
+            </a:bodyPr>
+            <a:lstStyle/>
+            <a:p>
+              <a:pPr algn="ctr">
+                <a:lnSpc>
+                  <a:spcPct val="100000"/>
+                </a:lnSpc>
+              </a:pPr>
+              <a:r>
+                <a:rPr sz="1166" b="0" lang="ko-KR">
+                  <a:solidFill>
+                    <a:srgbClr val="232F3E"/>
+                  </a:solidFill>
+                  <a:latin typeface="Arial"/>
+                  <a:ea typeface="Malgun Gothic"/>
+                  <a:cs typeface="Malgun Gothic"/>
+                </a:rPr>
+                <a:t>Route 53</a:t>
+              </a:r>
+            </a:p>
+          </p:txBody>
+        </p:sp>
         <p:sp>
           <p:nvSpPr>
             <p:cNvPr id="11" name="TextBox 10"/>
@@ -3386,7 +3394,111 @@
           </p:nvSpPr>
           <p:spPr>
             <a:xfrm>
-              <a:off x="2222500" y="1408642"/>
+              <a:off x="2165615" y="3418417"/>
+              <a:ext cx="1087438" cy="165100"/>
+            </a:xfrm>
+            <a:prstGeom prst="rect">
+              <a:avLst/>
+            </a:prstGeom>
+            <a:noFill/>
+          </p:spPr>
+          <p:txBody>
+            <a:bodyPr wrap="none" lIns="0" rIns="0" tIns="0" bIns="0" anchor="t">
+              <a:noAutofit/>
+            </a:bodyPr>
+            <a:lstStyle/>
+            <a:p>
+              <a:pPr algn="ctr">
+                <a:lnSpc>
+                  <a:spcPct val="100000"/>
+                </a:lnSpc>
+              </a:pPr>
+              <a:r>
+                <a:rPr sz="1000" b="0" lang="ko-KR">
+                  <a:solidFill>
+                    <a:srgbClr val="545B64"/>
+                  </a:solidFill>
+                  <a:latin typeface="Arial"/>
+                  <a:ea typeface="Malgun Gothic"/>
+                  <a:cs typeface="Malgun Gothic"/>
+                </a:rPr>
+                <a:t>Alias → NLB</a:t>
+              </a:r>
+            </a:p>
+          </p:txBody>
+        </p:sp>
+        <p:sp>
+          <p:nvSpPr>
+            <p:cNvPr id="12" name="Rectangle 11"/>
+            <p:cNvSpPr/>
+            <p:nvPr/>
+          </p:nvSpPr>
+          <p:spPr>
+            <a:xfrm>
+              <a:off x="3323167" y="1316567"/>
+              <a:ext cx="7916333" cy="4995333"/>
+            </a:xfrm>
+            <a:prstGeom prst="rect">
+              <a:avLst/>
+            </a:prstGeom>
+            <a:noFill/>
+            <a:ln w="21167">
+              <a:solidFill>
+                <a:srgbClr val="00A4A6"/>
+              </a:solidFill>
+              <a:custDash>
+                <a:ds d="150000" sp="150000"/>
+              </a:custDash>
+              <a:miter lim="800000"/>
+            </a:ln>
+          </p:spPr>
+          <p:txBody>
+            <a:bodyPr rtlCol="0" anchor="ctr"/>
+            <a:lstStyle/>
+            <a:p>
+              <a:pPr algn="ctr"/>
+            </a:p>
+          </p:txBody>
+        </p:sp>
+        <p:pic>
+          <p:nvPicPr>
+            <p:cNvPr id="13" name="Region_32" descr="Region_32"/>
+            <p:cNvPicPr>
+              <a:picLocks noChangeAspect="1"/>
+            </p:cNvPicPr>
+            <p:nvPr/>
+          </p:nvPicPr>
+          <p:blipFill>
+            <a:blip r:embed="rId8">
+              <a:extLst>
+                <a:ext uri="{96DAC541-7B7A-43D3-8B79-37D633B846F1}">
+                  <asvg:svgBlip xmlns:asvg="http://schemas.microsoft.com/office/drawing/2016/SVG/main" r:embed="rId9"/>
+                </a:ext>
+              </a:extLst>
+            </a:blip>
+            <a:stretch>
+              <a:fillRect/>
+            </a:stretch>
+          </p:blipFill>
+          <p:spPr>
+            <a:xfrm>
+              <a:off x="3323167" y="1316567"/>
+              <a:ext cx="254000" cy="254000"/>
+            </a:xfrm>
+            <a:prstGeom prst="rect">
+              <a:avLst/>
+            </a:prstGeom>
+          </p:spPr>
+        </p:pic>
+        <p:sp>
+          <p:nvSpPr>
+            <p:cNvPr id="14" name="TextBox 13"/>
+            <p:cNvSpPr txBox="1"/>
+            <p:nvPr/>
+          </p:nvSpPr>
+          <p:spPr>
+            <a:xfrm>
+              <a:off x="3661833" y="1366308"/>
               <a:ext cx="759354" cy="192617"/>
             </a:xfrm>
             <a:prstGeom prst="rect">
@@ -3421,118 +3533,6 @@
         </p:sp>
         <p:pic>
           <p:nvPicPr>
-            <p:cNvPr id="12" name="Amazon-Route-53" descr="Amazon Route 53"/>
-            <p:cNvPicPr>
-              <a:picLocks noChangeAspect="1"/>
-            </p:cNvPicPr>
-            <p:nvPr/>
-          </p:nvPicPr>
-          <p:blipFill>
-            <a:blip r:embed="rId8">
-              <a:extLst>
-                <a:ext uri="{96DAC541-7B7A-43D3-8B79-37D633B846F1}">
-                  <asvg:svgBlip xmlns:asvg="http://schemas.microsoft.com/office/drawing/2016/SVG/main" r:embed="rId9"/>
-                </a:ext>
-              </a:extLst>
-            </a:blip>
-            <a:stretch>
-              <a:fillRect/>
-            </a:stretch>
-          </p:blipFill>
-          <p:spPr>
-            <a:xfrm>
-              <a:off x="2465917" y="2650067"/>
-              <a:ext cx="508000" cy="508000"/>
-            </a:xfrm>
-            <a:prstGeom prst="rect">
-              <a:avLst/>
-            </a:prstGeom>
-          </p:spPr>
-        </p:pic>
-        <p:sp>
-          <p:nvSpPr>
-            <p:cNvPr id="13" name="TextBox 12"/>
-            <p:cNvSpPr txBox="1"/>
-            <p:nvPr/>
-          </p:nvSpPr>
-          <p:spPr>
-            <a:xfrm>
-              <a:off x="2238375" y="3207808"/>
-              <a:ext cx="963083" cy="192617"/>
-            </a:xfrm>
-            <a:prstGeom prst="rect">
-              <a:avLst/>
-            </a:prstGeom>
-            <a:noFill/>
-          </p:spPr>
-          <p:txBody>
-            <a:bodyPr wrap="none" lIns="0" rIns="0" tIns="0" bIns="0" anchor="t">
-              <a:noAutofit/>
-            </a:bodyPr>
-            <a:lstStyle/>
-            <a:p>
-              <a:pPr algn="ctr">
-                <a:lnSpc>
-                  <a:spcPct val="100000"/>
-                </a:lnSpc>
-              </a:pPr>
-              <a:r>
-                <a:rPr sz="1166" b="0" lang="ko-KR">
-                  <a:solidFill>
-                    <a:srgbClr val="232F3E"/>
-                  </a:solidFill>
-                  <a:latin typeface="Arial"/>
-                  <a:ea typeface="Malgun Gothic"/>
-                  <a:cs typeface="Malgun Gothic"/>
-                </a:rPr>
-                <a:t>Route 53</a:t>
-              </a:r>
-            </a:p>
-          </p:txBody>
-        </p:sp>
-        <p:sp>
-          <p:nvSpPr>
-            <p:cNvPr id="14" name="TextBox 13"/>
-            <p:cNvSpPr txBox="1"/>
-            <p:nvPr/>
-          </p:nvSpPr>
-          <p:spPr>
-            <a:xfrm>
-              <a:off x="1914260" y="3397250"/>
-              <a:ext cx="1611312" cy="165100"/>
-            </a:xfrm>
-            <a:prstGeom prst="rect">
-              <a:avLst/>
-            </a:prstGeom>
-            <a:noFill/>
-          </p:spPr>
-          <p:txBody>
-            <a:bodyPr wrap="none" lIns="0" rIns="0" tIns="0" bIns="0" anchor="t">
-              <a:noAutofit/>
-            </a:bodyPr>
-            <a:lstStyle/>
-            <a:p>
-              <a:pPr algn="ctr">
-                <a:lnSpc>
-                  <a:spcPct val="100000"/>
-                </a:lnSpc>
-              </a:pPr>
-              <a:r>
-                <a:rPr sz="1000" b="0" lang="ko-KR">
-                  <a:solidFill>
-                    <a:srgbClr val="545B64"/>
-                  </a:solidFill>
-                  <a:latin typeface="Arial"/>
-                  <a:ea typeface="Malgun Gothic"/>
-                  <a:cs typeface="Malgun Gothic"/>
-                </a:rPr>
-                <a:t>DNS → NLB (alias)</a:t>
-              </a:r>
-            </a:p>
-          </p:txBody>
-        </p:sp>
-        <p:pic>
-          <p:nvPicPr>
             <p:cNvPr id="15" name="AWS-Certificate-Manager" descr="AWS Certificate Manager"/>
             <p:cNvPicPr>
               <a:picLocks noChangeAspect="1"/>
@@ -3553,7 +3553,7 @@
           </p:blipFill>
           <p:spPr>
             <a:xfrm>
-              <a:off x="10403417" y="2650067"/>
+              <a:off x="10160000" y="2671233"/>
               <a:ext cx="508000" cy="508000"/>
             </a:xfrm>
             <a:prstGeom prst="rect">
@@ -3569,7 +3569,7 @@
           </p:nvSpPr>
           <p:spPr>
             <a:xfrm>
-              <a:off x="10430536" y="3207808"/>
+              <a:off x="10187120" y="3228975"/>
               <a:ext cx="453760" cy="192617"/>
             </a:xfrm>
             <a:prstGeom prst="rect">
@@ -3610,7 +3610,7 @@
           </p:nvSpPr>
           <p:spPr>
             <a:xfrm>
-              <a:off x="9899385" y="3397250"/>
+              <a:off x="9655969" y="3418417"/>
               <a:ext cx="1516062" cy="165100"/>
             </a:xfrm>
             <a:prstGeom prst="rect">
@@ -3665,7 +3665,7 @@
           </p:blipFill>
           <p:spPr>
             <a:xfrm>
-              <a:off x="10403417" y="3845983"/>
+              <a:off x="10160000" y="3666067"/>
               <a:ext cx="508000" cy="508000"/>
             </a:xfrm>
             <a:prstGeom prst="rect">
@@ -3681,7 +3681,7 @@
           </p:nvSpPr>
           <p:spPr>
             <a:xfrm>
-              <a:off x="10074010" y="4403725"/>
+              <a:off x="9830594" y="4223808"/>
               <a:ext cx="1166813" cy="192617"/>
             </a:xfrm>
             <a:prstGeom prst="rect">
@@ -3722,8 +3722,8 @@
           </p:nvSpPr>
           <p:spPr>
             <a:xfrm>
-              <a:off x="9653323" y="4593167"/>
-              <a:ext cx="2008188" cy="165100"/>
+              <a:off x="9902031" y="4413250"/>
+              <a:ext cx="1023938" cy="165100"/>
             </a:xfrm>
             <a:prstGeom prst="rect">
               <a:avLst/>
@@ -3750,7 +3750,7 @@
                   <a:ea typeface="Malgun Gothic"/>
                   <a:cs typeface="Malgun Gothic"/>
                 </a:rPr>
-                <a:t>지표 · 경보 · 상태 확인</a:t>
+                <a:t>지표 · 경보</a:t>
               </a:r>
             </a:p>
           </p:txBody>
@@ -3777,7 +3777,7 @@
           </p:blipFill>
           <p:spPr>
             <a:xfrm>
-              <a:off x="10403417" y="5317067"/>
+              <a:off x="10160000" y="5105400"/>
               <a:ext cx="508000" cy="508000"/>
             </a:xfrm>
             <a:prstGeom prst="rect">
@@ -3793,7 +3793,7 @@
           </p:nvSpPr>
           <p:spPr>
             <a:xfrm>
-              <a:off x="10481469" y="5874808"/>
+              <a:off x="10238052" y="5663142"/>
               <a:ext cx="351896" cy="192617"/>
             </a:xfrm>
             <a:prstGeom prst="rect">
@@ -3834,7 +3834,7 @@
           </p:nvSpPr>
           <p:spPr>
             <a:xfrm>
-              <a:off x="9978760" y="6064250"/>
+              <a:off x="9735344" y="5852583"/>
               <a:ext cx="1357312" cy="165100"/>
             </a:xfrm>
             <a:prstGeom prst="rect">
@@ -3875,8 +3875,8 @@
           </p:nvSpPr>
           <p:spPr>
             <a:xfrm>
-              <a:off x="3556000" y="1697567"/>
-              <a:ext cx="6180667" cy="4677833"/>
+              <a:off x="3661833" y="1634067"/>
+              <a:ext cx="5926667" cy="4550833"/>
             </a:xfrm>
             <a:prstGeom prst="rect">
               <a:avLst/>
@@ -3920,7 +3920,7 @@
           </p:blipFill>
           <p:spPr>
             <a:xfrm>
-              <a:off x="3556000" y="1697567"/>
+              <a:off x="3661833" y="1634067"/>
               <a:ext cx="254000" cy="254000"/>
             </a:xfrm>
             <a:prstGeom prst="rect">
@@ -3936,7 +3936,7 @@
           </p:nvSpPr>
           <p:spPr>
             <a:xfrm>
-              <a:off x="3894667" y="1747308"/>
+              <a:off x="4000500" y="1683808"/>
               <a:ext cx="1676135" cy="192617"/>
             </a:xfrm>
             <a:prstGeom prst="rect">
@@ -3977,8 +3977,8 @@
           </p:nvSpPr>
           <p:spPr>
             <a:xfrm>
-              <a:off x="3683000" y="1993900"/>
-              <a:ext cx="5926667" cy="1608667"/>
+              <a:off x="3788833" y="1951567"/>
+              <a:ext cx="5672667" cy="1629833"/>
             </a:xfrm>
             <a:prstGeom prst="rect">
               <a:avLst/>
@@ -4010,7 +4010,7 @@
           </p:nvSpPr>
           <p:spPr>
             <a:xfrm>
-              <a:off x="3810000" y="2043642"/>
+              <a:off x="3915833" y="2001308"/>
               <a:ext cx="2083594" cy="192617"/>
             </a:xfrm>
             <a:prstGeom prst="rect">
@@ -4051,8 +4051,8 @@
           </p:nvSpPr>
           <p:spPr>
             <a:xfrm>
-              <a:off x="3683000" y="4660900"/>
-              <a:ext cx="5926667" cy="1608667"/>
+              <a:off x="3788833" y="4491567"/>
+              <a:ext cx="5672667" cy="1608667"/>
             </a:xfrm>
             <a:prstGeom prst="rect">
               <a:avLst/>
@@ -4084,7 +4084,7 @@
           </p:nvSpPr>
           <p:spPr>
             <a:xfrm>
-              <a:off x="3810000" y="4710642"/>
+              <a:off x="3915833" y="4541308"/>
               <a:ext cx="2083594" cy="192617"/>
             </a:xfrm>
             <a:prstGeom prst="rect">
@@ -4125,8 +4125,8 @@
           </p:nvSpPr>
           <p:spPr>
             <a:xfrm>
-              <a:off x="3810000" y="2269067"/>
-              <a:ext cx="1693333" cy="1248833"/>
+              <a:off x="3915833" y="2269067"/>
+              <a:ext cx="1693333" cy="1227667"/>
             </a:xfrm>
             <a:prstGeom prst="rect">
               <a:avLst/>
@@ -4170,7 +4170,7 @@
           </p:blipFill>
           <p:spPr>
             <a:xfrm>
-              <a:off x="3810000" y="2269067"/>
+              <a:off x="3915833" y="2269067"/>
               <a:ext cx="254000" cy="254000"/>
             </a:xfrm>
             <a:prstGeom prst="rect">
@@ -4186,7 +4186,7 @@
           </p:nvSpPr>
           <p:spPr>
             <a:xfrm>
-              <a:off x="4148667" y="2318808"/>
+              <a:off x="4254500" y="2318808"/>
               <a:ext cx="1472406" cy="192617"/>
             </a:xfrm>
             <a:prstGeom prst="rect">
@@ -4227,8 +4227,8 @@
           </p:nvSpPr>
           <p:spPr>
             <a:xfrm>
-              <a:off x="5757333" y="2269067"/>
-              <a:ext cx="3725333" cy="1248833"/>
+              <a:off x="5863167" y="2269067"/>
+              <a:ext cx="3471333" cy="1227667"/>
             </a:xfrm>
             <a:prstGeom prst="rect">
               <a:avLst/>
@@ -4272,7 +4272,7 @@
           </p:blipFill>
           <p:spPr>
             <a:xfrm>
-              <a:off x="5757333" y="2269067"/>
+              <a:off x="5863167" y="2269067"/>
               <a:ext cx="254000" cy="254000"/>
             </a:xfrm>
             <a:prstGeom prst="rect">
@@ -4288,8 +4288,8 @@
           </p:nvSpPr>
           <p:spPr>
             <a:xfrm>
-              <a:off x="6096000" y="2318808"/>
-              <a:ext cx="1574271" cy="192617"/>
+              <a:off x="6201833" y="2318808"/>
+              <a:ext cx="1166813" cy="192617"/>
             </a:xfrm>
             <a:prstGeom prst="rect">
               <a:avLst/>
@@ -4316,7 +4316,7 @@
                   <a:ea typeface="Malgun Gothic"/>
                   <a:cs typeface="Malgun Gothic"/>
                 </a:rPr>
-                <a:t>Private subnet</a:t>
+                <a:t>App subnet</a:t>
               </a:r>
             </a:p>
           </p:txBody>
@@ -4329,8 +4329,8 @@
           </p:nvSpPr>
           <p:spPr>
             <a:xfrm>
-              <a:off x="3810000" y="4936067"/>
-              <a:ext cx="1693333" cy="1248833"/>
+              <a:off x="3915833" y="4809067"/>
+              <a:ext cx="1693333" cy="1206500"/>
             </a:xfrm>
             <a:prstGeom prst="rect">
               <a:avLst/>
@@ -4374,7 +4374,7 @@
           </p:blipFill>
           <p:spPr>
             <a:xfrm>
-              <a:off x="3810000" y="4936067"/>
+              <a:off x="3915833" y="4809067"/>
               <a:ext cx="254000" cy="254000"/>
             </a:xfrm>
             <a:prstGeom prst="rect">
@@ -4390,7 +4390,7 @@
           </p:nvSpPr>
           <p:spPr>
             <a:xfrm>
-              <a:off x="4148667" y="4985808"/>
+              <a:off x="4254500" y="4858808"/>
               <a:ext cx="1472406" cy="192617"/>
             </a:xfrm>
             <a:prstGeom prst="rect">
@@ -4431,8 +4431,8 @@
           </p:nvSpPr>
           <p:spPr>
             <a:xfrm>
-              <a:off x="5757333" y="4936067"/>
-              <a:ext cx="3725333" cy="1248833"/>
+              <a:off x="5863167" y="4809067"/>
+              <a:ext cx="3471333" cy="1206500"/>
             </a:xfrm>
             <a:prstGeom prst="rect">
               <a:avLst/>
@@ -4476,7 +4476,7 @@
           </p:blipFill>
           <p:spPr>
             <a:xfrm>
-              <a:off x="5757333" y="4936067"/>
+              <a:off x="5863167" y="4809067"/>
               <a:ext cx="254000" cy="254000"/>
             </a:xfrm>
             <a:prstGeom prst="rect">
@@ -4492,8 +4492,8 @@
           </p:nvSpPr>
           <p:spPr>
             <a:xfrm>
-              <a:off x="6096000" y="4985808"/>
-              <a:ext cx="1574271" cy="192617"/>
+              <a:off x="6201833" y="4858808"/>
+              <a:ext cx="1166813" cy="192617"/>
             </a:xfrm>
             <a:prstGeom prst="rect">
               <a:avLst/>
@@ -4520,7 +4520,7 @@
                   <a:ea typeface="Malgun Gothic"/>
                   <a:cs typeface="Malgun Gothic"/>
                 </a:rPr>
-                <a:t>Private subnet</a:t>
+                <a:t>App subnet</a:t>
               </a:r>
             </a:p>
           </p:txBody>
@@ -4547,7 +4547,7 @@
           </p:blipFill>
           <p:spPr>
             <a:xfrm>
-              <a:off x="4402667" y="2650067"/>
+              <a:off x="4508500" y="2671233"/>
               <a:ext cx="508000" cy="508000"/>
             </a:xfrm>
             <a:prstGeom prst="rect">
@@ -4563,7 +4563,7 @@
           </p:nvSpPr>
           <p:spPr>
             <a:xfrm>
-              <a:off x="4022328" y="3207808"/>
+              <a:off x="4128161" y="3228975"/>
               <a:ext cx="1268677" cy="192617"/>
             </a:xfrm>
             <a:prstGeom prst="rect">
@@ -4618,7 +4618,7 @@
           </p:blipFill>
           <p:spPr>
             <a:xfrm>
-              <a:off x="4402667" y="5317067"/>
+              <a:off x="4508500" y="5105400"/>
               <a:ext cx="508000" cy="508000"/>
             </a:xfrm>
             <a:prstGeom prst="rect">
@@ -4634,7 +4634,7 @@
           </p:nvSpPr>
           <p:spPr>
             <a:xfrm>
-              <a:off x="4022328" y="5874808"/>
+              <a:off x="4128161" y="5663142"/>
               <a:ext cx="1268677" cy="192617"/>
             </a:xfrm>
             <a:prstGeom prst="rect">
@@ -4675,8 +4675,8 @@
           </p:nvSpPr>
           <p:spPr>
             <a:xfrm>
-              <a:off x="7387167" y="2353733"/>
-              <a:ext cx="1968500" cy="3746500"/>
+              <a:off x="7175500" y="2353733"/>
+              <a:ext cx="2032000" cy="3577167"/>
             </a:xfrm>
             <a:prstGeom prst="rect">
               <a:avLst/>
@@ -4722,7 +4722,7 @@
           </p:blipFill>
           <p:spPr>
             <a:xfrm>
-              <a:off x="7387167" y="2353733"/>
+              <a:off x="7175500" y="2353733"/>
               <a:ext cx="254000" cy="254000"/>
             </a:xfrm>
             <a:prstGeom prst="rect">
@@ -4738,8 +4738,8 @@
           </p:nvSpPr>
           <p:spPr>
             <a:xfrm>
-              <a:off x="7725833" y="2413529"/>
-              <a:ext cx="1840177" cy="178858"/>
+              <a:off x="7514167" y="2403475"/>
+              <a:ext cx="1981729" cy="192617"/>
             </a:xfrm>
             <a:prstGeom prst="rect">
               <a:avLst/>
@@ -4758,7 +4758,7 @@
                 </a:lnSpc>
               </a:pPr>
               <a:r>
-                <a:rPr sz="1083" b="1" lang="ko-KR">
+                <a:rPr sz="1166" b="1" lang="ko-KR">
                   <a:solidFill>
                     <a:srgbClr val="ED7100"/>
                   </a:solidFill>
@@ -4793,7 +4793,7 @@
           </p:blipFill>
           <p:spPr>
             <a:xfrm>
-              <a:off x="7620000" y="2650067"/>
+              <a:off x="7514167" y="2671233"/>
               <a:ext cx="508000" cy="508000"/>
             </a:xfrm>
             <a:prstGeom prst="rect">
@@ -4809,7 +4809,7 @@
           </p:nvSpPr>
           <p:spPr>
             <a:xfrm>
-              <a:off x="7647120" y="3207808"/>
+              <a:off x="7541286" y="3228975"/>
               <a:ext cx="453760" cy="192617"/>
             </a:xfrm>
             <a:prstGeom prst="rect">
@@ -4864,7 +4864,7 @@
           </p:blipFill>
           <p:spPr>
             <a:xfrm>
-              <a:off x="8593667" y="2650067"/>
+              <a:off x="8487833" y="2671233"/>
               <a:ext cx="508000" cy="508000"/>
             </a:xfrm>
             <a:prstGeom prst="rect">
@@ -4880,7 +4880,7 @@
           </p:nvSpPr>
           <p:spPr>
             <a:xfrm>
-              <a:off x="8620786" y="3207808"/>
+              <a:off x="8514953" y="3228975"/>
               <a:ext cx="453760" cy="192617"/>
             </a:xfrm>
             <a:prstGeom prst="rect">
@@ -4935,7 +4935,7 @@
           </p:blipFill>
           <p:spPr>
             <a:xfrm>
-              <a:off x="7620000" y="5317067"/>
+              <a:off x="7514167" y="5105400"/>
               <a:ext cx="508000" cy="508000"/>
             </a:xfrm>
             <a:prstGeom prst="rect">
@@ -4951,7 +4951,7 @@
           </p:nvSpPr>
           <p:spPr>
             <a:xfrm>
-              <a:off x="7647120" y="5874808"/>
+              <a:off x="7541286" y="5663142"/>
               <a:ext cx="453760" cy="192617"/>
             </a:xfrm>
             <a:prstGeom prst="rect">
@@ -5006,7 +5006,7 @@
           </p:blipFill>
           <p:spPr>
             <a:xfrm>
-              <a:off x="8593667" y="5317067"/>
+              <a:off x="8487833" y="5105400"/>
               <a:ext cx="508000" cy="508000"/>
             </a:xfrm>
             <a:prstGeom prst="rect">
@@ -5022,7 +5022,7 @@
           </p:nvSpPr>
           <p:spPr>
             <a:xfrm>
-              <a:off x="8620786" y="5874808"/>
+              <a:off x="8514953" y="5663142"/>
               <a:ext cx="453760" cy="192617"/>
             </a:xfrm>
             <a:prstGeom prst="rect">
@@ -5077,7 +5077,7 @@
           </p:blipFill>
           <p:spPr>
             <a:xfrm>
-              <a:off x="4402667" y="3845983"/>
+              <a:off x="4508500" y="3666067"/>
               <a:ext cx="508000" cy="508000"/>
             </a:xfrm>
             <a:prstGeom prst="rect">
@@ -5093,7 +5093,7 @@
           </p:nvSpPr>
           <p:spPr>
             <a:xfrm>
-              <a:off x="4429786" y="4403725"/>
+              <a:off x="4535620" y="4223808"/>
               <a:ext cx="453760" cy="192617"/>
             </a:xfrm>
             <a:prstGeom prst="rect">
@@ -5134,7 +5134,7 @@
           </p:nvSpPr>
           <p:spPr>
             <a:xfrm>
-              <a:off x="3302000" y="3845983"/>
+              <a:off x="3407833" y="3666067"/>
               <a:ext cx="508000" cy="740833"/>
             </a:xfrm>
             <a:prstGeom prst="rect">
@@ -5177,7 +5177,7 @@
           </p:blipFill>
           <p:spPr>
             <a:xfrm>
-              <a:off x="3302000" y="3845983"/>
+              <a:off x="3407833" y="3666067"/>
               <a:ext cx="508000" cy="508000"/>
             </a:xfrm>
             <a:prstGeom prst="rect">
@@ -5193,7 +5193,7 @@
           </p:nvSpPr>
           <p:spPr>
             <a:xfrm>
-              <a:off x="3329120" y="4403725"/>
+              <a:off x="3434953" y="4223808"/>
               <a:ext cx="453760" cy="192617"/>
             </a:xfrm>
             <a:prstGeom prst="rect">
@@ -5234,8 +5234,8 @@
           </p:nvCxnSpPr>
           <p:spPr>
             <a:xfrm>
-              <a:off x="1037167" y="4099983"/>
-              <a:ext cx="2222500" cy="0"/>
+              <a:off x="1375833" y="3920067"/>
+              <a:ext cx="1989667" cy="0"/>
             </a:xfrm>
             <a:prstGeom prst="line">
               <a:avLst/>
@@ -5258,7 +5258,7 @@
           </p:nvSpPr>
           <p:spPr>
             <a:xfrm>
-              <a:off x="899583" y="3884083"/>
+              <a:off x="1322917" y="3704167"/>
               <a:ext cx="825500" cy="165100"/>
             </a:xfrm>
             <a:prstGeom prst="rect">
@@ -5299,7 +5299,7 @@
           </p:nvCxnSpPr>
           <p:spPr>
             <a:xfrm>
-              <a:off x="3852333" y="4099983"/>
+              <a:off x="3958167" y="3920067"/>
               <a:ext cx="508000" cy="0"/>
             </a:xfrm>
             <a:prstGeom prst="line">
@@ -5323,8 +5323,8 @@
           </p:nvCxnSpPr>
           <p:spPr>
             <a:xfrm>
-              <a:off x="4953000" y="4099983"/>
-              <a:ext cx="2391833" cy="0"/>
+              <a:off x="5058833" y="3920067"/>
+              <a:ext cx="2074334" cy="0"/>
             </a:xfrm>
             <a:prstGeom prst="line">
               <a:avLst/>
@@ -5347,8 +5347,8 @@
           </p:nvSpPr>
           <p:spPr>
             <a:xfrm>
-              <a:off x="5736167" y="3884083"/>
-              <a:ext cx="825500" cy="165100"/>
+              <a:off x="5639594" y="3704167"/>
+              <a:ext cx="912812" cy="165100"/>
             </a:xfrm>
             <a:prstGeom prst="rect">
               <a:avLst/>
@@ -5375,7 +5375,7 @@
                   <a:ea typeface="Malgun Gothic"/>
                   <a:cs typeface="Malgun Gothic"/>
                 </a:rPr>
-                <a:t>TCP :443</a:t>
+                <a:t>TCP :8080</a:t>
               </a:r>
             </a:p>
           </p:txBody>
@@ -5388,8 +5388,8 @@
           </p:nvSpPr>
           <p:spPr>
             <a:xfrm>
-              <a:off x="740833" y="2904067"/>
-              <a:ext cx="1682750" cy="899583"/>
+              <a:off x="1079500" y="2925233"/>
+              <a:ext cx="1333500" cy="698500"/>
             </a:xfrm>
             <a:custGeom>
               <a:avLst/>
@@ -5398,15 +5398,15 @@
               <a:cxnLst/>
               <a:rect l="l" t="t" r="r" b="b"/>
               <a:pathLst>
-                <a:path w="1682750" h="899583">
+                <a:path w="1333500" h="698500">
                   <a:moveTo>
-                    <a:pt x="0" y="899583"/>
+                    <a:pt x="0" y="698500"/>
                   </a:moveTo>
                   <a:lnTo>
                     <a:pt x="0" y="0"/>
                   </a:lnTo>
                   <a:lnTo>
-                    <a:pt x="1682750" y="0"/>
+                    <a:pt x="1333500" y="0"/>
                   </a:lnTo>
                 </a:path>
               </a:pathLst>
@@ -5439,7 +5439,7 @@
           </p:nvSpPr>
           <p:spPr>
             <a:xfrm>
-              <a:off x="936625" y="2698750"/>
+              <a:off x="1338792" y="2719917"/>
               <a:ext cx="793750" cy="165100"/>
             </a:xfrm>
             <a:prstGeom prst="rect">
@@ -5480,8 +5480,8 @@
           </p:nvCxnSpPr>
           <p:spPr>
             <a:xfrm flipH="1">
-              <a:off x="4953000" y="2904067"/>
-              <a:ext cx="2391833" cy="0"/>
+              <a:off x="5058833" y="2925233"/>
+              <a:ext cx="2074334" cy="0"/>
             </a:xfrm>
             <a:prstGeom prst="line">
               <a:avLst/>
@@ -5506,7 +5506,7 @@
           </p:nvSpPr>
           <p:spPr>
             <a:xfrm>
-              <a:off x="6111875" y="2698750"/>
+              <a:off x="6037792" y="2719917"/>
               <a:ext cx="920750" cy="165100"/>
             </a:xfrm>
             <a:prstGeom prst="rect">
@@ -5547,8 +5547,8 @@
           </p:nvCxnSpPr>
           <p:spPr>
             <a:xfrm flipH="1">
-              <a:off x="4953000" y="5571067"/>
-              <a:ext cx="2391833" cy="0"/>
+              <a:off x="5058833" y="5359400"/>
+              <a:ext cx="2074334" cy="0"/>
             </a:xfrm>
             <a:prstGeom prst="line">
               <a:avLst/>
@@ -5573,7 +5573,7 @@
           </p:nvSpPr>
           <p:spPr>
             <a:xfrm>
-              <a:off x="6111875" y="5365750"/>
+              <a:off x="6037792" y="5154083"/>
               <a:ext cx="920750" cy="165100"/>
             </a:xfrm>
             <a:prstGeom prst="rect">
@@ -5614,8 +5614,8 @@
           </p:nvSpPr>
           <p:spPr>
             <a:xfrm>
-              <a:off x="1826948" y="5175250"/>
-              <a:ext cx="1785937" cy="165100"/>
+              <a:off x="825500" y="6466417"/>
+              <a:ext cx="10144125" cy="165100"/>
             </a:xfrm>
             <a:prstGeom prst="rect">
               <a:avLst/>
@@ -5628,7 +5628,7 @@
             </a:bodyPr>
             <a:lstStyle/>
             <a:p>
-              <a:pPr algn="ctr">
+              <a:pPr algn="l">
                 <a:lnSpc>
                   <a:spcPct val="100000"/>
                 </a:lnSpc>
@@ -5642,130 +5642,7 @@
                   <a:ea typeface="Malgun Gothic"/>
                   <a:cs typeface="Malgun Gothic"/>
                 </a:rPr>
-                <a:t>Internet-facing NLB</a:t>
-              </a:r>
-            </a:p>
-          </p:txBody>
-        </p:sp>
-        <p:sp>
-          <p:nvSpPr>
-            <p:cNvPr id="75" name="TextBox 74"/>
-            <p:cNvSpPr txBox="1"/>
-            <p:nvPr/>
-          </p:nvSpPr>
-          <p:spPr>
-            <a:xfrm>
-              <a:off x="1723760" y="5344583"/>
-              <a:ext cx="1992312" cy="165100"/>
-            </a:xfrm>
-            <a:prstGeom prst="rect">
-              <a:avLst/>
-            </a:prstGeom>
-            <a:noFill/>
-          </p:spPr>
-          <p:txBody>
-            <a:bodyPr wrap="none" lIns="0" rIns="0" tIns="0" bIns="0" anchor="t">
-              <a:noAutofit/>
-            </a:bodyPr>
-            <a:lstStyle/>
-            <a:p>
-              <a:pPr algn="ctr">
-                <a:lnSpc>
-                  <a:spcPct val="100000"/>
-                </a:lnSpc>
-              </a:pPr>
-              <a:r>
-                <a:rPr sz="1000" b="0" lang="ko-KR">
-                  <a:solidFill>
-                    <a:srgbClr val="545B64"/>
-                  </a:solidFill>
-                  <a:latin typeface="Arial"/>
-                  <a:ea typeface="Malgun Gothic"/>
-                  <a:cs typeface="Malgun Gothic"/>
-                </a:rPr>
-                <a:t>두 AZ의 퍼블릭 서브넷에</a:t>
-              </a:r>
-            </a:p>
-          </p:txBody>
-        </p:sp>
-        <p:sp>
-          <p:nvSpPr>
-            <p:cNvPr id="76" name="TextBox 75"/>
-            <p:cNvSpPr txBox="1"/>
-            <p:nvPr/>
-          </p:nvSpPr>
-          <p:spPr>
-            <a:xfrm>
-              <a:off x="2013479" y="5513917"/>
-              <a:ext cx="1412875" cy="165100"/>
-            </a:xfrm>
-            <a:prstGeom prst="rect">
-              <a:avLst/>
-            </a:prstGeom>
-            <a:noFill/>
-          </p:spPr>
-          <p:txBody>
-            <a:bodyPr wrap="none" lIns="0" rIns="0" tIns="0" bIns="0" anchor="t">
-              <a:noAutofit/>
-            </a:bodyPr>
-            <a:lstStyle/>
-            <a:p>
-              <a:pPr algn="ctr">
-                <a:lnSpc>
-                  <a:spcPct val="100000"/>
-                </a:lnSpc>
-              </a:pPr>
-              <a:r>
-                <a:rPr sz="1000" b="0" lang="ko-KR">
-                  <a:solidFill>
-                    <a:srgbClr val="545B64"/>
-                  </a:solidFill>
-                  <a:latin typeface="Arial"/>
-                  <a:ea typeface="Malgun Gothic"/>
-                  <a:cs typeface="Malgun Gothic"/>
-                </a:rPr>
-                <a:t>걸친 단일 관리형</a:t>
-              </a:r>
-            </a:p>
-          </p:txBody>
-        </p:sp>
-        <p:sp>
-          <p:nvSpPr>
-            <p:cNvPr id="77" name="TextBox 76"/>
-            <p:cNvSpPr txBox="1"/>
-            <p:nvPr/>
-          </p:nvSpPr>
-          <p:spPr>
-            <a:xfrm>
-              <a:off x="2215885" y="5683250"/>
-              <a:ext cx="1008062" cy="165100"/>
-            </a:xfrm>
-            <a:prstGeom prst="rect">
-              <a:avLst/>
-            </a:prstGeom>
-            <a:noFill/>
-          </p:spPr>
-          <p:txBody>
-            <a:bodyPr wrap="none" lIns="0" rIns="0" tIns="0" bIns="0" anchor="t">
-              <a:noAutofit/>
-            </a:bodyPr>
-            <a:lstStyle/>
-            <a:p>
-              <a:pPr algn="ctr">
-                <a:lnSpc>
-                  <a:spcPct val="100000"/>
-                </a:lnSpc>
-              </a:pPr>
-              <a:r>
-                <a:rPr sz="1000" b="0" lang="ko-KR">
-                  <a:solidFill>
-                    <a:srgbClr val="545B64"/>
-                  </a:solidFill>
-                  <a:latin typeface="Arial"/>
-                  <a:ea typeface="Malgun Gothic"/>
-                  <a:cs typeface="Malgun Gothic"/>
-                </a:rPr>
-                <a:t>로드 밸런서</a:t>
+                <a:t>Internet-facing NLB · TLS 종료 · 라우팅: Public subnet 0.0.0.0/0 → IGW, App subnet 0.0.0.0/0 → NAT gateway (같은 AZ)</a:t>
               </a:r>
             </a:p>
           </p:txBody>
@@ -5833,10 +5710,10 @@
         </p:nvGrpSpPr>
         <p:grpSpPr>
           <a:xfrm>
-            <a:off x="687255" y="935567"/>
-            <a:ext cx="10785079" cy="5651500"/>
-            <a:chOff x="687255" y="935567"/>
-            <a:chExt cx="10785079" cy="5651500"/>
+            <a:off x="327422" y="935567"/>
+            <a:ext cx="11590735" cy="5643033"/>
+            <a:chOff x="327422" y="935567"/>
+            <a:chExt cx="11590735" cy="5643033"/>
           </a:xfrm>
         </p:grpSpPr>
         <p:pic>
@@ -5861,7 +5738,7 @@
           </p:blipFill>
           <p:spPr>
             <a:xfrm>
-              <a:off x="762000" y="4131733"/>
+              <a:off x="402167" y="3623733"/>
               <a:ext cx="508000" cy="508000"/>
             </a:xfrm>
             <a:prstGeom prst="rect">
@@ -5877,7 +5754,7 @@
           </p:nvSpPr>
           <p:spPr>
             <a:xfrm>
-              <a:off x="687255" y="4668308"/>
+              <a:off x="327422" y="4160308"/>
               <a:ext cx="657490" cy="192617"/>
             </a:xfrm>
             <a:prstGeom prst="rect">
@@ -5918,8 +5795,8 @@
           </p:nvSpPr>
           <p:spPr>
             <a:xfrm>
-              <a:off x="2180167" y="935567"/>
-              <a:ext cx="9292167" cy="5651500"/>
+              <a:off x="1778000" y="935567"/>
+              <a:ext cx="10138833" cy="5418667"/>
             </a:xfrm>
             <a:prstGeom prst="rect">
               <a:avLst/>
@@ -5963,7 +5840,7 @@
           </p:blipFill>
           <p:spPr>
             <a:xfrm>
-              <a:off x="2180167" y="935567"/>
+              <a:off x="1778000" y="935567"/>
               <a:ext cx="338667" cy="338667"/>
             </a:xfrm>
             <a:prstGeom prst="rect">
@@ -5979,7 +5856,7 @@
           </p:nvSpPr>
           <p:spPr>
             <a:xfrm>
-              <a:off x="2624667" y="1017588"/>
+              <a:off x="2222500" y="1017588"/>
               <a:ext cx="1141016" cy="206375"/>
             </a:xfrm>
             <a:prstGeom prst="rect">
@@ -6012,16 +5889,46 @@
             </a:p>
           </p:txBody>
         </p:sp>
-        <p:sp>
-          <p:nvSpPr>
-            <p:cNvPr id="9" name="TextBox 8"/>
+        <p:pic>
+          <p:nvPicPr>
+            <p:cNvPr id="9" name="Amazon-Route-53" descr="Amazon Route 53"/>
+            <p:cNvPicPr>
+              <a:picLocks noChangeAspect="1"/>
+            </p:cNvPicPr>
+            <p:nvPr/>
+          </p:nvPicPr>
+          <p:blipFill>
+            <a:blip r:embed="rId6">
+              <a:extLst>
+                <a:ext uri="{96DAC541-7B7A-43D3-8B79-37D633B846F1}">
+                  <asvg:svgBlip xmlns:asvg="http://schemas.microsoft.com/office/drawing/2016/SVG/main" r:embed="rId7"/>
+                </a:ext>
+              </a:extLst>
+            </a:blip>
+            <a:stretch>
+              <a:fillRect/>
+            </a:stretch>
+          </p:blipFill>
+          <p:spPr>
+            <a:xfrm>
+              <a:off x="2021417" y="1358900"/>
+              <a:ext cx="508000" cy="508000"/>
+            </a:xfrm>
+            <a:prstGeom prst="rect">
+              <a:avLst/>
+            </a:prstGeom>
+          </p:spPr>
+        </p:pic>
+        <p:sp>
+          <p:nvSpPr>
+            <p:cNvPr id="10" name="TextBox 9"/>
             <p:cNvSpPr txBox="1"/>
             <p:nvPr/>
           </p:nvSpPr>
           <p:spPr>
             <a:xfrm>
-              <a:off x="3746500" y="1047750"/>
-              <a:ext cx="7556500" cy="165100"/>
+              <a:off x="1793875" y="1895475"/>
+              <a:ext cx="963083" cy="192617"/>
             </a:xfrm>
             <a:prstGeom prst="rect">
               <a:avLst/>
@@ -6034,7 +5941,48 @@
             </a:bodyPr>
             <a:lstStyle/>
             <a:p>
-              <a:pPr algn="r">
+              <a:pPr algn="ctr">
+                <a:lnSpc>
+                  <a:spcPct val="100000"/>
+                </a:lnSpc>
+              </a:pPr>
+              <a:r>
+                <a:rPr sz="1166" b="0" lang="ko-KR">
+                  <a:solidFill>
+                    <a:srgbClr val="232F3E"/>
+                  </a:solidFill>
+                  <a:latin typeface="Arial"/>
+                  <a:ea typeface="Malgun Gothic"/>
+                  <a:cs typeface="Malgun Gothic"/>
+                </a:rPr>
+                <a:t>Route 53</a:t>
+              </a:r>
+            </a:p>
+          </p:txBody>
+        </p:sp>
+        <p:sp>
+          <p:nvSpPr>
+            <p:cNvPr id="11" name="TextBox 10"/>
+            <p:cNvSpPr txBox="1"/>
+            <p:nvPr/>
+          </p:nvSpPr>
+          <p:spPr>
+            <a:xfrm>
+              <a:off x="1731698" y="2084917"/>
+              <a:ext cx="1087438" cy="165100"/>
+            </a:xfrm>
+            <a:prstGeom prst="rect">
+              <a:avLst/>
+            </a:prstGeom>
+            <a:noFill/>
+          </p:spPr>
+          <p:txBody>
+            <a:bodyPr wrap="none" lIns="0" rIns="0" tIns="0" bIns="0" anchor="t">
+              <a:noAutofit/>
+            </a:bodyPr>
+            <a:lstStyle/>
+            <a:p>
+              <a:pPr algn="ctr">
                 <a:lnSpc>
                   <a:spcPct val="100000"/>
                 </a:lnSpc>
@@ -6048,21 +5996,21 @@
                   <a:ea typeface="Malgun Gothic"/>
                   <a:cs typeface="Malgun Gothic"/>
                 </a:rPr>
-                <a:t>Internet-facing ALB · 두 AZ에 걸친 단일 관리형 로드 밸런서 · AWS WAF 연결 · RDS Multi-AZ</a:t>
+                <a:t>alias → ALB</a:t>
               </a:r>
             </a:p>
           </p:txBody>
         </p:sp>
         <p:sp>
           <p:nvSpPr>
-            <p:cNvPr id="10" name="Rectangle 9"/>
+            <p:cNvPr id="12" name="Rectangle 11"/>
             <p:cNvSpPr/>
             <p:nvPr/>
           </p:nvSpPr>
           <p:spPr>
             <a:xfrm>
-              <a:off x="2349500" y="1337733"/>
-              <a:ext cx="8953500" cy="5185833"/>
+              <a:off x="2772833" y="1295400"/>
+              <a:ext cx="9059333" cy="4974167"/>
             </a:xfrm>
             <a:prstGeom prst="rect">
               <a:avLst/>
@@ -6088,17 +6036,17 @@
         </p:sp>
         <p:pic>
           <p:nvPicPr>
-            <p:cNvPr id="11" name="Region_32" descr="Region_32"/>
+            <p:cNvPr id="13" name="Region_32" descr="Region_32"/>
             <p:cNvPicPr>
               <a:picLocks noChangeAspect="1"/>
             </p:cNvPicPr>
             <p:nvPr/>
           </p:nvPicPr>
           <p:blipFill>
-            <a:blip r:embed="rId6">
+            <a:blip r:embed="rId8">
               <a:extLst>
                 <a:ext uri="{96DAC541-7B7A-43D3-8B79-37D633B846F1}">
-                  <asvg:svgBlip xmlns:asvg="http://schemas.microsoft.com/office/drawing/2016/SVG/main" r:embed="rId7"/>
+                  <asvg:svgBlip xmlns:asvg="http://schemas.microsoft.com/office/drawing/2016/SVG/main" r:embed="rId9"/>
                 </a:ext>
               </a:extLst>
             </a:blip>
@@ -6108,7 +6056,7 @@
           </p:blipFill>
           <p:spPr>
             <a:xfrm>
-              <a:off x="2349500" y="1337733"/>
+              <a:off x="2772833" y="1295400"/>
               <a:ext cx="254000" cy="254000"/>
             </a:xfrm>
             <a:prstGeom prst="rect">
@@ -6118,13 +6066,13 @@
         </p:pic>
         <p:sp>
           <p:nvSpPr>
-            <p:cNvPr id="12" name="TextBox 11"/>
+            <p:cNvPr id="14" name="TextBox 13"/>
             <p:cNvSpPr txBox="1"/>
             <p:nvPr/>
           </p:nvSpPr>
           <p:spPr>
             <a:xfrm>
-              <a:off x="2688167" y="1387475"/>
+              <a:off x="3111500" y="1345142"/>
               <a:ext cx="759354" cy="192617"/>
             </a:xfrm>
             <a:prstGeom prst="rect">
@@ -6159,119 +6107,7 @@
         </p:sp>
         <p:pic>
           <p:nvPicPr>
-            <p:cNvPr id="13" name="Amazon-Route-53" descr="Amazon Route 53"/>
-            <p:cNvPicPr>
-              <a:picLocks noChangeAspect="1"/>
-            </p:cNvPicPr>
-            <p:nvPr/>
-          </p:nvPicPr>
-          <p:blipFill>
-            <a:blip r:embed="rId8">
-              <a:extLst>
-                <a:ext uri="{96DAC541-7B7A-43D3-8B79-37D633B846F1}">
-                  <asvg:svgBlip xmlns:asvg="http://schemas.microsoft.com/office/drawing/2016/SVG/main" r:embed="rId9"/>
-                </a:ext>
-              </a:extLst>
-            </a:blip>
-            <a:stretch>
-              <a:fillRect/>
-            </a:stretch>
-          </p:blipFill>
-          <p:spPr>
-            <a:xfrm>
-              <a:off x="3937000" y="1380067"/>
-              <a:ext cx="508000" cy="508000"/>
-            </a:xfrm>
-            <a:prstGeom prst="rect">
-              <a:avLst/>
-            </a:prstGeom>
-          </p:spPr>
-        </p:pic>
-        <p:sp>
-          <p:nvSpPr>
-            <p:cNvPr id="14" name="TextBox 13"/>
-            <p:cNvSpPr txBox="1"/>
-            <p:nvPr/>
-          </p:nvSpPr>
-          <p:spPr>
-            <a:xfrm>
-              <a:off x="3709458" y="1916642"/>
-              <a:ext cx="963083" cy="192617"/>
-            </a:xfrm>
-            <a:prstGeom prst="rect">
-              <a:avLst/>
-            </a:prstGeom>
-            <a:noFill/>
-          </p:spPr>
-          <p:txBody>
-            <a:bodyPr wrap="none" lIns="0" rIns="0" tIns="0" bIns="0" anchor="t">
-              <a:noAutofit/>
-            </a:bodyPr>
-            <a:lstStyle/>
-            <a:p>
-              <a:pPr algn="ctr">
-                <a:lnSpc>
-                  <a:spcPct val="100000"/>
-                </a:lnSpc>
-              </a:pPr>
-              <a:r>
-                <a:rPr sz="1166" b="0" lang="ko-KR">
-                  <a:solidFill>
-                    <a:srgbClr val="232F3E"/>
-                  </a:solidFill>
-                  <a:latin typeface="Arial"/>
-                  <a:ea typeface="Malgun Gothic"/>
-                  <a:cs typeface="Malgun Gothic"/>
-                </a:rPr>
-                <a:t>Route 53</a:t>
-              </a:r>
-            </a:p>
-          </p:txBody>
-        </p:sp>
-        <p:sp>
-          <p:nvSpPr>
-            <p:cNvPr id="15" name="TextBox 14"/>
-            <p:cNvSpPr txBox="1"/>
-            <p:nvPr/>
-          </p:nvSpPr>
-          <p:spPr>
-            <a:xfrm>
-              <a:off x="3385344" y="2084917"/>
-              <a:ext cx="1611312" cy="165100"/>
-            </a:xfrm>
-            <a:prstGeom prst="rect">
-              <a:avLst/>
-            </a:prstGeom>
-            <a:noFill/>
-          </p:spPr>
-          <p:txBody>
-            <a:bodyPr wrap="none" lIns="0" rIns="0" tIns="0" bIns="0" anchor="t">
-              <a:noAutofit/>
-            </a:bodyPr>
-            <a:lstStyle/>
-            <a:p>
-              <a:pPr algn="ctr">
-                <a:lnSpc>
-                  <a:spcPct val="100000"/>
-                </a:lnSpc>
-              </a:pPr>
-              <a:r>
-                <a:rPr sz="1000" b="0" lang="ko-KR">
-                  <a:solidFill>
-                    <a:srgbClr val="545B64"/>
-                  </a:solidFill>
-                  <a:latin typeface="Arial"/>
-                  <a:ea typeface="Malgun Gothic"/>
-                  <a:cs typeface="Malgun Gothic"/>
-                </a:rPr>
-                <a:t>DNS → ALB (alias)</a:t>
-              </a:r>
-            </a:p>
-          </p:txBody>
-        </p:sp>
-        <p:pic>
-          <p:nvPicPr>
-            <p:cNvPr id="16" name="AWS-Certificate-Manager" descr="AWS Certificate Manager"/>
+            <p:cNvPr id="15" name="AWS-Certificate-Manager" descr="AWS Certificate Manager"/>
             <p:cNvPicPr>
               <a:picLocks noChangeAspect="1"/>
             </p:cNvPicPr>
@@ -6291,7 +6127,7 @@
           </p:blipFill>
           <p:spPr>
             <a:xfrm>
-              <a:off x="5524500" y="1380067"/>
+              <a:off x="10064750" y="2650067"/>
               <a:ext cx="508000" cy="508000"/>
             </a:xfrm>
             <a:prstGeom prst="rect">
@@ -6301,13 +6137,13 @@
         </p:pic>
         <p:sp>
           <p:nvSpPr>
-            <p:cNvPr id="17" name="TextBox 16"/>
+            <p:cNvPr id="16" name="TextBox 15"/>
             <p:cNvSpPr txBox="1"/>
             <p:nvPr/>
           </p:nvSpPr>
           <p:spPr>
             <a:xfrm>
-              <a:off x="5551620" y="1916642"/>
+              <a:off x="10091870" y="3186642"/>
               <a:ext cx="453760" cy="192617"/>
             </a:xfrm>
             <a:prstGeom prst="rect">
@@ -6342,14 +6178,14 @@
         </p:sp>
         <p:sp>
           <p:nvSpPr>
-            <p:cNvPr id="18" name="TextBox 17"/>
+            <p:cNvPr id="17" name="TextBox 16"/>
             <p:cNvSpPr txBox="1"/>
             <p:nvPr/>
           </p:nvSpPr>
           <p:spPr>
             <a:xfrm>
-              <a:off x="4933156" y="2084917"/>
-              <a:ext cx="1690688" cy="165100"/>
+              <a:off x="10017125" y="3376083"/>
+              <a:ext cx="603250" cy="165100"/>
             </a:xfrm>
             <a:prstGeom prst="rect">
               <a:avLst/>
@@ -6376,14 +6212,14 @@
                   <a:ea typeface="Malgun Gothic"/>
                   <a:cs typeface="Malgun Gothic"/>
                 </a:rPr>
-                <a:t>HTTPS 리스너 인증서</a:t>
+                <a:t>인증서</a:t>
               </a:r>
             </a:p>
           </p:txBody>
         </p:sp>
         <p:pic>
           <p:nvPicPr>
-            <p:cNvPr id="19" name="AWS-WAF" descr="AWS WAF"/>
+            <p:cNvPr id="18" name="AWS-WAF" descr="AWS WAF"/>
             <p:cNvPicPr>
               <a:picLocks noChangeAspect="1"/>
             </p:cNvPicPr>
@@ -6403,7 +6239,7 @@
           </p:blipFill>
           <p:spPr>
             <a:xfrm>
-              <a:off x="7112000" y="1380067"/>
+              <a:off x="10064750" y="5084233"/>
               <a:ext cx="508000" cy="508000"/>
             </a:xfrm>
             <a:prstGeom prst="rect">
@@ -6413,13 +6249,13 @@
         </p:pic>
         <p:sp>
           <p:nvSpPr>
-            <p:cNvPr id="20" name="TextBox 19"/>
+            <p:cNvPr id="19" name="TextBox 18"/>
             <p:cNvSpPr txBox="1"/>
             <p:nvPr/>
           </p:nvSpPr>
           <p:spPr>
             <a:xfrm>
-              <a:off x="6935391" y="1916642"/>
+              <a:off x="9888141" y="5620808"/>
               <a:ext cx="861219" cy="192617"/>
             </a:xfrm>
             <a:prstGeom prst="rect">
@@ -6454,14 +6290,14 @@
         </p:sp>
         <p:sp>
           <p:nvSpPr>
-            <p:cNvPr id="21" name="TextBox 20"/>
+            <p:cNvPr id="20" name="TextBox 19"/>
             <p:cNvSpPr txBox="1"/>
             <p:nvPr/>
           </p:nvSpPr>
           <p:spPr>
             <a:xfrm>
-              <a:off x="6461125" y="2084917"/>
-              <a:ext cx="1809750" cy="165100"/>
+              <a:off x="9949656" y="5810250"/>
+              <a:ext cx="738188" cy="165100"/>
             </a:xfrm>
             <a:prstGeom prst="rect">
               <a:avLst/>
@@ -6488,14 +6324,14 @@
                   <a:ea typeface="Malgun Gothic"/>
                   <a:cs typeface="Malgun Gothic"/>
                 </a:rPr>
-                <a:t>ALB에 연결한 Web ACL</a:t>
+                <a:t>Web ACL</a:t>
               </a:r>
             </a:p>
           </p:txBody>
         </p:sp>
         <p:pic>
           <p:nvPicPr>
-            <p:cNvPr id="22" name="Amazon-CloudWatch" descr="Amazon CloudWatch"/>
+            <p:cNvPr id="21" name="Amazon-CloudWatch" descr="Amazon CloudWatch"/>
             <p:cNvPicPr>
               <a:picLocks noChangeAspect="1"/>
             </p:cNvPicPr>
@@ -6515,7 +6351,7 @@
           </p:blipFill>
           <p:spPr>
             <a:xfrm>
-              <a:off x="8699500" y="1380067"/>
+              <a:off x="11080750" y="2650067"/>
               <a:ext cx="508000" cy="508000"/>
             </a:xfrm>
             <a:prstGeom prst="rect">
@@ -6525,13 +6361,13 @@
         </p:pic>
         <p:sp>
           <p:nvSpPr>
-            <p:cNvPr id="23" name="TextBox 22"/>
+            <p:cNvPr id="22" name="TextBox 21"/>
             <p:cNvSpPr txBox="1"/>
             <p:nvPr/>
           </p:nvSpPr>
           <p:spPr>
             <a:xfrm>
-              <a:off x="8370094" y="1916642"/>
+              <a:off x="10751344" y="3186642"/>
               <a:ext cx="1166813" cy="192617"/>
             </a:xfrm>
             <a:prstGeom prst="rect">
@@ -6566,13 +6402,13 @@
         </p:sp>
         <p:sp>
           <p:nvSpPr>
-            <p:cNvPr id="24" name="TextBox 23"/>
+            <p:cNvPr id="23" name="TextBox 22"/>
             <p:cNvSpPr txBox="1"/>
             <p:nvPr/>
           </p:nvSpPr>
           <p:spPr>
             <a:xfrm>
-              <a:off x="8441531" y="2084917"/>
+              <a:off x="10822781" y="3376083"/>
               <a:ext cx="1023938" cy="165100"/>
             </a:xfrm>
             <a:prstGeom prst="rect">
@@ -6607,7 +6443,7 @@
         </p:sp>
         <p:pic>
           <p:nvPicPr>
-            <p:cNvPr id="25" name="Amazon-Simple-Storage-Service" descr="Amazon Simple Storage Service"/>
+            <p:cNvPr id="24" name="Amazon-Simple-Storage-Service" descr="Amazon Simple Storage Service"/>
             <p:cNvPicPr>
               <a:picLocks noChangeAspect="1"/>
             </p:cNvPicPr>
@@ -6627,7 +6463,7 @@
           </p:blipFill>
           <p:spPr>
             <a:xfrm>
-              <a:off x="10287000" y="1380067"/>
+              <a:off x="11080750" y="5084233"/>
               <a:ext cx="508000" cy="508000"/>
             </a:xfrm>
             <a:prstGeom prst="rect">
@@ -6637,13 +6473,13 @@
         </p:pic>
         <p:sp>
           <p:nvSpPr>
-            <p:cNvPr id="26" name="TextBox 25"/>
+            <p:cNvPr id="25" name="TextBox 24"/>
             <p:cNvSpPr txBox="1"/>
             <p:nvPr/>
           </p:nvSpPr>
           <p:spPr>
             <a:xfrm>
-              <a:off x="10365052" y="1916642"/>
+              <a:off x="11158802" y="5620808"/>
               <a:ext cx="351896" cy="192617"/>
             </a:xfrm>
             <a:prstGeom prst="rect">
@@ -6678,14 +6514,14 @@
         </p:sp>
         <p:sp>
           <p:nvSpPr>
-            <p:cNvPr id="27" name="TextBox 26"/>
+            <p:cNvPr id="26" name="TextBox 25"/>
             <p:cNvSpPr txBox="1"/>
             <p:nvPr/>
           </p:nvSpPr>
           <p:spPr>
             <a:xfrm>
-              <a:off x="9862344" y="2084917"/>
-              <a:ext cx="1357312" cy="165100"/>
+              <a:off x="10830719" y="5810250"/>
+              <a:ext cx="1008062" cy="165100"/>
             </a:xfrm>
             <a:prstGeom prst="rect">
               <a:avLst/>
@@ -6712,21 +6548,21 @@
                   <a:ea typeface="Malgun Gothic"/>
                   <a:cs typeface="Malgun Gothic"/>
                 </a:rPr>
-                <a:t>ALB 액세스 로그</a:t>
+                <a:t>액세스 로그</a:t>
               </a:r>
             </a:p>
           </p:txBody>
         </p:sp>
         <p:sp>
           <p:nvSpPr>
-            <p:cNvPr id="28" name="Rectangle 27"/>
+            <p:cNvPr id="27" name="Rectangle 26"/>
             <p:cNvSpPr/>
             <p:nvPr/>
           </p:nvSpPr>
           <p:spPr>
             <a:xfrm>
-              <a:off x="2751667" y="2311400"/>
-              <a:ext cx="8382000" cy="4148667"/>
+              <a:off x="3111500" y="1612900"/>
+              <a:ext cx="6815667" cy="4529667"/>
             </a:xfrm>
             <a:prstGeom prst="rect">
               <a:avLst/>
@@ -6750,7 +6586,7 @@
         </p:sp>
         <p:pic>
           <p:nvPicPr>
-            <p:cNvPr id="29" name="Virtual-private-cloud-VPC_32" descr="Virtual private cloud VPC_32"/>
+            <p:cNvPr id="28" name="Virtual-private-cloud-VPC_32" descr="Virtual private cloud VPC_32"/>
             <p:cNvPicPr>
               <a:picLocks noChangeAspect="1"/>
             </p:cNvPicPr>
@@ -6770,7 +6606,7 @@
           </p:blipFill>
           <p:spPr>
             <a:xfrm>
-              <a:off x="2751667" y="2311400"/>
+              <a:off x="3111500" y="1612900"/>
               <a:ext cx="254000" cy="254000"/>
             </a:xfrm>
             <a:prstGeom prst="rect">
@@ -6780,13 +6616,13 @@
         </p:pic>
         <p:sp>
           <p:nvSpPr>
-            <p:cNvPr id="30" name="TextBox 29"/>
+            <p:cNvPr id="29" name="TextBox 28"/>
             <p:cNvSpPr txBox="1"/>
             <p:nvPr/>
           </p:nvSpPr>
           <p:spPr>
             <a:xfrm>
-              <a:off x="3090333" y="2361142"/>
+              <a:off x="3450167" y="1662642"/>
               <a:ext cx="1676135" cy="192617"/>
             </a:xfrm>
             <a:prstGeom prst="rect">
@@ -6821,14 +6657,14 @@
         </p:sp>
         <p:sp>
           <p:nvSpPr>
-            <p:cNvPr id="31" name="Rectangle 30"/>
+            <p:cNvPr id="30" name="Rectangle 29"/>
             <p:cNvSpPr/>
             <p:nvPr/>
           </p:nvSpPr>
           <p:spPr>
             <a:xfrm>
-              <a:off x="2921000" y="2586567"/>
-              <a:ext cx="8043333" cy="1481667"/>
+              <a:off x="3217333" y="1930400"/>
+              <a:ext cx="6604000" cy="1608667"/>
             </a:xfrm>
             <a:prstGeom prst="rect">
               <a:avLst/>
@@ -6854,13 +6690,13 @@
         </p:sp>
         <p:sp>
           <p:nvSpPr>
-            <p:cNvPr id="32" name="TextBox 31"/>
+            <p:cNvPr id="31" name="TextBox 30"/>
             <p:cNvSpPr txBox="1"/>
             <p:nvPr/>
           </p:nvSpPr>
           <p:spPr>
             <a:xfrm>
-              <a:off x="3048000" y="2636308"/>
+              <a:off x="3344333" y="1980142"/>
               <a:ext cx="2083594" cy="192617"/>
             </a:xfrm>
             <a:prstGeom prst="rect">
@@ -6895,14 +6731,14 @@
         </p:sp>
         <p:sp>
           <p:nvSpPr>
-            <p:cNvPr id="33" name="Rectangle 32"/>
+            <p:cNvPr id="32" name="Rectangle 31"/>
             <p:cNvSpPr/>
             <p:nvPr/>
           </p:nvSpPr>
           <p:spPr>
             <a:xfrm>
-              <a:off x="2921000" y="4893733"/>
-              <a:ext cx="8043333" cy="1481667"/>
+              <a:off x="3217333" y="4449233"/>
+              <a:ext cx="6604000" cy="1608667"/>
             </a:xfrm>
             <a:prstGeom prst="rect">
               <a:avLst/>
@@ -6928,13 +6764,13 @@
         </p:sp>
         <p:sp>
           <p:nvSpPr>
-            <p:cNvPr id="34" name="TextBox 33"/>
+            <p:cNvPr id="33" name="TextBox 32"/>
             <p:cNvSpPr txBox="1"/>
             <p:nvPr/>
           </p:nvSpPr>
           <p:spPr>
             <a:xfrm>
-              <a:off x="3048000" y="4943475"/>
+              <a:off x="3344333" y="4498975"/>
               <a:ext cx="2083594" cy="192617"/>
             </a:xfrm>
             <a:prstGeom prst="rect">
@@ -6969,14 +6805,14 @@
         </p:sp>
         <p:sp>
           <p:nvSpPr>
-            <p:cNvPr id="35" name="Rectangle 34"/>
+            <p:cNvPr id="34" name="Rectangle 33"/>
             <p:cNvSpPr/>
             <p:nvPr/>
           </p:nvSpPr>
           <p:spPr>
             <a:xfrm>
-              <a:off x="3069167" y="2861733"/>
-              <a:ext cx="1587500" cy="1121833"/>
+              <a:off x="3344333" y="2247900"/>
+              <a:ext cx="1545167" cy="1206500"/>
             </a:xfrm>
             <a:prstGeom prst="rect">
               <a:avLst/>
@@ -7000,7 +6836,7 @@
         </p:sp>
         <p:pic>
           <p:nvPicPr>
-            <p:cNvPr id="36" name="Public-subnet_32" descr="Public subnet_32"/>
+            <p:cNvPr id="35" name="Public-subnet_32" descr="Public subnet_32"/>
             <p:cNvPicPr>
               <a:picLocks noChangeAspect="1"/>
             </p:cNvPicPr>
@@ -7020,7 +6856,7 @@
           </p:blipFill>
           <p:spPr>
             <a:xfrm>
-              <a:off x="3069167" y="2861733"/>
+              <a:off x="3344333" y="2247900"/>
               <a:ext cx="254000" cy="254000"/>
             </a:xfrm>
             <a:prstGeom prst="rect">
@@ -7030,13 +6866,13 @@
         </p:pic>
         <p:sp>
           <p:nvSpPr>
-            <p:cNvPr id="37" name="TextBox 36"/>
+            <p:cNvPr id="36" name="TextBox 35"/>
             <p:cNvSpPr txBox="1"/>
             <p:nvPr/>
           </p:nvSpPr>
           <p:spPr>
             <a:xfrm>
-              <a:off x="3407833" y="2911475"/>
+              <a:off x="3683000" y="2297642"/>
               <a:ext cx="1472406" cy="192617"/>
             </a:xfrm>
             <a:prstGeom prst="rect">
@@ -7071,14 +6907,14 @@
         </p:sp>
         <p:sp>
           <p:nvSpPr>
-            <p:cNvPr id="38" name="Rectangle 37"/>
+            <p:cNvPr id="37" name="Rectangle 36"/>
             <p:cNvSpPr/>
             <p:nvPr/>
           </p:nvSpPr>
           <p:spPr>
             <a:xfrm>
-              <a:off x="4868333" y="2861733"/>
-              <a:ext cx="3492500" cy="1121833"/>
+              <a:off x="5016500" y="2247900"/>
+              <a:ext cx="3302000" cy="1206500"/>
             </a:xfrm>
             <a:prstGeom prst="rect">
               <a:avLst/>
@@ -7102,7 +6938,7 @@
         </p:sp>
         <p:pic>
           <p:nvPicPr>
-            <p:cNvPr id="39" name="Private-subnet_32" descr="Private subnet_32"/>
+            <p:cNvPr id="38" name="Private-subnet_32" descr="Private subnet_32"/>
             <p:cNvPicPr>
               <a:picLocks noChangeAspect="1"/>
             </p:cNvPicPr>
@@ -7122,7 +6958,7 @@
           </p:blipFill>
           <p:spPr>
             <a:xfrm>
-              <a:off x="4868333" y="2861733"/>
+              <a:off x="5016500" y="2247900"/>
               <a:ext cx="254000" cy="254000"/>
             </a:xfrm>
             <a:prstGeom prst="rect">
@@ -7132,13 +6968,13 @@
         </p:pic>
         <p:sp>
           <p:nvSpPr>
-            <p:cNvPr id="40" name="TextBox 39"/>
+            <p:cNvPr id="39" name="TextBox 38"/>
             <p:cNvSpPr txBox="1"/>
             <p:nvPr/>
           </p:nvSpPr>
           <p:spPr>
             <a:xfrm>
-              <a:off x="5207000" y="2911475"/>
+              <a:off x="5355167" y="2297642"/>
               <a:ext cx="1166813" cy="192617"/>
             </a:xfrm>
             <a:prstGeom prst="rect">
@@ -7173,14 +7009,14 @@
         </p:sp>
         <p:sp>
           <p:nvSpPr>
-            <p:cNvPr id="41" name="Rectangle 40"/>
+            <p:cNvPr id="40" name="Rectangle 39"/>
             <p:cNvSpPr/>
             <p:nvPr/>
           </p:nvSpPr>
           <p:spPr>
             <a:xfrm>
-              <a:off x="8572500" y="2861733"/>
-              <a:ext cx="2222500" cy="1121833"/>
+              <a:off x="8445500" y="2247900"/>
+              <a:ext cx="1270000" cy="1206500"/>
             </a:xfrm>
             <a:prstGeom prst="rect">
               <a:avLst/>
@@ -7204,7 +7040,7 @@
         </p:sp>
         <p:pic>
           <p:nvPicPr>
-            <p:cNvPr id="42" name="Private-subnet_32" descr="Private subnet_32"/>
+            <p:cNvPr id="41" name="Private-subnet_32" descr="Private subnet_32"/>
             <p:cNvPicPr>
               <a:picLocks noChangeAspect="1"/>
             </p:cNvPicPr>
@@ -7224,7 +7060,7 @@
           </p:blipFill>
           <p:spPr>
             <a:xfrm>
-              <a:off x="8572500" y="2861733"/>
+              <a:off x="8445500" y="2247900"/>
               <a:ext cx="254000" cy="254000"/>
             </a:xfrm>
             <a:prstGeom prst="rect">
@@ -7234,13 +7070,13 @@
         </p:pic>
         <p:sp>
           <p:nvSpPr>
-            <p:cNvPr id="43" name="TextBox 42"/>
+            <p:cNvPr id="42" name="TextBox 41"/>
             <p:cNvSpPr txBox="1"/>
             <p:nvPr/>
           </p:nvSpPr>
           <p:spPr>
             <a:xfrm>
-              <a:off x="8911167" y="2911475"/>
+              <a:off x="8784167" y="2297642"/>
               <a:ext cx="1064948" cy="192617"/>
             </a:xfrm>
             <a:prstGeom prst="rect">
@@ -7275,14 +7111,14 @@
         </p:sp>
         <p:sp>
           <p:nvSpPr>
-            <p:cNvPr id="44" name="Rectangle 43"/>
+            <p:cNvPr id="43" name="Rectangle 42"/>
             <p:cNvSpPr/>
             <p:nvPr/>
           </p:nvSpPr>
           <p:spPr>
             <a:xfrm>
-              <a:off x="3069167" y="5168900"/>
-              <a:ext cx="1587500" cy="1121833"/>
+              <a:off x="3344333" y="4766733"/>
+              <a:ext cx="1545167" cy="1206500"/>
             </a:xfrm>
             <a:prstGeom prst="rect">
               <a:avLst/>
@@ -7306,7 +7142,7 @@
         </p:sp>
         <p:pic>
           <p:nvPicPr>
-            <p:cNvPr id="45" name="Public-subnet_32" descr="Public subnet_32"/>
+            <p:cNvPr id="44" name="Public-subnet_32" descr="Public subnet_32"/>
             <p:cNvPicPr>
               <a:picLocks noChangeAspect="1"/>
             </p:cNvPicPr>
@@ -7326,7 +7162,7 @@
           </p:blipFill>
           <p:spPr>
             <a:xfrm>
-              <a:off x="3069167" y="5168900"/>
+              <a:off x="3344333" y="4766733"/>
               <a:ext cx="254000" cy="254000"/>
             </a:xfrm>
             <a:prstGeom prst="rect">
@@ -7336,13 +7172,13 @@
         </p:pic>
         <p:sp>
           <p:nvSpPr>
-            <p:cNvPr id="46" name="TextBox 45"/>
+            <p:cNvPr id="45" name="TextBox 44"/>
             <p:cNvSpPr txBox="1"/>
             <p:nvPr/>
           </p:nvSpPr>
           <p:spPr>
             <a:xfrm>
-              <a:off x="3407833" y="5218642"/>
+              <a:off x="3683000" y="4816475"/>
               <a:ext cx="1472406" cy="192617"/>
             </a:xfrm>
             <a:prstGeom prst="rect">
@@ -7377,14 +7213,14 @@
         </p:sp>
         <p:sp>
           <p:nvSpPr>
-            <p:cNvPr id="47" name="Rectangle 46"/>
+            <p:cNvPr id="46" name="Rectangle 45"/>
             <p:cNvSpPr/>
             <p:nvPr/>
           </p:nvSpPr>
           <p:spPr>
             <a:xfrm>
-              <a:off x="4868333" y="5168900"/>
-              <a:ext cx="3492500" cy="1121833"/>
+              <a:off x="5016500" y="4766733"/>
+              <a:ext cx="3302000" cy="1206500"/>
             </a:xfrm>
             <a:prstGeom prst="rect">
               <a:avLst/>
@@ -7408,7 +7244,7 @@
         </p:sp>
         <p:pic>
           <p:nvPicPr>
-            <p:cNvPr id="48" name="Private-subnet_32" descr="Private subnet_32"/>
+            <p:cNvPr id="47" name="Private-subnet_32" descr="Private subnet_32"/>
             <p:cNvPicPr>
               <a:picLocks noChangeAspect="1"/>
             </p:cNvPicPr>
@@ -7428,7 +7264,7 @@
           </p:blipFill>
           <p:spPr>
             <a:xfrm>
-              <a:off x="4868333" y="5168900"/>
+              <a:off x="5016500" y="4766733"/>
               <a:ext cx="254000" cy="254000"/>
             </a:xfrm>
             <a:prstGeom prst="rect">
@@ -7438,13 +7274,13 @@
         </p:pic>
         <p:sp>
           <p:nvSpPr>
-            <p:cNvPr id="49" name="TextBox 48"/>
+            <p:cNvPr id="48" name="TextBox 47"/>
             <p:cNvSpPr txBox="1"/>
             <p:nvPr/>
           </p:nvSpPr>
           <p:spPr>
             <a:xfrm>
-              <a:off x="5207000" y="5218642"/>
+              <a:off x="5355167" y="4816475"/>
               <a:ext cx="1166813" cy="192617"/>
             </a:xfrm>
             <a:prstGeom prst="rect">
@@ -7479,14 +7315,14 @@
         </p:sp>
         <p:sp>
           <p:nvSpPr>
-            <p:cNvPr id="50" name="Rectangle 49"/>
+            <p:cNvPr id="49" name="Rectangle 48"/>
             <p:cNvSpPr/>
             <p:nvPr/>
           </p:nvSpPr>
           <p:spPr>
             <a:xfrm>
-              <a:off x="8572500" y="5168900"/>
-              <a:ext cx="2222500" cy="1121833"/>
+              <a:off x="8445500" y="4766733"/>
+              <a:ext cx="1270000" cy="1206500"/>
             </a:xfrm>
             <a:prstGeom prst="rect">
               <a:avLst/>
@@ -7510,7 +7346,7 @@
         </p:sp>
         <p:pic>
           <p:nvPicPr>
-            <p:cNvPr id="51" name="Private-subnet_32" descr="Private subnet_32"/>
+            <p:cNvPr id="50" name="Private-subnet_32" descr="Private subnet_32"/>
             <p:cNvPicPr>
               <a:picLocks noChangeAspect="1"/>
             </p:cNvPicPr>
@@ -7530,7 +7366,7 @@
           </p:blipFill>
           <p:spPr>
             <a:xfrm>
-              <a:off x="8572500" y="5168900"/>
+              <a:off x="8445500" y="4766733"/>
               <a:ext cx="254000" cy="254000"/>
             </a:xfrm>
             <a:prstGeom prst="rect">
@@ -7540,13 +7376,13 @@
         </p:pic>
         <p:sp>
           <p:nvSpPr>
-            <p:cNvPr id="52" name="TextBox 51"/>
+            <p:cNvPr id="51" name="TextBox 50"/>
             <p:cNvSpPr txBox="1"/>
             <p:nvPr/>
           </p:nvSpPr>
           <p:spPr>
             <a:xfrm>
-              <a:off x="8911167" y="5218642"/>
+              <a:off x="8784167" y="4816475"/>
               <a:ext cx="1064948" cy="192617"/>
             </a:xfrm>
             <a:prstGeom prst="rect">
@@ -7581,7 +7417,7 @@
         </p:sp>
         <p:pic>
           <p:nvPicPr>
-            <p:cNvPr id="53" name="Amazon-VPC_NAT-Gateway" descr="Amazon VPC_NAT Gateway"/>
+            <p:cNvPr id="52" name="Amazon-VPC_NAT-Gateway" descr="Amazon VPC_NAT Gateway"/>
             <p:cNvPicPr>
               <a:picLocks noChangeAspect="1"/>
             </p:cNvPicPr>
@@ -7601,7 +7437,7 @@
           </p:blipFill>
           <p:spPr>
             <a:xfrm>
-              <a:off x="3608917" y="3200400"/>
+              <a:off x="3862917" y="2650067"/>
               <a:ext cx="508000" cy="508000"/>
             </a:xfrm>
             <a:prstGeom prst="rect">
@@ -7611,13 +7447,13 @@
         </p:pic>
         <p:sp>
           <p:nvSpPr>
-            <p:cNvPr id="54" name="TextBox 53"/>
+            <p:cNvPr id="53" name="TextBox 52"/>
             <p:cNvSpPr txBox="1"/>
             <p:nvPr/>
           </p:nvSpPr>
           <p:spPr>
             <a:xfrm>
-              <a:off x="3228578" y="3736975"/>
+              <a:off x="3482578" y="3186642"/>
               <a:ext cx="1268677" cy="192617"/>
             </a:xfrm>
             <a:prstGeom prst="rect">
@@ -7652,7 +7488,7 @@
         </p:sp>
         <p:pic>
           <p:nvPicPr>
-            <p:cNvPr id="55" name="Amazon-VPC_NAT-Gateway" descr="Amazon VPC_NAT Gateway"/>
+            <p:cNvPr id="54" name="Amazon-VPC_NAT-Gateway" descr="Amazon VPC_NAT Gateway"/>
             <p:cNvPicPr>
               <a:picLocks noChangeAspect="1"/>
             </p:cNvPicPr>
@@ -7672,7 +7508,7 @@
           </p:blipFill>
           <p:spPr>
             <a:xfrm>
-              <a:off x="3608917" y="5507567"/>
+              <a:off x="3862917" y="5084233"/>
               <a:ext cx="508000" cy="508000"/>
             </a:xfrm>
             <a:prstGeom prst="rect">
@@ -7682,13 +7518,13 @@
         </p:pic>
         <p:sp>
           <p:nvSpPr>
-            <p:cNvPr id="56" name="TextBox 55"/>
+            <p:cNvPr id="55" name="TextBox 54"/>
             <p:cNvSpPr txBox="1"/>
             <p:nvPr/>
           </p:nvSpPr>
           <p:spPr>
             <a:xfrm>
-              <a:off x="3228578" y="6044142"/>
+              <a:off x="3482578" y="5620808"/>
               <a:ext cx="1268677" cy="192617"/>
             </a:xfrm>
             <a:prstGeom prst="rect">
@@ -7723,14 +7559,14 @@
         </p:sp>
         <p:sp>
           <p:nvSpPr>
-            <p:cNvPr id="57" name="Rectangle 56"/>
+            <p:cNvPr id="56" name="Rectangle 55"/>
             <p:cNvSpPr/>
             <p:nvPr/>
           </p:nvSpPr>
           <p:spPr>
             <a:xfrm>
-              <a:off x="6201833" y="2904067"/>
-              <a:ext cx="1947333" cy="3323167"/>
+              <a:off x="6286500" y="2332567"/>
+              <a:ext cx="1947333" cy="3556000"/>
             </a:xfrm>
             <a:prstGeom prst="rect">
               <a:avLst/>
@@ -7756,7 +7592,7 @@
         </p:sp>
         <p:pic>
           <p:nvPicPr>
-            <p:cNvPr id="58" name="Auto-Scaling-group_32" descr="Auto Scaling group_32"/>
+            <p:cNvPr id="57" name="Auto-Scaling-group_32" descr="Auto Scaling group_32"/>
             <p:cNvPicPr>
               <a:picLocks noChangeAspect="1"/>
             </p:cNvPicPr>
@@ -7776,7 +7612,7 @@
           </p:blipFill>
           <p:spPr>
             <a:xfrm>
-              <a:off x="6201833" y="2904067"/>
+              <a:off x="6286500" y="2332567"/>
               <a:ext cx="254000" cy="254000"/>
             </a:xfrm>
             <a:prstGeom prst="rect">
@@ -7786,14 +7622,14 @@
         </p:pic>
         <p:sp>
           <p:nvSpPr>
-            <p:cNvPr id="59" name="TextBox 58"/>
+            <p:cNvPr id="58" name="TextBox 57"/>
             <p:cNvSpPr txBox="1"/>
             <p:nvPr/>
           </p:nvSpPr>
           <p:spPr>
             <a:xfrm>
-              <a:off x="6540500" y="2963862"/>
-              <a:ext cx="1840177" cy="178858"/>
+              <a:off x="6625167" y="2382308"/>
+              <a:ext cx="1981729" cy="192617"/>
             </a:xfrm>
             <a:prstGeom prst="rect">
               <a:avLst/>
@@ -7812,7 +7648,7 @@
                 </a:lnSpc>
               </a:pPr>
               <a:r>
-                <a:rPr sz="1083" b="1" lang="ko-KR">
+                <a:rPr sz="1166" b="1" lang="ko-KR">
                   <a:solidFill>
                     <a:srgbClr val="ED7100"/>
                   </a:solidFill>
@@ -7827,7 +7663,7 @@
         </p:sp>
         <p:pic>
           <p:nvPicPr>
-            <p:cNvPr id="60" name="Amazon-EC2" descr="Amazon EC2"/>
+            <p:cNvPr id="59" name="Amazon-EC2" descr="Amazon EC2"/>
             <p:cNvPicPr>
               <a:picLocks noChangeAspect="1"/>
             </p:cNvPicPr>
@@ -7847,7 +7683,7 @@
           </p:blipFill>
           <p:spPr>
             <a:xfrm>
-              <a:off x="6477000" y="3200400"/>
+              <a:off x="6625167" y="2650067"/>
               <a:ext cx="508000" cy="508000"/>
             </a:xfrm>
             <a:prstGeom prst="rect">
@@ -7857,13 +7693,13 @@
         </p:pic>
         <p:sp>
           <p:nvSpPr>
-            <p:cNvPr id="61" name="TextBox 60"/>
+            <p:cNvPr id="60" name="TextBox 59"/>
             <p:cNvSpPr txBox="1"/>
             <p:nvPr/>
           </p:nvSpPr>
           <p:spPr>
             <a:xfrm>
-              <a:off x="6504120" y="3736975"/>
+              <a:off x="6652286" y="3186642"/>
               <a:ext cx="453760" cy="192617"/>
             </a:xfrm>
             <a:prstGeom prst="rect">
@@ -7898,7 +7734,7 @@
         </p:sp>
         <p:pic>
           <p:nvPicPr>
-            <p:cNvPr id="62" name="Amazon-EC2" descr="Amazon EC2"/>
+            <p:cNvPr id="61" name="Amazon-EC2" descr="Amazon EC2"/>
             <p:cNvPicPr>
               <a:picLocks noChangeAspect="1"/>
             </p:cNvPicPr>
@@ -7918,7 +7754,7 @@
           </p:blipFill>
           <p:spPr>
             <a:xfrm>
-              <a:off x="7429500" y="3200400"/>
+              <a:off x="7641167" y="2650067"/>
               <a:ext cx="508000" cy="508000"/>
             </a:xfrm>
             <a:prstGeom prst="rect">
@@ -7928,13 +7764,13 @@
         </p:pic>
         <p:sp>
           <p:nvSpPr>
-            <p:cNvPr id="63" name="TextBox 62"/>
+            <p:cNvPr id="62" name="TextBox 61"/>
             <p:cNvSpPr txBox="1"/>
             <p:nvPr/>
           </p:nvSpPr>
           <p:spPr>
             <a:xfrm>
-              <a:off x="7456620" y="3736975"/>
+              <a:off x="7668286" y="3186642"/>
               <a:ext cx="453760" cy="192617"/>
             </a:xfrm>
             <a:prstGeom prst="rect">
@@ -7969,7 +7805,7 @@
         </p:sp>
         <p:pic>
           <p:nvPicPr>
-            <p:cNvPr id="64" name="Amazon-EC2" descr="Amazon EC2"/>
+            <p:cNvPr id="63" name="Amazon-EC2" descr="Amazon EC2"/>
             <p:cNvPicPr>
               <a:picLocks noChangeAspect="1"/>
             </p:cNvPicPr>
@@ -7989,7 +7825,7 @@
           </p:blipFill>
           <p:spPr>
             <a:xfrm>
-              <a:off x="6477000" y="5507567"/>
+              <a:off x="6625167" y="5084233"/>
               <a:ext cx="508000" cy="508000"/>
             </a:xfrm>
             <a:prstGeom prst="rect">
@@ -7999,13 +7835,13 @@
         </p:pic>
         <p:sp>
           <p:nvSpPr>
-            <p:cNvPr id="65" name="TextBox 64"/>
+            <p:cNvPr id="64" name="TextBox 63"/>
             <p:cNvSpPr txBox="1"/>
             <p:nvPr/>
           </p:nvSpPr>
           <p:spPr>
             <a:xfrm>
-              <a:off x="6504120" y="6044142"/>
+              <a:off x="6652286" y="5620808"/>
               <a:ext cx="453760" cy="192617"/>
             </a:xfrm>
             <a:prstGeom prst="rect">
@@ -8040,7 +7876,7 @@
         </p:sp>
         <p:pic>
           <p:nvPicPr>
-            <p:cNvPr id="66" name="Amazon-EC2" descr="Amazon EC2"/>
+            <p:cNvPr id="65" name="Amazon-EC2" descr="Amazon EC2"/>
             <p:cNvPicPr>
               <a:picLocks noChangeAspect="1"/>
             </p:cNvPicPr>
@@ -8060,7 +7896,7 @@
           </p:blipFill>
           <p:spPr>
             <a:xfrm>
-              <a:off x="7429500" y="5507567"/>
+              <a:off x="7641167" y="5084233"/>
               <a:ext cx="508000" cy="508000"/>
             </a:xfrm>
             <a:prstGeom prst="rect">
@@ -8070,13 +7906,13 @@
         </p:pic>
         <p:sp>
           <p:nvSpPr>
-            <p:cNvPr id="67" name="TextBox 66"/>
+            <p:cNvPr id="66" name="TextBox 65"/>
             <p:cNvSpPr txBox="1"/>
             <p:nvPr/>
           </p:nvSpPr>
           <p:spPr>
             <a:xfrm>
-              <a:off x="7456620" y="6044142"/>
+              <a:off x="7668286" y="5620808"/>
               <a:ext cx="453760" cy="192617"/>
             </a:xfrm>
             <a:prstGeom prst="rect">
@@ -8111,7 +7947,7 @@
         </p:sp>
         <p:pic>
           <p:nvPicPr>
-            <p:cNvPr id="68" name="Amazon-RDS" descr="Amazon RDS"/>
+            <p:cNvPr id="67" name="Amazon-RDS" descr="Amazon RDS"/>
             <p:cNvPicPr>
               <a:picLocks noChangeAspect="1"/>
             </p:cNvPicPr>
@@ -8131,7 +7967,7 @@
           </p:blipFill>
           <p:spPr>
             <a:xfrm>
-              <a:off x="9652000" y="3200400"/>
+              <a:off x="8826500" y="2650067"/>
               <a:ext cx="508000" cy="508000"/>
             </a:xfrm>
             <a:prstGeom prst="rect">
@@ -8141,13 +7977,13 @@
         </p:pic>
         <p:sp>
           <p:nvSpPr>
-            <p:cNvPr id="69" name="TextBox 68"/>
+            <p:cNvPr id="68" name="TextBox 67"/>
             <p:cNvSpPr txBox="1"/>
             <p:nvPr/>
           </p:nvSpPr>
           <p:spPr>
             <a:xfrm>
-              <a:off x="9271661" y="3736975"/>
+              <a:off x="8446161" y="3186642"/>
               <a:ext cx="1268677" cy="192617"/>
             </a:xfrm>
             <a:prstGeom prst="rect">
@@ -8182,7 +8018,7 @@
         </p:sp>
         <p:pic>
           <p:nvPicPr>
-            <p:cNvPr id="70" name="Amazon-RDS" descr="Amazon RDS"/>
+            <p:cNvPr id="69" name="Amazon-RDS" descr="Amazon RDS"/>
             <p:cNvPicPr>
               <a:picLocks noChangeAspect="1"/>
             </p:cNvPicPr>
@@ -8202,7 +8038,7 @@
           </p:blipFill>
           <p:spPr>
             <a:xfrm>
-              <a:off x="9652000" y="5507567"/>
+              <a:off x="8826500" y="5084233"/>
               <a:ext cx="508000" cy="508000"/>
             </a:xfrm>
             <a:prstGeom prst="rect">
@@ -8212,13 +8048,13 @@
         </p:pic>
         <p:sp>
           <p:nvSpPr>
-            <p:cNvPr id="71" name="TextBox 70"/>
+            <p:cNvPr id="70" name="TextBox 69"/>
             <p:cNvSpPr txBox="1"/>
             <p:nvPr/>
           </p:nvSpPr>
           <p:spPr>
             <a:xfrm>
-              <a:off x="9271661" y="6044142"/>
+              <a:off x="8446161" y="5620808"/>
               <a:ext cx="1268677" cy="192617"/>
             </a:xfrm>
             <a:prstGeom prst="rect">
@@ -8253,7 +8089,7 @@
         </p:sp>
         <p:pic>
           <p:nvPicPr>
-            <p:cNvPr id="72" name="Elastic-Load-Balancing_Application-Load-Balancer" descr="Elastic Load Balancing_Application Load Balancer"/>
+            <p:cNvPr id="71" name="Elastic-Load-Balancing_Application-Load-Balancer" descr="Elastic Load Balancing_Application Load Balancer"/>
             <p:cNvPicPr>
               <a:picLocks noChangeAspect="1"/>
             </p:cNvPicPr>
@@ -8273,7 +8109,7 @@
           </p:blipFill>
           <p:spPr>
             <a:xfrm>
-              <a:off x="3608917" y="4131733"/>
+              <a:off x="3862917" y="3623733"/>
               <a:ext cx="508000" cy="508000"/>
             </a:xfrm>
             <a:prstGeom prst="rect">
@@ -8283,13 +8119,13 @@
         </p:pic>
         <p:sp>
           <p:nvSpPr>
-            <p:cNvPr id="73" name="TextBox 72"/>
+            <p:cNvPr id="72" name="TextBox 71"/>
             <p:cNvSpPr txBox="1"/>
             <p:nvPr/>
           </p:nvSpPr>
           <p:spPr>
             <a:xfrm>
-              <a:off x="3636036" y="4668308"/>
+              <a:off x="3890036" y="4160308"/>
               <a:ext cx="453760" cy="192617"/>
             </a:xfrm>
             <a:prstGeom prst="rect">
@@ -8324,13 +8160,13 @@
         </p:sp>
         <p:sp>
           <p:nvSpPr>
-            <p:cNvPr id="74" name="Rectangle 73"/>
+            <p:cNvPr id="73" name="Rectangle 72"/>
             <p:cNvSpPr/>
             <p:nvPr/>
           </p:nvSpPr>
           <p:spPr>
             <a:xfrm>
-              <a:off x="2497667" y="4131733"/>
+              <a:off x="2857500" y="3623733"/>
               <a:ext cx="508000" cy="740833"/>
             </a:xfrm>
             <a:prstGeom prst="rect">
@@ -8353,7 +8189,7 @@
         </p:sp>
         <p:pic>
           <p:nvPicPr>
-            <p:cNvPr id="75" name="Amazon-VPC_Internet-Gateway" descr="Amazon VPC_Internet Gateway"/>
+            <p:cNvPr id="74" name="Amazon-VPC_Internet-Gateway" descr="Amazon VPC_Internet Gateway"/>
             <p:cNvPicPr>
               <a:picLocks noChangeAspect="1"/>
             </p:cNvPicPr>
@@ -8373,7 +8209,7 @@
           </p:blipFill>
           <p:spPr>
             <a:xfrm>
-              <a:off x="2497667" y="4131733"/>
+              <a:off x="2857500" y="3623733"/>
               <a:ext cx="508000" cy="508000"/>
             </a:xfrm>
             <a:prstGeom prst="rect">
@@ -8383,13 +8219,13 @@
         </p:pic>
         <p:sp>
           <p:nvSpPr>
-            <p:cNvPr id="76" name="TextBox 75"/>
+            <p:cNvPr id="75" name="TextBox 74"/>
             <p:cNvSpPr txBox="1"/>
             <p:nvPr/>
           </p:nvSpPr>
           <p:spPr>
             <a:xfrm>
-              <a:off x="2524786" y="4668308"/>
+              <a:off x="2884620" y="4160308"/>
               <a:ext cx="453760" cy="192617"/>
             </a:xfrm>
             <a:prstGeom prst="rect">
@@ -8424,14 +8260,14 @@
         </p:sp>
         <p:cxnSp>
           <p:nvCxnSpPr>
-            <p:cNvPr id="77" name="Connector 76"/>
+            <p:cNvPr id="76" name="Connector 75"/>
             <p:cNvCxnSpPr/>
             <p:nvPr/>
           </p:nvCxnSpPr>
           <p:spPr>
             <a:xfrm>
-              <a:off x="1312333" y="4385733"/>
-              <a:ext cx="1143000" cy="0"/>
+              <a:off x="952500" y="3877733"/>
+              <a:ext cx="1862667" cy="0"/>
             </a:xfrm>
             <a:prstGeom prst="line">
               <a:avLst/>
@@ -8448,13 +8284,13 @@
         </p:cxnSp>
         <p:sp>
           <p:nvSpPr>
-            <p:cNvPr id="78" name="TextBox 77"/>
+            <p:cNvPr id="77" name="TextBox 76"/>
             <p:cNvSpPr txBox="1"/>
             <p:nvPr/>
           </p:nvSpPr>
           <p:spPr>
             <a:xfrm>
-              <a:off x="1235604" y="4169833"/>
+              <a:off x="844021" y="3661833"/>
               <a:ext cx="1000125" cy="165100"/>
             </a:xfrm>
             <a:prstGeom prst="rect">
@@ -8489,14 +8325,14 @@
         </p:sp>
         <p:cxnSp>
           <p:nvCxnSpPr>
-            <p:cNvPr id="79" name="Connector 78"/>
+            <p:cNvPr id="78" name="Connector 77"/>
             <p:cNvCxnSpPr/>
             <p:nvPr/>
           </p:nvCxnSpPr>
           <p:spPr>
             <a:xfrm>
-              <a:off x="3048000" y="4385733"/>
-              <a:ext cx="518583" cy="0"/>
+              <a:off x="3407833" y="3877733"/>
+              <a:ext cx="412750" cy="0"/>
             </a:xfrm>
             <a:prstGeom prst="line">
               <a:avLst/>
@@ -8513,14 +8349,14 @@
         </p:cxnSp>
         <p:cxnSp>
           <p:nvCxnSpPr>
-            <p:cNvPr id="80" name="Connector 79"/>
+            <p:cNvPr id="79" name="Connector 78"/>
             <p:cNvCxnSpPr/>
             <p:nvPr/>
           </p:nvCxnSpPr>
           <p:spPr>
             <a:xfrm>
-              <a:off x="4159250" y="4385733"/>
-              <a:ext cx="2000250" cy="0"/>
+              <a:off x="4413250" y="3877733"/>
+              <a:ext cx="1830917" cy="0"/>
             </a:xfrm>
             <a:prstGeom prst="line">
               <a:avLst/>
@@ -8537,13 +8373,13 @@
         </p:cxnSp>
         <p:sp>
           <p:nvSpPr>
-            <p:cNvPr id="81" name="TextBox 80"/>
+            <p:cNvPr id="80" name="TextBox 79"/>
             <p:cNvSpPr txBox="1"/>
             <p:nvPr/>
           </p:nvSpPr>
           <p:spPr>
             <a:xfrm>
-              <a:off x="4751917" y="4169833"/>
+              <a:off x="4921250" y="3661833"/>
               <a:ext cx="825500" cy="165100"/>
             </a:xfrm>
             <a:prstGeom prst="rect">
@@ -8578,14 +8414,14 @@
         </p:sp>
         <p:cxnSp>
           <p:nvCxnSpPr>
-            <p:cNvPr id="82" name="Connector 81"/>
+            <p:cNvPr id="81" name="Connector 80"/>
             <p:cNvCxnSpPr/>
             <p:nvPr/>
           </p:nvCxnSpPr>
           <p:spPr>
             <a:xfrm>
-              <a:off x="8191500" y="3454400"/>
-              <a:ext cx="1418167" cy="0"/>
+              <a:off x="8233833" y="2904067"/>
+              <a:ext cx="550334" cy="0"/>
             </a:xfrm>
             <a:prstGeom prst="line">
               <a:avLst/>
@@ -8602,13 +8438,13 @@
         </p:cxnSp>
         <p:sp>
           <p:nvSpPr>
-            <p:cNvPr id="83" name="TextBox 82"/>
+            <p:cNvPr id="82" name="TextBox 81"/>
             <p:cNvSpPr txBox="1"/>
             <p:nvPr/>
           </p:nvSpPr>
           <p:spPr>
             <a:xfrm>
-              <a:off x="8706115" y="3238500"/>
+              <a:off x="8441531" y="2698750"/>
               <a:ext cx="388938" cy="165100"/>
             </a:xfrm>
             <a:prstGeom prst="rect">
@@ -8643,14 +8479,14 @@
         </p:sp>
         <p:sp>
           <p:nvSpPr>
-            <p:cNvPr id="84" name="Freeform 83"/>
+            <p:cNvPr id="83" name="Freeform 82"/>
             <p:cNvSpPr/>
             <p:nvPr/>
           </p:nvSpPr>
           <p:spPr>
             <a:xfrm>
-              <a:off x="1016000" y="1655233"/>
-              <a:ext cx="2878667" cy="2434167"/>
+              <a:off x="656167" y="1612900"/>
+              <a:ext cx="1322916" cy="1968500"/>
             </a:xfrm>
             <a:custGeom>
               <a:avLst/>
@@ -8659,15 +8495,15 @@
               <a:cxnLst/>
               <a:rect l="l" t="t" r="r" b="b"/>
               <a:pathLst>
-                <a:path w="2878667" h="2434167">
+                <a:path w="1322916" h="1968500">
                   <a:moveTo>
-                    <a:pt x="0" y="2434167"/>
+                    <a:pt x="0" y="1968500"/>
                   </a:moveTo>
                   <a:lnTo>
                     <a:pt x="0" y="0"/>
                   </a:lnTo>
                   <a:lnTo>
-                    <a:pt x="2878667" y="0"/>
+                    <a:pt x="1322916" y="0"/>
                   </a:lnTo>
                 </a:path>
               </a:pathLst>
@@ -8694,13 +8530,13 @@
         </p:sp>
         <p:sp>
           <p:nvSpPr>
-            <p:cNvPr id="85" name="TextBox 84"/>
+            <p:cNvPr id="84" name="TextBox 83"/>
             <p:cNvSpPr txBox="1"/>
             <p:nvPr/>
           </p:nvSpPr>
           <p:spPr>
             <a:xfrm>
-              <a:off x="3053292" y="1725083"/>
+              <a:off x="894292" y="1407583"/>
               <a:ext cx="793750" cy="165100"/>
             </a:xfrm>
             <a:prstGeom prst="rect">
@@ -8735,14 +8571,14 @@
         </p:sp>
         <p:cxnSp>
           <p:nvCxnSpPr>
-            <p:cNvPr id="86" name="Connector 85"/>
+            <p:cNvPr id="85" name="Connector 84"/>
             <p:cNvCxnSpPr/>
             <p:nvPr/>
           </p:nvCxnSpPr>
           <p:spPr>
             <a:xfrm flipH="1">
-              <a:off x="4159250" y="3454400"/>
-              <a:ext cx="2000250" cy="0"/>
+              <a:off x="4413250" y="2904067"/>
+              <a:ext cx="1830917" cy="0"/>
             </a:xfrm>
             <a:prstGeom prst="line">
               <a:avLst/>
@@ -8761,13 +8597,13 @@
         </p:cxnSp>
         <p:sp>
           <p:nvSpPr>
-            <p:cNvPr id="87" name="TextBox 86"/>
+            <p:cNvPr id="86" name="TextBox 85"/>
             <p:cNvSpPr txBox="1"/>
             <p:nvPr/>
           </p:nvSpPr>
           <p:spPr>
             <a:xfrm>
-              <a:off x="4979458" y="3238500"/>
+              <a:off x="5169958" y="2698750"/>
               <a:ext cx="920750" cy="165100"/>
             </a:xfrm>
             <a:prstGeom prst="rect">
@@ -8802,14 +8638,14 @@
         </p:sp>
         <p:cxnSp>
           <p:nvCxnSpPr>
-            <p:cNvPr id="88" name="Connector 87"/>
+            <p:cNvPr id="87" name="Connector 86"/>
             <p:cNvCxnSpPr/>
             <p:nvPr/>
           </p:nvCxnSpPr>
           <p:spPr>
             <a:xfrm flipH="1">
-              <a:off x="4159250" y="5761567"/>
-              <a:ext cx="2000250" cy="0"/>
+              <a:off x="4413250" y="5338233"/>
+              <a:ext cx="1830917" cy="0"/>
             </a:xfrm>
             <a:prstGeom prst="line">
               <a:avLst/>
@@ -8828,13 +8664,13 @@
         </p:cxnSp>
         <p:sp>
           <p:nvSpPr>
-            <p:cNvPr id="89" name="TextBox 88"/>
+            <p:cNvPr id="88" name="TextBox 87"/>
             <p:cNvSpPr txBox="1"/>
             <p:nvPr/>
           </p:nvSpPr>
           <p:spPr>
             <a:xfrm>
-              <a:off x="4979458" y="5545667"/>
+              <a:off x="5169958" y="5132917"/>
               <a:ext cx="920750" cy="165100"/>
             </a:xfrm>
             <a:prstGeom prst="rect">
@@ -8867,20 +8703,41 @@
             </a:p>
           </p:txBody>
         </p:sp>
-        <p:cxnSp>
-          <p:nvCxnSpPr>
-            <p:cNvPr id="90" name="Connector 89"/>
-            <p:cNvCxnSpPr/>
-            <p:nvPr/>
-          </p:nvCxnSpPr>
-          <p:spPr>
-            <a:xfrm>
-              <a:off x="9906000" y="3962400"/>
-              <a:ext cx="0" cy="1502833"/>
-            </a:xfrm>
-            <a:prstGeom prst="line">
-              <a:avLst/>
-            </a:prstGeom>
+        <p:sp>
+          <p:nvSpPr>
+            <p:cNvPr id="89" name="Freeform 88"/>
+            <p:cNvSpPr/>
+            <p:nvPr/>
+          </p:nvSpPr>
+          <p:spPr>
+            <a:xfrm>
+              <a:off x="9376833" y="3031067"/>
+              <a:ext cx="211667" cy="2180166"/>
+            </a:xfrm>
+            <a:custGeom>
+              <a:avLst/>
+              <a:gdLst/>
+              <a:ahLst/>
+              <a:cxnLst/>
+              <a:rect l="l" t="t" r="r" b="b"/>
+              <a:pathLst>
+                <a:path w="211667" h="2180166">
+                  <a:moveTo>
+                    <a:pt x="0" y="0"/>
+                  </a:moveTo>
+                  <a:lnTo>
+                    <a:pt x="211667" y="0"/>
+                  </a:lnTo>
+                  <a:lnTo>
+                    <a:pt x="211667" y="2180166"/>
+                  </a:lnTo>
+                  <a:lnTo>
+                    <a:pt x="0" y="2180166"/>
+                  </a:lnTo>
+                </a:path>
+              </a:pathLst>
+            </a:custGeom>
+            <a:noFill/>
             <a:ln w="15875">
               <a:solidFill>
                 <a:srgbClr val="232F3E"/>
@@ -8892,7 +8749,55 @@
               <a:tailEnd type="triangle" w="med" len="med"/>
             </a:ln>
           </p:spPr>
-        </p:cxnSp>
+          <p:txBody>
+            <a:bodyPr rtlCol="0" anchor="ctr"/>
+            <a:lstStyle/>
+            <a:p>
+              <a:pPr algn="ctr"/>
+            </a:p>
+          </p:txBody>
+        </p:sp>
+        <p:sp>
+          <p:nvSpPr>
+            <p:cNvPr id="90" name="TextBox 89"/>
+            <p:cNvSpPr txBox="1"/>
+            <p:nvPr/>
+          </p:nvSpPr>
+          <p:spPr>
+            <a:xfrm>
+              <a:off x="8495771" y="3915833"/>
+              <a:ext cx="1008062" cy="165100"/>
+            </a:xfrm>
+            <a:prstGeom prst="rect">
+              <a:avLst/>
+            </a:prstGeom>
+            <a:noFill/>
+          </p:spPr>
+          <p:txBody>
+            <a:bodyPr wrap="none" lIns="0" rIns="0" tIns="0" bIns="0" anchor="t">
+              <a:noAutofit/>
+            </a:bodyPr>
+            <a:lstStyle/>
+            <a:p>
+              <a:pPr algn="r">
+                <a:lnSpc>
+                  <a:spcPct val="100000"/>
+                </a:lnSpc>
+              </a:pPr>
+              <a:r>
+                <a:rPr sz="1000" b="0" lang="ko-KR">
+                  <a:solidFill>
+                    <a:srgbClr val="545B64"/>
+                  </a:solidFill>
+                  <a:latin typeface="Arial"/>
+                  <a:ea typeface="Malgun Gothic"/>
+                  <a:cs typeface="Malgun Gothic"/>
+                </a:rPr>
+                <a:t>동기식 복제</a:t>
+              </a:r>
+            </a:p>
+          </p:txBody>
+        </p:sp>
         <p:sp>
           <p:nvSpPr>
             <p:cNvPr id="91" name="TextBox 90"/>
@@ -8901,8 +8806,8 @@
           </p:nvSpPr>
           <p:spPr>
             <a:xfrm>
-              <a:off x="10011833" y="4624917"/>
-              <a:ext cx="1008062" cy="165100"/>
+              <a:off x="402167" y="6413500"/>
+              <a:ext cx="7556500" cy="165100"/>
             </a:xfrm>
             <a:prstGeom prst="rect">
               <a:avLst/>
@@ -8929,7 +8834,7 @@
                   <a:ea typeface="Malgun Gothic"/>
                   <a:cs typeface="Malgun Gothic"/>
                 </a:rPr>
-                <a:t>동기식 복제</a:t>
+                <a:t>Internet-facing ALB · 두 AZ에 걸친 단일 관리형 로드 밸런서 · AWS WAF 연결 · RDS Multi-AZ</a:t>
               </a:r>
             </a:p>
           </p:txBody>
@@ -8997,10 +8902,10 @@
         </p:nvGrpSpPr>
         <p:grpSpPr>
           <a:xfrm>
-            <a:off x="306255" y="956733"/>
-            <a:ext cx="11547078" cy="5630333"/>
-            <a:chOff x="306255" y="956733"/>
-            <a:chExt cx="11547078" cy="5630333"/>
+            <a:off x="242755" y="935567"/>
+            <a:ext cx="12052433" cy="5685366"/>
+            <a:chOff x="242755" y="935567"/>
+            <a:chExt cx="12052433" cy="5685366"/>
           </a:xfrm>
         </p:grpSpPr>
         <p:pic>
@@ -9025,7 +8930,7 @@
           </p:blipFill>
           <p:spPr>
             <a:xfrm>
-              <a:off x="381000" y="3845983"/>
+              <a:off x="317500" y="3539067"/>
               <a:ext cx="508000" cy="508000"/>
             </a:xfrm>
             <a:prstGeom prst="rect">
@@ -9041,7 +8946,7 @@
           </p:nvSpPr>
           <p:spPr>
             <a:xfrm>
-              <a:off x="306255" y="4403725"/>
+              <a:off x="242755" y="4096808"/>
               <a:ext cx="657490" cy="192617"/>
             </a:xfrm>
             <a:prstGeom prst="rect">
@@ -9082,8 +8987,8 @@
           </p:nvSpPr>
           <p:spPr>
             <a:xfrm>
-              <a:off x="1778000" y="956733"/>
-              <a:ext cx="10075333" cy="5630333"/>
+              <a:off x="1714500" y="935567"/>
+              <a:ext cx="10202333" cy="5291667"/>
             </a:xfrm>
             <a:prstGeom prst="rect">
               <a:avLst/>
@@ -9127,8 +9032,8 @@
           </p:blipFill>
           <p:spPr>
             <a:xfrm>
-              <a:off x="1778000" y="956733"/>
-              <a:ext cx="338667" cy="338667"/>
+              <a:off x="1714500" y="935567"/>
+              <a:ext cx="254000" cy="254000"/>
             </a:xfrm>
             <a:prstGeom prst="rect">
               <a:avLst/>
@@ -9143,7 +9048,7 @@
           </p:nvSpPr>
           <p:spPr>
             <a:xfrm>
-              <a:off x="2222500" y="1038754"/>
+              <a:off x="2053167" y="1017588"/>
               <a:ext cx="1141016" cy="206375"/>
             </a:xfrm>
             <a:prstGeom prst="rect">
@@ -9184,8 +9089,8 @@
           </p:nvSpPr>
           <p:spPr>
             <a:xfrm>
-              <a:off x="1989667" y="1358900"/>
-              <a:ext cx="9736667" cy="5122333"/>
+              <a:off x="1926167" y="1295400"/>
+              <a:ext cx="9906000" cy="4847167"/>
             </a:xfrm>
             <a:prstGeom prst="rect">
               <a:avLst/>
@@ -9231,7 +9136,7 @@
           </p:blipFill>
           <p:spPr>
             <a:xfrm>
-              <a:off x="1989667" y="1358900"/>
+              <a:off x="1926167" y="1295400"/>
               <a:ext cx="254000" cy="254000"/>
             </a:xfrm>
             <a:prstGeom prst="rect">
@@ -9247,7 +9152,7 @@
           </p:nvSpPr>
           <p:spPr>
             <a:xfrm>
-              <a:off x="2328333" y="1408642"/>
+              <a:off x="2264833" y="1345142"/>
               <a:ext cx="759354" cy="192617"/>
             </a:xfrm>
             <a:prstGeom prst="rect">
@@ -9282,55 +9187,14 @@
         </p:sp>
         <p:sp>
           <p:nvSpPr>
-            <p:cNvPr id="12" name="TextBox 11"/>
-            <p:cNvSpPr txBox="1"/>
-            <p:nvPr/>
-          </p:nvSpPr>
-          <p:spPr>
-            <a:xfrm>
-              <a:off x="3320521" y="1428750"/>
-              <a:ext cx="8278813" cy="165100"/>
-            </a:xfrm>
-            <a:prstGeom prst="rect">
-              <a:avLst/>
-            </a:prstGeom>
-            <a:noFill/>
-          </p:spPr>
-          <p:txBody>
-            <a:bodyPr wrap="none" lIns="0" rIns="0" tIns="0" bIns="0" anchor="t">
-              <a:noAutofit/>
-            </a:bodyPr>
-            <a:lstStyle/>
-            <a:p>
-              <a:pPr algn="r">
-                <a:lnSpc>
-                  <a:spcPct val="100000"/>
-                </a:lnSpc>
-              </a:pPr>
-              <a:r>
-                <a:rPr sz="1000" b="0" lang="ko-KR">
-                  <a:solidFill>
-                    <a:srgbClr val="545B64"/>
-                  </a:solidFill>
-                  <a:latin typeface="Arial"/>
-                  <a:ea typeface="Malgun Gothic"/>
-                  <a:cs typeface="Malgun Gothic"/>
-                </a:rPr>
-                <a:t>① IGW → GWLBe (인그레스 라우팅)  ② GWLBe → GWLB  ③ 방화벽 검사 후 같은 경로로 반환  ④ GWLBe → EC2</a:t>
-              </a:r>
-            </a:p>
-          </p:txBody>
-        </p:sp>
-        <p:sp>
-          <p:nvSpPr>
-            <p:cNvPr id="13" name="Rectangle 12"/>
+            <p:cNvPr id="12" name="Rectangle 11"/>
             <p:cNvSpPr/>
             <p:nvPr/>
           </p:nvSpPr>
           <p:spPr>
             <a:xfrm>
-              <a:off x="2624667" y="1655233"/>
-              <a:ext cx="5101167" cy="4720167"/>
+              <a:off x="2561167" y="1612900"/>
+              <a:ext cx="5101167" cy="4445000"/>
             </a:xfrm>
             <a:prstGeom prst="rect">
               <a:avLst/>
@@ -9354,7 +9218,7 @@
         </p:sp>
         <p:pic>
           <p:nvPicPr>
-            <p:cNvPr id="14" name="Virtual-private-cloud-VPC_32" descr="Virtual private cloud VPC_32"/>
+            <p:cNvPr id="13" name="Virtual-private-cloud-VPC_32" descr="Virtual private cloud VPC_32"/>
             <p:cNvPicPr>
               <a:picLocks noChangeAspect="1"/>
             </p:cNvPicPr>
@@ -9374,7 +9238,7 @@
           </p:blipFill>
           <p:spPr>
             <a:xfrm>
-              <a:off x="2624667" y="1655233"/>
+              <a:off x="2561167" y="1612900"/>
               <a:ext cx="254000" cy="254000"/>
             </a:xfrm>
             <a:prstGeom prst="rect">
@@ -9384,14 +9248,14 @@
         </p:pic>
         <p:sp>
           <p:nvSpPr>
-            <p:cNvPr id="15" name="TextBox 14"/>
+            <p:cNvPr id="14" name="TextBox 13"/>
             <p:cNvSpPr txBox="1"/>
             <p:nvPr/>
           </p:nvSpPr>
           <p:spPr>
             <a:xfrm>
-              <a:off x="2963333" y="1704975"/>
-              <a:ext cx="1676135" cy="192617"/>
+              <a:off x="2899833" y="1662642"/>
+              <a:ext cx="2898510" cy="192617"/>
             </a:xfrm>
             <a:prstGeom prst="rect">
               <a:avLst/>
@@ -9418,21 +9282,21 @@
                   <a:ea typeface="Malgun Gothic"/>
                   <a:cs typeface="Malgun Gothic"/>
                 </a:rPr>
-                <a:t>Application VPC</a:t>
+                <a:t>Application VPC 10.0.0.0/16</a:t>
               </a:r>
             </a:p>
           </p:txBody>
         </p:sp>
         <p:sp>
           <p:nvSpPr>
-            <p:cNvPr id="16" name="Rectangle 15"/>
+            <p:cNvPr id="15" name="Rectangle 14"/>
             <p:cNvSpPr/>
             <p:nvPr/>
           </p:nvSpPr>
           <p:spPr>
             <a:xfrm>
-              <a:off x="2836333" y="1951567"/>
-              <a:ext cx="4677833" cy="1566333"/>
+              <a:off x="2772833" y="1930400"/>
+              <a:ext cx="4677833" cy="1524000"/>
             </a:xfrm>
             <a:prstGeom prst="rect">
               <a:avLst/>
@@ -9458,13 +9322,13 @@
         </p:sp>
         <p:sp>
           <p:nvSpPr>
-            <p:cNvPr id="17" name="TextBox 16"/>
+            <p:cNvPr id="16" name="TextBox 15"/>
             <p:cNvSpPr txBox="1"/>
             <p:nvPr/>
           </p:nvSpPr>
           <p:spPr>
             <a:xfrm>
-              <a:off x="2963333" y="2001308"/>
+              <a:off x="2899833" y="1980142"/>
               <a:ext cx="2083594" cy="192617"/>
             </a:xfrm>
             <a:prstGeom prst="rect">
@@ -9499,14 +9363,14 @@
         </p:sp>
         <p:sp>
           <p:nvSpPr>
-            <p:cNvPr id="18" name="Rectangle 17"/>
+            <p:cNvPr id="17" name="Rectangle 16"/>
             <p:cNvSpPr/>
             <p:nvPr/>
           </p:nvSpPr>
           <p:spPr>
             <a:xfrm>
-              <a:off x="2836333" y="4682067"/>
-              <a:ext cx="4677833" cy="1566333"/>
+              <a:off x="2772833" y="4364567"/>
+              <a:ext cx="4677833" cy="1608667"/>
             </a:xfrm>
             <a:prstGeom prst="rect">
               <a:avLst/>
@@ -9532,13 +9396,13 @@
         </p:sp>
         <p:sp>
           <p:nvSpPr>
-            <p:cNvPr id="19" name="TextBox 18"/>
+            <p:cNvPr id="18" name="TextBox 17"/>
             <p:cNvSpPr txBox="1"/>
             <p:nvPr/>
           </p:nvSpPr>
           <p:spPr>
             <a:xfrm>
-              <a:off x="2963333" y="4731808"/>
+              <a:off x="2899833" y="4414308"/>
               <a:ext cx="2083594" cy="192617"/>
             </a:xfrm>
             <a:prstGeom prst="rect">
@@ -9573,14 +9437,14 @@
         </p:sp>
         <p:sp>
           <p:nvSpPr>
-            <p:cNvPr id="20" name="Rectangle 19"/>
+            <p:cNvPr id="19" name="Rectangle 18"/>
             <p:cNvSpPr/>
             <p:nvPr/>
           </p:nvSpPr>
           <p:spPr>
             <a:xfrm>
-              <a:off x="2963333" y="2226733"/>
-              <a:ext cx="2582333" cy="1206500"/>
+              <a:off x="2899833" y="2247900"/>
+              <a:ext cx="2582333" cy="1121833"/>
             </a:xfrm>
             <a:prstGeom prst="rect">
               <a:avLst/>
@@ -9604,7 +9468,7 @@
         </p:sp>
         <p:pic>
           <p:nvPicPr>
-            <p:cNvPr id="21" name="Public-subnet_32" descr="Public subnet_32"/>
+            <p:cNvPr id="20" name="Public-subnet_32" descr="Public subnet_32"/>
             <p:cNvPicPr>
               <a:picLocks noChangeAspect="1"/>
             </p:cNvPicPr>
@@ -9624,7 +9488,7 @@
           </p:blipFill>
           <p:spPr>
             <a:xfrm>
-              <a:off x="2963333" y="2226733"/>
+              <a:off x="2899833" y="2247900"/>
               <a:ext cx="254000" cy="254000"/>
             </a:xfrm>
             <a:prstGeom prst="rect">
@@ -9634,13 +9498,13 @@
         </p:pic>
         <p:sp>
           <p:nvSpPr>
-            <p:cNvPr id="22" name="TextBox 21"/>
+            <p:cNvPr id="21" name="TextBox 20"/>
             <p:cNvSpPr txBox="1"/>
             <p:nvPr/>
           </p:nvSpPr>
           <p:spPr>
             <a:xfrm>
-              <a:off x="3302000" y="2276475"/>
+              <a:off x="3238500" y="2297642"/>
               <a:ext cx="1370542" cy="192617"/>
             </a:xfrm>
             <a:prstGeom prst="rect">
@@ -9675,14 +9539,116 @@
         </p:sp>
         <p:sp>
           <p:nvSpPr>
-            <p:cNvPr id="23" name="Rectangle 22"/>
+            <p:cNvPr id="22" name="Rectangle 21"/>
             <p:cNvSpPr/>
             <p:nvPr/>
           </p:nvSpPr>
           <p:spPr>
             <a:xfrm>
-              <a:off x="5799667" y="2226733"/>
-              <a:ext cx="1587500" cy="1206500"/>
+              <a:off x="5736167" y="2247900"/>
+              <a:ext cx="1587500" cy="1121833"/>
+            </a:xfrm>
+            <a:prstGeom prst="rect">
+              <a:avLst/>
+            </a:prstGeom>
+            <a:noFill/>
+            <a:ln w="15875">
+              <a:solidFill>
+                <a:srgbClr val="00A4A6"/>
+              </a:solidFill>
+              <a:prstDash val="solid"/>
+              <a:miter lim="800000"/>
+            </a:ln>
+          </p:spPr>
+          <p:txBody>
+            <a:bodyPr rtlCol="0" anchor="ctr"/>
+            <a:lstStyle/>
+            <a:p>
+              <a:pPr algn="ctr"/>
+            </a:p>
+          </p:txBody>
+        </p:sp>
+        <p:pic>
+          <p:nvPicPr>
+            <p:cNvPr id="23" name="Private-subnet_32" descr="Private subnet_32"/>
+            <p:cNvPicPr>
+              <a:picLocks noChangeAspect="1"/>
+            </p:cNvPicPr>
+            <p:nvPr/>
+          </p:nvPicPr>
+          <p:blipFill>
+            <a:blip r:embed="rId12">
+              <a:extLst>
+                <a:ext uri="{96DAC541-7B7A-43D3-8B79-37D633B846F1}">
+                  <asvg:svgBlip xmlns:asvg="http://schemas.microsoft.com/office/drawing/2016/SVG/main" r:embed="rId13"/>
+                </a:ext>
+              </a:extLst>
+            </a:blip>
+            <a:stretch>
+              <a:fillRect/>
+            </a:stretch>
+          </p:blipFill>
+          <p:spPr>
+            <a:xfrm>
+              <a:off x="5736167" y="2247900"/>
+              <a:ext cx="254000" cy="254000"/>
+            </a:xfrm>
+            <a:prstGeom prst="rect">
+              <a:avLst/>
+            </a:prstGeom>
+          </p:spPr>
+        </p:pic>
+        <p:sp>
+          <p:nvSpPr>
+            <p:cNvPr id="24" name="TextBox 23"/>
+            <p:cNvSpPr txBox="1"/>
+            <p:nvPr/>
+          </p:nvSpPr>
+          <p:spPr>
+            <a:xfrm>
+              <a:off x="6074833" y="2297642"/>
+              <a:ext cx="1166813" cy="192617"/>
+            </a:xfrm>
+            <a:prstGeom prst="rect">
+              <a:avLst/>
+            </a:prstGeom>
+            <a:noFill/>
+          </p:spPr>
+          <p:txBody>
+            <a:bodyPr wrap="none" lIns="0" rIns="0" tIns="0" bIns="0" anchor="t">
+              <a:noAutofit/>
+            </a:bodyPr>
+            <a:lstStyle/>
+            <a:p>
+              <a:pPr algn="l">
+                <a:lnSpc>
+                  <a:spcPct val="100000"/>
+                </a:lnSpc>
+              </a:pPr>
+              <a:r>
+                <a:rPr sz="1166" b="1" lang="ko-KR">
+                  <a:solidFill>
+                    <a:srgbClr val="00A4A6"/>
+                  </a:solidFill>
+                  <a:latin typeface="Arial"/>
+                  <a:ea typeface="Malgun Gothic"/>
+                  <a:cs typeface="Malgun Gothic"/>
+                </a:rPr>
+                <a:t>App subnet</a:t>
+              </a:r>
+            </a:p>
+          </p:txBody>
+        </p:sp>
+        <p:sp>
+          <p:nvSpPr>
+            <p:cNvPr id="25" name="Rectangle 24"/>
+            <p:cNvSpPr/>
+            <p:nvPr/>
+          </p:nvSpPr>
+          <p:spPr>
+            <a:xfrm>
+              <a:off x="2899833" y="4682067"/>
+              <a:ext cx="2582333" cy="1206500"/>
             </a:xfrm>
             <a:prstGeom prst="rect">
               <a:avLst/>
@@ -9706,7 +9672,7 @@
         </p:sp>
         <p:pic>
           <p:nvPicPr>
-            <p:cNvPr id="24" name="Public-subnet_32" descr="Public subnet_32"/>
+            <p:cNvPr id="26" name="Public-subnet_32" descr="Public subnet_32"/>
             <p:cNvPicPr>
               <a:picLocks noChangeAspect="1"/>
             </p:cNvPicPr>
@@ -9726,7 +9692,7 @@
           </p:blipFill>
           <p:spPr>
             <a:xfrm>
-              <a:off x="5799667" y="2226733"/>
+              <a:off x="2899833" y="4682067"/>
               <a:ext cx="254000" cy="254000"/>
             </a:xfrm>
             <a:prstGeom prst="rect">
@@ -9736,115 +9702,13 @@
         </p:pic>
         <p:sp>
           <p:nvSpPr>
-            <p:cNvPr id="25" name="TextBox 24"/>
+            <p:cNvPr id="27" name="TextBox 26"/>
             <p:cNvSpPr txBox="1"/>
             <p:nvPr/>
           </p:nvSpPr>
           <p:spPr>
             <a:xfrm>
-              <a:off x="6138333" y="2276475"/>
-              <a:ext cx="1166813" cy="192617"/>
-            </a:xfrm>
-            <a:prstGeom prst="rect">
-              <a:avLst/>
-            </a:prstGeom>
-            <a:noFill/>
-          </p:spPr>
-          <p:txBody>
-            <a:bodyPr wrap="none" lIns="0" rIns="0" tIns="0" bIns="0" anchor="t">
-              <a:noAutofit/>
-            </a:bodyPr>
-            <a:lstStyle/>
-            <a:p>
-              <a:pPr algn="l">
-                <a:lnSpc>
-                  <a:spcPct val="100000"/>
-                </a:lnSpc>
-              </a:pPr>
-              <a:r>
-                <a:rPr sz="1166" b="1" lang="ko-KR">
-                  <a:solidFill>
-                    <a:srgbClr val="7AA116"/>
-                  </a:solidFill>
-                  <a:latin typeface="Arial"/>
-                  <a:ea typeface="Malgun Gothic"/>
-                  <a:cs typeface="Malgun Gothic"/>
-                </a:rPr>
-                <a:t>App subnet</a:t>
-              </a:r>
-            </a:p>
-          </p:txBody>
-        </p:sp>
-        <p:sp>
-          <p:nvSpPr>
-            <p:cNvPr id="26" name="Rectangle 25"/>
-            <p:cNvSpPr/>
-            <p:nvPr/>
-          </p:nvSpPr>
-          <p:spPr>
-            <a:xfrm>
-              <a:off x="2963333" y="4957233"/>
-              <a:ext cx="2582333" cy="1206500"/>
-            </a:xfrm>
-            <a:prstGeom prst="rect">
-              <a:avLst/>
-            </a:prstGeom>
-            <a:noFill/>
-            <a:ln w="15875">
-              <a:solidFill>
-                <a:srgbClr val="7AA116"/>
-              </a:solidFill>
-              <a:prstDash val="solid"/>
-              <a:miter lim="800000"/>
-            </a:ln>
-          </p:spPr>
-          <p:txBody>
-            <a:bodyPr rtlCol="0" anchor="ctr"/>
-            <a:lstStyle/>
-            <a:p>
-              <a:pPr algn="ctr"/>
-            </a:p>
-          </p:txBody>
-        </p:sp>
-        <p:pic>
-          <p:nvPicPr>
-            <p:cNvPr id="27" name="Public-subnet_32" descr="Public subnet_32"/>
-            <p:cNvPicPr>
-              <a:picLocks noChangeAspect="1"/>
-            </p:cNvPicPr>
-            <p:nvPr/>
-          </p:nvPicPr>
-          <p:blipFill>
-            <a:blip r:embed="rId10">
-              <a:extLst>
-                <a:ext uri="{96DAC541-7B7A-43D3-8B79-37D633B846F1}">
-                  <asvg:svgBlip xmlns:asvg="http://schemas.microsoft.com/office/drawing/2016/SVG/main" r:embed="rId11"/>
-                </a:ext>
-              </a:extLst>
-            </a:blip>
-            <a:stretch>
-              <a:fillRect/>
-            </a:stretch>
-          </p:blipFill>
-          <p:spPr>
-            <a:xfrm>
-              <a:off x="2963333" y="4957233"/>
-              <a:ext cx="254000" cy="254000"/>
-            </a:xfrm>
-            <a:prstGeom prst="rect">
-              <a:avLst/>
-            </a:prstGeom>
-          </p:spPr>
-        </p:pic>
-        <p:sp>
-          <p:nvSpPr>
-            <p:cNvPr id="28" name="TextBox 27"/>
-            <p:cNvSpPr txBox="1"/>
-            <p:nvPr/>
-          </p:nvSpPr>
-          <p:spPr>
-            <a:xfrm>
-              <a:off x="3302000" y="5006975"/>
+              <a:off x="3238500" y="4731808"/>
               <a:ext cx="1370542" cy="192617"/>
             </a:xfrm>
             <a:prstGeom prst="rect">
@@ -9879,13 +9743,13 @@
         </p:sp>
         <p:sp>
           <p:nvSpPr>
-            <p:cNvPr id="29" name="Rectangle 28"/>
+            <p:cNvPr id="28" name="Rectangle 27"/>
             <p:cNvSpPr/>
             <p:nvPr/>
           </p:nvSpPr>
           <p:spPr>
             <a:xfrm>
-              <a:off x="5799667" y="4957233"/>
+              <a:off x="5736167" y="4682067"/>
               <a:ext cx="1587500" cy="1206500"/>
             </a:xfrm>
             <a:prstGeom prst="rect">
@@ -9894,7 +9758,7 @@
             <a:noFill/>
             <a:ln w="15875">
               <a:solidFill>
-                <a:srgbClr val="7AA116"/>
+                <a:srgbClr val="00A4A6"/>
               </a:solidFill>
               <a:prstDash val="solid"/>
               <a:miter lim="800000"/>
@@ -9910,78 +9774,7 @@
         </p:sp>
         <p:pic>
           <p:nvPicPr>
-            <p:cNvPr id="30" name="Public-subnet_32" descr="Public subnet_32"/>
-            <p:cNvPicPr>
-              <a:picLocks noChangeAspect="1"/>
-            </p:cNvPicPr>
-            <p:nvPr/>
-          </p:nvPicPr>
-          <p:blipFill>
-            <a:blip r:embed="rId10">
-              <a:extLst>
-                <a:ext uri="{96DAC541-7B7A-43D3-8B79-37D633B846F1}">
-                  <asvg:svgBlip xmlns:asvg="http://schemas.microsoft.com/office/drawing/2016/SVG/main" r:embed="rId11"/>
-                </a:ext>
-              </a:extLst>
-            </a:blip>
-            <a:stretch>
-              <a:fillRect/>
-            </a:stretch>
-          </p:blipFill>
-          <p:spPr>
-            <a:xfrm>
-              <a:off x="5799667" y="4957233"/>
-              <a:ext cx="254000" cy="254000"/>
-            </a:xfrm>
-            <a:prstGeom prst="rect">
-              <a:avLst/>
-            </a:prstGeom>
-          </p:spPr>
-        </p:pic>
-        <p:sp>
-          <p:nvSpPr>
-            <p:cNvPr id="31" name="TextBox 30"/>
-            <p:cNvSpPr txBox="1"/>
-            <p:nvPr/>
-          </p:nvSpPr>
-          <p:spPr>
-            <a:xfrm>
-              <a:off x="6138333" y="5006975"/>
-              <a:ext cx="1166813" cy="192617"/>
-            </a:xfrm>
-            <a:prstGeom prst="rect">
-              <a:avLst/>
-            </a:prstGeom>
-            <a:noFill/>
-          </p:spPr>
-          <p:txBody>
-            <a:bodyPr wrap="none" lIns="0" rIns="0" tIns="0" bIns="0" anchor="t">
-              <a:noAutofit/>
-            </a:bodyPr>
-            <a:lstStyle/>
-            <a:p>
-              <a:pPr algn="l">
-                <a:lnSpc>
-                  <a:spcPct val="100000"/>
-                </a:lnSpc>
-              </a:pPr>
-              <a:r>
-                <a:rPr sz="1166" b="1" lang="ko-KR">
-                  <a:solidFill>
-                    <a:srgbClr val="7AA116"/>
-                  </a:solidFill>
-                  <a:latin typeface="Arial"/>
-                  <a:ea typeface="Malgun Gothic"/>
-                  <a:cs typeface="Malgun Gothic"/>
-                </a:rPr>
-                <a:t>App subnet</a:t>
-              </a:r>
-            </a:p>
-          </p:txBody>
-        </p:sp>
-        <p:pic>
-          <p:nvPicPr>
-            <p:cNvPr id="32" name="Amazon-VPC_Endpoints" descr="Amazon VPC_Endpoints"/>
+            <p:cNvPr id="29" name="Private-subnet_32" descr="Private subnet_32"/>
             <p:cNvPicPr>
               <a:picLocks noChangeAspect="1"/>
             </p:cNvPicPr>
@@ -10001,7 +9794,78 @@
           </p:blipFill>
           <p:spPr>
             <a:xfrm>
-              <a:off x="4826000" y="2565400"/>
+              <a:off x="5736167" y="4682067"/>
+              <a:ext cx="254000" cy="254000"/>
+            </a:xfrm>
+            <a:prstGeom prst="rect">
+              <a:avLst/>
+            </a:prstGeom>
+          </p:spPr>
+        </p:pic>
+        <p:sp>
+          <p:nvSpPr>
+            <p:cNvPr id="30" name="TextBox 29"/>
+            <p:cNvSpPr txBox="1"/>
+            <p:nvPr/>
+          </p:nvSpPr>
+          <p:spPr>
+            <a:xfrm>
+              <a:off x="6074833" y="4731808"/>
+              <a:ext cx="1166813" cy="192617"/>
+            </a:xfrm>
+            <a:prstGeom prst="rect">
+              <a:avLst/>
+            </a:prstGeom>
+            <a:noFill/>
+          </p:spPr>
+          <p:txBody>
+            <a:bodyPr wrap="none" lIns="0" rIns="0" tIns="0" bIns="0" anchor="t">
+              <a:noAutofit/>
+            </a:bodyPr>
+            <a:lstStyle/>
+            <a:p>
+              <a:pPr algn="l">
+                <a:lnSpc>
+                  <a:spcPct val="100000"/>
+                </a:lnSpc>
+              </a:pPr>
+              <a:r>
+                <a:rPr sz="1166" b="1" lang="ko-KR">
+                  <a:solidFill>
+                    <a:srgbClr val="00A4A6"/>
+                  </a:solidFill>
+                  <a:latin typeface="Arial"/>
+                  <a:ea typeface="Malgun Gothic"/>
+                  <a:cs typeface="Malgun Gothic"/>
+                </a:rPr>
+                <a:t>App subnet</a:t>
+              </a:r>
+            </a:p>
+          </p:txBody>
+        </p:sp>
+        <p:pic>
+          <p:nvPicPr>
+            <p:cNvPr id="31" name="Amazon-VPC_Endpoints" descr="Amazon VPC_Endpoints"/>
+            <p:cNvPicPr>
+              <a:picLocks noChangeAspect="1"/>
+            </p:cNvPicPr>
+            <p:nvPr/>
+          </p:nvPicPr>
+          <p:blipFill>
+            <a:blip r:embed="rId14">
+              <a:extLst>
+                <a:ext uri="{96DAC541-7B7A-43D3-8B79-37D633B846F1}">
+                  <asvg:svgBlip xmlns:asvg="http://schemas.microsoft.com/office/drawing/2016/SVG/main" r:embed="rId15"/>
+                </a:ext>
+              </a:extLst>
+            </a:blip>
+            <a:stretch>
+              <a:fillRect/>
+            </a:stretch>
+          </p:blipFill>
+          <p:spPr>
+            <a:xfrm>
+              <a:off x="4762500" y="2544233"/>
               <a:ext cx="508000" cy="508000"/>
             </a:xfrm>
             <a:prstGeom prst="rect">
@@ -10011,13 +9875,13 @@
         </p:pic>
         <p:sp>
           <p:nvSpPr>
-            <p:cNvPr id="33" name="TextBox 32"/>
+            <p:cNvPr id="32" name="TextBox 31"/>
             <p:cNvSpPr txBox="1"/>
             <p:nvPr/>
           </p:nvSpPr>
           <p:spPr>
             <a:xfrm>
-              <a:off x="4751255" y="3123142"/>
+              <a:off x="4687755" y="3101975"/>
               <a:ext cx="657490" cy="192617"/>
             </a:xfrm>
             <a:prstGeom prst="rect">
@@ -10052,17 +9916,17 @@
         </p:sp>
         <p:pic>
           <p:nvPicPr>
-            <p:cNvPr id="34" name="Amazon-VPC_Endpoints" descr="Amazon VPC_Endpoints"/>
+            <p:cNvPr id="33" name="Amazon-VPC_Endpoints" descr="Amazon VPC_Endpoints"/>
             <p:cNvPicPr>
               <a:picLocks noChangeAspect="1"/>
             </p:cNvPicPr>
             <p:nvPr/>
           </p:nvPicPr>
           <p:blipFill>
-            <a:blip r:embed="rId12">
+            <a:blip r:embed="rId14">
               <a:extLst>
                 <a:ext uri="{96DAC541-7B7A-43D3-8B79-37D633B846F1}">
-                  <asvg:svgBlip xmlns:asvg="http://schemas.microsoft.com/office/drawing/2016/SVG/main" r:embed="rId13"/>
+                  <asvg:svgBlip xmlns:asvg="http://schemas.microsoft.com/office/drawing/2016/SVG/main" r:embed="rId15"/>
                 </a:ext>
               </a:extLst>
             </a:blip>
@@ -10072,7 +9936,7 @@
           </p:blipFill>
           <p:spPr>
             <a:xfrm>
-              <a:off x="4826000" y="5295900"/>
+              <a:off x="4762500" y="4978400"/>
               <a:ext cx="508000" cy="508000"/>
             </a:xfrm>
             <a:prstGeom prst="rect">
@@ -10082,13 +9946,13 @@
         </p:pic>
         <p:sp>
           <p:nvSpPr>
-            <p:cNvPr id="35" name="TextBox 34"/>
+            <p:cNvPr id="34" name="TextBox 33"/>
             <p:cNvSpPr txBox="1"/>
             <p:nvPr/>
           </p:nvSpPr>
           <p:spPr>
             <a:xfrm>
-              <a:off x="4751255" y="5853642"/>
+              <a:off x="4687755" y="5536142"/>
               <a:ext cx="657490" cy="192617"/>
             </a:xfrm>
             <a:prstGeom prst="rect">
@@ -10123,17 +9987,17 @@
         </p:sp>
         <p:pic>
           <p:nvPicPr>
-            <p:cNvPr id="36" name="Amazon-EC2" descr="Amazon EC2"/>
+            <p:cNvPr id="35" name="Amazon-EC2" descr="Amazon EC2"/>
             <p:cNvPicPr>
               <a:picLocks noChangeAspect="1"/>
             </p:cNvPicPr>
             <p:nvPr/>
           </p:nvPicPr>
           <p:blipFill>
-            <a:blip r:embed="rId14">
+            <a:blip r:embed="rId16">
               <a:extLst>
                 <a:ext uri="{96DAC541-7B7A-43D3-8B79-37D633B846F1}">
-                  <asvg:svgBlip xmlns:asvg="http://schemas.microsoft.com/office/drawing/2016/SVG/main" r:embed="rId15"/>
+                  <asvg:svgBlip xmlns:asvg="http://schemas.microsoft.com/office/drawing/2016/SVG/main" r:embed="rId17"/>
                 </a:ext>
               </a:extLst>
             </a:blip>
@@ -10143,7 +10007,7 @@
           </p:blipFill>
           <p:spPr>
             <a:xfrm>
-              <a:off x="6339417" y="2565400"/>
+              <a:off x="6275917" y="2544233"/>
               <a:ext cx="508000" cy="508000"/>
             </a:xfrm>
             <a:prstGeom prst="rect">
@@ -10153,13 +10017,13 @@
         </p:pic>
         <p:sp>
           <p:nvSpPr>
-            <p:cNvPr id="37" name="TextBox 36"/>
+            <p:cNvPr id="36" name="TextBox 35"/>
             <p:cNvSpPr txBox="1"/>
             <p:nvPr/>
           </p:nvSpPr>
           <p:spPr>
             <a:xfrm>
-              <a:off x="6366536" y="3123142"/>
+              <a:off x="6303036" y="3101975"/>
               <a:ext cx="453760" cy="192617"/>
             </a:xfrm>
             <a:prstGeom prst="rect">
@@ -10194,17 +10058,17 @@
         </p:sp>
         <p:pic>
           <p:nvPicPr>
-            <p:cNvPr id="38" name="Amazon-EC2" descr="Amazon EC2"/>
+            <p:cNvPr id="37" name="Amazon-EC2" descr="Amazon EC2"/>
             <p:cNvPicPr>
               <a:picLocks noChangeAspect="1"/>
             </p:cNvPicPr>
             <p:nvPr/>
           </p:nvPicPr>
           <p:blipFill>
-            <a:blip r:embed="rId14">
+            <a:blip r:embed="rId16">
               <a:extLst>
                 <a:ext uri="{96DAC541-7B7A-43D3-8B79-37D633B846F1}">
-                  <asvg:svgBlip xmlns:asvg="http://schemas.microsoft.com/office/drawing/2016/SVG/main" r:embed="rId15"/>
+                  <asvg:svgBlip xmlns:asvg="http://schemas.microsoft.com/office/drawing/2016/SVG/main" r:embed="rId17"/>
                 </a:ext>
               </a:extLst>
             </a:blip>
@@ -10214,7 +10078,7 @@
           </p:blipFill>
           <p:spPr>
             <a:xfrm>
-              <a:off x="6339417" y="5295900"/>
+              <a:off x="6275917" y="4978400"/>
               <a:ext cx="508000" cy="508000"/>
             </a:xfrm>
             <a:prstGeom prst="rect">
@@ -10224,13 +10088,13 @@
         </p:pic>
         <p:sp>
           <p:nvSpPr>
-            <p:cNvPr id="39" name="TextBox 38"/>
+            <p:cNvPr id="38" name="TextBox 37"/>
             <p:cNvSpPr txBox="1"/>
             <p:nvPr/>
           </p:nvSpPr>
           <p:spPr>
             <a:xfrm>
-              <a:off x="6366536" y="5853642"/>
+              <a:off x="6303036" y="5536142"/>
               <a:ext cx="453760" cy="192617"/>
             </a:xfrm>
             <a:prstGeom prst="rect">
@@ -10265,13 +10129,13 @@
         </p:sp>
         <p:sp>
           <p:nvSpPr>
-            <p:cNvPr id="40" name="Rectangle 39"/>
+            <p:cNvPr id="39" name="Rectangle 38"/>
             <p:cNvSpPr/>
             <p:nvPr/>
           </p:nvSpPr>
           <p:spPr>
             <a:xfrm>
-              <a:off x="2370667" y="3845983"/>
+              <a:off x="2307167" y="3539067"/>
               <a:ext cx="508000" cy="740833"/>
             </a:xfrm>
             <a:prstGeom prst="rect">
@@ -10294,17 +10158,17 @@
         </p:sp>
         <p:pic>
           <p:nvPicPr>
-            <p:cNvPr id="41" name="Amazon-VPC_Internet-Gateway" descr="Amazon VPC_Internet Gateway"/>
+            <p:cNvPr id="40" name="Amazon-VPC_Internet-Gateway" descr="Amazon VPC_Internet Gateway"/>
             <p:cNvPicPr>
               <a:picLocks noChangeAspect="1"/>
             </p:cNvPicPr>
             <p:nvPr/>
           </p:nvPicPr>
           <p:blipFill>
-            <a:blip r:embed="rId16">
+            <a:blip r:embed="rId18">
               <a:extLst>
                 <a:ext uri="{96DAC541-7B7A-43D3-8B79-37D633B846F1}">
-                  <asvg:svgBlip xmlns:asvg="http://schemas.microsoft.com/office/drawing/2016/SVG/main" r:embed="rId17"/>
+                  <asvg:svgBlip xmlns:asvg="http://schemas.microsoft.com/office/drawing/2016/SVG/main" r:embed="rId19"/>
                 </a:ext>
               </a:extLst>
             </a:blip>
@@ -10314,7 +10178,7 @@
           </p:blipFill>
           <p:spPr>
             <a:xfrm>
-              <a:off x="2370667" y="3845983"/>
+              <a:off x="2307167" y="3539067"/>
               <a:ext cx="508000" cy="508000"/>
             </a:xfrm>
             <a:prstGeom prst="rect">
@@ -10324,13 +10188,13 @@
         </p:pic>
         <p:sp>
           <p:nvSpPr>
-            <p:cNvPr id="42" name="TextBox 41"/>
+            <p:cNvPr id="41" name="TextBox 40"/>
             <p:cNvSpPr txBox="1"/>
             <p:nvPr/>
           </p:nvSpPr>
           <p:spPr>
             <a:xfrm>
-              <a:off x="2397786" y="4403725"/>
+              <a:off x="2334286" y="4096808"/>
               <a:ext cx="453760" cy="192617"/>
             </a:xfrm>
             <a:prstGeom prst="rect">
@@ -10365,14 +10229,14 @@
         </p:sp>
         <p:sp>
           <p:nvSpPr>
-            <p:cNvPr id="43" name="Rectangle 42"/>
+            <p:cNvPr id="42" name="Rectangle 41"/>
             <p:cNvSpPr/>
             <p:nvPr/>
           </p:nvSpPr>
           <p:spPr>
             <a:xfrm>
-              <a:off x="8064500" y="1655233"/>
-              <a:ext cx="3534833" cy="4720167"/>
+              <a:off x="8001000" y="1612900"/>
+              <a:ext cx="3746500" cy="4445000"/>
             </a:xfrm>
             <a:prstGeom prst="rect">
               <a:avLst/>
@@ -10396,7 +10260,7 @@
         </p:sp>
         <p:pic>
           <p:nvPicPr>
-            <p:cNvPr id="44" name="Virtual-private-cloud-VPC_32" descr="Virtual private cloud VPC_32"/>
+            <p:cNvPr id="43" name="Virtual-private-cloud-VPC_32" descr="Virtual private cloud VPC_32"/>
             <p:cNvPicPr>
               <a:picLocks noChangeAspect="1"/>
             </p:cNvPicPr>
@@ -10416,7 +10280,7 @@
           </p:blipFill>
           <p:spPr>
             <a:xfrm>
-              <a:off x="8064500" y="1655233"/>
+              <a:off x="8001000" y="1612900"/>
               <a:ext cx="254000" cy="254000"/>
             </a:xfrm>
             <a:prstGeom prst="rect">
@@ -10426,14 +10290,14 @@
         </p:pic>
         <p:sp>
           <p:nvSpPr>
-            <p:cNvPr id="45" name="TextBox 44"/>
+            <p:cNvPr id="44" name="TextBox 43"/>
             <p:cNvSpPr txBox="1"/>
             <p:nvPr/>
           </p:nvSpPr>
           <p:spPr>
             <a:xfrm>
-              <a:off x="8403167" y="1704975"/>
-              <a:ext cx="1370542" cy="192617"/>
+              <a:off x="8339667" y="1662642"/>
+              <a:ext cx="2592917" cy="192617"/>
             </a:xfrm>
             <a:prstGeom prst="rect">
               <a:avLst/>
@@ -10460,21 +10324,21 @@
                   <a:ea typeface="Malgun Gothic"/>
                   <a:cs typeface="Malgun Gothic"/>
                 </a:rPr>
-                <a:t>Security VPC</a:t>
+                <a:t>Security VPC 10.1.0.0/16</a:t>
               </a:r>
             </a:p>
           </p:txBody>
         </p:sp>
         <p:sp>
           <p:nvSpPr>
-            <p:cNvPr id="46" name="Rectangle 45"/>
+            <p:cNvPr id="45" name="Rectangle 44"/>
             <p:cNvSpPr/>
             <p:nvPr/>
           </p:nvSpPr>
           <p:spPr>
             <a:xfrm>
-              <a:off x="8276167" y="1951567"/>
-              <a:ext cx="3111500" cy="1566333"/>
+              <a:off x="8212667" y="1930400"/>
+              <a:ext cx="3323167" cy="1524000"/>
             </a:xfrm>
             <a:prstGeom prst="rect">
               <a:avLst/>
@@ -10500,13 +10364,13 @@
         </p:sp>
         <p:sp>
           <p:nvSpPr>
-            <p:cNvPr id="47" name="TextBox 46"/>
+            <p:cNvPr id="46" name="TextBox 45"/>
             <p:cNvSpPr txBox="1"/>
             <p:nvPr/>
           </p:nvSpPr>
           <p:spPr>
             <a:xfrm>
-              <a:off x="8403167" y="2001308"/>
+              <a:off x="8339667" y="1980142"/>
               <a:ext cx="2083594" cy="192617"/>
             </a:xfrm>
             <a:prstGeom prst="rect">
@@ -10541,14 +10405,14 @@
         </p:sp>
         <p:sp>
           <p:nvSpPr>
-            <p:cNvPr id="48" name="Rectangle 47"/>
+            <p:cNvPr id="47" name="Rectangle 46"/>
             <p:cNvSpPr/>
             <p:nvPr/>
           </p:nvSpPr>
           <p:spPr>
             <a:xfrm>
-              <a:off x="8276167" y="4682067"/>
-              <a:ext cx="3111500" cy="1566333"/>
+              <a:off x="8212667" y="4364567"/>
+              <a:ext cx="3323167" cy="1608667"/>
             </a:xfrm>
             <a:prstGeom prst="rect">
               <a:avLst/>
@@ -10574,13 +10438,13 @@
         </p:sp>
         <p:sp>
           <p:nvSpPr>
-            <p:cNvPr id="49" name="TextBox 48"/>
+            <p:cNvPr id="48" name="TextBox 47"/>
             <p:cNvSpPr txBox="1"/>
             <p:nvPr/>
           </p:nvSpPr>
           <p:spPr>
             <a:xfrm>
-              <a:off x="8403167" y="4731808"/>
+              <a:off x="8339667" y="4414308"/>
               <a:ext cx="2083594" cy="192617"/>
             </a:xfrm>
             <a:prstGeom prst="rect">
@@ -10615,14 +10479,14 @@
         </p:sp>
         <p:sp>
           <p:nvSpPr>
-            <p:cNvPr id="50" name="Rectangle 49"/>
+            <p:cNvPr id="49" name="Rectangle 48"/>
             <p:cNvSpPr/>
             <p:nvPr/>
           </p:nvSpPr>
           <p:spPr>
             <a:xfrm>
-              <a:off x="8403167" y="2226733"/>
-              <a:ext cx="2857500" cy="1206500"/>
+              <a:off x="8339667" y="2247900"/>
+              <a:ext cx="3111500" cy="1121833"/>
             </a:xfrm>
             <a:prstGeom prst="rect">
               <a:avLst/>
@@ -10646,17 +10510,17 @@
         </p:sp>
         <p:pic>
           <p:nvPicPr>
-            <p:cNvPr id="51" name="Private-subnet_32" descr="Private subnet_32"/>
+            <p:cNvPr id="50" name="Private-subnet_32" descr="Private subnet_32"/>
             <p:cNvPicPr>
               <a:picLocks noChangeAspect="1"/>
             </p:cNvPicPr>
             <p:nvPr/>
           </p:nvPicPr>
           <p:blipFill>
-            <a:blip r:embed="rId18">
+            <a:blip r:embed="rId12">
               <a:extLst>
                 <a:ext uri="{96DAC541-7B7A-43D3-8B79-37D633B846F1}">
-                  <asvg:svgBlip xmlns:asvg="http://schemas.microsoft.com/office/drawing/2016/SVG/main" r:embed="rId19"/>
+                  <asvg:svgBlip xmlns:asvg="http://schemas.microsoft.com/office/drawing/2016/SVG/main" r:embed="rId13"/>
                 </a:ext>
               </a:extLst>
             </a:blip>
@@ -10666,7 +10530,7 @@
           </p:blipFill>
           <p:spPr>
             <a:xfrm>
-              <a:off x="8403167" y="2226733"/>
+              <a:off x="8339667" y="2247900"/>
               <a:ext cx="254000" cy="254000"/>
             </a:xfrm>
             <a:prstGeom prst="rect">
@@ -10676,13 +10540,13 @@
         </p:pic>
         <p:sp>
           <p:nvSpPr>
-            <p:cNvPr id="52" name="TextBox 51"/>
+            <p:cNvPr id="51" name="TextBox 50"/>
             <p:cNvSpPr txBox="1"/>
             <p:nvPr/>
           </p:nvSpPr>
           <p:spPr>
             <a:xfrm>
-              <a:off x="8741833" y="2276475"/>
+              <a:off x="8678333" y="2297642"/>
               <a:ext cx="1778000" cy="192617"/>
             </a:xfrm>
             <a:prstGeom prst="rect">
@@ -10717,14 +10581,14 @@
         </p:sp>
         <p:sp>
           <p:nvSpPr>
-            <p:cNvPr id="53" name="Rectangle 52"/>
+            <p:cNvPr id="52" name="Rectangle 51"/>
             <p:cNvSpPr/>
             <p:nvPr/>
           </p:nvSpPr>
           <p:spPr>
             <a:xfrm>
-              <a:off x="8403167" y="4957233"/>
-              <a:ext cx="2857500" cy="1206500"/>
+              <a:off x="8339667" y="4682067"/>
+              <a:ext cx="3111500" cy="1206500"/>
             </a:xfrm>
             <a:prstGeom prst="rect">
               <a:avLst/>
@@ -10748,17 +10612,17 @@
         </p:sp>
         <p:pic>
           <p:nvPicPr>
-            <p:cNvPr id="54" name="Private-subnet_32" descr="Private subnet_32"/>
+            <p:cNvPr id="53" name="Private-subnet_32" descr="Private subnet_32"/>
             <p:cNvPicPr>
               <a:picLocks noChangeAspect="1"/>
             </p:cNvPicPr>
             <p:nvPr/>
           </p:nvPicPr>
           <p:blipFill>
-            <a:blip r:embed="rId18">
+            <a:blip r:embed="rId12">
               <a:extLst>
                 <a:ext uri="{96DAC541-7B7A-43D3-8B79-37D633B846F1}">
-                  <asvg:svgBlip xmlns:asvg="http://schemas.microsoft.com/office/drawing/2016/SVG/main" r:embed="rId19"/>
+                  <asvg:svgBlip xmlns:asvg="http://schemas.microsoft.com/office/drawing/2016/SVG/main" r:embed="rId13"/>
                 </a:ext>
               </a:extLst>
             </a:blip>
@@ -10768,7 +10632,7 @@
           </p:blipFill>
           <p:spPr>
             <a:xfrm>
-              <a:off x="8403167" y="4957233"/>
+              <a:off x="8339667" y="4682067"/>
               <a:ext cx="254000" cy="254000"/>
             </a:xfrm>
             <a:prstGeom prst="rect">
@@ -10778,13 +10642,13 @@
         </p:pic>
         <p:sp>
           <p:nvSpPr>
-            <p:cNvPr id="55" name="TextBox 54"/>
+            <p:cNvPr id="54" name="TextBox 53"/>
             <p:cNvSpPr txBox="1"/>
             <p:nvPr/>
           </p:nvSpPr>
           <p:spPr>
             <a:xfrm>
-              <a:off x="8741833" y="5006975"/>
+              <a:off x="8678333" y="4731808"/>
               <a:ext cx="1778000" cy="192617"/>
             </a:xfrm>
             <a:prstGeom prst="rect">
@@ -10819,14 +10683,14 @@
         </p:sp>
         <p:sp>
           <p:nvSpPr>
-            <p:cNvPr id="56" name="Rectangle 55"/>
+            <p:cNvPr id="55" name="Rectangle 54"/>
             <p:cNvSpPr/>
             <p:nvPr/>
           </p:nvSpPr>
           <p:spPr>
             <a:xfrm>
-              <a:off x="10287000" y="2269067"/>
-              <a:ext cx="846667" cy="3831167"/>
+              <a:off x="10075333" y="2332567"/>
+              <a:ext cx="1291167" cy="3471333"/>
             </a:xfrm>
             <a:prstGeom prst="rect">
               <a:avLst/>
@@ -10852,7 +10716,7 @@
         </p:sp>
         <p:pic>
           <p:nvPicPr>
-            <p:cNvPr id="57" name="Auto-Scaling-group_32" descr="Auto Scaling group_32"/>
+            <p:cNvPr id="56" name="Auto-Scaling-group_32" descr="Auto Scaling group_32"/>
             <p:cNvPicPr>
               <a:picLocks noChangeAspect="1"/>
             </p:cNvPicPr>
@@ -10872,7 +10736,7 @@
           </p:blipFill>
           <p:spPr>
             <a:xfrm>
-              <a:off x="10287000" y="2269067"/>
+              <a:off x="10075333" y="2332567"/>
               <a:ext cx="254000" cy="254000"/>
             </a:xfrm>
             <a:prstGeom prst="rect">
@@ -10882,14 +10746,14 @@
         </p:pic>
         <p:sp>
           <p:nvSpPr>
-            <p:cNvPr id="58" name="TextBox 57"/>
+            <p:cNvPr id="57" name="TextBox 56"/>
             <p:cNvSpPr txBox="1"/>
             <p:nvPr/>
           </p:nvSpPr>
           <p:spPr>
             <a:xfrm>
-              <a:off x="10625667" y="2328862"/>
-              <a:ext cx="421349" cy="178858"/>
+              <a:off x="10414000" y="2382308"/>
+              <a:ext cx="453760" cy="192617"/>
             </a:xfrm>
             <a:prstGeom prst="rect">
               <a:avLst/>
@@ -10908,7 +10772,7 @@
                 </a:lnSpc>
               </a:pPr>
               <a:r>
-                <a:rPr sz="1083" b="1" lang="ko-KR">
+                <a:rPr sz="1166" b="1" lang="ko-KR">
                   <a:solidFill>
                     <a:srgbClr val="ED7100"/>
                   </a:solidFill>
@@ -10923,17 +10787,17 @@
         </p:sp>
         <p:pic>
           <p:nvPicPr>
-            <p:cNvPr id="59" name="Amazon-EC2" descr="Amazon EC2"/>
+            <p:cNvPr id="58" name="Amazon-EC2" descr="Amazon EC2"/>
             <p:cNvPicPr>
               <a:picLocks noChangeAspect="1"/>
             </p:cNvPicPr>
             <p:nvPr/>
           </p:nvPicPr>
           <p:blipFill>
-            <a:blip r:embed="rId14">
+            <a:blip r:embed="rId16">
               <a:extLst>
                 <a:ext uri="{96DAC541-7B7A-43D3-8B79-37D633B846F1}">
-                  <asvg:svgBlip xmlns:asvg="http://schemas.microsoft.com/office/drawing/2016/SVG/main" r:embed="rId15"/>
+                  <asvg:svgBlip xmlns:asvg="http://schemas.microsoft.com/office/drawing/2016/SVG/main" r:embed="rId17"/>
                 </a:ext>
               </a:extLst>
             </a:blip>
@@ -10943,7 +10807,7 @@
           </p:blipFill>
           <p:spPr>
             <a:xfrm>
-              <a:off x="10456333" y="2565400"/>
+              <a:off x="10773833" y="2544233"/>
               <a:ext cx="508000" cy="508000"/>
             </a:xfrm>
             <a:prstGeom prst="rect">
@@ -10953,13 +10817,13 @@
         </p:pic>
         <p:sp>
           <p:nvSpPr>
-            <p:cNvPr id="60" name="TextBox 59"/>
+            <p:cNvPr id="59" name="TextBox 58"/>
             <p:cNvSpPr txBox="1"/>
             <p:nvPr/>
           </p:nvSpPr>
           <p:spPr>
             <a:xfrm>
-              <a:off x="10358438" y="3123142"/>
+              <a:off x="10675938" y="3101975"/>
               <a:ext cx="703792" cy="192617"/>
             </a:xfrm>
             <a:prstGeom prst="rect">
@@ -10994,17 +10858,17 @@
         </p:sp>
         <p:pic>
           <p:nvPicPr>
-            <p:cNvPr id="61" name="Amazon-EC2" descr="Amazon EC2"/>
+            <p:cNvPr id="60" name="Amazon-EC2" descr="Amazon EC2"/>
             <p:cNvPicPr>
               <a:picLocks noChangeAspect="1"/>
             </p:cNvPicPr>
             <p:nvPr/>
           </p:nvPicPr>
           <p:blipFill>
-            <a:blip r:embed="rId14">
+            <a:blip r:embed="rId16">
               <a:extLst>
                 <a:ext uri="{96DAC541-7B7A-43D3-8B79-37D633B846F1}">
-                  <asvg:svgBlip xmlns:asvg="http://schemas.microsoft.com/office/drawing/2016/SVG/main" r:embed="rId15"/>
+                  <asvg:svgBlip xmlns:asvg="http://schemas.microsoft.com/office/drawing/2016/SVG/main" r:embed="rId17"/>
                 </a:ext>
               </a:extLst>
             </a:blip>
@@ -11014,7 +10878,7 @@
           </p:blipFill>
           <p:spPr>
             <a:xfrm>
-              <a:off x="10456333" y="5295900"/>
+              <a:off x="10773833" y="4978400"/>
               <a:ext cx="508000" cy="508000"/>
             </a:xfrm>
             <a:prstGeom prst="rect">
@@ -11024,13 +10888,13 @@
         </p:pic>
         <p:sp>
           <p:nvSpPr>
-            <p:cNvPr id="62" name="TextBox 61"/>
+            <p:cNvPr id="61" name="TextBox 60"/>
             <p:cNvSpPr txBox="1"/>
             <p:nvPr/>
           </p:nvSpPr>
           <p:spPr>
             <a:xfrm>
-              <a:off x="10358438" y="5853642"/>
+              <a:off x="10675938" y="5536142"/>
               <a:ext cx="703792" cy="192617"/>
             </a:xfrm>
             <a:prstGeom prst="rect">
@@ -11065,7 +10929,7 @@
         </p:sp>
         <p:pic>
           <p:nvPicPr>
-            <p:cNvPr id="63" name="Elastic-Load-Balancing_Gateway-Load-Balancer" descr="Elastic Load Balancing_Gateway Load Balancer"/>
+            <p:cNvPr id="62" name="Elastic-Load-Balancing_Gateway-Load-Balancer" descr="Elastic Load Balancing_Gateway Load Balancer"/>
             <p:cNvPicPr>
               <a:picLocks noChangeAspect="1"/>
             </p:cNvPicPr>
@@ -11085,7 +10949,7 @@
           </p:blipFill>
           <p:spPr>
             <a:xfrm>
-              <a:off x="9080500" y="3845983"/>
+              <a:off x="8509000" y="3539067"/>
               <a:ext cx="508000" cy="508000"/>
             </a:xfrm>
             <a:prstGeom prst="rect">
@@ -11095,13 +10959,13 @@
         </p:pic>
         <p:sp>
           <p:nvSpPr>
-            <p:cNvPr id="64" name="TextBox 63"/>
+            <p:cNvPr id="63" name="TextBox 62"/>
             <p:cNvSpPr txBox="1"/>
             <p:nvPr/>
           </p:nvSpPr>
           <p:spPr>
             <a:xfrm>
-              <a:off x="9056688" y="4403725"/>
+              <a:off x="8485188" y="4096808"/>
               <a:ext cx="555625" cy="192617"/>
             </a:xfrm>
             <a:prstGeom prst="rect">
@@ -11136,14 +11000,14 @@
         </p:sp>
         <p:sp>
           <p:nvSpPr>
-            <p:cNvPr id="65" name="Freeform 64"/>
+            <p:cNvPr id="64" name="Freeform 63"/>
             <p:cNvSpPr/>
             <p:nvPr/>
           </p:nvSpPr>
           <p:spPr>
             <a:xfrm>
-              <a:off x="2921000" y="2819400"/>
-              <a:ext cx="1862667" cy="1280583"/>
+              <a:off x="2857500" y="2798233"/>
+              <a:ext cx="1862667" cy="994834"/>
             </a:xfrm>
             <a:custGeom>
               <a:avLst/>
@@ -11152,12 +11016,12 @@
               <a:cxnLst/>
               <a:rect l="l" t="t" r="r" b="b"/>
               <a:pathLst>
-                <a:path w="1862667" h="1280583">
+                <a:path w="1862667" h="994834">
                   <a:moveTo>
-                    <a:pt x="0" y="1280583"/>
+                    <a:pt x="0" y="994834"/>
                   </a:moveTo>
                   <a:lnTo>
-                    <a:pt x="1651000" y="1280583"/>
+                    <a:pt x="1651000" y="994834"/>
                   </a:lnTo>
                   <a:lnTo>
                     <a:pt x="1651000" y="0"/>
@@ -11188,14 +11052,14 @@
         </p:sp>
         <p:sp>
           <p:nvSpPr>
-            <p:cNvPr id="66" name="Freeform 65"/>
+            <p:cNvPr id="65" name="Freeform 64"/>
             <p:cNvSpPr/>
             <p:nvPr/>
           </p:nvSpPr>
           <p:spPr>
             <a:xfrm>
-              <a:off x="2921000" y="4099983"/>
-              <a:ext cx="1862667" cy="1449917"/>
+              <a:off x="2857500" y="3793067"/>
+              <a:ext cx="1862667" cy="1439333"/>
             </a:xfrm>
             <a:custGeom>
               <a:avLst/>
@@ -11204,7 +11068,7 @@
               <a:cxnLst/>
               <a:rect l="l" t="t" r="r" b="b"/>
               <a:pathLst>
-                <a:path w="1862667" h="1449917">
+                <a:path w="1862667" h="1439333">
                   <a:moveTo>
                     <a:pt x="0" y="0"/>
                   </a:moveTo>
@@ -11212,10 +11076,10 @@
                     <a:pt x="1651000" y="0"/>
                   </a:lnTo>
                   <a:lnTo>
-                    <a:pt x="1651000" y="1449917"/>
+                    <a:pt x="1651000" y="1439333"/>
                   </a:lnTo>
                   <a:lnTo>
-                    <a:pt x="1862667" y="1449917"/>
+                    <a:pt x="1862667" y="1439333"/>
                   </a:lnTo>
                 </a:path>
               </a:pathLst>
@@ -11240,13 +11104,13 @@
         </p:sp>
         <p:cxnSp>
           <p:nvCxnSpPr>
-            <p:cNvPr id="67" name="Connector 66"/>
+            <p:cNvPr id="66" name="Connector 65"/>
             <p:cNvCxnSpPr/>
             <p:nvPr/>
           </p:nvCxnSpPr>
           <p:spPr>
             <a:xfrm>
-              <a:off x="5376333" y="2819400"/>
+              <a:off x="5312833" y="2798233"/>
               <a:ext cx="920750" cy="0"/>
             </a:xfrm>
             <a:prstGeom prst="line">
@@ -11264,13 +11128,13 @@
         </p:cxnSp>
         <p:cxnSp>
           <p:nvCxnSpPr>
-            <p:cNvPr id="68" name="Connector 67"/>
+            <p:cNvPr id="67" name="Connector 66"/>
             <p:cNvCxnSpPr/>
             <p:nvPr/>
           </p:nvCxnSpPr>
           <p:spPr>
             <a:xfrm>
-              <a:off x="5376333" y="5549900"/>
+              <a:off x="5312833" y="5232400"/>
               <a:ext cx="920750" cy="0"/>
             </a:xfrm>
             <a:prstGeom prst="line">
@@ -11288,14 +11152,14 @@
         </p:cxnSp>
         <p:sp>
           <p:nvSpPr>
-            <p:cNvPr id="69" name="Freeform 68"/>
+            <p:cNvPr id="68" name="Freeform 67"/>
             <p:cNvSpPr/>
             <p:nvPr/>
           </p:nvSpPr>
           <p:spPr>
             <a:xfrm>
-              <a:off x="5080000" y="3348567"/>
-              <a:ext cx="3958167" cy="751416"/>
+              <a:off x="5016500" y="3327400"/>
+              <a:ext cx="3450167" cy="381000"/>
             </a:xfrm>
             <a:custGeom>
               <a:avLst/>
@@ -11304,12 +11168,12 @@
               <a:cxnLst/>
               <a:rect l="l" t="t" r="r" b="b"/>
               <a:pathLst>
-                <a:path w="3958167" h="751416">
+                <a:path w="3450167" h="381000">
                   <a:moveTo>
-                    <a:pt x="3958167" y="751416"/>
+                    <a:pt x="3450167" y="381000"/>
                   </a:moveTo>
                   <a:lnTo>
-                    <a:pt x="0" y="751416"/>
+                    <a:pt x="0" y="381000"/>
                   </a:lnTo>
                   <a:lnTo>
                     <a:pt x="0" y="0"/>
@@ -11338,14 +11202,14 @@
         </p:sp>
         <p:sp>
           <p:nvSpPr>
-            <p:cNvPr id="70" name="Freeform 69"/>
+            <p:cNvPr id="69" name="Freeform 68"/>
             <p:cNvSpPr/>
             <p:nvPr/>
           </p:nvSpPr>
           <p:spPr>
             <a:xfrm>
-              <a:off x="5080000" y="4099983"/>
-              <a:ext cx="3958167" cy="1153584"/>
+              <a:off x="5016500" y="3877733"/>
+              <a:ext cx="3450167" cy="1058334"/>
             </a:xfrm>
             <a:custGeom>
               <a:avLst/>
@@ -11354,15 +11218,15 @@
               <a:cxnLst/>
               <a:rect l="l" t="t" r="r" b="b"/>
               <a:pathLst>
-                <a:path w="3958167" h="1153584">
+                <a:path w="3450167" h="1058334">
                   <a:moveTo>
-                    <a:pt x="3958167" y="0"/>
+                    <a:pt x="3450167" y="0"/>
                   </a:moveTo>
                   <a:lnTo>
                     <a:pt x="0" y="0"/>
                   </a:lnTo>
                   <a:lnTo>
-                    <a:pt x="0" y="1153584"/>
+                    <a:pt x="0" y="1058334"/>
                   </a:lnTo>
                 </a:path>
               </a:pathLst>
@@ -11374,6 +11238,7 @@
               </a:solidFill>
               <a:prstDash val="solid"/>
               <a:miter lim="800000"/>
+              <a:headEnd type="triangle" w="med" len="med"/>
               <a:tailEnd type="triangle" w="med" len="med"/>
             </a:ln>
           </p:spPr>
@@ -11385,6 +11250,31 @@
             </a:p>
           </p:txBody>
         </p:sp>
+        <p:cxnSp>
+          <p:nvCxnSpPr>
+            <p:cNvPr id="70" name="Connector 69"/>
+            <p:cNvCxnSpPr/>
+            <p:nvPr/>
+          </p:nvCxnSpPr>
+          <p:spPr>
+            <a:xfrm>
+              <a:off x="9059333" y="3793067"/>
+              <a:ext cx="973667" cy="0"/>
+            </a:xfrm>
+            <a:prstGeom prst="line">
+              <a:avLst/>
+            </a:prstGeom>
+            <a:ln w="15875">
+              <a:solidFill>
+                <a:srgbClr val="232F3E"/>
+              </a:solidFill>
+              <a:prstDash val="solid"/>
+              <a:miter lim="800000"/>
+              <a:headEnd type="triangle" w="med" len="med"/>
+              <a:tailEnd type="triangle" w="med" len="med"/>
+            </a:ln>
+          </p:spPr>
+        </p:cxnSp>
         <p:sp>
           <p:nvSpPr>
             <p:cNvPr id="71" name="TextBox 70"/>
@@ -11393,7 +11283,7 @@
           </p:nvSpPr>
           <p:spPr>
             <a:xfrm>
-              <a:off x="5847292" y="3894667"/>
+              <a:off x="8958792" y="3841750"/>
               <a:ext cx="1174750" cy="165100"/>
             </a:xfrm>
             <a:prstGeom prst="rect">
@@ -11426,40 +11316,15 @@
             </a:p>
           </p:txBody>
         </p:sp>
-        <p:cxnSp>
-          <p:nvCxnSpPr>
-            <p:cNvPr id="72" name="Connector 71"/>
-            <p:cNvCxnSpPr/>
-            <p:nvPr/>
-          </p:nvCxnSpPr>
-          <p:spPr>
-            <a:xfrm>
-              <a:off x="9630833" y="4099983"/>
-              <a:ext cx="613834" cy="0"/>
-            </a:xfrm>
-            <a:prstGeom prst="line">
-              <a:avLst/>
-            </a:prstGeom>
-            <a:ln w="15875">
-              <a:solidFill>
-                <a:srgbClr val="232F3E"/>
-              </a:solidFill>
-              <a:prstDash val="solid"/>
-              <a:miter lim="800000"/>
-              <a:headEnd type="triangle" w="med" len="med"/>
-              <a:tailEnd type="triangle" w="med" len="med"/>
-            </a:ln>
-          </p:spPr>
-        </p:cxnSp>
-        <p:sp>
-          <p:nvSpPr>
-            <p:cNvPr id="73" name="Oval 72"/>
+        <p:sp>
+          <p:nvSpPr>
+            <p:cNvPr id="72" name="Oval 71"/>
             <p:cNvSpPr/>
             <p:nvPr/>
           </p:nvSpPr>
           <p:spPr>
             <a:xfrm>
-              <a:off x="3640667" y="3782483"/>
+              <a:off x="3577167" y="3539067"/>
               <a:ext cx="211667" cy="211667"/>
             </a:xfrm>
             <a:prstGeom prst="ellipse">
@@ -11482,13 +11347,13 @@
         </p:sp>
         <p:sp>
           <p:nvSpPr>
-            <p:cNvPr id="74" name="TextBox 73"/>
+            <p:cNvPr id="73" name="TextBox 72"/>
             <p:cNvSpPr txBox="1"/>
             <p:nvPr/>
           </p:nvSpPr>
           <p:spPr>
             <a:xfrm>
-              <a:off x="3639344" y="3810000"/>
+              <a:off x="3575844" y="3566583"/>
               <a:ext cx="214312" cy="165100"/>
             </a:xfrm>
             <a:prstGeom prst="rect">
@@ -11523,13 +11388,13 @@
         </p:sp>
         <p:sp>
           <p:nvSpPr>
-            <p:cNvPr id="75" name="Oval 74"/>
+            <p:cNvPr id="74" name="Oval 73"/>
             <p:cNvSpPr/>
             <p:nvPr/>
           </p:nvSpPr>
           <p:spPr>
             <a:xfrm>
-              <a:off x="8445500" y="3782483"/>
+              <a:off x="7725833" y="3454400"/>
               <a:ext cx="211667" cy="211667"/>
             </a:xfrm>
             <a:prstGeom prst="ellipse">
@@ -11552,13 +11417,13 @@
         </p:sp>
         <p:sp>
           <p:nvSpPr>
-            <p:cNvPr id="76" name="TextBox 75"/>
+            <p:cNvPr id="75" name="TextBox 74"/>
             <p:cNvSpPr txBox="1"/>
             <p:nvPr/>
           </p:nvSpPr>
           <p:spPr>
             <a:xfrm>
-              <a:off x="8444177" y="3810000"/>
+              <a:off x="7724510" y="3481917"/>
               <a:ext cx="214312" cy="165100"/>
             </a:xfrm>
             <a:prstGeom prst="rect">
@@ -11593,13 +11458,13 @@
         </p:sp>
         <p:sp>
           <p:nvSpPr>
-            <p:cNvPr id="77" name="Oval 76"/>
+            <p:cNvPr id="76" name="Oval 75"/>
             <p:cNvSpPr/>
             <p:nvPr/>
           </p:nvSpPr>
           <p:spPr>
             <a:xfrm>
-              <a:off x="9831917" y="3782483"/>
+              <a:off x="9440333" y="3539067"/>
               <a:ext cx="211667" cy="211667"/>
             </a:xfrm>
             <a:prstGeom prst="ellipse">
@@ -11622,13 +11487,13 @@
         </p:sp>
         <p:sp>
           <p:nvSpPr>
-            <p:cNvPr id="78" name="TextBox 77"/>
+            <p:cNvPr id="77" name="TextBox 76"/>
             <p:cNvSpPr txBox="1"/>
             <p:nvPr/>
           </p:nvSpPr>
           <p:spPr>
             <a:xfrm>
-              <a:off x="9830594" y="3810000"/>
+              <a:off x="9439010" y="3566583"/>
               <a:ext cx="214312" cy="165100"/>
             </a:xfrm>
             <a:prstGeom prst="rect">
@@ -11663,13 +11528,13 @@
         </p:sp>
         <p:sp>
           <p:nvSpPr>
-            <p:cNvPr id="79" name="Oval 78"/>
+            <p:cNvPr id="78" name="Oval 77"/>
             <p:cNvSpPr/>
             <p:nvPr/>
           </p:nvSpPr>
           <p:spPr>
             <a:xfrm>
-              <a:off x="5566833" y="2544233"/>
+              <a:off x="5884333" y="2544233"/>
               <a:ext cx="211667" cy="211667"/>
             </a:xfrm>
             <a:prstGeom prst="ellipse">
@@ -11692,13 +11557,13 @@
         </p:sp>
         <p:sp>
           <p:nvSpPr>
-            <p:cNvPr id="80" name="TextBox 79"/>
+            <p:cNvPr id="79" name="TextBox 78"/>
             <p:cNvSpPr txBox="1"/>
             <p:nvPr/>
           </p:nvSpPr>
           <p:spPr>
             <a:xfrm>
-              <a:off x="5565510" y="2571750"/>
+              <a:off x="5883010" y="2571750"/>
               <a:ext cx="214312" cy="165100"/>
             </a:xfrm>
             <a:prstGeom prst="rect">
@@ -11733,13 +11598,13 @@
         </p:sp>
         <p:sp>
           <p:nvSpPr>
-            <p:cNvPr id="81" name="Oval 80"/>
+            <p:cNvPr id="80" name="Oval 79"/>
             <p:cNvSpPr/>
             <p:nvPr/>
           </p:nvSpPr>
           <p:spPr>
             <a:xfrm>
-              <a:off x="5566833" y="5274733"/>
+              <a:off x="5884333" y="4978400"/>
               <a:ext cx="211667" cy="211667"/>
             </a:xfrm>
             <a:prstGeom prst="ellipse">
@@ -11762,13 +11627,13 @@
         </p:sp>
         <p:sp>
           <p:nvSpPr>
-            <p:cNvPr id="82" name="TextBox 81"/>
+            <p:cNvPr id="81" name="TextBox 80"/>
             <p:cNvSpPr txBox="1"/>
             <p:nvPr/>
           </p:nvSpPr>
           <p:spPr>
             <a:xfrm>
-              <a:off x="5565510" y="5302250"/>
+              <a:off x="5883010" y="5005917"/>
               <a:ext cx="214312" cy="165100"/>
             </a:xfrm>
             <a:prstGeom prst="rect">
@@ -11803,13 +11668,13 @@
         </p:sp>
         <p:cxnSp>
           <p:nvCxnSpPr>
-            <p:cNvPr id="83" name="Connector 82"/>
+            <p:cNvPr id="82" name="Connector 81"/>
             <p:cNvCxnSpPr/>
             <p:nvPr/>
           </p:nvCxnSpPr>
           <p:spPr>
             <a:xfrm>
-              <a:off x="931333" y="4099983"/>
+              <a:off x="867833" y="3793067"/>
               <a:ext cx="1397000" cy="0"/>
             </a:xfrm>
             <a:prstGeom prst="line">
@@ -11827,13 +11692,13 @@
         </p:cxnSp>
         <p:sp>
           <p:nvSpPr>
-            <p:cNvPr id="84" name="TextBox 83"/>
+            <p:cNvPr id="83" name="TextBox 82"/>
             <p:cNvSpPr txBox="1"/>
             <p:nvPr/>
           </p:nvSpPr>
           <p:spPr>
             <a:xfrm>
-              <a:off x="854604" y="3884083"/>
+              <a:off x="769937" y="3577167"/>
               <a:ext cx="1000125" cy="165100"/>
             </a:xfrm>
             <a:prstGeom prst="rect">
@@ -11862,6 +11727,88 @@
                   <a:cs typeface="Malgun Gothic"/>
                 </a:rPr>
                 <a:t>HTTPS :443</a:t>
+              </a:r>
+            </a:p>
+          </p:txBody>
+        </p:sp>
+        <p:sp>
+          <p:nvSpPr>
+            <p:cNvPr id="84" name="TextBox 83"/>
+            <p:cNvSpPr txBox="1"/>
+            <p:nvPr/>
+          </p:nvSpPr>
+          <p:spPr>
+            <a:xfrm>
+              <a:off x="317500" y="6286500"/>
+              <a:ext cx="9390063" cy="165100"/>
+            </a:xfrm>
+            <a:prstGeom prst="rect">
+              <a:avLst/>
+            </a:prstGeom>
+            <a:noFill/>
+          </p:spPr>
+          <p:txBody>
+            <a:bodyPr wrap="none" lIns="0" rIns="0" tIns="0" bIns="0" anchor="t">
+              <a:noAutofit/>
+            </a:bodyPr>
+            <a:lstStyle/>
+            <a:p>
+              <a:pPr algn="l">
+                <a:lnSpc>
+                  <a:spcPct val="100000"/>
+                </a:lnSpc>
+              </a:pPr>
+              <a:r>
+                <a:rPr sz="1000" b="0" lang="ko-KR">
+                  <a:solidFill>
+                    <a:srgbClr val="545B64"/>
+                  </a:solidFill>
+                  <a:latin typeface="Arial"/>
+                  <a:ea typeface="Malgun Gothic"/>
+                  <a:cs typeface="Malgun Gothic"/>
+                </a:rPr>
+                <a:t>① IGW → GWLBe (인그레스 라우팅)  ② GWLBe ⇄ GWLB  ③ GWLB ⇄ 방화벽 (검사 후 GWLB → GWLBe로 반환)  ④ GWLBe → EC2</a:t>
+              </a:r>
+            </a:p>
+          </p:txBody>
+        </p:sp>
+        <p:sp>
+          <p:nvSpPr>
+            <p:cNvPr id="85" name="TextBox 84"/>
+            <p:cNvSpPr txBox="1"/>
+            <p:nvPr/>
+          </p:nvSpPr>
+          <p:spPr>
+            <a:xfrm>
+              <a:off x="317500" y="6455833"/>
+              <a:ext cx="11977688" cy="165100"/>
+            </a:xfrm>
+            <a:prstGeom prst="rect">
+              <a:avLst/>
+            </a:prstGeom>
+            <a:noFill/>
+          </p:spPr>
+          <p:txBody>
+            <a:bodyPr wrap="none" lIns="0" rIns="0" tIns="0" bIns="0" anchor="t">
+              <a:noAutofit/>
+            </a:bodyPr>
+            <a:lstStyle/>
+            <a:p>
+              <a:pPr algn="l">
+                <a:lnSpc>
+                  <a:spcPct val="100000"/>
+                </a:lnSpc>
+              </a:pPr>
+              <a:r>
+                <a:rPr sz="1000" b="0" lang="ko-KR">
+                  <a:solidFill>
+                    <a:srgbClr val="545B64"/>
+                  </a:solidFill>
+                  <a:latin typeface="Arial"/>
+                  <a:ea typeface="Malgun Gothic"/>
+                  <a:cs typeface="Malgun Gothic"/>
+                </a:rPr>
+                <a:t>라우팅 (같은 AZ): IGW 엣지 RT 10.0.1.0/24 (AZ1 App) · 10.0.2.0/24 (AZ2 App) → GWLBe · App RT 0.0.0.0/0 → GWLBe · GWLBe RT 0.0.0.0/0 → IGW</a:t>
               </a:r>
             </a:p>
           </p:txBody>
@@ -11929,10 +11876,10 @@
         </p:nvGrpSpPr>
         <p:grpSpPr>
           <a:xfrm>
-            <a:off x="408444" y="1107966"/>
-            <a:ext cx="11375112" cy="5327869"/>
-            <a:chOff x="408444" y="1107966"/>
-            <a:chExt cx="11375112" cy="5327869"/>
+            <a:off x="639792" y="1086928"/>
+            <a:ext cx="12599958" cy="5458364"/>
+            <a:chOff x="639792" y="1086928"/>
+            <a:chExt cx="12599958" cy="5458364"/>
           </a:xfrm>
         </p:grpSpPr>
         <p:sp>
@@ -11943,14 +11890,14 @@
           </p:nvSpPr>
           <p:spPr>
             <a:xfrm>
-              <a:off x="408444" y="3131207"/>
-              <a:ext cx="1933320" cy="1281386"/>
-            </a:xfrm>
-            <a:prstGeom prst="rect">
-              <a:avLst/>
-            </a:prstGeom>
-            <a:noFill/>
-            <a:ln w="22480">
+              <a:off x="639792" y="3027872"/>
+              <a:ext cx="1854679" cy="1423358"/>
+            </a:xfrm>
+            <a:prstGeom prst="rect">
+              <a:avLst/>
+            </a:prstGeom>
+            <a:noFill/>
+            <a:ln w="21566">
               <a:solidFill>
                 <a:srgbClr val="7D8998"/>
               </a:solidFill>
@@ -11988,8 +11935,8 @@
           </p:blipFill>
           <p:spPr>
             <a:xfrm>
-              <a:off x="408444" y="3131207"/>
-              <a:ext cx="269766" cy="269766"/>
+              <a:off x="639792" y="3027872"/>
+              <a:ext cx="258792" cy="258792"/>
             </a:xfrm>
             <a:prstGeom prst="rect">
               <a:avLst/>
@@ -12004,8 +11951,8 @@
           </p:nvSpPr>
           <p:spPr>
             <a:xfrm>
-              <a:off x="768131" y="3184036"/>
-              <a:ext cx="1347423" cy="204572"/>
+              <a:off x="984849" y="3078552"/>
+              <a:ext cx="1292614" cy="196251"/>
             </a:xfrm>
             <a:prstGeom prst="rect">
               <a:avLst/>
@@ -12024,7 +11971,7 @@
                 </a:lnSpc>
               </a:pPr>
               <a:r>
-                <a:rPr sz="1239" b="1" lang="ko-KR">
+                <a:rPr sz="1188" b="1" lang="ko-KR">
                   <a:solidFill>
                     <a:srgbClr val="7D8998"/>
                   </a:solidFill>
@@ -12059,8 +12006,8 @@
           </p:blipFill>
           <p:spPr>
             <a:xfrm>
-              <a:off x="1105338" y="3513375"/>
-              <a:ext cx="539531" cy="539531"/>
+              <a:off x="1308340" y="3394494"/>
+              <a:ext cx="517585" cy="517585"/>
             </a:xfrm>
             <a:prstGeom prst="rect">
               <a:avLst/>
@@ -12075,8 +12022,8 @@
           </p:nvSpPr>
           <p:spPr>
             <a:xfrm>
-              <a:off x="430924" y="4105735"/>
-              <a:ext cx="1888359" cy="204572"/>
+              <a:off x="661358" y="3962759"/>
+              <a:ext cx="1811547" cy="196251"/>
             </a:xfrm>
             <a:prstGeom prst="rect">
               <a:avLst/>
@@ -12095,7 +12042,7 @@
                 </a:lnSpc>
               </a:pPr>
               <a:r>
-                <a:rPr sz="1239" b="0" lang="ko-KR">
+                <a:rPr sz="1188" b="0" lang="ko-KR">
                   <a:solidFill>
                     <a:srgbClr val="232F3E"/>
                   </a:solidFill>
@@ -12108,9 +12055,50 @@
             </a:p>
           </p:txBody>
         </p:sp>
+        <p:sp>
+          <p:nvSpPr>
+            <p:cNvPr id="9" name="TextBox 8"/>
+            <p:cNvSpPr txBox="1"/>
+            <p:nvPr/>
+          </p:nvSpPr>
+          <p:spPr>
+            <a:xfrm>
+              <a:off x="879715" y="4155775"/>
+              <a:ext cx="1374835" cy="168215"/>
+            </a:xfrm>
+            <a:prstGeom prst="rect">
+              <a:avLst/>
+            </a:prstGeom>
+            <a:noFill/>
+          </p:spPr>
+          <p:txBody>
+            <a:bodyPr wrap="none" lIns="0" rIns="0" tIns="0" bIns="0" anchor="t">
+              <a:noAutofit/>
+            </a:bodyPr>
+            <a:lstStyle/>
+            <a:p>
+              <a:pPr algn="ctr">
+                <a:lnSpc>
+                  <a:spcPct val="100000"/>
+                </a:lnSpc>
+              </a:pPr>
+              <a:r>
+                <a:rPr sz="1018" b="0" lang="ko-KR">
+                  <a:solidFill>
+                    <a:srgbClr val="545B64"/>
+                  </a:solidFill>
+                  <a:latin typeface="Arial"/>
+                  <a:ea typeface="Malgun Gothic"/>
+                  <a:cs typeface="Malgun Gothic"/>
+                </a:rPr>
+                <a:t>192.168.0.0/16</a:t>
+              </a:r>
+            </a:p>
+          </p:txBody>
+        </p:sp>
         <p:pic>
           <p:nvPicPr>
-            <p:cNvPr id="9" name="Internet" descr="Internet"/>
+            <p:cNvPr id="10" name="Internet" descr="Internet"/>
             <p:cNvPicPr>
               <a:picLocks noChangeAspect="1"/>
             </p:cNvPicPr>
@@ -12130,8 +12118,8 @@
           </p:blipFill>
           <p:spPr>
             <a:xfrm>
-              <a:off x="2723931" y="3513375"/>
-              <a:ext cx="539531" cy="539531"/>
+              <a:off x="2861094" y="3394494"/>
+              <a:ext cx="517585" cy="517585"/>
             </a:xfrm>
             <a:prstGeom prst="rect">
               <a:avLst/>
@@ -12140,14 +12128,14 @@
         </p:pic>
         <p:sp>
           <p:nvSpPr>
-            <p:cNvPr id="10" name="TextBox 9"/>
+            <p:cNvPr id="11" name="TextBox 10"/>
             <p:cNvSpPr txBox="1"/>
             <p:nvPr/>
           </p:nvSpPr>
           <p:spPr>
             <a:xfrm>
-              <a:off x="2482266" y="4105735"/>
-              <a:ext cx="1022861" cy="204572"/>
+              <a:off x="2629259" y="3962759"/>
+              <a:ext cx="981255" cy="196251"/>
             </a:xfrm>
             <a:prstGeom prst="rect">
               <a:avLst/>
@@ -12166,7 +12154,7 @@
                 </a:lnSpc>
               </a:pPr>
               <a:r>
-                <a:rPr sz="1239" b="0" lang="ko-KR">
+                <a:rPr sz="1188" b="0" lang="ko-KR">
                   <a:solidFill>
                     <a:srgbClr val="232F3E"/>
                   </a:solidFill>
@@ -12181,19 +12169,19 @@
         </p:sp>
         <p:cxnSp>
           <p:nvCxnSpPr>
-            <p:cNvPr id="11" name="Connector 10"/>
+            <p:cNvPr id="12" name="Connector 11"/>
             <p:cNvCxnSpPr/>
             <p:nvPr/>
           </p:nvCxnSpPr>
           <p:spPr>
             <a:xfrm>
-              <a:off x="1689830" y="3783140"/>
-              <a:ext cx="989140" cy="0"/>
+              <a:off x="1869057" y="3653287"/>
+              <a:ext cx="948905" cy="0"/>
             </a:xfrm>
             <a:prstGeom prst="line">
               <a:avLst/>
             </a:prstGeom>
-            <a:ln w="16860">
+            <a:ln w="16175">
               <a:solidFill>
                 <a:srgbClr val="232F3E"/>
               </a:solidFill>
@@ -12204,19 +12192,19 @@
         </p:cxnSp>
         <p:cxnSp>
           <p:nvCxnSpPr>
-            <p:cNvPr id="12" name="Connector 11"/>
+            <p:cNvPr id="13" name="Connector 12"/>
             <p:cNvCxnSpPr/>
             <p:nvPr/>
           </p:nvCxnSpPr>
           <p:spPr>
             <a:xfrm>
-              <a:off x="3308423" y="3783140"/>
-              <a:ext cx="562011" cy="0"/>
+              <a:off x="3421811" y="3653287"/>
+              <a:ext cx="539151" cy="0"/>
             </a:xfrm>
             <a:prstGeom prst="line">
               <a:avLst/>
             </a:prstGeom>
-            <a:ln w="16860">
+            <a:ln w="16175">
               <a:solidFill>
                 <a:srgbClr val="232F3E"/>
               </a:solidFill>
@@ -12227,14 +12215,14 @@
         </p:cxnSp>
         <p:sp>
           <p:nvSpPr>
-            <p:cNvPr id="13" name="TextBox 12"/>
+            <p:cNvPr id="14" name="TextBox 13"/>
             <p:cNvSpPr txBox="1"/>
             <p:nvPr/>
           </p:nvSpPr>
           <p:spPr>
             <a:xfrm>
-              <a:off x="3290158" y="3553840"/>
-              <a:ext cx="598542" cy="175348"/>
+              <a:off x="3404289" y="3433313"/>
+              <a:ext cx="574196" cy="168215"/>
             </a:xfrm>
             <a:prstGeom prst="rect">
               <a:avLst/>
@@ -12253,7 +12241,7 @@
                 </a:lnSpc>
               </a:pPr>
               <a:r>
-                <a:rPr sz="1062" b="0" lang="ko-KR">
+                <a:rPr sz="1018" b="0" lang="ko-KR">
                   <a:solidFill>
                     <a:srgbClr val="232F3E"/>
                   </a:solidFill>
@@ -12268,7 +12256,7 @@
         </p:sp>
         <p:pic>
           <p:nvPicPr>
-            <p:cNvPr id="14" name="AWS-Site-to-Site-VPN" descr="AWS Site to Site VPN"/>
+            <p:cNvPr id="15" name="AWS-Site-to-Site-VPN" descr="AWS Site to Site VPN"/>
             <p:cNvPicPr>
               <a:picLocks noChangeAspect="1"/>
             </p:cNvPicPr>
@@ -12288,8 +12276,8 @@
           </p:blipFill>
           <p:spPr>
             <a:xfrm>
-              <a:off x="3915395" y="3513375"/>
-              <a:ext cx="539531" cy="539531"/>
+              <a:off x="4004094" y="3394494"/>
+              <a:ext cx="517585" cy="517585"/>
             </a:xfrm>
             <a:prstGeom prst="rect">
               <a:avLst/>
@@ -12298,14 +12286,14 @@
         </p:pic>
         <p:sp>
           <p:nvSpPr>
-            <p:cNvPr id="15" name="TextBox 14"/>
+            <p:cNvPr id="16" name="TextBox 15"/>
             <p:cNvSpPr txBox="1"/>
             <p:nvPr/>
           </p:nvSpPr>
           <p:spPr>
             <a:xfrm>
-              <a:off x="3240982" y="4105735"/>
-              <a:ext cx="1888359" cy="204572"/>
+              <a:off x="3357113" y="3962759"/>
+              <a:ext cx="1811547" cy="196251"/>
             </a:xfrm>
             <a:prstGeom prst="rect">
               <a:avLst/>
@@ -12324,7 +12312,7 @@
                 </a:lnSpc>
               </a:pPr>
               <a:r>
-                <a:rPr sz="1239" b="0" lang="ko-KR">
+                <a:rPr sz="1188" b="0" lang="ko-KR">
                   <a:solidFill>
                     <a:srgbClr val="232F3E"/>
                   </a:solidFill>
@@ -12339,19 +12327,19 @@
         </p:sp>
         <p:cxnSp>
           <p:nvCxnSpPr>
-            <p:cNvPr id="16" name="Connector 15"/>
+            <p:cNvPr id="17" name="Connector 16"/>
             <p:cNvCxnSpPr/>
             <p:nvPr/>
           </p:nvCxnSpPr>
           <p:spPr>
             <a:xfrm>
-              <a:off x="4499887" y="3783140"/>
-              <a:ext cx="1933320" cy="0"/>
+              <a:off x="4564811" y="3653287"/>
+              <a:ext cx="1854680" cy="0"/>
             </a:xfrm>
             <a:prstGeom prst="line">
               <a:avLst/>
             </a:prstGeom>
-            <a:ln w="16860">
+            <a:ln w="16175">
               <a:solidFill>
                 <a:srgbClr val="232F3E"/>
               </a:solidFill>
@@ -12362,20 +12350,20 @@
         </p:cxnSp>
         <p:sp>
           <p:nvSpPr>
-            <p:cNvPr id="17" name="Rectangle 16"/>
+            <p:cNvPr id="18" name="Rectangle 17"/>
             <p:cNvSpPr/>
             <p:nvPr/>
           </p:nvSpPr>
           <p:spPr>
             <a:xfrm>
-              <a:off x="5039418" y="1107966"/>
-              <a:ext cx="6744138" cy="5327869"/>
-            </a:xfrm>
-            <a:prstGeom prst="rect">
-              <a:avLst/>
-            </a:prstGeom>
-            <a:noFill/>
-            <a:ln w="22480">
+              <a:off x="5082396" y="1086928"/>
+              <a:ext cx="6469811" cy="5024887"/>
+            </a:xfrm>
+            <a:prstGeom prst="rect">
+              <a:avLst/>
+            </a:prstGeom>
+            <a:noFill/>
+            <a:ln w="21566">
               <a:solidFill>
                 <a:srgbClr val="232F3E"/>
               </a:solidFill>
@@ -12393,7 +12381,7 @@
         </p:sp>
         <p:pic>
           <p:nvPicPr>
-            <p:cNvPr id="18" name="AWS-Cloud-logo_32" descr="AWS Cloud logo_32"/>
+            <p:cNvPr id="19" name="AWS-Cloud-logo_32" descr="AWS Cloud logo_32"/>
             <p:cNvPicPr>
               <a:picLocks noChangeAspect="1"/>
             </p:cNvPicPr>
@@ -12413,8 +12401,8 @@
           </p:blipFill>
           <p:spPr>
             <a:xfrm>
-              <a:off x="5039418" y="1107966"/>
-              <a:ext cx="359687" cy="359687"/>
+              <a:off x="5082396" y="1086928"/>
+              <a:ext cx="345057" cy="345057"/>
             </a:xfrm>
             <a:prstGeom prst="rect">
               <a:avLst/>
@@ -12423,14 +12411,14 @@
         </p:pic>
         <p:sp>
           <p:nvSpPr>
-            <p:cNvPr id="19" name="TextBox 18"/>
+            <p:cNvPr id="20" name="TextBox 19"/>
             <p:cNvSpPr txBox="1"/>
             <p:nvPr/>
           </p:nvSpPr>
           <p:spPr>
             <a:xfrm>
-              <a:off x="5511508" y="1195077"/>
-              <a:ext cx="1211837" cy="219184"/>
+              <a:off x="5535283" y="1170497"/>
+              <a:ext cx="1162544" cy="210269"/>
             </a:xfrm>
             <a:prstGeom prst="rect">
               <a:avLst/>
@@ -12449,7 +12437,7 @@
                 </a:lnSpc>
               </a:pPr>
               <a:r>
-                <a:rPr sz="1327" b="1" lang="ko-KR">
+                <a:rPr sz="1273" b="1" lang="ko-KR">
                   <a:solidFill>
                     <a:srgbClr val="232F3E"/>
                   </a:solidFill>
@@ -12464,20 +12452,20 @@
         </p:sp>
         <p:sp>
           <p:nvSpPr>
-            <p:cNvPr id="20" name="Rectangle 19"/>
+            <p:cNvPr id="21" name="Rectangle 20"/>
             <p:cNvSpPr/>
             <p:nvPr/>
           </p:nvSpPr>
           <p:spPr>
             <a:xfrm>
-              <a:off x="5264223" y="1557575"/>
-              <a:ext cx="3147264" cy="4406170"/>
-            </a:xfrm>
-            <a:prstGeom prst="rect">
-              <a:avLst/>
-            </a:prstGeom>
-            <a:noFill/>
-            <a:ln w="22480">
+              <a:off x="5298057" y="1518249"/>
+              <a:ext cx="3105509" cy="4377906"/>
+            </a:xfrm>
+            <a:prstGeom prst="rect">
+              <a:avLst/>
+            </a:prstGeom>
+            <a:noFill/>
+            <a:ln w="21566">
               <a:solidFill>
                 <a:srgbClr val="00A4A6"/>
               </a:solidFill>
@@ -12497,7 +12485,7 @@
         </p:sp>
         <p:pic>
           <p:nvPicPr>
-            <p:cNvPr id="21" name="Region_32" descr="Region_32"/>
+            <p:cNvPr id="22" name="Region_32" descr="Region_32"/>
             <p:cNvPicPr>
               <a:picLocks noChangeAspect="1"/>
             </p:cNvPicPr>
@@ -12517,8 +12505,8 @@
           </p:blipFill>
           <p:spPr>
             <a:xfrm>
-              <a:off x="5264223" y="1557575"/>
-              <a:ext cx="269766" cy="269766"/>
+              <a:off x="5298057" y="1518249"/>
+              <a:ext cx="258792" cy="258792"/>
             </a:xfrm>
             <a:prstGeom prst="rect">
               <a:avLst/>
@@ -12527,14 +12515,14 @@
         </p:pic>
         <p:sp>
           <p:nvSpPr>
-            <p:cNvPr id="22" name="TextBox 21"/>
+            <p:cNvPr id="23" name="TextBox 22"/>
             <p:cNvSpPr txBox="1"/>
             <p:nvPr/>
           </p:nvSpPr>
           <p:spPr>
             <a:xfrm>
-              <a:off x="5623910" y="1610404"/>
-              <a:ext cx="2429295" cy="204572"/>
+              <a:off x="5643113" y="1568929"/>
+              <a:ext cx="2330480" cy="196251"/>
             </a:xfrm>
             <a:prstGeom prst="rect">
               <a:avLst/>
@@ -12553,7 +12541,7 @@
                 </a:lnSpc>
               </a:pPr>
               <a:r>
-                <a:rPr sz="1239" b="1" lang="ko-KR">
+                <a:rPr sz="1188" b="1" lang="ko-KR">
                   <a:solidFill>
                     <a:srgbClr val="00A4A6"/>
                   </a:solidFill>
@@ -12568,7 +12556,7 @@
         </p:sp>
         <p:pic>
           <p:nvPicPr>
-            <p:cNvPr id="23" name="AWS-Transit-Gateway" descr="AWS Transit Gateway"/>
+            <p:cNvPr id="24" name="AWS-Transit-Gateway" descr="AWS Transit Gateway"/>
             <p:cNvPicPr>
               <a:picLocks noChangeAspect="1"/>
             </p:cNvPicPr>
@@ -12588,8 +12576,8 @@
           </p:blipFill>
           <p:spPr>
             <a:xfrm>
-              <a:off x="6478168" y="3513375"/>
-              <a:ext cx="539531" cy="539531"/>
+              <a:off x="6462623" y="3394494"/>
+              <a:ext cx="517585" cy="517585"/>
             </a:xfrm>
             <a:prstGeom prst="rect">
               <a:avLst/>
@@ -12598,14 +12586,14 @@
         </p:pic>
         <p:sp>
           <p:nvSpPr>
-            <p:cNvPr id="24" name="TextBox 23"/>
+            <p:cNvPr id="25" name="TextBox 24"/>
             <p:cNvSpPr txBox="1"/>
             <p:nvPr/>
           </p:nvSpPr>
           <p:spPr>
             <a:xfrm>
-              <a:off x="5857848" y="4105735"/>
-              <a:ext cx="1780171" cy="204572"/>
+              <a:off x="5763748" y="3962759"/>
+              <a:ext cx="1915334" cy="196251"/>
             </a:xfrm>
             <a:prstGeom prst="rect">
               <a:avLst/>
@@ -12624,7 +12612,7 @@
                 </a:lnSpc>
               </a:pPr>
               <a:r>
-                <a:rPr sz="1239" b="0" lang="ko-KR">
+                <a:rPr sz="1188" b="0" lang="ko-KR">
                   <a:solidFill>
                     <a:srgbClr val="232F3E"/>
                   </a:solidFill>
@@ -12632,14 +12620,14 @@
                   <a:ea typeface="Malgun Gothic"/>
                   <a:cs typeface="Malgun Gothic"/>
                 </a:rPr>
-                <a:t>Transit Gateway</a:t>
+                <a:t>Transit Gateway A</a:t>
               </a:r>
             </a:p>
           </p:txBody>
         </p:sp>
         <p:pic>
           <p:nvPicPr>
-            <p:cNvPr id="25" name="Amazon-Virtual-Private-Cloud" descr="Amazon Virtual Private Cloud"/>
+            <p:cNvPr id="26" name="Amazon-Virtual-Private-Cloud" descr="Amazon Virtual Private Cloud"/>
             <p:cNvPicPr>
               <a:picLocks noChangeAspect="1"/>
             </p:cNvPicPr>
@@ -12659,8 +12647,8 @@
           </p:blipFill>
           <p:spPr>
             <a:xfrm>
-              <a:off x="5803754" y="2007184"/>
-              <a:ext cx="539531" cy="539531"/>
+              <a:off x="5815642" y="1949570"/>
+              <a:ext cx="517585" cy="517585"/>
             </a:xfrm>
             <a:prstGeom prst="rect">
               <a:avLst/>
@@ -12669,14 +12657,14 @@
         </p:pic>
         <p:sp>
           <p:nvSpPr>
-            <p:cNvPr id="26" name="TextBox 25"/>
+            <p:cNvPr id="27" name="TextBox 26"/>
             <p:cNvSpPr txBox="1"/>
             <p:nvPr/>
           </p:nvSpPr>
           <p:spPr>
             <a:xfrm>
-              <a:off x="5453902" y="2599544"/>
-              <a:ext cx="1239235" cy="204572"/>
+              <a:off x="5376233" y="2517835"/>
+              <a:ext cx="1396401" cy="196251"/>
             </a:xfrm>
             <a:prstGeom prst="rect">
               <a:avLst/>
@@ -12695,7 +12683,7 @@
                 </a:lnSpc>
               </a:pPr>
               <a:r>
-                <a:rPr sz="1239" b="0" lang="ko-KR">
+                <a:rPr sz="1188" b="0" lang="ko-KR">
                   <a:solidFill>
                     <a:srgbClr val="232F3E"/>
                   </a:solidFill>
@@ -12703,14 +12691,55 @@
                   <a:ea typeface="Malgun Gothic"/>
                   <a:cs typeface="Malgun Gothic"/>
                 </a:rPr>
-                <a:t>Shared VPC</a:t>
+                <a:t>Services VPC</a:t>
+              </a:r>
+            </a:p>
+          </p:txBody>
+        </p:sp>
+        <p:sp>
+          <p:nvSpPr>
+            <p:cNvPr id="28" name="TextBox 27"/>
+            <p:cNvSpPr txBox="1"/>
+            <p:nvPr/>
+          </p:nvSpPr>
+          <p:spPr>
+            <a:xfrm>
+              <a:off x="5520456" y="2710851"/>
+              <a:ext cx="1107955" cy="168215"/>
+            </a:xfrm>
+            <a:prstGeom prst="rect">
+              <a:avLst/>
+            </a:prstGeom>
+            <a:noFill/>
+          </p:spPr>
+          <p:txBody>
+            <a:bodyPr wrap="none" lIns="0" rIns="0" tIns="0" bIns="0" anchor="t">
+              <a:noAutofit/>
+            </a:bodyPr>
+            <a:lstStyle/>
+            <a:p>
+              <a:pPr algn="ctr">
+                <a:lnSpc>
+                  <a:spcPct val="100000"/>
+                </a:lnSpc>
+              </a:pPr>
+              <a:r>
+                <a:rPr sz="1018" b="0" lang="ko-KR">
+                  <a:solidFill>
+                    <a:srgbClr val="545B64"/>
+                  </a:solidFill>
+                  <a:latin typeface="Arial"/>
+                  <a:ea typeface="Malgun Gothic"/>
+                  <a:cs typeface="Malgun Gothic"/>
+                </a:rPr>
+                <a:t>10.1.0.0/16</a:t>
               </a:r>
             </a:p>
           </p:txBody>
         </p:sp>
         <p:pic>
           <p:nvPicPr>
-            <p:cNvPr id="27" name="Amazon-Virtual-Private-Cloud" descr="Amazon Virtual Private Cloud"/>
+            <p:cNvPr id="29" name="Amazon-Virtual-Private-Cloud" descr="Amazon Virtual Private Cloud"/>
             <p:cNvPicPr>
               <a:picLocks noChangeAspect="1"/>
             </p:cNvPicPr>
@@ -12730,8 +12759,8 @@
           </p:blipFill>
           <p:spPr>
             <a:xfrm>
-              <a:off x="7152582" y="2007184"/>
-              <a:ext cx="539531" cy="539531"/>
+              <a:off x="7109604" y="1949570"/>
+              <a:ext cx="517585" cy="517585"/>
             </a:xfrm>
             <a:prstGeom prst="rect">
               <a:avLst/>
@@ -12740,14 +12769,14 @@
         </p:pic>
         <p:sp>
           <p:nvSpPr>
-            <p:cNvPr id="28" name="TextBox 27"/>
+            <p:cNvPr id="30" name="TextBox 29"/>
             <p:cNvSpPr txBox="1"/>
             <p:nvPr/>
           </p:nvSpPr>
           <p:spPr>
             <a:xfrm>
-              <a:off x="6910917" y="2599544"/>
-              <a:ext cx="1022861" cy="204572"/>
+              <a:off x="6877769" y="2517835"/>
+              <a:ext cx="981255" cy="196251"/>
             </a:xfrm>
             <a:prstGeom prst="rect">
               <a:avLst/>
@@ -12766,7 +12795,7 @@
                 </a:lnSpc>
               </a:pPr>
               <a:r>
-                <a:rPr sz="1239" b="0" lang="ko-KR">
+                <a:rPr sz="1188" b="0" lang="ko-KR">
                   <a:solidFill>
                     <a:srgbClr val="232F3E"/>
                   </a:solidFill>
@@ -12779,9 +12808,50 @@
             </a:p>
           </p:txBody>
         </p:sp>
+        <p:sp>
+          <p:nvSpPr>
+            <p:cNvPr id="31" name="TextBox 30"/>
+            <p:cNvSpPr txBox="1"/>
+            <p:nvPr/>
+          </p:nvSpPr>
+          <p:spPr>
+            <a:xfrm>
+              <a:off x="6814419" y="2710851"/>
+              <a:ext cx="1107955" cy="168215"/>
+            </a:xfrm>
+            <a:prstGeom prst="rect">
+              <a:avLst/>
+            </a:prstGeom>
+            <a:noFill/>
+          </p:spPr>
+          <p:txBody>
+            <a:bodyPr wrap="none" lIns="0" rIns="0" tIns="0" bIns="0" anchor="t">
+              <a:noAutofit/>
+            </a:bodyPr>
+            <a:lstStyle/>
+            <a:p>
+              <a:pPr algn="ctr">
+                <a:lnSpc>
+                  <a:spcPct val="100000"/>
+                </a:lnSpc>
+              </a:pPr>
+              <a:r>
+                <a:rPr sz="1018" b="0" lang="ko-KR">
+                  <a:solidFill>
+                    <a:srgbClr val="545B64"/>
+                  </a:solidFill>
+                  <a:latin typeface="Arial"/>
+                  <a:ea typeface="Malgun Gothic"/>
+                  <a:cs typeface="Malgun Gothic"/>
+                </a:rPr>
+                <a:t>10.2.0.0/16</a:t>
+              </a:r>
+            </a:p>
+          </p:txBody>
+        </p:sp>
         <p:pic>
           <p:nvPicPr>
-            <p:cNvPr id="29" name="Amazon-Virtual-Private-Cloud" descr="Amazon Virtual Private Cloud"/>
+            <p:cNvPr id="32" name="Amazon-Virtual-Private-Cloud" descr="Amazon Virtual Private Cloud"/>
             <p:cNvPicPr>
               <a:picLocks noChangeAspect="1"/>
             </p:cNvPicPr>
@@ -12801,8 +12871,8 @@
           </p:blipFill>
           <p:spPr>
             <a:xfrm>
-              <a:off x="5803754" y="5019566"/>
-              <a:ext cx="539531" cy="539531"/>
+              <a:off x="5815642" y="4839419"/>
+              <a:ext cx="517585" cy="517585"/>
             </a:xfrm>
             <a:prstGeom prst="rect">
               <a:avLst/>
@@ -12811,14 +12881,14 @@
         </p:pic>
         <p:sp>
           <p:nvSpPr>
-            <p:cNvPr id="30" name="TextBox 29"/>
+            <p:cNvPr id="33" name="TextBox 32"/>
             <p:cNvSpPr txBox="1"/>
             <p:nvPr/>
           </p:nvSpPr>
           <p:spPr>
             <a:xfrm>
-              <a:off x="5616183" y="5611926"/>
-              <a:ext cx="914674" cy="204572"/>
+              <a:off x="5635700" y="5407684"/>
+              <a:ext cx="877468" cy="196251"/>
             </a:xfrm>
             <a:prstGeom prst="rect">
               <a:avLst/>
@@ -12837,7 +12907,7 @@
                 </a:lnSpc>
               </a:pPr>
               <a:r>
-                <a:rPr sz="1239" b="0" lang="ko-KR">
+                <a:rPr sz="1188" b="0" lang="ko-KR">
                   <a:solidFill>
                     <a:srgbClr val="232F3E"/>
                   </a:solidFill>
@@ -12850,9 +12920,50 @@
             </a:p>
           </p:txBody>
         </p:sp>
+        <p:sp>
+          <p:nvSpPr>
+            <p:cNvPr id="34" name="TextBox 33"/>
+            <p:cNvSpPr txBox="1"/>
+            <p:nvPr/>
+          </p:nvSpPr>
+          <p:spPr>
+            <a:xfrm>
+              <a:off x="5520456" y="5600700"/>
+              <a:ext cx="1107955" cy="168215"/>
+            </a:xfrm>
+            <a:prstGeom prst="rect">
+              <a:avLst/>
+            </a:prstGeom>
+            <a:noFill/>
+          </p:spPr>
+          <p:txBody>
+            <a:bodyPr wrap="none" lIns="0" rIns="0" tIns="0" bIns="0" anchor="t">
+              <a:noAutofit/>
+            </a:bodyPr>
+            <a:lstStyle/>
+            <a:p>
+              <a:pPr algn="ctr">
+                <a:lnSpc>
+                  <a:spcPct val="100000"/>
+                </a:lnSpc>
+              </a:pPr>
+              <a:r>
+                <a:rPr sz="1018" b="0" lang="ko-KR">
+                  <a:solidFill>
+                    <a:srgbClr val="545B64"/>
+                  </a:solidFill>
+                  <a:latin typeface="Arial"/>
+                  <a:ea typeface="Malgun Gothic"/>
+                  <a:cs typeface="Malgun Gothic"/>
+                </a:rPr>
+                <a:t>10.3.0.0/16</a:t>
+              </a:r>
+            </a:p>
+          </p:txBody>
+        </p:sp>
         <p:pic>
           <p:nvPicPr>
-            <p:cNvPr id="31" name="Amazon-Virtual-Private-Cloud" descr="Amazon Virtual Private Cloud"/>
+            <p:cNvPr id="35" name="Amazon-Virtual-Private-Cloud" descr="Amazon Virtual Private Cloud"/>
             <p:cNvPicPr>
               <a:picLocks noChangeAspect="1"/>
             </p:cNvPicPr>
@@ -12872,8 +12983,8 @@
           </p:blipFill>
           <p:spPr>
             <a:xfrm>
-              <a:off x="7152582" y="5019566"/>
-              <a:ext cx="539531" cy="539531"/>
+              <a:off x="7109604" y="4839419"/>
+              <a:ext cx="517585" cy="517585"/>
             </a:xfrm>
             <a:prstGeom prst="rect">
               <a:avLst/>
@@ -12882,14 +12993,14 @@
         </p:pic>
         <p:sp>
           <p:nvSpPr>
-            <p:cNvPr id="32" name="TextBox 31"/>
+            <p:cNvPr id="36" name="TextBox 35"/>
             <p:cNvSpPr txBox="1"/>
             <p:nvPr/>
           </p:nvSpPr>
           <p:spPr>
             <a:xfrm>
-              <a:off x="6910917" y="5611926"/>
-              <a:ext cx="1022861" cy="204572"/>
+              <a:off x="6877769" y="5407684"/>
+              <a:ext cx="981255" cy="196251"/>
             </a:xfrm>
             <a:prstGeom prst="rect">
               <a:avLst/>
@@ -12908,7 +13019,7 @@
                 </a:lnSpc>
               </a:pPr>
               <a:r>
-                <a:rPr sz="1239" b="0" lang="ko-KR">
+                <a:rPr sz="1188" b="0" lang="ko-KR">
                   <a:solidFill>
                     <a:srgbClr val="232F3E"/>
                   </a:solidFill>
@@ -12923,14 +13034,55 @@
         </p:sp>
         <p:sp>
           <p:nvSpPr>
-            <p:cNvPr id="33" name="Freeform 32"/>
+            <p:cNvPr id="37" name="TextBox 36"/>
+            <p:cNvSpPr txBox="1"/>
+            <p:nvPr/>
+          </p:nvSpPr>
+          <p:spPr>
+            <a:xfrm>
+              <a:off x="6814419" y="5600700"/>
+              <a:ext cx="1107955" cy="168215"/>
+            </a:xfrm>
+            <a:prstGeom prst="rect">
+              <a:avLst/>
+            </a:prstGeom>
+            <a:noFill/>
+          </p:spPr>
+          <p:txBody>
+            <a:bodyPr wrap="none" lIns="0" rIns="0" tIns="0" bIns="0" anchor="t">
+              <a:noAutofit/>
+            </a:bodyPr>
+            <a:lstStyle/>
+            <a:p>
+              <a:pPr algn="ctr">
+                <a:lnSpc>
+                  <a:spcPct val="100000"/>
+                </a:lnSpc>
+              </a:pPr>
+              <a:r>
+                <a:rPr sz="1018" b="0" lang="ko-KR">
+                  <a:solidFill>
+                    <a:srgbClr val="545B64"/>
+                  </a:solidFill>
+                  <a:latin typeface="Arial"/>
+                  <a:ea typeface="Malgun Gothic"/>
+                  <a:cs typeface="Malgun Gothic"/>
+                </a:rPr>
+                <a:t>10.4.0.0/16</a:t>
+              </a:r>
+            </a:p>
+          </p:txBody>
+        </p:sp>
+        <p:sp>
+          <p:nvSpPr>
+            <p:cNvPr id="38" name="Freeform 37"/>
             <p:cNvSpPr/>
             <p:nvPr/>
           </p:nvSpPr>
           <p:spPr>
             <a:xfrm>
-              <a:off x="6073520" y="2838961"/>
-              <a:ext cx="562011" cy="629453"/>
+              <a:off x="6074434" y="2920042"/>
+              <a:ext cx="539151" cy="431320"/>
             </a:xfrm>
             <a:custGeom>
               <a:avLst/>
@@ -12939,15 +13091,15 @@
               <a:cxnLst/>
               <a:rect l="l" t="t" r="r" b="b"/>
               <a:pathLst>
-                <a:path w="562011" h="629453">
+                <a:path w="539151" h="431320">
                   <a:moveTo>
-                    <a:pt x="562011" y="629453"/>
+                    <a:pt x="539151" y="431320"/>
                   </a:moveTo>
                   <a:lnTo>
-                    <a:pt x="562011" y="314726"/>
+                    <a:pt x="539151" y="215660"/>
                   </a:lnTo>
                   <a:lnTo>
-                    <a:pt x="0" y="314726"/>
+                    <a:pt x="0" y="215660"/>
                   </a:lnTo>
                   <a:lnTo>
                     <a:pt x="0" y="0"/>
@@ -12956,7 +13108,7 @@
               </a:pathLst>
             </a:custGeom>
             <a:noFill/>
-            <a:ln w="16860">
+            <a:ln w="16175">
               <a:solidFill>
                 <a:srgbClr val="232F3E"/>
               </a:solidFill>
@@ -12974,14 +13126,14 @@
         </p:sp>
         <p:sp>
           <p:nvSpPr>
-            <p:cNvPr id="34" name="Freeform 33"/>
+            <p:cNvPr id="39" name="Freeform 38"/>
             <p:cNvSpPr/>
             <p:nvPr/>
           </p:nvSpPr>
           <p:spPr>
             <a:xfrm>
-              <a:off x="6860336" y="2838961"/>
-              <a:ext cx="562011" cy="629453"/>
+              <a:off x="6829245" y="2920042"/>
+              <a:ext cx="539151" cy="431320"/>
             </a:xfrm>
             <a:custGeom>
               <a:avLst/>
@@ -12990,24 +13142,24 @@
               <a:cxnLst/>
               <a:rect l="l" t="t" r="r" b="b"/>
               <a:pathLst>
-                <a:path w="562011" h="629453">
+                <a:path w="539151" h="431320">
                   <a:moveTo>
-                    <a:pt x="0" y="629453"/>
+                    <a:pt x="0" y="431320"/>
                   </a:moveTo>
                   <a:lnTo>
-                    <a:pt x="0" y="314726"/>
+                    <a:pt x="0" y="215660"/>
                   </a:lnTo>
                   <a:lnTo>
-                    <a:pt x="562011" y="314726"/>
+                    <a:pt x="539151" y="215660"/>
                   </a:lnTo>
                   <a:lnTo>
-                    <a:pt x="562011" y="0"/>
+                    <a:pt x="539151" y="0"/>
                   </a:lnTo>
                 </a:path>
               </a:pathLst>
             </a:custGeom>
             <a:noFill/>
-            <a:ln w="16860">
+            <a:ln w="16175">
               <a:solidFill>
                 <a:srgbClr val="232F3E"/>
               </a:solidFill>
@@ -13025,14 +13177,14 @@
         </p:sp>
         <p:sp>
           <p:nvSpPr>
-            <p:cNvPr id="35" name="Freeform 34"/>
+            <p:cNvPr id="40" name="Freeform 39"/>
             <p:cNvSpPr/>
             <p:nvPr/>
           </p:nvSpPr>
           <p:spPr>
             <a:xfrm>
-              <a:off x="6073520" y="4345152"/>
-              <a:ext cx="562011" cy="629453"/>
+              <a:off x="6074434" y="4192438"/>
+              <a:ext cx="539151" cy="603849"/>
             </a:xfrm>
             <a:custGeom>
               <a:avLst/>
@@ -13041,24 +13193,24 @@
               <a:cxnLst/>
               <a:rect l="l" t="t" r="r" b="b"/>
               <a:pathLst>
-                <a:path w="562011" h="629453">
+                <a:path w="539151" h="603849">
                   <a:moveTo>
-                    <a:pt x="562011" y="0"/>
+                    <a:pt x="539151" y="0"/>
                   </a:moveTo>
                   <a:lnTo>
-                    <a:pt x="562011" y="314726"/>
+                    <a:pt x="539151" y="301924"/>
                   </a:lnTo>
                   <a:lnTo>
-                    <a:pt x="0" y="314726"/>
+                    <a:pt x="0" y="301924"/>
                   </a:lnTo>
                   <a:lnTo>
-                    <a:pt x="0" y="629453"/>
+                    <a:pt x="0" y="603849"/>
                   </a:lnTo>
                 </a:path>
               </a:pathLst>
             </a:custGeom>
             <a:noFill/>
-            <a:ln w="16860">
+            <a:ln w="16175">
               <a:solidFill>
                 <a:srgbClr val="232F3E"/>
               </a:solidFill>
@@ -13076,14 +13228,14 @@
         </p:sp>
         <p:sp>
           <p:nvSpPr>
-            <p:cNvPr id="36" name="Freeform 35"/>
+            <p:cNvPr id="41" name="Freeform 40"/>
             <p:cNvSpPr/>
             <p:nvPr/>
           </p:nvSpPr>
           <p:spPr>
             <a:xfrm>
-              <a:off x="6860336" y="4345152"/>
-              <a:ext cx="562011" cy="629453"/>
+              <a:off x="6829245" y="4192438"/>
+              <a:ext cx="539151" cy="603849"/>
             </a:xfrm>
             <a:custGeom>
               <a:avLst/>
@@ -13092,24 +13244,24 @@
               <a:cxnLst/>
               <a:rect l="l" t="t" r="r" b="b"/>
               <a:pathLst>
-                <a:path w="562011" h="629453">
+                <a:path w="539151" h="603849">
                   <a:moveTo>
                     <a:pt x="0" y="0"/>
                   </a:moveTo>
                   <a:lnTo>
-                    <a:pt x="0" y="314726"/>
+                    <a:pt x="0" y="301924"/>
                   </a:lnTo>
                   <a:lnTo>
-                    <a:pt x="562011" y="314726"/>
+                    <a:pt x="539151" y="301924"/>
                   </a:lnTo>
                   <a:lnTo>
-                    <a:pt x="562011" y="629453"/>
+                    <a:pt x="539151" y="603849"/>
                   </a:lnTo>
                 </a:path>
               </a:pathLst>
             </a:custGeom>
             <a:noFill/>
-            <a:ln w="16860">
+            <a:ln w="16175">
               <a:solidFill>
                 <a:srgbClr val="232F3E"/>
               </a:solidFill>
@@ -13127,20 +13279,20 @@
         </p:sp>
         <p:sp>
           <p:nvSpPr>
-            <p:cNvPr id="37" name="Rectangle 36"/>
+            <p:cNvPr id="42" name="Rectangle 41"/>
             <p:cNvSpPr/>
             <p:nvPr/>
           </p:nvSpPr>
           <p:spPr>
             <a:xfrm>
-              <a:off x="8861097" y="1557575"/>
-              <a:ext cx="2697655" cy="4406170"/>
-            </a:xfrm>
-            <a:prstGeom prst="rect">
-              <a:avLst/>
-            </a:prstGeom>
-            <a:noFill/>
-            <a:ln w="22480">
+              <a:off x="8834887" y="1518249"/>
+              <a:ext cx="2501660" cy="4377906"/>
+            </a:xfrm>
+            <a:prstGeom prst="rect">
+              <a:avLst/>
+            </a:prstGeom>
+            <a:noFill/>
+            <a:ln w="21566">
               <a:solidFill>
                 <a:srgbClr val="00A4A6"/>
               </a:solidFill>
@@ -13160,7 +13312,7 @@
         </p:sp>
         <p:pic>
           <p:nvPicPr>
-            <p:cNvPr id="38" name="Region_32" descr="Region_32"/>
+            <p:cNvPr id="43" name="Region_32" descr="Region_32"/>
             <p:cNvPicPr>
               <a:picLocks noChangeAspect="1"/>
             </p:cNvPicPr>
@@ -13180,8 +13332,8 @@
           </p:blipFill>
           <p:spPr>
             <a:xfrm>
-              <a:off x="8861097" y="1557575"/>
-              <a:ext cx="269766" cy="269766"/>
+              <a:off x="8834887" y="1518249"/>
+              <a:ext cx="258792" cy="258792"/>
             </a:xfrm>
             <a:prstGeom prst="rect">
               <a:avLst/>
@@ -13190,14 +13342,14 @@
         </p:pic>
         <p:sp>
           <p:nvSpPr>
-            <p:cNvPr id="39" name="TextBox 38"/>
+            <p:cNvPr id="44" name="TextBox 43"/>
             <p:cNvSpPr txBox="1"/>
             <p:nvPr/>
           </p:nvSpPr>
           <p:spPr>
             <a:xfrm>
-              <a:off x="9220784" y="1610404"/>
-              <a:ext cx="2429295" cy="204572"/>
+              <a:off x="9179943" y="1568929"/>
+              <a:ext cx="2330480" cy="196251"/>
             </a:xfrm>
             <a:prstGeom prst="rect">
               <a:avLst/>
@@ -13216,7 +13368,7 @@
                 </a:lnSpc>
               </a:pPr>
               <a:r>
-                <a:rPr sz="1239" b="1" lang="ko-KR">
+                <a:rPr sz="1188" b="1" lang="ko-KR">
                   <a:solidFill>
                     <a:srgbClr val="00A4A6"/>
                   </a:solidFill>
@@ -13231,7 +13383,7 @@
         </p:sp>
         <p:pic>
           <p:nvPicPr>
-            <p:cNvPr id="40" name="AWS-Transit-Gateway" descr="AWS Transit Gateway"/>
+            <p:cNvPr id="45" name="AWS-Transit-Gateway" descr="AWS Transit Gateway"/>
             <p:cNvPicPr>
               <a:picLocks noChangeAspect="1"/>
             </p:cNvPicPr>
@@ -13251,8 +13403,8 @@
           </p:blipFill>
           <p:spPr>
             <a:xfrm>
-              <a:off x="9940159" y="3513375"/>
-              <a:ext cx="539531" cy="539531"/>
+              <a:off x="9783792" y="3394494"/>
+              <a:ext cx="517585" cy="517585"/>
             </a:xfrm>
             <a:prstGeom prst="rect">
               <a:avLst/>
@@ -13261,14 +13413,14 @@
         </p:pic>
         <p:sp>
           <p:nvSpPr>
-            <p:cNvPr id="41" name="TextBox 40"/>
+            <p:cNvPr id="46" name="TextBox 45"/>
             <p:cNvSpPr txBox="1"/>
             <p:nvPr/>
           </p:nvSpPr>
           <p:spPr>
             <a:xfrm>
-              <a:off x="9319838" y="4105735"/>
-              <a:ext cx="1780171" cy="204572"/>
+              <a:off x="9084918" y="3962759"/>
+              <a:ext cx="1915334" cy="196251"/>
             </a:xfrm>
             <a:prstGeom prst="rect">
               <a:avLst/>
@@ -13287,7 +13439,7 @@
                 </a:lnSpc>
               </a:pPr>
               <a:r>
-                <a:rPr sz="1239" b="0" lang="ko-KR">
+                <a:rPr sz="1188" b="0" lang="ko-KR">
                   <a:solidFill>
                     <a:srgbClr val="232F3E"/>
                   </a:solidFill>
@@ -13295,14 +13447,14 @@
                   <a:ea typeface="Malgun Gothic"/>
                   <a:cs typeface="Malgun Gothic"/>
                 </a:rPr>
-                <a:t>Transit Gateway</a:t>
+                <a:t>Transit Gateway B</a:t>
               </a:r>
             </a:p>
           </p:txBody>
         </p:sp>
         <p:pic>
           <p:nvPicPr>
-            <p:cNvPr id="42" name="Amazon-Virtual-Private-Cloud" descr="Amazon Virtual Private Cloud"/>
+            <p:cNvPr id="47" name="Amazon-Virtual-Private-Cloud" descr="Amazon Virtual Private Cloud"/>
             <p:cNvPicPr>
               <a:picLocks noChangeAspect="1"/>
             </p:cNvPicPr>
@@ -13322,8 +13474,8 @@
           </p:blipFill>
           <p:spPr>
             <a:xfrm>
-              <a:off x="9940159" y="2007184"/>
-              <a:ext cx="539531" cy="539531"/>
+              <a:off x="9783792" y="1949570"/>
+              <a:ext cx="517585" cy="517585"/>
             </a:xfrm>
             <a:prstGeom prst="rect">
               <a:avLst/>
@@ -13332,14 +13484,14 @@
         </p:pic>
         <p:sp>
           <p:nvSpPr>
-            <p:cNvPr id="43" name="TextBox 42"/>
+            <p:cNvPr id="48" name="TextBox 47"/>
             <p:cNvSpPr txBox="1"/>
             <p:nvPr/>
           </p:nvSpPr>
           <p:spPr>
             <a:xfrm>
-              <a:off x="9806681" y="2599544"/>
-              <a:ext cx="806486" cy="204572"/>
+              <a:off x="9655744" y="2517835"/>
+              <a:ext cx="773682" cy="196251"/>
             </a:xfrm>
             <a:prstGeom prst="rect">
               <a:avLst/>
@@ -13358,7 +13510,7 @@
                 </a:lnSpc>
               </a:pPr>
               <a:r>
-                <a:rPr sz="1239" b="0" lang="ko-KR">
+                <a:rPr sz="1188" b="0" lang="ko-KR">
                   <a:solidFill>
                     <a:srgbClr val="232F3E"/>
                   </a:solidFill>
@@ -13371,9 +13523,50 @@
             </a:p>
           </p:txBody>
         </p:sp>
+        <p:sp>
+          <p:nvSpPr>
+            <p:cNvPr id="49" name="TextBox 48"/>
+            <p:cNvSpPr txBox="1"/>
+            <p:nvPr/>
+          </p:nvSpPr>
+          <p:spPr>
+            <a:xfrm>
+              <a:off x="9444127" y="2710851"/>
+              <a:ext cx="1196915" cy="168215"/>
+            </a:xfrm>
+            <a:prstGeom prst="rect">
+              <a:avLst/>
+            </a:prstGeom>
+            <a:noFill/>
+          </p:spPr>
+          <p:txBody>
+            <a:bodyPr wrap="none" lIns="0" rIns="0" tIns="0" bIns="0" anchor="t">
+              <a:noAutofit/>
+            </a:bodyPr>
+            <a:lstStyle/>
+            <a:p>
+              <a:pPr algn="ctr">
+                <a:lnSpc>
+                  <a:spcPct val="100000"/>
+                </a:lnSpc>
+              </a:pPr>
+              <a:r>
+                <a:rPr sz="1018" b="0" lang="ko-KR">
+                  <a:solidFill>
+                    <a:srgbClr val="545B64"/>
+                  </a:solidFill>
+                  <a:latin typeface="Arial"/>
+                  <a:ea typeface="Malgun Gothic"/>
+                  <a:cs typeface="Malgun Gothic"/>
+                </a:rPr>
+                <a:t>10.16.0.0/16</a:t>
+              </a:r>
+            </a:p>
+          </p:txBody>
+        </p:sp>
         <p:pic>
           <p:nvPicPr>
-            <p:cNvPr id="44" name="Amazon-Virtual-Private-Cloud" descr="Amazon Virtual Private Cloud"/>
+            <p:cNvPr id="50" name="Amazon-Virtual-Private-Cloud" descr="Amazon Virtual Private Cloud"/>
             <p:cNvPicPr>
               <a:picLocks noChangeAspect="1"/>
             </p:cNvPicPr>
@@ -13393,8 +13586,8 @@
           </p:blipFill>
           <p:spPr>
             <a:xfrm>
-              <a:off x="9940159" y="5019566"/>
-              <a:ext cx="539531" cy="539531"/>
+              <a:off x="9783792" y="4839419"/>
+              <a:ext cx="517585" cy="517585"/>
             </a:xfrm>
             <a:prstGeom prst="rect">
               <a:avLst/>
@@ -13403,14 +13596,14 @@
         </p:pic>
         <p:sp>
           <p:nvSpPr>
-            <p:cNvPr id="45" name="TextBox 44"/>
+            <p:cNvPr id="51" name="TextBox 50"/>
             <p:cNvSpPr txBox="1"/>
             <p:nvPr/>
           </p:nvSpPr>
           <p:spPr>
             <a:xfrm>
-              <a:off x="9428026" y="5611926"/>
-              <a:ext cx="1563797" cy="204572"/>
+              <a:off x="9292491" y="5407684"/>
+              <a:ext cx="1500188" cy="196251"/>
             </a:xfrm>
             <a:prstGeom prst="rect">
               <a:avLst/>
@@ -13429,7 +13622,7 @@
                 </a:lnSpc>
               </a:pPr>
               <a:r>
-                <a:rPr sz="1239" b="0" lang="ko-KR">
+                <a:rPr sz="1188" b="0" lang="ko-KR">
                   <a:solidFill>
                     <a:srgbClr val="232F3E"/>
                   </a:solidFill>
@@ -13442,21 +13635,62 @@
             </a:p>
           </p:txBody>
         </p:sp>
+        <p:sp>
+          <p:nvSpPr>
+            <p:cNvPr id="52" name="TextBox 51"/>
+            <p:cNvSpPr txBox="1"/>
+            <p:nvPr/>
+          </p:nvSpPr>
+          <p:spPr>
+            <a:xfrm>
+              <a:off x="9444127" y="5600700"/>
+              <a:ext cx="1196915" cy="168215"/>
+            </a:xfrm>
+            <a:prstGeom prst="rect">
+              <a:avLst/>
+            </a:prstGeom>
+            <a:noFill/>
+          </p:spPr>
+          <p:txBody>
+            <a:bodyPr wrap="none" lIns="0" rIns="0" tIns="0" bIns="0" anchor="t">
+              <a:noAutofit/>
+            </a:bodyPr>
+            <a:lstStyle/>
+            <a:p>
+              <a:pPr algn="ctr">
+                <a:lnSpc>
+                  <a:spcPct val="100000"/>
+                </a:lnSpc>
+              </a:pPr>
+              <a:r>
+                <a:rPr sz="1018" b="0" lang="ko-KR">
+                  <a:solidFill>
+                    <a:srgbClr val="545B64"/>
+                  </a:solidFill>
+                  <a:latin typeface="Arial"/>
+                  <a:ea typeface="Malgun Gothic"/>
+                  <a:cs typeface="Malgun Gothic"/>
+                </a:rPr>
+                <a:t>10.17.0.0/16</a:t>
+              </a:r>
+            </a:p>
+          </p:txBody>
+        </p:sp>
         <p:cxnSp>
           <p:nvCxnSpPr>
-            <p:cNvPr id="46" name="Connector 45"/>
+            <p:cNvPr id="53" name="Connector 52"/>
             <p:cNvCxnSpPr/>
             <p:nvPr/>
           </p:nvCxnSpPr>
           <p:spPr>
             <a:xfrm flipV="1">
-              <a:off x="10209924" y="2838961"/>
-              <a:ext cx="0" cy="629453"/>
+              <a:off x="10042585" y="2920042"/>
+              <a:ext cx="0" cy="431320"/>
             </a:xfrm>
             <a:prstGeom prst="line">
               <a:avLst/>
             </a:prstGeom>
-            <a:ln w="16860">
+            <a:ln w="16175">
               <a:solidFill>
                 <a:srgbClr val="232F3E"/>
               </a:solidFill>
@@ -13467,19 +13701,19 @@
         </p:cxnSp>
         <p:cxnSp>
           <p:nvCxnSpPr>
-            <p:cNvPr id="47" name="Connector 46"/>
+            <p:cNvPr id="54" name="Connector 53"/>
             <p:cNvCxnSpPr/>
             <p:nvPr/>
           </p:nvCxnSpPr>
           <p:spPr>
             <a:xfrm>
-              <a:off x="10209924" y="4345152"/>
-              <a:ext cx="0" cy="629453"/>
+              <a:off x="10042585" y="4192438"/>
+              <a:ext cx="0" cy="603849"/>
             </a:xfrm>
             <a:prstGeom prst="line">
               <a:avLst/>
             </a:prstGeom>
-            <a:ln w="16860">
+            <a:ln w="16175">
               <a:solidFill>
                 <a:srgbClr val="232F3E"/>
               </a:solidFill>
@@ -13490,19 +13724,19 @@
         </p:cxnSp>
         <p:cxnSp>
           <p:nvCxnSpPr>
-            <p:cNvPr id="48" name="Connector 47"/>
+            <p:cNvPr id="55" name="Connector 54"/>
             <p:cNvCxnSpPr/>
             <p:nvPr/>
           </p:nvCxnSpPr>
           <p:spPr>
             <a:xfrm>
-              <a:off x="7062660" y="3783140"/>
-              <a:ext cx="2832538" cy="0"/>
+              <a:off x="7023340" y="3653287"/>
+              <a:ext cx="2717320" cy="0"/>
             </a:xfrm>
             <a:prstGeom prst="line">
               <a:avLst/>
             </a:prstGeom>
-            <a:ln w="28101">
+            <a:ln w="26958">
               <a:solidFill>
                 <a:srgbClr val="232F3E"/>
               </a:solidFill>
@@ -13513,14 +13747,14 @@
         </p:cxnSp>
         <p:sp>
           <p:nvSpPr>
-            <p:cNvPr id="49" name="TextBox 48"/>
+            <p:cNvPr id="56" name="TextBox 55"/>
             <p:cNvSpPr txBox="1"/>
             <p:nvPr/>
           </p:nvSpPr>
           <p:spPr>
             <a:xfrm>
-              <a:off x="7137126" y="3553840"/>
-              <a:ext cx="1154934" cy="175348"/>
+              <a:off x="7137909" y="3433313"/>
+              <a:ext cx="1107955" cy="168215"/>
             </a:xfrm>
             <a:prstGeom prst="rect">
               <a:avLst/>
@@ -13539,7 +13773,7 @@
                 </a:lnSpc>
               </a:pPr>
               <a:r>
-                <a:rPr sz="1062" b="1" lang="ko-KR">
+                <a:rPr sz="1018" b="1" lang="ko-KR">
                   <a:solidFill>
                     <a:srgbClr val="232F3E"/>
                   </a:solidFill>
@@ -13554,14 +13788,14 @@
         </p:sp>
         <p:sp>
           <p:nvSpPr>
-            <p:cNvPr id="50" name="TextBox 49"/>
+            <p:cNvPr id="57" name="TextBox 56"/>
             <p:cNvSpPr txBox="1"/>
             <p:nvPr/>
           </p:nvSpPr>
           <p:spPr>
             <a:xfrm>
-              <a:off x="6854716" y="3857326"/>
-              <a:ext cx="1719755" cy="175348"/>
+              <a:off x="6866986" y="3724455"/>
+              <a:ext cx="1649802" cy="168215"/>
             </a:xfrm>
             <a:prstGeom prst="rect">
               <a:avLst/>
@@ -13580,7 +13814,7 @@
                 </a:lnSpc>
               </a:pPr>
               <a:r>
-                <a:rPr sz="1062" b="0" lang="ko-KR">
+                <a:rPr sz="1018" b="0" lang="ko-KR">
                   <a:solidFill>
                     <a:srgbClr val="545B64"/>
                   </a:solidFill>
@@ -13595,14 +13829,14 @@
         </p:sp>
         <p:sp>
           <p:nvSpPr>
-            <p:cNvPr id="51" name="TextBox 50"/>
+            <p:cNvPr id="58" name="TextBox 57"/>
             <p:cNvSpPr txBox="1"/>
             <p:nvPr/>
           </p:nvSpPr>
           <p:spPr>
             <a:xfrm>
-              <a:off x="3474216" y="6105372"/>
-              <a:ext cx="8084535" cy="175348"/>
+              <a:off x="639792" y="6204549"/>
+              <a:ext cx="9146696" cy="168215"/>
             </a:xfrm>
             <a:prstGeom prst="rect">
               <a:avLst/>
@@ -13615,13 +13849,13 @@
             </a:bodyPr>
             <a:lstStyle/>
             <a:p>
-              <a:pPr algn="r">
+              <a:pPr algn="l">
                 <a:lnSpc>
                   <a:spcPct val="100000"/>
                 </a:lnSpc>
               </a:pPr>
               <a:r>
-                <a:rPr sz="1062" b="0" lang="ko-KR">
+                <a:rPr sz="1018" b="0" lang="ko-KR">
                   <a:solidFill>
                     <a:srgbClr val="545B64"/>
                   </a:solidFill>
@@ -13629,7 +13863,48 @@
                   <a:ea typeface="Malgun Gothic"/>
                   <a:cs typeface="Malgun Gothic"/>
                 </a:rPr>
-                <a:t>Hub &amp; spoke: VPC는 리전의 TGW에 attachment로 연결 · 리전 간에는 TGW peering (정적 라우팅)</a:t>
+                <a:t>Hub &amp; spoke: VPC·VPN은 리전 TGW에 attachment로 연결 · VPC CIDR과 VPN(BGP) 경로는 TGW 라우팅 테이블에 전파</a:t>
+              </a:r>
+            </a:p>
+          </p:txBody>
+        </p:sp>
+        <p:sp>
+          <p:nvSpPr>
+            <p:cNvPr id="59" name="TextBox 58"/>
+            <p:cNvSpPr txBox="1"/>
+            <p:nvPr/>
+          </p:nvSpPr>
+          <p:spPr>
+            <a:xfrm>
+              <a:off x="639792" y="6377077"/>
+              <a:ext cx="12599958" cy="168215"/>
+            </a:xfrm>
+            <a:prstGeom prst="rect">
+              <a:avLst/>
+            </a:prstGeom>
+            <a:noFill/>
+          </p:spPr>
+          <p:txBody>
+            <a:bodyPr wrap="none" lIns="0" rIns="0" tIns="0" bIns="0" anchor="t">
+              <a:noAutofit/>
+            </a:bodyPr>
+            <a:lstStyle/>
+            <a:p>
+              <a:pPr algn="l">
+                <a:lnSpc>
+                  <a:spcPct val="100000"/>
+                </a:lnSpc>
+              </a:pPr>
+              <a:r>
+                <a:rPr sz="1018" b="0" lang="ko-KR">
+                  <a:solidFill>
+                    <a:srgbClr val="545B64"/>
+                  </a:solidFill>
+                  <a:latin typeface="Arial"/>
+                  <a:ea typeface="Malgun Gothic"/>
+                  <a:cs typeface="Malgun Gothic"/>
+                </a:rPr>
+                <a:t>라우팅: VPC 서브넷 10.0.0.0/8 · 192.168.0.0/16 → TGW · TGW A 10.16.0.0/13 → peering · TGW B 10.0.0.0/13 · 192.168.0.0/16 → peering (정적 경로)</a:t>
               </a:r>
             </a:p>
           </p:txBody>
@@ -13698,9 +13973,9 @@
         <p:grpSpPr>
           <a:xfrm>
             <a:off x="381000" y="999067"/>
-            <a:ext cx="11657541" cy="5590116"/>
+            <a:ext cx="14081125" cy="5643033"/>
             <a:chOff x="381000" y="999067"/>
-            <a:chExt cx="11657541" cy="5590116"/>
+            <a:chExt cx="14081125" cy="5643033"/>
           </a:xfrm>
         </p:grpSpPr>
         <p:sp>
@@ -13712,7 +13987,7 @@
           <p:spPr>
             <a:xfrm>
               <a:off x="381000" y="999067"/>
-              <a:ext cx="10625667" cy="5270500"/>
+              <a:ext cx="10625667" cy="5249333"/>
             </a:xfrm>
             <a:prstGeom prst="rect">
               <a:avLst/>
@@ -13813,8 +14088,8 @@
           </p:nvSpPr>
           <p:spPr>
             <a:xfrm>
-              <a:off x="592667" y="1380067"/>
-              <a:ext cx="10202333" cy="4847167"/>
+              <a:off x="592667" y="1358900"/>
+              <a:ext cx="10202333" cy="4804833"/>
             </a:xfrm>
             <a:prstGeom prst="rect">
               <a:avLst/>
@@ -13860,7 +14135,7 @@
           </p:blipFill>
           <p:spPr>
             <a:xfrm>
-              <a:off x="592667" y="1380067"/>
+              <a:off x="592667" y="1358900"/>
               <a:ext cx="254000" cy="254000"/>
             </a:xfrm>
             <a:prstGeom prst="rect">
@@ -13876,7 +14151,7 @@
           </p:nvSpPr>
           <p:spPr>
             <a:xfrm>
-              <a:off x="931333" y="1429808"/>
+              <a:off x="931333" y="1408642"/>
               <a:ext cx="2287323" cy="192617"/>
             </a:xfrm>
             <a:prstGeom prst="rect">
@@ -13917,8 +14192,8 @@
           </p:nvSpPr>
           <p:spPr>
             <a:xfrm>
-              <a:off x="762000" y="1909233"/>
-              <a:ext cx="2116667" cy="1481667"/>
+              <a:off x="762000" y="1993900"/>
+              <a:ext cx="2116667" cy="1524000"/>
             </a:xfrm>
             <a:prstGeom prst="rect">
               <a:avLst/>
@@ -13962,7 +14237,7 @@
           </p:blipFill>
           <p:spPr>
             <a:xfrm>
-              <a:off x="762000" y="1909233"/>
+              <a:off x="762000" y="1993900"/>
               <a:ext cx="254000" cy="254000"/>
             </a:xfrm>
             <a:prstGeom prst="rect">
@@ -13978,7 +14253,7 @@
           </p:nvSpPr>
           <p:spPr>
             <a:xfrm>
-              <a:off x="1100667" y="1958975"/>
+              <a:off x="1100667" y="2043642"/>
               <a:ext cx="1879865" cy="192617"/>
             </a:xfrm>
             <a:prstGeom prst="rect">
@@ -14019,8 +14294,8 @@
           </p:nvSpPr>
           <p:spPr>
             <a:xfrm>
-              <a:off x="889000" y="2205567"/>
-              <a:ext cx="1862667" cy="1100667"/>
+              <a:off x="889000" y="2311400"/>
+              <a:ext cx="1862667" cy="1121833"/>
             </a:xfrm>
             <a:prstGeom prst="rect">
               <a:avLst/>
@@ -14064,7 +14339,7 @@
           </p:blipFill>
           <p:spPr>
             <a:xfrm>
-              <a:off x="889000" y="2205567"/>
+              <a:off x="889000" y="2311400"/>
               <a:ext cx="254000" cy="254000"/>
             </a:xfrm>
             <a:prstGeom prst="rect">
@@ -14080,7 +14355,7 @@
           </p:nvSpPr>
           <p:spPr>
             <a:xfrm>
-              <a:off x="1227667" y="2255308"/>
+              <a:off x="1227667" y="2361142"/>
               <a:ext cx="1166813" cy="192617"/>
             </a:xfrm>
             <a:prstGeom prst="rect">
@@ -14135,7 +14410,7 @@
           </p:blipFill>
           <p:spPr>
             <a:xfrm>
-              <a:off x="1566333" y="2501900"/>
+              <a:off x="1566333" y="2607733"/>
               <a:ext cx="508000" cy="508000"/>
             </a:xfrm>
             <a:prstGeom prst="rect">
@@ -14151,7 +14426,7 @@
           </p:nvSpPr>
           <p:spPr>
             <a:xfrm>
-              <a:off x="1593453" y="3059642"/>
+              <a:off x="1593453" y="3165475"/>
               <a:ext cx="453760" cy="192617"/>
             </a:xfrm>
             <a:prstGeom prst="rect">
@@ -14192,8 +14467,8 @@
           </p:nvSpPr>
           <p:spPr>
             <a:xfrm>
-              <a:off x="762000" y="4512733"/>
-              <a:ext cx="2116667" cy="1481667"/>
+              <a:off x="762000" y="4428067"/>
+              <a:ext cx="2116667" cy="1524000"/>
             </a:xfrm>
             <a:prstGeom prst="rect">
               <a:avLst/>
@@ -14237,7 +14512,7 @@
           </p:blipFill>
           <p:spPr>
             <a:xfrm>
-              <a:off x="762000" y="4512733"/>
+              <a:off x="762000" y="4428067"/>
               <a:ext cx="254000" cy="254000"/>
             </a:xfrm>
             <a:prstGeom prst="rect">
@@ -14253,7 +14528,7 @@
           </p:nvSpPr>
           <p:spPr>
             <a:xfrm>
-              <a:off x="1100667" y="4562475"/>
+              <a:off x="1100667" y="4477808"/>
               <a:ext cx="1879865" cy="192617"/>
             </a:xfrm>
             <a:prstGeom prst="rect">
@@ -14294,8 +14569,8 @@
           </p:nvSpPr>
           <p:spPr>
             <a:xfrm>
-              <a:off x="889000" y="4809067"/>
-              <a:ext cx="1862667" cy="1100667"/>
+              <a:off x="889000" y="4745567"/>
+              <a:ext cx="1862667" cy="1121833"/>
             </a:xfrm>
             <a:prstGeom prst="rect">
               <a:avLst/>
@@ -14339,7 +14614,7 @@
           </p:blipFill>
           <p:spPr>
             <a:xfrm>
-              <a:off x="889000" y="4809067"/>
+              <a:off x="889000" y="4745567"/>
               <a:ext cx="254000" cy="254000"/>
             </a:xfrm>
             <a:prstGeom prst="rect">
@@ -14355,7 +14630,7 @@
           </p:nvSpPr>
           <p:spPr>
             <a:xfrm>
-              <a:off x="1227667" y="4858808"/>
+              <a:off x="1227667" y="4795308"/>
               <a:ext cx="1166813" cy="192617"/>
             </a:xfrm>
             <a:prstGeom prst="rect">
@@ -14410,7 +14685,7 @@
           </p:blipFill>
           <p:spPr>
             <a:xfrm>
-              <a:off x="1566333" y="5105400"/>
+              <a:off x="1566333" y="5041900"/>
               <a:ext cx="508000" cy="508000"/>
             </a:xfrm>
             <a:prstGeom prst="rect">
@@ -14426,7 +14701,7 @@
           </p:nvSpPr>
           <p:spPr>
             <a:xfrm>
-              <a:off x="1593453" y="5663142"/>
+              <a:off x="1593453" y="5599642"/>
               <a:ext cx="453760" cy="192617"/>
             </a:xfrm>
             <a:prstGeom prst="rect">
@@ -14481,7 +14756,7 @@
           </p:blipFill>
           <p:spPr>
             <a:xfrm>
-              <a:off x="3534833" y="3729567"/>
+              <a:off x="3492500" y="3602567"/>
               <a:ext cx="508000" cy="508000"/>
             </a:xfrm>
             <a:prstGeom prst="rect">
@@ -14497,7 +14772,7 @@
           </p:nvSpPr>
           <p:spPr>
             <a:xfrm>
-              <a:off x="3561953" y="4287308"/>
+              <a:off x="3519620" y="4160308"/>
               <a:ext cx="453760" cy="192617"/>
             </a:xfrm>
             <a:prstGeom prst="rect">
@@ -14552,7 +14827,7 @@
           </p:blipFill>
           <p:spPr>
             <a:xfrm>
-              <a:off x="3534833" y="2501900"/>
+              <a:off x="3492500" y="2607733"/>
               <a:ext cx="508000" cy="508000"/>
             </a:xfrm>
             <a:prstGeom prst="rect">
@@ -14568,7 +14843,7 @@
           </p:nvSpPr>
           <p:spPr>
             <a:xfrm>
-              <a:off x="3154495" y="3059642"/>
+              <a:off x="3112161" y="3165475"/>
               <a:ext cx="1268677" cy="192617"/>
             </a:xfrm>
             <a:prstGeom prst="rect">
@@ -14609,7 +14884,7 @@
           </p:nvSpPr>
           <p:spPr>
             <a:xfrm>
-              <a:off x="3130021" y="3249083"/>
+              <a:off x="3087688" y="3354917"/>
               <a:ext cx="1317625" cy="165100"/>
             </a:xfrm>
             <a:prstGeom prst="rect">
@@ -14664,7 +14939,7 @@
           </p:blipFill>
           <p:spPr>
             <a:xfrm>
-              <a:off x="3534833" y="5105400"/>
+              <a:off x="3492500" y="5041900"/>
               <a:ext cx="508000" cy="508000"/>
             </a:xfrm>
             <a:prstGeom prst="rect">
@@ -14680,7 +14955,7 @@
           </p:nvSpPr>
           <p:spPr>
             <a:xfrm>
-              <a:off x="3307292" y="5663142"/>
+              <a:off x="3264958" y="5599642"/>
               <a:ext cx="963083" cy="192617"/>
             </a:xfrm>
             <a:prstGeom prst="rect">
@@ -14721,8 +14996,8 @@
           </p:nvSpPr>
           <p:spPr>
             <a:xfrm>
-              <a:off x="3130021" y="5852583"/>
-              <a:ext cx="1317625" cy="165100"/>
+              <a:off x="2825750" y="5789083"/>
+              <a:ext cx="1841500" cy="165100"/>
             </a:xfrm>
             <a:prstGeom prst="rect">
               <a:avLst/>
@@ -14749,7 +15024,7 @@
                   <a:ea typeface="Malgun Gothic"/>
                   <a:cs typeface="Malgun Gothic"/>
                 </a:rPr>
-                <a:t>0/0 → 검사 VPC</a:t>
+                <a:t>0.0.0.0/0 → 검사 VPC</a:t>
               </a:r>
             </a:p>
           </p:txBody>
@@ -14762,8 +15037,8 @@
           </p:nvSpPr>
           <p:spPr>
             <a:xfrm>
-              <a:off x="2921000" y="2755900"/>
-              <a:ext cx="571500" cy="1143000"/>
+              <a:off x="2921000" y="2861733"/>
+              <a:ext cx="529167" cy="910167"/>
             </a:xfrm>
             <a:custGeom>
               <a:avLst/>
@@ -14772,7 +15047,7 @@
               <a:cxnLst/>
               <a:rect l="l" t="t" r="r" b="b"/>
               <a:pathLst>
-                <a:path w="571500" h="1143000">
+                <a:path w="529167" h="910167">
                   <a:moveTo>
                     <a:pt x="0" y="0"/>
                   </a:moveTo>
@@ -14780,10 +15055,10 @@
                     <a:pt x="254000" y="0"/>
                   </a:lnTo>
                   <a:lnTo>
-                    <a:pt x="254000" y="1143000"/>
+                    <a:pt x="254000" y="910167"/>
                   </a:lnTo>
                   <a:lnTo>
-                    <a:pt x="571500" y="1143000"/>
+                    <a:pt x="529167" y="910167"/>
                   </a:lnTo>
                 </a:path>
               </a:pathLst>
@@ -14815,8 +15090,8 @@
           </p:nvSpPr>
           <p:spPr>
             <a:xfrm>
-              <a:off x="2921000" y="4068233"/>
-              <a:ext cx="571500" cy="1291167"/>
+              <a:off x="2921000" y="3941233"/>
+              <a:ext cx="529167" cy="1354667"/>
             </a:xfrm>
             <a:custGeom>
               <a:avLst/>
@@ -14825,18 +15100,18 @@
               <a:cxnLst/>
               <a:rect l="l" t="t" r="r" b="b"/>
               <a:pathLst>
-                <a:path w="571500" h="1291167">
+                <a:path w="529167" h="1354667">
                   <a:moveTo>
-                    <a:pt x="0" y="1291167"/>
+                    <a:pt x="0" y="1354667"/>
                   </a:moveTo>
                   <a:lnTo>
-                    <a:pt x="254000" y="1291167"/>
+                    <a:pt x="254000" y="1354667"/>
                   </a:lnTo>
                   <a:lnTo>
                     <a:pt x="254000" y="0"/>
                   </a:lnTo>
                   <a:lnTo>
-                    <a:pt x="571500" y="0"/>
+                    <a:pt x="529167" y="0"/>
                   </a:lnTo>
                 </a:path>
               </a:pathLst>
@@ -14869,7 +15144,7 @@
           <p:spPr>
             <a:xfrm>
               <a:off x="4572000" y="1676400"/>
-              <a:ext cx="5799667" cy="4423833"/>
+              <a:ext cx="5799667" cy="4360333"/>
             </a:xfrm>
             <a:prstGeom prst="rect">
               <a:avLst/>
@@ -14970,8 +15245,8 @@
           </p:nvSpPr>
           <p:spPr>
             <a:xfrm>
-              <a:off x="4741333" y="1972733"/>
-              <a:ext cx="5037667" cy="1418167"/>
+              <a:off x="4741333" y="1993900"/>
+              <a:ext cx="5037667" cy="1524000"/>
             </a:xfrm>
             <a:prstGeom prst="rect">
               <a:avLst/>
@@ -15003,7 +15278,7 @@
           </p:nvSpPr>
           <p:spPr>
             <a:xfrm>
-              <a:off x="4868333" y="2001308"/>
+              <a:off x="4868333" y="2043642"/>
               <a:ext cx="2083594" cy="192617"/>
             </a:xfrm>
             <a:prstGeom prst="rect">
@@ -15044,8 +15319,8 @@
           </p:nvSpPr>
           <p:spPr>
             <a:xfrm>
-              <a:off x="4741333" y="4576233"/>
-              <a:ext cx="5037667" cy="1418167"/>
+              <a:off x="4741333" y="4428067"/>
+              <a:ext cx="5037667" cy="1524000"/>
             </a:xfrm>
             <a:prstGeom prst="rect">
               <a:avLst/>
@@ -15077,7 +15352,7 @@
           </p:nvSpPr>
           <p:spPr>
             <a:xfrm>
-              <a:off x="4868333" y="4604808"/>
+              <a:off x="4868333" y="4477808"/>
               <a:ext cx="2083594" cy="192617"/>
             </a:xfrm>
             <a:prstGeom prst="rect">
@@ -15118,8 +15393,8 @@
           </p:nvSpPr>
           <p:spPr>
             <a:xfrm>
-              <a:off x="4868333" y="2205567"/>
-              <a:ext cx="1439333" cy="1100667"/>
+              <a:off x="4868333" y="2311400"/>
+              <a:ext cx="1439333" cy="1121833"/>
             </a:xfrm>
             <a:prstGeom prst="rect">
               <a:avLst/>
@@ -15163,7 +15438,7 @@
           </p:blipFill>
           <p:spPr>
             <a:xfrm>
-              <a:off x="4868333" y="2205567"/>
+              <a:off x="4868333" y="2311400"/>
               <a:ext cx="254000" cy="254000"/>
             </a:xfrm>
             <a:prstGeom prst="rect">
@@ -15179,7 +15454,7 @@
           </p:nvSpPr>
           <p:spPr>
             <a:xfrm>
-              <a:off x="5207000" y="2255308"/>
+              <a:off x="5207000" y="2361142"/>
               <a:ext cx="1166813" cy="192617"/>
             </a:xfrm>
             <a:prstGeom prst="rect">
@@ -15220,8 +15495,8 @@
           </p:nvSpPr>
           <p:spPr>
             <a:xfrm>
-              <a:off x="6434667" y="2205567"/>
-              <a:ext cx="1608667" cy="1100667"/>
+              <a:off x="6434667" y="2311400"/>
+              <a:ext cx="1608667" cy="1121833"/>
             </a:xfrm>
             <a:prstGeom prst="rect">
               <a:avLst/>
@@ -15265,7 +15540,7 @@
           </p:blipFill>
           <p:spPr>
             <a:xfrm>
-              <a:off x="6434667" y="2205567"/>
+              <a:off x="6434667" y="2311400"/>
               <a:ext cx="254000" cy="254000"/>
             </a:xfrm>
             <a:prstGeom prst="rect">
@@ -15281,7 +15556,7 @@
           </p:nvSpPr>
           <p:spPr>
             <a:xfrm>
-              <a:off x="6773333" y="2255308"/>
+              <a:off x="6773333" y="2361142"/>
               <a:ext cx="1676135" cy="192617"/>
             </a:xfrm>
             <a:prstGeom prst="rect">
@@ -15322,8 +15597,8 @@
           </p:nvSpPr>
           <p:spPr>
             <a:xfrm>
-              <a:off x="8170333" y="2205567"/>
-              <a:ext cx="1481667" cy="1100667"/>
+              <a:off x="8170333" y="2311400"/>
+              <a:ext cx="1481667" cy="1121833"/>
             </a:xfrm>
             <a:prstGeom prst="rect">
               <a:avLst/>
@@ -15367,7 +15642,7 @@
           </p:blipFill>
           <p:spPr>
             <a:xfrm>
-              <a:off x="8170333" y="2205567"/>
+              <a:off x="8170333" y="2311400"/>
               <a:ext cx="254000" cy="254000"/>
             </a:xfrm>
             <a:prstGeom prst="rect">
@@ -15383,7 +15658,7 @@
           </p:nvSpPr>
           <p:spPr>
             <a:xfrm>
-              <a:off x="8509000" y="2255308"/>
+              <a:off x="8509000" y="2361142"/>
               <a:ext cx="1472406" cy="192617"/>
             </a:xfrm>
             <a:prstGeom prst="rect">
@@ -15424,8 +15699,8 @@
           </p:nvSpPr>
           <p:spPr>
             <a:xfrm>
-              <a:off x="4868333" y="4809067"/>
-              <a:ext cx="1439333" cy="1100667"/>
+              <a:off x="4868333" y="4745567"/>
+              <a:ext cx="1439333" cy="1121833"/>
             </a:xfrm>
             <a:prstGeom prst="rect">
               <a:avLst/>
@@ -15469,7 +15744,7 @@
           </p:blipFill>
           <p:spPr>
             <a:xfrm>
-              <a:off x="4868333" y="4809067"/>
+              <a:off x="4868333" y="4745567"/>
               <a:ext cx="254000" cy="254000"/>
             </a:xfrm>
             <a:prstGeom prst="rect">
@@ -15485,7 +15760,7 @@
           </p:nvSpPr>
           <p:spPr>
             <a:xfrm>
-              <a:off x="5207000" y="4858808"/>
+              <a:off x="5207000" y="4795308"/>
               <a:ext cx="1166813" cy="192617"/>
             </a:xfrm>
             <a:prstGeom prst="rect">
@@ -15526,8 +15801,8 @@
           </p:nvSpPr>
           <p:spPr>
             <a:xfrm>
-              <a:off x="6434667" y="4809067"/>
-              <a:ext cx="1608667" cy="1100667"/>
+              <a:off x="6434667" y="4745567"/>
+              <a:ext cx="1608667" cy="1121833"/>
             </a:xfrm>
             <a:prstGeom prst="rect">
               <a:avLst/>
@@ -15571,7 +15846,7 @@
           </p:blipFill>
           <p:spPr>
             <a:xfrm>
-              <a:off x="6434667" y="4809067"/>
+              <a:off x="6434667" y="4745567"/>
               <a:ext cx="254000" cy="254000"/>
             </a:xfrm>
             <a:prstGeom prst="rect">
@@ -15587,7 +15862,7 @@
           </p:nvSpPr>
           <p:spPr>
             <a:xfrm>
-              <a:off x="6773333" y="4858808"/>
+              <a:off x="6773333" y="4795308"/>
               <a:ext cx="1676135" cy="192617"/>
             </a:xfrm>
             <a:prstGeom prst="rect">
@@ -15628,8 +15903,8 @@
           </p:nvSpPr>
           <p:spPr>
             <a:xfrm>
-              <a:off x="8170333" y="4809067"/>
-              <a:ext cx="1481667" cy="1100667"/>
+              <a:off x="8170333" y="4745567"/>
+              <a:ext cx="1481667" cy="1121833"/>
             </a:xfrm>
             <a:prstGeom prst="rect">
               <a:avLst/>
@@ -15673,7 +15948,7 @@
           </p:blipFill>
           <p:spPr>
             <a:xfrm>
-              <a:off x="8170333" y="4809067"/>
+              <a:off x="8170333" y="4745567"/>
               <a:ext cx="254000" cy="254000"/>
             </a:xfrm>
             <a:prstGeom prst="rect">
@@ -15689,7 +15964,7 @@
           </p:nvSpPr>
           <p:spPr>
             <a:xfrm>
-              <a:off x="8509000" y="4858808"/>
+              <a:off x="8509000" y="4795308"/>
               <a:ext cx="1472406" cy="192617"/>
             </a:xfrm>
             <a:prstGeom prst="rect">
@@ -15744,7 +16019,7 @@
           </p:blipFill>
           <p:spPr>
             <a:xfrm>
-              <a:off x="5334000" y="2501900"/>
+              <a:off x="5334000" y="2607733"/>
               <a:ext cx="508000" cy="508000"/>
             </a:xfrm>
             <a:prstGeom prst="rect">
@@ -15760,7 +16035,7 @@
           </p:nvSpPr>
           <p:spPr>
             <a:xfrm>
-              <a:off x="5157391" y="3059642"/>
+              <a:off x="5157391" y="3165475"/>
               <a:ext cx="861219" cy="192617"/>
             </a:xfrm>
             <a:prstGeom prst="rect">
@@ -15815,7 +16090,7 @@
           </p:blipFill>
           <p:spPr>
             <a:xfrm>
-              <a:off x="6985000" y="2501900"/>
+              <a:off x="6985000" y="2607733"/>
               <a:ext cx="508000" cy="508000"/>
             </a:xfrm>
             <a:prstGeom prst="rect">
@@ -15831,7 +16106,7 @@
           </p:nvSpPr>
           <p:spPr>
             <a:xfrm>
-              <a:off x="6299068" y="3059642"/>
+              <a:off x="6299068" y="3165475"/>
               <a:ext cx="1879865" cy="192617"/>
             </a:xfrm>
             <a:prstGeom prst="rect">
@@ -15886,7 +16161,7 @@
           </p:blipFill>
           <p:spPr>
             <a:xfrm>
-              <a:off x="8657167" y="2501900"/>
+              <a:off x="8657167" y="2607733"/>
               <a:ext cx="508000" cy="508000"/>
             </a:xfrm>
             <a:prstGeom prst="rect">
@@ -15902,7 +16177,7 @@
           </p:nvSpPr>
           <p:spPr>
             <a:xfrm>
-              <a:off x="8276828" y="3059642"/>
+              <a:off x="8276828" y="3165475"/>
               <a:ext cx="1268677" cy="192617"/>
             </a:xfrm>
             <a:prstGeom prst="rect">
@@ -15957,7 +16232,7 @@
           </p:blipFill>
           <p:spPr>
             <a:xfrm>
-              <a:off x="5334000" y="5105400"/>
+              <a:off x="5334000" y="5041900"/>
               <a:ext cx="508000" cy="508000"/>
             </a:xfrm>
             <a:prstGeom prst="rect">
@@ -15973,7 +16248,7 @@
           </p:nvSpPr>
           <p:spPr>
             <a:xfrm>
-              <a:off x="5157391" y="5663142"/>
+              <a:off x="5157391" y="5599642"/>
               <a:ext cx="861219" cy="192617"/>
             </a:xfrm>
             <a:prstGeom prst="rect">
@@ -16028,7 +16303,7 @@
           </p:blipFill>
           <p:spPr>
             <a:xfrm>
-              <a:off x="6985000" y="5105400"/>
+              <a:off x="6985000" y="5041900"/>
               <a:ext cx="508000" cy="508000"/>
             </a:xfrm>
             <a:prstGeom prst="rect">
@@ -16044,7 +16319,7 @@
           </p:nvSpPr>
           <p:spPr>
             <a:xfrm>
-              <a:off x="6299068" y="5663142"/>
+              <a:off x="6299068" y="5599642"/>
               <a:ext cx="1879865" cy="192617"/>
             </a:xfrm>
             <a:prstGeom prst="rect">
@@ -16099,7 +16374,7 @@
           </p:blipFill>
           <p:spPr>
             <a:xfrm>
-              <a:off x="8657167" y="5105400"/>
+              <a:off x="8657167" y="5041900"/>
               <a:ext cx="508000" cy="508000"/>
             </a:xfrm>
             <a:prstGeom prst="rect">
@@ -16115,7 +16390,7 @@
           </p:nvSpPr>
           <p:spPr>
             <a:xfrm>
-              <a:off x="8276828" y="5663142"/>
+              <a:off x="8276828" y="5599642"/>
               <a:ext cx="1268677" cy="192617"/>
             </a:xfrm>
             <a:prstGeom prst="rect">
@@ -16170,7 +16445,7 @@
           </p:blipFill>
           <p:spPr>
             <a:xfrm>
-              <a:off x="6985000" y="3729567"/>
+              <a:off x="6985000" y="3602567"/>
               <a:ext cx="508000" cy="508000"/>
             </a:xfrm>
             <a:prstGeom prst="rect">
@@ -16186,7 +16461,7 @@
           </p:nvSpPr>
           <p:spPr>
             <a:xfrm>
-              <a:off x="6146271" y="4287308"/>
+              <a:off x="6146271" y="4160308"/>
               <a:ext cx="2185458" cy="192617"/>
             </a:xfrm>
             <a:prstGeom prst="rect">
@@ -16227,7 +16502,7 @@
           </p:nvSpPr>
           <p:spPr>
             <a:xfrm>
-              <a:off x="10117667" y="3729567"/>
+              <a:off x="10117667" y="3602567"/>
               <a:ext cx="508000" cy="740833"/>
             </a:xfrm>
             <a:prstGeom prst="rect">
@@ -16270,7 +16545,7 @@
           </p:blipFill>
           <p:spPr>
             <a:xfrm>
-              <a:off x="10117667" y="3729567"/>
+              <a:off x="10117667" y="3602567"/>
               <a:ext cx="508000" cy="508000"/>
             </a:xfrm>
             <a:prstGeom prst="rect">
@@ -16286,7 +16561,7 @@
           </p:nvSpPr>
           <p:spPr>
             <a:xfrm>
-              <a:off x="10144786" y="4287308"/>
+              <a:off x="10144786" y="4160308"/>
               <a:ext cx="453760" cy="192617"/>
             </a:xfrm>
             <a:prstGeom prst="rect">
@@ -16327,8 +16602,8 @@
           </p:nvSpPr>
           <p:spPr>
             <a:xfrm>
-              <a:off x="4085167" y="2755900"/>
-              <a:ext cx="1206500" cy="1143000"/>
+              <a:off x="4042833" y="2861733"/>
+              <a:ext cx="1248834" cy="910167"/>
             </a:xfrm>
             <a:custGeom>
               <a:avLst/>
@@ -16337,18 +16612,18 @@
               <a:cxnLst/>
               <a:rect l="l" t="t" r="r" b="b"/>
               <a:pathLst>
-                <a:path w="1206500" h="1143000">
+                <a:path w="1248834" h="910167">
                   <a:moveTo>
-                    <a:pt x="0" y="1143000"/>
+                    <a:pt x="0" y="910167"/>
                   </a:moveTo>
                   <a:lnTo>
-                    <a:pt x="317500" y="1143000"/>
+                    <a:pt x="359834" y="910167"/>
                   </a:lnTo>
                   <a:lnTo>
-                    <a:pt x="317500" y="0"/>
+                    <a:pt x="359834" y="0"/>
                   </a:lnTo>
                   <a:lnTo>
-                    <a:pt x="1206500" y="0"/>
+                    <a:pt x="1248834" y="0"/>
                   </a:lnTo>
                 </a:path>
               </a:pathLst>
@@ -16380,8 +16655,8 @@
           </p:nvSpPr>
           <p:spPr>
             <a:xfrm>
-              <a:off x="4085167" y="4068233"/>
-              <a:ext cx="1206500" cy="1291167"/>
+              <a:off x="4042833" y="3941233"/>
+              <a:ext cx="1248834" cy="1354667"/>
             </a:xfrm>
             <a:custGeom>
               <a:avLst/>
@@ -16390,18 +16665,18 @@
               <a:cxnLst/>
               <a:rect l="l" t="t" r="r" b="b"/>
               <a:pathLst>
-                <a:path w="1206500" h="1291167">
+                <a:path w="1248834" h="1354667">
                   <a:moveTo>
                     <a:pt x="0" y="0"/>
                   </a:moveTo>
                   <a:lnTo>
-                    <a:pt x="317500" y="0"/>
+                    <a:pt x="359834" y="0"/>
                   </a:lnTo>
                   <a:lnTo>
-                    <a:pt x="317500" y="1291167"/>
+                    <a:pt x="359834" y="1354667"/>
                   </a:lnTo>
                   <a:lnTo>
-                    <a:pt x="1206500" y="1291167"/>
+                    <a:pt x="1248834" y="1354667"/>
                   </a:lnTo>
                 </a:path>
               </a:pathLst>
@@ -16433,7 +16708,7 @@
           </p:nvCxnSpPr>
           <p:spPr>
             <a:xfrm>
-              <a:off x="5884333" y="2755900"/>
+              <a:off x="5884333" y="2861733"/>
               <a:ext cx="1058334" cy="0"/>
             </a:xfrm>
             <a:prstGeom prst="line">
@@ -16458,7 +16733,7 @@
           </p:nvCxnSpPr>
           <p:spPr>
             <a:xfrm>
-              <a:off x="5884333" y="5359400"/>
+              <a:off x="5884333" y="5295900"/>
               <a:ext cx="1058334" cy="0"/>
             </a:xfrm>
             <a:prstGeom prst="line">
@@ -16483,7 +16758,7 @@
           </p:nvCxnSpPr>
           <p:spPr>
             <a:xfrm>
-              <a:off x="7535333" y="2755900"/>
+              <a:off x="7535333" y="2861733"/>
               <a:ext cx="1079500" cy="0"/>
             </a:xfrm>
             <a:prstGeom prst="line">
@@ -16507,7 +16782,7 @@
           </p:nvCxnSpPr>
           <p:spPr>
             <a:xfrm>
-              <a:off x="7535333" y="5359400"/>
+              <a:off x="7535333" y="5295900"/>
               <a:ext cx="1079500" cy="0"/>
             </a:xfrm>
             <a:prstGeom prst="line">
@@ -16531,8 +16806,8 @@
           </p:nvSpPr>
           <p:spPr>
             <a:xfrm>
-              <a:off x="9207500" y="2755900"/>
-              <a:ext cx="867833" cy="1227667"/>
+              <a:off x="9207500" y="2861733"/>
+              <a:ext cx="867833" cy="910167"/>
             </a:xfrm>
             <a:custGeom>
               <a:avLst/>
@@ -16541,7 +16816,7 @@
               <a:cxnLst/>
               <a:rect l="l" t="t" r="r" b="b"/>
               <a:pathLst>
-                <a:path w="867833" h="1227667">
+                <a:path w="867833" h="910167">
                   <a:moveTo>
                     <a:pt x="0" y="0"/>
                   </a:moveTo>
@@ -16549,10 +16824,10 @@
                     <a:pt x="656167" y="0"/>
                   </a:lnTo>
                   <a:lnTo>
-                    <a:pt x="656167" y="1227667"/>
+                    <a:pt x="656167" y="910167"/>
                   </a:lnTo>
                   <a:lnTo>
-                    <a:pt x="867833" y="1227667"/>
+                    <a:pt x="867833" y="910167"/>
                   </a:lnTo>
                 </a:path>
               </a:pathLst>
@@ -16583,8 +16858,8 @@
           </p:nvSpPr>
           <p:spPr>
             <a:xfrm>
-              <a:off x="9207500" y="3983567"/>
-              <a:ext cx="656167" cy="1375833"/>
+              <a:off x="9207500" y="3941233"/>
+              <a:ext cx="867833" cy="1354667"/>
             </a:xfrm>
             <a:custGeom>
               <a:avLst/>
@@ -16593,15 +16868,18 @@
               <a:cxnLst/>
               <a:rect l="l" t="t" r="r" b="b"/>
               <a:pathLst>
-                <a:path w="656167" h="1375833">
+                <a:path w="867833" h="1354667">
                   <a:moveTo>
-                    <a:pt x="0" y="1375833"/>
+                    <a:pt x="0" y="1354667"/>
                   </a:moveTo>
                   <a:lnTo>
-                    <a:pt x="656167" y="1375833"/>
+                    <a:pt x="656167" y="1354667"/>
                   </a:lnTo>
                   <a:lnTo>
                     <a:pt x="656167" y="0"/>
+                  </a:lnTo>
+                  <a:lnTo>
+                    <a:pt x="867833" y="0"/>
                   </a:lnTo>
                 </a:path>
               </a:pathLst>
@@ -16613,6 +16891,7 @@
               </a:solidFill>
               <a:prstDash val="solid"/>
               <a:miter lim="800000"/>
+              <a:tailEnd type="triangle" w="med" len="med"/>
             </a:ln>
           </p:spPr>
           <p:txBody>
@@ -16645,7 +16924,7 @@
           </p:blipFill>
           <p:spPr>
             <a:xfrm>
-              <a:off x="11303000" y="3729567"/>
+              <a:off x="11303000" y="3602567"/>
               <a:ext cx="508000" cy="508000"/>
             </a:xfrm>
             <a:prstGeom prst="rect">
@@ -16661,7 +16940,7 @@
           </p:nvSpPr>
           <p:spPr>
             <a:xfrm>
-              <a:off x="11075458" y="4287308"/>
+              <a:off x="11075458" y="4160308"/>
               <a:ext cx="963083" cy="192617"/>
             </a:xfrm>
             <a:prstGeom prst="rect">
@@ -16702,7 +16981,7 @@
           </p:nvCxnSpPr>
           <p:spPr>
             <a:xfrm>
-              <a:off x="10668000" y="3983567"/>
+              <a:off x="10668000" y="3856567"/>
               <a:ext cx="592667" cy="0"/>
             </a:xfrm>
             <a:prstGeom prst="line">
@@ -16726,7 +17005,7 @@
           </p:nvSpPr>
           <p:spPr>
             <a:xfrm>
-              <a:off x="3259667" y="3454400"/>
+              <a:off x="3227917" y="3517900"/>
               <a:ext cx="211667" cy="211667"/>
             </a:xfrm>
             <a:prstGeom prst="ellipse">
@@ -16755,7 +17034,7 @@
           </p:nvSpPr>
           <p:spPr>
             <a:xfrm>
-              <a:off x="3258344" y="3481917"/>
+              <a:off x="3226594" y="3545417"/>
               <a:ext cx="214312" cy="165100"/>
             </a:xfrm>
             <a:prstGeom prst="rect">
@@ -16796,7 +17075,7 @@
           </p:nvSpPr>
           <p:spPr>
             <a:xfrm>
-              <a:off x="4127500" y="3454400"/>
+              <a:off x="4116917" y="3517900"/>
               <a:ext cx="211667" cy="211667"/>
             </a:xfrm>
             <a:prstGeom prst="ellipse">
@@ -16825,7 +17104,7 @@
           </p:nvSpPr>
           <p:spPr>
             <a:xfrm>
-              <a:off x="4126177" y="3481917"/>
+              <a:off x="4115594" y="3545417"/>
               <a:ext cx="214312" cy="165100"/>
             </a:xfrm>
             <a:prstGeom prst="rect">
@@ -16866,7 +17145,7 @@
           </p:nvSpPr>
           <p:spPr>
             <a:xfrm>
-              <a:off x="8001000" y="3454400"/>
+              <a:off x="6582833" y="2607733"/>
               <a:ext cx="211667" cy="211667"/>
             </a:xfrm>
             <a:prstGeom prst="ellipse">
@@ -16895,7 +17174,7 @@
           </p:nvSpPr>
           <p:spPr>
             <a:xfrm>
-              <a:off x="7999677" y="3481917"/>
+              <a:off x="6581510" y="2635250"/>
               <a:ext cx="214312" cy="165100"/>
             </a:xfrm>
             <a:prstGeom prst="rect">
@@ -16936,7 +17215,7 @@
           </p:nvSpPr>
           <p:spPr>
             <a:xfrm>
-              <a:off x="9419167" y="3454400"/>
+              <a:off x="7683500" y="2607733"/>
               <a:ext cx="211667" cy="211667"/>
             </a:xfrm>
             <a:prstGeom prst="ellipse">
@@ -16965,7 +17244,7 @@
           </p:nvSpPr>
           <p:spPr>
             <a:xfrm>
-              <a:off x="9417844" y="3481917"/>
+              <a:off x="7682177" y="2635250"/>
               <a:ext cx="214312" cy="165100"/>
             </a:xfrm>
             <a:prstGeom prst="rect">
@@ -17000,14 +17279,84 @@
         </p:sp>
         <p:sp>
           <p:nvSpPr>
-            <p:cNvPr id="97" name="TextBox 96"/>
+            <p:cNvPr id="97" name="Oval 96"/>
+            <p:cNvSpPr/>
+            <p:nvPr/>
+          </p:nvSpPr>
+          <p:spPr>
+            <a:xfrm>
+              <a:off x="9323917" y="2607733"/>
+              <a:ext cx="211667" cy="211667"/>
+            </a:xfrm>
+            <a:prstGeom prst="ellipse">
+              <a:avLst/>
+            </a:prstGeom>
+            <a:solidFill>
+              <a:srgbClr val="232F3E"/>
+            </a:solidFill>
+            <a:ln>
+              <a:noFill/>
+            </a:ln>
+          </p:spPr>
+          <p:txBody>
+            <a:bodyPr rtlCol="0" anchor="ctr"/>
+            <a:lstStyle/>
+            <a:p>
+              <a:pPr algn="ctr"/>
+            </a:p>
+          </p:txBody>
+        </p:sp>
+        <p:sp>
+          <p:nvSpPr>
+            <p:cNvPr id="98" name="TextBox 97"/>
             <p:cNvSpPr txBox="1"/>
             <p:nvPr/>
           </p:nvSpPr>
           <p:spPr>
             <a:xfrm>
-              <a:off x="381000" y="6424083"/>
-              <a:ext cx="11231563" cy="165100"/>
+              <a:off x="9322594" y="2635250"/>
+              <a:ext cx="214312" cy="165100"/>
+            </a:xfrm>
+            <a:prstGeom prst="rect">
+              <a:avLst/>
+            </a:prstGeom>
+            <a:noFill/>
+          </p:spPr>
+          <p:txBody>
+            <a:bodyPr wrap="none" lIns="0" rIns="0" tIns="0" bIns="0" anchor="t">
+              <a:noAutofit/>
+            </a:bodyPr>
+            <a:lstStyle/>
+            <a:p>
+              <a:pPr algn="ctr">
+                <a:lnSpc>
+                  <a:spcPct val="100000"/>
+                </a:lnSpc>
+              </a:pPr>
+              <a:r>
+                <a:rPr sz="1000" b="1" lang="ko-KR">
+                  <a:solidFill>
+                    <a:srgbClr val="FFFFFF"/>
+                  </a:solidFill>
+                  <a:latin typeface="Arial"/>
+                  <a:ea typeface="Malgun Gothic"/>
+                  <a:cs typeface="Malgun Gothic"/>
+                </a:rPr>
+                <a:t>5</a:t>
+              </a:r>
+            </a:p>
+          </p:txBody>
+        </p:sp>
+        <p:sp>
+          <p:nvSpPr>
+            <p:cNvPr id="99" name="TextBox 98"/>
+            <p:cNvSpPr txBox="1"/>
+            <p:nvPr/>
+          </p:nvSpPr>
+          <p:spPr>
+            <a:xfrm>
+              <a:off x="381000" y="6307667"/>
+              <a:ext cx="12858750" cy="165100"/>
             </a:xfrm>
             <a:prstGeom prst="rect">
               <a:avLst/>
@@ -17034,7 +17383,48 @@
                   <a:ea typeface="Malgun Gothic"/>
                   <a:cs typeface="Malgun Gothic"/>
                 </a:rPr>
-                <a:t>① Spoke RT 0/0 → 검사 VPC  ② 검사 VPC attachment (appliance mode)  ③ 엔드포인트에서 검사 · VPC 간은 TGW로 반환  ④ 인터넷: NAT → IGW</a:t>
+                <a:t>① VPC → TGW  ② Spoke RT 0.0.0.0/0 → 검사 VPC (appliance mode)  ③ 같은 AZ 방화벽에서 검사 (VPC 간은 TGW로 반환)  ④ 방화벽 → NAT (인터넷행)  ⑤ NAT → IGW</a:t>
+              </a:r>
+            </a:p>
+          </p:txBody>
+        </p:sp>
+        <p:sp>
+          <p:nvSpPr>
+            <p:cNvPr id="100" name="TextBox 99"/>
+            <p:cNvSpPr txBox="1"/>
+            <p:nvPr/>
+          </p:nvSpPr>
+          <p:spPr>
+            <a:xfrm>
+              <a:off x="381000" y="6477000"/>
+              <a:ext cx="14081125" cy="165100"/>
+            </a:xfrm>
+            <a:prstGeom prst="rect">
+              <a:avLst/>
+            </a:prstGeom>
+            <a:noFill/>
+          </p:spPr>
+          <p:txBody>
+            <a:bodyPr wrap="none" lIns="0" rIns="0" tIns="0" bIns="0" anchor="t">
+              <a:noAutofit/>
+            </a:bodyPr>
+            <a:lstStyle/>
+            <a:p>
+              <a:pPr algn="l">
+                <a:lnSpc>
+                  <a:spcPct val="100000"/>
+                </a:lnSpc>
+              </a:pPr>
+              <a:r>
+                <a:rPr sz="1000" b="0" lang="ko-KR">
+                  <a:solidFill>
+                    <a:srgbClr val="545B64"/>
+                  </a:solidFill>
+                  <a:latin typeface="Arial"/>
+                  <a:ea typeface="Malgun Gothic"/>
+                  <a:cs typeface="Malgun Gothic"/>
+                </a:rPr>
+                <a:t>라우팅(같은 AZ): App 0.0.0.0/0 → TGW · TGW 서브넷 0.0.0.0/0 → 방화벽 · 방화벽 서브넷 0.0.0.0/0 → NAT, 10.0.0.0/8 → TGW · 퍼블릭 0.0.0.0/0 → IGW, 10.0.0.0/8 → 방화벽</a:t>
               </a:r>
             </a:p>
           </p:txBody>

--- a/docs/examples/reference-architectures.pptx
+++ b/docs/examples/reference-architectures.pptx
@@ -11876,10 +11876,10 @@
         </p:nvGrpSpPr>
         <p:grpSpPr>
           <a:xfrm>
-            <a:off x="639792" y="1086928"/>
-            <a:ext cx="12599958" cy="5458364"/>
-            <a:chOff x="639792" y="1086928"/>
-            <a:chExt cx="12599958" cy="5458364"/>
+            <a:off x="398056" y="1134747"/>
+            <a:ext cx="12375554" cy="5361151"/>
+            <a:chOff x="398056" y="1134747"/>
+            <a:chExt cx="12375554" cy="5361151"/>
           </a:xfrm>
         </p:grpSpPr>
         <p:sp>
@@ -11890,14 +11890,14 @@
           </p:nvSpPr>
           <p:spPr>
             <a:xfrm>
-              <a:off x="639792" y="3027872"/>
-              <a:ext cx="1854679" cy="1423358"/>
-            </a:xfrm>
-            <a:prstGeom prst="rect">
-              <a:avLst/>
-            </a:prstGeom>
-            <a:noFill/>
-            <a:ln w="21566">
+              <a:off x="398056" y="3041123"/>
+              <a:ext cx="1821648" cy="1398009"/>
+            </a:xfrm>
+            <a:prstGeom prst="rect">
+              <a:avLst/>
+            </a:prstGeom>
+            <a:noFill/>
+            <a:ln w="21182">
               <a:solidFill>
                 <a:srgbClr val="7D8998"/>
               </a:solidFill>
@@ -11935,8 +11935,8 @@
           </p:blipFill>
           <p:spPr>
             <a:xfrm>
-              <a:off x="639792" y="3027872"/>
-              <a:ext cx="258792" cy="258792"/>
+              <a:off x="398056" y="3041123"/>
+              <a:ext cx="254183" cy="254183"/>
             </a:xfrm>
             <a:prstGeom prst="rect">
               <a:avLst/>
@@ -11951,8 +11951,8 @@
           </p:nvSpPr>
           <p:spPr>
             <a:xfrm>
-              <a:off x="984849" y="3078552"/>
-              <a:ext cx="1292614" cy="196251"/>
+              <a:off x="736967" y="3090900"/>
+              <a:ext cx="1269593" cy="192756"/>
             </a:xfrm>
             <a:prstGeom prst="rect">
               <a:avLst/>
@@ -11971,7 +11971,7 @@
                 </a:lnSpc>
               </a:pPr>
               <a:r>
-                <a:rPr sz="1188" b="1" lang="ko-KR">
+                <a:rPr sz="1167" b="1" lang="ko-KR">
                   <a:solidFill>
                     <a:srgbClr val="7D8998"/>
                   </a:solidFill>
@@ -12006,8 +12006,8 @@
           </p:blipFill>
           <p:spPr>
             <a:xfrm>
-              <a:off x="1308340" y="3394494"/>
-              <a:ext cx="517585" cy="517585"/>
+              <a:off x="1054696" y="3401216"/>
+              <a:ext cx="508367" cy="508367"/>
             </a:xfrm>
             <a:prstGeom prst="rect">
               <a:avLst/>
@@ -12022,8 +12022,8 @@
           </p:nvSpPr>
           <p:spPr>
             <a:xfrm>
-              <a:off x="661358" y="3962759"/>
-              <a:ext cx="1811547" cy="196251"/>
+              <a:off x="419238" y="3959360"/>
+              <a:ext cx="1779284" cy="192756"/>
             </a:xfrm>
             <a:prstGeom prst="rect">
               <a:avLst/>
@@ -12042,7 +12042,7 @@
                 </a:lnSpc>
               </a:pPr>
               <a:r>
-                <a:rPr sz="1188" b="0" lang="ko-KR">
+                <a:rPr sz="1167" b="0" lang="ko-KR">
                   <a:solidFill>
                     <a:srgbClr val="232F3E"/>
                   </a:solidFill>
@@ -12063,8 +12063,8 @@
           </p:nvSpPr>
           <p:spPr>
             <a:xfrm>
-              <a:off x="879715" y="4155775"/>
-              <a:ext cx="1374835" cy="168215"/>
+              <a:off x="633705" y="4148939"/>
+              <a:ext cx="1350349" cy="165219"/>
             </a:xfrm>
             <a:prstGeom prst="rect">
               <a:avLst/>
@@ -12083,7 +12083,7 @@
                 </a:lnSpc>
               </a:pPr>
               <a:r>
-                <a:rPr sz="1018" b="0" lang="ko-KR">
+                <a:rPr sz="1000" b="0" lang="ko-KR">
                   <a:solidFill>
                     <a:srgbClr val="545B64"/>
                   </a:solidFill>
@@ -12118,8 +12118,8 @@
           </p:blipFill>
           <p:spPr>
             <a:xfrm>
-              <a:off x="2861094" y="3394494"/>
-              <a:ext cx="517585" cy="517585"/>
+              <a:off x="2579796" y="3401216"/>
+              <a:ext cx="508367" cy="508367"/>
             </a:xfrm>
             <a:prstGeom prst="rect">
               <a:avLst/>
@@ -12134,8 +12134,8 @@
           </p:nvSpPr>
           <p:spPr>
             <a:xfrm>
-              <a:off x="2629259" y="3962759"/>
-              <a:ext cx="981255" cy="196251"/>
+              <a:off x="2352090" y="3959360"/>
+              <a:ext cx="963779" cy="192756"/>
             </a:xfrm>
             <a:prstGeom prst="rect">
               <a:avLst/>
@@ -12154,7 +12154,7 @@
                 </a:lnSpc>
               </a:pPr>
               <a:r>
-                <a:rPr sz="1188" b="0" lang="ko-KR">
+                <a:rPr sz="1167" b="0" lang="ko-KR">
                   <a:solidFill>
                     <a:srgbClr val="232F3E"/>
                   </a:solidFill>
@@ -12175,13 +12175,13 @@
           </p:nvCxnSpPr>
           <p:spPr>
             <a:xfrm>
-              <a:off x="1869057" y="3653287"/>
-              <a:ext cx="948905" cy="0"/>
+              <a:off x="1605427" y="3655399"/>
+              <a:ext cx="932005" cy="0"/>
             </a:xfrm>
             <a:prstGeom prst="line">
               <a:avLst/>
             </a:prstGeom>
-            <a:ln w="16175">
+            <a:ln w="15886">
               <a:solidFill>
                 <a:srgbClr val="232F3E"/>
               </a:solidFill>
@@ -12198,13 +12198,13 @@
           </p:nvCxnSpPr>
           <p:spPr>
             <a:xfrm>
-              <a:off x="3421811" y="3653287"/>
-              <a:ext cx="539151" cy="0"/>
+              <a:off x="3130527" y="3655399"/>
+              <a:ext cx="529549" cy="0"/>
             </a:xfrm>
             <a:prstGeom prst="line">
               <a:avLst/>
             </a:prstGeom>
-            <a:ln w="16175">
+            <a:ln w="15886">
               <a:solidFill>
                 <a:srgbClr val="232F3E"/>
               </a:solidFill>
@@ -12221,8 +12221,8 @@
           </p:nvSpPr>
           <p:spPr>
             <a:xfrm>
-              <a:off x="3404289" y="3433313"/>
-              <a:ext cx="574196" cy="168215"/>
+              <a:off x="3113317" y="3439343"/>
+              <a:ext cx="563969" cy="165219"/>
             </a:xfrm>
             <a:prstGeom prst="rect">
               <a:avLst/>
@@ -12241,7 +12241,7 @@
                 </a:lnSpc>
               </a:pPr>
               <a:r>
-                <a:rPr sz="1018" b="0" lang="ko-KR">
+                <a:rPr sz="1000" b="0" lang="ko-KR">
                   <a:solidFill>
                     <a:srgbClr val="232F3E"/>
                   </a:solidFill>
@@ -12276,8 +12276,8 @@
           </p:blipFill>
           <p:spPr>
             <a:xfrm>
-              <a:off x="4004094" y="3394494"/>
-              <a:ext cx="517585" cy="517585"/>
+              <a:off x="3702440" y="3401216"/>
+              <a:ext cx="508367" cy="508367"/>
             </a:xfrm>
             <a:prstGeom prst="rect">
               <a:avLst/>
@@ -12292,8 +12292,8 @@
           </p:nvSpPr>
           <p:spPr>
             <a:xfrm>
-              <a:off x="3357113" y="3962759"/>
-              <a:ext cx="1811547" cy="196251"/>
+              <a:off x="3066981" y="3959360"/>
+              <a:ext cx="1779284" cy="192756"/>
             </a:xfrm>
             <a:prstGeom prst="rect">
               <a:avLst/>
@@ -12312,7 +12312,7 @@
                 </a:lnSpc>
               </a:pPr>
               <a:r>
-                <a:rPr sz="1188" b="0" lang="ko-KR">
+                <a:rPr sz="1167" b="0" lang="ko-KR">
                   <a:solidFill>
                     <a:srgbClr val="232F3E"/>
                   </a:solidFill>
@@ -12333,13 +12333,13 @@
           </p:nvCxnSpPr>
           <p:spPr>
             <a:xfrm>
-              <a:off x="4564811" y="3653287"/>
-              <a:ext cx="1854680" cy="0"/>
+              <a:off x="4253170" y="3655399"/>
+              <a:ext cx="1821648" cy="0"/>
             </a:xfrm>
             <a:prstGeom prst="line">
               <a:avLst/>
             </a:prstGeom>
-            <a:ln w="16175">
+            <a:ln w="15886">
               <a:solidFill>
                 <a:srgbClr val="232F3E"/>
               </a:solidFill>
@@ -12356,14 +12356,14 @@
           </p:nvSpPr>
           <p:spPr>
             <a:xfrm>
-              <a:off x="5082396" y="1086928"/>
-              <a:ext cx="6469811" cy="5024887"/>
-            </a:xfrm>
-            <a:prstGeom prst="rect">
-              <a:avLst/>
-            </a:prstGeom>
-            <a:noFill/>
-            <a:ln w="21566">
+              <a:off x="4761537" y="1134747"/>
+              <a:ext cx="7032407" cy="4935394"/>
+            </a:xfrm>
+            <a:prstGeom prst="rect">
+              <a:avLst/>
+            </a:prstGeom>
+            <a:noFill/>
+            <a:ln w="21182">
               <a:solidFill>
                 <a:srgbClr val="232F3E"/>
               </a:solidFill>
@@ -12401,8 +12401,8 @@
           </p:blipFill>
           <p:spPr>
             <a:xfrm>
-              <a:off x="5082396" y="1086928"/>
-              <a:ext cx="345057" cy="345057"/>
+              <a:off x="4761537" y="1134747"/>
+              <a:ext cx="338911" cy="338911"/>
             </a:xfrm>
             <a:prstGeom prst="rect">
               <a:avLst/>
@@ -12417,8 +12417,8 @@
           </p:nvSpPr>
           <p:spPr>
             <a:xfrm>
-              <a:off x="5535283" y="1170497"/>
-              <a:ext cx="1162544" cy="210269"/>
+              <a:off x="5206358" y="1216827"/>
+              <a:ext cx="1141839" cy="206524"/>
             </a:xfrm>
             <a:prstGeom prst="rect">
               <a:avLst/>
@@ -12437,7 +12437,7 @@
                 </a:lnSpc>
               </a:pPr>
               <a:r>
-                <a:rPr sz="1273" b="1" lang="ko-KR">
+                <a:rPr sz="1250" b="1" lang="ko-KR">
                   <a:solidFill>
                     <a:srgbClr val="232F3E"/>
                   </a:solidFill>
@@ -12458,14 +12458,14 @@
           </p:nvSpPr>
           <p:spPr>
             <a:xfrm>
-              <a:off x="5298057" y="1518249"/>
-              <a:ext cx="3105509" cy="4377906"/>
-            </a:xfrm>
-            <a:prstGeom prst="rect">
-              <a:avLst/>
-            </a:prstGeom>
-            <a:noFill/>
-            <a:ln w="21566">
+              <a:off x="4973357" y="1558386"/>
+              <a:ext cx="3050201" cy="4299936"/>
+            </a:xfrm>
+            <a:prstGeom prst="rect">
+              <a:avLst/>
+            </a:prstGeom>
+            <a:noFill/>
+            <a:ln w="21182">
               <a:solidFill>
                 <a:srgbClr val="00A4A6"/>
               </a:solidFill>
@@ -12505,8 +12505,8 @@
           </p:blipFill>
           <p:spPr>
             <a:xfrm>
-              <a:off x="5298057" y="1518249"/>
-              <a:ext cx="258792" cy="258792"/>
+              <a:off x="4973357" y="1558386"/>
+              <a:ext cx="254183" cy="254183"/>
             </a:xfrm>
             <a:prstGeom prst="rect">
               <a:avLst/>
@@ -12521,8 +12521,8 @@
           </p:nvSpPr>
           <p:spPr>
             <a:xfrm>
-              <a:off x="5643113" y="1568929"/>
-              <a:ext cx="2330480" cy="196251"/>
+              <a:off x="5312268" y="1608164"/>
+              <a:ext cx="2288974" cy="192756"/>
             </a:xfrm>
             <a:prstGeom prst="rect">
               <a:avLst/>
@@ -12541,7 +12541,7 @@
                 </a:lnSpc>
               </a:pPr>
               <a:r>
-                <a:rPr sz="1188" b="1" lang="ko-KR">
+                <a:rPr sz="1167" b="1" lang="ko-KR">
                   <a:solidFill>
                     <a:srgbClr val="00A4A6"/>
                   </a:solidFill>
@@ -12576,8 +12576,8 @@
           </p:blipFill>
           <p:spPr>
             <a:xfrm>
-              <a:off x="6462623" y="3394494"/>
-              <a:ext cx="517585" cy="517585"/>
+              <a:off x="6117182" y="3401216"/>
+              <a:ext cx="508367" cy="508367"/>
             </a:xfrm>
             <a:prstGeom prst="rect">
               <a:avLst/>
@@ -12592,8 +12592,8 @@
           </p:nvSpPr>
           <p:spPr>
             <a:xfrm>
-              <a:off x="5763748" y="3962759"/>
-              <a:ext cx="1915334" cy="196251"/>
+              <a:off x="5430754" y="3959360"/>
+              <a:ext cx="1881222" cy="192756"/>
             </a:xfrm>
             <a:prstGeom prst="rect">
               <a:avLst/>
@@ -12612,7 +12612,7 @@
                 </a:lnSpc>
               </a:pPr>
               <a:r>
-                <a:rPr sz="1188" b="0" lang="ko-KR">
+                <a:rPr sz="1167" b="0" lang="ko-KR">
                   <a:solidFill>
                     <a:srgbClr val="232F3E"/>
                   </a:solidFill>
@@ -12647,8 +12647,8 @@
           </p:blipFill>
           <p:spPr>
             <a:xfrm>
-              <a:off x="5815642" y="1949570"/>
-              <a:ext cx="517585" cy="517585"/>
+              <a:off x="5481723" y="1982025"/>
+              <a:ext cx="508367" cy="508367"/>
             </a:xfrm>
             <a:prstGeom prst="rect">
               <a:avLst/>
@@ -12663,8 +12663,8 @@
           </p:nvSpPr>
           <p:spPr>
             <a:xfrm>
-              <a:off x="5376233" y="2517835"/>
-              <a:ext cx="1396401" cy="196251"/>
+              <a:off x="5050141" y="2540170"/>
+              <a:ext cx="1371531" cy="192756"/>
             </a:xfrm>
             <a:prstGeom prst="rect">
               <a:avLst/>
@@ -12683,7 +12683,7 @@
                 </a:lnSpc>
               </a:pPr>
               <a:r>
-                <a:rPr sz="1188" b="0" lang="ko-KR">
+                <a:rPr sz="1167" b="0" lang="ko-KR">
                   <a:solidFill>
                     <a:srgbClr val="232F3E"/>
                   </a:solidFill>
@@ -12704,8 +12704,8 @@
           </p:nvSpPr>
           <p:spPr>
             <a:xfrm>
-              <a:off x="5520456" y="2710851"/>
-              <a:ext cx="1107955" cy="168215"/>
+              <a:off x="5191796" y="2729748"/>
+              <a:ext cx="1088223" cy="165219"/>
             </a:xfrm>
             <a:prstGeom prst="rect">
               <a:avLst/>
@@ -12724,7 +12724,7 @@
                 </a:lnSpc>
               </a:pPr>
               <a:r>
-                <a:rPr sz="1018" b="0" lang="ko-KR">
+                <a:rPr sz="1000" b="0" lang="ko-KR">
                   <a:solidFill>
                     <a:srgbClr val="545B64"/>
                   </a:solidFill>
@@ -12759,8 +12759,8 @@
           </p:blipFill>
           <p:spPr>
             <a:xfrm>
-              <a:off x="7109604" y="1949570"/>
-              <a:ext cx="517585" cy="517585"/>
+              <a:off x="6752640" y="1982025"/>
+              <a:ext cx="508367" cy="508367"/>
             </a:xfrm>
             <a:prstGeom prst="rect">
               <a:avLst/>
@@ -12775,8 +12775,8 @@
           </p:nvSpPr>
           <p:spPr>
             <a:xfrm>
-              <a:off x="6877769" y="2517835"/>
-              <a:ext cx="981255" cy="196251"/>
+              <a:off x="6524934" y="2540170"/>
+              <a:ext cx="963779" cy="192756"/>
             </a:xfrm>
             <a:prstGeom prst="rect">
               <a:avLst/>
@@ -12795,7 +12795,7 @@
                 </a:lnSpc>
               </a:pPr>
               <a:r>
-                <a:rPr sz="1188" b="0" lang="ko-KR">
+                <a:rPr sz="1167" b="0" lang="ko-KR">
                   <a:solidFill>
                     <a:srgbClr val="232F3E"/>
                   </a:solidFill>
@@ -12816,8 +12816,8 @@
           </p:nvSpPr>
           <p:spPr>
             <a:xfrm>
-              <a:off x="6814419" y="2710851"/>
-              <a:ext cx="1107955" cy="168215"/>
+              <a:off x="6462712" y="2729748"/>
+              <a:ext cx="1088223" cy="165219"/>
             </a:xfrm>
             <a:prstGeom prst="rect">
               <a:avLst/>
@@ -12836,7 +12836,7 @@
                 </a:lnSpc>
               </a:pPr>
               <a:r>
-                <a:rPr sz="1018" b="0" lang="ko-KR">
+                <a:rPr sz="1000" b="0" lang="ko-KR">
                   <a:solidFill>
                     <a:srgbClr val="545B64"/>
                   </a:solidFill>
@@ -12871,8 +12871,8 @@
           </p:blipFill>
           <p:spPr>
             <a:xfrm>
-              <a:off x="5815642" y="4839419"/>
-              <a:ext cx="517585" cy="517585"/>
+              <a:off x="5481723" y="4820406"/>
+              <a:ext cx="508367" cy="508367"/>
             </a:xfrm>
             <a:prstGeom prst="rect">
               <a:avLst/>
@@ -12887,8 +12887,8 @@
           </p:nvSpPr>
           <p:spPr>
             <a:xfrm>
-              <a:off x="5635700" y="5407684"/>
-              <a:ext cx="877468" cy="196251"/>
+              <a:off x="5304987" y="5378551"/>
+              <a:ext cx="861841" cy="192756"/>
             </a:xfrm>
             <a:prstGeom prst="rect">
               <a:avLst/>
@@ -12907,7 +12907,7 @@
                 </a:lnSpc>
               </a:pPr>
               <a:r>
-                <a:rPr sz="1188" b="0" lang="ko-KR">
+                <a:rPr sz="1167" b="0" lang="ko-KR">
                   <a:solidFill>
                     <a:srgbClr val="232F3E"/>
                   </a:solidFill>
@@ -12928,8 +12928,8 @@
           </p:nvSpPr>
           <p:spPr>
             <a:xfrm>
-              <a:off x="5520456" y="5600700"/>
-              <a:ext cx="1107955" cy="168215"/>
+              <a:off x="5191796" y="5568129"/>
+              <a:ext cx="1088223" cy="165219"/>
             </a:xfrm>
             <a:prstGeom prst="rect">
               <a:avLst/>
@@ -12948,7 +12948,7 @@
                 </a:lnSpc>
               </a:pPr>
               <a:r>
-                <a:rPr sz="1018" b="0" lang="ko-KR">
+                <a:rPr sz="1000" b="0" lang="ko-KR">
                   <a:solidFill>
                     <a:srgbClr val="545B64"/>
                   </a:solidFill>
@@ -12983,8 +12983,8 @@
           </p:blipFill>
           <p:spPr>
             <a:xfrm>
-              <a:off x="7109604" y="4839419"/>
-              <a:ext cx="517585" cy="517585"/>
+              <a:off x="6752640" y="4820406"/>
+              <a:ext cx="508367" cy="508367"/>
             </a:xfrm>
             <a:prstGeom prst="rect">
               <a:avLst/>
@@ -12999,8 +12999,8 @@
           </p:nvSpPr>
           <p:spPr>
             <a:xfrm>
-              <a:off x="6877769" y="5407684"/>
-              <a:ext cx="981255" cy="196251"/>
+              <a:off x="6524934" y="5378551"/>
+              <a:ext cx="963779" cy="192756"/>
             </a:xfrm>
             <a:prstGeom prst="rect">
               <a:avLst/>
@@ -13019,7 +13019,7 @@
                 </a:lnSpc>
               </a:pPr>
               <a:r>
-                <a:rPr sz="1188" b="0" lang="ko-KR">
+                <a:rPr sz="1167" b="0" lang="ko-KR">
                   <a:solidFill>
                     <a:srgbClr val="232F3E"/>
                   </a:solidFill>
@@ -13040,8 +13040,8 @@
           </p:nvSpPr>
           <p:spPr>
             <a:xfrm>
-              <a:off x="6814419" y="5600700"/>
-              <a:ext cx="1107955" cy="168215"/>
+              <a:off x="6462712" y="5568129"/>
+              <a:ext cx="1088223" cy="165219"/>
             </a:xfrm>
             <a:prstGeom prst="rect">
               <a:avLst/>
@@ -13060,7 +13060,7 @@
                 </a:lnSpc>
               </a:pPr>
               <a:r>
-                <a:rPr sz="1018" b="0" lang="ko-KR">
+                <a:rPr sz="1000" b="0" lang="ko-KR">
                   <a:solidFill>
                     <a:srgbClr val="545B64"/>
                   </a:solidFill>
@@ -13081,8 +13081,8 @@
           </p:nvSpPr>
           <p:spPr>
             <a:xfrm>
-              <a:off x="6074434" y="2920042"/>
-              <a:ext cx="539151" cy="431320"/>
+              <a:off x="5735907" y="2935213"/>
+              <a:ext cx="529549" cy="423639"/>
             </a:xfrm>
             <a:custGeom>
               <a:avLst/>
@@ -13091,15 +13091,15 @@
               <a:cxnLst/>
               <a:rect l="l" t="t" r="r" b="b"/>
               <a:pathLst>
-                <a:path w="539151" h="431320">
+                <a:path w="529549" h="423639">
                   <a:moveTo>
-                    <a:pt x="539151" y="431320"/>
+                    <a:pt x="529549" y="423639"/>
                   </a:moveTo>
                   <a:lnTo>
-                    <a:pt x="539151" y="215660"/>
+                    <a:pt x="529549" y="211819"/>
                   </a:lnTo>
                   <a:lnTo>
-                    <a:pt x="0" y="215660"/>
+                    <a:pt x="0" y="211819"/>
                   </a:lnTo>
                   <a:lnTo>
                     <a:pt x="0" y="0"/>
@@ -13108,7 +13108,7 @@
               </a:pathLst>
             </a:custGeom>
             <a:noFill/>
-            <a:ln w="16175">
+            <a:ln w="15886">
               <a:solidFill>
                 <a:srgbClr val="232F3E"/>
               </a:solidFill>
@@ -13132,8 +13132,8 @@
           </p:nvSpPr>
           <p:spPr>
             <a:xfrm>
-              <a:off x="6829245" y="2920042"/>
-              <a:ext cx="539151" cy="431320"/>
+              <a:off x="6477275" y="2935213"/>
+              <a:ext cx="529549" cy="423639"/>
             </a:xfrm>
             <a:custGeom>
               <a:avLst/>
@@ -13142,24 +13142,24 @@
               <a:cxnLst/>
               <a:rect l="l" t="t" r="r" b="b"/>
               <a:pathLst>
-                <a:path w="539151" h="431320">
+                <a:path w="529549" h="423639">
                   <a:moveTo>
-                    <a:pt x="0" y="431320"/>
+                    <a:pt x="0" y="423639"/>
                   </a:moveTo>
                   <a:lnTo>
-                    <a:pt x="0" y="215660"/>
+                    <a:pt x="0" y="211819"/>
                   </a:lnTo>
                   <a:lnTo>
-                    <a:pt x="539151" y="215660"/>
+                    <a:pt x="529549" y="211819"/>
                   </a:lnTo>
                   <a:lnTo>
-                    <a:pt x="539151" y="0"/>
+                    <a:pt x="529549" y="0"/>
                   </a:lnTo>
                 </a:path>
               </a:pathLst>
             </a:custGeom>
             <a:noFill/>
-            <a:ln w="16175">
+            <a:ln w="15886">
               <a:solidFill>
                 <a:srgbClr val="232F3E"/>
               </a:solidFill>
@@ -13183,8 +13183,8 @@
           </p:nvSpPr>
           <p:spPr>
             <a:xfrm>
-              <a:off x="6074434" y="4192438"/>
-              <a:ext cx="539151" cy="603849"/>
+              <a:off x="5735907" y="4184948"/>
+              <a:ext cx="529549" cy="593095"/>
             </a:xfrm>
             <a:custGeom>
               <a:avLst/>
@@ -13193,24 +13193,24 @@
               <a:cxnLst/>
               <a:rect l="l" t="t" r="r" b="b"/>
               <a:pathLst>
-                <a:path w="539151" h="603849">
+                <a:path w="529549" h="593095">
                   <a:moveTo>
-                    <a:pt x="539151" y="0"/>
+                    <a:pt x="529549" y="0"/>
                   </a:moveTo>
                   <a:lnTo>
-                    <a:pt x="539151" y="301924"/>
+                    <a:pt x="529549" y="296547"/>
                   </a:lnTo>
                   <a:lnTo>
-                    <a:pt x="0" y="301924"/>
+                    <a:pt x="0" y="296547"/>
                   </a:lnTo>
                   <a:lnTo>
-                    <a:pt x="0" y="603849"/>
+                    <a:pt x="0" y="593095"/>
                   </a:lnTo>
                 </a:path>
               </a:pathLst>
             </a:custGeom>
             <a:noFill/>
-            <a:ln w="16175">
+            <a:ln w="15886">
               <a:solidFill>
                 <a:srgbClr val="232F3E"/>
               </a:solidFill>
@@ -13234,8 +13234,8 @@
           </p:nvSpPr>
           <p:spPr>
             <a:xfrm>
-              <a:off x="6829245" y="4192438"/>
-              <a:ext cx="539151" cy="603849"/>
+              <a:off x="6477275" y="4184948"/>
+              <a:ext cx="529549" cy="593095"/>
             </a:xfrm>
             <a:custGeom>
               <a:avLst/>
@@ -13244,24 +13244,24 @@
               <a:cxnLst/>
               <a:rect l="l" t="t" r="r" b="b"/>
               <a:pathLst>
-                <a:path w="539151" h="603849">
+                <a:path w="529549" h="593095">
                   <a:moveTo>
                     <a:pt x="0" y="0"/>
                   </a:moveTo>
                   <a:lnTo>
-                    <a:pt x="0" y="301924"/>
+                    <a:pt x="0" y="296547"/>
                   </a:lnTo>
                   <a:lnTo>
-                    <a:pt x="539151" y="301924"/>
+                    <a:pt x="529549" y="296547"/>
                   </a:lnTo>
                   <a:lnTo>
-                    <a:pt x="539151" y="603849"/>
+                    <a:pt x="529549" y="593095"/>
                   </a:lnTo>
                 </a:path>
               </a:pathLst>
             </a:custGeom>
             <a:noFill/>
-            <a:ln w="16175">
+            <a:ln w="15886">
               <a:solidFill>
                 <a:srgbClr val="232F3E"/>
               </a:solidFill>
@@ -13285,14 +13285,14 @@
           </p:nvSpPr>
           <p:spPr>
             <a:xfrm>
-              <a:off x="8834887" y="1518249"/>
-              <a:ext cx="2501660" cy="4377906"/>
-            </a:xfrm>
-            <a:prstGeom prst="rect">
-              <a:avLst/>
-            </a:prstGeom>
-            <a:noFill/>
-            <a:ln w="21566">
+              <a:off x="9125019" y="1558386"/>
+              <a:ext cx="2457106" cy="4299936"/>
+            </a:xfrm>
+            <a:prstGeom prst="rect">
+              <a:avLst/>
+            </a:prstGeom>
+            <a:noFill/>
+            <a:ln w="21182">
               <a:solidFill>
                 <a:srgbClr val="00A4A6"/>
               </a:solidFill>
@@ -13332,8 +13332,8 @@
           </p:blipFill>
           <p:spPr>
             <a:xfrm>
-              <a:off x="8834887" y="1518249"/>
-              <a:ext cx="258792" cy="258792"/>
+              <a:off x="9125019" y="1558386"/>
+              <a:ext cx="254183" cy="254183"/>
             </a:xfrm>
             <a:prstGeom prst="rect">
               <a:avLst/>
@@ -13348,8 +13348,8 @@
           </p:nvSpPr>
           <p:spPr>
             <a:xfrm>
-              <a:off x="9179943" y="1568929"/>
-              <a:ext cx="2330480" cy="196251"/>
+              <a:off x="9463930" y="1608164"/>
+              <a:ext cx="2288974" cy="192756"/>
             </a:xfrm>
             <a:prstGeom prst="rect">
               <a:avLst/>
@@ -13368,7 +13368,7 @@
                 </a:lnSpc>
               </a:pPr>
               <a:r>
-                <a:rPr sz="1188" b="1" lang="ko-KR">
+                <a:rPr sz="1167" b="1" lang="ko-KR">
                   <a:solidFill>
                     <a:srgbClr val="00A4A6"/>
                   </a:solidFill>
@@ -13403,8 +13403,8 @@
           </p:blipFill>
           <p:spPr>
             <a:xfrm>
-              <a:off x="9783792" y="3394494"/>
-              <a:ext cx="517585" cy="517585"/>
+              <a:off x="10057025" y="3401216"/>
+              <a:ext cx="508367" cy="508367"/>
             </a:xfrm>
             <a:prstGeom prst="rect">
               <a:avLst/>
@@ -13419,8 +13419,8 @@
           </p:nvSpPr>
           <p:spPr>
             <a:xfrm>
-              <a:off x="9084918" y="3962759"/>
-              <a:ext cx="1915334" cy="196251"/>
+              <a:off x="9370597" y="3959360"/>
+              <a:ext cx="1881222" cy="192756"/>
             </a:xfrm>
             <a:prstGeom prst="rect">
               <a:avLst/>
@@ -13439,7 +13439,7 @@
                 </a:lnSpc>
               </a:pPr>
               <a:r>
-                <a:rPr sz="1188" b="0" lang="ko-KR">
+                <a:rPr sz="1167" b="0" lang="ko-KR">
                   <a:solidFill>
                     <a:srgbClr val="232F3E"/>
                   </a:solidFill>
@@ -13474,8 +13474,8 @@
           </p:blipFill>
           <p:spPr>
             <a:xfrm>
-              <a:off x="9783792" y="1949570"/>
-              <a:ext cx="517585" cy="517585"/>
+              <a:off x="10057025" y="1982025"/>
+              <a:ext cx="508367" cy="508367"/>
             </a:xfrm>
             <a:prstGeom prst="rect">
               <a:avLst/>
@@ -13490,8 +13490,8 @@
           </p:nvSpPr>
           <p:spPr>
             <a:xfrm>
-              <a:off x="9655744" y="2517835"/>
-              <a:ext cx="773682" cy="196251"/>
+              <a:off x="9931257" y="2540170"/>
+              <a:ext cx="759902" cy="192756"/>
             </a:xfrm>
             <a:prstGeom prst="rect">
               <a:avLst/>
@@ -13510,7 +13510,7 @@
                 </a:lnSpc>
               </a:pPr>
               <a:r>
-                <a:rPr sz="1188" b="0" lang="ko-KR">
+                <a:rPr sz="1167" b="0" lang="ko-KR">
                   <a:solidFill>
                     <a:srgbClr val="232F3E"/>
                   </a:solidFill>
@@ -13531,8 +13531,8 @@
           </p:nvSpPr>
           <p:spPr>
             <a:xfrm>
-              <a:off x="9444127" y="2710851"/>
-              <a:ext cx="1196915" cy="168215"/>
+              <a:off x="9723409" y="2729748"/>
+              <a:ext cx="1175598" cy="165219"/>
             </a:xfrm>
             <a:prstGeom prst="rect">
               <a:avLst/>
@@ -13551,7 +13551,7 @@
                 </a:lnSpc>
               </a:pPr>
               <a:r>
-                <a:rPr sz="1018" b="0" lang="ko-KR">
+                <a:rPr sz="1000" b="0" lang="ko-KR">
                   <a:solidFill>
                     <a:srgbClr val="545B64"/>
                   </a:solidFill>
@@ -13586,8 +13586,8 @@
           </p:blipFill>
           <p:spPr>
             <a:xfrm>
-              <a:off x="9783792" y="4839419"/>
-              <a:ext cx="517585" cy="517585"/>
+              <a:off x="10057025" y="4820406"/>
+              <a:ext cx="508367" cy="508367"/>
             </a:xfrm>
             <a:prstGeom prst="rect">
               <a:avLst/>
@@ -13602,8 +13602,8 @@
           </p:nvSpPr>
           <p:spPr>
             <a:xfrm>
-              <a:off x="9292491" y="5407684"/>
-              <a:ext cx="1500188" cy="196251"/>
+              <a:off x="9574473" y="5378551"/>
+              <a:ext cx="1473469" cy="192756"/>
             </a:xfrm>
             <a:prstGeom prst="rect">
               <a:avLst/>
@@ -13622,7 +13622,7 @@
                 </a:lnSpc>
               </a:pPr>
               <a:r>
-                <a:rPr sz="1188" b="0" lang="ko-KR">
+                <a:rPr sz="1167" b="0" lang="ko-KR">
                   <a:solidFill>
                     <a:srgbClr val="232F3E"/>
                   </a:solidFill>
@@ -13643,8 +13643,8 @@
           </p:nvSpPr>
           <p:spPr>
             <a:xfrm>
-              <a:off x="9444127" y="5600700"/>
-              <a:ext cx="1196915" cy="168215"/>
+              <a:off x="9723409" y="5568129"/>
+              <a:ext cx="1175598" cy="165219"/>
             </a:xfrm>
             <a:prstGeom prst="rect">
               <a:avLst/>
@@ -13663,7 +13663,7 @@
                 </a:lnSpc>
               </a:pPr>
               <a:r>
-                <a:rPr sz="1018" b="0" lang="ko-KR">
+                <a:rPr sz="1000" b="0" lang="ko-KR">
                   <a:solidFill>
                     <a:srgbClr val="545B64"/>
                   </a:solidFill>
@@ -13684,13 +13684,13 @@
           </p:nvCxnSpPr>
           <p:spPr>
             <a:xfrm flipV="1">
-              <a:off x="10042585" y="2920042"/>
-              <a:ext cx="0" cy="431320"/>
+              <a:off x="10311208" y="2935213"/>
+              <a:ext cx="0" cy="423639"/>
             </a:xfrm>
             <a:prstGeom prst="line">
               <a:avLst/>
             </a:prstGeom>
-            <a:ln w="16175">
+            <a:ln w="15886">
               <a:solidFill>
                 <a:srgbClr val="232F3E"/>
               </a:solidFill>
@@ -13707,13 +13707,13 @@
           </p:nvCxnSpPr>
           <p:spPr>
             <a:xfrm>
-              <a:off x="10042585" y="4192438"/>
-              <a:ext cx="0" cy="603849"/>
+              <a:off x="10311208" y="4184948"/>
+              <a:ext cx="0" cy="593095"/>
             </a:xfrm>
             <a:prstGeom prst="line">
               <a:avLst/>
             </a:prstGeom>
-            <a:ln w="16175">
+            <a:ln w="15886">
               <a:solidFill>
                 <a:srgbClr val="232F3E"/>
               </a:solidFill>
@@ -13730,13 +13730,13 @@
           </p:nvCxnSpPr>
           <p:spPr>
             <a:xfrm>
-              <a:off x="7023340" y="3653287"/>
-              <a:ext cx="2717320" cy="0"/>
+              <a:off x="6667913" y="3655399"/>
+              <a:ext cx="1609828" cy="0"/>
             </a:xfrm>
             <a:prstGeom prst="line">
               <a:avLst/>
             </a:prstGeom>
-            <a:ln w="26958">
+            <a:ln w="26477">
               <a:solidFill>
                 <a:srgbClr val="232F3E"/>
               </a:solidFill>
@@ -13745,16 +13745,69 @@
             </a:ln>
           </p:spPr>
         </p:cxnSp>
-        <p:sp>
-          <p:nvSpPr>
-            <p:cNvPr id="56" name="TextBox 55"/>
+        <p:cxnSp>
+          <p:nvCxnSpPr>
+            <p:cNvPr id="56" name="Connector 55"/>
+            <p:cNvCxnSpPr/>
+            <p:nvPr/>
+          </p:nvCxnSpPr>
+          <p:spPr>
+            <a:xfrm>
+              <a:off x="8870835" y="3655399"/>
+              <a:ext cx="1143826" cy="0"/>
+            </a:xfrm>
+            <a:prstGeom prst="line">
+              <a:avLst/>
+            </a:prstGeom>
+            <a:ln w="26477">
+              <a:solidFill>
+                <a:srgbClr val="232F3E"/>
+              </a:solidFill>
+              <a:prstDash val="solid"/>
+              <a:miter lim="800000"/>
+            </a:ln>
+          </p:spPr>
+        </p:cxnSp>
+        <p:pic>
+          <p:nvPicPr>
+            <p:cNvPr id="57" name="Amazon-VPC_Peering-Connection" descr="Amazon VPC_Peering Connection"/>
+            <p:cNvPicPr>
+              <a:picLocks noChangeAspect="1"/>
+            </p:cNvPicPr>
+            <p:nvPr/>
+          </p:nvPicPr>
+          <p:blipFill>
+            <a:blip r:embed="rId18">
+              <a:extLst>
+                <a:ext uri="{96DAC541-7B7A-43D3-8B79-37D633B846F1}">
+                  <asvg:svgBlip xmlns:asvg="http://schemas.microsoft.com/office/drawing/2016/SVG/main" r:embed="rId19"/>
+                </a:ext>
+              </a:extLst>
+            </a:blip>
+            <a:stretch>
+              <a:fillRect/>
+            </a:stretch>
+          </p:blipFill>
+          <p:spPr>
+            <a:xfrm>
+              <a:off x="8320105" y="3401216"/>
+              <a:ext cx="508367" cy="508367"/>
+            </a:xfrm>
+            <a:prstGeom prst="rect">
+              <a:avLst/>
+            </a:prstGeom>
+          </p:spPr>
+        </p:pic>
+        <p:sp>
+          <p:nvSpPr>
+            <p:cNvPr id="58" name="TextBox 57"/>
             <p:cNvSpPr txBox="1"/>
             <p:nvPr/>
           </p:nvSpPr>
           <p:spPr>
             <a:xfrm>
-              <a:off x="7137909" y="3433313"/>
-              <a:ext cx="1107955" cy="168215"/>
+              <a:off x="7939492" y="3959360"/>
+              <a:ext cx="1269593" cy="192756"/>
             </a:xfrm>
             <a:prstGeom prst="rect">
               <a:avLst/>
@@ -13773,7 +13826,7 @@
                 </a:lnSpc>
               </a:pPr>
               <a:r>
-                <a:rPr sz="1018" b="1" lang="ko-KR">
+                <a:rPr sz="1167" b="0" lang="ko-KR">
                   <a:solidFill>
                     <a:srgbClr val="232F3E"/>
                   </a:solidFill>
@@ -13788,14 +13841,14 @@
         </p:sp>
         <p:sp>
           <p:nvSpPr>
-            <p:cNvPr id="57" name="TextBox 56"/>
+            <p:cNvPr id="59" name="TextBox 58"/>
             <p:cNvSpPr txBox="1"/>
             <p:nvPr/>
           </p:nvSpPr>
           <p:spPr>
             <a:xfrm>
-              <a:off x="6866986" y="3724455"/>
-              <a:ext cx="1649802" cy="168215"/>
+              <a:off x="8177127" y="4148939"/>
+              <a:ext cx="794323" cy="165219"/>
             </a:xfrm>
             <a:prstGeom prst="rect">
               <a:avLst/>
@@ -13814,7 +13867,7 @@
                 </a:lnSpc>
               </a:pPr>
               <a:r>
-                <a:rPr sz="1018" b="0" lang="ko-KR">
+                <a:rPr sz="1000" b="0" lang="ko-KR">
                   <a:solidFill>
                     <a:srgbClr val="545B64"/>
                   </a:solidFill>
@@ -13822,21 +13875,21 @@
                   <a:ea typeface="Malgun Gothic"/>
                   <a:cs typeface="Malgun Gothic"/>
                 </a:rPr>
-                <a:t>리전 간 · AWS 백본</a:t>
+                <a:t>AWS 백본</a:t>
               </a:r>
             </a:p>
           </p:txBody>
         </p:sp>
         <p:sp>
           <p:nvSpPr>
-            <p:cNvPr id="58" name="TextBox 57"/>
+            <p:cNvPr id="60" name="TextBox 59"/>
             <p:cNvSpPr txBox="1"/>
             <p:nvPr/>
           </p:nvSpPr>
           <p:spPr>
             <a:xfrm>
-              <a:off x="639792" y="6204549"/>
-              <a:ext cx="9146696" cy="168215"/>
+              <a:off x="398056" y="6161224"/>
+              <a:ext cx="8983794" cy="165219"/>
             </a:xfrm>
             <a:prstGeom prst="rect">
               <a:avLst/>
@@ -13855,7 +13908,7 @@
                 </a:lnSpc>
               </a:pPr>
               <a:r>
-                <a:rPr sz="1018" b="0" lang="ko-KR">
+                <a:rPr sz="1000" b="0" lang="ko-KR">
                   <a:solidFill>
                     <a:srgbClr val="545B64"/>
                   </a:solidFill>
@@ -13870,14 +13923,14 @@
         </p:sp>
         <p:sp>
           <p:nvSpPr>
-            <p:cNvPr id="59" name="TextBox 58"/>
+            <p:cNvPr id="61" name="TextBox 60"/>
             <p:cNvSpPr txBox="1"/>
             <p:nvPr/>
           </p:nvSpPr>
           <p:spPr>
             <a:xfrm>
-              <a:off x="639792" y="6377077"/>
-              <a:ext cx="12599958" cy="168215"/>
+              <a:off x="398056" y="6330679"/>
+              <a:ext cx="12375554" cy="165219"/>
             </a:xfrm>
             <a:prstGeom prst="rect">
               <a:avLst/>
@@ -13896,7 +13949,7 @@
                 </a:lnSpc>
               </a:pPr>
               <a:r>
-                <a:rPr sz="1018" b="0" lang="ko-KR">
+                <a:rPr sz="1000" b="0" lang="ko-KR">
                   <a:solidFill>
                     <a:srgbClr val="545B64"/>
                   </a:solidFill>

--- a/docs/examples/reference-architectures.pptx
+++ b/docs/examples/reference-architectures.pptx
@@ -13736,7 +13736,7 @@
             <a:prstGeom prst="line">
               <a:avLst/>
             </a:prstGeom>
-            <a:ln w="26477">
+            <a:ln w="15886">
               <a:solidFill>
                 <a:srgbClr val="232F3E"/>
               </a:solidFill>
@@ -13759,7 +13759,7 @@
             <a:prstGeom prst="line">
               <a:avLst/>
             </a:prstGeom>
-            <a:ln w="26477">
+            <a:ln w="15886">
               <a:solidFill>
                 <a:srgbClr val="232F3E"/>
               </a:solidFill>

--- a/docs/examples/reference-architectures.pptx
+++ b/docs/examples/reference-architectures.pptx
@@ -16860,7 +16860,7 @@
           <p:spPr>
             <a:xfrm>
               <a:off x="9207500" y="2861733"/>
-              <a:ext cx="867833" cy="910167"/>
+              <a:ext cx="867833" cy="994834"/>
             </a:xfrm>
             <a:custGeom>
               <a:avLst/>
@@ -16869,7 +16869,7 @@
               <a:cxnLst/>
               <a:rect l="l" t="t" r="r" b="b"/>
               <a:pathLst>
-                <a:path w="867833" h="910167">
+                <a:path w="867833" h="994834">
                   <a:moveTo>
                     <a:pt x="0" y="0"/>
                   </a:moveTo>
@@ -16877,10 +16877,10 @@
                     <a:pt x="656167" y="0"/>
                   </a:lnTo>
                   <a:lnTo>
-                    <a:pt x="656167" y="910167"/>
+                    <a:pt x="656167" y="994834"/>
                   </a:lnTo>
                   <a:lnTo>
-                    <a:pt x="867833" y="910167"/>
+                    <a:pt x="867833" y="994834"/>
                   </a:lnTo>
                 </a:path>
               </a:pathLst>
@@ -16911,8 +16911,8 @@
           </p:nvSpPr>
           <p:spPr>
             <a:xfrm>
-              <a:off x="9207500" y="3941233"/>
-              <a:ext cx="867833" cy="1354667"/>
+              <a:off x="9207500" y="3856567"/>
+              <a:ext cx="656167" cy="1439333"/>
             </a:xfrm>
             <a:custGeom>
               <a:avLst/>
@@ -16921,18 +16921,15 @@
               <a:cxnLst/>
               <a:rect l="l" t="t" r="r" b="b"/>
               <a:pathLst>
-                <a:path w="867833" h="1354667">
+                <a:path w="656167" h="1439333">
                   <a:moveTo>
-                    <a:pt x="0" y="1354667"/>
+                    <a:pt x="0" y="1439333"/>
                   </a:moveTo>
                   <a:lnTo>
-                    <a:pt x="656167" y="1354667"/>
+                    <a:pt x="656167" y="1439333"/>
                   </a:lnTo>
                   <a:lnTo>
                     <a:pt x="656167" y="0"/>
-                  </a:lnTo>
-                  <a:lnTo>
-                    <a:pt x="867833" y="0"/>
                   </a:lnTo>
                 </a:path>
               </a:pathLst>
@@ -16944,7 +16941,6 @@
               </a:solidFill>
               <a:prstDash val="solid"/>
               <a:miter lim="800000"/>
-              <a:tailEnd type="triangle" w="med" len="med"/>
             </a:ln>
           </p:spPr>
           <p:txBody>

--- a/docs/examples/reference-architectures.pptx
+++ b/docs/examples/reference-architectures.pptx
@@ -8903,9 +8903,9 @@
         <p:grpSpPr>
           <a:xfrm>
             <a:off x="242755" y="935567"/>
-            <a:ext cx="12052433" cy="5685366"/>
+            <a:ext cx="12052433" cy="5706533"/>
             <a:chOff x="242755" y="935567"/>
-            <a:chExt cx="12052433" cy="5685366"/>
+            <a:chExt cx="12052433" cy="5706533"/>
           </a:xfrm>
         </p:grpSpPr>
         <p:pic>
@@ -11733,14 +11733,84 @@
         </p:sp>
         <p:sp>
           <p:nvSpPr>
-            <p:cNvPr id="84" name="TextBox 83"/>
+            <p:cNvPr id="84" name="Oval 83"/>
+            <p:cNvSpPr/>
+            <p:nvPr/>
+          </p:nvSpPr>
+          <p:spPr>
+            <a:xfrm>
+              <a:off x="317500" y="6258983"/>
+              <a:ext cx="211667" cy="211667"/>
+            </a:xfrm>
+            <a:prstGeom prst="ellipse">
+              <a:avLst/>
+            </a:prstGeom>
+            <a:solidFill>
+              <a:srgbClr val="232F3E"/>
+            </a:solidFill>
+            <a:ln>
+              <a:noFill/>
+            </a:ln>
+          </p:spPr>
+          <p:txBody>
+            <a:bodyPr rtlCol="0" anchor="ctr"/>
+            <a:lstStyle/>
+            <a:p>
+              <a:pPr algn="ctr"/>
+            </a:p>
+          </p:txBody>
+        </p:sp>
+        <p:sp>
+          <p:nvSpPr>
+            <p:cNvPr id="85" name="TextBox 84"/>
             <p:cNvSpPr txBox="1"/>
             <p:nvPr/>
           </p:nvSpPr>
           <p:spPr>
             <a:xfrm>
-              <a:off x="317500" y="6286500"/>
-              <a:ext cx="9390063" cy="165100"/>
+              <a:off x="316177" y="6286500"/>
+              <a:ext cx="214312" cy="165100"/>
+            </a:xfrm>
+            <a:prstGeom prst="rect">
+              <a:avLst/>
+            </a:prstGeom>
+            <a:noFill/>
+          </p:spPr>
+          <p:txBody>
+            <a:bodyPr wrap="none" lIns="0" rIns="0" tIns="0" bIns="0" anchor="t">
+              <a:noAutofit/>
+            </a:bodyPr>
+            <a:lstStyle/>
+            <a:p>
+              <a:pPr algn="ctr">
+                <a:lnSpc>
+                  <a:spcPct val="100000"/>
+                </a:lnSpc>
+              </a:pPr>
+              <a:r>
+                <a:rPr sz="1000" b="1" lang="ko-KR">
+                  <a:solidFill>
+                    <a:srgbClr val="FFFFFF"/>
+                  </a:solidFill>
+                  <a:latin typeface="Arial"/>
+                  <a:ea typeface="Malgun Gothic"/>
+                  <a:cs typeface="Malgun Gothic"/>
+                </a:rPr>
+                <a:t>1</a:t>
+              </a:r>
+            </a:p>
+          </p:txBody>
+        </p:sp>
+        <p:sp>
+          <p:nvSpPr>
+            <p:cNvPr id="86" name="TextBox 85"/>
+            <p:cNvSpPr txBox="1"/>
+            <p:nvPr/>
+          </p:nvSpPr>
+          <p:spPr>
+            <a:xfrm>
+              <a:off x="613833" y="6286500"/>
+              <a:ext cx="2547938" cy="165100"/>
             </a:xfrm>
             <a:prstGeom prst="rect">
               <a:avLst/>
@@ -11767,20 +11837,353 @@
                   <a:ea typeface="Malgun Gothic"/>
                   <a:cs typeface="Malgun Gothic"/>
                 </a:rPr>
-                <a:t>① IGW → GWLBe (인그레스 라우팅)  ② GWLBe ⇄ GWLB  ③ GWLB ⇄ 방화벽 (검사 후 GWLB → GWLBe로 반환)  ④ GWLBe → EC2</a:t>
+                <a:t>IGW → GWLBe (인그레스 라우팅)</a:t>
               </a:r>
             </a:p>
           </p:txBody>
         </p:sp>
         <p:sp>
           <p:nvSpPr>
-            <p:cNvPr id="85" name="TextBox 84"/>
+            <p:cNvPr id="87" name="Oval 86"/>
+            <p:cNvSpPr/>
+            <p:nvPr/>
+          </p:nvSpPr>
+          <p:spPr>
+            <a:xfrm>
+              <a:off x="2671233" y="6258983"/>
+              <a:ext cx="211667" cy="211667"/>
+            </a:xfrm>
+            <a:prstGeom prst="ellipse">
+              <a:avLst/>
+            </a:prstGeom>
+            <a:solidFill>
+              <a:srgbClr val="232F3E"/>
+            </a:solidFill>
+            <a:ln>
+              <a:noFill/>
+            </a:ln>
+          </p:spPr>
+          <p:txBody>
+            <a:bodyPr rtlCol="0" anchor="ctr"/>
+            <a:lstStyle/>
+            <a:p>
+              <a:pPr algn="ctr"/>
+            </a:p>
+          </p:txBody>
+        </p:sp>
+        <p:sp>
+          <p:nvSpPr>
+            <p:cNvPr id="88" name="TextBox 87"/>
             <p:cNvSpPr txBox="1"/>
             <p:nvPr/>
           </p:nvSpPr>
           <p:spPr>
             <a:xfrm>
-              <a:off x="317500" y="6455833"/>
+              <a:off x="2669910" y="6286500"/>
+              <a:ext cx="214312" cy="165100"/>
+            </a:xfrm>
+            <a:prstGeom prst="rect">
+              <a:avLst/>
+            </a:prstGeom>
+            <a:noFill/>
+          </p:spPr>
+          <p:txBody>
+            <a:bodyPr wrap="none" lIns="0" rIns="0" tIns="0" bIns="0" anchor="t">
+              <a:noAutofit/>
+            </a:bodyPr>
+            <a:lstStyle/>
+            <a:p>
+              <a:pPr algn="ctr">
+                <a:lnSpc>
+                  <a:spcPct val="100000"/>
+                </a:lnSpc>
+              </a:pPr>
+              <a:r>
+                <a:rPr sz="1000" b="1" lang="ko-KR">
+                  <a:solidFill>
+                    <a:srgbClr val="FFFFFF"/>
+                  </a:solidFill>
+                  <a:latin typeface="Arial"/>
+                  <a:ea typeface="Malgun Gothic"/>
+                  <a:cs typeface="Malgun Gothic"/>
+                </a:rPr>
+                <a:t>2</a:t>
+              </a:r>
+            </a:p>
+          </p:txBody>
+        </p:sp>
+        <p:sp>
+          <p:nvSpPr>
+            <p:cNvPr id="89" name="TextBox 88"/>
+            <p:cNvSpPr txBox="1"/>
+            <p:nvPr/>
+          </p:nvSpPr>
+          <p:spPr>
+            <a:xfrm>
+              <a:off x="2967567" y="6286500"/>
+              <a:ext cx="1174750" cy="165100"/>
+            </a:xfrm>
+            <a:prstGeom prst="rect">
+              <a:avLst/>
+            </a:prstGeom>
+            <a:noFill/>
+          </p:spPr>
+          <p:txBody>
+            <a:bodyPr wrap="none" lIns="0" rIns="0" tIns="0" bIns="0" anchor="t">
+              <a:noAutofit/>
+            </a:bodyPr>
+            <a:lstStyle/>
+            <a:p>
+              <a:pPr algn="l">
+                <a:lnSpc>
+                  <a:spcPct val="100000"/>
+                </a:lnSpc>
+              </a:pPr>
+              <a:r>
+                <a:rPr sz="1000" b="0" lang="ko-KR">
+                  <a:solidFill>
+                    <a:srgbClr val="545B64"/>
+                  </a:solidFill>
+                  <a:latin typeface="Arial"/>
+                  <a:ea typeface="Malgun Gothic"/>
+                  <a:cs typeface="Malgun Gothic"/>
+                </a:rPr>
+                <a:t>GWLBe ⇄ GWLB</a:t>
+              </a:r>
+            </a:p>
+          </p:txBody>
+        </p:sp>
+        <p:sp>
+          <p:nvSpPr>
+            <p:cNvPr id="90" name="Oval 89"/>
+            <p:cNvSpPr/>
+            <p:nvPr/>
+          </p:nvSpPr>
+          <p:spPr>
+            <a:xfrm>
+              <a:off x="4163483" y="6258983"/>
+              <a:ext cx="211667" cy="211667"/>
+            </a:xfrm>
+            <a:prstGeom prst="ellipse">
+              <a:avLst/>
+            </a:prstGeom>
+            <a:solidFill>
+              <a:srgbClr val="232F3E"/>
+            </a:solidFill>
+            <a:ln>
+              <a:noFill/>
+            </a:ln>
+          </p:spPr>
+          <p:txBody>
+            <a:bodyPr rtlCol="0" anchor="ctr"/>
+            <a:lstStyle/>
+            <a:p>
+              <a:pPr algn="ctr"/>
+            </a:p>
+          </p:txBody>
+        </p:sp>
+        <p:sp>
+          <p:nvSpPr>
+            <p:cNvPr id="91" name="TextBox 90"/>
+            <p:cNvSpPr txBox="1"/>
+            <p:nvPr/>
+          </p:nvSpPr>
+          <p:spPr>
+            <a:xfrm>
+              <a:off x="4162160" y="6286500"/>
+              <a:ext cx="214312" cy="165100"/>
+            </a:xfrm>
+            <a:prstGeom prst="rect">
+              <a:avLst/>
+            </a:prstGeom>
+            <a:noFill/>
+          </p:spPr>
+          <p:txBody>
+            <a:bodyPr wrap="none" lIns="0" rIns="0" tIns="0" bIns="0" anchor="t">
+              <a:noAutofit/>
+            </a:bodyPr>
+            <a:lstStyle/>
+            <a:p>
+              <a:pPr algn="ctr">
+                <a:lnSpc>
+                  <a:spcPct val="100000"/>
+                </a:lnSpc>
+              </a:pPr>
+              <a:r>
+                <a:rPr sz="1000" b="1" lang="ko-KR">
+                  <a:solidFill>
+                    <a:srgbClr val="FFFFFF"/>
+                  </a:solidFill>
+                  <a:latin typeface="Arial"/>
+                  <a:ea typeface="Malgun Gothic"/>
+                  <a:cs typeface="Malgun Gothic"/>
+                </a:rPr>
+                <a:t>3</a:t>
+              </a:r>
+            </a:p>
+          </p:txBody>
+        </p:sp>
+        <p:sp>
+          <p:nvSpPr>
+            <p:cNvPr id="92" name="TextBox 91"/>
+            <p:cNvSpPr txBox="1"/>
+            <p:nvPr/>
+          </p:nvSpPr>
+          <p:spPr>
+            <a:xfrm>
+              <a:off x="4459817" y="6286500"/>
+              <a:ext cx="3738562" cy="165100"/>
+            </a:xfrm>
+            <a:prstGeom prst="rect">
+              <a:avLst/>
+            </a:prstGeom>
+            <a:noFill/>
+          </p:spPr>
+          <p:txBody>
+            <a:bodyPr wrap="none" lIns="0" rIns="0" tIns="0" bIns="0" anchor="t">
+              <a:noAutofit/>
+            </a:bodyPr>
+            <a:lstStyle/>
+            <a:p>
+              <a:pPr algn="l">
+                <a:lnSpc>
+                  <a:spcPct val="100000"/>
+                </a:lnSpc>
+              </a:pPr>
+              <a:r>
+                <a:rPr sz="1000" b="0" lang="ko-KR">
+                  <a:solidFill>
+                    <a:srgbClr val="545B64"/>
+                  </a:solidFill>
+                  <a:latin typeface="Arial"/>
+                  <a:ea typeface="Malgun Gothic"/>
+                  <a:cs typeface="Malgun Gothic"/>
+                </a:rPr>
+                <a:t>GWLB ⇄ 방화벽 (검사 후 GWLB → GWLBe로 반환)</a:t>
+              </a:r>
+            </a:p>
+          </p:txBody>
+        </p:sp>
+        <p:sp>
+          <p:nvSpPr>
+            <p:cNvPr id="93" name="Oval 92"/>
+            <p:cNvSpPr/>
+            <p:nvPr/>
+          </p:nvSpPr>
+          <p:spPr>
+            <a:xfrm>
+              <a:off x="7526867" y="6258983"/>
+              <a:ext cx="211667" cy="211667"/>
+            </a:xfrm>
+            <a:prstGeom prst="ellipse">
+              <a:avLst/>
+            </a:prstGeom>
+            <a:solidFill>
+              <a:srgbClr val="232F3E"/>
+            </a:solidFill>
+            <a:ln>
+              <a:noFill/>
+            </a:ln>
+          </p:spPr>
+          <p:txBody>
+            <a:bodyPr rtlCol="0" anchor="ctr"/>
+            <a:lstStyle/>
+            <a:p>
+              <a:pPr algn="ctr"/>
+            </a:p>
+          </p:txBody>
+        </p:sp>
+        <p:sp>
+          <p:nvSpPr>
+            <p:cNvPr id="94" name="TextBox 93"/>
+            <p:cNvSpPr txBox="1"/>
+            <p:nvPr/>
+          </p:nvSpPr>
+          <p:spPr>
+            <a:xfrm>
+              <a:off x="7525544" y="6286500"/>
+              <a:ext cx="214312" cy="165100"/>
+            </a:xfrm>
+            <a:prstGeom prst="rect">
+              <a:avLst/>
+            </a:prstGeom>
+            <a:noFill/>
+          </p:spPr>
+          <p:txBody>
+            <a:bodyPr wrap="none" lIns="0" rIns="0" tIns="0" bIns="0" anchor="t">
+              <a:noAutofit/>
+            </a:bodyPr>
+            <a:lstStyle/>
+            <a:p>
+              <a:pPr algn="ctr">
+                <a:lnSpc>
+                  <a:spcPct val="100000"/>
+                </a:lnSpc>
+              </a:pPr>
+              <a:r>
+                <a:rPr sz="1000" b="1" lang="ko-KR">
+                  <a:solidFill>
+                    <a:srgbClr val="FFFFFF"/>
+                  </a:solidFill>
+                  <a:latin typeface="Arial"/>
+                  <a:ea typeface="Malgun Gothic"/>
+                  <a:cs typeface="Malgun Gothic"/>
+                </a:rPr>
+                <a:t>4</a:t>
+              </a:r>
+            </a:p>
+          </p:txBody>
+        </p:sp>
+        <p:sp>
+          <p:nvSpPr>
+            <p:cNvPr id="95" name="TextBox 94"/>
+            <p:cNvSpPr txBox="1"/>
+            <p:nvPr/>
+          </p:nvSpPr>
+          <p:spPr>
+            <a:xfrm>
+              <a:off x="7823200" y="6286500"/>
+              <a:ext cx="1087438" cy="165100"/>
+            </a:xfrm>
+            <a:prstGeom prst="rect">
+              <a:avLst/>
+            </a:prstGeom>
+            <a:noFill/>
+          </p:spPr>
+          <p:txBody>
+            <a:bodyPr wrap="none" lIns="0" rIns="0" tIns="0" bIns="0" anchor="t">
+              <a:noAutofit/>
+            </a:bodyPr>
+            <a:lstStyle/>
+            <a:p>
+              <a:pPr algn="l">
+                <a:lnSpc>
+                  <a:spcPct val="100000"/>
+                </a:lnSpc>
+              </a:pPr>
+              <a:r>
+                <a:rPr sz="1000" b="0" lang="ko-KR">
+                  <a:solidFill>
+                    <a:srgbClr val="545B64"/>
+                  </a:solidFill>
+                  <a:latin typeface="Arial"/>
+                  <a:ea typeface="Malgun Gothic"/>
+                  <a:cs typeface="Malgun Gothic"/>
+                </a:rPr>
+                <a:t>GWLBe → EC2</a:t>
+              </a:r>
+            </a:p>
+          </p:txBody>
+        </p:sp>
+        <p:sp>
+          <p:nvSpPr>
+            <p:cNvPr id="96" name="TextBox 95"/>
+            <p:cNvSpPr txBox="1"/>
+            <p:nvPr/>
+          </p:nvSpPr>
+          <p:spPr>
+            <a:xfrm>
+              <a:off x="317500" y="6477000"/>
               <a:ext cx="11977688" cy="165100"/>
             </a:xfrm>
             <a:prstGeom prst="rect">
@@ -14025,10 +14428,10 @@
         </p:nvGrpSpPr>
         <p:grpSpPr>
           <a:xfrm>
-            <a:off x="381000" y="999067"/>
-            <a:ext cx="14081125" cy="5643033"/>
-            <a:chOff x="381000" y="999067"/>
-            <a:chExt cx="14081125" cy="5643033"/>
+            <a:off x="379677" y="999067"/>
+            <a:ext cx="14082448" cy="5643033"/>
+            <a:chOff x="379677" y="999067"/>
+            <a:chExt cx="14082448" cy="5643033"/>
           </a:xfrm>
         </p:grpSpPr>
         <p:sp>
@@ -17398,14 +17801,84 @@
         </p:sp>
         <p:sp>
           <p:nvSpPr>
-            <p:cNvPr id="99" name="TextBox 98"/>
+            <p:cNvPr id="99" name="Oval 98"/>
+            <p:cNvSpPr/>
+            <p:nvPr/>
+          </p:nvSpPr>
+          <p:spPr>
+            <a:xfrm>
+              <a:off x="381000" y="6280150"/>
+              <a:ext cx="211667" cy="211667"/>
+            </a:xfrm>
+            <a:prstGeom prst="ellipse">
+              <a:avLst/>
+            </a:prstGeom>
+            <a:solidFill>
+              <a:srgbClr val="232F3E"/>
+            </a:solidFill>
+            <a:ln>
+              <a:noFill/>
+            </a:ln>
+          </p:spPr>
+          <p:txBody>
+            <a:bodyPr rtlCol="0" anchor="ctr"/>
+            <a:lstStyle/>
+            <a:p>
+              <a:pPr algn="ctr"/>
+            </a:p>
+          </p:txBody>
+        </p:sp>
+        <p:sp>
+          <p:nvSpPr>
+            <p:cNvPr id="100" name="TextBox 99"/>
             <p:cNvSpPr txBox="1"/>
             <p:nvPr/>
           </p:nvSpPr>
           <p:spPr>
             <a:xfrm>
-              <a:off x="381000" y="6307667"/>
-              <a:ext cx="12858750" cy="165100"/>
+              <a:off x="379677" y="6307667"/>
+              <a:ext cx="214312" cy="165100"/>
+            </a:xfrm>
+            <a:prstGeom prst="rect">
+              <a:avLst/>
+            </a:prstGeom>
+            <a:noFill/>
+          </p:spPr>
+          <p:txBody>
+            <a:bodyPr wrap="none" lIns="0" rIns="0" tIns="0" bIns="0" anchor="t">
+              <a:noAutofit/>
+            </a:bodyPr>
+            <a:lstStyle/>
+            <a:p>
+              <a:pPr algn="ctr">
+                <a:lnSpc>
+                  <a:spcPct val="100000"/>
+                </a:lnSpc>
+              </a:pPr>
+              <a:r>
+                <a:rPr sz="1000" b="1" lang="ko-KR">
+                  <a:solidFill>
+                    <a:srgbClr val="FFFFFF"/>
+                  </a:solidFill>
+                  <a:latin typeface="Arial"/>
+                  <a:ea typeface="Malgun Gothic"/>
+                  <a:cs typeface="Malgun Gothic"/>
+                </a:rPr>
+                <a:t>1</a:t>
+              </a:r>
+            </a:p>
+          </p:txBody>
+        </p:sp>
+        <p:sp>
+          <p:nvSpPr>
+            <p:cNvPr id="101" name="TextBox 100"/>
+            <p:cNvSpPr txBox="1"/>
+            <p:nvPr/>
+          </p:nvSpPr>
+          <p:spPr>
+            <a:xfrm>
+              <a:off x="677333" y="6307667"/>
+              <a:ext cx="912812" cy="165100"/>
             </a:xfrm>
             <a:prstGeom prst="rect">
               <a:avLst/>
@@ -17432,14 +17905,458 @@
                   <a:ea typeface="Malgun Gothic"/>
                   <a:cs typeface="Malgun Gothic"/>
                 </a:rPr>
-                <a:t>① VPC → TGW  ② Spoke RT 0.0.0.0/0 → 검사 VPC (appliance mode)  ③ 같은 AZ 방화벽에서 검사 (VPC 간은 TGW로 반환)  ④ 방화벽 → NAT (인터넷행)  ⑤ NAT → IGW</a:t>
+                <a:t>VPC → TGW</a:t>
               </a:r>
             </a:p>
           </p:txBody>
         </p:sp>
         <p:sp>
           <p:nvSpPr>
-            <p:cNvPr id="100" name="TextBox 99"/>
+            <p:cNvPr id="102" name="Oval 101"/>
+            <p:cNvSpPr/>
+            <p:nvPr/>
+          </p:nvSpPr>
+          <p:spPr>
+            <a:xfrm>
+              <a:off x="1598083" y="6280150"/>
+              <a:ext cx="211667" cy="211667"/>
+            </a:xfrm>
+            <a:prstGeom prst="ellipse">
+              <a:avLst/>
+            </a:prstGeom>
+            <a:solidFill>
+              <a:srgbClr val="232F3E"/>
+            </a:solidFill>
+            <a:ln>
+              <a:noFill/>
+            </a:ln>
+          </p:spPr>
+          <p:txBody>
+            <a:bodyPr rtlCol="0" anchor="ctr"/>
+            <a:lstStyle/>
+            <a:p>
+              <a:pPr algn="ctr"/>
+            </a:p>
+          </p:txBody>
+        </p:sp>
+        <p:sp>
+          <p:nvSpPr>
+            <p:cNvPr id="103" name="TextBox 102"/>
+            <p:cNvSpPr txBox="1"/>
+            <p:nvPr/>
+          </p:nvSpPr>
+          <p:spPr>
+            <a:xfrm>
+              <a:off x="1596760" y="6307667"/>
+              <a:ext cx="214312" cy="165100"/>
+            </a:xfrm>
+            <a:prstGeom prst="rect">
+              <a:avLst/>
+            </a:prstGeom>
+            <a:noFill/>
+          </p:spPr>
+          <p:txBody>
+            <a:bodyPr wrap="none" lIns="0" rIns="0" tIns="0" bIns="0" anchor="t">
+              <a:noAutofit/>
+            </a:bodyPr>
+            <a:lstStyle/>
+            <a:p>
+              <a:pPr algn="ctr">
+                <a:lnSpc>
+                  <a:spcPct val="100000"/>
+                </a:lnSpc>
+              </a:pPr>
+              <a:r>
+                <a:rPr sz="1000" b="1" lang="ko-KR">
+                  <a:solidFill>
+                    <a:srgbClr val="FFFFFF"/>
+                  </a:solidFill>
+                  <a:latin typeface="Arial"/>
+                  <a:ea typeface="Malgun Gothic"/>
+                  <a:cs typeface="Malgun Gothic"/>
+                </a:rPr>
+                <a:t>2</a:t>
+              </a:r>
+            </a:p>
+          </p:txBody>
+        </p:sp>
+        <p:sp>
+          <p:nvSpPr>
+            <p:cNvPr id="104" name="TextBox 103"/>
+            <p:cNvSpPr txBox="1"/>
+            <p:nvPr/>
+          </p:nvSpPr>
+          <p:spPr>
+            <a:xfrm>
+              <a:off x="1894417" y="6307667"/>
+              <a:ext cx="4111625" cy="165100"/>
+            </a:xfrm>
+            <a:prstGeom prst="rect">
+              <a:avLst/>
+            </a:prstGeom>
+            <a:noFill/>
+          </p:spPr>
+          <p:txBody>
+            <a:bodyPr wrap="none" lIns="0" rIns="0" tIns="0" bIns="0" anchor="t">
+              <a:noAutofit/>
+            </a:bodyPr>
+            <a:lstStyle/>
+            <a:p>
+              <a:pPr algn="l">
+                <a:lnSpc>
+                  <a:spcPct val="100000"/>
+                </a:lnSpc>
+              </a:pPr>
+              <a:r>
+                <a:rPr sz="1000" b="0" lang="ko-KR">
+                  <a:solidFill>
+                    <a:srgbClr val="545B64"/>
+                  </a:solidFill>
+                  <a:latin typeface="Arial"/>
+                  <a:ea typeface="Malgun Gothic"/>
+                  <a:cs typeface="Malgun Gothic"/>
+                </a:rPr>
+                <a:t>Spoke RT 0.0.0.0/0 → 검사 VPC (appliance mode)</a:t>
+              </a:r>
+            </a:p>
+          </p:txBody>
+        </p:sp>
+        <p:sp>
+          <p:nvSpPr>
+            <p:cNvPr id="105" name="Oval 104"/>
+            <p:cNvSpPr/>
+            <p:nvPr/>
+          </p:nvSpPr>
+          <p:spPr>
+            <a:xfrm>
+              <a:off x="5202767" y="6280150"/>
+              <a:ext cx="211667" cy="211667"/>
+            </a:xfrm>
+            <a:prstGeom prst="ellipse">
+              <a:avLst/>
+            </a:prstGeom>
+            <a:solidFill>
+              <a:srgbClr val="232F3E"/>
+            </a:solidFill>
+            <a:ln>
+              <a:noFill/>
+            </a:ln>
+          </p:spPr>
+          <p:txBody>
+            <a:bodyPr rtlCol="0" anchor="ctr"/>
+            <a:lstStyle/>
+            <a:p>
+              <a:pPr algn="ctr"/>
+            </a:p>
+          </p:txBody>
+        </p:sp>
+        <p:sp>
+          <p:nvSpPr>
+            <p:cNvPr id="106" name="TextBox 105"/>
+            <p:cNvSpPr txBox="1"/>
+            <p:nvPr/>
+          </p:nvSpPr>
+          <p:spPr>
+            <a:xfrm>
+              <a:off x="5201444" y="6307667"/>
+              <a:ext cx="214312" cy="165100"/>
+            </a:xfrm>
+            <a:prstGeom prst="rect">
+              <a:avLst/>
+            </a:prstGeom>
+            <a:noFill/>
+          </p:spPr>
+          <p:txBody>
+            <a:bodyPr wrap="none" lIns="0" rIns="0" tIns="0" bIns="0" anchor="t">
+              <a:noAutofit/>
+            </a:bodyPr>
+            <a:lstStyle/>
+            <a:p>
+              <a:pPr algn="ctr">
+                <a:lnSpc>
+                  <a:spcPct val="100000"/>
+                </a:lnSpc>
+              </a:pPr>
+              <a:r>
+                <a:rPr sz="1000" b="1" lang="ko-KR">
+                  <a:solidFill>
+                    <a:srgbClr val="FFFFFF"/>
+                  </a:solidFill>
+                  <a:latin typeface="Arial"/>
+                  <a:ea typeface="Malgun Gothic"/>
+                  <a:cs typeface="Malgun Gothic"/>
+                </a:rPr>
+                <a:t>3</a:t>
+              </a:r>
+            </a:p>
+          </p:txBody>
+        </p:sp>
+        <p:sp>
+          <p:nvSpPr>
+            <p:cNvPr id="107" name="TextBox 106"/>
+            <p:cNvSpPr txBox="1"/>
+            <p:nvPr/>
+          </p:nvSpPr>
+          <p:spPr>
+            <a:xfrm>
+              <a:off x="5499100" y="6307667"/>
+              <a:ext cx="3833812" cy="165100"/>
+            </a:xfrm>
+            <a:prstGeom prst="rect">
+              <a:avLst/>
+            </a:prstGeom>
+            <a:noFill/>
+          </p:spPr>
+          <p:txBody>
+            <a:bodyPr wrap="none" lIns="0" rIns="0" tIns="0" bIns="0" anchor="t">
+              <a:noAutofit/>
+            </a:bodyPr>
+            <a:lstStyle/>
+            <a:p>
+              <a:pPr algn="l">
+                <a:lnSpc>
+                  <a:spcPct val="100000"/>
+                </a:lnSpc>
+              </a:pPr>
+              <a:r>
+                <a:rPr sz="1000" b="0" lang="ko-KR">
+                  <a:solidFill>
+                    <a:srgbClr val="545B64"/>
+                  </a:solidFill>
+                  <a:latin typeface="Arial"/>
+                  <a:ea typeface="Malgun Gothic"/>
+                  <a:cs typeface="Malgun Gothic"/>
+                </a:rPr>
+                <a:t>같은 AZ 방화벽에서 검사 (VPC 간은 TGW로 반환)</a:t>
+              </a:r>
+            </a:p>
+          </p:txBody>
+        </p:sp>
+        <p:sp>
+          <p:nvSpPr>
+            <p:cNvPr id="108" name="Oval 107"/>
+            <p:cNvSpPr/>
+            <p:nvPr/>
+          </p:nvSpPr>
+          <p:spPr>
+            <a:xfrm>
+              <a:off x="8528050" y="6280150"/>
+              <a:ext cx="211667" cy="211667"/>
+            </a:xfrm>
+            <a:prstGeom prst="ellipse">
+              <a:avLst/>
+            </a:prstGeom>
+            <a:solidFill>
+              <a:srgbClr val="232F3E"/>
+            </a:solidFill>
+            <a:ln>
+              <a:noFill/>
+            </a:ln>
+          </p:spPr>
+          <p:txBody>
+            <a:bodyPr rtlCol="0" anchor="ctr"/>
+            <a:lstStyle/>
+            <a:p>
+              <a:pPr algn="ctr"/>
+            </a:p>
+          </p:txBody>
+        </p:sp>
+        <p:sp>
+          <p:nvSpPr>
+            <p:cNvPr id="109" name="TextBox 108"/>
+            <p:cNvSpPr txBox="1"/>
+            <p:nvPr/>
+          </p:nvSpPr>
+          <p:spPr>
+            <a:xfrm>
+              <a:off x="8526727" y="6307667"/>
+              <a:ext cx="214312" cy="165100"/>
+            </a:xfrm>
+            <a:prstGeom prst="rect">
+              <a:avLst/>
+            </a:prstGeom>
+            <a:noFill/>
+          </p:spPr>
+          <p:txBody>
+            <a:bodyPr wrap="none" lIns="0" rIns="0" tIns="0" bIns="0" anchor="t">
+              <a:noAutofit/>
+            </a:bodyPr>
+            <a:lstStyle/>
+            <a:p>
+              <a:pPr algn="ctr">
+                <a:lnSpc>
+                  <a:spcPct val="100000"/>
+                </a:lnSpc>
+              </a:pPr>
+              <a:r>
+                <a:rPr sz="1000" b="1" lang="ko-KR">
+                  <a:solidFill>
+                    <a:srgbClr val="FFFFFF"/>
+                  </a:solidFill>
+                  <a:latin typeface="Arial"/>
+                  <a:ea typeface="Malgun Gothic"/>
+                  <a:cs typeface="Malgun Gothic"/>
+                </a:rPr>
+                <a:t>4</a:t>
+              </a:r>
+            </a:p>
+          </p:txBody>
+        </p:sp>
+        <p:sp>
+          <p:nvSpPr>
+            <p:cNvPr id="110" name="TextBox 109"/>
+            <p:cNvSpPr txBox="1"/>
+            <p:nvPr/>
+          </p:nvSpPr>
+          <p:spPr>
+            <a:xfrm>
+              <a:off x="8824383" y="6307667"/>
+              <a:ext cx="2024062" cy="165100"/>
+            </a:xfrm>
+            <a:prstGeom prst="rect">
+              <a:avLst/>
+            </a:prstGeom>
+            <a:noFill/>
+          </p:spPr>
+          <p:txBody>
+            <a:bodyPr wrap="none" lIns="0" rIns="0" tIns="0" bIns="0" anchor="t">
+              <a:noAutofit/>
+            </a:bodyPr>
+            <a:lstStyle/>
+            <a:p>
+              <a:pPr algn="l">
+                <a:lnSpc>
+                  <a:spcPct val="100000"/>
+                </a:lnSpc>
+              </a:pPr>
+              <a:r>
+                <a:rPr sz="1000" b="0" lang="ko-KR">
+                  <a:solidFill>
+                    <a:srgbClr val="545B64"/>
+                  </a:solidFill>
+                  <a:latin typeface="Arial"/>
+                  <a:ea typeface="Malgun Gothic"/>
+                  <a:cs typeface="Malgun Gothic"/>
+                </a:rPr>
+                <a:t>방화벽 → NAT (인터넷행)</a:t>
+              </a:r>
+            </a:p>
+          </p:txBody>
+        </p:sp>
+        <p:sp>
+          <p:nvSpPr>
+            <p:cNvPr id="111" name="Oval 110"/>
+            <p:cNvSpPr/>
+            <p:nvPr/>
+          </p:nvSpPr>
+          <p:spPr>
+            <a:xfrm>
+              <a:off x="10462683" y="6280150"/>
+              <a:ext cx="211667" cy="211667"/>
+            </a:xfrm>
+            <a:prstGeom prst="ellipse">
+              <a:avLst/>
+            </a:prstGeom>
+            <a:solidFill>
+              <a:srgbClr val="232F3E"/>
+            </a:solidFill>
+            <a:ln>
+              <a:noFill/>
+            </a:ln>
+          </p:spPr>
+          <p:txBody>
+            <a:bodyPr rtlCol="0" anchor="ctr"/>
+            <a:lstStyle/>
+            <a:p>
+              <a:pPr algn="ctr"/>
+            </a:p>
+          </p:txBody>
+        </p:sp>
+        <p:sp>
+          <p:nvSpPr>
+            <p:cNvPr id="112" name="TextBox 111"/>
+            <p:cNvSpPr txBox="1"/>
+            <p:nvPr/>
+          </p:nvSpPr>
+          <p:spPr>
+            <a:xfrm>
+              <a:off x="10461360" y="6307667"/>
+              <a:ext cx="214312" cy="165100"/>
+            </a:xfrm>
+            <a:prstGeom prst="rect">
+              <a:avLst/>
+            </a:prstGeom>
+            <a:noFill/>
+          </p:spPr>
+          <p:txBody>
+            <a:bodyPr wrap="none" lIns="0" rIns="0" tIns="0" bIns="0" anchor="t">
+              <a:noAutofit/>
+            </a:bodyPr>
+            <a:lstStyle/>
+            <a:p>
+              <a:pPr algn="ctr">
+                <a:lnSpc>
+                  <a:spcPct val="100000"/>
+                </a:lnSpc>
+              </a:pPr>
+              <a:r>
+                <a:rPr sz="1000" b="1" lang="ko-KR">
+                  <a:solidFill>
+                    <a:srgbClr val="FFFFFF"/>
+                  </a:solidFill>
+                  <a:latin typeface="Arial"/>
+                  <a:ea typeface="Malgun Gothic"/>
+                  <a:cs typeface="Malgun Gothic"/>
+                </a:rPr>
+                <a:t>5</a:t>
+              </a:r>
+            </a:p>
+          </p:txBody>
+        </p:sp>
+        <p:sp>
+          <p:nvSpPr>
+            <p:cNvPr id="113" name="TextBox 112"/>
+            <p:cNvSpPr txBox="1"/>
+            <p:nvPr/>
+          </p:nvSpPr>
+          <p:spPr>
+            <a:xfrm>
+              <a:off x="10759017" y="6307667"/>
+              <a:ext cx="912812" cy="165100"/>
+            </a:xfrm>
+            <a:prstGeom prst="rect">
+              <a:avLst/>
+            </a:prstGeom>
+            <a:noFill/>
+          </p:spPr>
+          <p:txBody>
+            <a:bodyPr wrap="none" lIns="0" rIns="0" tIns="0" bIns="0" anchor="t">
+              <a:noAutofit/>
+            </a:bodyPr>
+            <a:lstStyle/>
+            <a:p>
+              <a:pPr algn="l">
+                <a:lnSpc>
+                  <a:spcPct val="100000"/>
+                </a:lnSpc>
+              </a:pPr>
+              <a:r>
+                <a:rPr sz="1000" b="0" lang="ko-KR">
+                  <a:solidFill>
+                    <a:srgbClr val="545B64"/>
+                  </a:solidFill>
+                  <a:latin typeface="Arial"/>
+                  <a:ea typeface="Malgun Gothic"/>
+                  <a:cs typeface="Malgun Gothic"/>
+                </a:rPr>
+                <a:t>NAT → IGW</a:t>
+              </a:r>
+            </a:p>
+          </p:txBody>
+        </p:sp>
+        <p:sp>
+          <p:nvSpPr>
+            <p:cNvPr id="114" name="TextBox 113"/>
             <p:cNvSpPr txBox="1"/>
             <p:nvPr/>
           </p:nvSpPr>

--- a/docs/examples/reference-architectures.pptx
+++ b/docs/examples/reference-architectures.pptx
@@ -3137,9 +3137,9 @@
         <p:grpSpPr>
           <a:xfrm>
             <a:off x="750755" y="956733"/>
-            <a:ext cx="10658078" cy="5674784"/>
+            <a:ext cx="11531203" cy="5674784"/>
             <a:chOff x="750755" y="956733"/>
-            <a:chExt cx="10658078" cy="5674784"/>
+            <a:chExt cx="11531203" cy="5674784"/>
           </a:xfrm>
         </p:grpSpPr>
         <p:pic>
@@ -5614,7 +5614,7 @@
           </p:nvSpPr>
           <p:spPr>
             <a:xfrm>
-              <a:off x="825500" y="6466417"/>
+              <a:off x="2137833" y="6466417"/>
               <a:ext cx="10144125" cy="165100"/>
             </a:xfrm>
             <a:prstGeom prst="rect">
@@ -8806,7 +8806,7 @@
           </p:nvSpPr>
           <p:spPr>
             <a:xfrm>
-              <a:off x="402167" y="6413500"/>
+              <a:off x="1778000" y="6413500"/>
               <a:ext cx="7556500" cy="165100"/>
             </a:xfrm>
             <a:prstGeom prst="rect">
@@ -8903,9 +8903,9 @@
         <p:grpSpPr>
           <a:xfrm>
             <a:off x="242755" y="935567"/>
-            <a:ext cx="12052433" cy="5706533"/>
+            <a:ext cx="13449433" cy="5706533"/>
             <a:chOff x="242755" y="935567"/>
-            <a:chExt cx="12052433" cy="5706533"/>
+            <a:chExt cx="13449433" cy="5706533"/>
           </a:xfrm>
         </p:grpSpPr>
         <p:pic>
@@ -11739,7 +11739,7 @@
           </p:nvSpPr>
           <p:spPr>
             <a:xfrm>
-              <a:off x="317500" y="6258983"/>
+              <a:off x="1714500" y="6258983"/>
               <a:ext cx="211667" cy="211667"/>
             </a:xfrm>
             <a:prstGeom prst="ellipse">
@@ -11768,7 +11768,7 @@
           </p:nvSpPr>
           <p:spPr>
             <a:xfrm>
-              <a:off x="316177" y="6286500"/>
+              <a:off x="1713177" y="6286500"/>
               <a:ext cx="214312" cy="165100"/>
             </a:xfrm>
             <a:prstGeom prst="rect">
@@ -11809,7 +11809,7 @@
           </p:nvSpPr>
           <p:spPr>
             <a:xfrm>
-              <a:off x="613833" y="6286500"/>
+              <a:off x="2010833" y="6286500"/>
               <a:ext cx="2547938" cy="165100"/>
             </a:xfrm>
             <a:prstGeom prst="rect">
@@ -11850,7 +11850,7 @@
           </p:nvSpPr>
           <p:spPr>
             <a:xfrm>
-              <a:off x="2671233" y="6258983"/>
+              <a:off x="4068233" y="6258983"/>
               <a:ext cx="211667" cy="211667"/>
             </a:xfrm>
             <a:prstGeom prst="ellipse">
@@ -11879,7 +11879,7 @@
           </p:nvSpPr>
           <p:spPr>
             <a:xfrm>
-              <a:off x="2669910" y="6286500"/>
+              <a:off x="4066910" y="6286500"/>
               <a:ext cx="214312" cy="165100"/>
             </a:xfrm>
             <a:prstGeom prst="rect">
@@ -11920,7 +11920,7 @@
           </p:nvSpPr>
           <p:spPr>
             <a:xfrm>
-              <a:off x="2967567" y="6286500"/>
+              <a:off x="4364567" y="6286500"/>
               <a:ext cx="1174750" cy="165100"/>
             </a:xfrm>
             <a:prstGeom prst="rect">
@@ -11961,7 +11961,7 @@
           </p:nvSpPr>
           <p:spPr>
             <a:xfrm>
-              <a:off x="4163483" y="6258983"/>
+              <a:off x="5560483" y="6258983"/>
               <a:ext cx="211667" cy="211667"/>
             </a:xfrm>
             <a:prstGeom prst="ellipse">
@@ -11990,7 +11990,7 @@
           </p:nvSpPr>
           <p:spPr>
             <a:xfrm>
-              <a:off x="4162160" y="6286500"/>
+              <a:off x="5559160" y="6286500"/>
               <a:ext cx="214312" cy="165100"/>
             </a:xfrm>
             <a:prstGeom prst="rect">
@@ -12031,7 +12031,7 @@
           </p:nvSpPr>
           <p:spPr>
             <a:xfrm>
-              <a:off x="4459817" y="6286500"/>
+              <a:off x="5856817" y="6286500"/>
               <a:ext cx="3738562" cy="165100"/>
             </a:xfrm>
             <a:prstGeom prst="rect">
@@ -12072,7 +12072,7 @@
           </p:nvSpPr>
           <p:spPr>
             <a:xfrm>
-              <a:off x="7526867" y="6258983"/>
+              <a:off x="8923867" y="6258983"/>
               <a:ext cx="211667" cy="211667"/>
             </a:xfrm>
             <a:prstGeom prst="ellipse">
@@ -12101,7 +12101,7 @@
           </p:nvSpPr>
           <p:spPr>
             <a:xfrm>
-              <a:off x="7525544" y="6286500"/>
+              <a:off x="8922544" y="6286500"/>
               <a:ext cx="214312" cy="165100"/>
             </a:xfrm>
             <a:prstGeom prst="rect">
@@ -12142,7 +12142,7 @@
           </p:nvSpPr>
           <p:spPr>
             <a:xfrm>
-              <a:off x="7823200" y="6286500"/>
+              <a:off x="9220200" y="6286500"/>
               <a:ext cx="1087438" cy="165100"/>
             </a:xfrm>
             <a:prstGeom prst="rect">
@@ -12183,7 +12183,7 @@
           </p:nvSpPr>
           <p:spPr>
             <a:xfrm>
-              <a:off x="317500" y="6477000"/>
+              <a:off x="1714500" y="6477000"/>
               <a:ext cx="11977688" cy="165100"/>
             </a:xfrm>
             <a:prstGeom prst="rect">
@@ -12279,10 +12279,10 @@
         </p:nvGrpSpPr>
         <p:grpSpPr>
           <a:xfrm>
-            <a:off x="398056" y="1134747"/>
-            <a:ext cx="12375554" cy="5361151"/>
-            <a:chOff x="398056" y="1134747"/>
-            <a:chExt cx="12375554" cy="5361151"/>
+            <a:off x="402167" y="1083733"/>
+            <a:ext cx="13337646" cy="5526617"/>
+            <a:chOff x="402167" y="1083733"/>
+            <a:chExt cx="13337646" cy="5526617"/>
           </a:xfrm>
         </p:grpSpPr>
         <p:sp>
@@ -12293,14 +12293,14 @@
           </p:nvSpPr>
           <p:spPr>
             <a:xfrm>
-              <a:off x="398056" y="3041123"/>
-              <a:ext cx="1821648" cy="1398009"/>
-            </a:xfrm>
-            <a:prstGeom prst="rect">
-              <a:avLst/>
-            </a:prstGeom>
-            <a:noFill/>
-            <a:ln w="21182">
+              <a:off x="402167" y="2988733"/>
+              <a:ext cx="1820333" cy="1397000"/>
+            </a:xfrm>
+            <a:prstGeom prst="rect">
+              <a:avLst/>
+            </a:prstGeom>
+            <a:noFill/>
+            <a:ln w="21167">
               <a:solidFill>
                 <a:srgbClr val="7D8998"/>
               </a:solidFill>
@@ -12338,8 +12338,8 @@
           </p:blipFill>
           <p:spPr>
             <a:xfrm>
-              <a:off x="398056" y="3041123"/>
-              <a:ext cx="254183" cy="254183"/>
+              <a:off x="402167" y="2988733"/>
+              <a:ext cx="254000" cy="254000"/>
             </a:xfrm>
             <a:prstGeom prst="rect">
               <a:avLst/>
@@ -12354,8 +12354,8 @@
           </p:nvSpPr>
           <p:spPr>
             <a:xfrm>
-              <a:off x="736967" y="3090900"/>
-              <a:ext cx="1269593" cy="192756"/>
+              <a:off x="740833" y="3038475"/>
+              <a:ext cx="1268677" cy="192617"/>
             </a:xfrm>
             <a:prstGeom prst="rect">
               <a:avLst/>
@@ -12374,7 +12374,7 @@
                 </a:lnSpc>
               </a:pPr>
               <a:r>
-                <a:rPr sz="1167" b="1" lang="ko-KR">
+                <a:rPr sz="1166" b="1" lang="ko-KR">
                   <a:solidFill>
                     <a:srgbClr val="7D8998"/>
                   </a:solidFill>
@@ -12409,8 +12409,8 @@
           </p:blipFill>
           <p:spPr>
             <a:xfrm>
-              <a:off x="1054696" y="3401216"/>
-              <a:ext cx="508367" cy="508367"/>
+              <a:off x="1058333" y="3348567"/>
+              <a:ext cx="508000" cy="508000"/>
             </a:xfrm>
             <a:prstGeom prst="rect">
               <a:avLst/>
@@ -12425,8 +12425,8 @@
           </p:nvSpPr>
           <p:spPr>
             <a:xfrm>
-              <a:off x="419238" y="3959360"/>
-              <a:ext cx="1779284" cy="192756"/>
+              <a:off x="423333" y="3906308"/>
+              <a:ext cx="1778000" cy="192617"/>
             </a:xfrm>
             <a:prstGeom prst="rect">
               <a:avLst/>
@@ -12445,7 +12445,7 @@
                 </a:lnSpc>
               </a:pPr>
               <a:r>
-                <a:rPr sz="1167" b="0" lang="ko-KR">
+                <a:rPr sz="1166" b="0" lang="ko-KR">
                   <a:solidFill>
                     <a:srgbClr val="232F3E"/>
                   </a:solidFill>
@@ -12466,8 +12466,8 @@
           </p:nvSpPr>
           <p:spPr>
             <a:xfrm>
-              <a:off x="633705" y="4148939"/>
-              <a:ext cx="1350349" cy="165219"/>
+              <a:off x="637646" y="4095750"/>
+              <a:ext cx="1349375" cy="165100"/>
             </a:xfrm>
             <a:prstGeom prst="rect">
               <a:avLst/>
@@ -12521,8 +12521,8 @@
           </p:blipFill>
           <p:spPr>
             <a:xfrm>
-              <a:off x="2579796" y="3401216"/>
-              <a:ext cx="508367" cy="508367"/>
+              <a:off x="2582333" y="3348567"/>
+              <a:ext cx="508000" cy="508000"/>
             </a:xfrm>
             <a:prstGeom prst="rect">
               <a:avLst/>
@@ -12537,8 +12537,8 @@
           </p:nvSpPr>
           <p:spPr>
             <a:xfrm>
-              <a:off x="2352090" y="3959360"/>
-              <a:ext cx="963779" cy="192756"/>
+              <a:off x="2354792" y="3906308"/>
+              <a:ext cx="963083" cy="192617"/>
             </a:xfrm>
             <a:prstGeom prst="rect">
               <a:avLst/>
@@ -12557,7 +12557,7 @@
                 </a:lnSpc>
               </a:pPr>
               <a:r>
-                <a:rPr sz="1167" b="0" lang="ko-KR">
+                <a:rPr sz="1166" b="0" lang="ko-KR">
                   <a:solidFill>
                     <a:srgbClr val="232F3E"/>
                   </a:solidFill>
@@ -12578,13 +12578,13 @@
           </p:nvCxnSpPr>
           <p:spPr>
             <a:xfrm>
-              <a:off x="1605427" y="3655399"/>
-              <a:ext cx="932005" cy="0"/>
+              <a:off x="1608667" y="3602567"/>
+              <a:ext cx="931333" cy="0"/>
             </a:xfrm>
             <a:prstGeom prst="line">
               <a:avLst/>
             </a:prstGeom>
-            <a:ln w="15886">
+            <a:ln w="15875">
               <a:solidFill>
                 <a:srgbClr val="232F3E"/>
               </a:solidFill>
@@ -12601,13 +12601,13 @@
           </p:nvCxnSpPr>
           <p:spPr>
             <a:xfrm>
-              <a:off x="3130527" y="3655399"/>
-              <a:ext cx="529549" cy="0"/>
+              <a:off x="3132667" y="3602567"/>
+              <a:ext cx="529166" cy="0"/>
             </a:xfrm>
             <a:prstGeom prst="line">
               <a:avLst/>
             </a:prstGeom>
-            <a:ln w="15886">
+            <a:ln w="15875">
               <a:solidFill>
                 <a:srgbClr val="232F3E"/>
               </a:solidFill>
@@ -12624,8 +12624,8 @@
           </p:nvSpPr>
           <p:spPr>
             <a:xfrm>
-              <a:off x="3113317" y="3439343"/>
-              <a:ext cx="563969" cy="165219"/>
+              <a:off x="3115469" y="3386667"/>
+              <a:ext cx="563562" cy="165100"/>
             </a:xfrm>
             <a:prstGeom prst="rect">
               <a:avLst/>
@@ -12679,8 +12679,8 @@
           </p:blipFill>
           <p:spPr>
             <a:xfrm>
-              <a:off x="3702440" y="3401216"/>
-              <a:ext cx="508367" cy="508367"/>
+              <a:off x="3704167" y="3348567"/>
+              <a:ext cx="508000" cy="508000"/>
             </a:xfrm>
             <a:prstGeom prst="rect">
               <a:avLst/>
@@ -12695,8 +12695,8 @@
           </p:nvSpPr>
           <p:spPr>
             <a:xfrm>
-              <a:off x="3066981" y="3959360"/>
-              <a:ext cx="1779284" cy="192756"/>
+              <a:off x="3069167" y="3906308"/>
+              <a:ext cx="1778000" cy="192617"/>
             </a:xfrm>
             <a:prstGeom prst="rect">
               <a:avLst/>
@@ -12715,7 +12715,7 @@
                 </a:lnSpc>
               </a:pPr>
               <a:r>
-                <a:rPr sz="1167" b="0" lang="ko-KR">
+                <a:rPr sz="1166" b="0" lang="ko-KR">
                   <a:solidFill>
                     <a:srgbClr val="232F3E"/>
                   </a:solidFill>
@@ -12736,13 +12736,13 @@
           </p:nvCxnSpPr>
           <p:spPr>
             <a:xfrm>
-              <a:off x="4253170" y="3655399"/>
-              <a:ext cx="1821648" cy="0"/>
+              <a:off x="4254500" y="3602567"/>
+              <a:ext cx="1820333" cy="0"/>
             </a:xfrm>
             <a:prstGeom prst="line">
               <a:avLst/>
             </a:prstGeom>
-            <a:ln w="15886">
+            <a:ln w="15875">
               <a:solidFill>
                 <a:srgbClr val="232F3E"/>
               </a:solidFill>
@@ -12759,14 +12759,14 @@
           </p:nvSpPr>
           <p:spPr>
             <a:xfrm>
-              <a:off x="4761537" y="1134747"/>
-              <a:ext cx="7032407" cy="4935394"/>
-            </a:xfrm>
-            <a:prstGeom prst="rect">
-              <a:avLst/>
-            </a:prstGeom>
-            <a:noFill/>
-            <a:ln w="21182">
+              <a:off x="4762500" y="1083733"/>
+              <a:ext cx="7027333" cy="4931833"/>
+            </a:xfrm>
+            <a:prstGeom prst="rect">
+              <a:avLst/>
+            </a:prstGeom>
+            <a:noFill/>
+            <a:ln w="21167">
               <a:solidFill>
                 <a:srgbClr val="232F3E"/>
               </a:solidFill>
@@ -12804,8 +12804,8 @@
           </p:blipFill>
           <p:spPr>
             <a:xfrm>
-              <a:off x="4761537" y="1134747"/>
-              <a:ext cx="338911" cy="338911"/>
+              <a:off x="4762500" y="1083733"/>
+              <a:ext cx="338667" cy="338667"/>
             </a:xfrm>
             <a:prstGeom prst="rect">
               <a:avLst/>
@@ -12820,8 +12820,8 @@
           </p:nvSpPr>
           <p:spPr>
             <a:xfrm>
-              <a:off x="5206358" y="1216827"/>
-              <a:ext cx="1141839" cy="206524"/>
+              <a:off x="5207000" y="1165754"/>
+              <a:ext cx="1141016" cy="206375"/>
             </a:xfrm>
             <a:prstGeom prst="rect">
               <a:avLst/>
@@ -12861,14 +12861,14 @@
           </p:nvSpPr>
           <p:spPr>
             <a:xfrm>
-              <a:off x="4973357" y="1558386"/>
-              <a:ext cx="3050201" cy="4299936"/>
-            </a:xfrm>
-            <a:prstGeom prst="rect">
-              <a:avLst/>
-            </a:prstGeom>
-            <a:noFill/>
-            <a:ln w="21182">
+              <a:off x="4974167" y="1507067"/>
+              <a:ext cx="3048000" cy="4296833"/>
+            </a:xfrm>
+            <a:prstGeom prst="rect">
+              <a:avLst/>
+            </a:prstGeom>
+            <a:noFill/>
+            <a:ln w="21167">
               <a:solidFill>
                 <a:srgbClr val="00A4A6"/>
               </a:solidFill>
@@ -12908,8 +12908,8 @@
           </p:blipFill>
           <p:spPr>
             <a:xfrm>
-              <a:off x="4973357" y="1558386"/>
-              <a:ext cx="254183" cy="254183"/>
+              <a:off x="4974167" y="1507067"/>
+              <a:ext cx="254000" cy="254000"/>
             </a:xfrm>
             <a:prstGeom prst="rect">
               <a:avLst/>
@@ -12924,8 +12924,8 @@
           </p:nvSpPr>
           <p:spPr>
             <a:xfrm>
-              <a:off x="5312268" y="1608164"/>
-              <a:ext cx="2288974" cy="192756"/>
+              <a:off x="5312833" y="1556808"/>
+              <a:ext cx="2287323" cy="192617"/>
             </a:xfrm>
             <a:prstGeom prst="rect">
               <a:avLst/>
@@ -12944,7 +12944,7 @@
                 </a:lnSpc>
               </a:pPr>
               <a:r>
-                <a:rPr sz="1167" b="1" lang="ko-KR">
+                <a:rPr sz="1166" b="1" lang="ko-KR">
                   <a:solidFill>
                     <a:srgbClr val="00A4A6"/>
                   </a:solidFill>
@@ -12979,8 +12979,8 @@
           </p:blipFill>
           <p:spPr>
             <a:xfrm>
-              <a:off x="6117182" y="3401216"/>
-              <a:ext cx="508367" cy="508367"/>
+              <a:off x="6117167" y="3348567"/>
+              <a:ext cx="508000" cy="508000"/>
             </a:xfrm>
             <a:prstGeom prst="rect">
               <a:avLst/>
@@ -12995,8 +12995,8 @@
           </p:nvSpPr>
           <p:spPr>
             <a:xfrm>
-              <a:off x="5430754" y="3959360"/>
-              <a:ext cx="1881222" cy="192756"/>
+              <a:off x="5431234" y="3906308"/>
+              <a:ext cx="1879865" cy="192617"/>
             </a:xfrm>
             <a:prstGeom prst="rect">
               <a:avLst/>
@@ -13015,7 +13015,7 @@
                 </a:lnSpc>
               </a:pPr>
               <a:r>
-                <a:rPr sz="1167" b="0" lang="ko-KR">
+                <a:rPr sz="1166" b="0" lang="ko-KR">
                   <a:solidFill>
                     <a:srgbClr val="232F3E"/>
                   </a:solidFill>
@@ -13050,8 +13050,8 @@
           </p:blipFill>
           <p:spPr>
             <a:xfrm>
-              <a:off x="5481723" y="1982025"/>
-              <a:ext cx="508367" cy="508367"/>
+              <a:off x="5482167" y="1930400"/>
+              <a:ext cx="508000" cy="508000"/>
             </a:xfrm>
             <a:prstGeom prst="rect">
               <a:avLst/>
@@ -13066,8 +13066,8 @@
           </p:nvSpPr>
           <p:spPr>
             <a:xfrm>
-              <a:off x="5050141" y="2540170"/>
-              <a:ext cx="1371531" cy="192756"/>
+              <a:off x="5050896" y="2488142"/>
+              <a:ext cx="1370542" cy="192617"/>
             </a:xfrm>
             <a:prstGeom prst="rect">
               <a:avLst/>
@@ -13086,7 +13086,7 @@
                 </a:lnSpc>
               </a:pPr>
               <a:r>
-                <a:rPr sz="1167" b="0" lang="ko-KR">
+                <a:rPr sz="1166" b="0" lang="ko-KR">
                   <a:solidFill>
                     <a:srgbClr val="232F3E"/>
                   </a:solidFill>
@@ -13107,8 +13107,8 @@
           </p:nvSpPr>
           <p:spPr>
             <a:xfrm>
-              <a:off x="5191796" y="2729748"/>
-              <a:ext cx="1088223" cy="165219"/>
+              <a:off x="5192448" y="2677583"/>
+              <a:ext cx="1087438" cy="165100"/>
             </a:xfrm>
             <a:prstGeom prst="rect">
               <a:avLst/>
@@ -13162,8 +13162,8 @@
           </p:blipFill>
           <p:spPr>
             <a:xfrm>
-              <a:off x="6752640" y="1982025"/>
-              <a:ext cx="508367" cy="508367"/>
+              <a:off x="6752167" y="1930400"/>
+              <a:ext cx="508000" cy="508000"/>
             </a:xfrm>
             <a:prstGeom prst="rect">
               <a:avLst/>
@@ -13178,8 +13178,8 @@
           </p:nvSpPr>
           <p:spPr>
             <a:xfrm>
-              <a:off x="6524934" y="2540170"/>
-              <a:ext cx="963779" cy="192756"/>
+              <a:off x="6524625" y="2488142"/>
+              <a:ext cx="963083" cy="192617"/>
             </a:xfrm>
             <a:prstGeom prst="rect">
               <a:avLst/>
@@ -13198,7 +13198,7 @@
                 </a:lnSpc>
               </a:pPr>
               <a:r>
-                <a:rPr sz="1167" b="0" lang="ko-KR">
+                <a:rPr sz="1166" b="0" lang="ko-KR">
                   <a:solidFill>
                     <a:srgbClr val="232F3E"/>
                   </a:solidFill>
@@ -13219,8 +13219,8 @@
           </p:nvSpPr>
           <p:spPr>
             <a:xfrm>
-              <a:off x="6462712" y="2729748"/>
-              <a:ext cx="1088223" cy="165219"/>
+              <a:off x="6462448" y="2677583"/>
+              <a:ext cx="1087438" cy="165100"/>
             </a:xfrm>
             <a:prstGeom prst="rect">
               <a:avLst/>
@@ -13274,8 +13274,8 @@
           </p:blipFill>
           <p:spPr>
             <a:xfrm>
-              <a:off x="5481723" y="4820406"/>
-              <a:ext cx="508367" cy="508367"/>
+              <a:off x="5482167" y="4766733"/>
+              <a:ext cx="508000" cy="508000"/>
             </a:xfrm>
             <a:prstGeom prst="rect">
               <a:avLst/>
@@ -13290,8 +13290,8 @@
           </p:nvSpPr>
           <p:spPr>
             <a:xfrm>
-              <a:off x="5304987" y="5378551"/>
-              <a:ext cx="861841" cy="192756"/>
+              <a:off x="5305557" y="5324475"/>
+              <a:ext cx="861219" cy="192617"/>
             </a:xfrm>
             <a:prstGeom prst="rect">
               <a:avLst/>
@@ -13310,7 +13310,7 @@
                 </a:lnSpc>
               </a:pPr>
               <a:r>
-                <a:rPr sz="1167" b="0" lang="ko-KR">
+                <a:rPr sz="1166" b="0" lang="ko-KR">
                   <a:solidFill>
                     <a:srgbClr val="232F3E"/>
                   </a:solidFill>
@@ -13331,8 +13331,8 @@
           </p:nvSpPr>
           <p:spPr>
             <a:xfrm>
-              <a:off x="5191796" y="5568129"/>
-              <a:ext cx="1088223" cy="165219"/>
+              <a:off x="5192448" y="5513917"/>
+              <a:ext cx="1087438" cy="165100"/>
             </a:xfrm>
             <a:prstGeom prst="rect">
               <a:avLst/>
@@ -13386,8 +13386,8 @@
           </p:blipFill>
           <p:spPr>
             <a:xfrm>
-              <a:off x="6752640" y="4820406"/>
-              <a:ext cx="508367" cy="508367"/>
+              <a:off x="6752167" y="4766733"/>
+              <a:ext cx="508000" cy="508000"/>
             </a:xfrm>
             <a:prstGeom prst="rect">
               <a:avLst/>
@@ -13402,8 +13402,8 @@
           </p:nvSpPr>
           <p:spPr>
             <a:xfrm>
-              <a:off x="6524934" y="5378551"/>
-              <a:ext cx="963779" cy="192756"/>
+              <a:off x="6524625" y="5324475"/>
+              <a:ext cx="963083" cy="192617"/>
             </a:xfrm>
             <a:prstGeom prst="rect">
               <a:avLst/>
@@ -13422,7 +13422,7 @@
                 </a:lnSpc>
               </a:pPr>
               <a:r>
-                <a:rPr sz="1167" b="0" lang="ko-KR">
+                <a:rPr sz="1166" b="0" lang="ko-KR">
                   <a:solidFill>
                     <a:srgbClr val="232F3E"/>
                   </a:solidFill>
@@ -13443,8 +13443,8 @@
           </p:nvSpPr>
           <p:spPr>
             <a:xfrm>
-              <a:off x="6462712" y="5568129"/>
-              <a:ext cx="1088223" cy="165219"/>
+              <a:off x="6462448" y="5513917"/>
+              <a:ext cx="1087438" cy="165100"/>
             </a:xfrm>
             <a:prstGeom prst="rect">
               <a:avLst/>
@@ -13484,8 +13484,8 @@
           </p:nvSpPr>
           <p:spPr>
             <a:xfrm>
-              <a:off x="5735907" y="2935213"/>
-              <a:ext cx="529549" cy="423639"/>
+              <a:off x="5736167" y="2882900"/>
+              <a:ext cx="529166" cy="423333"/>
             </a:xfrm>
             <a:custGeom>
               <a:avLst/>
@@ -13494,15 +13494,15 @@
               <a:cxnLst/>
               <a:rect l="l" t="t" r="r" b="b"/>
               <a:pathLst>
-                <a:path w="529549" h="423639">
+                <a:path w="529166" h="423333">
                   <a:moveTo>
-                    <a:pt x="529549" y="423639"/>
+                    <a:pt x="529166" y="423333"/>
                   </a:moveTo>
                   <a:lnTo>
-                    <a:pt x="529549" y="211819"/>
+                    <a:pt x="529166" y="211667"/>
                   </a:lnTo>
                   <a:lnTo>
-                    <a:pt x="0" y="211819"/>
+                    <a:pt x="0" y="211667"/>
                   </a:lnTo>
                   <a:lnTo>
                     <a:pt x="0" y="0"/>
@@ -13511,7 +13511,7 @@
               </a:pathLst>
             </a:custGeom>
             <a:noFill/>
-            <a:ln w="15886">
+            <a:ln w="15875">
               <a:solidFill>
                 <a:srgbClr val="232F3E"/>
               </a:solidFill>
@@ -13535,8 +13535,8 @@
           </p:nvSpPr>
           <p:spPr>
             <a:xfrm>
-              <a:off x="6477275" y="2935213"/>
-              <a:ext cx="529549" cy="423639"/>
+              <a:off x="6477000" y="2882900"/>
+              <a:ext cx="529167" cy="423333"/>
             </a:xfrm>
             <a:custGeom>
               <a:avLst/>
@@ -13545,24 +13545,24 @@
               <a:cxnLst/>
               <a:rect l="l" t="t" r="r" b="b"/>
               <a:pathLst>
-                <a:path w="529549" h="423639">
+                <a:path w="529167" h="423333">
                   <a:moveTo>
-                    <a:pt x="0" y="423639"/>
+                    <a:pt x="0" y="423333"/>
                   </a:moveTo>
                   <a:lnTo>
-                    <a:pt x="0" y="211819"/>
+                    <a:pt x="0" y="211667"/>
                   </a:lnTo>
                   <a:lnTo>
-                    <a:pt x="529549" y="211819"/>
+                    <a:pt x="529167" y="211667"/>
                   </a:lnTo>
                   <a:lnTo>
-                    <a:pt x="529549" y="0"/>
+                    <a:pt x="529167" y="0"/>
                   </a:lnTo>
                 </a:path>
               </a:pathLst>
             </a:custGeom>
             <a:noFill/>
-            <a:ln w="15886">
+            <a:ln w="15875">
               <a:solidFill>
                 <a:srgbClr val="232F3E"/>
               </a:solidFill>
@@ -13586,8 +13586,8 @@
           </p:nvSpPr>
           <p:spPr>
             <a:xfrm>
-              <a:off x="5735907" y="4184948"/>
-              <a:ext cx="529549" cy="593095"/>
+              <a:off x="5736167" y="4131733"/>
+              <a:ext cx="529166" cy="592667"/>
             </a:xfrm>
             <a:custGeom>
               <a:avLst/>
@@ -13596,24 +13596,24 @@
               <a:cxnLst/>
               <a:rect l="l" t="t" r="r" b="b"/>
               <a:pathLst>
-                <a:path w="529549" h="593095">
+                <a:path w="529166" h="592667">
                   <a:moveTo>
-                    <a:pt x="529549" y="0"/>
+                    <a:pt x="529166" y="0"/>
                   </a:moveTo>
                   <a:lnTo>
-                    <a:pt x="529549" y="296547"/>
+                    <a:pt x="529166" y="296334"/>
                   </a:lnTo>
                   <a:lnTo>
-                    <a:pt x="0" y="296547"/>
+                    <a:pt x="0" y="296334"/>
                   </a:lnTo>
                   <a:lnTo>
-                    <a:pt x="0" y="593095"/>
+                    <a:pt x="0" y="592667"/>
                   </a:lnTo>
                 </a:path>
               </a:pathLst>
             </a:custGeom>
             <a:noFill/>
-            <a:ln w="15886">
+            <a:ln w="15875">
               <a:solidFill>
                 <a:srgbClr val="232F3E"/>
               </a:solidFill>
@@ -13637,8 +13637,8 @@
           </p:nvSpPr>
           <p:spPr>
             <a:xfrm>
-              <a:off x="6477275" y="4184948"/>
-              <a:ext cx="529549" cy="593095"/>
+              <a:off x="6477000" y="4131733"/>
+              <a:ext cx="529167" cy="592667"/>
             </a:xfrm>
             <a:custGeom>
               <a:avLst/>
@@ -13647,24 +13647,24 @@
               <a:cxnLst/>
               <a:rect l="l" t="t" r="r" b="b"/>
               <a:pathLst>
-                <a:path w="529549" h="593095">
+                <a:path w="529167" h="592667">
                   <a:moveTo>
                     <a:pt x="0" y="0"/>
                   </a:moveTo>
                   <a:lnTo>
-                    <a:pt x="0" y="296547"/>
+                    <a:pt x="0" y="296334"/>
                   </a:lnTo>
                   <a:lnTo>
-                    <a:pt x="529549" y="296547"/>
+                    <a:pt x="529167" y="296334"/>
                   </a:lnTo>
                   <a:lnTo>
-                    <a:pt x="529549" y="593095"/>
+                    <a:pt x="529167" y="592667"/>
                   </a:lnTo>
                 </a:path>
               </a:pathLst>
             </a:custGeom>
             <a:noFill/>
-            <a:ln w="15886">
+            <a:ln w="15875">
               <a:solidFill>
                 <a:srgbClr val="232F3E"/>
               </a:solidFill>
@@ -13688,14 +13688,14 @@
           </p:nvSpPr>
           <p:spPr>
             <a:xfrm>
-              <a:off x="9125019" y="1558386"/>
-              <a:ext cx="2457106" cy="4299936"/>
-            </a:xfrm>
-            <a:prstGeom prst="rect">
-              <a:avLst/>
-            </a:prstGeom>
-            <a:noFill/>
-            <a:ln w="21182">
+              <a:off x="9122833" y="1507067"/>
+              <a:ext cx="2455333" cy="4296833"/>
+            </a:xfrm>
+            <a:prstGeom prst="rect">
+              <a:avLst/>
+            </a:prstGeom>
+            <a:noFill/>
+            <a:ln w="21167">
               <a:solidFill>
                 <a:srgbClr val="00A4A6"/>
               </a:solidFill>
@@ -13735,8 +13735,8 @@
           </p:blipFill>
           <p:spPr>
             <a:xfrm>
-              <a:off x="9125019" y="1558386"/>
-              <a:ext cx="254183" cy="254183"/>
+              <a:off x="9122833" y="1507067"/>
+              <a:ext cx="254000" cy="254000"/>
             </a:xfrm>
             <a:prstGeom prst="rect">
               <a:avLst/>
@@ -13751,8 +13751,8 @@
           </p:nvSpPr>
           <p:spPr>
             <a:xfrm>
-              <a:off x="9463930" y="1608164"/>
-              <a:ext cx="2288974" cy="192756"/>
+              <a:off x="9461500" y="1556808"/>
+              <a:ext cx="2287323" cy="192617"/>
             </a:xfrm>
             <a:prstGeom prst="rect">
               <a:avLst/>
@@ -13771,7 +13771,7 @@
                 </a:lnSpc>
               </a:pPr>
               <a:r>
-                <a:rPr sz="1167" b="1" lang="ko-KR">
+                <a:rPr sz="1166" b="1" lang="ko-KR">
                   <a:solidFill>
                     <a:srgbClr val="00A4A6"/>
                   </a:solidFill>
@@ -13806,8 +13806,8 @@
           </p:blipFill>
           <p:spPr>
             <a:xfrm>
-              <a:off x="10057025" y="3401216"/>
-              <a:ext cx="508367" cy="508367"/>
+              <a:off x="10054167" y="3348567"/>
+              <a:ext cx="508000" cy="508000"/>
             </a:xfrm>
             <a:prstGeom prst="rect">
               <a:avLst/>
@@ -13822,8 +13822,8 @@
           </p:nvSpPr>
           <p:spPr>
             <a:xfrm>
-              <a:off x="9370597" y="3959360"/>
-              <a:ext cx="1881222" cy="192756"/>
+              <a:off x="9368234" y="3906308"/>
+              <a:ext cx="1879865" cy="192617"/>
             </a:xfrm>
             <a:prstGeom prst="rect">
               <a:avLst/>
@@ -13842,7 +13842,7 @@
                 </a:lnSpc>
               </a:pPr>
               <a:r>
-                <a:rPr sz="1167" b="0" lang="ko-KR">
+                <a:rPr sz="1166" b="0" lang="ko-KR">
                   <a:solidFill>
                     <a:srgbClr val="232F3E"/>
                   </a:solidFill>
@@ -13877,8 +13877,8 @@
           </p:blipFill>
           <p:spPr>
             <a:xfrm>
-              <a:off x="10057025" y="1982025"/>
-              <a:ext cx="508367" cy="508367"/>
+              <a:off x="10054167" y="1930400"/>
+              <a:ext cx="508000" cy="508000"/>
             </a:xfrm>
             <a:prstGeom prst="rect">
               <a:avLst/>
@@ -13893,8 +13893,8 @@
           </p:nvSpPr>
           <p:spPr>
             <a:xfrm>
-              <a:off x="9931257" y="2540170"/>
-              <a:ext cx="759902" cy="192756"/>
+              <a:off x="9928490" y="2488142"/>
+              <a:ext cx="759354" cy="192617"/>
             </a:xfrm>
             <a:prstGeom prst="rect">
               <a:avLst/>
@@ -13913,7 +13913,7 @@
                 </a:lnSpc>
               </a:pPr>
               <a:r>
-                <a:rPr sz="1167" b="0" lang="ko-KR">
+                <a:rPr sz="1166" b="0" lang="ko-KR">
                   <a:solidFill>
                     <a:srgbClr val="232F3E"/>
                   </a:solidFill>
@@ -13934,8 +13934,8 @@
           </p:nvSpPr>
           <p:spPr>
             <a:xfrm>
-              <a:off x="9723409" y="2729748"/>
-              <a:ext cx="1175598" cy="165219"/>
+              <a:off x="9720792" y="2677583"/>
+              <a:ext cx="1174750" cy="165100"/>
             </a:xfrm>
             <a:prstGeom prst="rect">
               <a:avLst/>
@@ -13989,8 +13989,8 @@
           </p:blipFill>
           <p:spPr>
             <a:xfrm>
-              <a:off x="10057025" y="4820406"/>
-              <a:ext cx="508367" cy="508367"/>
+              <a:off x="10054167" y="4766733"/>
+              <a:ext cx="508000" cy="508000"/>
             </a:xfrm>
             <a:prstGeom prst="rect">
               <a:avLst/>
@@ -14005,8 +14005,8 @@
           </p:nvSpPr>
           <p:spPr>
             <a:xfrm>
-              <a:off x="9574473" y="5378551"/>
-              <a:ext cx="1473469" cy="192756"/>
+              <a:off x="9571964" y="5324475"/>
+              <a:ext cx="1472406" cy="192617"/>
             </a:xfrm>
             <a:prstGeom prst="rect">
               <a:avLst/>
@@ -14025,7 +14025,7 @@
                 </a:lnSpc>
               </a:pPr>
               <a:r>
-                <a:rPr sz="1167" b="0" lang="ko-KR">
+                <a:rPr sz="1166" b="0" lang="ko-KR">
                   <a:solidFill>
                     <a:srgbClr val="232F3E"/>
                   </a:solidFill>
@@ -14046,8 +14046,8 @@
           </p:nvSpPr>
           <p:spPr>
             <a:xfrm>
-              <a:off x="9723409" y="5568129"/>
-              <a:ext cx="1175598" cy="165219"/>
+              <a:off x="9720792" y="5513917"/>
+              <a:ext cx="1174750" cy="165100"/>
             </a:xfrm>
             <a:prstGeom prst="rect">
               <a:avLst/>
@@ -14087,13 +14087,13 @@
           </p:nvCxnSpPr>
           <p:spPr>
             <a:xfrm flipV="1">
-              <a:off x="10311208" y="2935213"/>
-              <a:ext cx="0" cy="423639"/>
+              <a:off x="10308167" y="2882900"/>
+              <a:ext cx="0" cy="423333"/>
             </a:xfrm>
             <a:prstGeom prst="line">
               <a:avLst/>
             </a:prstGeom>
-            <a:ln w="15886">
+            <a:ln w="15875">
               <a:solidFill>
                 <a:srgbClr val="232F3E"/>
               </a:solidFill>
@@ -14110,13 +14110,13 @@
           </p:nvCxnSpPr>
           <p:spPr>
             <a:xfrm>
-              <a:off x="10311208" y="4184948"/>
-              <a:ext cx="0" cy="593095"/>
+              <a:off x="10308167" y="4131733"/>
+              <a:ext cx="0" cy="592667"/>
             </a:xfrm>
             <a:prstGeom prst="line">
               <a:avLst/>
             </a:prstGeom>
-            <a:ln w="15886">
+            <a:ln w="15875">
               <a:solidFill>
                 <a:srgbClr val="232F3E"/>
               </a:solidFill>
@@ -14133,13 +14133,13 @@
           </p:nvCxnSpPr>
           <p:spPr>
             <a:xfrm>
-              <a:off x="6667913" y="3655399"/>
-              <a:ext cx="1609828" cy="0"/>
+              <a:off x="6667500" y="3602567"/>
+              <a:ext cx="1608667" cy="0"/>
             </a:xfrm>
             <a:prstGeom prst="line">
               <a:avLst/>
             </a:prstGeom>
-            <a:ln w="15886">
+            <a:ln w="15875">
               <a:solidFill>
                 <a:srgbClr val="232F3E"/>
               </a:solidFill>
@@ -14156,13 +14156,13 @@
           </p:nvCxnSpPr>
           <p:spPr>
             <a:xfrm>
-              <a:off x="8870835" y="3655399"/>
-              <a:ext cx="1143826" cy="0"/>
+              <a:off x="8868833" y="3602567"/>
+              <a:ext cx="1143000" cy="0"/>
             </a:xfrm>
             <a:prstGeom prst="line">
               <a:avLst/>
             </a:prstGeom>
-            <a:ln w="15886">
+            <a:ln w="15875">
               <a:solidFill>
                 <a:srgbClr val="232F3E"/>
               </a:solidFill>
@@ -14193,8 +14193,8 @@
           </p:blipFill>
           <p:spPr>
             <a:xfrm>
-              <a:off x="8320105" y="3401216"/>
-              <a:ext cx="508367" cy="508367"/>
+              <a:off x="8318500" y="3348567"/>
+              <a:ext cx="508000" cy="508000"/>
             </a:xfrm>
             <a:prstGeom prst="rect">
               <a:avLst/>
@@ -14209,8 +14209,8 @@
           </p:nvSpPr>
           <p:spPr>
             <a:xfrm>
-              <a:off x="7939492" y="3959360"/>
-              <a:ext cx="1269593" cy="192756"/>
+              <a:off x="7938161" y="3906308"/>
+              <a:ext cx="1268677" cy="192617"/>
             </a:xfrm>
             <a:prstGeom prst="rect">
               <a:avLst/>
@@ -14229,7 +14229,7 @@
                 </a:lnSpc>
               </a:pPr>
               <a:r>
-                <a:rPr sz="1167" b="0" lang="ko-KR">
+                <a:rPr sz="1166" b="0" lang="ko-KR">
                   <a:solidFill>
                     <a:srgbClr val="232F3E"/>
                   </a:solidFill>
@@ -14250,8 +14250,8 @@
           </p:nvSpPr>
           <p:spPr>
             <a:xfrm>
-              <a:off x="8177127" y="4148939"/>
-              <a:ext cx="794323" cy="165219"/>
+              <a:off x="8175625" y="4095750"/>
+              <a:ext cx="793750" cy="165100"/>
             </a:xfrm>
             <a:prstGeom prst="rect">
               <a:avLst/>
@@ -14291,8 +14291,8 @@
           </p:nvSpPr>
           <p:spPr>
             <a:xfrm>
-              <a:off x="398056" y="6161224"/>
-              <a:ext cx="8983794" cy="165219"/>
+              <a:off x="4762500" y="6106583"/>
+              <a:ext cx="8977313" cy="165100"/>
             </a:xfrm>
             <a:prstGeom prst="rect">
               <a:avLst/>
@@ -14332,8 +14332,8 @@
           </p:nvSpPr>
           <p:spPr>
             <a:xfrm>
-              <a:off x="398056" y="6330679"/>
-              <a:ext cx="12375554" cy="165219"/>
+              <a:off x="4762500" y="6275917"/>
+              <a:ext cx="4572000" cy="165100"/>
             </a:xfrm>
             <a:prstGeom prst="rect">
               <a:avLst/>
@@ -14360,7 +14360,48 @@
                   <a:ea typeface="Malgun Gothic"/>
                   <a:cs typeface="Malgun Gothic"/>
                 </a:rPr>
-                <a:t>라우팅: VPC 서브넷 10.0.0.0/8 · 192.168.0.0/16 → TGW · TGW A 10.16.0.0/13 → peering · TGW B 10.0.0.0/13 · 192.168.0.0/16 → peering (정적 경로)</a:t>
+                <a:t>라우팅: VPC 서브넷 10.0.0.0/8 · 192.168.0.0/16 → TGW</a:t>
+              </a:r>
+            </a:p>
+          </p:txBody>
+        </p:sp>
+        <p:sp>
+          <p:nvSpPr>
+            <p:cNvPr id="62" name="TextBox 61"/>
+            <p:cNvSpPr txBox="1"/>
+            <p:nvPr/>
+          </p:nvSpPr>
+          <p:spPr>
+            <a:xfrm>
+              <a:off x="4762500" y="6445250"/>
+              <a:ext cx="7659688" cy="165100"/>
+            </a:xfrm>
+            <a:prstGeom prst="rect">
+              <a:avLst/>
+            </a:prstGeom>
+            <a:noFill/>
+          </p:spPr>
+          <p:txBody>
+            <a:bodyPr wrap="none" lIns="0" rIns="0" tIns="0" bIns="0" anchor="t">
+              <a:noAutofit/>
+            </a:bodyPr>
+            <a:lstStyle/>
+            <a:p>
+              <a:pPr algn="l">
+                <a:lnSpc>
+                  <a:spcPct val="100000"/>
+                </a:lnSpc>
+              </a:pPr>
+              <a:r>
+                <a:rPr sz="1000" b="0" lang="ko-KR">
+                  <a:solidFill>
+                    <a:srgbClr val="545B64"/>
+                  </a:solidFill>
+                  <a:latin typeface="Arial"/>
+                  <a:ea typeface="Malgun Gothic"/>
+                  <a:cs typeface="Malgun Gothic"/>
+                </a:rPr>
+                <a:t>TGW RT: A 10.16.0.0/13 → peering · B 10.0.0.0/13 · 192.168.0.0/16 → peering (정적 경로)</a:t>
               </a:r>
             </a:p>
           </p:txBody>

--- a/docs/examples/reference-architectures.pptx
+++ b/docs/examples/reference-architectures.pptx
@@ -12279,10 +12279,10 @@
         </p:nvGrpSpPr>
         <p:grpSpPr>
           <a:xfrm>
-            <a:off x="402167" y="1083733"/>
-            <a:ext cx="13337646" cy="5526617"/>
-            <a:chOff x="402167" y="1083733"/>
-            <a:chExt cx="13337646" cy="5526617"/>
+            <a:off x="398056" y="1304203"/>
+            <a:ext cx="11395888" cy="4935394"/>
+            <a:chOff x="398056" y="1304203"/>
+            <a:chExt cx="11395888" cy="4935394"/>
           </a:xfrm>
         </p:grpSpPr>
         <p:sp>
@@ -12293,14 +12293,14 @@
           </p:nvSpPr>
           <p:spPr>
             <a:xfrm>
-              <a:off x="402167" y="2988733"/>
-              <a:ext cx="1820333" cy="1397000"/>
-            </a:xfrm>
-            <a:prstGeom prst="rect">
-              <a:avLst/>
-            </a:prstGeom>
-            <a:noFill/>
-            <a:ln w="21167">
+              <a:off x="398056" y="3210578"/>
+              <a:ext cx="1821648" cy="1398009"/>
+            </a:xfrm>
+            <a:prstGeom prst="rect">
+              <a:avLst/>
+            </a:prstGeom>
+            <a:noFill/>
+            <a:ln w="21182">
               <a:solidFill>
                 <a:srgbClr val="7D8998"/>
               </a:solidFill>
@@ -12338,8 +12338,8 @@
           </p:blipFill>
           <p:spPr>
             <a:xfrm>
-              <a:off x="402167" y="2988733"/>
-              <a:ext cx="254000" cy="254000"/>
+              <a:off x="398056" y="3210578"/>
+              <a:ext cx="254183" cy="254183"/>
             </a:xfrm>
             <a:prstGeom prst="rect">
               <a:avLst/>
@@ -12354,8 +12354,8 @@
           </p:nvSpPr>
           <p:spPr>
             <a:xfrm>
-              <a:off x="740833" y="3038475"/>
-              <a:ext cx="1268677" cy="192617"/>
+              <a:off x="736967" y="3260356"/>
+              <a:ext cx="1269593" cy="192756"/>
             </a:xfrm>
             <a:prstGeom prst="rect">
               <a:avLst/>
@@ -12374,7 +12374,7 @@
                 </a:lnSpc>
               </a:pPr>
               <a:r>
-                <a:rPr sz="1166" b="1" lang="ko-KR">
+                <a:rPr sz="1167" b="1" lang="ko-KR">
                   <a:solidFill>
                     <a:srgbClr val="7D8998"/>
                   </a:solidFill>
@@ -12409,8 +12409,8 @@
           </p:blipFill>
           <p:spPr>
             <a:xfrm>
-              <a:off x="1058333" y="3348567"/>
-              <a:ext cx="508000" cy="508000"/>
+              <a:off x="1054696" y="3570671"/>
+              <a:ext cx="508367" cy="508367"/>
             </a:xfrm>
             <a:prstGeom prst="rect">
               <a:avLst/>
@@ -12425,8 +12425,8 @@
           </p:nvSpPr>
           <p:spPr>
             <a:xfrm>
-              <a:off x="423333" y="3906308"/>
-              <a:ext cx="1778000" cy="192617"/>
+              <a:off x="419238" y="4128816"/>
+              <a:ext cx="1779284" cy="192756"/>
             </a:xfrm>
             <a:prstGeom prst="rect">
               <a:avLst/>
@@ -12445,7 +12445,7 @@
                 </a:lnSpc>
               </a:pPr>
               <a:r>
-                <a:rPr sz="1166" b="0" lang="ko-KR">
+                <a:rPr sz="1167" b="0" lang="ko-KR">
                   <a:solidFill>
                     <a:srgbClr val="232F3E"/>
                   </a:solidFill>
@@ -12466,8 +12466,8 @@
           </p:nvSpPr>
           <p:spPr>
             <a:xfrm>
-              <a:off x="637646" y="4095750"/>
-              <a:ext cx="1349375" cy="165100"/>
+              <a:off x="633705" y="4318394"/>
+              <a:ext cx="1350349" cy="165219"/>
             </a:xfrm>
             <a:prstGeom prst="rect">
               <a:avLst/>
@@ -12521,8 +12521,8 @@
           </p:blipFill>
           <p:spPr>
             <a:xfrm>
-              <a:off x="2582333" y="3348567"/>
-              <a:ext cx="508000" cy="508000"/>
+              <a:off x="2579796" y="3570671"/>
+              <a:ext cx="508367" cy="508367"/>
             </a:xfrm>
             <a:prstGeom prst="rect">
               <a:avLst/>
@@ -12537,8 +12537,8 @@
           </p:nvSpPr>
           <p:spPr>
             <a:xfrm>
-              <a:off x="2354792" y="3906308"/>
-              <a:ext cx="963083" cy="192617"/>
+              <a:off x="2352090" y="4128816"/>
+              <a:ext cx="963779" cy="192756"/>
             </a:xfrm>
             <a:prstGeom prst="rect">
               <a:avLst/>
@@ -12557,7 +12557,7 @@
                 </a:lnSpc>
               </a:pPr>
               <a:r>
-                <a:rPr sz="1166" b="0" lang="ko-KR">
+                <a:rPr sz="1167" b="0" lang="ko-KR">
                   <a:solidFill>
                     <a:srgbClr val="232F3E"/>
                   </a:solidFill>
@@ -12578,13 +12578,13 @@
           </p:nvCxnSpPr>
           <p:spPr>
             <a:xfrm>
-              <a:off x="1608667" y="3602567"/>
-              <a:ext cx="931333" cy="0"/>
+              <a:off x="1605427" y="3824855"/>
+              <a:ext cx="932005" cy="0"/>
             </a:xfrm>
             <a:prstGeom prst="line">
               <a:avLst/>
             </a:prstGeom>
-            <a:ln w="15875">
+            <a:ln w="15886">
               <a:solidFill>
                 <a:srgbClr val="232F3E"/>
               </a:solidFill>
@@ -12601,13 +12601,13 @@
           </p:nvCxnSpPr>
           <p:spPr>
             <a:xfrm>
-              <a:off x="3132667" y="3602567"/>
-              <a:ext cx="529166" cy="0"/>
+              <a:off x="3130527" y="3824855"/>
+              <a:ext cx="529549" cy="0"/>
             </a:xfrm>
             <a:prstGeom prst="line">
               <a:avLst/>
             </a:prstGeom>
-            <a:ln w="15875">
+            <a:ln w="15886">
               <a:solidFill>
                 <a:srgbClr val="232F3E"/>
               </a:solidFill>
@@ -12624,8 +12624,8 @@
           </p:nvSpPr>
           <p:spPr>
             <a:xfrm>
-              <a:off x="3115469" y="3386667"/>
-              <a:ext cx="563562" cy="165100"/>
+              <a:off x="3113317" y="3608799"/>
+              <a:ext cx="563969" cy="165219"/>
             </a:xfrm>
             <a:prstGeom prst="rect">
               <a:avLst/>
@@ -12679,8 +12679,8 @@
           </p:blipFill>
           <p:spPr>
             <a:xfrm>
-              <a:off x="3704167" y="3348567"/>
-              <a:ext cx="508000" cy="508000"/>
+              <a:off x="3702440" y="3570671"/>
+              <a:ext cx="508367" cy="508367"/>
             </a:xfrm>
             <a:prstGeom prst="rect">
               <a:avLst/>
@@ -12695,8 +12695,8 @@
           </p:nvSpPr>
           <p:spPr>
             <a:xfrm>
-              <a:off x="3069167" y="3906308"/>
-              <a:ext cx="1778000" cy="192617"/>
+              <a:off x="3066981" y="4128816"/>
+              <a:ext cx="1779284" cy="192756"/>
             </a:xfrm>
             <a:prstGeom prst="rect">
               <a:avLst/>
@@ -12715,7 +12715,7 @@
                 </a:lnSpc>
               </a:pPr>
               <a:r>
-                <a:rPr sz="1166" b="0" lang="ko-KR">
+                <a:rPr sz="1167" b="0" lang="ko-KR">
                   <a:solidFill>
                     <a:srgbClr val="232F3E"/>
                   </a:solidFill>
@@ -12736,13 +12736,13 @@
           </p:nvCxnSpPr>
           <p:spPr>
             <a:xfrm>
-              <a:off x="4254500" y="3602567"/>
-              <a:ext cx="1820333" cy="0"/>
+              <a:off x="4253170" y="3824855"/>
+              <a:ext cx="1821648" cy="0"/>
             </a:xfrm>
             <a:prstGeom prst="line">
               <a:avLst/>
             </a:prstGeom>
-            <a:ln w="15875">
+            <a:ln w="15886">
               <a:solidFill>
                 <a:srgbClr val="232F3E"/>
               </a:solidFill>
@@ -12759,14 +12759,14 @@
           </p:nvSpPr>
           <p:spPr>
             <a:xfrm>
-              <a:off x="4762500" y="1083733"/>
-              <a:ext cx="7027333" cy="4931833"/>
-            </a:xfrm>
-            <a:prstGeom prst="rect">
-              <a:avLst/>
-            </a:prstGeom>
-            <a:noFill/>
-            <a:ln w="21167">
+              <a:off x="4761537" y="1304203"/>
+              <a:ext cx="7032407" cy="4935394"/>
+            </a:xfrm>
+            <a:prstGeom prst="rect">
+              <a:avLst/>
+            </a:prstGeom>
+            <a:noFill/>
+            <a:ln w="21182">
               <a:solidFill>
                 <a:srgbClr val="232F3E"/>
               </a:solidFill>
@@ -12804,8 +12804,8 @@
           </p:blipFill>
           <p:spPr>
             <a:xfrm>
-              <a:off x="4762500" y="1083733"/>
-              <a:ext cx="338667" cy="338667"/>
+              <a:off x="4761537" y="1304203"/>
+              <a:ext cx="338911" cy="338911"/>
             </a:xfrm>
             <a:prstGeom prst="rect">
               <a:avLst/>
@@ -12820,8 +12820,8 @@
           </p:nvSpPr>
           <p:spPr>
             <a:xfrm>
-              <a:off x="5207000" y="1165754"/>
-              <a:ext cx="1141016" cy="206375"/>
+              <a:off x="5206358" y="1386283"/>
+              <a:ext cx="1141839" cy="206524"/>
             </a:xfrm>
             <a:prstGeom prst="rect">
               <a:avLst/>
@@ -12861,14 +12861,14 @@
           </p:nvSpPr>
           <p:spPr>
             <a:xfrm>
-              <a:off x="4974167" y="1507067"/>
-              <a:ext cx="3048000" cy="4296833"/>
-            </a:xfrm>
-            <a:prstGeom prst="rect">
-              <a:avLst/>
-            </a:prstGeom>
-            <a:noFill/>
-            <a:ln w="21167">
+              <a:off x="4973357" y="1727842"/>
+              <a:ext cx="3050201" cy="4299936"/>
+            </a:xfrm>
+            <a:prstGeom prst="rect">
+              <a:avLst/>
+            </a:prstGeom>
+            <a:noFill/>
+            <a:ln w="21182">
               <a:solidFill>
                 <a:srgbClr val="00A4A6"/>
               </a:solidFill>
@@ -12908,8 +12908,8 @@
           </p:blipFill>
           <p:spPr>
             <a:xfrm>
-              <a:off x="4974167" y="1507067"/>
-              <a:ext cx="254000" cy="254000"/>
+              <a:off x="4973357" y="1727842"/>
+              <a:ext cx="254183" cy="254183"/>
             </a:xfrm>
             <a:prstGeom prst="rect">
               <a:avLst/>
@@ -12924,8 +12924,8 @@
           </p:nvSpPr>
           <p:spPr>
             <a:xfrm>
-              <a:off x="5312833" y="1556808"/>
-              <a:ext cx="2287323" cy="192617"/>
+              <a:off x="5312268" y="1777619"/>
+              <a:ext cx="2288974" cy="192756"/>
             </a:xfrm>
             <a:prstGeom prst="rect">
               <a:avLst/>
@@ -12944,7 +12944,7 @@
                 </a:lnSpc>
               </a:pPr>
               <a:r>
-                <a:rPr sz="1166" b="1" lang="ko-KR">
+                <a:rPr sz="1167" b="1" lang="ko-KR">
                   <a:solidFill>
                     <a:srgbClr val="00A4A6"/>
                   </a:solidFill>
@@ -12979,8 +12979,8 @@
           </p:blipFill>
           <p:spPr>
             <a:xfrm>
-              <a:off x="6117167" y="3348567"/>
-              <a:ext cx="508000" cy="508000"/>
+              <a:off x="6117182" y="3570671"/>
+              <a:ext cx="508367" cy="508367"/>
             </a:xfrm>
             <a:prstGeom prst="rect">
               <a:avLst/>
@@ -12995,8 +12995,8 @@
           </p:nvSpPr>
           <p:spPr>
             <a:xfrm>
-              <a:off x="5431234" y="3906308"/>
-              <a:ext cx="1879865" cy="192617"/>
+              <a:off x="5430754" y="4128816"/>
+              <a:ext cx="1881222" cy="192756"/>
             </a:xfrm>
             <a:prstGeom prst="rect">
               <a:avLst/>
@@ -13015,7 +13015,7 @@
                 </a:lnSpc>
               </a:pPr>
               <a:r>
-                <a:rPr sz="1166" b="0" lang="ko-KR">
+                <a:rPr sz="1167" b="0" lang="ko-KR">
                   <a:solidFill>
                     <a:srgbClr val="232F3E"/>
                   </a:solidFill>
@@ -13050,8 +13050,8 @@
           </p:blipFill>
           <p:spPr>
             <a:xfrm>
-              <a:off x="5482167" y="1930400"/>
-              <a:ext cx="508000" cy="508000"/>
+              <a:off x="5481723" y="2151481"/>
+              <a:ext cx="508367" cy="508367"/>
             </a:xfrm>
             <a:prstGeom prst="rect">
               <a:avLst/>
@@ -13066,8 +13066,8 @@
           </p:nvSpPr>
           <p:spPr>
             <a:xfrm>
-              <a:off x="5050896" y="2488142"/>
-              <a:ext cx="1370542" cy="192617"/>
+              <a:off x="5050141" y="2709625"/>
+              <a:ext cx="1371531" cy="192756"/>
             </a:xfrm>
             <a:prstGeom prst="rect">
               <a:avLst/>
@@ -13086,7 +13086,7 @@
                 </a:lnSpc>
               </a:pPr>
               <a:r>
-                <a:rPr sz="1166" b="0" lang="ko-KR">
+                <a:rPr sz="1167" b="0" lang="ko-KR">
                   <a:solidFill>
                     <a:srgbClr val="232F3E"/>
                   </a:solidFill>
@@ -13107,8 +13107,8 @@
           </p:nvSpPr>
           <p:spPr>
             <a:xfrm>
-              <a:off x="5192448" y="2677583"/>
-              <a:ext cx="1087438" cy="165100"/>
+              <a:off x="5191796" y="2899204"/>
+              <a:ext cx="1088223" cy="165219"/>
             </a:xfrm>
             <a:prstGeom prst="rect">
               <a:avLst/>
@@ -13162,8 +13162,8 @@
           </p:blipFill>
           <p:spPr>
             <a:xfrm>
-              <a:off x="6752167" y="1930400"/>
-              <a:ext cx="508000" cy="508000"/>
+              <a:off x="6752640" y="2151481"/>
+              <a:ext cx="508367" cy="508367"/>
             </a:xfrm>
             <a:prstGeom prst="rect">
               <a:avLst/>
@@ -13178,8 +13178,8 @@
           </p:nvSpPr>
           <p:spPr>
             <a:xfrm>
-              <a:off x="6524625" y="2488142"/>
-              <a:ext cx="963083" cy="192617"/>
+              <a:off x="6524934" y="2709625"/>
+              <a:ext cx="963779" cy="192756"/>
             </a:xfrm>
             <a:prstGeom prst="rect">
               <a:avLst/>
@@ -13198,7 +13198,7 @@
                 </a:lnSpc>
               </a:pPr>
               <a:r>
-                <a:rPr sz="1166" b="0" lang="ko-KR">
+                <a:rPr sz="1167" b="0" lang="ko-KR">
                   <a:solidFill>
                     <a:srgbClr val="232F3E"/>
                   </a:solidFill>
@@ -13219,8 +13219,8 @@
           </p:nvSpPr>
           <p:spPr>
             <a:xfrm>
-              <a:off x="6462448" y="2677583"/>
-              <a:ext cx="1087438" cy="165100"/>
+              <a:off x="6462712" y="2899204"/>
+              <a:ext cx="1088223" cy="165219"/>
             </a:xfrm>
             <a:prstGeom prst="rect">
               <a:avLst/>
@@ -13274,8 +13274,8 @@
           </p:blipFill>
           <p:spPr>
             <a:xfrm>
-              <a:off x="5482167" y="4766733"/>
-              <a:ext cx="508000" cy="508000"/>
+              <a:off x="5481723" y="4989862"/>
+              <a:ext cx="508367" cy="508367"/>
             </a:xfrm>
             <a:prstGeom prst="rect">
               <a:avLst/>
@@ -13290,8 +13290,8 @@
           </p:nvSpPr>
           <p:spPr>
             <a:xfrm>
-              <a:off x="5305557" y="5324475"/>
-              <a:ext cx="861219" cy="192617"/>
+              <a:off x="5304987" y="5548006"/>
+              <a:ext cx="861841" cy="192756"/>
             </a:xfrm>
             <a:prstGeom prst="rect">
               <a:avLst/>
@@ -13310,7 +13310,7 @@
                 </a:lnSpc>
               </a:pPr>
               <a:r>
-                <a:rPr sz="1166" b="0" lang="ko-KR">
+                <a:rPr sz="1167" b="0" lang="ko-KR">
                   <a:solidFill>
                     <a:srgbClr val="232F3E"/>
                   </a:solidFill>
@@ -13331,8 +13331,8 @@
           </p:nvSpPr>
           <p:spPr>
             <a:xfrm>
-              <a:off x="5192448" y="5513917"/>
-              <a:ext cx="1087438" cy="165100"/>
+              <a:off x="5191796" y="5737585"/>
+              <a:ext cx="1088223" cy="165219"/>
             </a:xfrm>
             <a:prstGeom prst="rect">
               <a:avLst/>
@@ -13386,8 +13386,8 @@
           </p:blipFill>
           <p:spPr>
             <a:xfrm>
-              <a:off x="6752167" y="4766733"/>
-              <a:ext cx="508000" cy="508000"/>
+              <a:off x="6752640" y="4989862"/>
+              <a:ext cx="508367" cy="508367"/>
             </a:xfrm>
             <a:prstGeom prst="rect">
               <a:avLst/>
@@ -13402,8 +13402,8 @@
           </p:nvSpPr>
           <p:spPr>
             <a:xfrm>
-              <a:off x="6524625" y="5324475"/>
-              <a:ext cx="963083" cy="192617"/>
+              <a:off x="6524934" y="5548006"/>
+              <a:ext cx="963779" cy="192756"/>
             </a:xfrm>
             <a:prstGeom prst="rect">
               <a:avLst/>
@@ -13422,7 +13422,7 @@
                 </a:lnSpc>
               </a:pPr>
               <a:r>
-                <a:rPr sz="1166" b="0" lang="ko-KR">
+                <a:rPr sz="1167" b="0" lang="ko-KR">
                   <a:solidFill>
                     <a:srgbClr val="232F3E"/>
                   </a:solidFill>
@@ -13443,8 +13443,8 @@
           </p:nvSpPr>
           <p:spPr>
             <a:xfrm>
-              <a:off x="6462448" y="5513917"/>
-              <a:ext cx="1087438" cy="165100"/>
+              <a:off x="6462712" y="5737585"/>
+              <a:ext cx="1088223" cy="165219"/>
             </a:xfrm>
             <a:prstGeom prst="rect">
               <a:avLst/>
@@ -13484,8 +13484,8 @@
           </p:nvSpPr>
           <p:spPr>
             <a:xfrm>
-              <a:off x="5736167" y="2882900"/>
-              <a:ext cx="529166" cy="423333"/>
+              <a:off x="5735907" y="3104669"/>
+              <a:ext cx="529549" cy="423639"/>
             </a:xfrm>
             <a:custGeom>
               <a:avLst/>
@@ -13494,15 +13494,15 @@
               <a:cxnLst/>
               <a:rect l="l" t="t" r="r" b="b"/>
               <a:pathLst>
-                <a:path w="529166" h="423333">
+                <a:path w="529549" h="423639">
                   <a:moveTo>
-                    <a:pt x="529166" y="423333"/>
+                    <a:pt x="529549" y="423639"/>
                   </a:moveTo>
                   <a:lnTo>
-                    <a:pt x="529166" y="211667"/>
+                    <a:pt x="529549" y="211819"/>
                   </a:lnTo>
                   <a:lnTo>
-                    <a:pt x="0" y="211667"/>
+                    <a:pt x="0" y="211819"/>
                   </a:lnTo>
                   <a:lnTo>
                     <a:pt x="0" y="0"/>
@@ -13511,7 +13511,7 @@
               </a:pathLst>
             </a:custGeom>
             <a:noFill/>
-            <a:ln w="15875">
+            <a:ln w="15886">
               <a:solidFill>
                 <a:srgbClr val="232F3E"/>
               </a:solidFill>
@@ -13535,8 +13535,8 @@
           </p:nvSpPr>
           <p:spPr>
             <a:xfrm>
-              <a:off x="6477000" y="2882900"/>
-              <a:ext cx="529167" cy="423333"/>
+              <a:off x="6477275" y="3104669"/>
+              <a:ext cx="529549" cy="423639"/>
             </a:xfrm>
             <a:custGeom>
               <a:avLst/>
@@ -13545,24 +13545,24 @@
               <a:cxnLst/>
               <a:rect l="l" t="t" r="r" b="b"/>
               <a:pathLst>
-                <a:path w="529167" h="423333">
+                <a:path w="529549" h="423639">
                   <a:moveTo>
-                    <a:pt x="0" y="423333"/>
+                    <a:pt x="0" y="423639"/>
                   </a:moveTo>
                   <a:lnTo>
-                    <a:pt x="0" y="211667"/>
+                    <a:pt x="0" y="211819"/>
                   </a:lnTo>
                   <a:lnTo>
-                    <a:pt x="529167" y="211667"/>
+                    <a:pt x="529549" y="211819"/>
                   </a:lnTo>
                   <a:lnTo>
-                    <a:pt x="529167" y="0"/>
+                    <a:pt x="529549" y="0"/>
                   </a:lnTo>
                 </a:path>
               </a:pathLst>
             </a:custGeom>
             <a:noFill/>
-            <a:ln w="15875">
+            <a:ln w="15886">
               <a:solidFill>
                 <a:srgbClr val="232F3E"/>
               </a:solidFill>
@@ -13586,8 +13586,8 @@
           </p:nvSpPr>
           <p:spPr>
             <a:xfrm>
-              <a:off x="5736167" y="4131733"/>
-              <a:ext cx="529166" cy="592667"/>
+              <a:off x="5735907" y="4354404"/>
+              <a:ext cx="529549" cy="593094"/>
             </a:xfrm>
             <a:custGeom>
               <a:avLst/>
@@ -13596,24 +13596,24 @@
               <a:cxnLst/>
               <a:rect l="l" t="t" r="r" b="b"/>
               <a:pathLst>
-                <a:path w="529166" h="592667">
+                <a:path w="529549" h="593094">
                   <a:moveTo>
-                    <a:pt x="529166" y="0"/>
+                    <a:pt x="529549" y="0"/>
                   </a:moveTo>
                   <a:lnTo>
-                    <a:pt x="529166" y="296334"/>
+                    <a:pt x="529549" y="296547"/>
                   </a:lnTo>
                   <a:lnTo>
-                    <a:pt x="0" y="296334"/>
+                    <a:pt x="0" y="296547"/>
                   </a:lnTo>
                   <a:lnTo>
-                    <a:pt x="0" y="592667"/>
+                    <a:pt x="0" y="593094"/>
                   </a:lnTo>
                 </a:path>
               </a:pathLst>
             </a:custGeom>
             <a:noFill/>
-            <a:ln w="15875">
+            <a:ln w="15886">
               <a:solidFill>
                 <a:srgbClr val="232F3E"/>
               </a:solidFill>
@@ -13637,8 +13637,8 @@
           </p:nvSpPr>
           <p:spPr>
             <a:xfrm>
-              <a:off x="6477000" y="4131733"/>
-              <a:ext cx="529167" cy="592667"/>
+              <a:off x="6477275" y="4354404"/>
+              <a:ext cx="529549" cy="593094"/>
             </a:xfrm>
             <a:custGeom>
               <a:avLst/>
@@ -13647,24 +13647,24 @@
               <a:cxnLst/>
               <a:rect l="l" t="t" r="r" b="b"/>
               <a:pathLst>
-                <a:path w="529167" h="592667">
+                <a:path w="529549" h="593094">
                   <a:moveTo>
                     <a:pt x="0" y="0"/>
                   </a:moveTo>
                   <a:lnTo>
-                    <a:pt x="0" y="296334"/>
+                    <a:pt x="0" y="296547"/>
                   </a:lnTo>
                   <a:lnTo>
-                    <a:pt x="529167" y="296334"/>
+                    <a:pt x="529549" y="296547"/>
                   </a:lnTo>
                   <a:lnTo>
-                    <a:pt x="529167" y="592667"/>
+                    <a:pt x="529549" y="593094"/>
                   </a:lnTo>
                 </a:path>
               </a:pathLst>
             </a:custGeom>
             <a:noFill/>
-            <a:ln w="15875">
+            <a:ln w="15886">
               <a:solidFill>
                 <a:srgbClr val="232F3E"/>
               </a:solidFill>
@@ -13688,14 +13688,14 @@
           </p:nvSpPr>
           <p:spPr>
             <a:xfrm>
-              <a:off x="9122833" y="1507067"/>
-              <a:ext cx="2455333" cy="4296833"/>
-            </a:xfrm>
-            <a:prstGeom prst="rect">
-              <a:avLst/>
-            </a:prstGeom>
-            <a:noFill/>
-            <a:ln w="21167">
+              <a:off x="9125019" y="1727842"/>
+              <a:ext cx="2457106" cy="4299936"/>
+            </a:xfrm>
+            <a:prstGeom prst="rect">
+              <a:avLst/>
+            </a:prstGeom>
+            <a:noFill/>
+            <a:ln w="21182">
               <a:solidFill>
                 <a:srgbClr val="00A4A6"/>
               </a:solidFill>
@@ -13735,8 +13735,8 @@
           </p:blipFill>
           <p:spPr>
             <a:xfrm>
-              <a:off x="9122833" y="1507067"/>
-              <a:ext cx="254000" cy="254000"/>
+              <a:off x="9125019" y="1727842"/>
+              <a:ext cx="254183" cy="254183"/>
             </a:xfrm>
             <a:prstGeom prst="rect">
               <a:avLst/>
@@ -13751,8 +13751,8 @@
           </p:nvSpPr>
           <p:spPr>
             <a:xfrm>
-              <a:off x="9461500" y="1556808"/>
-              <a:ext cx="2287323" cy="192617"/>
+              <a:off x="9463930" y="1777619"/>
+              <a:ext cx="2288974" cy="192756"/>
             </a:xfrm>
             <a:prstGeom prst="rect">
               <a:avLst/>
@@ -13771,7 +13771,7 @@
                 </a:lnSpc>
               </a:pPr>
               <a:r>
-                <a:rPr sz="1166" b="1" lang="ko-KR">
+                <a:rPr sz="1167" b="1" lang="ko-KR">
                   <a:solidFill>
                     <a:srgbClr val="00A4A6"/>
                   </a:solidFill>
@@ -13806,8 +13806,8 @@
           </p:blipFill>
           <p:spPr>
             <a:xfrm>
-              <a:off x="10054167" y="3348567"/>
-              <a:ext cx="508000" cy="508000"/>
+              <a:off x="10057025" y="3570671"/>
+              <a:ext cx="508367" cy="508367"/>
             </a:xfrm>
             <a:prstGeom prst="rect">
               <a:avLst/>
@@ -13822,8 +13822,8 @@
           </p:nvSpPr>
           <p:spPr>
             <a:xfrm>
-              <a:off x="9368234" y="3906308"/>
-              <a:ext cx="1879865" cy="192617"/>
+              <a:off x="9370597" y="4128816"/>
+              <a:ext cx="1881222" cy="192756"/>
             </a:xfrm>
             <a:prstGeom prst="rect">
               <a:avLst/>
@@ -13842,7 +13842,7 @@
                 </a:lnSpc>
               </a:pPr>
               <a:r>
-                <a:rPr sz="1166" b="0" lang="ko-KR">
+                <a:rPr sz="1167" b="0" lang="ko-KR">
                   <a:solidFill>
                     <a:srgbClr val="232F3E"/>
                   </a:solidFill>
@@ -13877,8 +13877,8 @@
           </p:blipFill>
           <p:spPr>
             <a:xfrm>
-              <a:off x="10054167" y="1930400"/>
-              <a:ext cx="508000" cy="508000"/>
+              <a:off x="10057025" y="2151481"/>
+              <a:ext cx="508367" cy="508367"/>
             </a:xfrm>
             <a:prstGeom prst="rect">
               <a:avLst/>
@@ -13893,8 +13893,8 @@
           </p:nvSpPr>
           <p:spPr>
             <a:xfrm>
-              <a:off x="9928490" y="2488142"/>
-              <a:ext cx="759354" cy="192617"/>
+              <a:off x="9931257" y="2709625"/>
+              <a:ext cx="759902" cy="192756"/>
             </a:xfrm>
             <a:prstGeom prst="rect">
               <a:avLst/>
@@ -13913,7 +13913,7 @@
                 </a:lnSpc>
               </a:pPr>
               <a:r>
-                <a:rPr sz="1166" b="0" lang="ko-KR">
+                <a:rPr sz="1167" b="0" lang="ko-KR">
                   <a:solidFill>
                     <a:srgbClr val="232F3E"/>
                   </a:solidFill>
@@ -13934,8 +13934,8 @@
           </p:nvSpPr>
           <p:spPr>
             <a:xfrm>
-              <a:off x="9720792" y="2677583"/>
-              <a:ext cx="1174750" cy="165100"/>
+              <a:off x="9723409" y="2899204"/>
+              <a:ext cx="1175598" cy="165219"/>
             </a:xfrm>
             <a:prstGeom prst="rect">
               <a:avLst/>
@@ -13989,8 +13989,8 @@
           </p:blipFill>
           <p:spPr>
             <a:xfrm>
-              <a:off x="10054167" y="4766733"/>
-              <a:ext cx="508000" cy="508000"/>
+              <a:off x="10057025" y="4989862"/>
+              <a:ext cx="508367" cy="508367"/>
             </a:xfrm>
             <a:prstGeom prst="rect">
               <a:avLst/>
@@ -14005,8 +14005,8 @@
           </p:nvSpPr>
           <p:spPr>
             <a:xfrm>
-              <a:off x="9571964" y="5324475"/>
-              <a:ext cx="1472406" cy="192617"/>
+              <a:off x="9574473" y="5548006"/>
+              <a:ext cx="1473469" cy="192756"/>
             </a:xfrm>
             <a:prstGeom prst="rect">
               <a:avLst/>
@@ -14025,7 +14025,7 @@
                 </a:lnSpc>
               </a:pPr>
               <a:r>
-                <a:rPr sz="1166" b="0" lang="ko-KR">
+                <a:rPr sz="1167" b="0" lang="ko-KR">
                   <a:solidFill>
                     <a:srgbClr val="232F3E"/>
                   </a:solidFill>
@@ -14046,8 +14046,8 @@
           </p:nvSpPr>
           <p:spPr>
             <a:xfrm>
-              <a:off x="9720792" y="5513917"/>
-              <a:ext cx="1174750" cy="165100"/>
+              <a:off x="9723409" y="5737585"/>
+              <a:ext cx="1175598" cy="165219"/>
             </a:xfrm>
             <a:prstGeom prst="rect">
               <a:avLst/>
@@ -14087,13 +14087,13 @@
           </p:nvCxnSpPr>
           <p:spPr>
             <a:xfrm flipV="1">
-              <a:off x="10308167" y="2882900"/>
-              <a:ext cx="0" cy="423333"/>
+              <a:off x="10311208" y="3104669"/>
+              <a:ext cx="0" cy="423639"/>
             </a:xfrm>
             <a:prstGeom prst="line">
               <a:avLst/>
             </a:prstGeom>
-            <a:ln w="15875">
+            <a:ln w="15886">
               <a:solidFill>
                 <a:srgbClr val="232F3E"/>
               </a:solidFill>
@@ -14110,13 +14110,13 @@
           </p:nvCxnSpPr>
           <p:spPr>
             <a:xfrm>
-              <a:off x="10308167" y="4131733"/>
-              <a:ext cx="0" cy="592667"/>
+              <a:off x="10311208" y="4354404"/>
+              <a:ext cx="0" cy="593094"/>
             </a:xfrm>
             <a:prstGeom prst="line">
               <a:avLst/>
             </a:prstGeom>
-            <a:ln w="15875">
+            <a:ln w="15886">
               <a:solidFill>
                 <a:srgbClr val="232F3E"/>
               </a:solidFill>
@@ -14133,13 +14133,13 @@
           </p:nvCxnSpPr>
           <p:spPr>
             <a:xfrm>
-              <a:off x="6667500" y="3602567"/>
-              <a:ext cx="1608667" cy="0"/>
+              <a:off x="6667913" y="3824855"/>
+              <a:ext cx="1609828" cy="0"/>
             </a:xfrm>
             <a:prstGeom prst="line">
               <a:avLst/>
             </a:prstGeom>
-            <a:ln w="15875">
+            <a:ln w="15886">
               <a:solidFill>
                 <a:srgbClr val="232F3E"/>
               </a:solidFill>
@@ -14156,13 +14156,13 @@
           </p:nvCxnSpPr>
           <p:spPr>
             <a:xfrm>
-              <a:off x="8868833" y="3602567"/>
-              <a:ext cx="1143000" cy="0"/>
+              <a:off x="8870835" y="3824855"/>
+              <a:ext cx="1143826" cy="0"/>
             </a:xfrm>
             <a:prstGeom prst="line">
               <a:avLst/>
             </a:prstGeom>
-            <a:ln w="15875">
+            <a:ln w="15886">
               <a:solidFill>
                 <a:srgbClr val="232F3E"/>
               </a:solidFill>
@@ -14193,8 +14193,8 @@
           </p:blipFill>
           <p:spPr>
             <a:xfrm>
-              <a:off x="8318500" y="3348567"/>
-              <a:ext cx="508000" cy="508000"/>
+              <a:off x="8320105" y="3570671"/>
+              <a:ext cx="508367" cy="508367"/>
             </a:xfrm>
             <a:prstGeom prst="rect">
               <a:avLst/>
@@ -14209,8 +14209,8 @@
           </p:nvSpPr>
           <p:spPr>
             <a:xfrm>
-              <a:off x="7938161" y="3906308"/>
-              <a:ext cx="1268677" cy="192617"/>
+              <a:off x="7939492" y="4128816"/>
+              <a:ext cx="1269593" cy="192756"/>
             </a:xfrm>
             <a:prstGeom prst="rect">
               <a:avLst/>
@@ -14229,7 +14229,7 @@
                 </a:lnSpc>
               </a:pPr>
               <a:r>
-                <a:rPr sz="1166" b="0" lang="ko-KR">
+                <a:rPr sz="1167" b="0" lang="ko-KR">
                   <a:solidFill>
                     <a:srgbClr val="232F3E"/>
                   </a:solidFill>
@@ -14250,8 +14250,8 @@
           </p:nvSpPr>
           <p:spPr>
             <a:xfrm>
-              <a:off x="8175625" y="4095750"/>
-              <a:ext cx="793750" cy="165100"/>
+              <a:off x="8177127" y="4318394"/>
+              <a:ext cx="794323" cy="165219"/>
             </a:xfrm>
             <a:prstGeom prst="rect">
               <a:avLst/>
@@ -14285,14 +14285,47 @@
         </p:sp>
         <p:sp>
           <p:nvSpPr>
-            <p:cNvPr id="60" name="TextBox 59"/>
-            <p:cNvSpPr txBox="1"/>
-            <p:nvPr/>
-          </p:nvSpPr>
-          <p:spPr>
-            <a:xfrm>
-              <a:off x="4762500" y="6106583"/>
-              <a:ext cx="8977313" cy="165100"/>
+            <p:cNvPr id="60" name="Rectangle 59"/>
+            <p:cNvSpPr/>
+            <p:nvPr/>
+          </p:nvSpPr>
+          <p:spPr>
+            <a:xfrm>
+              <a:off x="398056" y="4820406"/>
+              <a:ext cx="4194026" cy="1419191"/>
+            </a:xfrm>
+            <a:prstGeom prst="rect">
+              <a:avLst/>
+            </a:prstGeom>
+            <a:solidFill>
+              <a:srgbClr val="F8F9F9"/>
+            </a:solidFill>
+            <a:ln w="10591">
+              <a:solidFill>
+                <a:srgbClr val="D5DBDB"/>
+              </a:solidFill>
+              <a:prstDash val="solid"/>
+              <a:miter lim="800000"/>
+            </a:ln>
+          </p:spPr>
+          <p:txBody>
+            <a:bodyPr rtlCol="0" anchor="ctr"/>
+            <a:lstStyle/>
+            <a:p>
+              <a:pPr algn="ctr"/>
+            </a:p>
+          </p:txBody>
+        </p:sp>
+        <p:sp>
+          <p:nvSpPr>
+            <p:cNvPr id="61" name="TextBox 60"/>
+            <p:cNvSpPr txBox="1"/>
+            <p:nvPr/>
+          </p:nvSpPr>
+          <p:spPr>
+            <a:xfrm>
+              <a:off x="525147" y="4932671"/>
+              <a:ext cx="1088223" cy="165219"/>
             </a:xfrm>
             <a:prstGeom prst="rect">
               <a:avLst/>
@@ -14311,6 +14344,47 @@
                 </a:lnSpc>
               </a:pPr>
               <a:r>
+                <a:rPr sz="1000" b="1" lang="ko-KR">
+                  <a:solidFill>
+                    <a:srgbClr val="232F3E"/>
+                  </a:solidFill>
+                  <a:latin typeface="Arial"/>
+                  <a:ea typeface="Malgun Gothic"/>
+                  <a:cs typeface="Malgun Gothic"/>
+                </a:rPr>
+                <a:t>Hub &amp; spoke</a:t>
+              </a:r>
+            </a:p>
+          </p:txBody>
+        </p:sp>
+        <p:sp>
+          <p:nvSpPr>
+            <p:cNvPr id="62" name="TextBox 61"/>
+            <p:cNvSpPr txBox="1"/>
+            <p:nvPr/>
+          </p:nvSpPr>
+          <p:spPr>
+            <a:xfrm>
+              <a:off x="1565181" y="4932671"/>
+              <a:ext cx="3336157" cy="165219"/>
+            </a:xfrm>
+            <a:prstGeom prst="rect">
+              <a:avLst/>
+            </a:prstGeom>
+            <a:noFill/>
+          </p:spPr>
+          <p:txBody>
+            <a:bodyPr wrap="none" lIns="0" rIns="0" tIns="0" bIns="0" anchor="t">
+              <a:noAutofit/>
+            </a:bodyPr>
+            <a:lstStyle/>
+            <a:p>
+              <a:pPr algn="l">
+                <a:lnSpc>
+                  <a:spcPct val="100000"/>
+                </a:lnSpc>
+              </a:pPr>
+              <a:r>
                 <a:rPr sz="1000" b="0" lang="ko-KR">
                   <a:solidFill>
                     <a:srgbClr val="545B64"/>
@@ -14319,21 +14393,21 @@
                   <a:ea typeface="Malgun Gothic"/>
                   <a:cs typeface="Malgun Gothic"/>
                 </a:rPr>
-                <a:t>Hub &amp; spoke: VPC·VPN은 리전 TGW에 attachment로 연결 · VPC CIDR과 VPN(BGP) 경로는 TGW 라우팅 테이블에 전파</a:t>
-              </a:r>
-            </a:p>
-          </p:txBody>
-        </p:sp>
-        <p:sp>
-          <p:nvSpPr>
-            <p:cNvPr id="61" name="TextBox 60"/>
-            <p:cNvSpPr txBox="1"/>
-            <p:nvPr/>
-          </p:nvSpPr>
-          <p:spPr>
-            <a:xfrm>
-              <a:off x="4762500" y="6275917"/>
-              <a:ext cx="4572000" cy="165100"/>
+                <a:t>VPC·VPN은 리전 TGW에 attachment로 연결</a:t>
+              </a:r>
+            </a:p>
+          </p:txBody>
+        </p:sp>
+        <p:sp>
+          <p:nvSpPr>
+            <p:cNvPr id="63" name="TextBox 62"/>
+            <p:cNvSpPr txBox="1"/>
+            <p:nvPr/>
+          </p:nvSpPr>
+          <p:spPr>
+            <a:xfrm>
+              <a:off x="1565181" y="5102126"/>
+              <a:ext cx="3352044" cy="165219"/>
             </a:xfrm>
             <a:prstGeom prst="rect">
               <a:avLst/>
@@ -14360,21 +14434,21 @@
                   <a:ea typeface="Malgun Gothic"/>
                   <a:cs typeface="Malgun Gothic"/>
                 </a:rPr>
-                <a:t>라우팅: VPC 서브넷 10.0.0.0/8 · 192.168.0.0/16 → TGW</a:t>
-              </a:r>
-            </a:p>
-          </p:txBody>
-        </p:sp>
-        <p:sp>
-          <p:nvSpPr>
-            <p:cNvPr id="62" name="TextBox 61"/>
-            <p:cNvSpPr txBox="1"/>
-            <p:nvPr/>
-          </p:nvSpPr>
-          <p:spPr>
-            <a:xfrm>
-              <a:off x="4762500" y="6445250"/>
-              <a:ext cx="7659688" cy="165100"/>
+                <a:t>VPC CIDR·VPN(BGP) 경로는 TGW RT에 전파</a:t>
+              </a:r>
+            </a:p>
+          </p:txBody>
+        </p:sp>
+        <p:sp>
+          <p:nvSpPr>
+            <p:cNvPr id="64" name="TextBox 63"/>
+            <p:cNvSpPr txBox="1"/>
+            <p:nvPr/>
+          </p:nvSpPr>
+          <p:spPr>
+            <a:xfrm>
+              <a:off x="525147" y="5335128"/>
+              <a:ext cx="1215314" cy="165219"/>
             </a:xfrm>
             <a:prstGeom prst="rect">
               <a:avLst/>
@@ -14393,6 +14467,47 @@
                 </a:lnSpc>
               </a:pPr>
               <a:r>
+                <a:rPr sz="1000" b="1" lang="ko-KR">
+                  <a:solidFill>
+                    <a:srgbClr val="232F3E"/>
+                  </a:solidFill>
+                  <a:latin typeface="Arial"/>
+                  <a:ea typeface="Malgun Gothic"/>
+                  <a:cs typeface="Malgun Gothic"/>
+                </a:rPr>
+                <a:t>VPC 서브넷 RT</a:t>
+              </a:r>
+            </a:p>
+          </p:txBody>
+        </p:sp>
+        <p:sp>
+          <p:nvSpPr>
+            <p:cNvPr id="65" name="TextBox 64"/>
+            <p:cNvSpPr txBox="1"/>
+            <p:nvPr/>
+          </p:nvSpPr>
+          <p:spPr>
+            <a:xfrm>
+              <a:off x="1565181" y="5335128"/>
+              <a:ext cx="3010485" cy="165219"/>
+            </a:xfrm>
+            <a:prstGeom prst="rect">
+              <a:avLst/>
+            </a:prstGeom>
+            <a:noFill/>
+          </p:spPr>
+          <p:txBody>
+            <a:bodyPr wrap="none" lIns="0" rIns="0" tIns="0" bIns="0" anchor="t">
+              <a:noAutofit/>
+            </a:bodyPr>
+            <a:lstStyle/>
+            <a:p>
+              <a:pPr algn="l">
+                <a:lnSpc>
+                  <a:spcPct val="100000"/>
+                </a:lnSpc>
+              </a:pPr>
+              <a:r>
                 <a:rPr sz="1000" b="0" lang="ko-KR">
                   <a:solidFill>
                     <a:srgbClr val="545B64"/>
@@ -14401,7 +14516,212 @@
                   <a:ea typeface="Malgun Gothic"/>
                   <a:cs typeface="Malgun Gothic"/>
                 </a:rPr>
-                <a:t>TGW RT: A 10.16.0.0/13 → peering · B 10.0.0.0/13 · 192.168.0.0/16 → peering (정적 경로)</a:t>
+                <a:t>10.0.0.0/8 · 192.168.0.0/16 → TGW</a:t>
+              </a:r>
+            </a:p>
+          </p:txBody>
+        </p:sp>
+        <p:sp>
+          <p:nvSpPr>
+            <p:cNvPr id="66" name="TextBox 65"/>
+            <p:cNvSpPr txBox="1"/>
+            <p:nvPr/>
+          </p:nvSpPr>
+          <p:spPr>
+            <a:xfrm>
+              <a:off x="525147" y="5568129"/>
+              <a:ext cx="826096" cy="165219"/>
+            </a:xfrm>
+            <a:prstGeom prst="rect">
+              <a:avLst/>
+            </a:prstGeom>
+            <a:noFill/>
+          </p:spPr>
+          <p:txBody>
+            <a:bodyPr wrap="none" lIns="0" rIns="0" tIns="0" bIns="0" anchor="t">
+              <a:noAutofit/>
+            </a:bodyPr>
+            <a:lstStyle/>
+            <a:p>
+              <a:pPr algn="l">
+                <a:lnSpc>
+                  <a:spcPct val="100000"/>
+                </a:lnSpc>
+              </a:pPr>
+              <a:r>
+                <a:rPr sz="1000" b="1" lang="ko-KR">
+                  <a:solidFill>
+                    <a:srgbClr val="232F3E"/>
+                  </a:solidFill>
+                  <a:latin typeface="Arial"/>
+                  <a:ea typeface="Malgun Gothic"/>
+                  <a:cs typeface="Malgun Gothic"/>
+                </a:rPr>
+                <a:t>TGW A RT</a:t>
+              </a:r>
+            </a:p>
+          </p:txBody>
+        </p:sp>
+        <p:sp>
+          <p:nvSpPr>
+            <p:cNvPr id="67" name="TextBox 66"/>
+            <p:cNvSpPr txBox="1"/>
+            <p:nvPr/>
+          </p:nvSpPr>
+          <p:spPr>
+            <a:xfrm>
+              <a:off x="1565181" y="5568129"/>
+              <a:ext cx="2629209" cy="165219"/>
+            </a:xfrm>
+            <a:prstGeom prst="rect">
+              <a:avLst/>
+            </a:prstGeom>
+            <a:noFill/>
+          </p:spPr>
+          <p:txBody>
+            <a:bodyPr wrap="none" lIns="0" rIns="0" tIns="0" bIns="0" anchor="t">
+              <a:noAutofit/>
+            </a:bodyPr>
+            <a:lstStyle/>
+            <a:p>
+              <a:pPr algn="l">
+                <a:lnSpc>
+                  <a:spcPct val="100000"/>
+                </a:lnSpc>
+              </a:pPr>
+              <a:r>
+                <a:rPr sz="1000" b="0" lang="ko-KR">
+                  <a:solidFill>
+                    <a:srgbClr val="545B64"/>
+                  </a:solidFill>
+                  <a:latin typeface="Arial"/>
+                  <a:ea typeface="Malgun Gothic"/>
+                  <a:cs typeface="Malgun Gothic"/>
+                </a:rPr>
+                <a:t>10.16.0.0/13 → peering (정적)</a:t>
+              </a:r>
+            </a:p>
+          </p:txBody>
+        </p:sp>
+        <p:sp>
+          <p:nvSpPr>
+            <p:cNvPr id="68" name="TextBox 67"/>
+            <p:cNvSpPr txBox="1"/>
+            <p:nvPr/>
+          </p:nvSpPr>
+          <p:spPr>
+            <a:xfrm>
+              <a:off x="525147" y="5801131"/>
+              <a:ext cx="826096" cy="165219"/>
+            </a:xfrm>
+            <a:prstGeom prst="rect">
+              <a:avLst/>
+            </a:prstGeom>
+            <a:noFill/>
+          </p:spPr>
+          <p:txBody>
+            <a:bodyPr wrap="none" lIns="0" rIns="0" tIns="0" bIns="0" anchor="t">
+              <a:noAutofit/>
+            </a:bodyPr>
+            <a:lstStyle/>
+            <a:p>
+              <a:pPr algn="l">
+                <a:lnSpc>
+                  <a:spcPct val="100000"/>
+                </a:lnSpc>
+              </a:pPr>
+              <a:r>
+                <a:rPr sz="1000" b="1" lang="ko-KR">
+                  <a:solidFill>
+                    <a:srgbClr val="232F3E"/>
+                  </a:solidFill>
+                  <a:latin typeface="Arial"/>
+                  <a:ea typeface="Malgun Gothic"/>
+                  <a:cs typeface="Malgun Gothic"/>
+                </a:rPr>
+                <a:t>TGW B RT</a:t>
+              </a:r>
+            </a:p>
+          </p:txBody>
+        </p:sp>
+        <p:sp>
+          <p:nvSpPr>
+            <p:cNvPr id="69" name="TextBox 68"/>
+            <p:cNvSpPr txBox="1"/>
+            <p:nvPr/>
+          </p:nvSpPr>
+          <p:spPr>
+            <a:xfrm>
+              <a:off x="1565181" y="5801131"/>
+              <a:ext cx="2573607" cy="165219"/>
+            </a:xfrm>
+            <a:prstGeom prst="rect">
+              <a:avLst/>
+            </a:prstGeom>
+            <a:noFill/>
+          </p:spPr>
+          <p:txBody>
+            <a:bodyPr wrap="none" lIns="0" rIns="0" tIns="0" bIns="0" anchor="t">
+              <a:noAutofit/>
+            </a:bodyPr>
+            <a:lstStyle/>
+            <a:p>
+              <a:pPr algn="l">
+                <a:lnSpc>
+                  <a:spcPct val="100000"/>
+                </a:lnSpc>
+              </a:pPr>
+              <a:r>
+                <a:rPr sz="1000" b="0" lang="ko-KR">
+                  <a:solidFill>
+                    <a:srgbClr val="545B64"/>
+                  </a:solidFill>
+                  <a:latin typeface="Arial"/>
+                  <a:ea typeface="Malgun Gothic"/>
+                  <a:cs typeface="Malgun Gothic"/>
+                </a:rPr>
+                <a:t>10.0.0.0/13 · 192.168.0.0/16</a:t>
+              </a:r>
+            </a:p>
+          </p:txBody>
+        </p:sp>
+        <p:sp>
+          <p:nvSpPr>
+            <p:cNvPr id="70" name="TextBox 69"/>
+            <p:cNvSpPr txBox="1"/>
+            <p:nvPr/>
+          </p:nvSpPr>
+          <p:spPr>
+            <a:xfrm>
+              <a:off x="1565181" y="5970586"/>
+              <a:ext cx="1493327" cy="165219"/>
+            </a:xfrm>
+            <a:prstGeom prst="rect">
+              <a:avLst/>
+            </a:prstGeom>
+            <a:noFill/>
+          </p:spPr>
+          <p:txBody>
+            <a:bodyPr wrap="none" lIns="0" rIns="0" tIns="0" bIns="0" anchor="t">
+              <a:noAutofit/>
+            </a:bodyPr>
+            <a:lstStyle/>
+            <a:p>
+              <a:pPr algn="l">
+                <a:lnSpc>
+                  <a:spcPct val="100000"/>
+                </a:lnSpc>
+              </a:pPr>
+              <a:r>
+                <a:rPr sz="1000" b="0" lang="ko-KR">
+                  <a:solidFill>
+                    <a:srgbClr val="545B64"/>
+                  </a:solidFill>
+                  <a:latin typeface="Arial"/>
+                  <a:ea typeface="Malgun Gothic"/>
+                  <a:cs typeface="Malgun Gothic"/>
+                </a:rPr>
+                <a:t>→ peering (정적)</a:t>
               </a:r>
             </a:p>
           </p:txBody>

--- a/docs/examples/reference-architectures.pptx
+++ b/docs/examples/reference-architectures.pptx
@@ -12279,10 +12279,10 @@
         </p:nvGrpSpPr>
         <p:grpSpPr>
           <a:xfrm>
-            <a:off x="398056" y="1304203"/>
-            <a:ext cx="11395888" cy="4935394"/>
-            <a:chOff x="398056" y="1304203"/>
-            <a:chExt cx="11395888" cy="4935394"/>
+            <a:off x="402167" y="1083733"/>
+            <a:ext cx="13337646" cy="5526617"/>
+            <a:chOff x="402167" y="1083733"/>
+            <a:chExt cx="13337646" cy="5526617"/>
           </a:xfrm>
         </p:grpSpPr>
         <p:sp>
@@ -12293,14 +12293,14 @@
           </p:nvSpPr>
           <p:spPr>
             <a:xfrm>
-              <a:off x="398056" y="3210578"/>
-              <a:ext cx="1821648" cy="1398009"/>
-            </a:xfrm>
-            <a:prstGeom prst="rect">
-              <a:avLst/>
-            </a:prstGeom>
-            <a:noFill/>
-            <a:ln w="21182">
+              <a:off x="402167" y="2988733"/>
+              <a:ext cx="1820333" cy="1397000"/>
+            </a:xfrm>
+            <a:prstGeom prst="rect">
+              <a:avLst/>
+            </a:prstGeom>
+            <a:noFill/>
+            <a:ln w="21167">
               <a:solidFill>
                 <a:srgbClr val="7D8998"/>
               </a:solidFill>
@@ -12338,8 +12338,8 @@
           </p:blipFill>
           <p:spPr>
             <a:xfrm>
-              <a:off x="398056" y="3210578"/>
-              <a:ext cx="254183" cy="254183"/>
+              <a:off x="402167" y="2988733"/>
+              <a:ext cx="254000" cy="254000"/>
             </a:xfrm>
             <a:prstGeom prst="rect">
               <a:avLst/>
@@ -12354,8 +12354,8 @@
           </p:nvSpPr>
           <p:spPr>
             <a:xfrm>
-              <a:off x="736967" y="3260356"/>
-              <a:ext cx="1269593" cy="192756"/>
+              <a:off x="740833" y="3038475"/>
+              <a:ext cx="1268677" cy="192617"/>
             </a:xfrm>
             <a:prstGeom prst="rect">
               <a:avLst/>
@@ -12374,7 +12374,7 @@
                 </a:lnSpc>
               </a:pPr>
               <a:r>
-                <a:rPr sz="1167" b="1" lang="ko-KR">
+                <a:rPr sz="1166" b="1" lang="ko-KR">
                   <a:solidFill>
                     <a:srgbClr val="7D8998"/>
                   </a:solidFill>
@@ -12409,8 +12409,8 @@
           </p:blipFill>
           <p:spPr>
             <a:xfrm>
-              <a:off x="1054696" y="3570671"/>
-              <a:ext cx="508367" cy="508367"/>
+              <a:off x="1058333" y="3348567"/>
+              <a:ext cx="508000" cy="508000"/>
             </a:xfrm>
             <a:prstGeom prst="rect">
               <a:avLst/>
@@ -12425,8 +12425,8 @@
           </p:nvSpPr>
           <p:spPr>
             <a:xfrm>
-              <a:off x="419238" y="4128816"/>
-              <a:ext cx="1779284" cy="192756"/>
+              <a:off x="423333" y="3906308"/>
+              <a:ext cx="1778000" cy="192617"/>
             </a:xfrm>
             <a:prstGeom prst="rect">
               <a:avLst/>
@@ -12445,7 +12445,7 @@
                 </a:lnSpc>
               </a:pPr>
               <a:r>
-                <a:rPr sz="1167" b="0" lang="ko-KR">
+                <a:rPr sz="1166" b="0" lang="ko-KR">
                   <a:solidFill>
                     <a:srgbClr val="232F3E"/>
                   </a:solidFill>
@@ -12466,8 +12466,8 @@
           </p:nvSpPr>
           <p:spPr>
             <a:xfrm>
-              <a:off x="633705" y="4318394"/>
-              <a:ext cx="1350349" cy="165219"/>
+              <a:off x="637646" y="4095750"/>
+              <a:ext cx="1349375" cy="165100"/>
             </a:xfrm>
             <a:prstGeom prst="rect">
               <a:avLst/>
@@ -12521,8 +12521,8 @@
           </p:blipFill>
           <p:spPr>
             <a:xfrm>
-              <a:off x="2579796" y="3570671"/>
-              <a:ext cx="508367" cy="508367"/>
+              <a:off x="2582333" y="3348567"/>
+              <a:ext cx="508000" cy="508000"/>
             </a:xfrm>
             <a:prstGeom prst="rect">
               <a:avLst/>
@@ -12537,8 +12537,8 @@
           </p:nvSpPr>
           <p:spPr>
             <a:xfrm>
-              <a:off x="2352090" y="4128816"/>
-              <a:ext cx="963779" cy="192756"/>
+              <a:off x="2354792" y="3906308"/>
+              <a:ext cx="963083" cy="192617"/>
             </a:xfrm>
             <a:prstGeom prst="rect">
               <a:avLst/>
@@ -12557,7 +12557,7 @@
                 </a:lnSpc>
               </a:pPr>
               <a:r>
-                <a:rPr sz="1167" b="0" lang="ko-KR">
+                <a:rPr sz="1166" b="0" lang="ko-KR">
                   <a:solidFill>
                     <a:srgbClr val="232F3E"/>
                   </a:solidFill>
@@ -12578,13 +12578,13 @@
           </p:nvCxnSpPr>
           <p:spPr>
             <a:xfrm>
-              <a:off x="1605427" y="3824855"/>
-              <a:ext cx="932005" cy="0"/>
+              <a:off x="1608667" y="3602567"/>
+              <a:ext cx="931333" cy="0"/>
             </a:xfrm>
             <a:prstGeom prst="line">
               <a:avLst/>
             </a:prstGeom>
-            <a:ln w="15886">
+            <a:ln w="15875">
               <a:solidFill>
                 <a:srgbClr val="232F3E"/>
               </a:solidFill>
@@ -12601,13 +12601,13 @@
           </p:nvCxnSpPr>
           <p:spPr>
             <a:xfrm>
-              <a:off x="3130527" y="3824855"/>
-              <a:ext cx="529549" cy="0"/>
+              <a:off x="3132667" y="3602567"/>
+              <a:ext cx="529166" cy="0"/>
             </a:xfrm>
             <a:prstGeom prst="line">
               <a:avLst/>
             </a:prstGeom>
-            <a:ln w="15886">
+            <a:ln w="15875">
               <a:solidFill>
                 <a:srgbClr val="232F3E"/>
               </a:solidFill>
@@ -12624,8 +12624,8 @@
           </p:nvSpPr>
           <p:spPr>
             <a:xfrm>
-              <a:off x="3113317" y="3608799"/>
-              <a:ext cx="563969" cy="165219"/>
+              <a:off x="3115469" y="3386667"/>
+              <a:ext cx="563562" cy="165100"/>
             </a:xfrm>
             <a:prstGeom prst="rect">
               <a:avLst/>
@@ -12679,8 +12679,8 @@
           </p:blipFill>
           <p:spPr>
             <a:xfrm>
-              <a:off x="3702440" y="3570671"/>
-              <a:ext cx="508367" cy="508367"/>
+              <a:off x="3704167" y="3348567"/>
+              <a:ext cx="508000" cy="508000"/>
             </a:xfrm>
             <a:prstGeom prst="rect">
               <a:avLst/>
@@ -12695,8 +12695,8 @@
           </p:nvSpPr>
           <p:spPr>
             <a:xfrm>
-              <a:off x="3066981" y="4128816"/>
-              <a:ext cx="1779284" cy="192756"/>
+              <a:off x="3069167" y="3906308"/>
+              <a:ext cx="1778000" cy="192617"/>
             </a:xfrm>
             <a:prstGeom prst="rect">
               <a:avLst/>
@@ -12715,7 +12715,7 @@
                 </a:lnSpc>
               </a:pPr>
               <a:r>
-                <a:rPr sz="1167" b="0" lang="ko-KR">
+                <a:rPr sz="1166" b="0" lang="ko-KR">
                   <a:solidFill>
                     <a:srgbClr val="232F3E"/>
                   </a:solidFill>
@@ -12736,13 +12736,13 @@
           </p:nvCxnSpPr>
           <p:spPr>
             <a:xfrm>
-              <a:off x="4253170" y="3824855"/>
-              <a:ext cx="1821648" cy="0"/>
+              <a:off x="4254500" y="3602567"/>
+              <a:ext cx="1820333" cy="0"/>
             </a:xfrm>
             <a:prstGeom prst="line">
               <a:avLst/>
             </a:prstGeom>
-            <a:ln w="15886">
+            <a:ln w="15875">
               <a:solidFill>
                 <a:srgbClr val="232F3E"/>
               </a:solidFill>
@@ -12759,14 +12759,14 @@
           </p:nvSpPr>
           <p:spPr>
             <a:xfrm>
-              <a:off x="4761537" y="1304203"/>
-              <a:ext cx="7032407" cy="4935394"/>
-            </a:xfrm>
-            <a:prstGeom prst="rect">
-              <a:avLst/>
-            </a:prstGeom>
-            <a:noFill/>
-            <a:ln w="21182">
+              <a:off x="4762500" y="1083733"/>
+              <a:ext cx="7027333" cy="4931833"/>
+            </a:xfrm>
+            <a:prstGeom prst="rect">
+              <a:avLst/>
+            </a:prstGeom>
+            <a:noFill/>
+            <a:ln w="21167">
               <a:solidFill>
                 <a:srgbClr val="232F3E"/>
               </a:solidFill>
@@ -12804,8 +12804,8 @@
           </p:blipFill>
           <p:spPr>
             <a:xfrm>
-              <a:off x="4761537" y="1304203"/>
-              <a:ext cx="338911" cy="338911"/>
+              <a:off x="4762500" y="1083733"/>
+              <a:ext cx="338667" cy="338667"/>
             </a:xfrm>
             <a:prstGeom prst="rect">
               <a:avLst/>
@@ -12820,8 +12820,8 @@
           </p:nvSpPr>
           <p:spPr>
             <a:xfrm>
-              <a:off x="5206358" y="1386283"/>
-              <a:ext cx="1141839" cy="206524"/>
+              <a:off x="5207000" y="1165754"/>
+              <a:ext cx="1141016" cy="206375"/>
             </a:xfrm>
             <a:prstGeom prst="rect">
               <a:avLst/>
@@ -12861,14 +12861,14 @@
           </p:nvSpPr>
           <p:spPr>
             <a:xfrm>
-              <a:off x="4973357" y="1727842"/>
-              <a:ext cx="3050201" cy="4299936"/>
-            </a:xfrm>
-            <a:prstGeom prst="rect">
-              <a:avLst/>
-            </a:prstGeom>
-            <a:noFill/>
-            <a:ln w="21182">
+              <a:off x="4974167" y="1507067"/>
+              <a:ext cx="3048000" cy="4296833"/>
+            </a:xfrm>
+            <a:prstGeom prst="rect">
+              <a:avLst/>
+            </a:prstGeom>
+            <a:noFill/>
+            <a:ln w="21167">
               <a:solidFill>
                 <a:srgbClr val="00A4A6"/>
               </a:solidFill>
@@ -12908,8 +12908,8 @@
           </p:blipFill>
           <p:spPr>
             <a:xfrm>
-              <a:off x="4973357" y="1727842"/>
-              <a:ext cx="254183" cy="254183"/>
+              <a:off x="4974167" y="1507067"/>
+              <a:ext cx="254000" cy="254000"/>
             </a:xfrm>
             <a:prstGeom prst="rect">
               <a:avLst/>
@@ -12924,8 +12924,8 @@
           </p:nvSpPr>
           <p:spPr>
             <a:xfrm>
-              <a:off x="5312268" y="1777619"/>
-              <a:ext cx="2288974" cy="192756"/>
+              <a:off x="5312833" y="1556808"/>
+              <a:ext cx="2287323" cy="192617"/>
             </a:xfrm>
             <a:prstGeom prst="rect">
               <a:avLst/>
@@ -12944,7 +12944,7 @@
                 </a:lnSpc>
               </a:pPr>
               <a:r>
-                <a:rPr sz="1167" b="1" lang="ko-KR">
+                <a:rPr sz="1166" b="1" lang="ko-KR">
                   <a:solidFill>
                     <a:srgbClr val="00A4A6"/>
                   </a:solidFill>
@@ -12979,8 +12979,8 @@
           </p:blipFill>
           <p:spPr>
             <a:xfrm>
-              <a:off x="6117182" y="3570671"/>
-              <a:ext cx="508367" cy="508367"/>
+              <a:off x="6117167" y="3348567"/>
+              <a:ext cx="508000" cy="508000"/>
             </a:xfrm>
             <a:prstGeom prst="rect">
               <a:avLst/>
@@ -12995,8 +12995,8 @@
           </p:nvSpPr>
           <p:spPr>
             <a:xfrm>
-              <a:off x="5430754" y="4128816"/>
-              <a:ext cx="1881222" cy="192756"/>
+              <a:off x="5431234" y="3906308"/>
+              <a:ext cx="1879865" cy="192617"/>
             </a:xfrm>
             <a:prstGeom prst="rect">
               <a:avLst/>
@@ -13015,7 +13015,7 @@
                 </a:lnSpc>
               </a:pPr>
               <a:r>
-                <a:rPr sz="1167" b="0" lang="ko-KR">
+                <a:rPr sz="1166" b="0" lang="ko-KR">
                   <a:solidFill>
                     <a:srgbClr val="232F3E"/>
                   </a:solidFill>
@@ -13050,8 +13050,8 @@
           </p:blipFill>
           <p:spPr>
             <a:xfrm>
-              <a:off x="5481723" y="2151481"/>
-              <a:ext cx="508367" cy="508367"/>
+              <a:off x="5482167" y="1930400"/>
+              <a:ext cx="508000" cy="508000"/>
             </a:xfrm>
             <a:prstGeom prst="rect">
               <a:avLst/>
@@ -13066,8 +13066,8 @@
           </p:nvSpPr>
           <p:spPr>
             <a:xfrm>
-              <a:off x="5050141" y="2709625"/>
-              <a:ext cx="1371531" cy="192756"/>
+              <a:off x="5050896" y="2488142"/>
+              <a:ext cx="1370542" cy="192617"/>
             </a:xfrm>
             <a:prstGeom prst="rect">
               <a:avLst/>
@@ -13086,7 +13086,7 @@
                 </a:lnSpc>
               </a:pPr>
               <a:r>
-                <a:rPr sz="1167" b="0" lang="ko-KR">
+                <a:rPr sz="1166" b="0" lang="ko-KR">
                   <a:solidFill>
                     <a:srgbClr val="232F3E"/>
                   </a:solidFill>
@@ -13107,8 +13107,8 @@
           </p:nvSpPr>
           <p:spPr>
             <a:xfrm>
-              <a:off x="5191796" y="2899204"/>
-              <a:ext cx="1088223" cy="165219"/>
+              <a:off x="5192448" y="2677583"/>
+              <a:ext cx="1087438" cy="165100"/>
             </a:xfrm>
             <a:prstGeom prst="rect">
               <a:avLst/>
@@ -13162,8 +13162,8 @@
           </p:blipFill>
           <p:spPr>
             <a:xfrm>
-              <a:off x="6752640" y="2151481"/>
-              <a:ext cx="508367" cy="508367"/>
+              <a:off x="6752167" y="1930400"/>
+              <a:ext cx="508000" cy="508000"/>
             </a:xfrm>
             <a:prstGeom prst="rect">
               <a:avLst/>
@@ -13178,8 +13178,8 @@
           </p:nvSpPr>
           <p:spPr>
             <a:xfrm>
-              <a:off x="6524934" y="2709625"/>
-              <a:ext cx="963779" cy="192756"/>
+              <a:off x="6524625" y="2488142"/>
+              <a:ext cx="963083" cy="192617"/>
             </a:xfrm>
             <a:prstGeom prst="rect">
               <a:avLst/>
@@ -13198,7 +13198,7 @@
                 </a:lnSpc>
               </a:pPr>
               <a:r>
-                <a:rPr sz="1167" b="0" lang="ko-KR">
+                <a:rPr sz="1166" b="0" lang="ko-KR">
                   <a:solidFill>
                     <a:srgbClr val="232F3E"/>
                   </a:solidFill>
@@ -13219,8 +13219,8 @@
           </p:nvSpPr>
           <p:spPr>
             <a:xfrm>
-              <a:off x="6462712" y="2899204"/>
-              <a:ext cx="1088223" cy="165219"/>
+              <a:off x="6462448" y="2677583"/>
+              <a:ext cx="1087438" cy="165100"/>
             </a:xfrm>
             <a:prstGeom prst="rect">
               <a:avLst/>
@@ -13274,8 +13274,8 @@
           </p:blipFill>
           <p:spPr>
             <a:xfrm>
-              <a:off x="5481723" y="4989862"/>
-              <a:ext cx="508367" cy="508367"/>
+              <a:off x="5482167" y="4766733"/>
+              <a:ext cx="508000" cy="508000"/>
             </a:xfrm>
             <a:prstGeom prst="rect">
               <a:avLst/>
@@ -13290,8 +13290,8 @@
           </p:nvSpPr>
           <p:spPr>
             <a:xfrm>
-              <a:off x="5304987" y="5548006"/>
-              <a:ext cx="861841" cy="192756"/>
+              <a:off x="5305557" y="5324475"/>
+              <a:ext cx="861219" cy="192617"/>
             </a:xfrm>
             <a:prstGeom prst="rect">
               <a:avLst/>
@@ -13310,7 +13310,7 @@
                 </a:lnSpc>
               </a:pPr>
               <a:r>
-                <a:rPr sz="1167" b="0" lang="ko-KR">
+                <a:rPr sz="1166" b="0" lang="ko-KR">
                   <a:solidFill>
                     <a:srgbClr val="232F3E"/>
                   </a:solidFill>
@@ -13331,8 +13331,8 @@
           </p:nvSpPr>
           <p:spPr>
             <a:xfrm>
-              <a:off x="5191796" y="5737585"/>
-              <a:ext cx="1088223" cy="165219"/>
+              <a:off x="5192448" y="5513917"/>
+              <a:ext cx="1087438" cy="165100"/>
             </a:xfrm>
             <a:prstGeom prst="rect">
               <a:avLst/>
@@ -13386,8 +13386,8 @@
           </p:blipFill>
           <p:spPr>
             <a:xfrm>
-              <a:off x="6752640" y="4989862"/>
-              <a:ext cx="508367" cy="508367"/>
+              <a:off x="6752167" y="4766733"/>
+              <a:ext cx="508000" cy="508000"/>
             </a:xfrm>
             <a:prstGeom prst="rect">
               <a:avLst/>
@@ -13402,8 +13402,8 @@
           </p:nvSpPr>
           <p:spPr>
             <a:xfrm>
-              <a:off x="6524934" y="5548006"/>
-              <a:ext cx="963779" cy="192756"/>
+              <a:off x="6524625" y="5324475"/>
+              <a:ext cx="963083" cy="192617"/>
             </a:xfrm>
             <a:prstGeom prst="rect">
               <a:avLst/>
@@ -13422,7 +13422,7 @@
                 </a:lnSpc>
               </a:pPr>
               <a:r>
-                <a:rPr sz="1167" b="0" lang="ko-KR">
+                <a:rPr sz="1166" b="0" lang="ko-KR">
                   <a:solidFill>
                     <a:srgbClr val="232F3E"/>
                   </a:solidFill>
@@ -13443,8 +13443,8 @@
           </p:nvSpPr>
           <p:spPr>
             <a:xfrm>
-              <a:off x="6462712" y="5737585"/>
-              <a:ext cx="1088223" cy="165219"/>
+              <a:off x="6462448" y="5513917"/>
+              <a:ext cx="1087438" cy="165100"/>
             </a:xfrm>
             <a:prstGeom prst="rect">
               <a:avLst/>
@@ -13484,8 +13484,8 @@
           </p:nvSpPr>
           <p:spPr>
             <a:xfrm>
-              <a:off x="5735907" y="3104669"/>
-              <a:ext cx="529549" cy="423639"/>
+              <a:off x="5736167" y="2882900"/>
+              <a:ext cx="529166" cy="423333"/>
             </a:xfrm>
             <a:custGeom>
               <a:avLst/>
@@ -13494,15 +13494,15 @@
               <a:cxnLst/>
               <a:rect l="l" t="t" r="r" b="b"/>
               <a:pathLst>
-                <a:path w="529549" h="423639">
+                <a:path w="529166" h="423333">
                   <a:moveTo>
-                    <a:pt x="529549" y="423639"/>
+                    <a:pt x="529166" y="423333"/>
                   </a:moveTo>
                   <a:lnTo>
-                    <a:pt x="529549" y="211819"/>
+                    <a:pt x="529166" y="211667"/>
                   </a:lnTo>
                   <a:lnTo>
-                    <a:pt x="0" y="211819"/>
+                    <a:pt x="0" y="211667"/>
                   </a:lnTo>
                   <a:lnTo>
                     <a:pt x="0" y="0"/>
@@ -13511,7 +13511,7 @@
               </a:pathLst>
             </a:custGeom>
             <a:noFill/>
-            <a:ln w="15886">
+            <a:ln w="15875">
               <a:solidFill>
                 <a:srgbClr val="232F3E"/>
               </a:solidFill>
@@ -13535,8 +13535,8 @@
           </p:nvSpPr>
           <p:spPr>
             <a:xfrm>
-              <a:off x="6477275" y="3104669"/>
-              <a:ext cx="529549" cy="423639"/>
+              <a:off x="6477000" y="2882900"/>
+              <a:ext cx="529167" cy="423333"/>
             </a:xfrm>
             <a:custGeom>
               <a:avLst/>
@@ -13545,24 +13545,24 @@
               <a:cxnLst/>
               <a:rect l="l" t="t" r="r" b="b"/>
               <a:pathLst>
-                <a:path w="529549" h="423639">
+                <a:path w="529167" h="423333">
                   <a:moveTo>
-                    <a:pt x="0" y="423639"/>
+                    <a:pt x="0" y="423333"/>
                   </a:moveTo>
                   <a:lnTo>
-                    <a:pt x="0" y="211819"/>
+                    <a:pt x="0" y="211667"/>
                   </a:lnTo>
                   <a:lnTo>
-                    <a:pt x="529549" y="211819"/>
+                    <a:pt x="529167" y="211667"/>
                   </a:lnTo>
                   <a:lnTo>
-                    <a:pt x="529549" y="0"/>
+                    <a:pt x="529167" y="0"/>
                   </a:lnTo>
                 </a:path>
               </a:pathLst>
             </a:custGeom>
             <a:noFill/>
-            <a:ln w="15886">
+            <a:ln w="15875">
               <a:solidFill>
                 <a:srgbClr val="232F3E"/>
               </a:solidFill>
@@ -13586,8 +13586,8 @@
           </p:nvSpPr>
           <p:spPr>
             <a:xfrm>
-              <a:off x="5735907" y="4354404"/>
-              <a:ext cx="529549" cy="593094"/>
+              <a:off x="5736167" y="4131733"/>
+              <a:ext cx="529166" cy="592667"/>
             </a:xfrm>
             <a:custGeom>
               <a:avLst/>
@@ -13596,24 +13596,24 @@
               <a:cxnLst/>
               <a:rect l="l" t="t" r="r" b="b"/>
               <a:pathLst>
-                <a:path w="529549" h="593094">
+                <a:path w="529166" h="592667">
                   <a:moveTo>
-                    <a:pt x="529549" y="0"/>
+                    <a:pt x="529166" y="0"/>
                   </a:moveTo>
                   <a:lnTo>
-                    <a:pt x="529549" y="296547"/>
+                    <a:pt x="529166" y="296334"/>
                   </a:lnTo>
                   <a:lnTo>
-                    <a:pt x="0" y="296547"/>
+                    <a:pt x="0" y="296334"/>
                   </a:lnTo>
                   <a:lnTo>
-                    <a:pt x="0" y="593094"/>
+                    <a:pt x="0" y="592667"/>
                   </a:lnTo>
                 </a:path>
               </a:pathLst>
             </a:custGeom>
             <a:noFill/>
-            <a:ln w="15886">
+            <a:ln w="15875">
               <a:solidFill>
                 <a:srgbClr val="232F3E"/>
               </a:solidFill>
@@ -13637,8 +13637,8 @@
           </p:nvSpPr>
           <p:spPr>
             <a:xfrm>
-              <a:off x="6477275" y="4354404"/>
-              <a:ext cx="529549" cy="593094"/>
+              <a:off x="6477000" y="4131733"/>
+              <a:ext cx="529167" cy="592667"/>
             </a:xfrm>
             <a:custGeom>
               <a:avLst/>
@@ -13647,24 +13647,24 @@
               <a:cxnLst/>
               <a:rect l="l" t="t" r="r" b="b"/>
               <a:pathLst>
-                <a:path w="529549" h="593094">
+                <a:path w="529167" h="592667">
                   <a:moveTo>
                     <a:pt x="0" y="0"/>
                   </a:moveTo>
                   <a:lnTo>
-                    <a:pt x="0" y="296547"/>
+                    <a:pt x="0" y="296334"/>
                   </a:lnTo>
                   <a:lnTo>
-                    <a:pt x="529549" y="296547"/>
+                    <a:pt x="529167" y="296334"/>
                   </a:lnTo>
                   <a:lnTo>
-                    <a:pt x="529549" y="593094"/>
+                    <a:pt x="529167" y="592667"/>
                   </a:lnTo>
                 </a:path>
               </a:pathLst>
             </a:custGeom>
             <a:noFill/>
-            <a:ln w="15886">
+            <a:ln w="15875">
               <a:solidFill>
                 <a:srgbClr val="232F3E"/>
               </a:solidFill>
@@ -13688,14 +13688,14 @@
           </p:nvSpPr>
           <p:spPr>
             <a:xfrm>
-              <a:off x="9125019" y="1727842"/>
-              <a:ext cx="2457106" cy="4299936"/>
-            </a:xfrm>
-            <a:prstGeom prst="rect">
-              <a:avLst/>
-            </a:prstGeom>
-            <a:noFill/>
-            <a:ln w="21182">
+              <a:off x="9122833" y="1507067"/>
+              <a:ext cx="2455333" cy="4296833"/>
+            </a:xfrm>
+            <a:prstGeom prst="rect">
+              <a:avLst/>
+            </a:prstGeom>
+            <a:noFill/>
+            <a:ln w="21167">
               <a:solidFill>
                 <a:srgbClr val="00A4A6"/>
               </a:solidFill>
@@ -13735,8 +13735,8 @@
           </p:blipFill>
           <p:spPr>
             <a:xfrm>
-              <a:off x="9125019" y="1727842"/>
-              <a:ext cx="254183" cy="254183"/>
+              <a:off x="9122833" y="1507067"/>
+              <a:ext cx="254000" cy="254000"/>
             </a:xfrm>
             <a:prstGeom prst="rect">
               <a:avLst/>
@@ -13751,8 +13751,8 @@
           </p:nvSpPr>
           <p:spPr>
             <a:xfrm>
-              <a:off x="9463930" y="1777619"/>
-              <a:ext cx="2288974" cy="192756"/>
+              <a:off x="9461500" y="1556808"/>
+              <a:ext cx="2287323" cy="192617"/>
             </a:xfrm>
             <a:prstGeom prst="rect">
               <a:avLst/>
@@ -13771,7 +13771,7 @@
                 </a:lnSpc>
               </a:pPr>
               <a:r>
-                <a:rPr sz="1167" b="1" lang="ko-KR">
+                <a:rPr sz="1166" b="1" lang="ko-KR">
                   <a:solidFill>
                     <a:srgbClr val="00A4A6"/>
                   </a:solidFill>
@@ -13806,8 +13806,8 @@
           </p:blipFill>
           <p:spPr>
             <a:xfrm>
-              <a:off x="10057025" y="3570671"/>
-              <a:ext cx="508367" cy="508367"/>
+              <a:off x="10054167" y="3348567"/>
+              <a:ext cx="508000" cy="508000"/>
             </a:xfrm>
             <a:prstGeom prst="rect">
               <a:avLst/>
@@ -13822,8 +13822,8 @@
           </p:nvSpPr>
           <p:spPr>
             <a:xfrm>
-              <a:off x="9370597" y="4128816"/>
-              <a:ext cx="1881222" cy="192756"/>
+              <a:off x="9368234" y="3906308"/>
+              <a:ext cx="1879865" cy="192617"/>
             </a:xfrm>
             <a:prstGeom prst="rect">
               <a:avLst/>
@@ -13842,7 +13842,7 @@
                 </a:lnSpc>
               </a:pPr>
               <a:r>
-                <a:rPr sz="1167" b="0" lang="ko-KR">
+                <a:rPr sz="1166" b="0" lang="ko-KR">
                   <a:solidFill>
                     <a:srgbClr val="232F3E"/>
                   </a:solidFill>
@@ -13877,8 +13877,8 @@
           </p:blipFill>
           <p:spPr>
             <a:xfrm>
-              <a:off x="10057025" y="2151481"/>
-              <a:ext cx="508367" cy="508367"/>
+              <a:off x="10054167" y="1930400"/>
+              <a:ext cx="508000" cy="508000"/>
             </a:xfrm>
             <a:prstGeom prst="rect">
               <a:avLst/>
@@ -13893,8 +13893,8 @@
           </p:nvSpPr>
           <p:spPr>
             <a:xfrm>
-              <a:off x="9931257" y="2709625"/>
-              <a:ext cx="759902" cy="192756"/>
+              <a:off x="9928490" y="2488142"/>
+              <a:ext cx="759354" cy="192617"/>
             </a:xfrm>
             <a:prstGeom prst="rect">
               <a:avLst/>
@@ -13913,7 +13913,7 @@
                 </a:lnSpc>
               </a:pPr>
               <a:r>
-                <a:rPr sz="1167" b="0" lang="ko-KR">
+                <a:rPr sz="1166" b="0" lang="ko-KR">
                   <a:solidFill>
                     <a:srgbClr val="232F3E"/>
                   </a:solidFill>
@@ -13934,8 +13934,8 @@
           </p:nvSpPr>
           <p:spPr>
             <a:xfrm>
-              <a:off x="9723409" y="2899204"/>
-              <a:ext cx="1175598" cy="165219"/>
+              <a:off x="9720792" y="2677583"/>
+              <a:ext cx="1174750" cy="165100"/>
             </a:xfrm>
             <a:prstGeom prst="rect">
               <a:avLst/>
@@ -13989,8 +13989,8 @@
           </p:blipFill>
           <p:spPr>
             <a:xfrm>
-              <a:off x="10057025" y="4989862"/>
-              <a:ext cx="508367" cy="508367"/>
+              <a:off x="10054167" y="4766733"/>
+              <a:ext cx="508000" cy="508000"/>
             </a:xfrm>
             <a:prstGeom prst="rect">
               <a:avLst/>
@@ -14005,8 +14005,8 @@
           </p:nvSpPr>
           <p:spPr>
             <a:xfrm>
-              <a:off x="9574473" y="5548006"/>
-              <a:ext cx="1473469" cy="192756"/>
+              <a:off x="9571964" y="5324475"/>
+              <a:ext cx="1472406" cy="192617"/>
             </a:xfrm>
             <a:prstGeom prst="rect">
               <a:avLst/>
@@ -14025,7 +14025,7 @@
                 </a:lnSpc>
               </a:pPr>
               <a:r>
-                <a:rPr sz="1167" b="0" lang="ko-KR">
+                <a:rPr sz="1166" b="0" lang="ko-KR">
                   <a:solidFill>
                     <a:srgbClr val="232F3E"/>
                   </a:solidFill>
@@ -14046,8 +14046,8 @@
           </p:nvSpPr>
           <p:spPr>
             <a:xfrm>
-              <a:off x="9723409" y="5737585"/>
-              <a:ext cx="1175598" cy="165219"/>
+              <a:off x="9720792" y="5513917"/>
+              <a:ext cx="1174750" cy="165100"/>
             </a:xfrm>
             <a:prstGeom prst="rect">
               <a:avLst/>
@@ -14087,13 +14087,13 @@
           </p:nvCxnSpPr>
           <p:spPr>
             <a:xfrm flipV="1">
-              <a:off x="10311208" y="3104669"/>
-              <a:ext cx="0" cy="423639"/>
+              <a:off x="10308167" y="2882900"/>
+              <a:ext cx="0" cy="423333"/>
             </a:xfrm>
             <a:prstGeom prst="line">
               <a:avLst/>
             </a:prstGeom>
-            <a:ln w="15886">
+            <a:ln w="15875">
               <a:solidFill>
                 <a:srgbClr val="232F3E"/>
               </a:solidFill>
@@ -14110,13 +14110,13 @@
           </p:nvCxnSpPr>
           <p:spPr>
             <a:xfrm>
-              <a:off x="10311208" y="4354404"/>
-              <a:ext cx="0" cy="593094"/>
+              <a:off x="10308167" y="4131733"/>
+              <a:ext cx="0" cy="592667"/>
             </a:xfrm>
             <a:prstGeom prst="line">
               <a:avLst/>
             </a:prstGeom>
-            <a:ln w="15886">
+            <a:ln w="15875">
               <a:solidFill>
                 <a:srgbClr val="232F3E"/>
               </a:solidFill>
@@ -14133,13 +14133,13 @@
           </p:nvCxnSpPr>
           <p:spPr>
             <a:xfrm>
-              <a:off x="6667913" y="3824855"/>
-              <a:ext cx="1609828" cy="0"/>
+              <a:off x="6667500" y="3602567"/>
+              <a:ext cx="1608667" cy="0"/>
             </a:xfrm>
             <a:prstGeom prst="line">
               <a:avLst/>
             </a:prstGeom>
-            <a:ln w="15886">
+            <a:ln w="15875">
               <a:solidFill>
                 <a:srgbClr val="232F3E"/>
               </a:solidFill>
@@ -14156,13 +14156,13 @@
           </p:nvCxnSpPr>
           <p:spPr>
             <a:xfrm>
-              <a:off x="8870835" y="3824855"/>
-              <a:ext cx="1143826" cy="0"/>
+              <a:off x="8868833" y="3602567"/>
+              <a:ext cx="1143000" cy="0"/>
             </a:xfrm>
             <a:prstGeom prst="line">
               <a:avLst/>
             </a:prstGeom>
-            <a:ln w="15886">
+            <a:ln w="15875">
               <a:solidFill>
                 <a:srgbClr val="232F3E"/>
               </a:solidFill>
@@ -14193,8 +14193,8 @@
           </p:blipFill>
           <p:spPr>
             <a:xfrm>
-              <a:off x="8320105" y="3570671"/>
-              <a:ext cx="508367" cy="508367"/>
+              <a:off x="8318500" y="3348567"/>
+              <a:ext cx="508000" cy="508000"/>
             </a:xfrm>
             <a:prstGeom prst="rect">
               <a:avLst/>
@@ -14209,8 +14209,8 @@
           </p:nvSpPr>
           <p:spPr>
             <a:xfrm>
-              <a:off x="7939492" y="4128816"/>
-              <a:ext cx="1269593" cy="192756"/>
+              <a:off x="7938161" y="3906308"/>
+              <a:ext cx="1268677" cy="192617"/>
             </a:xfrm>
             <a:prstGeom prst="rect">
               <a:avLst/>
@@ -14229,7 +14229,7 @@
                 </a:lnSpc>
               </a:pPr>
               <a:r>
-                <a:rPr sz="1167" b="0" lang="ko-KR">
+                <a:rPr sz="1166" b="0" lang="ko-KR">
                   <a:solidFill>
                     <a:srgbClr val="232F3E"/>
                   </a:solidFill>
@@ -14250,8 +14250,8 @@
           </p:nvSpPr>
           <p:spPr>
             <a:xfrm>
-              <a:off x="8177127" y="4318394"/>
-              <a:ext cx="794323" cy="165219"/>
+              <a:off x="8175625" y="4095750"/>
+              <a:ext cx="793750" cy="165100"/>
             </a:xfrm>
             <a:prstGeom prst="rect">
               <a:avLst/>
@@ -14285,34 +14285,42 @@
         </p:sp>
         <p:sp>
           <p:nvSpPr>
-            <p:cNvPr id="60" name="Rectangle 59"/>
-            <p:cNvSpPr/>
-            <p:nvPr/>
-          </p:nvSpPr>
-          <p:spPr>
-            <a:xfrm>
-              <a:off x="398056" y="4820406"/>
-              <a:ext cx="4194026" cy="1419191"/>
-            </a:xfrm>
-            <a:prstGeom prst="rect">
-              <a:avLst/>
-            </a:prstGeom>
-            <a:solidFill>
-              <a:srgbClr val="F8F9F9"/>
-            </a:solidFill>
-            <a:ln w="10591">
-              <a:solidFill>
-                <a:srgbClr val="D5DBDB"/>
-              </a:solidFill>
-              <a:prstDash val="solid"/>
-              <a:miter lim="800000"/>
-            </a:ln>
-          </p:spPr>
-          <p:txBody>
-            <a:bodyPr rtlCol="0" anchor="ctr"/>
-            <a:lstStyle/>
-            <a:p>
-              <a:pPr algn="ctr"/>
+            <p:cNvPr id="60" name="TextBox 59"/>
+            <p:cNvSpPr txBox="1"/>
+            <p:nvPr/>
+          </p:nvSpPr>
+          <p:spPr>
+            <a:xfrm>
+              <a:off x="4762500" y="6106583"/>
+              <a:ext cx="8977313" cy="165100"/>
+            </a:xfrm>
+            <a:prstGeom prst="rect">
+              <a:avLst/>
+            </a:prstGeom>
+            <a:noFill/>
+          </p:spPr>
+          <p:txBody>
+            <a:bodyPr wrap="none" lIns="0" rIns="0" tIns="0" bIns="0" anchor="t">
+              <a:noAutofit/>
+            </a:bodyPr>
+            <a:lstStyle/>
+            <a:p>
+              <a:pPr algn="l">
+                <a:lnSpc>
+                  <a:spcPct val="100000"/>
+                </a:lnSpc>
+              </a:pPr>
+              <a:r>
+                <a:rPr sz="1000" b="0" lang="ko-KR">
+                  <a:solidFill>
+                    <a:srgbClr val="545B64"/>
+                  </a:solidFill>
+                  <a:latin typeface="Arial"/>
+                  <a:ea typeface="Malgun Gothic"/>
+                  <a:cs typeface="Malgun Gothic"/>
+                </a:rPr>
+                <a:t>Hub &amp; spoke: VPC·VPN은 리전 TGW에 attachment로 연결 · VPC CIDR과 VPN(BGP) 경로는 TGW 라우팅 테이블에 전파</a:t>
+              </a:r>
             </a:p>
           </p:txBody>
         </p:sp>
@@ -14324,8 +14332,8 @@
           </p:nvSpPr>
           <p:spPr>
             <a:xfrm>
-              <a:off x="525147" y="4932671"/>
-              <a:ext cx="1088223" cy="165219"/>
+              <a:off x="4762500" y="6275917"/>
+              <a:ext cx="4572000" cy="165100"/>
             </a:xfrm>
             <a:prstGeom prst="rect">
               <a:avLst/>
@@ -14344,15 +14352,15 @@
                 </a:lnSpc>
               </a:pPr>
               <a:r>
-                <a:rPr sz="1000" b="1" lang="ko-KR">
-                  <a:solidFill>
-                    <a:srgbClr val="232F3E"/>
-                  </a:solidFill>
-                  <a:latin typeface="Arial"/>
-                  <a:ea typeface="Malgun Gothic"/>
-                  <a:cs typeface="Malgun Gothic"/>
-                </a:rPr>
-                <a:t>Hub &amp; spoke</a:t>
+                <a:rPr sz="1000" b="0" lang="ko-KR">
+                  <a:solidFill>
+                    <a:srgbClr val="545B64"/>
+                  </a:solidFill>
+                  <a:latin typeface="Arial"/>
+                  <a:ea typeface="Malgun Gothic"/>
+                  <a:cs typeface="Malgun Gothic"/>
+                </a:rPr>
+                <a:t>라우팅: VPC 서브넷 10.0.0.0/8 · 192.168.0.0/16 → TGW</a:t>
               </a:r>
             </a:p>
           </p:txBody>
@@ -14365,8 +14373,8 @@
           </p:nvSpPr>
           <p:spPr>
             <a:xfrm>
-              <a:off x="1565181" y="4932671"/>
-              <a:ext cx="3336157" cy="165219"/>
+              <a:off x="4762500" y="6445250"/>
+              <a:ext cx="7659688" cy="165100"/>
             </a:xfrm>
             <a:prstGeom prst="rect">
               <a:avLst/>
@@ -14393,335 +14401,7 @@
                   <a:ea typeface="Malgun Gothic"/>
                   <a:cs typeface="Malgun Gothic"/>
                 </a:rPr>
-                <a:t>VPC·VPN은 리전 TGW에 attachment로 연결</a:t>
-              </a:r>
-            </a:p>
-          </p:txBody>
-        </p:sp>
-        <p:sp>
-          <p:nvSpPr>
-            <p:cNvPr id="63" name="TextBox 62"/>
-            <p:cNvSpPr txBox="1"/>
-            <p:nvPr/>
-          </p:nvSpPr>
-          <p:spPr>
-            <a:xfrm>
-              <a:off x="1565181" y="5102126"/>
-              <a:ext cx="3352044" cy="165219"/>
-            </a:xfrm>
-            <a:prstGeom prst="rect">
-              <a:avLst/>
-            </a:prstGeom>
-            <a:noFill/>
-          </p:spPr>
-          <p:txBody>
-            <a:bodyPr wrap="none" lIns="0" rIns="0" tIns="0" bIns="0" anchor="t">
-              <a:noAutofit/>
-            </a:bodyPr>
-            <a:lstStyle/>
-            <a:p>
-              <a:pPr algn="l">
-                <a:lnSpc>
-                  <a:spcPct val="100000"/>
-                </a:lnSpc>
-              </a:pPr>
-              <a:r>
-                <a:rPr sz="1000" b="0" lang="ko-KR">
-                  <a:solidFill>
-                    <a:srgbClr val="545B64"/>
-                  </a:solidFill>
-                  <a:latin typeface="Arial"/>
-                  <a:ea typeface="Malgun Gothic"/>
-                  <a:cs typeface="Malgun Gothic"/>
-                </a:rPr>
-                <a:t>VPC CIDR·VPN(BGP) 경로는 TGW RT에 전파</a:t>
-              </a:r>
-            </a:p>
-          </p:txBody>
-        </p:sp>
-        <p:sp>
-          <p:nvSpPr>
-            <p:cNvPr id="64" name="TextBox 63"/>
-            <p:cNvSpPr txBox="1"/>
-            <p:nvPr/>
-          </p:nvSpPr>
-          <p:spPr>
-            <a:xfrm>
-              <a:off x="525147" y="5335128"/>
-              <a:ext cx="1215314" cy="165219"/>
-            </a:xfrm>
-            <a:prstGeom prst="rect">
-              <a:avLst/>
-            </a:prstGeom>
-            <a:noFill/>
-          </p:spPr>
-          <p:txBody>
-            <a:bodyPr wrap="none" lIns="0" rIns="0" tIns="0" bIns="0" anchor="t">
-              <a:noAutofit/>
-            </a:bodyPr>
-            <a:lstStyle/>
-            <a:p>
-              <a:pPr algn="l">
-                <a:lnSpc>
-                  <a:spcPct val="100000"/>
-                </a:lnSpc>
-              </a:pPr>
-              <a:r>
-                <a:rPr sz="1000" b="1" lang="ko-KR">
-                  <a:solidFill>
-                    <a:srgbClr val="232F3E"/>
-                  </a:solidFill>
-                  <a:latin typeface="Arial"/>
-                  <a:ea typeface="Malgun Gothic"/>
-                  <a:cs typeface="Malgun Gothic"/>
-                </a:rPr>
-                <a:t>VPC 서브넷 RT</a:t>
-              </a:r>
-            </a:p>
-          </p:txBody>
-        </p:sp>
-        <p:sp>
-          <p:nvSpPr>
-            <p:cNvPr id="65" name="TextBox 64"/>
-            <p:cNvSpPr txBox="1"/>
-            <p:nvPr/>
-          </p:nvSpPr>
-          <p:spPr>
-            <a:xfrm>
-              <a:off x="1565181" y="5335128"/>
-              <a:ext cx="3010485" cy="165219"/>
-            </a:xfrm>
-            <a:prstGeom prst="rect">
-              <a:avLst/>
-            </a:prstGeom>
-            <a:noFill/>
-          </p:spPr>
-          <p:txBody>
-            <a:bodyPr wrap="none" lIns="0" rIns="0" tIns="0" bIns="0" anchor="t">
-              <a:noAutofit/>
-            </a:bodyPr>
-            <a:lstStyle/>
-            <a:p>
-              <a:pPr algn="l">
-                <a:lnSpc>
-                  <a:spcPct val="100000"/>
-                </a:lnSpc>
-              </a:pPr>
-              <a:r>
-                <a:rPr sz="1000" b="0" lang="ko-KR">
-                  <a:solidFill>
-                    <a:srgbClr val="545B64"/>
-                  </a:solidFill>
-                  <a:latin typeface="Arial"/>
-                  <a:ea typeface="Malgun Gothic"/>
-                  <a:cs typeface="Malgun Gothic"/>
-                </a:rPr>
-                <a:t>10.0.0.0/8 · 192.168.0.0/16 → TGW</a:t>
-              </a:r>
-            </a:p>
-          </p:txBody>
-        </p:sp>
-        <p:sp>
-          <p:nvSpPr>
-            <p:cNvPr id="66" name="TextBox 65"/>
-            <p:cNvSpPr txBox="1"/>
-            <p:nvPr/>
-          </p:nvSpPr>
-          <p:spPr>
-            <a:xfrm>
-              <a:off x="525147" y="5568129"/>
-              <a:ext cx="826096" cy="165219"/>
-            </a:xfrm>
-            <a:prstGeom prst="rect">
-              <a:avLst/>
-            </a:prstGeom>
-            <a:noFill/>
-          </p:spPr>
-          <p:txBody>
-            <a:bodyPr wrap="none" lIns="0" rIns="0" tIns="0" bIns="0" anchor="t">
-              <a:noAutofit/>
-            </a:bodyPr>
-            <a:lstStyle/>
-            <a:p>
-              <a:pPr algn="l">
-                <a:lnSpc>
-                  <a:spcPct val="100000"/>
-                </a:lnSpc>
-              </a:pPr>
-              <a:r>
-                <a:rPr sz="1000" b="1" lang="ko-KR">
-                  <a:solidFill>
-                    <a:srgbClr val="232F3E"/>
-                  </a:solidFill>
-                  <a:latin typeface="Arial"/>
-                  <a:ea typeface="Malgun Gothic"/>
-                  <a:cs typeface="Malgun Gothic"/>
-                </a:rPr>
-                <a:t>TGW A RT</a:t>
-              </a:r>
-            </a:p>
-          </p:txBody>
-        </p:sp>
-        <p:sp>
-          <p:nvSpPr>
-            <p:cNvPr id="67" name="TextBox 66"/>
-            <p:cNvSpPr txBox="1"/>
-            <p:nvPr/>
-          </p:nvSpPr>
-          <p:spPr>
-            <a:xfrm>
-              <a:off x="1565181" y="5568129"/>
-              <a:ext cx="2629209" cy="165219"/>
-            </a:xfrm>
-            <a:prstGeom prst="rect">
-              <a:avLst/>
-            </a:prstGeom>
-            <a:noFill/>
-          </p:spPr>
-          <p:txBody>
-            <a:bodyPr wrap="none" lIns="0" rIns="0" tIns="0" bIns="0" anchor="t">
-              <a:noAutofit/>
-            </a:bodyPr>
-            <a:lstStyle/>
-            <a:p>
-              <a:pPr algn="l">
-                <a:lnSpc>
-                  <a:spcPct val="100000"/>
-                </a:lnSpc>
-              </a:pPr>
-              <a:r>
-                <a:rPr sz="1000" b="0" lang="ko-KR">
-                  <a:solidFill>
-                    <a:srgbClr val="545B64"/>
-                  </a:solidFill>
-                  <a:latin typeface="Arial"/>
-                  <a:ea typeface="Malgun Gothic"/>
-                  <a:cs typeface="Malgun Gothic"/>
-                </a:rPr>
-                <a:t>10.16.0.0/13 → peering (정적)</a:t>
-              </a:r>
-            </a:p>
-          </p:txBody>
-        </p:sp>
-        <p:sp>
-          <p:nvSpPr>
-            <p:cNvPr id="68" name="TextBox 67"/>
-            <p:cNvSpPr txBox="1"/>
-            <p:nvPr/>
-          </p:nvSpPr>
-          <p:spPr>
-            <a:xfrm>
-              <a:off x="525147" y="5801131"/>
-              <a:ext cx="826096" cy="165219"/>
-            </a:xfrm>
-            <a:prstGeom prst="rect">
-              <a:avLst/>
-            </a:prstGeom>
-            <a:noFill/>
-          </p:spPr>
-          <p:txBody>
-            <a:bodyPr wrap="none" lIns="0" rIns="0" tIns="0" bIns="0" anchor="t">
-              <a:noAutofit/>
-            </a:bodyPr>
-            <a:lstStyle/>
-            <a:p>
-              <a:pPr algn="l">
-                <a:lnSpc>
-                  <a:spcPct val="100000"/>
-                </a:lnSpc>
-              </a:pPr>
-              <a:r>
-                <a:rPr sz="1000" b="1" lang="ko-KR">
-                  <a:solidFill>
-                    <a:srgbClr val="232F3E"/>
-                  </a:solidFill>
-                  <a:latin typeface="Arial"/>
-                  <a:ea typeface="Malgun Gothic"/>
-                  <a:cs typeface="Malgun Gothic"/>
-                </a:rPr>
-                <a:t>TGW B RT</a:t>
-              </a:r>
-            </a:p>
-          </p:txBody>
-        </p:sp>
-        <p:sp>
-          <p:nvSpPr>
-            <p:cNvPr id="69" name="TextBox 68"/>
-            <p:cNvSpPr txBox="1"/>
-            <p:nvPr/>
-          </p:nvSpPr>
-          <p:spPr>
-            <a:xfrm>
-              <a:off x="1565181" y="5801131"/>
-              <a:ext cx="2573607" cy="165219"/>
-            </a:xfrm>
-            <a:prstGeom prst="rect">
-              <a:avLst/>
-            </a:prstGeom>
-            <a:noFill/>
-          </p:spPr>
-          <p:txBody>
-            <a:bodyPr wrap="none" lIns="0" rIns="0" tIns="0" bIns="0" anchor="t">
-              <a:noAutofit/>
-            </a:bodyPr>
-            <a:lstStyle/>
-            <a:p>
-              <a:pPr algn="l">
-                <a:lnSpc>
-                  <a:spcPct val="100000"/>
-                </a:lnSpc>
-              </a:pPr>
-              <a:r>
-                <a:rPr sz="1000" b="0" lang="ko-KR">
-                  <a:solidFill>
-                    <a:srgbClr val="545B64"/>
-                  </a:solidFill>
-                  <a:latin typeface="Arial"/>
-                  <a:ea typeface="Malgun Gothic"/>
-                  <a:cs typeface="Malgun Gothic"/>
-                </a:rPr>
-                <a:t>10.0.0.0/13 · 192.168.0.0/16</a:t>
-              </a:r>
-            </a:p>
-          </p:txBody>
-        </p:sp>
-        <p:sp>
-          <p:nvSpPr>
-            <p:cNvPr id="70" name="TextBox 69"/>
-            <p:cNvSpPr txBox="1"/>
-            <p:nvPr/>
-          </p:nvSpPr>
-          <p:spPr>
-            <a:xfrm>
-              <a:off x="1565181" y="5970586"/>
-              <a:ext cx="1493327" cy="165219"/>
-            </a:xfrm>
-            <a:prstGeom prst="rect">
-              <a:avLst/>
-            </a:prstGeom>
-            <a:noFill/>
-          </p:spPr>
-          <p:txBody>
-            <a:bodyPr wrap="none" lIns="0" rIns="0" tIns="0" bIns="0" anchor="t">
-              <a:noAutofit/>
-            </a:bodyPr>
-            <a:lstStyle/>
-            <a:p>
-              <a:pPr algn="l">
-                <a:lnSpc>
-                  <a:spcPct val="100000"/>
-                </a:lnSpc>
-              </a:pPr>
-              <a:r>
-                <a:rPr sz="1000" b="0" lang="ko-KR">
-                  <a:solidFill>
-                    <a:srgbClr val="545B64"/>
-                  </a:solidFill>
-                  <a:latin typeface="Arial"/>
-                  <a:ea typeface="Malgun Gothic"/>
-                  <a:cs typeface="Malgun Gothic"/>
-                </a:rPr>
-                <a:t>→ peering (정적)</a:t>
+                <a:t>TGW RT: A 10.16.0.0/13 → peering · B 10.0.0.0/13 · 192.168.0.0/16 → peering (정적 경로)</a:t>
               </a:r>
             </a:p>
           </p:txBody>

--- a/docs/examples/reference-architectures.pptx
+++ b/docs/examples/reference-architectures.pptx
@@ -14469,9 +14469,9 @@
         </p:nvGrpSpPr>
         <p:grpSpPr>
           <a:xfrm>
-            <a:off x="379677" y="999067"/>
+            <a:off x="316177" y="999067"/>
             <a:ext cx="14082448" cy="5643033"/>
-            <a:chOff x="379677" y="999067"/>
+            <a:chOff x="316177" y="999067"/>
             <a:chExt cx="14082448" cy="5643033"/>
           </a:xfrm>
         </p:grpSpPr>
@@ -14483,8 +14483,8 @@
           </p:nvSpPr>
           <p:spPr>
             <a:xfrm>
-              <a:off x="381000" y="999067"/>
-              <a:ext cx="10625667" cy="5249333"/>
+              <a:off x="317500" y="999067"/>
+              <a:ext cx="10752667" cy="5249333"/>
             </a:xfrm>
             <a:prstGeom prst="rect">
               <a:avLst/>
@@ -14528,7 +14528,7 @@
           </p:blipFill>
           <p:spPr>
             <a:xfrm>
-              <a:off x="381000" y="999067"/>
+              <a:off x="317500" y="999067"/>
               <a:ext cx="338667" cy="338667"/>
             </a:xfrm>
             <a:prstGeom prst="rect">
@@ -14544,7 +14544,7 @@
           </p:nvSpPr>
           <p:spPr>
             <a:xfrm>
-              <a:off x="825500" y="1081088"/>
+              <a:off x="762000" y="1081088"/>
               <a:ext cx="1141016" cy="206375"/>
             </a:xfrm>
             <a:prstGeom prst="rect">
@@ -14585,8 +14585,8 @@
           </p:nvSpPr>
           <p:spPr>
             <a:xfrm>
-              <a:off x="592667" y="1358900"/>
-              <a:ext cx="10202333" cy="4804833"/>
+              <a:off x="529167" y="1358900"/>
+              <a:ext cx="10329333" cy="4804833"/>
             </a:xfrm>
             <a:prstGeom prst="rect">
               <a:avLst/>
@@ -14632,7 +14632,7 @@
           </p:blipFill>
           <p:spPr>
             <a:xfrm>
-              <a:off x="592667" y="1358900"/>
+              <a:off x="529167" y="1358900"/>
               <a:ext cx="254000" cy="254000"/>
             </a:xfrm>
             <a:prstGeom prst="rect">
@@ -14648,7 +14648,7 @@
           </p:nvSpPr>
           <p:spPr>
             <a:xfrm>
-              <a:off x="931333" y="1408642"/>
+              <a:off x="867833" y="1408642"/>
               <a:ext cx="2287323" cy="192617"/>
             </a:xfrm>
             <a:prstGeom prst="rect">
@@ -14689,7 +14689,7 @@
           </p:nvSpPr>
           <p:spPr>
             <a:xfrm>
-              <a:off x="762000" y="1993900"/>
+              <a:off x="698500" y="1993900"/>
               <a:ext cx="2116667" cy="1524000"/>
             </a:xfrm>
             <a:prstGeom prst="rect">
@@ -14734,7 +14734,7 @@
           </p:blipFill>
           <p:spPr>
             <a:xfrm>
-              <a:off x="762000" y="1993900"/>
+              <a:off x="698500" y="1993900"/>
               <a:ext cx="254000" cy="254000"/>
             </a:xfrm>
             <a:prstGeom prst="rect">
@@ -14750,7 +14750,7 @@
           </p:nvSpPr>
           <p:spPr>
             <a:xfrm>
-              <a:off x="1100667" y="2043642"/>
+              <a:off x="1037167" y="2043642"/>
               <a:ext cx="1879865" cy="192617"/>
             </a:xfrm>
             <a:prstGeom prst="rect">
@@ -14791,7 +14791,7 @@
           </p:nvSpPr>
           <p:spPr>
             <a:xfrm>
-              <a:off x="889000" y="2311400"/>
+              <a:off x="825500" y="2311400"/>
               <a:ext cx="1862667" cy="1121833"/>
             </a:xfrm>
             <a:prstGeom prst="rect">
@@ -14836,7 +14836,7 @@
           </p:blipFill>
           <p:spPr>
             <a:xfrm>
-              <a:off x="889000" y="2311400"/>
+              <a:off x="825500" y="2311400"/>
               <a:ext cx="254000" cy="254000"/>
             </a:xfrm>
             <a:prstGeom prst="rect">
@@ -14852,7 +14852,7 @@
           </p:nvSpPr>
           <p:spPr>
             <a:xfrm>
-              <a:off x="1227667" y="2361142"/>
+              <a:off x="1164167" y="2361142"/>
               <a:ext cx="1166813" cy="192617"/>
             </a:xfrm>
             <a:prstGeom prst="rect">
@@ -14907,7 +14907,7 @@
           </p:blipFill>
           <p:spPr>
             <a:xfrm>
-              <a:off x="1566333" y="2607733"/>
+              <a:off x="1502833" y="2607733"/>
               <a:ext cx="508000" cy="508000"/>
             </a:xfrm>
             <a:prstGeom prst="rect">
@@ -14923,7 +14923,7 @@
           </p:nvSpPr>
           <p:spPr>
             <a:xfrm>
-              <a:off x="1593453" y="3165475"/>
+              <a:off x="1529953" y="3165475"/>
               <a:ext cx="453760" cy="192617"/>
             </a:xfrm>
             <a:prstGeom prst="rect">
@@ -14964,7 +14964,7 @@
           </p:nvSpPr>
           <p:spPr>
             <a:xfrm>
-              <a:off x="762000" y="4428067"/>
+              <a:off x="698500" y="4428067"/>
               <a:ext cx="2116667" cy="1524000"/>
             </a:xfrm>
             <a:prstGeom prst="rect">
@@ -15009,7 +15009,7 @@
           </p:blipFill>
           <p:spPr>
             <a:xfrm>
-              <a:off x="762000" y="4428067"/>
+              <a:off x="698500" y="4428067"/>
               <a:ext cx="254000" cy="254000"/>
             </a:xfrm>
             <a:prstGeom prst="rect">
@@ -15025,7 +15025,7 @@
           </p:nvSpPr>
           <p:spPr>
             <a:xfrm>
-              <a:off x="1100667" y="4477808"/>
+              <a:off x="1037167" y="4477808"/>
               <a:ext cx="1879865" cy="192617"/>
             </a:xfrm>
             <a:prstGeom prst="rect">
@@ -15066,7 +15066,7 @@
           </p:nvSpPr>
           <p:spPr>
             <a:xfrm>
-              <a:off x="889000" y="4745567"/>
+              <a:off x="825500" y="4745567"/>
               <a:ext cx="1862667" cy="1121833"/>
             </a:xfrm>
             <a:prstGeom prst="rect">
@@ -15111,7 +15111,7 @@
           </p:blipFill>
           <p:spPr>
             <a:xfrm>
-              <a:off x="889000" y="4745567"/>
+              <a:off x="825500" y="4745567"/>
               <a:ext cx="254000" cy="254000"/>
             </a:xfrm>
             <a:prstGeom prst="rect">
@@ -15127,7 +15127,7 @@
           </p:nvSpPr>
           <p:spPr>
             <a:xfrm>
-              <a:off x="1227667" y="4795308"/>
+              <a:off x="1164167" y="4795308"/>
               <a:ext cx="1166813" cy="192617"/>
             </a:xfrm>
             <a:prstGeom prst="rect">
@@ -15182,7 +15182,7 @@
           </p:blipFill>
           <p:spPr>
             <a:xfrm>
-              <a:off x="1566333" y="5041900"/>
+              <a:off x="1502833" y="5041900"/>
               <a:ext cx="508000" cy="508000"/>
             </a:xfrm>
             <a:prstGeom prst="rect">
@@ -15198,7 +15198,7 @@
           </p:nvSpPr>
           <p:spPr>
             <a:xfrm>
-              <a:off x="1593453" y="5599642"/>
+              <a:off x="1529953" y="5599642"/>
               <a:ext cx="453760" cy="192617"/>
             </a:xfrm>
             <a:prstGeom prst="rect">
@@ -15253,7 +15253,7 @@
           </p:blipFill>
           <p:spPr>
             <a:xfrm>
-              <a:off x="3492500" y="3602567"/>
+              <a:off x="3429000" y="3602567"/>
               <a:ext cx="508000" cy="508000"/>
             </a:xfrm>
             <a:prstGeom prst="rect">
@@ -15269,7 +15269,7 @@
           </p:nvSpPr>
           <p:spPr>
             <a:xfrm>
-              <a:off x="3519620" y="4160308"/>
+              <a:off x="3456120" y="4160308"/>
               <a:ext cx="453760" cy="192617"/>
             </a:xfrm>
             <a:prstGeom prst="rect">
@@ -15324,7 +15324,7 @@
           </p:blipFill>
           <p:spPr>
             <a:xfrm>
-              <a:off x="3492500" y="2607733"/>
+              <a:off x="3429000" y="2607733"/>
               <a:ext cx="508000" cy="508000"/>
             </a:xfrm>
             <a:prstGeom prst="rect">
@@ -15340,7 +15340,7 @@
           </p:nvSpPr>
           <p:spPr>
             <a:xfrm>
-              <a:off x="3112161" y="3165475"/>
+              <a:off x="3048661" y="3165475"/>
               <a:ext cx="1268677" cy="192617"/>
             </a:xfrm>
             <a:prstGeom prst="rect">
@@ -15381,7 +15381,7 @@
           </p:nvSpPr>
           <p:spPr>
             <a:xfrm>
-              <a:off x="3087688" y="3354917"/>
+              <a:off x="3024188" y="3354917"/>
               <a:ext cx="1317625" cy="165100"/>
             </a:xfrm>
             <a:prstGeom prst="rect">
@@ -15436,7 +15436,7 @@
           </p:blipFill>
           <p:spPr>
             <a:xfrm>
-              <a:off x="3492500" y="5041900"/>
+              <a:off x="3429000" y="5041900"/>
               <a:ext cx="508000" cy="508000"/>
             </a:xfrm>
             <a:prstGeom prst="rect">
@@ -15452,7 +15452,7 @@
           </p:nvSpPr>
           <p:spPr>
             <a:xfrm>
-              <a:off x="3264958" y="5599642"/>
+              <a:off x="3201458" y="5599642"/>
               <a:ext cx="963083" cy="192617"/>
             </a:xfrm>
             <a:prstGeom prst="rect">
@@ -15493,7 +15493,7 @@
           </p:nvSpPr>
           <p:spPr>
             <a:xfrm>
-              <a:off x="2825750" y="5789083"/>
+              <a:off x="2762250" y="5789083"/>
               <a:ext cx="1841500" cy="165100"/>
             </a:xfrm>
             <a:prstGeom prst="rect">
@@ -15534,7 +15534,7 @@
           </p:nvSpPr>
           <p:spPr>
             <a:xfrm>
-              <a:off x="2921000" y="2861733"/>
+              <a:off x="2857500" y="2861733"/>
               <a:ext cx="529167" cy="910167"/>
             </a:xfrm>
             <a:custGeom>
@@ -15587,7 +15587,7 @@
           </p:nvSpPr>
           <p:spPr>
             <a:xfrm>
-              <a:off x="2921000" y="3941233"/>
+              <a:off x="2857500" y="3941233"/>
               <a:ext cx="529167" cy="1354667"/>
             </a:xfrm>
             <a:custGeom>
@@ -15640,8 +15640,8 @@
           </p:nvSpPr>
           <p:spPr>
             <a:xfrm>
-              <a:off x="4572000" y="1676400"/>
-              <a:ext cx="5799667" cy="4360333"/>
+              <a:off x="4508500" y="1676400"/>
+              <a:ext cx="5926667" cy="4360333"/>
             </a:xfrm>
             <a:prstGeom prst="rect">
               <a:avLst/>
@@ -15685,7 +15685,7 @@
           </p:blipFill>
           <p:spPr>
             <a:xfrm>
-              <a:off x="4572000" y="1676400"/>
+              <a:off x="4508500" y="1676400"/>
               <a:ext cx="254000" cy="254000"/>
             </a:xfrm>
             <a:prstGeom prst="rect">
@@ -15701,7 +15701,7 @@
           </p:nvSpPr>
           <p:spPr>
             <a:xfrm>
-              <a:off x="4910667" y="1726142"/>
+              <a:off x="4847167" y="1726142"/>
               <a:ext cx="3000375" cy="192617"/>
             </a:xfrm>
             <a:prstGeom prst="rect">
@@ -15742,7 +15742,7 @@
           </p:nvSpPr>
           <p:spPr>
             <a:xfrm>
-              <a:off x="4741333" y="1993900"/>
+              <a:off x="4677833" y="1993900"/>
               <a:ext cx="5037667" cy="1524000"/>
             </a:xfrm>
             <a:prstGeom prst="rect">
@@ -15775,7 +15775,7 @@
           </p:nvSpPr>
           <p:spPr>
             <a:xfrm>
-              <a:off x="4868333" y="2043642"/>
+              <a:off x="4804833" y="2043642"/>
               <a:ext cx="2083594" cy="192617"/>
             </a:xfrm>
             <a:prstGeom prst="rect">
@@ -15816,7 +15816,7 @@
           </p:nvSpPr>
           <p:spPr>
             <a:xfrm>
-              <a:off x="4741333" y="4428067"/>
+              <a:off x="4677833" y="4428067"/>
               <a:ext cx="5037667" cy="1524000"/>
             </a:xfrm>
             <a:prstGeom prst="rect">
@@ -15849,7 +15849,7 @@
           </p:nvSpPr>
           <p:spPr>
             <a:xfrm>
-              <a:off x="4868333" y="4477808"/>
+              <a:off x="4804833" y="4477808"/>
               <a:ext cx="2083594" cy="192617"/>
             </a:xfrm>
             <a:prstGeom prst="rect">
@@ -15890,7 +15890,7 @@
           </p:nvSpPr>
           <p:spPr>
             <a:xfrm>
-              <a:off x="4868333" y="2311400"/>
+              <a:off x="4804833" y="2311400"/>
               <a:ext cx="1439333" cy="1121833"/>
             </a:xfrm>
             <a:prstGeom prst="rect">
@@ -15935,7 +15935,7 @@
           </p:blipFill>
           <p:spPr>
             <a:xfrm>
-              <a:off x="4868333" y="2311400"/>
+              <a:off x="4804833" y="2311400"/>
               <a:ext cx="254000" cy="254000"/>
             </a:xfrm>
             <a:prstGeom prst="rect">
@@ -15951,7 +15951,7 @@
           </p:nvSpPr>
           <p:spPr>
             <a:xfrm>
-              <a:off x="5207000" y="2361142"/>
+              <a:off x="5143500" y="2361142"/>
               <a:ext cx="1166813" cy="192617"/>
             </a:xfrm>
             <a:prstGeom prst="rect">
@@ -15992,7 +15992,7 @@
           </p:nvSpPr>
           <p:spPr>
             <a:xfrm>
-              <a:off x="6434667" y="2311400"/>
+              <a:off x="6371167" y="2311400"/>
               <a:ext cx="1608667" cy="1121833"/>
             </a:xfrm>
             <a:prstGeom prst="rect">
@@ -16037,7 +16037,7 @@
           </p:blipFill>
           <p:spPr>
             <a:xfrm>
-              <a:off x="6434667" y="2311400"/>
+              <a:off x="6371167" y="2311400"/>
               <a:ext cx="254000" cy="254000"/>
             </a:xfrm>
             <a:prstGeom prst="rect">
@@ -16053,7 +16053,7 @@
           </p:nvSpPr>
           <p:spPr>
             <a:xfrm>
-              <a:off x="6773333" y="2361142"/>
+              <a:off x="6709833" y="2361142"/>
               <a:ext cx="1676135" cy="192617"/>
             </a:xfrm>
             <a:prstGeom prst="rect">
@@ -16094,7 +16094,7 @@
           </p:nvSpPr>
           <p:spPr>
             <a:xfrm>
-              <a:off x="8170333" y="2311400"/>
+              <a:off x="8106833" y="2311400"/>
               <a:ext cx="1481667" cy="1121833"/>
             </a:xfrm>
             <a:prstGeom prst="rect">
@@ -16139,7 +16139,7 @@
           </p:blipFill>
           <p:spPr>
             <a:xfrm>
-              <a:off x="8170333" y="2311400"/>
+              <a:off x="8106833" y="2311400"/>
               <a:ext cx="254000" cy="254000"/>
             </a:xfrm>
             <a:prstGeom prst="rect">
@@ -16155,7 +16155,7 @@
           </p:nvSpPr>
           <p:spPr>
             <a:xfrm>
-              <a:off x="8509000" y="2361142"/>
+              <a:off x="8445500" y="2361142"/>
               <a:ext cx="1472406" cy="192617"/>
             </a:xfrm>
             <a:prstGeom prst="rect">
@@ -16196,7 +16196,7 @@
           </p:nvSpPr>
           <p:spPr>
             <a:xfrm>
-              <a:off x="4868333" y="4745567"/>
+              <a:off x="4804833" y="4745567"/>
               <a:ext cx="1439333" cy="1121833"/>
             </a:xfrm>
             <a:prstGeom prst="rect">
@@ -16241,7 +16241,7 @@
           </p:blipFill>
           <p:spPr>
             <a:xfrm>
-              <a:off x="4868333" y="4745567"/>
+              <a:off x="4804833" y="4745567"/>
               <a:ext cx="254000" cy="254000"/>
             </a:xfrm>
             <a:prstGeom prst="rect">
@@ -16257,7 +16257,7 @@
           </p:nvSpPr>
           <p:spPr>
             <a:xfrm>
-              <a:off x="5207000" y="4795308"/>
+              <a:off x="5143500" y="4795308"/>
               <a:ext cx="1166813" cy="192617"/>
             </a:xfrm>
             <a:prstGeom prst="rect">
@@ -16298,7 +16298,7 @@
           </p:nvSpPr>
           <p:spPr>
             <a:xfrm>
-              <a:off x="6434667" y="4745567"/>
+              <a:off x="6371167" y="4745567"/>
               <a:ext cx="1608667" cy="1121833"/>
             </a:xfrm>
             <a:prstGeom prst="rect">
@@ -16343,7 +16343,7 @@
           </p:blipFill>
           <p:spPr>
             <a:xfrm>
-              <a:off x="6434667" y="4745567"/>
+              <a:off x="6371167" y="4745567"/>
               <a:ext cx="254000" cy="254000"/>
             </a:xfrm>
             <a:prstGeom prst="rect">
@@ -16359,7 +16359,7 @@
           </p:nvSpPr>
           <p:spPr>
             <a:xfrm>
-              <a:off x="6773333" y="4795308"/>
+              <a:off x="6709833" y="4795308"/>
               <a:ext cx="1676135" cy="192617"/>
             </a:xfrm>
             <a:prstGeom prst="rect">
@@ -16400,7 +16400,7 @@
           </p:nvSpPr>
           <p:spPr>
             <a:xfrm>
-              <a:off x="8170333" y="4745567"/>
+              <a:off x="8106833" y="4745567"/>
               <a:ext cx="1481667" cy="1121833"/>
             </a:xfrm>
             <a:prstGeom prst="rect">
@@ -16445,7 +16445,7 @@
           </p:blipFill>
           <p:spPr>
             <a:xfrm>
-              <a:off x="8170333" y="4745567"/>
+              <a:off x="8106833" y="4745567"/>
               <a:ext cx="254000" cy="254000"/>
             </a:xfrm>
             <a:prstGeom prst="rect">
@@ -16461,7 +16461,7 @@
           </p:nvSpPr>
           <p:spPr>
             <a:xfrm>
-              <a:off x="8509000" y="4795308"/>
+              <a:off x="8445500" y="4795308"/>
               <a:ext cx="1472406" cy="192617"/>
             </a:xfrm>
             <a:prstGeom prst="rect">
@@ -16516,7 +16516,7 @@
           </p:blipFill>
           <p:spPr>
             <a:xfrm>
-              <a:off x="5334000" y="2607733"/>
+              <a:off x="5270500" y="2607733"/>
               <a:ext cx="508000" cy="508000"/>
             </a:xfrm>
             <a:prstGeom prst="rect">
@@ -16532,7 +16532,7 @@
           </p:nvSpPr>
           <p:spPr>
             <a:xfrm>
-              <a:off x="5157391" y="3165475"/>
+              <a:off x="5093891" y="3165475"/>
               <a:ext cx="861219" cy="192617"/>
             </a:xfrm>
             <a:prstGeom prst="rect">
@@ -16587,7 +16587,7 @@
           </p:blipFill>
           <p:spPr>
             <a:xfrm>
-              <a:off x="6985000" y="2607733"/>
+              <a:off x="6921500" y="2607733"/>
               <a:ext cx="508000" cy="508000"/>
             </a:xfrm>
             <a:prstGeom prst="rect">
@@ -16603,7 +16603,7 @@
           </p:nvSpPr>
           <p:spPr>
             <a:xfrm>
-              <a:off x="6299068" y="3165475"/>
+              <a:off x="6235568" y="3165475"/>
               <a:ext cx="1879865" cy="192617"/>
             </a:xfrm>
             <a:prstGeom prst="rect">
@@ -16658,7 +16658,7 @@
           </p:blipFill>
           <p:spPr>
             <a:xfrm>
-              <a:off x="8657167" y="2607733"/>
+              <a:off x="8593667" y="2607733"/>
               <a:ext cx="508000" cy="508000"/>
             </a:xfrm>
             <a:prstGeom prst="rect">
@@ -16674,7 +16674,7 @@
           </p:nvSpPr>
           <p:spPr>
             <a:xfrm>
-              <a:off x="8276828" y="3165475"/>
+              <a:off x="8213328" y="3165475"/>
               <a:ext cx="1268677" cy="192617"/>
             </a:xfrm>
             <a:prstGeom prst="rect">
@@ -16729,7 +16729,7 @@
           </p:blipFill>
           <p:spPr>
             <a:xfrm>
-              <a:off x="5334000" y="5041900"/>
+              <a:off x="5270500" y="5041900"/>
               <a:ext cx="508000" cy="508000"/>
             </a:xfrm>
             <a:prstGeom prst="rect">
@@ -16745,7 +16745,7 @@
           </p:nvSpPr>
           <p:spPr>
             <a:xfrm>
-              <a:off x="5157391" y="5599642"/>
+              <a:off x="5093891" y="5599642"/>
               <a:ext cx="861219" cy="192617"/>
             </a:xfrm>
             <a:prstGeom prst="rect">
@@ -16800,7 +16800,7 @@
           </p:blipFill>
           <p:spPr>
             <a:xfrm>
-              <a:off x="6985000" y="5041900"/>
+              <a:off x="6921500" y="5041900"/>
               <a:ext cx="508000" cy="508000"/>
             </a:xfrm>
             <a:prstGeom prst="rect">
@@ -16816,7 +16816,7 @@
           </p:nvSpPr>
           <p:spPr>
             <a:xfrm>
-              <a:off x="6299068" y="5599642"/>
+              <a:off x="6235568" y="5599642"/>
               <a:ext cx="1879865" cy="192617"/>
             </a:xfrm>
             <a:prstGeom prst="rect">
@@ -16871,7 +16871,7 @@
           </p:blipFill>
           <p:spPr>
             <a:xfrm>
-              <a:off x="8657167" y="5041900"/>
+              <a:off x="8593667" y="5041900"/>
               <a:ext cx="508000" cy="508000"/>
             </a:xfrm>
             <a:prstGeom prst="rect">
@@ -16887,7 +16887,7 @@
           </p:nvSpPr>
           <p:spPr>
             <a:xfrm>
-              <a:off x="8276828" y="5599642"/>
+              <a:off x="8213328" y="5599642"/>
               <a:ext cx="1268677" cy="192617"/>
             </a:xfrm>
             <a:prstGeom prst="rect">
@@ -16942,7 +16942,7 @@
           </p:blipFill>
           <p:spPr>
             <a:xfrm>
-              <a:off x="6985000" y="3602567"/>
+              <a:off x="6921500" y="3602567"/>
               <a:ext cx="508000" cy="508000"/>
             </a:xfrm>
             <a:prstGeom prst="rect">
@@ -16958,7 +16958,7 @@
           </p:nvSpPr>
           <p:spPr>
             <a:xfrm>
-              <a:off x="6146271" y="4160308"/>
+              <a:off x="6082771" y="4160308"/>
               <a:ext cx="2185458" cy="192617"/>
             </a:xfrm>
             <a:prstGeom prst="rect">
@@ -16999,7 +16999,7 @@
           </p:nvSpPr>
           <p:spPr>
             <a:xfrm>
-              <a:off x="10117667" y="3602567"/>
+              <a:off x="10181167" y="3602567"/>
               <a:ext cx="508000" cy="740833"/>
             </a:xfrm>
             <a:prstGeom prst="rect">
@@ -17042,7 +17042,7 @@
           </p:blipFill>
           <p:spPr>
             <a:xfrm>
-              <a:off x="10117667" y="3602567"/>
+              <a:off x="10181167" y="3602567"/>
               <a:ext cx="508000" cy="508000"/>
             </a:xfrm>
             <a:prstGeom prst="rect">
@@ -17058,7 +17058,7 @@
           </p:nvSpPr>
           <p:spPr>
             <a:xfrm>
-              <a:off x="10144786" y="4160308"/>
+              <a:off x="10208286" y="4160308"/>
               <a:ext cx="453760" cy="192617"/>
             </a:xfrm>
             <a:prstGeom prst="rect">
@@ -17099,7 +17099,7 @@
           </p:nvSpPr>
           <p:spPr>
             <a:xfrm>
-              <a:off x="4042833" y="2861733"/>
+              <a:off x="3979333" y="2861733"/>
               <a:ext cx="1248834" cy="910167"/>
             </a:xfrm>
             <a:custGeom>
@@ -17152,7 +17152,7 @@
           </p:nvSpPr>
           <p:spPr>
             <a:xfrm>
-              <a:off x="4042833" y="3941233"/>
+              <a:off x="3979333" y="3941233"/>
               <a:ext cx="1248834" cy="1354667"/>
             </a:xfrm>
             <a:custGeom>
@@ -17205,7 +17205,7 @@
           </p:nvCxnSpPr>
           <p:spPr>
             <a:xfrm>
-              <a:off x="5884333" y="2861733"/>
+              <a:off x="5820833" y="2861733"/>
               <a:ext cx="1058334" cy="0"/>
             </a:xfrm>
             <a:prstGeom prst="line">
@@ -17230,7 +17230,7 @@
           </p:nvCxnSpPr>
           <p:spPr>
             <a:xfrm>
-              <a:off x="5884333" y="5295900"/>
+              <a:off x="5820833" y="5295900"/>
               <a:ext cx="1058334" cy="0"/>
             </a:xfrm>
             <a:prstGeom prst="line">
@@ -17255,7 +17255,7 @@
           </p:nvCxnSpPr>
           <p:spPr>
             <a:xfrm>
-              <a:off x="7535333" y="2861733"/>
+              <a:off x="7471833" y="2861733"/>
               <a:ext cx="1079500" cy="0"/>
             </a:xfrm>
             <a:prstGeom prst="line">
@@ -17279,7 +17279,7 @@
           </p:nvCxnSpPr>
           <p:spPr>
             <a:xfrm>
-              <a:off x="7535333" y="5295900"/>
+              <a:off x="7471833" y="5295900"/>
               <a:ext cx="1079500" cy="0"/>
             </a:xfrm>
             <a:prstGeom prst="line">
@@ -17303,8 +17303,8 @@
           </p:nvSpPr>
           <p:spPr>
             <a:xfrm>
-              <a:off x="9207500" y="2861733"/>
-              <a:ext cx="867833" cy="994834"/>
+              <a:off x="9144000" y="2861733"/>
+              <a:ext cx="994833" cy="994834"/>
             </a:xfrm>
             <a:custGeom>
               <a:avLst/>
@@ -17313,18 +17313,18 @@
               <a:cxnLst/>
               <a:rect l="l" t="t" r="r" b="b"/>
               <a:pathLst>
-                <a:path w="867833" h="994834">
+                <a:path w="994833" h="994834">
                   <a:moveTo>
                     <a:pt x="0" y="0"/>
                   </a:moveTo>
                   <a:lnTo>
-                    <a:pt x="656167" y="0"/>
+                    <a:pt x="698500" y="0"/>
                   </a:lnTo>
                   <a:lnTo>
-                    <a:pt x="656167" y="994834"/>
+                    <a:pt x="698500" y="994834"/>
                   </a:lnTo>
                   <a:lnTo>
-                    <a:pt x="867833" y="994834"/>
+                    <a:pt x="994833" y="994834"/>
                   </a:lnTo>
                 </a:path>
               </a:pathLst>
@@ -17355,8 +17355,8 @@
           </p:nvSpPr>
           <p:spPr>
             <a:xfrm>
-              <a:off x="9207500" y="3856567"/>
-              <a:ext cx="656167" cy="1439333"/>
+              <a:off x="9144000" y="3856567"/>
+              <a:ext cx="698500" cy="1439333"/>
             </a:xfrm>
             <a:custGeom>
               <a:avLst/>
@@ -17365,15 +17365,15 @@
               <a:cxnLst/>
               <a:rect l="l" t="t" r="r" b="b"/>
               <a:pathLst>
-                <a:path w="656167" h="1439333">
+                <a:path w="698500" h="1439333">
                   <a:moveTo>
                     <a:pt x="0" y="1439333"/>
                   </a:moveTo>
                   <a:lnTo>
-                    <a:pt x="656167" y="1439333"/>
+                    <a:pt x="698500" y="1439333"/>
                   </a:lnTo>
                   <a:lnTo>
-                    <a:pt x="656167" y="0"/>
+                    <a:pt x="698500" y="0"/>
                   </a:lnTo>
                 </a:path>
               </a:pathLst>
@@ -17417,7 +17417,7 @@
           </p:blipFill>
           <p:spPr>
             <a:xfrm>
-              <a:off x="11303000" y="3602567"/>
+              <a:off x="11366500" y="3602567"/>
               <a:ext cx="508000" cy="508000"/>
             </a:xfrm>
             <a:prstGeom prst="rect">
@@ -17433,7 +17433,7 @@
           </p:nvSpPr>
           <p:spPr>
             <a:xfrm>
-              <a:off x="11075458" y="4160308"/>
+              <a:off x="11138958" y="4160308"/>
               <a:ext cx="963083" cy="192617"/>
             </a:xfrm>
             <a:prstGeom prst="rect">
@@ -17474,7 +17474,7 @@
           </p:nvCxnSpPr>
           <p:spPr>
             <a:xfrm>
-              <a:off x="10668000" y="3856567"/>
+              <a:off x="10731500" y="3856567"/>
               <a:ext cx="592667" cy="0"/>
             </a:xfrm>
             <a:prstGeom prst="line">
@@ -17498,7 +17498,7 @@
           </p:nvSpPr>
           <p:spPr>
             <a:xfrm>
-              <a:off x="3227917" y="3517900"/>
+              <a:off x="3164417" y="3517900"/>
               <a:ext cx="211667" cy="211667"/>
             </a:xfrm>
             <a:prstGeom prst="ellipse">
@@ -17527,7 +17527,7 @@
           </p:nvSpPr>
           <p:spPr>
             <a:xfrm>
-              <a:off x="3226594" y="3545417"/>
+              <a:off x="3163094" y="3545417"/>
               <a:ext cx="214312" cy="165100"/>
             </a:xfrm>
             <a:prstGeom prst="rect">
@@ -17568,7 +17568,7 @@
           </p:nvSpPr>
           <p:spPr>
             <a:xfrm>
-              <a:off x="4116917" y="3517900"/>
+              <a:off x="4053417" y="3517900"/>
               <a:ext cx="211667" cy="211667"/>
             </a:xfrm>
             <a:prstGeom prst="ellipse">
@@ -17597,7 +17597,7 @@
           </p:nvSpPr>
           <p:spPr>
             <a:xfrm>
-              <a:off x="4115594" y="3545417"/>
+              <a:off x="4052094" y="3545417"/>
               <a:ext cx="214312" cy="165100"/>
             </a:xfrm>
             <a:prstGeom prst="rect">
@@ -17638,7 +17638,7 @@
           </p:nvSpPr>
           <p:spPr>
             <a:xfrm>
-              <a:off x="6582833" y="2607733"/>
+              <a:off x="6519333" y="2607733"/>
               <a:ext cx="211667" cy="211667"/>
             </a:xfrm>
             <a:prstGeom prst="ellipse">
@@ -17667,7 +17667,7 @@
           </p:nvSpPr>
           <p:spPr>
             <a:xfrm>
-              <a:off x="6581510" y="2635250"/>
+              <a:off x="6518010" y="2635250"/>
               <a:ext cx="214312" cy="165100"/>
             </a:xfrm>
             <a:prstGeom prst="rect">
@@ -17708,7 +17708,7 @@
           </p:nvSpPr>
           <p:spPr>
             <a:xfrm>
-              <a:off x="7683500" y="2607733"/>
+              <a:off x="7620000" y="2607733"/>
               <a:ext cx="211667" cy="211667"/>
             </a:xfrm>
             <a:prstGeom prst="ellipse">
@@ -17737,7 +17737,7 @@
           </p:nvSpPr>
           <p:spPr>
             <a:xfrm>
-              <a:off x="7682177" y="2635250"/>
+              <a:off x="7618677" y="2635250"/>
               <a:ext cx="214312" cy="165100"/>
             </a:xfrm>
             <a:prstGeom prst="rect">
@@ -17778,7 +17778,7 @@
           </p:nvSpPr>
           <p:spPr>
             <a:xfrm>
-              <a:off x="9323917" y="2607733"/>
+              <a:off x="9260417" y="2607733"/>
               <a:ext cx="211667" cy="211667"/>
             </a:xfrm>
             <a:prstGeom prst="ellipse">
@@ -17807,7 +17807,7 @@
           </p:nvSpPr>
           <p:spPr>
             <a:xfrm>
-              <a:off x="9322594" y="2635250"/>
+              <a:off x="9259094" y="2635250"/>
               <a:ext cx="214312" cy="165100"/>
             </a:xfrm>
             <a:prstGeom prst="rect">
@@ -17848,7 +17848,7 @@
           </p:nvSpPr>
           <p:spPr>
             <a:xfrm>
-              <a:off x="381000" y="6280150"/>
+              <a:off x="317500" y="6280150"/>
               <a:ext cx="211667" cy="211667"/>
             </a:xfrm>
             <a:prstGeom prst="ellipse">
@@ -17877,7 +17877,7 @@
           </p:nvSpPr>
           <p:spPr>
             <a:xfrm>
-              <a:off x="379677" y="6307667"/>
+              <a:off x="316177" y="6307667"/>
               <a:ext cx="214312" cy="165100"/>
             </a:xfrm>
             <a:prstGeom prst="rect">
@@ -17918,7 +17918,7 @@
           </p:nvSpPr>
           <p:spPr>
             <a:xfrm>
-              <a:off x="677333" y="6307667"/>
+              <a:off x="613833" y="6307667"/>
               <a:ext cx="912812" cy="165100"/>
             </a:xfrm>
             <a:prstGeom prst="rect">
@@ -17959,7 +17959,7 @@
           </p:nvSpPr>
           <p:spPr>
             <a:xfrm>
-              <a:off x="1598083" y="6280150"/>
+              <a:off x="1534583" y="6280150"/>
               <a:ext cx="211667" cy="211667"/>
             </a:xfrm>
             <a:prstGeom prst="ellipse">
@@ -17988,7 +17988,7 @@
           </p:nvSpPr>
           <p:spPr>
             <a:xfrm>
-              <a:off x="1596760" y="6307667"/>
+              <a:off x="1533260" y="6307667"/>
               <a:ext cx="214312" cy="165100"/>
             </a:xfrm>
             <a:prstGeom prst="rect">
@@ -18029,7 +18029,7 @@
           </p:nvSpPr>
           <p:spPr>
             <a:xfrm>
-              <a:off x="1894417" y="6307667"/>
+              <a:off x="1830917" y="6307667"/>
               <a:ext cx="4111625" cy="165100"/>
             </a:xfrm>
             <a:prstGeom prst="rect">
@@ -18070,7 +18070,7 @@
           </p:nvSpPr>
           <p:spPr>
             <a:xfrm>
-              <a:off x="5202767" y="6280150"/>
+              <a:off x="5139267" y="6280150"/>
               <a:ext cx="211667" cy="211667"/>
             </a:xfrm>
             <a:prstGeom prst="ellipse">
@@ -18099,7 +18099,7 @@
           </p:nvSpPr>
           <p:spPr>
             <a:xfrm>
-              <a:off x="5201444" y="6307667"/>
+              <a:off x="5137944" y="6307667"/>
               <a:ext cx="214312" cy="165100"/>
             </a:xfrm>
             <a:prstGeom prst="rect">
@@ -18140,7 +18140,7 @@
           </p:nvSpPr>
           <p:spPr>
             <a:xfrm>
-              <a:off x="5499100" y="6307667"/>
+              <a:off x="5435600" y="6307667"/>
               <a:ext cx="3833812" cy="165100"/>
             </a:xfrm>
             <a:prstGeom prst="rect">
@@ -18181,7 +18181,7 @@
           </p:nvSpPr>
           <p:spPr>
             <a:xfrm>
-              <a:off x="8528050" y="6280150"/>
+              <a:off x="8464550" y="6280150"/>
               <a:ext cx="211667" cy="211667"/>
             </a:xfrm>
             <a:prstGeom prst="ellipse">
@@ -18210,7 +18210,7 @@
           </p:nvSpPr>
           <p:spPr>
             <a:xfrm>
-              <a:off x="8526727" y="6307667"/>
+              <a:off x="8463227" y="6307667"/>
               <a:ext cx="214312" cy="165100"/>
             </a:xfrm>
             <a:prstGeom prst="rect">
@@ -18251,7 +18251,7 @@
           </p:nvSpPr>
           <p:spPr>
             <a:xfrm>
-              <a:off x="8824383" y="6307667"/>
+              <a:off x="8760883" y="6307667"/>
               <a:ext cx="2024062" cy="165100"/>
             </a:xfrm>
             <a:prstGeom prst="rect">
@@ -18292,7 +18292,7 @@
           </p:nvSpPr>
           <p:spPr>
             <a:xfrm>
-              <a:off x="10462683" y="6280150"/>
+              <a:off x="10399183" y="6280150"/>
               <a:ext cx="211667" cy="211667"/>
             </a:xfrm>
             <a:prstGeom prst="ellipse">
@@ -18321,7 +18321,7 @@
           </p:nvSpPr>
           <p:spPr>
             <a:xfrm>
-              <a:off x="10461360" y="6307667"/>
+              <a:off x="10397860" y="6307667"/>
               <a:ext cx="214312" cy="165100"/>
             </a:xfrm>
             <a:prstGeom prst="rect">
@@ -18362,7 +18362,7 @@
           </p:nvSpPr>
           <p:spPr>
             <a:xfrm>
-              <a:off x="10759017" y="6307667"/>
+              <a:off x="10695517" y="6307667"/>
               <a:ext cx="912812" cy="165100"/>
             </a:xfrm>
             <a:prstGeom prst="rect">
@@ -18403,7 +18403,7 @@
           </p:nvSpPr>
           <p:spPr>
             <a:xfrm>
-              <a:off x="381000" y="6477000"/>
+              <a:off x="317500" y="6477000"/>
               <a:ext cx="14081125" cy="165100"/>
             </a:xfrm>
             <a:prstGeom prst="rect">

--- a/docs/examples/reference-architectures.pptx
+++ b/docs/examples/reference-architectures.pptx
@@ -3136,10 +3136,10 @@
         </p:nvGrpSpPr>
         <p:grpSpPr>
           <a:xfrm>
-            <a:off x="750755" y="956733"/>
-            <a:ext cx="11531203" cy="5674784"/>
-            <a:chOff x="750755" y="956733"/>
-            <a:chExt cx="11531203" cy="5674784"/>
+            <a:off x="730884" y="956891"/>
+            <a:ext cx="10697700" cy="5587528"/>
+            <a:chOff x="730884" y="956891"/>
+            <a:chExt cx="10697700" cy="5587528"/>
           </a:xfrm>
         </p:grpSpPr>
         <p:pic>
@@ -3164,8 +3164,8 @@
           </p:blipFill>
           <p:spPr>
             <a:xfrm>
-              <a:off x="825500" y="3666067"/>
-              <a:ext cx="508000" cy="508000"/>
+              <a:off x="805907" y="3846259"/>
+              <a:ext cx="509888" cy="509888"/>
             </a:xfrm>
             <a:prstGeom prst="rect">
               <a:avLst/>
@@ -3180,8 +3180,8 @@
           </p:nvSpPr>
           <p:spPr>
             <a:xfrm>
-              <a:off x="750755" y="4223808"/>
-              <a:ext cx="657490" cy="192617"/>
+              <a:off x="730884" y="4406074"/>
+              <a:ext cx="659934" cy="193333"/>
             </a:xfrm>
             <a:prstGeom prst="rect">
               <a:avLst/>
@@ -3200,7 +3200,7 @@
                 </a:lnSpc>
               </a:pPr>
               <a:r>
-                <a:rPr sz="1166" b="0" lang="ko-KR">
+                <a:rPr sz="1171" b="0" lang="ko-KR">
                   <a:solidFill>
                     <a:srgbClr val="232F3E"/>
                   </a:solidFill>
@@ -3221,14 +3221,14 @@
           </p:nvSpPr>
           <p:spPr>
             <a:xfrm>
-              <a:off x="2137833" y="956733"/>
-              <a:ext cx="9271000" cy="5439833"/>
-            </a:xfrm>
-            <a:prstGeom prst="rect">
-              <a:avLst/>
-            </a:prstGeom>
-            <a:noFill/>
-            <a:ln w="21167">
+              <a:off x="2123119" y="956891"/>
+              <a:ext cx="9305465" cy="5587528"/>
+            </a:xfrm>
+            <a:prstGeom prst="rect">
+              <a:avLst/>
+            </a:prstGeom>
+            <a:noFill/>
+            <a:ln w="21245">
               <a:solidFill>
                 <a:srgbClr val="232F3E"/>
               </a:solidFill>
@@ -3266,8 +3266,8 @@
           </p:blipFill>
           <p:spPr>
             <a:xfrm>
-              <a:off x="2137833" y="956733"/>
-              <a:ext cx="338667" cy="338667"/>
+              <a:off x="2123119" y="956891"/>
+              <a:ext cx="339926" cy="339926"/>
             </a:xfrm>
             <a:prstGeom prst="rect">
               <a:avLst/>
@@ -3282,8 +3282,8 @@
           </p:nvSpPr>
           <p:spPr>
             <a:xfrm>
-              <a:off x="2582333" y="1038754"/>
-              <a:ext cx="1141016" cy="206375"/>
+              <a:off x="2569271" y="1039216"/>
+              <a:ext cx="1145257" cy="207142"/>
             </a:xfrm>
             <a:prstGeom prst="rect">
               <a:avLst/>
@@ -3302,7 +3302,7 @@
                 </a:lnSpc>
               </a:pPr>
               <a:r>
-                <a:rPr sz="1250" b="1" lang="ko-KR">
+                <a:rPr sz="1254" b="1" lang="ko-KR">
                   <a:solidFill>
                     <a:srgbClr val="232F3E"/>
                   </a:solidFill>
@@ -3337,8 +3337,8 @@
           </p:blipFill>
           <p:spPr>
             <a:xfrm>
-              <a:off x="2455333" y="2671233"/>
-              <a:ext cx="508000" cy="508000"/>
+              <a:off x="2441799" y="2847727"/>
+              <a:ext cx="509888" cy="509888"/>
             </a:xfrm>
             <a:prstGeom prst="rect">
               <a:avLst/>
@@ -3353,8 +3353,8 @@
           </p:nvSpPr>
           <p:spPr>
             <a:xfrm>
-              <a:off x="2227792" y="3228975"/>
-              <a:ext cx="963083" cy="192617"/>
+              <a:off x="2213412" y="3407542"/>
+              <a:ext cx="966664" cy="193333"/>
             </a:xfrm>
             <a:prstGeom prst="rect">
               <a:avLst/>
@@ -3373,7 +3373,7 @@
                 </a:lnSpc>
               </a:pPr>
               <a:r>
-                <a:rPr sz="1166" b="0" lang="ko-KR">
+                <a:rPr sz="1171" b="0" lang="ko-KR">
                   <a:solidFill>
                     <a:srgbClr val="232F3E"/>
                   </a:solidFill>
@@ -3394,8 +3394,8 @@
           </p:nvSpPr>
           <p:spPr>
             <a:xfrm>
-              <a:off x="2165615" y="3418417"/>
-              <a:ext cx="1087438" cy="165100"/>
+              <a:off x="2151003" y="3597688"/>
+              <a:ext cx="1091480" cy="165714"/>
             </a:xfrm>
             <a:prstGeom prst="rect">
               <a:avLst/>
@@ -3414,7 +3414,7 @@
                 </a:lnSpc>
               </a:pPr>
               <a:r>
-                <a:rPr sz="1000" b="0" lang="ko-KR">
+                <a:rPr sz="1003" b="0" lang="ko-KR">
                   <a:solidFill>
                     <a:srgbClr val="545B64"/>
                   </a:solidFill>
@@ -3435,14 +3435,14 @@
           </p:nvSpPr>
           <p:spPr>
             <a:xfrm>
-              <a:off x="3323167" y="1316567"/>
-              <a:ext cx="7916333" cy="4995333"/>
-            </a:xfrm>
-            <a:prstGeom prst="rect">
-              <a:avLst/>
-            </a:prstGeom>
-            <a:noFill/>
-            <a:ln w="21167">
+              <a:off x="3312859" y="1318062"/>
+              <a:ext cx="7945762" cy="5141375"/>
+            </a:xfrm>
+            <a:prstGeom prst="rect">
+              <a:avLst/>
+            </a:prstGeom>
+            <a:noFill/>
+            <a:ln w="21245">
               <a:solidFill>
                 <a:srgbClr val="00A4A6"/>
               </a:solidFill>
@@ -3482,8 +3482,8 @@
           </p:blipFill>
           <p:spPr>
             <a:xfrm>
-              <a:off x="3323167" y="1316567"/>
-              <a:ext cx="254000" cy="254000"/>
+              <a:off x="3312859" y="1318062"/>
+              <a:ext cx="254944" cy="254944"/>
             </a:xfrm>
             <a:prstGeom prst="rect">
               <a:avLst/>
@@ -3498,8 +3498,8 @@
           </p:nvSpPr>
           <p:spPr>
             <a:xfrm>
-              <a:off x="3661833" y="1366308"/>
-              <a:ext cx="759354" cy="192617"/>
+              <a:off x="3652784" y="1367988"/>
+              <a:ext cx="762177" cy="193333"/>
             </a:xfrm>
             <a:prstGeom prst="rect">
               <a:avLst/>
@@ -3518,7 +3518,7 @@
                 </a:lnSpc>
               </a:pPr>
               <a:r>
-                <a:rPr sz="1166" b="1" lang="ko-KR">
+                <a:rPr sz="1171" b="1" lang="ko-KR">
                   <a:solidFill>
                     <a:srgbClr val="00A4A6"/>
                   </a:solidFill>
@@ -3553,8 +3553,8 @@
           </p:blipFill>
           <p:spPr>
             <a:xfrm>
-              <a:off x="10160000" y="2671233"/>
-              <a:ext cx="508000" cy="508000"/>
+              <a:off x="10175108" y="2847727"/>
+              <a:ext cx="509888" cy="509888"/>
             </a:xfrm>
             <a:prstGeom prst="rect">
               <a:avLst/>
@@ -3569,8 +3569,8 @@
           </p:nvSpPr>
           <p:spPr>
             <a:xfrm>
-              <a:off x="10187120" y="3228975"/>
-              <a:ext cx="453760" cy="192617"/>
+              <a:off x="10202328" y="3407542"/>
+              <a:ext cx="455447" cy="193333"/>
             </a:xfrm>
             <a:prstGeom prst="rect">
               <a:avLst/>
@@ -3589,7 +3589,7 @@
                 </a:lnSpc>
               </a:pPr>
               <a:r>
-                <a:rPr sz="1166" b="0" lang="ko-KR">
+                <a:rPr sz="1171" b="0" lang="ko-KR">
                   <a:solidFill>
                     <a:srgbClr val="232F3E"/>
                   </a:solidFill>
@@ -3610,8 +3610,8 @@
           </p:nvSpPr>
           <p:spPr>
             <a:xfrm>
-              <a:off x="9655969" y="3418417"/>
-              <a:ext cx="1516062" cy="165100"/>
+              <a:off x="9669203" y="3597688"/>
+              <a:ext cx="1521698" cy="165714"/>
             </a:xfrm>
             <a:prstGeom prst="rect">
               <a:avLst/>
@@ -3630,7 +3630,7 @@
                 </a:lnSpc>
               </a:pPr>
               <a:r>
-                <a:rPr sz="1000" b="0" lang="ko-KR">
+                <a:rPr sz="1003" b="0" lang="ko-KR">
                   <a:solidFill>
                     <a:srgbClr val="545B64"/>
                   </a:solidFill>
@@ -3665,8 +3665,8 @@
           </p:blipFill>
           <p:spPr>
             <a:xfrm>
-              <a:off x="10160000" y="3666067"/>
-              <a:ext cx="508000" cy="508000"/>
+              <a:off x="10175108" y="3846259"/>
+              <a:ext cx="509888" cy="509888"/>
             </a:xfrm>
             <a:prstGeom prst="rect">
               <a:avLst/>
@@ -3681,8 +3681,8 @@
           </p:nvSpPr>
           <p:spPr>
             <a:xfrm>
-              <a:off x="9830594" y="4223808"/>
-              <a:ext cx="1166813" cy="192617"/>
+              <a:off x="9844477" y="4406074"/>
+              <a:ext cx="1171150" cy="193333"/>
             </a:xfrm>
             <a:prstGeom prst="rect">
               <a:avLst/>
@@ -3701,7 +3701,7 @@
                 </a:lnSpc>
               </a:pPr>
               <a:r>
-                <a:rPr sz="1166" b="0" lang="ko-KR">
+                <a:rPr sz="1171" b="0" lang="ko-KR">
                   <a:solidFill>
                     <a:srgbClr val="232F3E"/>
                   </a:solidFill>
@@ -3722,8 +3722,8 @@
           </p:nvSpPr>
           <p:spPr>
             <a:xfrm>
-              <a:off x="9902031" y="4413250"/>
-              <a:ext cx="1023938" cy="165100"/>
+              <a:off x="9916180" y="4596220"/>
+              <a:ext cx="1027744" cy="165714"/>
             </a:xfrm>
             <a:prstGeom prst="rect">
               <a:avLst/>
@@ -3742,7 +3742,7 @@
                 </a:lnSpc>
               </a:pPr>
               <a:r>
-                <a:rPr sz="1000" b="0" lang="ko-KR">
+                <a:rPr sz="1003" b="0" lang="ko-KR">
                   <a:solidFill>
                     <a:srgbClr val="545B64"/>
                   </a:solidFill>
@@ -3777,8 +3777,8 @@
           </p:blipFill>
           <p:spPr>
             <a:xfrm>
-              <a:off x="10160000" y="5105400"/>
-              <a:ext cx="508000" cy="508000"/>
+              <a:off x="10175108" y="5290943"/>
+              <a:ext cx="509888" cy="509888"/>
             </a:xfrm>
             <a:prstGeom prst="rect">
               <a:avLst/>
@@ -3793,8 +3793,8 @@
           </p:nvSpPr>
           <p:spPr>
             <a:xfrm>
-              <a:off x="10238052" y="5663142"/>
-              <a:ext cx="351896" cy="192617"/>
+              <a:off x="10253450" y="5850758"/>
+              <a:ext cx="353204" cy="193333"/>
             </a:xfrm>
             <a:prstGeom prst="rect">
               <a:avLst/>
@@ -3813,7 +3813,7 @@
                 </a:lnSpc>
               </a:pPr>
               <a:r>
-                <a:rPr sz="1166" b="0" lang="ko-KR">
+                <a:rPr sz="1171" b="0" lang="ko-KR">
                   <a:solidFill>
                     <a:srgbClr val="232F3E"/>
                   </a:solidFill>
@@ -3834,8 +3834,8 @@
           </p:nvSpPr>
           <p:spPr>
             <a:xfrm>
-              <a:off x="9735344" y="5852583"/>
-              <a:ext cx="1357312" cy="165100"/>
+              <a:off x="9748873" y="6040904"/>
+              <a:ext cx="1362358" cy="165714"/>
             </a:xfrm>
             <a:prstGeom prst="rect">
               <a:avLst/>
@@ -3854,7 +3854,7 @@
                 </a:lnSpc>
               </a:pPr>
               <a:r>
-                <a:rPr sz="1000" b="0" lang="ko-KR">
+                <a:rPr sz="1003" b="0" lang="ko-KR">
                   <a:solidFill>
                     <a:srgbClr val="545B64"/>
                   </a:solidFill>
@@ -3875,14 +3875,14 @@
           </p:nvSpPr>
           <p:spPr>
             <a:xfrm>
-              <a:off x="3661833" y="1634067"/>
-              <a:ext cx="5926667" cy="4550833"/>
-            </a:xfrm>
-            <a:prstGeom prst="rect">
-              <a:avLst/>
-            </a:prstGeom>
-            <a:noFill/>
-            <a:ln w="21167">
+              <a:off x="3652784" y="1636742"/>
+              <a:ext cx="5948699" cy="4737714"/>
+            </a:xfrm>
+            <a:prstGeom prst="rect">
+              <a:avLst/>
+            </a:prstGeom>
+            <a:noFill/>
+            <a:ln w="21245">
               <a:solidFill>
                 <a:srgbClr val="8C4FFF"/>
               </a:solidFill>
@@ -3920,8 +3920,8 @@
           </p:blipFill>
           <p:spPr>
             <a:xfrm>
-              <a:off x="3661833" y="1634067"/>
-              <a:ext cx="254000" cy="254000"/>
+              <a:off x="3652784" y="1636742"/>
+              <a:ext cx="254944" cy="254944"/>
             </a:xfrm>
             <a:prstGeom prst="rect">
               <a:avLst/>
@@ -3936,8 +3936,8 @@
           </p:nvSpPr>
           <p:spPr>
             <a:xfrm>
-              <a:off x="4000500" y="1683808"/>
-              <a:ext cx="1676135" cy="192617"/>
+              <a:off x="3992710" y="1686669"/>
+              <a:ext cx="455447" cy="193333"/>
             </a:xfrm>
             <a:prstGeom prst="rect">
               <a:avLst/>
@@ -3956,7 +3956,7 @@
                 </a:lnSpc>
               </a:pPr>
               <a:r>
-                <a:rPr sz="1166" b="1" lang="ko-KR">
+                <a:rPr sz="1171" b="1" lang="ko-KR">
                   <a:solidFill>
                     <a:srgbClr val="8C4FFF"/>
                   </a:solidFill>
@@ -3964,27 +3964,68 @@
                   <a:ea typeface="Malgun Gothic"/>
                   <a:cs typeface="Malgun Gothic"/>
                 </a:rPr>
-                <a:t>VPC 10.0.0.0/16</a:t>
-              </a:r>
-            </a:p>
-          </p:txBody>
-        </p:sp>
-        <p:sp>
-          <p:nvSpPr>
-            <p:cNvPr id="27" name="Rectangle 26"/>
+                <a:t>VPC</a:t>
+              </a:r>
+            </a:p>
+          </p:txBody>
+        </p:sp>
+        <p:sp>
+          <p:nvSpPr>
+            <p:cNvPr id="27" name="TextBox 26"/>
+            <p:cNvSpPr txBox="1"/>
+            <p:nvPr/>
+          </p:nvSpPr>
+          <p:spPr>
+            <a:xfrm>
+              <a:off x="3992710" y="1876814"/>
+              <a:ext cx="1091480" cy="165714"/>
+            </a:xfrm>
+            <a:prstGeom prst="rect">
+              <a:avLst/>
+            </a:prstGeom>
+            <a:noFill/>
+          </p:spPr>
+          <p:txBody>
+            <a:bodyPr wrap="none" lIns="0" rIns="0" tIns="0" bIns="0" anchor="t">
+              <a:noAutofit/>
+            </a:bodyPr>
+            <a:lstStyle/>
+            <a:p>
+              <a:pPr algn="l">
+                <a:lnSpc>
+                  <a:spcPct val="100000"/>
+                </a:lnSpc>
+              </a:pPr>
+              <a:r>
+                <a:rPr sz="1003" b="0" lang="ko-KR">
+                  <a:solidFill>
+                    <a:srgbClr val="232F3E"/>
+                  </a:solidFill>
+                  <a:latin typeface="Arial"/>
+                  <a:ea typeface="Malgun Gothic"/>
+                  <a:cs typeface="Malgun Gothic"/>
+                </a:rPr>
+                <a:t>10.0.0.0/16</a:t>
+              </a:r>
+            </a:p>
+          </p:txBody>
+        </p:sp>
+        <p:sp>
+          <p:nvSpPr>
+            <p:cNvPr id="28" name="Rectangle 27"/>
             <p:cNvSpPr/>
             <p:nvPr/>
           </p:nvSpPr>
           <p:spPr>
             <a:xfrm>
-              <a:off x="3788833" y="1951567"/>
-              <a:ext cx="5672667" cy="1629833"/>
-            </a:xfrm>
-            <a:prstGeom prst="rect">
-              <a:avLst/>
-            </a:prstGeom>
-            <a:noFill/>
-            <a:ln w="15875">
+              <a:off x="3780257" y="2125385"/>
+              <a:ext cx="5693755" cy="1635892"/>
+            </a:xfrm>
+            <a:prstGeom prst="rect">
+              <a:avLst/>
+            </a:prstGeom>
+            <a:noFill/>
+            <a:ln w="15934">
               <a:solidFill>
                 <a:srgbClr val="00A4A6"/>
               </a:solidFill>
@@ -4004,14 +4045,14 @@
         </p:sp>
         <p:sp>
           <p:nvSpPr>
-            <p:cNvPr id="28" name="TextBox 27"/>
-            <p:cNvSpPr txBox="1"/>
-            <p:nvPr/>
-          </p:nvSpPr>
-          <p:spPr>
-            <a:xfrm>
-              <a:off x="3915833" y="2001308"/>
-              <a:ext cx="2083594" cy="192617"/>
+            <p:cNvPr id="29" name="TextBox 28"/>
+            <p:cNvSpPr txBox="1"/>
+            <p:nvPr/>
+          </p:nvSpPr>
+          <p:spPr>
+            <a:xfrm>
+              <a:off x="3907729" y="2175312"/>
+              <a:ext cx="2091339" cy="193333"/>
             </a:xfrm>
             <a:prstGeom prst="rect">
               <a:avLst/>
@@ -4030,7 +4071,7 @@
                 </a:lnSpc>
               </a:pPr>
               <a:r>
-                <a:rPr sz="1166" b="1" lang="ko-KR">
+                <a:rPr sz="1171" b="1" lang="ko-KR">
                   <a:solidFill>
                     <a:srgbClr val="00A4A6"/>
                   </a:solidFill>
@@ -4045,20 +4086,20 @@
         </p:sp>
         <p:sp>
           <p:nvSpPr>
-            <p:cNvPr id="29" name="Rectangle 28"/>
+            <p:cNvPr id="30" name="Rectangle 29"/>
             <p:cNvSpPr/>
             <p:nvPr/>
           </p:nvSpPr>
           <p:spPr>
             <a:xfrm>
-              <a:off x="3788833" y="4491567"/>
-              <a:ext cx="5672667" cy="1608667"/>
-            </a:xfrm>
-            <a:prstGeom prst="rect">
-              <a:avLst/>
-            </a:prstGeom>
-            <a:noFill/>
-            <a:ln w="15875">
+              <a:off x="3780257" y="4674828"/>
+              <a:ext cx="5693755" cy="1614647"/>
+            </a:xfrm>
+            <a:prstGeom prst="rect">
+              <a:avLst/>
+            </a:prstGeom>
+            <a:noFill/>
+            <a:ln w="15934">
               <a:solidFill>
                 <a:srgbClr val="00A4A6"/>
               </a:solidFill>
@@ -4078,14 +4119,14 @@
         </p:sp>
         <p:sp>
           <p:nvSpPr>
-            <p:cNvPr id="30" name="TextBox 29"/>
-            <p:cNvSpPr txBox="1"/>
-            <p:nvPr/>
-          </p:nvSpPr>
-          <p:spPr>
-            <a:xfrm>
-              <a:off x="3915833" y="4541308"/>
-              <a:ext cx="2083594" cy="192617"/>
+            <p:cNvPr id="31" name="TextBox 30"/>
+            <p:cNvSpPr txBox="1"/>
+            <p:nvPr/>
+          </p:nvSpPr>
+          <p:spPr>
+            <a:xfrm>
+              <a:off x="3907729" y="4724754"/>
+              <a:ext cx="2091339" cy="193333"/>
             </a:xfrm>
             <a:prstGeom prst="rect">
               <a:avLst/>
@@ -4104,7 +4145,7 @@
                 </a:lnSpc>
               </a:pPr>
               <a:r>
-                <a:rPr sz="1166" b="1" lang="ko-KR">
+                <a:rPr sz="1171" b="1" lang="ko-KR">
                   <a:solidFill>
                     <a:srgbClr val="00A4A6"/>
                   </a:solidFill>
@@ -4119,20 +4160,20 @@
         </p:sp>
         <p:sp>
           <p:nvSpPr>
-            <p:cNvPr id="31" name="Rectangle 30"/>
+            <p:cNvPr id="32" name="Rectangle 31"/>
             <p:cNvSpPr/>
             <p:nvPr/>
           </p:nvSpPr>
           <p:spPr>
             <a:xfrm>
-              <a:off x="3915833" y="2269067"/>
-              <a:ext cx="1693333" cy="1227667"/>
-            </a:xfrm>
-            <a:prstGeom prst="rect">
-              <a:avLst/>
-            </a:prstGeom>
-            <a:noFill/>
-            <a:ln w="15875">
+              <a:off x="3907729" y="2444065"/>
+              <a:ext cx="1699628" cy="1232230"/>
+            </a:xfrm>
+            <a:prstGeom prst="rect">
+              <a:avLst/>
+            </a:prstGeom>
+            <a:noFill/>
+            <a:ln w="15934">
               <a:solidFill>
                 <a:srgbClr val="7AA116"/>
               </a:solidFill>
@@ -4150,7 +4191,7 @@
         </p:sp>
         <p:pic>
           <p:nvPicPr>
-            <p:cNvPr id="32" name="Public-subnet_32" descr="Public subnet_32"/>
+            <p:cNvPr id="33" name="Public-subnet_32" descr="Public subnet_32"/>
             <p:cNvPicPr>
               <a:picLocks noChangeAspect="1"/>
             </p:cNvPicPr>
@@ -4170,8 +4211,8 @@
           </p:blipFill>
           <p:spPr>
             <a:xfrm>
-              <a:off x="3915833" y="2269067"/>
-              <a:ext cx="254000" cy="254000"/>
+              <a:off x="3907729" y="2444065"/>
+              <a:ext cx="254944" cy="254944"/>
             </a:xfrm>
             <a:prstGeom prst="rect">
               <a:avLst/>
@@ -4180,14 +4221,14 @@
         </p:pic>
         <p:sp>
           <p:nvSpPr>
-            <p:cNvPr id="33" name="TextBox 32"/>
-            <p:cNvSpPr txBox="1"/>
-            <p:nvPr/>
-          </p:nvSpPr>
-          <p:spPr>
-            <a:xfrm>
-              <a:off x="4254500" y="2318808"/>
-              <a:ext cx="1472406" cy="192617"/>
+            <p:cNvPr id="34" name="TextBox 33"/>
+            <p:cNvSpPr txBox="1"/>
+            <p:nvPr/>
+          </p:nvSpPr>
+          <p:spPr>
+            <a:xfrm>
+              <a:off x="4247654" y="2493992"/>
+              <a:ext cx="1477880" cy="193333"/>
             </a:xfrm>
             <a:prstGeom prst="rect">
               <a:avLst/>
@@ -4206,7 +4247,7 @@
                 </a:lnSpc>
               </a:pPr>
               <a:r>
-                <a:rPr sz="1166" b="1" lang="ko-KR">
+                <a:rPr sz="1171" b="1" lang="ko-KR">
                   <a:solidFill>
                     <a:srgbClr val="7AA116"/>
                   </a:solidFill>
@@ -4221,20 +4262,20 @@
         </p:sp>
         <p:sp>
           <p:nvSpPr>
-            <p:cNvPr id="34" name="Rectangle 33"/>
+            <p:cNvPr id="35" name="Rectangle 34"/>
             <p:cNvSpPr/>
             <p:nvPr/>
           </p:nvSpPr>
           <p:spPr>
             <a:xfrm>
-              <a:off x="5863167" y="2269067"/>
-              <a:ext cx="3471333" cy="1227667"/>
-            </a:xfrm>
-            <a:prstGeom prst="rect">
-              <a:avLst/>
-            </a:prstGeom>
-            <a:noFill/>
-            <a:ln w="15875">
+              <a:off x="5862301" y="2444065"/>
+              <a:ext cx="3484238" cy="1232230"/>
+            </a:xfrm>
+            <a:prstGeom prst="rect">
+              <a:avLst/>
+            </a:prstGeom>
+            <a:noFill/>
+            <a:ln w="15934">
               <a:solidFill>
                 <a:srgbClr val="00A4A6"/>
               </a:solidFill>
@@ -4252,7 +4293,7 @@
         </p:sp>
         <p:pic>
           <p:nvPicPr>
-            <p:cNvPr id="35" name="Private-subnet_32" descr="Private subnet_32"/>
+            <p:cNvPr id="36" name="Private-subnet_32" descr="Private subnet_32"/>
             <p:cNvPicPr>
               <a:picLocks noChangeAspect="1"/>
             </p:cNvPicPr>
@@ -4272,8 +4313,8 @@
           </p:blipFill>
           <p:spPr>
             <a:xfrm>
-              <a:off x="5863167" y="2269067"/>
-              <a:ext cx="254000" cy="254000"/>
+              <a:off x="5862301" y="2444065"/>
+              <a:ext cx="254944" cy="254944"/>
             </a:xfrm>
             <a:prstGeom prst="rect">
               <a:avLst/>
@@ -4282,14 +4323,14 @@
         </p:pic>
         <p:sp>
           <p:nvSpPr>
-            <p:cNvPr id="36" name="TextBox 35"/>
-            <p:cNvSpPr txBox="1"/>
-            <p:nvPr/>
-          </p:nvSpPr>
-          <p:spPr>
-            <a:xfrm>
-              <a:off x="6201833" y="2318808"/>
-              <a:ext cx="1166813" cy="192617"/>
+            <p:cNvPr id="37" name="TextBox 36"/>
+            <p:cNvSpPr txBox="1"/>
+            <p:nvPr/>
+          </p:nvSpPr>
+          <p:spPr>
+            <a:xfrm>
+              <a:off x="6202227" y="2493992"/>
+              <a:ext cx="1171150" cy="193333"/>
             </a:xfrm>
             <a:prstGeom prst="rect">
               <a:avLst/>
@@ -4308,7 +4349,7 @@
                 </a:lnSpc>
               </a:pPr>
               <a:r>
-                <a:rPr sz="1166" b="1" lang="ko-KR">
+                <a:rPr sz="1171" b="1" lang="ko-KR">
                   <a:solidFill>
                     <a:srgbClr val="00A4A6"/>
                   </a:solidFill>
@@ -4323,20 +4364,20 @@
         </p:sp>
         <p:sp>
           <p:nvSpPr>
-            <p:cNvPr id="37" name="Rectangle 36"/>
+            <p:cNvPr id="38" name="Rectangle 37"/>
             <p:cNvSpPr/>
             <p:nvPr/>
           </p:nvSpPr>
           <p:spPr>
             <a:xfrm>
-              <a:off x="3915833" y="4809067"/>
-              <a:ext cx="1693333" cy="1206500"/>
-            </a:xfrm>
-            <a:prstGeom prst="rect">
-              <a:avLst/>
-            </a:prstGeom>
-            <a:noFill/>
-            <a:ln w="15875">
+              <a:off x="3907729" y="4993508"/>
+              <a:ext cx="1699628" cy="1210985"/>
+            </a:xfrm>
+            <a:prstGeom prst="rect">
+              <a:avLst/>
+            </a:prstGeom>
+            <a:noFill/>
+            <a:ln w="15934">
               <a:solidFill>
                 <a:srgbClr val="7AA116"/>
               </a:solidFill>
@@ -4354,7 +4395,7 @@
         </p:sp>
         <p:pic>
           <p:nvPicPr>
-            <p:cNvPr id="38" name="Public-subnet_32" descr="Public subnet_32"/>
+            <p:cNvPr id="39" name="Public-subnet_32" descr="Public subnet_32"/>
             <p:cNvPicPr>
               <a:picLocks noChangeAspect="1"/>
             </p:cNvPicPr>
@@ -4374,8 +4415,8 @@
           </p:blipFill>
           <p:spPr>
             <a:xfrm>
-              <a:off x="3915833" y="4809067"/>
-              <a:ext cx="254000" cy="254000"/>
+              <a:off x="3907729" y="4993508"/>
+              <a:ext cx="254944" cy="254944"/>
             </a:xfrm>
             <a:prstGeom prst="rect">
               <a:avLst/>
@@ -4384,14 +4425,14 @@
         </p:pic>
         <p:sp>
           <p:nvSpPr>
-            <p:cNvPr id="39" name="TextBox 38"/>
-            <p:cNvSpPr txBox="1"/>
-            <p:nvPr/>
-          </p:nvSpPr>
-          <p:spPr>
-            <a:xfrm>
-              <a:off x="4254500" y="4858808"/>
-              <a:ext cx="1472406" cy="192617"/>
+            <p:cNvPr id="40" name="TextBox 39"/>
+            <p:cNvSpPr txBox="1"/>
+            <p:nvPr/>
+          </p:nvSpPr>
+          <p:spPr>
+            <a:xfrm>
+              <a:off x="4247654" y="5043434"/>
+              <a:ext cx="1477880" cy="193333"/>
             </a:xfrm>
             <a:prstGeom prst="rect">
               <a:avLst/>
@@ -4410,7 +4451,7 @@
                 </a:lnSpc>
               </a:pPr>
               <a:r>
-                <a:rPr sz="1166" b="1" lang="ko-KR">
+                <a:rPr sz="1171" b="1" lang="ko-KR">
                   <a:solidFill>
                     <a:srgbClr val="7AA116"/>
                   </a:solidFill>
@@ -4425,20 +4466,20 @@
         </p:sp>
         <p:sp>
           <p:nvSpPr>
-            <p:cNvPr id="40" name="Rectangle 39"/>
+            <p:cNvPr id="41" name="Rectangle 40"/>
             <p:cNvSpPr/>
             <p:nvPr/>
           </p:nvSpPr>
           <p:spPr>
             <a:xfrm>
-              <a:off x="5863167" y="4809067"/>
-              <a:ext cx="3471333" cy="1206500"/>
-            </a:xfrm>
-            <a:prstGeom prst="rect">
-              <a:avLst/>
-            </a:prstGeom>
-            <a:noFill/>
-            <a:ln w="15875">
+              <a:off x="5862301" y="4993508"/>
+              <a:ext cx="3484238" cy="1210985"/>
+            </a:xfrm>
+            <a:prstGeom prst="rect">
+              <a:avLst/>
+            </a:prstGeom>
+            <a:noFill/>
+            <a:ln w="15934">
               <a:solidFill>
                 <a:srgbClr val="00A4A6"/>
               </a:solidFill>
@@ -4456,7 +4497,7 @@
         </p:sp>
         <p:pic>
           <p:nvPicPr>
-            <p:cNvPr id="41" name="Private-subnet_32" descr="Private subnet_32"/>
+            <p:cNvPr id="42" name="Private-subnet_32" descr="Private subnet_32"/>
             <p:cNvPicPr>
               <a:picLocks noChangeAspect="1"/>
             </p:cNvPicPr>
@@ -4476,8 +4517,8 @@
           </p:blipFill>
           <p:spPr>
             <a:xfrm>
-              <a:off x="5863167" y="4809067"/>
-              <a:ext cx="254000" cy="254000"/>
+              <a:off x="5862301" y="4993508"/>
+              <a:ext cx="254944" cy="254944"/>
             </a:xfrm>
             <a:prstGeom prst="rect">
               <a:avLst/>
@@ -4486,14 +4527,14 @@
         </p:pic>
         <p:sp>
           <p:nvSpPr>
-            <p:cNvPr id="42" name="TextBox 41"/>
-            <p:cNvSpPr txBox="1"/>
-            <p:nvPr/>
-          </p:nvSpPr>
-          <p:spPr>
-            <a:xfrm>
-              <a:off x="6201833" y="4858808"/>
-              <a:ext cx="1166813" cy="192617"/>
+            <p:cNvPr id="43" name="TextBox 42"/>
+            <p:cNvSpPr txBox="1"/>
+            <p:nvPr/>
+          </p:nvSpPr>
+          <p:spPr>
+            <a:xfrm>
+              <a:off x="6202227" y="5043434"/>
+              <a:ext cx="1171150" cy="193333"/>
             </a:xfrm>
             <a:prstGeom prst="rect">
               <a:avLst/>
@@ -4512,7 +4553,7 @@
                 </a:lnSpc>
               </a:pPr>
               <a:r>
-                <a:rPr sz="1166" b="1" lang="ko-KR">
+                <a:rPr sz="1171" b="1" lang="ko-KR">
                   <a:solidFill>
                     <a:srgbClr val="00A4A6"/>
                   </a:solidFill>
@@ -4527,7 +4568,7 @@
         </p:sp>
         <p:pic>
           <p:nvPicPr>
-            <p:cNvPr id="43" name="Amazon-VPC_NAT-Gateway" descr="Amazon VPC_NAT Gateway"/>
+            <p:cNvPr id="44" name="Amazon-VPC_NAT-Gateway" descr="Amazon VPC_NAT Gateway"/>
             <p:cNvPicPr>
               <a:picLocks noChangeAspect="1"/>
             </p:cNvPicPr>
@@ -4547,8 +4588,8 @@
           </p:blipFill>
           <p:spPr>
             <a:xfrm>
-              <a:off x="4508500" y="2671233"/>
-              <a:ext cx="508000" cy="508000"/>
+              <a:off x="4502599" y="2847727"/>
+              <a:ext cx="509888" cy="509888"/>
             </a:xfrm>
             <a:prstGeom prst="rect">
               <a:avLst/>
@@ -4557,14 +4598,14 @@
         </p:pic>
         <p:sp>
           <p:nvSpPr>
-            <p:cNvPr id="44" name="TextBox 43"/>
-            <p:cNvSpPr txBox="1"/>
-            <p:nvPr/>
-          </p:nvSpPr>
-          <p:spPr>
-            <a:xfrm>
-              <a:off x="4128161" y="3228975"/>
-              <a:ext cx="1268677" cy="192617"/>
+            <p:cNvPr id="45" name="TextBox 44"/>
+            <p:cNvSpPr txBox="1"/>
+            <p:nvPr/>
+          </p:nvSpPr>
+          <p:spPr>
+            <a:xfrm>
+              <a:off x="4120846" y="3407542"/>
+              <a:ext cx="1273393" cy="193333"/>
             </a:xfrm>
             <a:prstGeom prst="rect">
               <a:avLst/>
@@ -4583,7 +4624,7 @@
                 </a:lnSpc>
               </a:pPr>
               <a:r>
-                <a:rPr sz="1166" b="0" lang="ko-KR">
+                <a:rPr sz="1171" b="0" lang="ko-KR">
                   <a:solidFill>
                     <a:srgbClr val="232F3E"/>
                   </a:solidFill>
@@ -4598,7 +4639,7 @@
         </p:sp>
         <p:pic>
           <p:nvPicPr>
-            <p:cNvPr id="45" name="Amazon-VPC_NAT-Gateway" descr="Amazon VPC_NAT Gateway"/>
+            <p:cNvPr id="46" name="Amazon-VPC_NAT-Gateway" descr="Amazon VPC_NAT Gateway"/>
             <p:cNvPicPr>
               <a:picLocks noChangeAspect="1"/>
             </p:cNvPicPr>
@@ -4618,8 +4659,8 @@
           </p:blipFill>
           <p:spPr>
             <a:xfrm>
-              <a:off x="4508500" y="5105400"/>
-              <a:ext cx="508000" cy="508000"/>
+              <a:off x="4502599" y="5290943"/>
+              <a:ext cx="509888" cy="509888"/>
             </a:xfrm>
             <a:prstGeom prst="rect">
               <a:avLst/>
@@ -4628,14 +4669,14 @@
         </p:pic>
         <p:sp>
           <p:nvSpPr>
-            <p:cNvPr id="46" name="TextBox 45"/>
-            <p:cNvSpPr txBox="1"/>
-            <p:nvPr/>
-          </p:nvSpPr>
-          <p:spPr>
-            <a:xfrm>
-              <a:off x="4128161" y="5663142"/>
-              <a:ext cx="1268677" cy="192617"/>
+            <p:cNvPr id="47" name="TextBox 46"/>
+            <p:cNvSpPr txBox="1"/>
+            <p:nvPr/>
+          </p:nvSpPr>
+          <p:spPr>
+            <a:xfrm>
+              <a:off x="4120846" y="5850758"/>
+              <a:ext cx="1273393" cy="193333"/>
             </a:xfrm>
             <a:prstGeom prst="rect">
               <a:avLst/>
@@ -4654,7 +4695,7 @@
                 </a:lnSpc>
               </a:pPr>
               <a:r>
-                <a:rPr sz="1166" b="0" lang="ko-KR">
+                <a:rPr sz="1171" b="0" lang="ko-KR">
                   <a:solidFill>
                     <a:srgbClr val="232F3E"/>
                   </a:solidFill>
@@ -4669,20 +4710,20 @@
         </p:sp>
         <p:sp>
           <p:nvSpPr>
-            <p:cNvPr id="47" name="Rectangle 46"/>
+            <p:cNvPr id="48" name="Rectangle 47"/>
             <p:cNvSpPr/>
             <p:nvPr/>
           </p:nvSpPr>
           <p:spPr>
             <a:xfrm>
-              <a:off x="7175500" y="2353733"/>
-              <a:ext cx="2032000" cy="3577167"/>
-            </a:xfrm>
-            <a:prstGeom prst="rect">
-              <a:avLst/>
-            </a:prstGeom>
-            <a:noFill/>
-            <a:ln w="15875">
+              <a:off x="7179513" y="2529047"/>
+              <a:ext cx="2039554" cy="3590465"/>
+            </a:xfrm>
+            <a:prstGeom prst="rect">
+              <a:avLst/>
+            </a:prstGeom>
+            <a:noFill/>
+            <a:ln w="15934">
               <a:solidFill>
                 <a:srgbClr val="ED7100"/>
               </a:solidFill>
@@ -4702,7 +4743,7 @@
         </p:sp>
         <p:pic>
           <p:nvPicPr>
-            <p:cNvPr id="48" name="Auto-Scaling-group_32" descr="Auto Scaling group_32"/>
+            <p:cNvPr id="49" name="Auto-Scaling-group_32" descr="Auto Scaling group_32"/>
             <p:cNvPicPr>
               <a:picLocks noChangeAspect="1"/>
             </p:cNvPicPr>
@@ -4722,8 +4763,8 @@
           </p:blipFill>
           <p:spPr>
             <a:xfrm>
-              <a:off x="7175500" y="2353733"/>
-              <a:ext cx="254000" cy="254000"/>
+              <a:off x="7179513" y="2529047"/>
+              <a:ext cx="254944" cy="254944"/>
             </a:xfrm>
             <a:prstGeom prst="rect">
               <a:avLst/>
@@ -4732,14 +4773,14 @@
         </p:pic>
         <p:sp>
           <p:nvSpPr>
-            <p:cNvPr id="49" name="TextBox 48"/>
-            <p:cNvSpPr txBox="1"/>
-            <p:nvPr/>
-          </p:nvSpPr>
-          <p:spPr>
-            <a:xfrm>
-              <a:off x="7514167" y="2403475"/>
-              <a:ext cx="1981729" cy="192617"/>
+            <p:cNvPr id="50" name="TextBox 49"/>
+            <p:cNvSpPr txBox="1"/>
+            <p:nvPr/>
+          </p:nvSpPr>
+          <p:spPr>
+            <a:xfrm>
+              <a:off x="7519439" y="2578973"/>
+              <a:ext cx="1989096" cy="193333"/>
             </a:xfrm>
             <a:prstGeom prst="rect">
               <a:avLst/>
@@ -4758,7 +4799,7 @@
                 </a:lnSpc>
               </a:pPr>
               <a:r>
-                <a:rPr sz="1166" b="1" lang="ko-KR">
+                <a:rPr sz="1171" b="1" lang="ko-KR">
                   <a:solidFill>
                     <a:srgbClr val="ED7100"/>
                   </a:solidFill>
@@ -4773,7 +4814,7 @@
         </p:sp>
         <p:pic>
           <p:nvPicPr>
-            <p:cNvPr id="50" name="Amazon-EC2" descr="Amazon EC2"/>
+            <p:cNvPr id="51" name="Amazon-EC2" descr="Amazon EC2"/>
             <p:cNvPicPr>
               <a:picLocks noChangeAspect="1"/>
             </p:cNvPicPr>
@@ -4793,8 +4834,8 @@
           </p:blipFill>
           <p:spPr>
             <a:xfrm>
-              <a:off x="7514167" y="2671233"/>
-              <a:ext cx="508000" cy="508000"/>
+              <a:off x="7519439" y="2847727"/>
+              <a:ext cx="509888" cy="509888"/>
             </a:xfrm>
             <a:prstGeom prst="rect">
               <a:avLst/>
@@ -4803,14 +4844,14 @@
         </p:pic>
         <p:sp>
           <p:nvSpPr>
-            <p:cNvPr id="51" name="TextBox 50"/>
-            <p:cNvSpPr txBox="1"/>
-            <p:nvPr/>
-          </p:nvSpPr>
-          <p:spPr>
-            <a:xfrm>
-              <a:off x="7541286" y="3228975"/>
-              <a:ext cx="453760" cy="192617"/>
+            <p:cNvPr id="52" name="TextBox 51"/>
+            <p:cNvSpPr txBox="1"/>
+            <p:nvPr/>
+          </p:nvSpPr>
+          <p:spPr>
+            <a:xfrm>
+              <a:off x="7546659" y="3407542"/>
+              <a:ext cx="455447" cy="193333"/>
             </a:xfrm>
             <a:prstGeom prst="rect">
               <a:avLst/>
@@ -4829,7 +4870,7 @@
                 </a:lnSpc>
               </a:pPr>
               <a:r>
-                <a:rPr sz="1166" b="0" lang="ko-KR">
+                <a:rPr sz="1171" b="0" lang="ko-KR">
                   <a:solidFill>
                     <a:srgbClr val="232F3E"/>
                   </a:solidFill>
@@ -4844,7 +4885,7 @@
         </p:sp>
         <p:pic>
           <p:nvPicPr>
-            <p:cNvPr id="52" name="Amazon-EC2" descr="Amazon EC2"/>
+            <p:cNvPr id="53" name="Amazon-EC2" descr="Amazon EC2"/>
             <p:cNvPicPr>
               <a:picLocks noChangeAspect="1"/>
             </p:cNvPicPr>
@@ -4864,8 +4905,8 @@
           </p:blipFill>
           <p:spPr>
             <a:xfrm>
-              <a:off x="8487833" y="2671233"/>
-              <a:ext cx="508000" cy="508000"/>
+              <a:off x="8496725" y="2847727"/>
+              <a:ext cx="509888" cy="509888"/>
             </a:xfrm>
             <a:prstGeom prst="rect">
               <a:avLst/>
@@ -4874,14 +4915,14 @@
         </p:pic>
         <p:sp>
           <p:nvSpPr>
-            <p:cNvPr id="53" name="TextBox 52"/>
-            <p:cNvSpPr txBox="1"/>
-            <p:nvPr/>
-          </p:nvSpPr>
-          <p:spPr>
-            <a:xfrm>
-              <a:off x="8514953" y="3228975"/>
-              <a:ext cx="453760" cy="192617"/>
+            <p:cNvPr id="54" name="TextBox 53"/>
+            <p:cNvSpPr txBox="1"/>
+            <p:nvPr/>
+          </p:nvSpPr>
+          <p:spPr>
+            <a:xfrm>
+              <a:off x="8523946" y="3407542"/>
+              <a:ext cx="455447" cy="193333"/>
             </a:xfrm>
             <a:prstGeom prst="rect">
               <a:avLst/>
@@ -4900,7 +4941,7 @@
                 </a:lnSpc>
               </a:pPr>
               <a:r>
-                <a:rPr sz="1166" b="0" lang="ko-KR">
+                <a:rPr sz="1171" b="0" lang="ko-KR">
                   <a:solidFill>
                     <a:srgbClr val="232F3E"/>
                   </a:solidFill>
@@ -4915,7 +4956,7 @@
         </p:sp>
         <p:pic>
           <p:nvPicPr>
-            <p:cNvPr id="54" name="Amazon-EC2" descr="Amazon EC2"/>
+            <p:cNvPr id="55" name="Amazon-EC2" descr="Amazon EC2"/>
             <p:cNvPicPr>
               <a:picLocks noChangeAspect="1"/>
             </p:cNvPicPr>
@@ -4935,8 +4976,8 @@
           </p:blipFill>
           <p:spPr>
             <a:xfrm>
-              <a:off x="7514167" y="5105400"/>
-              <a:ext cx="508000" cy="508000"/>
+              <a:off x="7519439" y="5290943"/>
+              <a:ext cx="509888" cy="509888"/>
             </a:xfrm>
             <a:prstGeom prst="rect">
               <a:avLst/>
@@ -4945,14 +4986,14 @@
         </p:pic>
         <p:sp>
           <p:nvSpPr>
-            <p:cNvPr id="55" name="TextBox 54"/>
-            <p:cNvSpPr txBox="1"/>
-            <p:nvPr/>
-          </p:nvSpPr>
-          <p:spPr>
-            <a:xfrm>
-              <a:off x="7541286" y="5663142"/>
-              <a:ext cx="453760" cy="192617"/>
+            <p:cNvPr id="56" name="TextBox 55"/>
+            <p:cNvSpPr txBox="1"/>
+            <p:nvPr/>
+          </p:nvSpPr>
+          <p:spPr>
+            <a:xfrm>
+              <a:off x="7546659" y="5850758"/>
+              <a:ext cx="455447" cy="193333"/>
             </a:xfrm>
             <a:prstGeom prst="rect">
               <a:avLst/>
@@ -4971,7 +5012,7 @@
                 </a:lnSpc>
               </a:pPr>
               <a:r>
-                <a:rPr sz="1166" b="0" lang="ko-KR">
+                <a:rPr sz="1171" b="0" lang="ko-KR">
                   <a:solidFill>
                     <a:srgbClr val="232F3E"/>
                   </a:solidFill>
@@ -4986,7 +5027,7 @@
         </p:sp>
         <p:pic>
           <p:nvPicPr>
-            <p:cNvPr id="56" name="Amazon-EC2" descr="Amazon EC2"/>
+            <p:cNvPr id="57" name="Amazon-EC2" descr="Amazon EC2"/>
             <p:cNvPicPr>
               <a:picLocks noChangeAspect="1"/>
             </p:cNvPicPr>
@@ -5006,8 +5047,8 @@
           </p:blipFill>
           <p:spPr>
             <a:xfrm>
-              <a:off x="8487833" y="5105400"/>
-              <a:ext cx="508000" cy="508000"/>
+              <a:off x="8496725" y="5290943"/>
+              <a:ext cx="509888" cy="509888"/>
             </a:xfrm>
             <a:prstGeom prst="rect">
               <a:avLst/>
@@ -5016,14 +5057,14 @@
         </p:pic>
         <p:sp>
           <p:nvSpPr>
-            <p:cNvPr id="57" name="TextBox 56"/>
-            <p:cNvSpPr txBox="1"/>
-            <p:nvPr/>
-          </p:nvSpPr>
-          <p:spPr>
-            <a:xfrm>
-              <a:off x="8514953" y="5663142"/>
-              <a:ext cx="453760" cy="192617"/>
+            <p:cNvPr id="58" name="TextBox 57"/>
+            <p:cNvSpPr txBox="1"/>
+            <p:nvPr/>
+          </p:nvSpPr>
+          <p:spPr>
+            <a:xfrm>
+              <a:off x="8523946" y="5850758"/>
+              <a:ext cx="455447" cy="193333"/>
             </a:xfrm>
             <a:prstGeom prst="rect">
               <a:avLst/>
@@ -5042,7 +5083,7 @@
                 </a:lnSpc>
               </a:pPr>
               <a:r>
-                <a:rPr sz="1166" b="0" lang="ko-KR">
+                <a:rPr sz="1171" b="0" lang="ko-KR">
                   <a:solidFill>
                     <a:srgbClr val="232F3E"/>
                   </a:solidFill>
@@ -5057,7 +5098,7 @@
         </p:sp>
         <p:pic>
           <p:nvPicPr>
-            <p:cNvPr id="58" name="Elastic-Load-Balancing_Network-Load-Balancer" descr="Elastic Load Balancing_Network Load Balancer"/>
+            <p:cNvPr id="59" name="Elastic-Load-Balancing_Network-Load-Balancer" descr="Elastic Load Balancing_Network Load Balancer"/>
             <p:cNvPicPr>
               <a:picLocks noChangeAspect="1"/>
             </p:cNvPicPr>
@@ -5077,8 +5118,8 @@
           </p:blipFill>
           <p:spPr>
             <a:xfrm>
-              <a:off x="4508500" y="3666067"/>
-              <a:ext cx="508000" cy="508000"/>
+              <a:off x="4502599" y="3846259"/>
+              <a:ext cx="509888" cy="509888"/>
             </a:xfrm>
             <a:prstGeom prst="rect">
               <a:avLst/>
@@ -5087,14 +5128,14 @@
         </p:pic>
         <p:sp>
           <p:nvSpPr>
-            <p:cNvPr id="59" name="TextBox 58"/>
-            <p:cNvSpPr txBox="1"/>
-            <p:nvPr/>
-          </p:nvSpPr>
-          <p:spPr>
-            <a:xfrm>
-              <a:off x="4535620" y="4223808"/>
-              <a:ext cx="453760" cy="192617"/>
+            <p:cNvPr id="60" name="TextBox 59"/>
+            <p:cNvSpPr txBox="1"/>
+            <p:nvPr/>
+          </p:nvSpPr>
+          <p:spPr>
+            <a:xfrm>
+              <a:off x="4529819" y="4406074"/>
+              <a:ext cx="455447" cy="193333"/>
             </a:xfrm>
             <a:prstGeom prst="rect">
               <a:avLst/>
@@ -5113,7 +5154,7 @@
                 </a:lnSpc>
               </a:pPr>
               <a:r>
-                <a:rPr sz="1166" b="0" lang="ko-KR">
+                <a:rPr sz="1171" b="0" lang="ko-KR">
                   <a:solidFill>
                     <a:srgbClr val="232F3E"/>
                   </a:solidFill>
@@ -5128,14 +5169,14 @@
         </p:sp>
         <p:sp>
           <p:nvSpPr>
-            <p:cNvPr id="60" name="Rectangle 59"/>
+            <p:cNvPr id="61" name="Rectangle 60"/>
             <p:cNvSpPr/>
             <p:nvPr/>
           </p:nvSpPr>
           <p:spPr>
             <a:xfrm>
-              <a:off x="3407833" y="3666067"/>
-              <a:ext cx="508000" cy="740833"/>
+              <a:off x="3397840" y="3846259"/>
+              <a:ext cx="509888" cy="743587"/>
             </a:xfrm>
             <a:prstGeom prst="rect">
               <a:avLst/>
@@ -5157,7 +5198,7 @@
         </p:sp>
         <p:pic>
           <p:nvPicPr>
-            <p:cNvPr id="61" name="Amazon-VPC_Internet-Gateway" descr="Amazon VPC_Internet Gateway"/>
+            <p:cNvPr id="62" name="Amazon-VPC_Internet-Gateway" descr="Amazon VPC_Internet Gateway"/>
             <p:cNvPicPr>
               <a:picLocks noChangeAspect="1"/>
             </p:cNvPicPr>
@@ -5177,8 +5218,8 @@
           </p:blipFill>
           <p:spPr>
             <a:xfrm>
-              <a:off x="3407833" y="3666067"/>
-              <a:ext cx="508000" cy="508000"/>
+              <a:off x="3397840" y="3846259"/>
+              <a:ext cx="509888" cy="509888"/>
             </a:xfrm>
             <a:prstGeom prst="rect">
               <a:avLst/>
@@ -5187,14 +5228,14 @@
         </p:pic>
         <p:sp>
           <p:nvSpPr>
-            <p:cNvPr id="62" name="TextBox 61"/>
-            <p:cNvSpPr txBox="1"/>
-            <p:nvPr/>
-          </p:nvSpPr>
-          <p:spPr>
-            <a:xfrm>
-              <a:off x="3434953" y="4223808"/>
-              <a:ext cx="453760" cy="192617"/>
+            <p:cNvPr id="63" name="TextBox 62"/>
+            <p:cNvSpPr txBox="1"/>
+            <p:nvPr/>
+          </p:nvSpPr>
+          <p:spPr>
+            <a:xfrm>
+              <a:off x="3425061" y="4406074"/>
+              <a:ext cx="455447" cy="193333"/>
             </a:xfrm>
             <a:prstGeom prst="rect">
               <a:avLst/>
@@ -5213,7 +5254,7 @@
                 </a:lnSpc>
               </a:pPr>
               <a:r>
-                <a:rPr sz="1166" b="0" lang="ko-KR">
+                <a:rPr sz="1171" b="0" lang="ko-KR">
                   <a:solidFill>
                     <a:srgbClr val="232F3E"/>
                   </a:solidFill>
@@ -5228,19 +5269,19 @@
         </p:sp>
         <p:cxnSp>
           <p:nvCxnSpPr>
-            <p:cNvPr id="63" name="Connector 62"/>
+            <p:cNvPr id="64" name="Connector 63"/>
             <p:cNvCxnSpPr/>
             <p:nvPr/>
           </p:nvCxnSpPr>
           <p:spPr>
             <a:xfrm>
-              <a:off x="1375833" y="3920067"/>
-              <a:ext cx="1989667" cy="0"/>
+              <a:off x="1358286" y="4101203"/>
+              <a:ext cx="1997063" cy="0"/>
             </a:xfrm>
             <a:prstGeom prst="line">
               <a:avLst/>
             </a:prstGeom>
-            <a:ln w="15875">
+            <a:ln w="15934">
               <a:solidFill>
                 <a:srgbClr val="232F3E"/>
               </a:solidFill>
@@ -5252,14 +5293,14 @@
         </p:cxnSp>
         <p:sp>
           <p:nvSpPr>
-            <p:cNvPr id="64" name="TextBox 63"/>
-            <p:cNvSpPr txBox="1"/>
-            <p:nvPr/>
-          </p:nvSpPr>
-          <p:spPr>
-            <a:xfrm>
-              <a:off x="1322917" y="3704167"/>
-              <a:ext cx="825500" cy="165100"/>
+            <p:cNvPr id="65" name="TextBox 64"/>
+            <p:cNvSpPr txBox="1"/>
+            <p:nvPr/>
+          </p:nvSpPr>
+          <p:spPr>
+            <a:xfrm>
+              <a:off x="1305173" y="3884500"/>
+              <a:ext cx="828569" cy="165714"/>
             </a:xfrm>
             <a:prstGeom prst="rect">
               <a:avLst/>
@@ -5278,7 +5319,7 @@
                 </a:lnSpc>
               </a:pPr>
               <a:r>
-                <a:rPr sz="1000" b="0" lang="ko-KR">
+                <a:rPr sz="1003" b="0" lang="ko-KR">
                   <a:solidFill>
                     <a:srgbClr val="232F3E"/>
                   </a:solidFill>
@@ -5293,19 +5334,19 @@
         </p:sp>
         <p:cxnSp>
           <p:nvCxnSpPr>
-            <p:cNvPr id="65" name="Connector 64"/>
+            <p:cNvPr id="66" name="Connector 65"/>
             <p:cNvCxnSpPr/>
             <p:nvPr/>
           </p:nvCxnSpPr>
           <p:spPr>
             <a:xfrm>
-              <a:off x="3958167" y="3920067"/>
-              <a:ext cx="508000" cy="0"/>
+              <a:off x="3950219" y="4101203"/>
+              <a:ext cx="509889" cy="0"/>
             </a:xfrm>
             <a:prstGeom prst="line">
               <a:avLst/>
             </a:prstGeom>
-            <a:ln w="15875">
+            <a:ln w="15934">
               <a:solidFill>
                 <a:srgbClr val="232F3E"/>
               </a:solidFill>
@@ -5317,19 +5358,19 @@
         </p:cxnSp>
         <p:cxnSp>
           <p:nvCxnSpPr>
-            <p:cNvPr id="66" name="Connector 65"/>
+            <p:cNvPr id="67" name="Connector 66"/>
             <p:cNvCxnSpPr/>
             <p:nvPr/>
           </p:nvCxnSpPr>
           <p:spPr>
             <a:xfrm>
-              <a:off x="5058833" y="3920067"/>
-              <a:ext cx="2074334" cy="0"/>
+              <a:off x="5054978" y="4101203"/>
+              <a:ext cx="2082044" cy="0"/>
             </a:xfrm>
             <a:prstGeom prst="line">
               <a:avLst/>
             </a:prstGeom>
-            <a:ln w="15875">
+            <a:ln w="15934">
               <a:solidFill>
                 <a:srgbClr val="232F3E"/>
               </a:solidFill>
@@ -5341,14 +5382,14 @@
         </p:cxnSp>
         <p:sp>
           <p:nvSpPr>
-            <p:cNvPr id="67" name="TextBox 66"/>
-            <p:cNvSpPr txBox="1"/>
-            <p:nvPr/>
-          </p:nvSpPr>
-          <p:spPr>
-            <a:xfrm>
-              <a:off x="5639594" y="3704167"/>
-              <a:ext cx="912812" cy="165100"/>
+            <p:cNvPr id="68" name="TextBox 67"/>
+            <p:cNvSpPr txBox="1"/>
+            <p:nvPr/>
+          </p:nvSpPr>
+          <p:spPr>
+            <a:xfrm>
+              <a:off x="5637897" y="3884500"/>
+              <a:ext cx="916206" cy="165714"/>
             </a:xfrm>
             <a:prstGeom prst="rect">
               <a:avLst/>
@@ -5367,7 +5408,7 @@
                 </a:lnSpc>
               </a:pPr>
               <a:r>
-                <a:rPr sz="1000" b="0" lang="ko-KR">
+                <a:rPr sz="1003" b="0" lang="ko-KR">
                   <a:solidFill>
                     <a:srgbClr val="232F3E"/>
                   </a:solidFill>
@@ -5382,14 +5423,14 @@
         </p:sp>
         <p:sp>
           <p:nvSpPr>
-            <p:cNvPr id="68" name="Freeform 67"/>
+            <p:cNvPr id="69" name="Freeform 68"/>
             <p:cNvSpPr/>
             <p:nvPr/>
           </p:nvSpPr>
           <p:spPr>
             <a:xfrm>
-              <a:off x="1079500" y="2925233"/>
-              <a:ext cx="1333500" cy="698500"/>
+              <a:off x="1060851" y="3102671"/>
+              <a:ext cx="1338458" cy="701097"/>
             </a:xfrm>
             <a:custGeom>
               <a:avLst/>
@@ -5398,21 +5439,21 @@
               <a:cxnLst/>
               <a:rect l="l" t="t" r="r" b="b"/>
               <a:pathLst>
-                <a:path w="1333500" h="698500">
+                <a:path w="1338458" h="701097">
                   <a:moveTo>
-                    <a:pt x="0" y="698500"/>
+                    <a:pt x="0" y="701097"/>
                   </a:moveTo>
                   <a:lnTo>
                     <a:pt x="0" y="0"/>
                   </a:lnTo>
                   <a:lnTo>
-                    <a:pt x="1333500" y="0"/>
+                    <a:pt x="1338458" y="0"/>
                   </a:lnTo>
                 </a:path>
               </a:pathLst>
             </a:custGeom>
             <a:noFill/>
-            <a:ln w="15875">
+            <a:ln w="15934">
               <a:solidFill>
                 <a:srgbClr val="232F3E"/>
               </a:solidFill>
@@ -5433,14 +5474,14 @@
         </p:sp>
         <p:sp>
           <p:nvSpPr>
-            <p:cNvPr id="69" name="TextBox 68"/>
-            <p:cNvSpPr txBox="1"/>
-            <p:nvPr/>
-          </p:nvSpPr>
-          <p:spPr>
-            <a:xfrm>
-              <a:off x="1338792" y="2719917"/>
-              <a:ext cx="793750" cy="165100"/>
+            <p:cNvPr id="70" name="TextBox 69"/>
+            <p:cNvSpPr txBox="1"/>
+            <p:nvPr/>
+          </p:nvSpPr>
+          <p:spPr>
+            <a:xfrm>
+              <a:off x="1321107" y="2896591"/>
+              <a:ext cx="796701" cy="165714"/>
             </a:xfrm>
             <a:prstGeom prst="rect">
               <a:avLst/>
@@ -5459,7 +5500,7 @@
                 </a:lnSpc>
               </a:pPr>
               <a:r>
-                <a:rPr sz="1000" b="0" lang="ko-KR">
+                <a:rPr sz="1003" b="0" lang="ko-KR">
                   <a:solidFill>
                     <a:srgbClr val="545B64"/>
                   </a:solidFill>
@@ -5474,19 +5515,19 @@
         </p:sp>
         <p:cxnSp>
           <p:nvCxnSpPr>
-            <p:cNvPr id="70" name="Connector 69"/>
+            <p:cNvPr id="71" name="Connector 70"/>
             <p:cNvCxnSpPr/>
             <p:nvPr/>
           </p:nvCxnSpPr>
           <p:spPr>
             <a:xfrm flipH="1">
-              <a:off x="5058833" y="2925233"/>
-              <a:ext cx="2074334" cy="0"/>
+              <a:off x="5054978" y="3102671"/>
+              <a:ext cx="2082044" cy="0"/>
             </a:xfrm>
             <a:prstGeom prst="line">
               <a:avLst/>
             </a:prstGeom>
-            <a:ln w="15875">
+            <a:ln w="15934">
               <a:solidFill>
                 <a:srgbClr val="232F3E"/>
               </a:solidFill>
@@ -5500,14 +5541,14 @@
         </p:cxnSp>
         <p:sp>
           <p:nvSpPr>
-            <p:cNvPr id="71" name="TextBox 70"/>
-            <p:cNvSpPr txBox="1"/>
-            <p:nvPr/>
-          </p:nvSpPr>
-          <p:spPr>
-            <a:xfrm>
-              <a:off x="6037792" y="2719917"/>
-              <a:ext cx="920750" cy="165100"/>
+            <p:cNvPr id="72" name="TextBox 71"/>
+            <p:cNvSpPr txBox="1"/>
+            <p:nvPr/>
+          </p:nvSpPr>
+          <p:spPr>
+            <a:xfrm>
+              <a:off x="6037575" y="2896591"/>
+              <a:ext cx="924173" cy="165714"/>
             </a:xfrm>
             <a:prstGeom prst="rect">
               <a:avLst/>
@@ -5526,7 +5567,7 @@
                 </a:lnSpc>
               </a:pPr>
               <a:r>
-                <a:rPr sz="1000" b="0" lang="ko-KR">
+                <a:rPr sz="1003" b="0" lang="ko-KR">
                   <a:solidFill>
                     <a:srgbClr val="545B64"/>
                   </a:solidFill>
@@ -5541,19 +5582,19 @@
         </p:sp>
         <p:cxnSp>
           <p:nvCxnSpPr>
-            <p:cNvPr id="72" name="Connector 71"/>
+            <p:cNvPr id="73" name="Connector 72"/>
             <p:cNvCxnSpPr/>
             <p:nvPr/>
           </p:nvCxnSpPr>
           <p:spPr>
             <a:xfrm flipH="1">
-              <a:off x="5058833" y="5359400"/>
-              <a:ext cx="2074334" cy="0"/>
+              <a:off x="5054978" y="5545887"/>
+              <a:ext cx="2082044" cy="0"/>
             </a:xfrm>
             <a:prstGeom prst="line">
               <a:avLst/>
             </a:prstGeom>
-            <a:ln w="15875">
+            <a:ln w="15934">
               <a:solidFill>
                 <a:srgbClr val="232F3E"/>
               </a:solidFill>
@@ -5567,14 +5608,14 @@
         </p:cxnSp>
         <p:sp>
           <p:nvSpPr>
-            <p:cNvPr id="73" name="TextBox 72"/>
-            <p:cNvSpPr txBox="1"/>
-            <p:nvPr/>
-          </p:nvSpPr>
-          <p:spPr>
-            <a:xfrm>
-              <a:off x="6037792" y="5154083"/>
-              <a:ext cx="920750" cy="165100"/>
+            <p:cNvPr id="74" name="TextBox 73"/>
+            <p:cNvSpPr txBox="1"/>
+            <p:nvPr/>
+          </p:nvSpPr>
+          <p:spPr>
+            <a:xfrm>
+              <a:off x="6037575" y="5339807"/>
+              <a:ext cx="924173" cy="165714"/>
             </a:xfrm>
             <a:prstGeom prst="rect">
               <a:avLst/>
@@ -5593,7 +5634,7 @@
                 </a:lnSpc>
               </a:pPr>
               <a:r>
-                <a:rPr sz="1000" b="0" lang="ko-KR">
+                <a:rPr sz="1003" b="0" lang="ko-KR">
                   <a:solidFill>
                     <a:srgbClr val="545B64"/>
                   </a:solidFill>
@@ -5602,47 +5643,6 @@
                   <a:cs typeface="Malgun Gothic"/>
                 </a:rPr>
                 <a:t>아웃바운드</a:t>
-              </a:r>
-            </a:p>
-          </p:txBody>
-        </p:sp>
-        <p:sp>
-          <p:nvSpPr>
-            <p:cNvPr id="74" name="TextBox 73"/>
-            <p:cNvSpPr txBox="1"/>
-            <p:nvPr/>
-          </p:nvSpPr>
-          <p:spPr>
-            <a:xfrm>
-              <a:off x="2137833" y="6466417"/>
-              <a:ext cx="10144125" cy="165100"/>
-            </a:xfrm>
-            <a:prstGeom prst="rect">
-              <a:avLst/>
-            </a:prstGeom>
-            <a:noFill/>
-          </p:spPr>
-          <p:txBody>
-            <a:bodyPr wrap="none" lIns="0" rIns="0" tIns="0" bIns="0" anchor="t">
-              <a:noAutofit/>
-            </a:bodyPr>
-            <a:lstStyle/>
-            <a:p>
-              <a:pPr algn="l">
-                <a:lnSpc>
-                  <a:spcPct val="100000"/>
-                </a:lnSpc>
-              </a:pPr>
-              <a:r>
-                <a:rPr sz="1000" b="0" lang="ko-KR">
-                  <a:solidFill>
-                    <a:srgbClr val="545B64"/>
-                  </a:solidFill>
-                  <a:latin typeface="Arial"/>
-                  <a:ea typeface="Malgun Gothic"/>
-                  <a:cs typeface="Malgun Gothic"/>
-                </a:rPr>
-                <a:t>Internet-facing NLB · TLS 종료 · 라우팅: Public subnet 0.0.0.0/0 → IGW, App subnet 0.0.0.0/0 → NAT gateway (같은 AZ)</a:t>
               </a:r>
             </a:p>
           </p:txBody>
@@ -5710,10 +5710,10 @@
         </p:nvGrpSpPr>
         <p:grpSpPr>
           <a:xfrm>
-            <a:off x="327422" y="935567"/>
-            <a:ext cx="11590735" cy="5643033"/>
-            <a:chOff x="327422" y="935567"/>
-            <a:chExt cx="11590735" cy="5643033"/>
+            <a:off x="323257" y="965292"/>
+            <a:ext cx="11599103" cy="5549671"/>
+            <a:chOff x="323257" y="965292"/>
+            <a:chExt cx="11599103" cy="5549671"/>
           </a:xfrm>
         </p:grpSpPr>
         <p:pic>
@@ -5738,8 +5738,8 @@
           </p:blipFill>
           <p:spPr>
             <a:xfrm>
-              <a:off x="402167" y="3623733"/>
-              <a:ext cx="508000" cy="508000"/>
+              <a:off x="398056" y="3824855"/>
+              <a:ext cx="508367" cy="508367"/>
             </a:xfrm>
             <a:prstGeom prst="rect">
               <a:avLst/>
@@ -5754,8 +5754,8 @@
           </p:nvSpPr>
           <p:spPr>
             <a:xfrm>
-              <a:off x="327422" y="4160308"/>
-              <a:ext cx="657490" cy="192617"/>
+              <a:off x="323257" y="4361817"/>
+              <a:ext cx="657964" cy="192756"/>
             </a:xfrm>
             <a:prstGeom prst="rect">
               <a:avLst/>
@@ -5774,7 +5774,7 @@
                 </a:lnSpc>
               </a:pPr>
               <a:r>
-                <a:rPr sz="1166" b="0" lang="ko-KR">
+                <a:rPr sz="1167" b="0" lang="ko-KR">
                   <a:solidFill>
                     <a:srgbClr val="232F3E"/>
                   </a:solidFill>
@@ -5795,14 +5795,14 @@
           </p:nvSpPr>
           <p:spPr>
             <a:xfrm>
-              <a:off x="1778000" y="935567"/>
-              <a:ext cx="10138833" cy="5418667"/>
-            </a:xfrm>
-            <a:prstGeom prst="rect">
-              <a:avLst/>
-            </a:prstGeom>
-            <a:noFill/>
-            <a:ln w="21167">
+              <a:off x="1774882" y="965292"/>
+              <a:ext cx="10146154" cy="5549671"/>
+            </a:xfrm>
+            <a:prstGeom prst="rect">
+              <a:avLst/>
+            </a:prstGeom>
+            <a:noFill/>
+            <a:ln w="21182">
               <a:solidFill>
                 <a:srgbClr val="232F3E"/>
               </a:solidFill>
@@ -5840,8 +5840,8 @@
           </p:blipFill>
           <p:spPr>
             <a:xfrm>
-              <a:off x="1778000" y="935567"/>
-              <a:ext cx="338667" cy="338667"/>
+              <a:off x="1774882" y="965292"/>
+              <a:ext cx="338911" cy="338911"/>
             </a:xfrm>
             <a:prstGeom prst="rect">
               <a:avLst/>
@@ -5856,8 +5856,8 @@
           </p:nvSpPr>
           <p:spPr>
             <a:xfrm>
-              <a:off x="2222500" y="1017588"/>
-              <a:ext cx="1141016" cy="206375"/>
+              <a:off x="2219703" y="1047372"/>
+              <a:ext cx="1141839" cy="206524"/>
             </a:xfrm>
             <a:prstGeom prst="rect">
               <a:avLst/>
@@ -5911,8 +5911,8 @@
           </p:blipFill>
           <p:spPr>
             <a:xfrm>
-              <a:off x="2021417" y="1358900"/>
-              <a:ext cx="508000" cy="508000"/>
+              <a:off x="2018475" y="1388931"/>
+              <a:ext cx="508367" cy="508367"/>
             </a:xfrm>
             <a:prstGeom prst="rect">
               <a:avLst/>
@@ -5927,8 +5927,8 @@
           </p:nvSpPr>
           <p:spPr>
             <a:xfrm>
-              <a:off x="1793875" y="1895475"/>
-              <a:ext cx="963083" cy="192617"/>
+              <a:off x="1790769" y="2095349"/>
+              <a:ext cx="963779" cy="192756"/>
             </a:xfrm>
             <a:prstGeom prst="rect">
               <a:avLst/>
@@ -5947,7 +5947,7 @@
                 </a:lnSpc>
               </a:pPr>
               <a:r>
-                <a:rPr sz="1166" b="0" lang="ko-KR">
+                <a:rPr sz="1167" b="0" lang="ko-KR">
                   <a:solidFill>
                     <a:srgbClr val="232F3E"/>
                   </a:solidFill>
@@ -5968,8 +5968,8 @@
           </p:nvSpPr>
           <p:spPr>
             <a:xfrm>
-              <a:off x="1731698" y="2084917"/>
-              <a:ext cx="1087438" cy="165100"/>
+              <a:off x="1728547" y="2284927"/>
+              <a:ext cx="1088223" cy="165219"/>
             </a:xfrm>
             <a:prstGeom prst="rect">
               <a:avLst/>
@@ -6009,14 +6009,14 @@
           </p:nvSpPr>
           <p:spPr>
             <a:xfrm>
-              <a:off x="2772833" y="1295400"/>
-              <a:ext cx="9059333" cy="4974167"/>
-            </a:xfrm>
-            <a:prstGeom prst="rect">
-              <a:avLst/>
-            </a:prstGeom>
-            <a:noFill/>
-            <a:ln w="21167">
+              <a:off x="2770434" y="1325385"/>
+              <a:ext cx="9065874" cy="5104850"/>
+            </a:xfrm>
+            <a:prstGeom prst="rect">
+              <a:avLst/>
+            </a:prstGeom>
+            <a:noFill/>
+            <a:ln w="21182">
               <a:solidFill>
                 <a:srgbClr val="00A4A6"/>
               </a:solidFill>
@@ -6056,8 +6056,8 @@
           </p:blipFill>
           <p:spPr>
             <a:xfrm>
-              <a:off x="2772833" y="1295400"/>
-              <a:ext cx="254000" cy="254000"/>
+              <a:off x="2770434" y="1325385"/>
+              <a:ext cx="254183" cy="254183"/>
             </a:xfrm>
             <a:prstGeom prst="rect">
               <a:avLst/>
@@ -6072,8 +6072,8 @@
           </p:nvSpPr>
           <p:spPr>
             <a:xfrm>
-              <a:off x="3111500" y="1345142"/>
-              <a:ext cx="759354" cy="192617"/>
+              <a:off x="3109345" y="1375162"/>
+              <a:ext cx="759902" cy="192756"/>
             </a:xfrm>
             <a:prstGeom prst="rect">
               <a:avLst/>
@@ -6092,7 +6092,7 @@
                 </a:lnSpc>
               </a:pPr>
               <a:r>
-                <a:rPr sz="1166" b="1" lang="ko-KR">
+                <a:rPr sz="1167" b="1" lang="ko-KR">
                   <a:solidFill>
                     <a:srgbClr val="00A4A6"/>
                   </a:solidFill>
@@ -6127,8 +6127,8 @@
           </p:blipFill>
           <p:spPr>
             <a:xfrm>
-              <a:off x="10064750" y="2650067"/>
-              <a:ext cx="508000" cy="508000"/>
+              <a:off x="10067616" y="2850485"/>
+              <a:ext cx="508367" cy="508367"/>
             </a:xfrm>
             <a:prstGeom prst="rect">
               <a:avLst/>
@@ -6143,8 +6143,8 @@
           </p:nvSpPr>
           <p:spPr>
             <a:xfrm>
-              <a:off x="10091870" y="3186642"/>
-              <a:ext cx="453760" cy="192617"/>
+              <a:off x="10094755" y="3387448"/>
+              <a:ext cx="454088" cy="192756"/>
             </a:xfrm>
             <a:prstGeom prst="rect">
               <a:avLst/>
@@ -6163,7 +6163,7 @@
                 </a:lnSpc>
               </a:pPr>
               <a:r>
-                <a:rPr sz="1166" b="0" lang="ko-KR">
+                <a:rPr sz="1167" b="0" lang="ko-KR">
                   <a:solidFill>
                     <a:srgbClr val="232F3E"/>
                   </a:solidFill>
@@ -6184,8 +6184,8 @@
           </p:nvSpPr>
           <p:spPr>
             <a:xfrm>
-              <a:off x="10017125" y="3376083"/>
-              <a:ext cx="603250" cy="165100"/>
+              <a:off x="10019956" y="3577026"/>
+              <a:ext cx="603686" cy="165219"/>
             </a:xfrm>
             <a:prstGeom prst="rect">
               <a:avLst/>
@@ -6239,8 +6239,8 @@
           </p:blipFill>
           <p:spPr>
             <a:xfrm>
-              <a:off x="10064750" y="5084233"/>
-              <a:ext cx="508000" cy="508000"/>
+              <a:off x="10067616" y="5286409"/>
+              <a:ext cx="508367" cy="508367"/>
             </a:xfrm>
             <a:prstGeom prst="rect">
               <a:avLst/>
@@ -6255,8 +6255,8 @@
           </p:nvSpPr>
           <p:spPr>
             <a:xfrm>
-              <a:off x="9888141" y="5620808"/>
-              <a:ext cx="861219" cy="192617"/>
+              <a:off x="9890879" y="5823372"/>
+              <a:ext cx="861841" cy="192756"/>
             </a:xfrm>
             <a:prstGeom prst="rect">
               <a:avLst/>
@@ -6275,7 +6275,7 @@
                 </a:lnSpc>
               </a:pPr>
               <a:r>
-                <a:rPr sz="1166" b="0" lang="ko-KR">
+                <a:rPr sz="1167" b="0" lang="ko-KR">
                   <a:solidFill>
                     <a:srgbClr val="232F3E"/>
                   </a:solidFill>
@@ -6296,8 +6296,8 @@
           </p:nvSpPr>
           <p:spPr>
             <a:xfrm>
-              <a:off x="9949656" y="5810250"/>
-              <a:ext cx="738188" cy="165100"/>
+              <a:off x="9952439" y="6012950"/>
+              <a:ext cx="738720" cy="165219"/>
             </a:xfrm>
             <a:prstGeom prst="rect">
               <a:avLst/>
@@ -6351,8 +6351,8 @@
           </p:blipFill>
           <p:spPr>
             <a:xfrm>
-              <a:off x="11080750" y="2650067"/>
-              <a:ext cx="508000" cy="508000"/>
+              <a:off x="11084349" y="2850485"/>
+              <a:ext cx="508367" cy="508367"/>
             </a:xfrm>
             <a:prstGeom prst="rect">
               <a:avLst/>
@@ -6367,8 +6367,8 @@
           </p:nvSpPr>
           <p:spPr>
             <a:xfrm>
-              <a:off x="10751344" y="3186642"/>
-              <a:ext cx="1166813" cy="192617"/>
+              <a:off x="10754705" y="3387448"/>
+              <a:ext cx="1167655" cy="192756"/>
             </a:xfrm>
             <a:prstGeom prst="rect">
               <a:avLst/>
@@ -6387,7 +6387,7 @@
                 </a:lnSpc>
               </a:pPr>
               <a:r>
-                <a:rPr sz="1166" b="0" lang="ko-KR">
+                <a:rPr sz="1167" b="0" lang="ko-KR">
                   <a:solidFill>
                     <a:srgbClr val="232F3E"/>
                   </a:solidFill>
@@ -6408,8 +6408,8 @@
           </p:nvSpPr>
           <p:spPr>
             <a:xfrm>
-              <a:off x="10822781" y="3376083"/>
-              <a:ext cx="1023938" cy="165100"/>
+              <a:off x="10826194" y="3577026"/>
+              <a:ext cx="1024677" cy="165219"/>
             </a:xfrm>
             <a:prstGeom prst="rect">
               <a:avLst/>
@@ -6463,8 +6463,8 @@
           </p:blipFill>
           <p:spPr>
             <a:xfrm>
-              <a:off x="11080750" y="5084233"/>
-              <a:ext cx="508000" cy="508000"/>
+              <a:off x="11084349" y="5286409"/>
+              <a:ext cx="508367" cy="508367"/>
             </a:xfrm>
             <a:prstGeom prst="rect">
               <a:avLst/>
@@ -6479,8 +6479,8 @@
           </p:nvSpPr>
           <p:spPr>
             <a:xfrm>
-              <a:off x="11158802" y="5620808"/>
-              <a:ext cx="351896" cy="192617"/>
+              <a:off x="11162458" y="5823372"/>
+              <a:ext cx="352150" cy="192756"/>
             </a:xfrm>
             <a:prstGeom prst="rect">
               <a:avLst/>
@@ -6499,7 +6499,7 @@
                 </a:lnSpc>
               </a:pPr>
               <a:r>
-                <a:rPr sz="1166" b="0" lang="ko-KR">
+                <a:rPr sz="1167" b="0" lang="ko-KR">
                   <a:solidFill>
                     <a:srgbClr val="232F3E"/>
                   </a:solidFill>
@@ -6520,8 +6520,8 @@
           </p:nvSpPr>
           <p:spPr>
             <a:xfrm>
-              <a:off x="10830719" y="5810250"/>
-              <a:ext cx="1008062" cy="165100"/>
+              <a:off x="10834137" y="6012950"/>
+              <a:ext cx="1008790" cy="165219"/>
             </a:xfrm>
             <a:prstGeom prst="rect">
               <a:avLst/>
@@ -6561,14 +6561,14 @@
           </p:nvSpPr>
           <p:spPr>
             <a:xfrm>
-              <a:off x="3111500" y="1612900"/>
-              <a:ext cx="6815667" cy="4529667"/>
-            </a:xfrm>
-            <a:prstGeom prst="rect">
-              <a:avLst/>
-            </a:prstGeom>
-            <a:noFill/>
-            <a:ln w="21167">
+              <a:off x="3109345" y="1643114"/>
+              <a:ext cx="6820588" cy="4702393"/>
+            </a:xfrm>
+            <a:prstGeom prst="rect">
+              <a:avLst/>
+            </a:prstGeom>
+            <a:noFill/>
+            <a:ln w="21182">
               <a:solidFill>
                 <a:srgbClr val="8C4FFF"/>
               </a:solidFill>
@@ -6606,8 +6606,8 @@
           </p:blipFill>
           <p:spPr>
             <a:xfrm>
-              <a:off x="3111500" y="1612900"/>
-              <a:ext cx="254000" cy="254000"/>
+              <a:off x="3109345" y="1643114"/>
+              <a:ext cx="254183" cy="254183"/>
             </a:xfrm>
             <a:prstGeom prst="rect">
               <a:avLst/>
@@ -6622,8 +6622,8 @@
           </p:nvSpPr>
           <p:spPr>
             <a:xfrm>
-              <a:off x="3450167" y="1662642"/>
-              <a:ext cx="1676135" cy="192617"/>
+              <a:off x="3448256" y="1692892"/>
+              <a:ext cx="454088" cy="192756"/>
             </a:xfrm>
             <a:prstGeom prst="rect">
               <a:avLst/>
@@ -6642,7 +6642,7 @@
                 </a:lnSpc>
               </a:pPr>
               <a:r>
-                <a:rPr sz="1166" b="1" lang="ko-KR">
+                <a:rPr sz="1167" b="1" lang="ko-KR">
                   <a:solidFill>
                     <a:srgbClr val="8C4FFF"/>
                   </a:solidFill>
@@ -6650,27 +6650,68 @@
                   <a:ea typeface="Malgun Gothic"/>
                   <a:cs typeface="Malgun Gothic"/>
                 </a:rPr>
-                <a:t>VPC 10.0.0.0/16</a:t>
-              </a:r>
-            </a:p>
-          </p:txBody>
-        </p:sp>
-        <p:sp>
-          <p:nvSpPr>
-            <p:cNvPr id="30" name="Rectangle 29"/>
+                <a:t>VPC</a:t>
+              </a:r>
+            </a:p>
+          </p:txBody>
+        </p:sp>
+        <p:sp>
+          <p:nvSpPr>
+            <p:cNvPr id="30" name="TextBox 29"/>
+            <p:cNvSpPr txBox="1"/>
+            <p:nvPr/>
+          </p:nvSpPr>
+          <p:spPr>
+            <a:xfrm>
+              <a:off x="3448256" y="1882470"/>
+              <a:ext cx="1088223" cy="165219"/>
+            </a:xfrm>
+            <a:prstGeom prst="rect">
+              <a:avLst/>
+            </a:prstGeom>
+            <a:noFill/>
+          </p:spPr>
+          <p:txBody>
+            <a:bodyPr wrap="none" lIns="0" rIns="0" tIns="0" bIns="0" anchor="t">
+              <a:noAutofit/>
+            </a:bodyPr>
+            <a:lstStyle/>
+            <a:p>
+              <a:pPr algn="l">
+                <a:lnSpc>
+                  <a:spcPct val="100000"/>
+                </a:lnSpc>
+              </a:pPr>
+              <a:r>
+                <a:rPr sz="1000" b="0" lang="ko-KR">
+                  <a:solidFill>
+                    <a:srgbClr val="232F3E"/>
+                  </a:solidFill>
+                  <a:latin typeface="Arial"/>
+                  <a:ea typeface="Malgun Gothic"/>
+                  <a:cs typeface="Malgun Gothic"/>
+                </a:rPr>
+                <a:t>10.0.0.0/16</a:t>
+              </a:r>
+            </a:p>
+          </p:txBody>
+        </p:sp>
+        <p:sp>
+          <p:nvSpPr>
+            <p:cNvPr id="31" name="Rectangle 30"/>
             <p:cNvSpPr/>
             <p:nvPr/>
           </p:nvSpPr>
           <p:spPr>
             <a:xfrm>
-              <a:off x="3217333" y="1930400"/>
-              <a:ext cx="6604000" cy="1608667"/>
-            </a:xfrm>
-            <a:prstGeom prst="rect">
-              <a:avLst/>
-            </a:prstGeom>
-            <a:noFill/>
-            <a:ln w="15875">
+              <a:off x="3215255" y="2130299"/>
+              <a:ext cx="6608768" cy="1609828"/>
+            </a:xfrm>
+            <a:prstGeom prst="rect">
+              <a:avLst/>
+            </a:prstGeom>
+            <a:noFill/>
+            <a:ln w="15886">
               <a:solidFill>
                 <a:srgbClr val="00A4A6"/>
               </a:solidFill>
@@ -6690,14 +6731,14 @@
         </p:sp>
         <p:sp>
           <p:nvSpPr>
-            <p:cNvPr id="31" name="TextBox 30"/>
-            <p:cNvSpPr txBox="1"/>
-            <p:nvPr/>
-          </p:nvSpPr>
-          <p:spPr>
-            <a:xfrm>
-              <a:off x="3344333" y="1980142"/>
-              <a:ext cx="2083594" cy="192617"/>
+            <p:cNvPr id="32" name="TextBox 31"/>
+            <p:cNvSpPr txBox="1"/>
+            <p:nvPr/>
+          </p:nvSpPr>
+          <p:spPr>
+            <a:xfrm>
+              <a:off x="3342347" y="2180076"/>
+              <a:ext cx="2085098" cy="192756"/>
             </a:xfrm>
             <a:prstGeom prst="rect">
               <a:avLst/>
@@ -6716,7 +6757,7 @@
                 </a:lnSpc>
               </a:pPr>
               <a:r>
-                <a:rPr sz="1166" b="1" lang="ko-KR">
+                <a:rPr sz="1167" b="1" lang="ko-KR">
                   <a:solidFill>
                     <a:srgbClr val="00A4A6"/>
                   </a:solidFill>
@@ -6731,20 +6772,20 @@
         </p:sp>
         <p:sp>
           <p:nvSpPr>
-            <p:cNvPr id="32" name="Rectangle 31"/>
+            <p:cNvPr id="33" name="Rectangle 32"/>
             <p:cNvSpPr/>
             <p:nvPr/>
           </p:nvSpPr>
           <p:spPr>
             <a:xfrm>
-              <a:off x="3217333" y="4449233"/>
-              <a:ext cx="6604000" cy="1608667"/>
-            </a:xfrm>
-            <a:prstGeom prst="rect">
-              <a:avLst/>
-            </a:prstGeom>
-            <a:noFill/>
-            <a:ln w="15875">
+              <a:off x="3215255" y="4650951"/>
+              <a:ext cx="6608768" cy="1609828"/>
+            </a:xfrm>
+            <a:prstGeom prst="rect">
+              <a:avLst/>
+            </a:prstGeom>
+            <a:noFill/>
+            <a:ln w="15886">
               <a:solidFill>
                 <a:srgbClr val="00A4A6"/>
               </a:solidFill>
@@ -6764,14 +6805,14 @@
         </p:sp>
         <p:sp>
           <p:nvSpPr>
-            <p:cNvPr id="33" name="TextBox 32"/>
-            <p:cNvSpPr txBox="1"/>
-            <p:nvPr/>
-          </p:nvSpPr>
-          <p:spPr>
-            <a:xfrm>
-              <a:off x="3344333" y="4498975"/>
-              <a:ext cx="2083594" cy="192617"/>
+            <p:cNvPr id="34" name="TextBox 33"/>
+            <p:cNvSpPr txBox="1"/>
+            <p:nvPr/>
+          </p:nvSpPr>
+          <p:spPr>
+            <a:xfrm>
+              <a:off x="3342347" y="4700728"/>
+              <a:ext cx="2085098" cy="192756"/>
             </a:xfrm>
             <a:prstGeom prst="rect">
               <a:avLst/>
@@ -6790,7 +6831,7 @@
                 </a:lnSpc>
               </a:pPr>
               <a:r>
-                <a:rPr sz="1166" b="1" lang="ko-KR">
+                <a:rPr sz="1167" b="1" lang="ko-KR">
                   <a:solidFill>
                     <a:srgbClr val="00A4A6"/>
                   </a:solidFill>
@@ -6805,20 +6846,20 @@
         </p:sp>
         <p:sp>
           <p:nvSpPr>
-            <p:cNvPr id="34" name="Rectangle 33"/>
+            <p:cNvPr id="35" name="Rectangle 34"/>
             <p:cNvSpPr/>
             <p:nvPr/>
           </p:nvSpPr>
           <p:spPr>
             <a:xfrm>
-              <a:off x="3344333" y="2247900"/>
-              <a:ext cx="1545167" cy="1206500"/>
-            </a:xfrm>
-            <a:prstGeom prst="rect">
-              <a:avLst/>
-            </a:prstGeom>
-            <a:noFill/>
-            <a:ln w="15875">
+              <a:off x="3342347" y="2448028"/>
+              <a:ext cx="1546282" cy="1207371"/>
+            </a:xfrm>
+            <a:prstGeom prst="rect">
+              <a:avLst/>
+            </a:prstGeom>
+            <a:noFill/>
+            <a:ln w="15886">
               <a:solidFill>
                 <a:srgbClr val="7AA116"/>
               </a:solidFill>
@@ -6836,7 +6877,7 @@
         </p:sp>
         <p:pic>
           <p:nvPicPr>
-            <p:cNvPr id="35" name="Public-subnet_32" descr="Public subnet_32"/>
+            <p:cNvPr id="36" name="Public-subnet_32" descr="Public subnet_32"/>
             <p:cNvPicPr>
               <a:picLocks noChangeAspect="1"/>
             </p:cNvPicPr>
@@ -6856,8 +6897,8 @@
           </p:blipFill>
           <p:spPr>
             <a:xfrm>
-              <a:off x="3344333" y="2247900"/>
-              <a:ext cx="254000" cy="254000"/>
+              <a:off x="3342347" y="2448028"/>
+              <a:ext cx="254183" cy="254183"/>
             </a:xfrm>
             <a:prstGeom prst="rect">
               <a:avLst/>
@@ -6866,14 +6907,14 @@
         </p:pic>
         <p:sp>
           <p:nvSpPr>
-            <p:cNvPr id="36" name="TextBox 35"/>
-            <p:cNvSpPr txBox="1"/>
-            <p:nvPr/>
-          </p:nvSpPr>
-          <p:spPr>
-            <a:xfrm>
-              <a:off x="3683000" y="2297642"/>
-              <a:ext cx="1472406" cy="192617"/>
+            <p:cNvPr id="37" name="TextBox 36"/>
+            <p:cNvSpPr txBox="1"/>
+            <p:nvPr/>
+          </p:nvSpPr>
+          <p:spPr>
+            <a:xfrm>
+              <a:off x="3681258" y="2497806"/>
+              <a:ext cx="1473469" cy="192756"/>
             </a:xfrm>
             <a:prstGeom prst="rect">
               <a:avLst/>
@@ -6892,7 +6933,7 @@
                 </a:lnSpc>
               </a:pPr>
               <a:r>
-                <a:rPr sz="1166" b="1" lang="ko-KR">
+                <a:rPr sz="1167" b="1" lang="ko-KR">
                   <a:solidFill>
                     <a:srgbClr val="7AA116"/>
                   </a:solidFill>
@@ -6907,20 +6948,20 @@
         </p:sp>
         <p:sp>
           <p:nvSpPr>
-            <p:cNvPr id="37" name="Rectangle 36"/>
+            <p:cNvPr id="38" name="Rectangle 37"/>
             <p:cNvSpPr/>
             <p:nvPr/>
           </p:nvSpPr>
           <p:spPr>
             <a:xfrm>
-              <a:off x="5016500" y="2247900"/>
-              <a:ext cx="3302000" cy="1206500"/>
-            </a:xfrm>
-            <a:prstGeom prst="rect">
-              <a:avLst/>
-            </a:prstGeom>
-            <a:noFill/>
-            <a:ln w="15875">
+              <a:off x="5015721" y="2448028"/>
+              <a:ext cx="3304384" cy="1207371"/>
+            </a:xfrm>
+            <a:prstGeom prst="rect">
+              <a:avLst/>
+            </a:prstGeom>
+            <a:noFill/>
+            <a:ln w="15886">
               <a:solidFill>
                 <a:srgbClr val="00A4A6"/>
               </a:solidFill>
@@ -6938,7 +6979,7 @@
         </p:sp>
         <p:pic>
           <p:nvPicPr>
-            <p:cNvPr id="38" name="Private-subnet_32" descr="Private subnet_32"/>
+            <p:cNvPr id="39" name="Private-subnet_32" descr="Private subnet_32"/>
             <p:cNvPicPr>
               <a:picLocks noChangeAspect="1"/>
             </p:cNvPicPr>
@@ -6958,8 +6999,8 @@
           </p:blipFill>
           <p:spPr>
             <a:xfrm>
-              <a:off x="5016500" y="2247900"/>
-              <a:ext cx="254000" cy="254000"/>
+              <a:off x="5015721" y="2448028"/>
+              <a:ext cx="254183" cy="254183"/>
             </a:xfrm>
             <a:prstGeom prst="rect">
               <a:avLst/>
@@ -6968,14 +7009,14 @@
         </p:pic>
         <p:sp>
           <p:nvSpPr>
-            <p:cNvPr id="39" name="TextBox 38"/>
-            <p:cNvSpPr txBox="1"/>
-            <p:nvPr/>
-          </p:nvSpPr>
-          <p:spPr>
-            <a:xfrm>
-              <a:off x="5355167" y="2297642"/>
-              <a:ext cx="1166813" cy="192617"/>
+            <p:cNvPr id="40" name="TextBox 39"/>
+            <p:cNvSpPr txBox="1"/>
+            <p:nvPr/>
+          </p:nvSpPr>
+          <p:spPr>
+            <a:xfrm>
+              <a:off x="5354632" y="2497806"/>
+              <a:ext cx="1167655" cy="192756"/>
             </a:xfrm>
             <a:prstGeom prst="rect">
               <a:avLst/>
@@ -6994,7 +7035,7 @@
                 </a:lnSpc>
               </a:pPr>
               <a:r>
-                <a:rPr sz="1166" b="1" lang="ko-KR">
+                <a:rPr sz="1167" b="1" lang="ko-KR">
                   <a:solidFill>
                     <a:srgbClr val="00A4A6"/>
                   </a:solidFill>
@@ -7009,20 +7050,20 @@
         </p:sp>
         <p:sp>
           <p:nvSpPr>
-            <p:cNvPr id="40" name="Rectangle 39"/>
+            <p:cNvPr id="41" name="Rectangle 40"/>
             <p:cNvSpPr/>
             <p:nvPr/>
           </p:nvSpPr>
           <p:spPr>
             <a:xfrm>
-              <a:off x="8445500" y="2247900"/>
-              <a:ext cx="1270000" cy="1206500"/>
-            </a:xfrm>
-            <a:prstGeom prst="rect">
-              <a:avLst/>
-            </a:prstGeom>
-            <a:noFill/>
-            <a:ln w="15875">
+              <a:off x="8447196" y="2448028"/>
+              <a:ext cx="1270917" cy="1207371"/>
+            </a:xfrm>
+            <a:prstGeom prst="rect">
+              <a:avLst/>
+            </a:prstGeom>
+            <a:noFill/>
+            <a:ln w="15886">
               <a:solidFill>
                 <a:srgbClr val="00A4A6"/>
               </a:solidFill>
@@ -7040,7 +7081,7 @@
         </p:sp>
         <p:pic>
           <p:nvPicPr>
-            <p:cNvPr id="41" name="Private-subnet_32" descr="Private subnet_32"/>
+            <p:cNvPr id="42" name="Private-subnet_32" descr="Private subnet_32"/>
             <p:cNvPicPr>
               <a:picLocks noChangeAspect="1"/>
             </p:cNvPicPr>
@@ -7060,8 +7101,8 @@
           </p:blipFill>
           <p:spPr>
             <a:xfrm>
-              <a:off x="8445500" y="2247900"/>
-              <a:ext cx="254000" cy="254000"/>
+              <a:off x="8447196" y="2448028"/>
+              <a:ext cx="254183" cy="254183"/>
             </a:xfrm>
             <a:prstGeom prst="rect">
               <a:avLst/>
@@ -7070,14 +7111,14 @@
         </p:pic>
         <p:sp>
           <p:nvSpPr>
-            <p:cNvPr id="42" name="TextBox 41"/>
-            <p:cNvSpPr txBox="1"/>
-            <p:nvPr/>
-          </p:nvSpPr>
-          <p:spPr>
-            <a:xfrm>
-              <a:off x="8784167" y="2297642"/>
-              <a:ext cx="1064948" cy="192617"/>
+            <p:cNvPr id="43" name="TextBox 42"/>
+            <p:cNvSpPr txBox="1"/>
+            <p:nvPr/>
+          </p:nvSpPr>
+          <p:spPr>
+            <a:xfrm>
+              <a:off x="8786108" y="2497806"/>
+              <a:ext cx="1065717" cy="192756"/>
             </a:xfrm>
             <a:prstGeom prst="rect">
               <a:avLst/>
@@ -7096,7 +7137,7 @@
                 </a:lnSpc>
               </a:pPr>
               <a:r>
-                <a:rPr sz="1166" b="1" lang="ko-KR">
+                <a:rPr sz="1167" b="1" lang="ko-KR">
                   <a:solidFill>
                     <a:srgbClr val="00A4A6"/>
                   </a:solidFill>
@@ -7111,20 +7152,20 @@
         </p:sp>
         <p:sp>
           <p:nvSpPr>
-            <p:cNvPr id="43" name="Rectangle 42"/>
+            <p:cNvPr id="44" name="Rectangle 43"/>
             <p:cNvSpPr/>
             <p:nvPr/>
           </p:nvSpPr>
           <p:spPr>
             <a:xfrm>
-              <a:off x="3344333" y="4766733"/>
-              <a:ext cx="1545167" cy="1206500"/>
-            </a:xfrm>
-            <a:prstGeom prst="rect">
-              <a:avLst/>
-            </a:prstGeom>
-            <a:noFill/>
-            <a:ln w="15875">
+              <a:off x="3342347" y="4968680"/>
+              <a:ext cx="1546282" cy="1207371"/>
+            </a:xfrm>
+            <a:prstGeom prst="rect">
+              <a:avLst/>
+            </a:prstGeom>
+            <a:noFill/>
+            <a:ln w="15886">
               <a:solidFill>
                 <a:srgbClr val="7AA116"/>
               </a:solidFill>
@@ -7142,7 +7183,7 @@
         </p:sp>
         <p:pic>
           <p:nvPicPr>
-            <p:cNvPr id="44" name="Public-subnet_32" descr="Public subnet_32"/>
+            <p:cNvPr id="45" name="Public-subnet_32" descr="Public subnet_32"/>
             <p:cNvPicPr>
               <a:picLocks noChangeAspect="1"/>
             </p:cNvPicPr>
@@ -7162,8 +7203,8 @@
           </p:blipFill>
           <p:spPr>
             <a:xfrm>
-              <a:off x="3344333" y="4766733"/>
-              <a:ext cx="254000" cy="254000"/>
+              <a:off x="3342347" y="4968680"/>
+              <a:ext cx="254183" cy="254183"/>
             </a:xfrm>
             <a:prstGeom prst="rect">
               <a:avLst/>
@@ -7172,14 +7213,14 @@
         </p:pic>
         <p:sp>
           <p:nvSpPr>
-            <p:cNvPr id="45" name="TextBox 44"/>
-            <p:cNvSpPr txBox="1"/>
-            <p:nvPr/>
-          </p:nvSpPr>
-          <p:spPr>
-            <a:xfrm>
-              <a:off x="3683000" y="4816475"/>
-              <a:ext cx="1472406" cy="192617"/>
+            <p:cNvPr id="46" name="TextBox 45"/>
+            <p:cNvSpPr txBox="1"/>
+            <p:nvPr/>
+          </p:nvSpPr>
+          <p:spPr>
+            <a:xfrm>
+              <a:off x="3681258" y="5018458"/>
+              <a:ext cx="1473469" cy="192756"/>
             </a:xfrm>
             <a:prstGeom prst="rect">
               <a:avLst/>
@@ -7198,7 +7239,7 @@
                 </a:lnSpc>
               </a:pPr>
               <a:r>
-                <a:rPr sz="1166" b="1" lang="ko-KR">
+                <a:rPr sz="1167" b="1" lang="ko-KR">
                   <a:solidFill>
                     <a:srgbClr val="7AA116"/>
                   </a:solidFill>
@@ -7213,20 +7254,20 @@
         </p:sp>
         <p:sp>
           <p:nvSpPr>
-            <p:cNvPr id="46" name="Rectangle 45"/>
+            <p:cNvPr id="47" name="Rectangle 46"/>
             <p:cNvSpPr/>
             <p:nvPr/>
           </p:nvSpPr>
           <p:spPr>
             <a:xfrm>
-              <a:off x="5016500" y="4766733"/>
-              <a:ext cx="3302000" cy="1206500"/>
-            </a:xfrm>
-            <a:prstGeom prst="rect">
-              <a:avLst/>
-            </a:prstGeom>
-            <a:noFill/>
-            <a:ln w="15875">
+              <a:off x="5015721" y="4968680"/>
+              <a:ext cx="3304384" cy="1207371"/>
+            </a:xfrm>
+            <a:prstGeom prst="rect">
+              <a:avLst/>
+            </a:prstGeom>
+            <a:noFill/>
+            <a:ln w="15886">
               <a:solidFill>
                 <a:srgbClr val="00A4A6"/>
               </a:solidFill>
@@ -7244,7 +7285,7 @@
         </p:sp>
         <p:pic>
           <p:nvPicPr>
-            <p:cNvPr id="47" name="Private-subnet_32" descr="Private subnet_32"/>
+            <p:cNvPr id="48" name="Private-subnet_32" descr="Private subnet_32"/>
             <p:cNvPicPr>
               <a:picLocks noChangeAspect="1"/>
             </p:cNvPicPr>
@@ -7264,8 +7305,8 @@
           </p:blipFill>
           <p:spPr>
             <a:xfrm>
-              <a:off x="5016500" y="4766733"/>
-              <a:ext cx="254000" cy="254000"/>
+              <a:off x="5015721" y="4968680"/>
+              <a:ext cx="254183" cy="254183"/>
             </a:xfrm>
             <a:prstGeom prst="rect">
               <a:avLst/>
@@ -7274,14 +7315,14 @@
         </p:pic>
         <p:sp>
           <p:nvSpPr>
-            <p:cNvPr id="48" name="TextBox 47"/>
-            <p:cNvSpPr txBox="1"/>
-            <p:nvPr/>
-          </p:nvSpPr>
-          <p:spPr>
-            <a:xfrm>
-              <a:off x="5355167" y="4816475"/>
-              <a:ext cx="1166813" cy="192617"/>
+            <p:cNvPr id="49" name="TextBox 48"/>
+            <p:cNvSpPr txBox="1"/>
+            <p:nvPr/>
+          </p:nvSpPr>
+          <p:spPr>
+            <a:xfrm>
+              <a:off x="5354632" y="5018458"/>
+              <a:ext cx="1167655" cy="192756"/>
             </a:xfrm>
             <a:prstGeom prst="rect">
               <a:avLst/>
@@ -7300,7 +7341,7 @@
                 </a:lnSpc>
               </a:pPr>
               <a:r>
-                <a:rPr sz="1166" b="1" lang="ko-KR">
+                <a:rPr sz="1167" b="1" lang="ko-KR">
                   <a:solidFill>
                     <a:srgbClr val="00A4A6"/>
                   </a:solidFill>
@@ -7315,20 +7356,20 @@
         </p:sp>
         <p:sp>
           <p:nvSpPr>
-            <p:cNvPr id="49" name="Rectangle 48"/>
+            <p:cNvPr id="50" name="Rectangle 49"/>
             <p:cNvSpPr/>
             <p:nvPr/>
           </p:nvSpPr>
           <p:spPr>
             <a:xfrm>
-              <a:off x="8445500" y="4766733"/>
-              <a:ext cx="1270000" cy="1206500"/>
-            </a:xfrm>
-            <a:prstGeom prst="rect">
-              <a:avLst/>
-            </a:prstGeom>
-            <a:noFill/>
-            <a:ln w="15875">
+              <a:off x="8447196" y="4968680"/>
+              <a:ext cx="1270917" cy="1207371"/>
+            </a:xfrm>
+            <a:prstGeom prst="rect">
+              <a:avLst/>
+            </a:prstGeom>
+            <a:noFill/>
+            <a:ln w="15886">
               <a:solidFill>
                 <a:srgbClr val="00A4A6"/>
               </a:solidFill>
@@ -7346,7 +7387,7 @@
         </p:sp>
         <p:pic>
           <p:nvPicPr>
-            <p:cNvPr id="50" name="Private-subnet_32" descr="Private subnet_32"/>
+            <p:cNvPr id="51" name="Private-subnet_32" descr="Private subnet_32"/>
             <p:cNvPicPr>
               <a:picLocks noChangeAspect="1"/>
             </p:cNvPicPr>
@@ -7366,8 +7407,8 @@
           </p:blipFill>
           <p:spPr>
             <a:xfrm>
-              <a:off x="8445500" y="4766733"/>
-              <a:ext cx="254000" cy="254000"/>
+              <a:off x="8447196" y="4968680"/>
+              <a:ext cx="254183" cy="254183"/>
             </a:xfrm>
             <a:prstGeom prst="rect">
               <a:avLst/>
@@ -7376,14 +7417,14 @@
         </p:pic>
         <p:sp>
           <p:nvSpPr>
-            <p:cNvPr id="51" name="TextBox 50"/>
-            <p:cNvSpPr txBox="1"/>
-            <p:nvPr/>
-          </p:nvSpPr>
-          <p:spPr>
-            <a:xfrm>
-              <a:off x="8784167" y="4816475"/>
-              <a:ext cx="1064948" cy="192617"/>
+            <p:cNvPr id="52" name="TextBox 51"/>
+            <p:cNvSpPr txBox="1"/>
+            <p:nvPr/>
+          </p:nvSpPr>
+          <p:spPr>
+            <a:xfrm>
+              <a:off x="8786108" y="5018458"/>
+              <a:ext cx="1065717" cy="192756"/>
             </a:xfrm>
             <a:prstGeom prst="rect">
               <a:avLst/>
@@ -7402,7 +7443,7 @@
                 </a:lnSpc>
               </a:pPr>
               <a:r>
-                <a:rPr sz="1166" b="1" lang="ko-KR">
+                <a:rPr sz="1167" b="1" lang="ko-KR">
                   <a:solidFill>
                     <a:srgbClr val="00A4A6"/>
                   </a:solidFill>
@@ -7417,7 +7458,7 @@
         </p:sp>
         <p:pic>
           <p:nvPicPr>
-            <p:cNvPr id="52" name="Amazon-VPC_NAT-Gateway" descr="Amazon VPC_NAT Gateway"/>
+            <p:cNvPr id="53" name="Amazon-VPC_NAT-Gateway" descr="Amazon VPC_NAT Gateway"/>
             <p:cNvPicPr>
               <a:picLocks noChangeAspect="1"/>
             </p:cNvPicPr>
@@ -7437,8 +7478,8 @@
           </p:blipFill>
           <p:spPr>
             <a:xfrm>
-              <a:off x="3862917" y="2650067"/>
-              <a:ext cx="508000" cy="508000"/>
+              <a:off x="3861304" y="2850485"/>
+              <a:ext cx="508367" cy="508367"/>
             </a:xfrm>
             <a:prstGeom prst="rect">
               <a:avLst/>
@@ -7447,14 +7488,14 @@
         </p:pic>
         <p:sp>
           <p:nvSpPr>
-            <p:cNvPr id="53" name="TextBox 52"/>
-            <p:cNvSpPr txBox="1"/>
-            <p:nvPr/>
-          </p:nvSpPr>
-          <p:spPr>
-            <a:xfrm>
-              <a:off x="3482578" y="3186642"/>
-              <a:ext cx="1268677" cy="192617"/>
+            <p:cNvPr id="54" name="TextBox 53"/>
+            <p:cNvSpPr txBox="1"/>
+            <p:nvPr/>
+          </p:nvSpPr>
+          <p:spPr>
+            <a:xfrm>
+              <a:off x="3480691" y="3387448"/>
+              <a:ext cx="1269593" cy="192756"/>
             </a:xfrm>
             <a:prstGeom prst="rect">
               <a:avLst/>
@@ -7473,7 +7514,7 @@
                 </a:lnSpc>
               </a:pPr>
               <a:r>
-                <a:rPr sz="1166" b="0" lang="ko-KR">
+                <a:rPr sz="1167" b="0" lang="ko-KR">
                   <a:solidFill>
                     <a:srgbClr val="232F3E"/>
                   </a:solidFill>
@@ -7488,7 +7529,7 @@
         </p:sp>
         <p:pic>
           <p:nvPicPr>
-            <p:cNvPr id="54" name="Amazon-VPC_NAT-Gateway" descr="Amazon VPC_NAT Gateway"/>
+            <p:cNvPr id="55" name="Amazon-VPC_NAT-Gateway" descr="Amazon VPC_NAT Gateway"/>
             <p:cNvPicPr>
               <a:picLocks noChangeAspect="1"/>
             </p:cNvPicPr>
@@ -7508,8 +7549,8 @@
           </p:blipFill>
           <p:spPr>
             <a:xfrm>
-              <a:off x="3862917" y="5084233"/>
-              <a:ext cx="508000" cy="508000"/>
+              <a:off x="3861304" y="5286409"/>
+              <a:ext cx="508367" cy="508367"/>
             </a:xfrm>
             <a:prstGeom prst="rect">
               <a:avLst/>
@@ -7518,14 +7559,14 @@
         </p:pic>
         <p:sp>
           <p:nvSpPr>
-            <p:cNvPr id="55" name="TextBox 54"/>
-            <p:cNvSpPr txBox="1"/>
-            <p:nvPr/>
-          </p:nvSpPr>
-          <p:spPr>
-            <a:xfrm>
-              <a:off x="3482578" y="5620808"/>
-              <a:ext cx="1268677" cy="192617"/>
+            <p:cNvPr id="56" name="TextBox 55"/>
+            <p:cNvSpPr txBox="1"/>
+            <p:nvPr/>
+          </p:nvSpPr>
+          <p:spPr>
+            <a:xfrm>
+              <a:off x="3480691" y="5823372"/>
+              <a:ext cx="1269593" cy="192756"/>
             </a:xfrm>
             <a:prstGeom prst="rect">
               <a:avLst/>
@@ -7544,7 +7585,7 @@
                 </a:lnSpc>
               </a:pPr>
               <a:r>
-                <a:rPr sz="1166" b="0" lang="ko-KR">
+                <a:rPr sz="1167" b="0" lang="ko-KR">
                   <a:solidFill>
                     <a:srgbClr val="232F3E"/>
                   </a:solidFill>
@@ -7559,20 +7600,20 @@
         </p:sp>
         <p:sp>
           <p:nvSpPr>
-            <p:cNvPr id="56" name="Rectangle 55"/>
+            <p:cNvPr id="57" name="Rectangle 56"/>
             <p:cNvSpPr/>
             <p:nvPr/>
           </p:nvSpPr>
           <p:spPr>
             <a:xfrm>
-              <a:off x="6286500" y="2332567"/>
-              <a:ext cx="1947333" cy="3556000"/>
-            </a:xfrm>
-            <a:prstGeom prst="rect">
-              <a:avLst/>
-            </a:prstGeom>
-            <a:noFill/>
-            <a:ln w="15875">
+              <a:off x="6286638" y="2532756"/>
+              <a:ext cx="1948739" cy="3558568"/>
+            </a:xfrm>
+            <a:prstGeom prst="rect">
+              <a:avLst/>
+            </a:prstGeom>
+            <a:noFill/>
+            <a:ln w="15886">
               <a:solidFill>
                 <a:srgbClr val="ED7100"/>
               </a:solidFill>
@@ -7592,7 +7633,7 @@
         </p:sp>
         <p:pic>
           <p:nvPicPr>
-            <p:cNvPr id="57" name="Auto-Scaling-group_32" descr="Auto Scaling group_32"/>
+            <p:cNvPr id="58" name="Auto-Scaling-group_32" descr="Auto Scaling group_32"/>
             <p:cNvPicPr>
               <a:picLocks noChangeAspect="1"/>
             </p:cNvPicPr>
@@ -7612,8 +7653,8 @@
           </p:blipFill>
           <p:spPr>
             <a:xfrm>
-              <a:off x="6286500" y="2332567"/>
-              <a:ext cx="254000" cy="254000"/>
+              <a:off x="6286638" y="2532756"/>
+              <a:ext cx="254183" cy="254183"/>
             </a:xfrm>
             <a:prstGeom prst="rect">
               <a:avLst/>
@@ -7622,14 +7663,14 @@
         </p:pic>
         <p:sp>
           <p:nvSpPr>
-            <p:cNvPr id="58" name="TextBox 57"/>
-            <p:cNvSpPr txBox="1"/>
-            <p:nvPr/>
-          </p:nvSpPr>
-          <p:spPr>
-            <a:xfrm>
-              <a:off x="6625167" y="2382308"/>
-              <a:ext cx="1981729" cy="192617"/>
+            <p:cNvPr id="59" name="TextBox 58"/>
+            <p:cNvSpPr txBox="1"/>
+            <p:nvPr/>
+          </p:nvSpPr>
+          <p:spPr>
+            <a:xfrm>
+              <a:off x="6625549" y="2582534"/>
+              <a:ext cx="1983160" cy="192756"/>
             </a:xfrm>
             <a:prstGeom prst="rect">
               <a:avLst/>
@@ -7648,7 +7689,7 @@
                 </a:lnSpc>
               </a:pPr>
               <a:r>
-                <a:rPr sz="1166" b="1" lang="ko-KR">
+                <a:rPr sz="1167" b="1" lang="ko-KR">
                   <a:solidFill>
                     <a:srgbClr val="ED7100"/>
                   </a:solidFill>
@@ -7663,7 +7704,7 @@
         </p:sp>
         <p:pic>
           <p:nvPicPr>
-            <p:cNvPr id="59" name="Amazon-EC2" descr="Amazon EC2"/>
+            <p:cNvPr id="60" name="Amazon-EC2" descr="Amazon EC2"/>
             <p:cNvPicPr>
               <a:picLocks noChangeAspect="1"/>
             </p:cNvPicPr>
@@ -7683,8 +7724,8 @@
           </p:blipFill>
           <p:spPr>
             <a:xfrm>
-              <a:off x="6625167" y="2650067"/>
-              <a:ext cx="508000" cy="508000"/>
+              <a:off x="6625549" y="2850485"/>
+              <a:ext cx="508367" cy="508367"/>
             </a:xfrm>
             <a:prstGeom prst="rect">
               <a:avLst/>
@@ -7693,14 +7734,14 @@
         </p:pic>
         <p:sp>
           <p:nvSpPr>
-            <p:cNvPr id="60" name="TextBox 59"/>
-            <p:cNvSpPr txBox="1"/>
-            <p:nvPr/>
-          </p:nvSpPr>
-          <p:spPr>
-            <a:xfrm>
-              <a:off x="6652286" y="3186642"/>
-              <a:ext cx="453760" cy="192617"/>
+            <p:cNvPr id="61" name="TextBox 60"/>
+            <p:cNvSpPr txBox="1"/>
+            <p:nvPr/>
+          </p:nvSpPr>
+          <p:spPr>
+            <a:xfrm>
+              <a:off x="6652688" y="3387448"/>
+              <a:ext cx="454088" cy="192756"/>
             </a:xfrm>
             <a:prstGeom prst="rect">
               <a:avLst/>
@@ -7719,7 +7760,7 @@
                 </a:lnSpc>
               </a:pPr>
               <a:r>
-                <a:rPr sz="1166" b="0" lang="ko-KR">
+                <a:rPr sz="1167" b="0" lang="ko-KR">
                   <a:solidFill>
                     <a:srgbClr val="232F3E"/>
                   </a:solidFill>
@@ -7734,7 +7775,7 @@
         </p:sp>
         <p:pic>
           <p:nvPicPr>
-            <p:cNvPr id="61" name="Amazon-EC2" descr="Amazon EC2"/>
+            <p:cNvPr id="62" name="Amazon-EC2" descr="Amazon EC2"/>
             <p:cNvPicPr>
               <a:picLocks noChangeAspect="1"/>
             </p:cNvPicPr>
@@ -7754,8 +7795,8 @@
           </p:blipFill>
           <p:spPr>
             <a:xfrm>
-              <a:off x="7641167" y="2650067"/>
-              <a:ext cx="508000" cy="508000"/>
+              <a:off x="7642282" y="2850485"/>
+              <a:ext cx="508367" cy="508367"/>
             </a:xfrm>
             <a:prstGeom prst="rect">
               <a:avLst/>
@@ -7764,14 +7805,14 @@
         </p:pic>
         <p:sp>
           <p:nvSpPr>
-            <p:cNvPr id="62" name="TextBox 61"/>
-            <p:cNvSpPr txBox="1"/>
-            <p:nvPr/>
-          </p:nvSpPr>
-          <p:spPr>
-            <a:xfrm>
-              <a:off x="7668286" y="3186642"/>
-              <a:ext cx="453760" cy="192617"/>
+            <p:cNvPr id="63" name="TextBox 62"/>
+            <p:cNvSpPr txBox="1"/>
+            <p:nvPr/>
+          </p:nvSpPr>
+          <p:spPr>
+            <a:xfrm>
+              <a:off x="7669422" y="3387448"/>
+              <a:ext cx="454088" cy="192756"/>
             </a:xfrm>
             <a:prstGeom prst="rect">
               <a:avLst/>
@@ -7790,7 +7831,7 @@
                 </a:lnSpc>
               </a:pPr>
               <a:r>
-                <a:rPr sz="1166" b="0" lang="ko-KR">
+                <a:rPr sz="1167" b="0" lang="ko-KR">
                   <a:solidFill>
                     <a:srgbClr val="232F3E"/>
                   </a:solidFill>
@@ -7805,7 +7846,7 @@
         </p:sp>
         <p:pic>
           <p:nvPicPr>
-            <p:cNvPr id="63" name="Amazon-EC2" descr="Amazon EC2"/>
+            <p:cNvPr id="64" name="Amazon-EC2" descr="Amazon EC2"/>
             <p:cNvPicPr>
               <a:picLocks noChangeAspect="1"/>
             </p:cNvPicPr>
@@ -7825,8 +7866,8 @@
           </p:blipFill>
           <p:spPr>
             <a:xfrm>
-              <a:off x="6625167" y="5084233"/>
-              <a:ext cx="508000" cy="508000"/>
+              <a:off x="6625549" y="5286409"/>
+              <a:ext cx="508367" cy="508367"/>
             </a:xfrm>
             <a:prstGeom prst="rect">
               <a:avLst/>
@@ -7835,14 +7876,14 @@
         </p:pic>
         <p:sp>
           <p:nvSpPr>
-            <p:cNvPr id="64" name="TextBox 63"/>
-            <p:cNvSpPr txBox="1"/>
-            <p:nvPr/>
-          </p:nvSpPr>
-          <p:spPr>
-            <a:xfrm>
-              <a:off x="6652286" y="5620808"/>
-              <a:ext cx="453760" cy="192617"/>
+            <p:cNvPr id="65" name="TextBox 64"/>
+            <p:cNvSpPr txBox="1"/>
+            <p:nvPr/>
+          </p:nvSpPr>
+          <p:spPr>
+            <a:xfrm>
+              <a:off x="6652688" y="5823372"/>
+              <a:ext cx="454088" cy="192756"/>
             </a:xfrm>
             <a:prstGeom prst="rect">
               <a:avLst/>
@@ -7861,7 +7902,7 @@
                 </a:lnSpc>
               </a:pPr>
               <a:r>
-                <a:rPr sz="1166" b="0" lang="ko-KR">
+                <a:rPr sz="1167" b="0" lang="ko-KR">
                   <a:solidFill>
                     <a:srgbClr val="232F3E"/>
                   </a:solidFill>
@@ -7876,7 +7917,7 @@
         </p:sp>
         <p:pic>
           <p:nvPicPr>
-            <p:cNvPr id="65" name="Amazon-EC2" descr="Amazon EC2"/>
+            <p:cNvPr id="66" name="Amazon-EC2" descr="Amazon EC2"/>
             <p:cNvPicPr>
               <a:picLocks noChangeAspect="1"/>
             </p:cNvPicPr>
@@ -7896,8 +7937,8 @@
           </p:blipFill>
           <p:spPr>
             <a:xfrm>
-              <a:off x="7641167" y="5084233"/>
-              <a:ext cx="508000" cy="508000"/>
+              <a:off x="7642282" y="5286409"/>
+              <a:ext cx="508367" cy="508367"/>
             </a:xfrm>
             <a:prstGeom prst="rect">
               <a:avLst/>
@@ -7906,14 +7947,14 @@
         </p:pic>
         <p:sp>
           <p:nvSpPr>
-            <p:cNvPr id="66" name="TextBox 65"/>
-            <p:cNvSpPr txBox="1"/>
-            <p:nvPr/>
-          </p:nvSpPr>
-          <p:spPr>
-            <a:xfrm>
-              <a:off x="7668286" y="5620808"/>
-              <a:ext cx="453760" cy="192617"/>
+            <p:cNvPr id="67" name="TextBox 66"/>
+            <p:cNvSpPr txBox="1"/>
+            <p:nvPr/>
+          </p:nvSpPr>
+          <p:spPr>
+            <a:xfrm>
+              <a:off x="7669422" y="5823372"/>
+              <a:ext cx="454088" cy="192756"/>
             </a:xfrm>
             <a:prstGeom prst="rect">
               <a:avLst/>
@@ -7932,7 +7973,7 @@
                 </a:lnSpc>
               </a:pPr>
               <a:r>
-                <a:rPr sz="1166" b="0" lang="ko-KR">
+                <a:rPr sz="1167" b="0" lang="ko-KR">
                   <a:solidFill>
                     <a:srgbClr val="232F3E"/>
                   </a:solidFill>
@@ -7947,7 +7988,7 @@
         </p:sp>
         <p:pic>
           <p:nvPicPr>
-            <p:cNvPr id="67" name="Amazon-RDS" descr="Amazon RDS"/>
+            <p:cNvPr id="68" name="Amazon-RDS" descr="Amazon RDS"/>
             <p:cNvPicPr>
               <a:picLocks noChangeAspect="1"/>
             </p:cNvPicPr>
@@ -7967,8 +8008,8 @@
           </p:blipFill>
           <p:spPr>
             <a:xfrm>
-              <a:off x="8826500" y="2650067"/>
-              <a:ext cx="508000" cy="508000"/>
+              <a:off x="8828471" y="2850485"/>
+              <a:ext cx="508367" cy="508367"/>
             </a:xfrm>
             <a:prstGeom prst="rect">
               <a:avLst/>
@@ -7977,14 +8018,14 @@
         </p:pic>
         <p:sp>
           <p:nvSpPr>
-            <p:cNvPr id="68" name="TextBox 67"/>
-            <p:cNvSpPr txBox="1"/>
-            <p:nvPr/>
-          </p:nvSpPr>
-          <p:spPr>
-            <a:xfrm>
-              <a:off x="8446161" y="3186642"/>
-              <a:ext cx="1268677" cy="192617"/>
+            <p:cNvPr id="69" name="TextBox 68"/>
+            <p:cNvSpPr txBox="1"/>
+            <p:nvPr/>
+          </p:nvSpPr>
+          <p:spPr>
+            <a:xfrm>
+              <a:off x="8447858" y="3387448"/>
+              <a:ext cx="1269593" cy="192756"/>
             </a:xfrm>
             <a:prstGeom prst="rect">
               <a:avLst/>
@@ -8003,7 +8044,7 @@
                 </a:lnSpc>
               </a:pPr>
               <a:r>
-                <a:rPr sz="1166" b="0" lang="ko-KR">
+                <a:rPr sz="1167" b="0" lang="ko-KR">
                   <a:solidFill>
                     <a:srgbClr val="232F3E"/>
                   </a:solidFill>
@@ -8018,7 +8059,7 @@
         </p:sp>
         <p:pic>
           <p:nvPicPr>
-            <p:cNvPr id="69" name="Amazon-RDS" descr="Amazon RDS"/>
+            <p:cNvPr id="70" name="Amazon-RDS" descr="Amazon RDS"/>
             <p:cNvPicPr>
               <a:picLocks noChangeAspect="1"/>
             </p:cNvPicPr>
@@ -8038,8 +8079,8 @@
           </p:blipFill>
           <p:spPr>
             <a:xfrm>
-              <a:off x="8826500" y="5084233"/>
-              <a:ext cx="508000" cy="508000"/>
+              <a:off x="8828471" y="5286409"/>
+              <a:ext cx="508367" cy="508367"/>
             </a:xfrm>
             <a:prstGeom prst="rect">
               <a:avLst/>
@@ -8048,14 +8089,14 @@
         </p:pic>
         <p:sp>
           <p:nvSpPr>
-            <p:cNvPr id="70" name="TextBox 69"/>
-            <p:cNvSpPr txBox="1"/>
-            <p:nvPr/>
-          </p:nvSpPr>
-          <p:spPr>
-            <a:xfrm>
-              <a:off x="8446161" y="5620808"/>
-              <a:ext cx="1268677" cy="192617"/>
+            <p:cNvPr id="71" name="TextBox 70"/>
+            <p:cNvSpPr txBox="1"/>
+            <p:nvPr/>
+          </p:nvSpPr>
+          <p:spPr>
+            <a:xfrm>
+              <a:off x="8447858" y="5823372"/>
+              <a:ext cx="1269593" cy="192756"/>
             </a:xfrm>
             <a:prstGeom prst="rect">
               <a:avLst/>
@@ -8074,7 +8115,7 @@
                 </a:lnSpc>
               </a:pPr>
               <a:r>
-                <a:rPr sz="1166" b="0" lang="ko-KR">
+                <a:rPr sz="1167" b="0" lang="ko-KR">
                   <a:solidFill>
                     <a:srgbClr val="232F3E"/>
                   </a:solidFill>
@@ -8089,7 +8130,7 @@
         </p:sp>
         <p:pic>
           <p:nvPicPr>
-            <p:cNvPr id="71" name="Elastic-Load-Balancing_Application-Load-Balancer" descr="Elastic Load Balancing_Application Load Balancer"/>
+            <p:cNvPr id="72" name="Elastic-Load-Balancing_Application-Load-Balancer" descr="Elastic Load Balancing_Application Load Balancer"/>
             <p:cNvPicPr>
               <a:picLocks noChangeAspect="1"/>
             </p:cNvPicPr>
@@ -8109,8 +8150,8 @@
           </p:blipFill>
           <p:spPr>
             <a:xfrm>
-              <a:off x="3862917" y="3623733"/>
-              <a:ext cx="508000" cy="508000"/>
+              <a:off x="3861304" y="3824855"/>
+              <a:ext cx="508367" cy="508367"/>
             </a:xfrm>
             <a:prstGeom prst="rect">
               <a:avLst/>
@@ -8119,14 +8160,14 @@
         </p:pic>
         <p:sp>
           <p:nvSpPr>
-            <p:cNvPr id="72" name="TextBox 71"/>
-            <p:cNvSpPr txBox="1"/>
-            <p:nvPr/>
-          </p:nvSpPr>
-          <p:spPr>
-            <a:xfrm>
-              <a:off x="3890036" y="4160308"/>
-              <a:ext cx="453760" cy="192617"/>
+            <p:cNvPr id="73" name="TextBox 72"/>
+            <p:cNvSpPr txBox="1"/>
+            <p:nvPr/>
+          </p:nvSpPr>
+          <p:spPr>
+            <a:xfrm>
+              <a:off x="3888444" y="4361817"/>
+              <a:ext cx="454088" cy="192756"/>
             </a:xfrm>
             <a:prstGeom prst="rect">
               <a:avLst/>
@@ -8145,7 +8186,7 @@
                 </a:lnSpc>
               </a:pPr>
               <a:r>
-                <a:rPr sz="1166" b="0" lang="ko-KR">
+                <a:rPr sz="1167" b="0" lang="ko-KR">
                   <a:solidFill>
                     <a:srgbClr val="232F3E"/>
                   </a:solidFill>
@@ -8160,14 +8201,14 @@
         </p:sp>
         <p:sp>
           <p:nvSpPr>
-            <p:cNvPr id="73" name="Rectangle 72"/>
+            <p:cNvPr id="74" name="Rectangle 73"/>
             <p:cNvSpPr/>
             <p:nvPr/>
           </p:nvSpPr>
           <p:spPr>
             <a:xfrm>
-              <a:off x="2857500" y="3623733"/>
-              <a:ext cx="508000" cy="740833"/>
+              <a:off x="2855162" y="3824855"/>
+              <a:ext cx="508367" cy="741368"/>
             </a:xfrm>
             <a:prstGeom prst="rect">
               <a:avLst/>
@@ -8189,7 +8230,7 @@
         </p:sp>
         <p:pic>
           <p:nvPicPr>
-            <p:cNvPr id="74" name="Amazon-VPC_Internet-Gateway" descr="Amazon VPC_Internet Gateway"/>
+            <p:cNvPr id="75" name="Amazon-VPC_Internet-Gateway" descr="Amazon VPC_Internet Gateway"/>
             <p:cNvPicPr>
               <a:picLocks noChangeAspect="1"/>
             </p:cNvPicPr>
@@ -8209,8 +8250,8 @@
           </p:blipFill>
           <p:spPr>
             <a:xfrm>
-              <a:off x="2857500" y="3623733"/>
-              <a:ext cx="508000" cy="508000"/>
+              <a:off x="2855162" y="3824855"/>
+              <a:ext cx="508367" cy="508367"/>
             </a:xfrm>
             <a:prstGeom prst="rect">
               <a:avLst/>
@@ -8219,14 +8260,14 @@
         </p:pic>
         <p:sp>
           <p:nvSpPr>
-            <p:cNvPr id="75" name="TextBox 74"/>
-            <p:cNvSpPr txBox="1"/>
-            <p:nvPr/>
-          </p:nvSpPr>
-          <p:spPr>
-            <a:xfrm>
-              <a:off x="2884620" y="4160308"/>
-              <a:ext cx="453760" cy="192617"/>
+            <p:cNvPr id="76" name="TextBox 75"/>
+            <p:cNvSpPr txBox="1"/>
+            <p:nvPr/>
+          </p:nvSpPr>
+          <p:spPr>
+            <a:xfrm>
+              <a:off x="2882301" y="4361817"/>
+              <a:ext cx="454088" cy="192756"/>
             </a:xfrm>
             <a:prstGeom prst="rect">
               <a:avLst/>
@@ -8245,7 +8286,7 @@
                 </a:lnSpc>
               </a:pPr>
               <a:r>
-                <a:rPr sz="1166" b="0" lang="ko-KR">
+                <a:rPr sz="1167" b="0" lang="ko-KR">
                   <a:solidFill>
                     <a:srgbClr val="232F3E"/>
                   </a:solidFill>
@@ -8260,19 +8301,19 @@
         </p:sp>
         <p:cxnSp>
           <p:nvCxnSpPr>
-            <p:cNvPr id="76" name="Connector 75"/>
+            <p:cNvPr id="77" name="Connector 76"/>
             <p:cNvCxnSpPr/>
             <p:nvPr/>
           </p:nvCxnSpPr>
           <p:spPr>
             <a:xfrm>
-              <a:off x="952500" y="3877733"/>
-              <a:ext cx="1862667" cy="0"/>
+              <a:off x="948786" y="4079038"/>
+              <a:ext cx="1864012" cy="0"/>
             </a:xfrm>
             <a:prstGeom prst="line">
               <a:avLst/>
             </a:prstGeom>
-            <a:ln w="15875">
+            <a:ln w="15886">
               <a:solidFill>
                 <a:srgbClr val="232F3E"/>
               </a:solidFill>
@@ -8284,14 +8325,14 @@
         </p:cxnSp>
         <p:sp>
           <p:nvSpPr>
-            <p:cNvPr id="77" name="TextBox 76"/>
-            <p:cNvSpPr txBox="1"/>
-            <p:nvPr/>
-          </p:nvSpPr>
-          <p:spPr>
-            <a:xfrm>
-              <a:off x="844021" y="3661833"/>
-              <a:ext cx="1000125" cy="165100"/>
+            <p:cNvPr id="78" name="TextBox 77"/>
+            <p:cNvSpPr txBox="1"/>
+            <p:nvPr/>
+          </p:nvSpPr>
+          <p:spPr>
+            <a:xfrm>
+              <a:off x="840229" y="3862982"/>
+              <a:ext cx="1000847" cy="165219"/>
             </a:xfrm>
             <a:prstGeom prst="rect">
               <a:avLst/>
@@ -8325,19 +8366,19 @@
         </p:sp>
         <p:cxnSp>
           <p:nvCxnSpPr>
-            <p:cNvPr id="78" name="Connector 77"/>
+            <p:cNvPr id="79" name="Connector 78"/>
             <p:cNvCxnSpPr/>
             <p:nvPr/>
           </p:nvCxnSpPr>
           <p:spPr>
             <a:xfrm>
-              <a:off x="3407833" y="3877733"/>
-              <a:ext cx="412750" cy="0"/>
+              <a:off x="3405892" y="4079038"/>
+              <a:ext cx="413048" cy="0"/>
             </a:xfrm>
             <a:prstGeom prst="line">
               <a:avLst/>
             </a:prstGeom>
-            <a:ln w="15875">
+            <a:ln w="15886">
               <a:solidFill>
                 <a:srgbClr val="232F3E"/>
               </a:solidFill>
@@ -8349,19 +8390,19 @@
         </p:cxnSp>
         <p:cxnSp>
           <p:nvCxnSpPr>
-            <p:cNvPr id="79" name="Connector 78"/>
+            <p:cNvPr id="80" name="Connector 79"/>
             <p:cNvCxnSpPr/>
             <p:nvPr/>
           </p:nvCxnSpPr>
           <p:spPr>
             <a:xfrm>
-              <a:off x="4413250" y="3877733"/>
-              <a:ext cx="1830917" cy="0"/>
+              <a:off x="4412035" y="4079038"/>
+              <a:ext cx="1832239" cy="0"/>
             </a:xfrm>
             <a:prstGeom prst="line">
               <a:avLst/>
             </a:prstGeom>
-            <a:ln w="15875">
+            <a:ln w="15886">
               <a:solidFill>
                 <a:srgbClr val="232F3E"/>
               </a:solidFill>
@@ -8373,14 +8414,14 @@
         </p:cxnSp>
         <p:sp>
           <p:nvSpPr>
-            <p:cNvPr id="80" name="TextBox 79"/>
-            <p:cNvSpPr txBox="1"/>
-            <p:nvPr/>
-          </p:nvSpPr>
-          <p:spPr>
-            <a:xfrm>
-              <a:off x="4921250" y="3661833"/>
-              <a:ext cx="825500" cy="165100"/>
+            <p:cNvPr id="81" name="TextBox 80"/>
+            <p:cNvSpPr txBox="1"/>
+            <p:nvPr/>
+          </p:nvSpPr>
+          <p:spPr>
+            <a:xfrm>
+              <a:off x="4920402" y="3862982"/>
+              <a:ext cx="826096" cy="165219"/>
             </a:xfrm>
             <a:prstGeom prst="rect">
               <a:avLst/>
@@ -8414,19 +8455,19 @@
         </p:sp>
         <p:cxnSp>
           <p:nvCxnSpPr>
-            <p:cNvPr id="81" name="Connector 80"/>
+            <p:cNvPr id="82" name="Connector 81"/>
             <p:cNvCxnSpPr/>
             <p:nvPr/>
           </p:nvCxnSpPr>
           <p:spPr>
             <a:xfrm>
-              <a:off x="8233833" y="2904067"/>
-              <a:ext cx="550334" cy="0"/>
+              <a:off x="8235377" y="3104669"/>
+              <a:ext cx="550731" cy="0"/>
             </a:xfrm>
             <a:prstGeom prst="line">
               <a:avLst/>
             </a:prstGeom>
-            <a:ln w="15875">
+            <a:ln w="15886">
               <a:solidFill>
                 <a:srgbClr val="232F3E"/>
               </a:solidFill>
@@ -8438,14 +8479,14 @@
         </p:cxnSp>
         <p:sp>
           <p:nvSpPr>
-            <p:cNvPr id="82" name="TextBox 81"/>
-            <p:cNvSpPr txBox="1"/>
-            <p:nvPr/>
-          </p:nvSpPr>
-          <p:spPr>
-            <a:xfrm>
-              <a:off x="8441531" y="2698750"/>
-              <a:ext cx="388938" cy="165100"/>
+            <p:cNvPr id="83" name="TextBox 82"/>
+            <p:cNvSpPr txBox="1"/>
+            <p:nvPr/>
+          </p:nvSpPr>
+          <p:spPr>
+            <a:xfrm>
+              <a:off x="8443225" y="2899204"/>
+              <a:ext cx="389218" cy="165219"/>
             </a:xfrm>
             <a:prstGeom prst="rect">
               <a:avLst/>
@@ -8479,14 +8520,14 @@
         </p:sp>
         <p:sp>
           <p:nvSpPr>
-            <p:cNvPr id="83" name="Freeform 82"/>
+            <p:cNvPr id="84" name="Freeform 83"/>
             <p:cNvSpPr/>
             <p:nvPr/>
           </p:nvSpPr>
           <p:spPr>
             <a:xfrm>
-              <a:off x="656167" y="1612900"/>
-              <a:ext cx="1322916" cy="1968500"/>
+              <a:off x="652239" y="1643114"/>
+              <a:ext cx="1323872" cy="2139377"/>
             </a:xfrm>
             <a:custGeom>
               <a:avLst/>
@@ -8495,21 +8536,21 @@
               <a:cxnLst/>
               <a:rect l="l" t="t" r="r" b="b"/>
               <a:pathLst>
-                <a:path w="1322916" h="1968500">
+                <a:path w="1323872" h="2139377">
                   <a:moveTo>
-                    <a:pt x="0" y="1968500"/>
+                    <a:pt x="0" y="2139377"/>
                   </a:moveTo>
                   <a:lnTo>
                     <a:pt x="0" y="0"/>
                   </a:lnTo>
                   <a:lnTo>
-                    <a:pt x="1322916" y="0"/>
+                    <a:pt x="1323872" y="0"/>
                   </a:lnTo>
                 </a:path>
               </a:pathLst>
             </a:custGeom>
             <a:noFill/>
-            <a:ln w="15875">
+            <a:ln w="15886">
               <a:solidFill>
                 <a:srgbClr val="232F3E"/>
               </a:solidFill>
@@ -8530,14 +8571,14 @@
         </p:sp>
         <p:sp>
           <p:nvSpPr>
-            <p:cNvPr id="84" name="TextBox 83"/>
-            <p:cNvSpPr txBox="1"/>
-            <p:nvPr/>
-          </p:nvSpPr>
-          <p:spPr>
-            <a:xfrm>
-              <a:off x="894292" y="1407583"/>
-              <a:ext cx="793750" cy="165100"/>
+            <p:cNvPr id="85" name="TextBox 84"/>
+            <p:cNvSpPr txBox="1"/>
+            <p:nvPr/>
+          </p:nvSpPr>
+          <p:spPr>
+            <a:xfrm>
+              <a:off x="890536" y="1437649"/>
+              <a:ext cx="794323" cy="165219"/>
             </a:xfrm>
             <a:prstGeom prst="rect">
               <a:avLst/>
@@ -8571,19 +8612,19 @@
         </p:sp>
         <p:cxnSp>
           <p:nvCxnSpPr>
-            <p:cNvPr id="85" name="Connector 84"/>
+            <p:cNvPr id="86" name="Connector 85"/>
             <p:cNvCxnSpPr/>
             <p:nvPr/>
           </p:nvCxnSpPr>
           <p:spPr>
             <a:xfrm flipH="1">
-              <a:off x="4413250" y="2904067"/>
-              <a:ext cx="1830917" cy="0"/>
+              <a:off x="4412035" y="3104669"/>
+              <a:ext cx="1832239" cy="0"/>
             </a:xfrm>
             <a:prstGeom prst="line">
               <a:avLst/>
             </a:prstGeom>
-            <a:ln w="15875">
+            <a:ln w="15886">
               <a:solidFill>
                 <a:srgbClr val="232F3E"/>
               </a:solidFill>
@@ -8597,14 +8638,14 @@
         </p:cxnSp>
         <p:sp>
           <p:nvSpPr>
-            <p:cNvPr id="86" name="TextBox 85"/>
-            <p:cNvSpPr txBox="1"/>
-            <p:nvPr/>
-          </p:nvSpPr>
-          <p:spPr>
-            <a:xfrm>
-              <a:off x="5169958" y="2698750"/>
-              <a:ext cx="920750" cy="165100"/>
+            <p:cNvPr id="87" name="TextBox 86"/>
+            <p:cNvSpPr txBox="1"/>
+            <p:nvPr/>
+          </p:nvSpPr>
+          <p:spPr>
+            <a:xfrm>
+              <a:off x="5169290" y="2899204"/>
+              <a:ext cx="921415" cy="165219"/>
             </a:xfrm>
             <a:prstGeom prst="rect">
               <a:avLst/>
@@ -8638,19 +8679,19 @@
         </p:sp>
         <p:cxnSp>
           <p:nvCxnSpPr>
-            <p:cNvPr id="87" name="Connector 86"/>
+            <p:cNvPr id="88" name="Connector 87"/>
             <p:cNvCxnSpPr/>
             <p:nvPr/>
           </p:nvCxnSpPr>
           <p:spPr>
             <a:xfrm flipH="1">
-              <a:off x="4413250" y="5338233"/>
-              <a:ext cx="1830917" cy="0"/>
+              <a:off x="4412035" y="5540593"/>
+              <a:ext cx="1832239" cy="0"/>
             </a:xfrm>
             <a:prstGeom prst="line">
               <a:avLst/>
             </a:prstGeom>
-            <a:ln w="15875">
+            <a:ln w="15886">
               <a:solidFill>
                 <a:srgbClr val="232F3E"/>
               </a:solidFill>
@@ -8664,14 +8705,14 @@
         </p:cxnSp>
         <p:sp>
           <p:nvSpPr>
-            <p:cNvPr id="88" name="TextBox 87"/>
-            <p:cNvSpPr txBox="1"/>
-            <p:nvPr/>
-          </p:nvSpPr>
-          <p:spPr>
-            <a:xfrm>
-              <a:off x="5169958" y="5132917"/>
-              <a:ext cx="920750" cy="165100"/>
+            <p:cNvPr id="89" name="TextBox 88"/>
+            <p:cNvSpPr txBox="1"/>
+            <p:nvPr/>
+          </p:nvSpPr>
+          <p:spPr>
+            <a:xfrm>
+              <a:off x="5169290" y="5335128"/>
+              <a:ext cx="921415" cy="165219"/>
             </a:xfrm>
             <a:prstGeom prst="rect">
               <a:avLst/>
@@ -8705,14 +8746,14 @@
         </p:sp>
         <p:sp>
           <p:nvSpPr>
-            <p:cNvPr id="89" name="Freeform 88"/>
+            <p:cNvPr id="90" name="Freeform 89"/>
             <p:cNvSpPr/>
             <p:nvPr/>
           </p:nvSpPr>
           <p:spPr>
             <a:xfrm>
-              <a:off x="9376833" y="3031067"/>
-              <a:ext cx="211667" cy="2180166"/>
+              <a:off x="9379202" y="3231760"/>
+              <a:ext cx="211820" cy="2181741"/>
             </a:xfrm>
             <a:custGeom>
               <a:avLst/>
@@ -8721,24 +8762,24 @@
               <a:cxnLst/>
               <a:rect l="l" t="t" r="r" b="b"/>
               <a:pathLst>
-                <a:path w="211667" h="2180166">
+                <a:path w="211820" h="2181741">
                   <a:moveTo>
                     <a:pt x="0" y="0"/>
                   </a:moveTo>
                   <a:lnTo>
-                    <a:pt x="211667" y="0"/>
+                    <a:pt x="211820" y="0"/>
                   </a:lnTo>
                   <a:lnTo>
-                    <a:pt x="211667" y="2180166"/>
+                    <a:pt x="211820" y="2181741"/>
                   </a:lnTo>
                   <a:lnTo>
-                    <a:pt x="0" y="2180166"/>
+                    <a:pt x="0" y="2181741"/>
                   </a:lnTo>
                 </a:path>
               </a:pathLst>
             </a:custGeom>
             <a:noFill/>
-            <a:ln w="15875">
+            <a:ln w="15886">
               <a:solidFill>
                 <a:srgbClr val="232F3E"/>
               </a:solidFill>
@@ -8759,14 +8800,14 @@
         </p:sp>
         <p:sp>
           <p:nvSpPr>
-            <p:cNvPr id="90" name="TextBox 89"/>
-            <p:cNvSpPr txBox="1"/>
-            <p:nvPr/>
-          </p:nvSpPr>
-          <p:spPr>
-            <a:xfrm>
-              <a:off x="8495771" y="3915833"/>
-              <a:ext cx="1008062" cy="165100"/>
+            <p:cNvPr id="91" name="TextBox 90"/>
+            <p:cNvSpPr txBox="1"/>
+            <p:nvPr/>
+          </p:nvSpPr>
+          <p:spPr>
+            <a:xfrm>
+              <a:off x="8497504" y="4117166"/>
+              <a:ext cx="1008790" cy="165219"/>
             </a:xfrm>
             <a:prstGeom prst="rect">
               <a:avLst/>
@@ -8794,47 +8835,6 @@
                   <a:cs typeface="Malgun Gothic"/>
                 </a:rPr>
                 <a:t>동기식 복제</a:t>
-              </a:r>
-            </a:p>
-          </p:txBody>
-        </p:sp>
-        <p:sp>
-          <p:nvSpPr>
-            <p:cNvPr id="91" name="TextBox 90"/>
-            <p:cNvSpPr txBox="1"/>
-            <p:nvPr/>
-          </p:nvSpPr>
-          <p:spPr>
-            <a:xfrm>
-              <a:off x="1778000" y="6413500"/>
-              <a:ext cx="7556500" cy="165100"/>
-            </a:xfrm>
-            <a:prstGeom prst="rect">
-              <a:avLst/>
-            </a:prstGeom>
-            <a:noFill/>
-          </p:spPr>
-          <p:txBody>
-            <a:bodyPr wrap="none" lIns="0" rIns="0" tIns="0" bIns="0" anchor="t">
-              <a:noAutofit/>
-            </a:bodyPr>
-            <a:lstStyle/>
-            <a:p>
-              <a:pPr algn="l">
-                <a:lnSpc>
-                  <a:spcPct val="100000"/>
-                </a:lnSpc>
-              </a:pPr>
-              <a:r>
-                <a:rPr sz="1000" b="0" lang="ko-KR">
-                  <a:solidFill>
-                    <a:srgbClr val="545B64"/>
-                  </a:solidFill>
-                  <a:latin typeface="Arial"/>
-                  <a:ea typeface="Malgun Gothic"/>
-                  <a:cs typeface="Malgun Gothic"/>
-                </a:rPr>
-                <a:t>Internet-facing ALB · 두 AZ에 걸친 단일 관리형 로드 밸런서 · AWS WAF 연결 · RDS Multi-AZ</a:t>
               </a:r>
             </a:p>
           </p:txBody>
@@ -8902,10 +8902,10 @@
         </p:nvGrpSpPr>
         <p:grpSpPr>
           <a:xfrm>
-            <a:off x="242755" y="935567"/>
-            <a:ext cx="13449433" cy="5706533"/>
-            <a:chOff x="242755" y="935567"/>
-            <a:chExt cx="13449433" cy="5706533"/>
+            <a:off x="238529" y="944110"/>
+            <a:ext cx="11682507" cy="5666171"/>
+            <a:chOff x="238529" y="944110"/>
+            <a:chExt cx="11682507" cy="5666171"/>
           </a:xfrm>
         </p:grpSpPr>
         <p:pic>
@@ -8930,8 +8930,8 @@
           </p:blipFill>
           <p:spPr>
             <a:xfrm>
-              <a:off x="317500" y="3539067"/>
-              <a:ext cx="508000" cy="508000"/>
+              <a:off x="313328" y="3718945"/>
+              <a:ext cx="508367" cy="508367"/>
             </a:xfrm>
             <a:prstGeom prst="rect">
               <a:avLst/>
@@ -8946,8 +8946,8 @@
           </p:nvSpPr>
           <p:spPr>
             <a:xfrm>
-              <a:off x="242755" y="4096808"/>
-              <a:ext cx="657490" cy="192617"/>
+              <a:off x="238529" y="4277089"/>
+              <a:ext cx="657964" cy="192756"/>
             </a:xfrm>
             <a:prstGeom prst="rect">
               <a:avLst/>
@@ -8966,7 +8966,7 @@
                 </a:lnSpc>
               </a:pPr>
               <a:r>
-                <a:rPr sz="1166" b="0" lang="ko-KR">
+                <a:rPr sz="1167" b="0" lang="ko-KR">
                   <a:solidFill>
                     <a:srgbClr val="232F3E"/>
                   </a:solidFill>
@@ -8987,14 +8987,14 @@
           </p:nvSpPr>
           <p:spPr>
             <a:xfrm>
-              <a:off x="1714500" y="935567"/>
-              <a:ext cx="10202333" cy="5291667"/>
-            </a:xfrm>
-            <a:prstGeom prst="rect">
-              <a:avLst/>
-            </a:prstGeom>
-            <a:noFill/>
-            <a:ln w="21167">
+              <a:off x="1711336" y="944110"/>
+              <a:ext cx="10209700" cy="5422579"/>
+            </a:xfrm>
+            <a:prstGeom prst="rect">
+              <a:avLst/>
+            </a:prstGeom>
+            <a:noFill/>
+            <a:ln w="21182">
               <a:solidFill>
                 <a:srgbClr val="232F3E"/>
               </a:solidFill>
@@ -9032,8 +9032,8 @@
           </p:blipFill>
           <p:spPr>
             <a:xfrm>
-              <a:off x="1714500" y="935567"/>
-              <a:ext cx="254000" cy="254000"/>
+              <a:off x="1711336" y="944110"/>
+              <a:ext cx="254183" cy="254183"/>
             </a:xfrm>
             <a:prstGeom prst="rect">
               <a:avLst/>
@@ -9048,8 +9048,8 @@
           </p:nvSpPr>
           <p:spPr>
             <a:xfrm>
-              <a:off x="2053167" y="1017588"/>
-              <a:ext cx="1141016" cy="206375"/>
+              <a:off x="2050248" y="1026190"/>
+              <a:ext cx="1141839" cy="206524"/>
             </a:xfrm>
             <a:prstGeom prst="rect">
               <a:avLst/>
@@ -9089,14 +9089,14 @@
           </p:nvSpPr>
           <p:spPr>
             <a:xfrm>
-              <a:off x="1926167" y="1295400"/>
-              <a:ext cx="9906000" cy="4847167"/>
-            </a:xfrm>
-            <a:prstGeom prst="rect">
-              <a:avLst/>
-            </a:prstGeom>
-            <a:noFill/>
-            <a:ln w="21167">
+              <a:off x="1923156" y="1304203"/>
+              <a:ext cx="9913152" cy="4977758"/>
+            </a:xfrm>
+            <a:prstGeom prst="rect">
+              <a:avLst/>
+            </a:prstGeom>
+            <a:noFill/>
+            <a:ln w="21182">
               <a:solidFill>
                 <a:srgbClr val="00A4A6"/>
               </a:solidFill>
@@ -9136,8 +9136,8 @@
           </p:blipFill>
           <p:spPr>
             <a:xfrm>
-              <a:off x="1926167" y="1295400"/>
-              <a:ext cx="254000" cy="254000"/>
+              <a:off x="1923156" y="1304203"/>
+              <a:ext cx="254183" cy="254183"/>
             </a:xfrm>
             <a:prstGeom prst="rect">
               <a:avLst/>
@@ -9152,8 +9152,8 @@
           </p:nvSpPr>
           <p:spPr>
             <a:xfrm>
-              <a:off x="2264833" y="1345142"/>
-              <a:ext cx="759354" cy="192617"/>
+              <a:off x="2262067" y="1353980"/>
+              <a:ext cx="759902" cy="192756"/>
             </a:xfrm>
             <a:prstGeom prst="rect">
               <a:avLst/>
@@ -9172,7 +9172,7 @@
                 </a:lnSpc>
               </a:pPr>
               <a:r>
-                <a:rPr sz="1166" b="1" lang="ko-KR">
+                <a:rPr sz="1167" b="1" lang="ko-KR">
                   <a:solidFill>
                     <a:srgbClr val="00A4A6"/>
                   </a:solidFill>
@@ -9193,14 +9193,14 @@
           </p:nvSpPr>
           <p:spPr>
             <a:xfrm>
-              <a:off x="2561167" y="1612900"/>
-              <a:ext cx="5101167" cy="4445000"/>
-            </a:xfrm>
-            <a:prstGeom prst="rect">
-              <a:avLst/>
-            </a:prstGeom>
-            <a:noFill/>
-            <a:ln w="21167">
+              <a:off x="2558614" y="1621932"/>
+              <a:ext cx="5104850" cy="4575301"/>
+            </a:xfrm>
+            <a:prstGeom prst="rect">
+              <a:avLst/>
+            </a:prstGeom>
+            <a:noFill/>
+            <a:ln w="21182">
               <a:solidFill>
                 <a:srgbClr val="8C4FFF"/>
               </a:solidFill>
@@ -9238,8 +9238,8 @@
           </p:blipFill>
           <p:spPr>
             <a:xfrm>
-              <a:off x="2561167" y="1612900"/>
-              <a:ext cx="254000" cy="254000"/>
+              <a:off x="2558614" y="1621932"/>
+              <a:ext cx="254183" cy="254183"/>
             </a:xfrm>
             <a:prstGeom prst="rect">
               <a:avLst/>
@@ -9254,8 +9254,8 @@
           </p:nvSpPr>
           <p:spPr>
             <a:xfrm>
-              <a:off x="2899833" y="1662642"/>
-              <a:ext cx="2898510" cy="192617"/>
+              <a:off x="2897526" y="1671710"/>
+              <a:ext cx="1677346" cy="192756"/>
             </a:xfrm>
             <a:prstGeom prst="rect">
               <a:avLst/>
@@ -9274,7 +9274,7 @@
                 </a:lnSpc>
               </a:pPr>
               <a:r>
-                <a:rPr sz="1166" b="1" lang="ko-KR">
+                <a:rPr sz="1167" b="1" lang="ko-KR">
                   <a:solidFill>
                     <a:srgbClr val="8C4FFF"/>
                   </a:solidFill>
@@ -9282,27 +9282,68 @@
                   <a:ea typeface="Malgun Gothic"/>
                   <a:cs typeface="Malgun Gothic"/>
                 </a:rPr>
-                <a:t>Application VPC 10.0.0.0/16</a:t>
-              </a:r>
-            </a:p>
-          </p:txBody>
-        </p:sp>
-        <p:sp>
-          <p:nvSpPr>
-            <p:cNvPr id="15" name="Rectangle 14"/>
+                <a:t>Application VPC</a:t>
+              </a:r>
+            </a:p>
+          </p:txBody>
+        </p:sp>
+        <p:sp>
+          <p:nvSpPr>
+            <p:cNvPr id="15" name="TextBox 14"/>
+            <p:cNvSpPr txBox="1"/>
+            <p:nvPr/>
+          </p:nvSpPr>
+          <p:spPr>
+            <a:xfrm>
+              <a:off x="2897526" y="1861288"/>
+              <a:ext cx="1088223" cy="165219"/>
+            </a:xfrm>
+            <a:prstGeom prst="rect">
+              <a:avLst/>
+            </a:prstGeom>
+            <a:noFill/>
+          </p:spPr>
+          <p:txBody>
+            <a:bodyPr wrap="none" lIns="0" rIns="0" tIns="0" bIns="0" anchor="t">
+              <a:noAutofit/>
+            </a:bodyPr>
+            <a:lstStyle/>
+            <a:p>
+              <a:pPr algn="l">
+                <a:lnSpc>
+                  <a:spcPct val="100000"/>
+                </a:lnSpc>
+              </a:pPr>
+              <a:r>
+                <a:rPr sz="1000" b="0" lang="ko-KR">
+                  <a:solidFill>
+                    <a:srgbClr val="232F3E"/>
+                  </a:solidFill>
+                  <a:latin typeface="Arial"/>
+                  <a:ea typeface="Malgun Gothic"/>
+                  <a:cs typeface="Malgun Gothic"/>
+                </a:rPr>
+                <a:t>10.0.0.0/16</a:t>
+              </a:r>
+            </a:p>
+          </p:txBody>
+        </p:sp>
+        <p:sp>
+          <p:nvSpPr>
+            <p:cNvPr id="16" name="Rectangle 15"/>
             <p:cNvSpPr/>
             <p:nvPr/>
           </p:nvSpPr>
           <p:spPr>
             <a:xfrm>
-              <a:off x="2772833" y="1930400"/>
-              <a:ext cx="4677833" cy="1524000"/>
-            </a:xfrm>
-            <a:prstGeom prst="rect">
-              <a:avLst/>
-            </a:prstGeom>
-            <a:noFill/>
-            <a:ln w="15875">
+              <a:off x="2770434" y="2109117"/>
+              <a:ext cx="4681211" cy="1525100"/>
+            </a:xfrm>
+            <a:prstGeom prst="rect">
+              <a:avLst/>
+            </a:prstGeom>
+            <a:noFill/>
+            <a:ln w="15886">
               <a:solidFill>
                 <a:srgbClr val="00A4A6"/>
               </a:solidFill>
@@ -9322,14 +9363,14 @@
         </p:sp>
         <p:sp>
           <p:nvSpPr>
-            <p:cNvPr id="16" name="TextBox 15"/>
-            <p:cNvSpPr txBox="1"/>
-            <p:nvPr/>
-          </p:nvSpPr>
-          <p:spPr>
-            <a:xfrm>
-              <a:off x="2899833" y="1980142"/>
-              <a:ext cx="2083594" cy="192617"/>
+            <p:cNvPr id="17" name="TextBox 16"/>
+            <p:cNvSpPr txBox="1"/>
+            <p:nvPr/>
+          </p:nvSpPr>
+          <p:spPr>
+            <a:xfrm>
+              <a:off x="2897526" y="2158895"/>
+              <a:ext cx="2085098" cy="192756"/>
             </a:xfrm>
             <a:prstGeom prst="rect">
               <a:avLst/>
@@ -9348,7 +9389,7 @@
                 </a:lnSpc>
               </a:pPr>
               <a:r>
-                <a:rPr sz="1166" b="1" lang="ko-KR">
+                <a:rPr sz="1167" b="1" lang="ko-KR">
                   <a:solidFill>
                     <a:srgbClr val="00A4A6"/>
                   </a:solidFill>
@@ -9363,20 +9404,20 @@
         </p:sp>
         <p:sp>
           <p:nvSpPr>
-            <p:cNvPr id="17" name="Rectangle 16"/>
+            <p:cNvPr id="18" name="Rectangle 17"/>
             <p:cNvSpPr/>
             <p:nvPr/>
           </p:nvSpPr>
           <p:spPr>
             <a:xfrm>
-              <a:off x="2772833" y="4364567"/>
-              <a:ext cx="4677833" cy="1608667"/>
-            </a:xfrm>
-            <a:prstGeom prst="rect">
-              <a:avLst/>
-            </a:prstGeom>
-            <a:noFill/>
-            <a:ln w="15875">
+              <a:off x="2770434" y="4545041"/>
+              <a:ext cx="4681211" cy="1567464"/>
+            </a:xfrm>
+            <a:prstGeom prst="rect">
+              <a:avLst/>
+            </a:prstGeom>
+            <a:noFill/>
+            <a:ln w="15886">
               <a:solidFill>
                 <a:srgbClr val="00A4A6"/>
               </a:solidFill>
@@ -9396,14 +9437,14 @@
         </p:sp>
         <p:sp>
           <p:nvSpPr>
-            <p:cNvPr id="18" name="TextBox 17"/>
-            <p:cNvSpPr txBox="1"/>
-            <p:nvPr/>
-          </p:nvSpPr>
-          <p:spPr>
-            <a:xfrm>
-              <a:off x="2899833" y="4414308"/>
-              <a:ext cx="2083594" cy="192617"/>
+            <p:cNvPr id="19" name="TextBox 18"/>
+            <p:cNvSpPr txBox="1"/>
+            <p:nvPr/>
+          </p:nvSpPr>
+          <p:spPr>
+            <a:xfrm>
+              <a:off x="2897526" y="4594819"/>
+              <a:ext cx="2085098" cy="192756"/>
             </a:xfrm>
             <a:prstGeom prst="rect">
               <a:avLst/>
@@ -9422,7 +9463,7 @@
                 </a:lnSpc>
               </a:pPr>
               <a:r>
-                <a:rPr sz="1166" b="1" lang="ko-KR">
+                <a:rPr sz="1167" b="1" lang="ko-KR">
                   <a:solidFill>
                     <a:srgbClr val="00A4A6"/>
                   </a:solidFill>
@@ -9437,20 +9478,20 @@
         </p:sp>
         <p:sp>
           <p:nvSpPr>
-            <p:cNvPr id="19" name="Rectangle 18"/>
+            <p:cNvPr id="20" name="Rectangle 19"/>
             <p:cNvSpPr/>
             <p:nvPr/>
           </p:nvSpPr>
           <p:spPr>
             <a:xfrm>
-              <a:off x="2899833" y="2247900"/>
-              <a:ext cx="2582333" cy="1121833"/>
-            </a:xfrm>
-            <a:prstGeom prst="rect">
-              <a:avLst/>
-            </a:prstGeom>
-            <a:noFill/>
-            <a:ln w="15875">
+              <a:off x="2897526" y="2426846"/>
+              <a:ext cx="2584198" cy="1122643"/>
+            </a:xfrm>
+            <a:prstGeom prst="rect">
+              <a:avLst/>
+            </a:prstGeom>
+            <a:noFill/>
+            <a:ln w="15886">
               <a:solidFill>
                 <a:srgbClr val="7AA116"/>
               </a:solidFill>
@@ -9468,7 +9509,7 @@
         </p:sp>
         <p:pic>
           <p:nvPicPr>
-            <p:cNvPr id="20" name="Public-subnet_32" descr="Public subnet_32"/>
+            <p:cNvPr id="21" name="Public-subnet_32" descr="Public subnet_32"/>
             <p:cNvPicPr>
               <a:picLocks noChangeAspect="1"/>
             </p:cNvPicPr>
@@ -9488,8 +9529,8 @@
           </p:blipFill>
           <p:spPr>
             <a:xfrm>
-              <a:off x="2899833" y="2247900"/>
-              <a:ext cx="254000" cy="254000"/>
+              <a:off x="2897526" y="2426846"/>
+              <a:ext cx="254183" cy="254183"/>
             </a:xfrm>
             <a:prstGeom prst="rect">
               <a:avLst/>
@@ -9498,14 +9539,14 @@
         </p:pic>
         <p:sp>
           <p:nvSpPr>
-            <p:cNvPr id="21" name="TextBox 20"/>
-            <p:cNvSpPr txBox="1"/>
-            <p:nvPr/>
-          </p:nvSpPr>
-          <p:spPr>
-            <a:xfrm>
-              <a:off x="3238500" y="2297642"/>
-              <a:ext cx="1370542" cy="192617"/>
+            <p:cNvPr id="22" name="TextBox 21"/>
+            <p:cNvSpPr txBox="1"/>
+            <p:nvPr/>
+          </p:nvSpPr>
+          <p:spPr>
+            <a:xfrm>
+              <a:off x="3236437" y="2476624"/>
+              <a:ext cx="1371531" cy="192756"/>
             </a:xfrm>
             <a:prstGeom prst="rect">
               <a:avLst/>
@@ -9524,7 +9565,7 @@
                 </a:lnSpc>
               </a:pPr>
               <a:r>
-                <a:rPr sz="1166" b="1" lang="ko-KR">
+                <a:rPr sz="1167" b="1" lang="ko-KR">
                   <a:solidFill>
                     <a:srgbClr val="7AA116"/>
                   </a:solidFill>
@@ -9539,20 +9580,20 @@
         </p:sp>
         <p:sp>
           <p:nvSpPr>
-            <p:cNvPr id="22" name="Rectangle 21"/>
+            <p:cNvPr id="23" name="Rectangle 22"/>
             <p:cNvSpPr/>
             <p:nvPr/>
           </p:nvSpPr>
           <p:spPr>
             <a:xfrm>
-              <a:off x="5736167" y="2247900"/>
-              <a:ext cx="1587500" cy="1121833"/>
-            </a:xfrm>
-            <a:prstGeom prst="rect">
-              <a:avLst/>
-            </a:prstGeom>
-            <a:noFill/>
-            <a:ln w="15875">
+              <a:off x="5735907" y="2426846"/>
+              <a:ext cx="1588646" cy="1122643"/>
+            </a:xfrm>
+            <a:prstGeom prst="rect">
+              <a:avLst/>
+            </a:prstGeom>
+            <a:noFill/>
+            <a:ln w="15886">
               <a:solidFill>
                 <a:srgbClr val="00A4A6"/>
               </a:solidFill>
@@ -9570,7 +9611,7 @@
         </p:sp>
         <p:pic>
           <p:nvPicPr>
-            <p:cNvPr id="23" name="Private-subnet_32" descr="Private subnet_32"/>
+            <p:cNvPr id="24" name="Private-subnet_32" descr="Private subnet_32"/>
             <p:cNvPicPr>
               <a:picLocks noChangeAspect="1"/>
             </p:cNvPicPr>
@@ -9590,8 +9631,8 @@
           </p:blipFill>
           <p:spPr>
             <a:xfrm>
-              <a:off x="5736167" y="2247900"/>
-              <a:ext cx="254000" cy="254000"/>
+              <a:off x="5735907" y="2426846"/>
+              <a:ext cx="254183" cy="254183"/>
             </a:xfrm>
             <a:prstGeom prst="rect">
               <a:avLst/>
@@ -9600,14 +9641,14 @@
         </p:pic>
         <p:sp>
           <p:nvSpPr>
-            <p:cNvPr id="24" name="TextBox 23"/>
-            <p:cNvSpPr txBox="1"/>
-            <p:nvPr/>
-          </p:nvSpPr>
-          <p:spPr>
-            <a:xfrm>
-              <a:off x="6074833" y="2297642"/>
-              <a:ext cx="1166813" cy="192617"/>
+            <p:cNvPr id="25" name="TextBox 24"/>
+            <p:cNvSpPr txBox="1"/>
+            <p:nvPr/>
+          </p:nvSpPr>
+          <p:spPr>
+            <a:xfrm>
+              <a:off x="6074818" y="2476624"/>
+              <a:ext cx="1167655" cy="192756"/>
             </a:xfrm>
             <a:prstGeom prst="rect">
               <a:avLst/>
@@ -9626,7 +9667,7 @@
                 </a:lnSpc>
               </a:pPr>
               <a:r>
-                <a:rPr sz="1166" b="1" lang="ko-KR">
+                <a:rPr sz="1167" b="1" lang="ko-KR">
                   <a:solidFill>
                     <a:srgbClr val="00A4A6"/>
                   </a:solidFill>
@@ -9641,20 +9682,20 @@
         </p:sp>
         <p:sp>
           <p:nvSpPr>
-            <p:cNvPr id="25" name="Rectangle 24"/>
+            <p:cNvPr id="26" name="Rectangle 25"/>
             <p:cNvSpPr/>
             <p:nvPr/>
           </p:nvSpPr>
           <p:spPr>
             <a:xfrm>
-              <a:off x="2899833" y="4682067"/>
-              <a:ext cx="2582333" cy="1206500"/>
-            </a:xfrm>
-            <a:prstGeom prst="rect">
-              <a:avLst/>
-            </a:prstGeom>
-            <a:noFill/>
-            <a:ln w="15875">
+              <a:off x="2897526" y="4862770"/>
+              <a:ext cx="2584198" cy="1165007"/>
+            </a:xfrm>
+            <a:prstGeom prst="rect">
+              <a:avLst/>
+            </a:prstGeom>
+            <a:noFill/>
+            <a:ln w="15886">
               <a:solidFill>
                 <a:srgbClr val="7AA116"/>
               </a:solidFill>
@@ -9672,7 +9713,7 @@
         </p:sp>
         <p:pic>
           <p:nvPicPr>
-            <p:cNvPr id="26" name="Public-subnet_32" descr="Public subnet_32"/>
+            <p:cNvPr id="27" name="Public-subnet_32" descr="Public subnet_32"/>
             <p:cNvPicPr>
               <a:picLocks noChangeAspect="1"/>
             </p:cNvPicPr>
@@ -9692,8 +9733,8 @@
           </p:blipFill>
           <p:spPr>
             <a:xfrm>
-              <a:off x="2899833" y="4682067"/>
-              <a:ext cx="254000" cy="254000"/>
+              <a:off x="2897526" y="4862770"/>
+              <a:ext cx="254183" cy="254183"/>
             </a:xfrm>
             <a:prstGeom prst="rect">
               <a:avLst/>
@@ -9702,14 +9743,14 @@
         </p:pic>
         <p:sp>
           <p:nvSpPr>
-            <p:cNvPr id="27" name="TextBox 26"/>
-            <p:cNvSpPr txBox="1"/>
-            <p:nvPr/>
-          </p:nvSpPr>
-          <p:spPr>
-            <a:xfrm>
-              <a:off x="3238500" y="4731808"/>
-              <a:ext cx="1370542" cy="192617"/>
+            <p:cNvPr id="28" name="TextBox 27"/>
+            <p:cNvSpPr txBox="1"/>
+            <p:nvPr/>
+          </p:nvSpPr>
+          <p:spPr>
+            <a:xfrm>
+              <a:off x="3236437" y="4912548"/>
+              <a:ext cx="1371531" cy="192756"/>
             </a:xfrm>
             <a:prstGeom prst="rect">
               <a:avLst/>
@@ -9728,7 +9769,7 @@
                 </a:lnSpc>
               </a:pPr>
               <a:r>
-                <a:rPr sz="1166" b="1" lang="ko-KR">
+                <a:rPr sz="1167" b="1" lang="ko-KR">
                   <a:solidFill>
                     <a:srgbClr val="7AA116"/>
                   </a:solidFill>
@@ -9743,20 +9784,20 @@
         </p:sp>
         <p:sp>
           <p:nvSpPr>
-            <p:cNvPr id="28" name="Rectangle 27"/>
+            <p:cNvPr id="29" name="Rectangle 28"/>
             <p:cNvSpPr/>
             <p:nvPr/>
           </p:nvSpPr>
           <p:spPr>
             <a:xfrm>
-              <a:off x="5736167" y="4682067"/>
-              <a:ext cx="1587500" cy="1206500"/>
-            </a:xfrm>
-            <a:prstGeom prst="rect">
-              <a:avLst/>
-            </a:prstGeom>
-            <a:noFill/>
-            <a:ln w="15875">
+              <a:off x="5735907" y="4862770"/>
+              <a:ext cx="1588646" cy="1165007"/>
+            </a:xfrm>
+            <a:prstGeom prst="rect">
+              <a:avLst/>
+            </a:prstGeom>
+            <a:noFill/>
+            <a:ln w="15886">
               <a:solidFill>
                 <a:srgbClr val="00A4A6"/>
               </a:solidFill>
@@ -9774,7 +9815,7 @@
         </p:sp>
         <p:pic>
           <p:nvPicPr>
-            <p:cNvPr id="29" name="Private-subnet_32" descr="Private subnet_32"/>
+            <p:cNvPr id="30" name="Private-subnet_32" descr="Private subnet_32"/>
             <p:cNvPicPr>
               <a:picLocks noChangeAspect="1"/>
             </p:cNvPicPr>
@@ -9794,8 +9835,8 @@
           </p:blipFill>
           <p:spPr>
             <a:xfrm>
-              <a:off x="5736167" y="4682067"/>
-              <a:ext cx="254000" cy="254000"/>
+              <a:off x="5735907" y="4862770"/>
+              <a:ext cx="254183" cy="254183"/>
             </a:xfrm>
             <a:prstGeom prst="rect">
               <a:avLst/>
@@ -9804,14 +9845,14 @@
         </p:pic>
         <p:sp>
           <p:nvSpPr>
-            <p:cNvPr id="30" name="TextBox 29"/>
-            <p:cNvSpPr txBox="1"/>
-            <p:nvPr/>
-          </p:nvSpPr>
-          <p:spPr>
-            <a:xfrm>
-              <a:off x="6074833" y="4731808"/>
-              <a:ext cx="1166813" cy="192617"/>
+            <p:cNvPr id="31" name="TextBox 30"/>
+            <p:cNvSpPr txBox="1"/>
+            <p:nvPr/>
+          </p:nvSpPr>
+          <p:spPr>
+            <a:xfrm>
+              <a:off x="6074818" y="4912548"/>
+              <a:ext cx="1167655" cy="192756"/>
             </a:xfrm>
             <a:prstGeom prst="rect">
               <a:avLst/>
@@ -9830,7 +9871,7 @@
                 </a:lnSpc>
               </a:pPr>
               <a:r>
-                <a:rPr sz="1166" b="1" lang="ko-KR">
+                <a:rPr sz="1167" b="1" lang="ko-KR">
                   <a:solidFill>
                     <a:srgbClr val="00A4A6"/>
                   </a:solidFill>
@@ -9845,7 +9886,7 @@
         </p:sp>
         <p:pic>
           <p:nvPicPr>
-            <p:cNvPr id="31" name="Amazon-VPC_Endpoints" descr="Amazon VPC_Endpoints"/>
+            <p:cNvPr id="32" name="Amazon-VPC_Endpoints" descr="Amazon VPC_Endpoints"/>
             <p:cNvPicPr>
               <a:picLocks noChangeAspect="1"/>
             </p:cNvPicPr>
@@ -9865,8 +9906,8 @@
           </p:blipFill>
           <p:spPr>
             <a:xfrm>
-              <a:off x="4762500" y="2544233"/>
-              <a:ext cx="508000" cy="508000"/>
+              <a:off x="4761537" y="2723394"/>
+              <a:ext cx="508367" cy="508367"/>
             </a:xfrm>
             <a:prstGeom prst="rect">
               <a:avLst/>
@@ -9875,14 +9916,14 @@
         </p:pic>
         <p:sp>
           <p:nvSpPr>
-            <p:cNvPr id="32" name="TextBox 31"/>
-            <p:cNvSpPr txBox="1"/>
-            <p:nvPr/>
-          </p:nvSpPr>
-          <p:spPr>
-            <a:xfrm>
-              <a:off x="4687755" y="3101975"/>
-              <a:ext cx="657490" cy="192617"/>
+            <p:cNvPr id="33" name="TextBox 32"/>
+            <p:cNvSpPr txBox="1"/>
+            <p:nvPr/>
+          </p:nvSpPr>
+          <p:spPr>
+            <a:xfrm>
+              <a:off x="4686738" y="3281538"/>
+              <a:ext cx="657964" cy="192756"/>
             </a:xfrm>
             <a:prstGeom prst="rect">
               <a:avLst/>
@@ -9901,7 +9942,7 @@
                 </a:lnSpc>
               </a:pPr>
               <a:r>
-                <a:rPr sz="1166" b="0" lang="ko-KR">
+                <a:rPr sz="1167" b="0" lang="ko-KR">
                   <a:solidFill>
                     <a:srgbClr val="232F3E"/>
                   </a:solidFill>
@@ -9916,7 +9957,7 @@
         </p:sp>
         <p:pic>
           <p:nvPicPr>
-            <p:cNvPr id="33" name="Amazon-VPC_Endpoints" descr="Amazon VPC_Endpoints"/>
+            <p:cNvPr id="34" name="Amazon-VPC_Endpoints" descr="Amazon VPC_Endpoints"/>
             <p:cNvPicPr>
               <a:picLocks noChangeAspect="1"/>
             </p:cNvPicPr>
@@ -9936,8 +9977,8 @@
           </p:blipFill>
           <p:spPr>
             <a:xfrm>
-              <a:off x="4762500" y="4978400"/>
-              <a:ext cx="508000" cy="508000"/>
+              <a:off x="4761537" y="5159318"/>
+              <a:ext cx="508367" cy="508367"/>
             </a:xfrm>
             <a:prstGeom prst="rect">
               <a:avLst/>
@@ -9946,14 +9987,14 @@
         </p:pic>
         <p:sp>
           <p:nvSpPr>
-            <p:cNvPr id="34" name="TextBox 33"/>
-            <p:cNvSpPr txBox="1"/>
-            <p:nvPr/>
-          </p:nvSpPr>
-          <p:spPr>
-            <a:xfrm>
-              <a:off x="4687755" y="5536142"/>
-              <a:ext cx="657490" cy="192617"/>
+            <p:cNvPr id="35" name="TextBox 34"/>
+            <p:cNvSpPr txBox="1"/>
+            <p:nvPr/>
+          </p:nvSpPr>
+          <p:spPr>
+            <a:xfrm>
+              <a:off x="4686738" y="5717462"/>
+              <a:ext cx="657964" cy="192756"/>
             </a:xfrm>
             <a:prstGeom prst="rect">
               <a:avLst/>
@@ -9972,7 +10013,7 @@
                 </a:lnSpc>
               </a:pPr>
               <a:r>
-                <a:rPr sz="1166" b="0" lang="ko-KR">
+                <a:rPr sz="1167" b="0" lang="ko-KR">
                   <a:solidFill>
                     <a:srgbClr val="232F3E"/>
                   </a:solidFill>
@@ -9987,7 +10028,7 @@
         </p:sp>
         <p:pic>
           <p:nvPicPr>
-            <p:cNvPr id="35" name="Amazon-EC2" descr="Amazon EC2"/>
+            <p:cNvPr id="36" name="Amazon-EC2" descr="Amazon EC2"/>
             <p:cNvPicPr>
               <a:picLocks noChangeAspect="1"/>
             </p:cNvPicPr>
@@ -10007,8 +10048,8 @@
           </p:blipFill>
           <p:spPr>
             <a:xfrm>
-              <a:off x="6275917" y="2544233"/>
-              <a:ext cx="508000" cy="508000"/>
+              <a:off x="6276047" y="2723394"/>
+              <a:ext cx="508367" cy="508367"/>
             </a:xfrm>
             <a:prstGeom prst="rect">
               <a:avLst/>
@@ -10017,14 +10058,14 @@
         </p:pic>
         <p:sp>
           <p:nvSpPr>
-            <p:cNvPr id="36" name="TextBox 35"/>
-            <p:cNvSpPr txBox="1"/>
-            <p:nvPr/>
-          </p:nvSpPr>
-          <p:spPr>
-            <a:xfrm>
-              <a:off x="6303036" y="3101975"/>
-              <a:ext cx="453760" cy="192617"/>
+            <p:cNvPr id="37" name="TextBox 36"/>
+            <p:cNvSpPr txBox="1"/>
+            <p:nvPr/>
+          </p:nvSpPr>
+          <p:spPr>
+            <a:xfrm>
+              <a:off x="6303186" y="3281538"/>
+              <a:ext cx="454088" cy="192756"/>
             </a:xfrm>
             <a:prstGeom prst="rect">
               <a:avLst/>
@@ -10043,7 +10084,7 @@
                 </a:lnSpc>
               </a:pPr>
               <a:r>
-                <a:rPr sz="1166" b="0" lang="ko-KR">
+                <a:rPr sz="1167" b="0" lang="ko-KR">
                   <a:solidFill>
                     <a:srgbClr val="232F3E"/>
                   </a:solidFill>
@@ -10058,7 +10099,7 @@
         </p:sp>
         <p:pic>
           <p:nvPicPr>
-            <p:cNvPr id="37" name="Amazon-EC2" descr="Amazon EC2"/>
+            <p:cNvPr id="38" name="Amazon-EC2" descr="Amazon EC2"/>
             <p:cNvPicPr>
               <a:picLocks noChangeAspect="1"/>
             </p:cNvPicPr>
@@ -10078,8 +10119,8 @@
           </p:blipFill>
           <p:spPr>
             <a:xfrm>
-              <a:off x="6275917" y="4978400"/>
-              <a:ext cx="508000" cy="508000"/>
+              <a:off x="6276047" y="5159318"/>
+              <a:ext cx="508367" cy="508367"/>
             </a:xfrm>
             <a:prstGeom prst="rect">
               <a:avLst/>
@@ -10088,14 +10129,14 @@
         </p:pic>
         <p:sp>
           <p:nvSpPr>
-            <p:cNvPr id="38" name="TextBox 37"/>
-            <p:cNvSpPr txBox="1"/>
-            <p:nvPr/>
-          </p:nvSpPr>
-          <p:spPr>
-            <a:xfrm>
-              <a:off x="6303036" y="5536142"/>
-              <a:ext cx="453760" cy="192617"/>
+            <p:cNvPr id="39" name="TextBox 38"/>
+            <p:cNvSpPr txBox="1"/>
+            <p:nvPr/>
+          </p:nvSpPr>
+          <p:spPr>
+            <a:xfrm>
+              <a:off x="6303186" y="5717462"/>
+              <a:ext cx="454088" cy="192756"/>
             </a:xfrm>
             <a:prstGeom prst="rect">
               <a:avLst/>
@@ -10114,7 +10155,7 @@
                 </a:lnSpc>
               </a:pPr>
               <a:r>
-                <a:rPr sz="1166" b="0" lang="ko-KR">
+                <a:rPr sz="1167" b="0" lang="ko-KR">
                   <a:solidFill>
                     <a:srgbClr val="232F3E"/>
                   </a:solidFill>
@@ -10129,14 +10170,14 @@
         </p:sp>
         <p:sp>
           <p:nvSpPr>
-            <p:cNvPr id="39" name="Rectangle 38"/>
+            <p:cNvPr id="40" name="Rectangle 39"/>
             <p:cNvSpPr/>
             <p:nvPr/>
           </p:nvSpPr>
           <p:spPr>
             <a:xfrm>
-              <a:off x="2307167" y="3539067"/>
-              <a:ext cx="508000" cy="740833"/>
+              <a:off x="2304431" y="3718945"/>
+              <a:ext cx="508367" cy="741368"/>
             </a:xfrm>
             <a:prstGeom prst="rect">
               <a:avLst/>
@@ -10158,7 +10199,7 @@
         </p:sp>
         <p:pic>
           <p:nvPicPr>
-            <p:cNvPr id="40" name="Amazon-VPC_Internet-Gateway" descr="Amazon VPC_Internet Gateway"/>
+            <p:cNvPr id="41" name="Amazon-VPC_Internet-Gateway" descr="Amazon VPC_Internet Gateway"/>
             <p:cNvPicPr>
               <a:picLocks noChangeAspect="1"/>
             </p:cNvPicPr>
@@ -10178,8 +10219,8 @@
           </p:blipFill>
           <p:spPr>
             <a:xfrm>
-              <a:off x="2307167" y="3539067"/>
-              <a:ext cx="508000" cy="508000"/>
+              <a:off x="2304431" y="3718945"/>
+              <a:ext cx="508367" cy="508367"/>
             </a:xfrm>
             <a:prstGeom prst="rect">
               <a:avLst/>
@@ -10188,14 +10229,14 @@
         </p:pic>
         <p:sp>
           <p:nvSpPr>
-            <p:cNvPr id="41" name="TextBox 40"/>
-            <p:cNvSpPr txBox="1"/>
-            <p:nvPr/>
-          </p:nvSpPr>
-          <p:spPr>
-            <a:xfrm>
-              <a:off x="2334286" y="4096808"/>
-              <a:ext cx="453760" cy="192617"/>
+            <p:cNvPr id="42" name="TextBox 41"/>
+            <p:cNvSpPr txBox="1"/>
+            <p:nvPr/>
+          </p:nvSpPr>
+          <p:spPr>
+            <a:xfrm>
+              <a:off x="2331570" y="4277089"/>
+              <a:ext cx="454088" cy="192756"/>
             </a:xfrm>
             <a:prstGeom prst="rect">
               <a:avLst/>
@@ -10214,7 +10255,7 @@
                 </a:lnSpc>
               </a:pPr>
               <a:r>
-                <a:rPr sz="1166" b="0" lang="ko-KR">
+                <a:rPr sz="1167" b="0" lang="ko-KR">
                   <a:solidFill>
                     <a:srgbClr val="232F3E"/>
                   </a:solidFill>
@@ -10229,20 +10270,20 @@
         </p:sp>
         <p:sp>
           <p:nvSpPr>
-            <p:cNvPr id="42" name="Rectangle 41"/>
+            <p:cNvPr id="43" name="Rectangle 42"/>
             <p:cNvSpPr/>
             <p:nvPr/>
           </p:nvSpPr>
           <p:spPr>
             <a:xfrm>
-              <a:off x="8001000" y="1612900"/>
-              <a:ext cx="3746500" cy="4445000"/>
-            </a:xfrm>
-            <a:prstGeom prst="rect">
-              <a:avLst/>
-            </a:prstGeom>
-            <a:noFill/>
-            <a:ln w="21167">
+              <a:off x="8002375" y="1621932"/>
+              <a:ext cx="3749205" cy="4575301"/>
+            </a:xfrm>
+            <a:prstGeom prst="rect">
+              <a:avLst/>
+            </a:prstGeom>
+            <a:noFill/>
+            <a:ln w="21182">
               <a:solidFill>
                 <a:srgbClr val="8C4FFF"/>
               </a:solidFill>
@@ -10260,7 +10301,7 @@
         </p:sp>
         <p:pic>
           <p:nvPicPr>
-            <p:cNvPr id="43" name="Virtual-private-cloud-VPC_32" descr="Virtual private cloud VPC_32"/>
+            <p:cNvPr id="44" name="Virtual-private-cloud-VPC_32" descr="Virtual private cloud VPC_32"/>
             <p:cNvPicPr>
               <a:picLocks noChangeAspect="1"/>
             </p:cNvPicPr>
@@ -10280,8 +10321,8 @@
           </p:blipFill>
           <p:spPr>
             <a:xfrm>
-              <a:off x="8001000" y="1612900"/>
-              <a:ext cx="254000" cy="254000"/>
+              <a:off x="8002375" y="1621932"/>
+              <a:ext cx="254183" cy="254183"/>
             </a:xfrm>
             <a:prstGeom prst="rect">
               <a:avLst/>
@@ -10290,14 +10331,14 @@
         </p:pic>
         <p:sp>
           <p:nvSpPr>
-            <p:cNvPr id="44" name="TextBox 43"/>
-            <p:cNvSpPr txBox="1"/>
-            <p:nvPr/>
-          </p:nvSpPr>
-          <p:spPr>
-            <a:xfrm>
-              <a:off x="8339667" y="1662642"/>
-              <a:ext cx="2592917" cy="192617"/>
+            <p:cNvPr id="45" name="TextBox 44"/>
+            <p:cNvSpPr txBox="1"/>
+            <p:nvPr/>
+          </p:nvSpPr>
+          <p:spPr>
+            <a:xfrm>
+              <a:off x="8341287" y="1671710"/>
+              <a:ext cx="1371531" cy="192756"/>
             </a:xfrm>
             <a:prstGeom prst="rect">
               <a:avLst/>
@@ -10316,7 +10357,7 @@
                 </a:lnSpc>
               </a:pPr>
               <a:r>
-                <a:rPr sz="1166" b="1" lang="ko-KR">
+                <a:rPr sz="1167" b="1" lang="ko-KR">
                   <a:solidFill>
                     <a:srgbClr val="8C4FFF"/>
                   </a:solidFill>
@@ -10324,27 +10365,68 @@
                   <a:ea typeface="Malgun Gothic"/>
                   <a:cs typeface="Malgun Gothic"/>
                 </a:rPr>
-                <a:t>Security VPC 10.1.0.0/16</a:t>
-              </a:r>
-            </a:p>
-          </p:txBody>
-        </p:sp>
-        <p:sp>
-          <p:nvSpPr>
-            <p:cNvPr id="45" name="Rectangle 44"/>
+                <a:t>Security VPC</a:t>
+              </a:r>
+            </a:p>
+          </p:txBody>
+        </p:sp>
+        <p:sp>
+          <p:nvSpPr>
+            <p:cNvPr id="46" name="TextBox 45"/>
+            <p:cNvSpPr txBox="1"/>
+            <p:nvPr/>
+          </p:nvSpPr>
+          <p:spPr>
+            <a:xfrm>
+              <a:off x="8341287" y="1861288"/>
+              <a:ext cx="1088223" cy="165219"/>
+            </a:xfrm>
+            <a:prstGeom prst="rect">
+              <a:avLst/>
+            </a:prstGeom>
+            <a:noFill/>
+          </p:spPr>
+          <p:txBody>
+            <a:bodyPr wrap="none" lIns="0" rIns="0" tIns="0" bIns="0" anchor="t">
+              <a:noAutofit/>
+            </a:bodyPr>
+            <a:lstStyle/>
+            <a:p>
+              <a:pPr algn="l">
+                <a:lnSpc>
+                  <a:spcPct val="100000"/>
+                </a:lnSpc>
+              </a:pPr>
+              <a:r>
+                <a:rPr sz="1000" b="0" lang="ko-KR">
+                  <a:solidFill>
+                    <a:srgbClr val="232F3E"/>
+                  </a:solidFill>
+                  <a:latin typeface="Arial"/>
+                  <a:ea typeface="Malgun Gothic"/>
+                  <a:cs typeface="Malgun Gothic"/>
+                </a:rPr>
+                <a:t>10.1.0.0/16</a:t>
+              </a:r>
+            </a:p>
+          </p:txBody>
+        </p:sp>
+        <p:sp>
+          <p:nvSpPr>
+            <p:cNvPr id="47" name="Rectangle 46"/>
             <p:cNvSpPr/>
             <p:nvPr/>
           </p:nvSpPr>
           <p:spPr>
             <a:xfrm>
-              <a:off x="8212667" y="1930400"/>
-              <a:ext cx="3323167" cy="1524000"/>
-            </a:xfrm>
-            <a:prstGeom prst="rect">
-              <a:avLst/>
-            </a:prstGeom>
-            <a:noFill/>
-            <a:ln w="15875">
+              <a:off x="8214195" y="2109117"/>
+              <a:ext cx="3325566" cy="1525100"/>
+            </a:xfrm>
+            <a:prstGeom prst="rect">
+              <a:avLst/>
+            </a:prstGeom>
+            <a:noFill/>
+            <a:ln w="15886">
               <a:solidFill>
                 <a:srgbClr val="00A4A6"/>
               </a:solidFill>
@@ -10364,14 +10446,14 @@
         </p:sp>
         <p:sp>
           <p:nvSpPr>
-            <p:cNvPr id="46" name="TextBox 45"/>
-            <p:cNvSpPr txBox="1"/>
-            <p:nvPr/>
-          </p:nvSpPr>
-          <p:spPr>
-            <a:xfrm>
-              <a:off x="8339667" y="1980142"/>
-              <a:ext cx="2083594" cy="192617"/>
+            <p:cNvPr id="48" name="TextBox 47"/>
+            <p:cNvSpPr txBox="1"/>
+            <p:nvPr/>
+          </p:nvSpPr>
+          <p:spPr>
+            <a:xfrm>
+              <a:off x="8341287" y="2158895"/>
+              <a:ext cx="2085098" cy="192756"/>
             </a:xfrm>
             <a:prstGeom prst="rect">
               <a:avLst/>
@@ -10390,7 +10472,7 @@
                 </a:lnSpc>
               </a:pPr>
               <a:r>
-                <a:rPr sz="1166" b="1" lang="ko-KR">
+                <a:rPr sz="1167" b="1" lang="ko-KR">
                   <a:solidFill>
                     <a:srgbClr val="00A4A6"/>
                   </a:solidFill>
@@ -10405,20 +10487,20 @@
         </p:sp>
         <p:sp>
           <p:nvSpPr>
-            <p:cNvPr id="47" name="Rectangle 46"/>
+            <p:cNvPr id="49" name="Rectangle 48"/>
             <p:cNvSpPr/>
             <p:nvPr/>
           </p:nvSpPr>
           <p:spPr>
             <a:xfrm>
-              <a:off x="8212667" y="4364567"/>
-              <a:ext cx="3323167" cy="1608667"/>
-            </a:xfrm>
-            <a:prstGeom prst="rect">
-              <a:avLst/>
-            </a:prstGeom>
-            <a:noFill/>
-            <a:ln w="15875">
+              <a:off x="8214195" y="4545041"/>
+              <a:ext cx="3325566" cy="1567464"/>
+            </a:xfrm>
+            <a:prstGeom prst="rect">
+              <a:avLst/>
+            </a:prstGeom>
+            <a:noFill/>
+            <a:ln w="15886">
               <a:solidFill>
                 <a:srgbClr val="00A4A6"/>
               </a:solidFill>
@@ -10438,14 +10520,14 @@
         </p:sp>
         <p:sp>
           <p:nvSpPr>
-            <p:cNvPr id="48" name="TextBox 47"/>
-            <p:cNvSpPr txBox="1"/>
-            <p:nvPr/>
-          </p:nvSpPr>
-          <p:spPr>
-            <a:xfrm>
-              <a:off x="8339667" y="4414308"/>
-              <a:ext cx="2083594" cy="192617"/>
+            <p:cNvPr id="50" name="TextBox 49"/>
+            <p:cNvSpPr txBox="1"/>
+            <p:nvPr/>
+          </p:nvSpPr>
+          <p:spPr>
+            <a:xfrm>
+              <a:off x="8341287" y="4594819"/>
+              <a:ext cx="2085098" cy="192756"/>
             </a:xfrm>
             <a:prstGeom prst="rect">
               <a:avLst/>
@@ -10464,7 +10546,7 @@
                 </a:lnSpc>
               </a:pPr>
               <a:r>
-                <a:rPr sz="1166" b="1" lang="ko-KR">
+                <a:rPr sz="1167" b="1" lang="ko-KR">
                   <a:solidFill>
                     <a:srgbClr val="00A4A6"/>
                   </a:solidFill>
@@ -10479,20 +10561,20 @@
         </p:sp>
         <p:sp>
           <p:nvSpPr>
-            <p:cNvPr id="49" name="Rectangle 48"/>
+            <p:cNvPr id="51" name="Rectangle 50"/>
             <p:cNvSpPr/>
             <p:nvPr/>
           </p:nvSpPr>
           <p:spPr>
             <a:xfrm>
-              <a:off x="8339667" y="2247900"/>
-              <a:ext cx="3111500" cy="1121833"/>
-            </a:xfrm>
-            <a:prstGeom prst="rect">
-              <a:avLst/>
-            </a:prstGeom>
-            <a:noFill/>
-            <a:ln w="15875">
+              <a:off x="8341287" y="2426846"/>
+              <a:ext cx="3113747" cy="1122643"/>
+            </a:xfrm>
+            <a:prstGeom prst="rect">
+              <a:avLst/>
+            </a:prstGeom>
+            <a:noFill/>
+            <a:ln w="15886">
               <a:solidFill>
                 <a:srgbClr val="00A4A6"/>
               </a:solidFill>
@@ -10510,7 +10592,7 @@
         </p:sp>
         <p:pic>
           <p:nvPicPr>
-            <p:cNvPr id="50" name="Private-subnet_32" descr="Private subnet_32"/>
+            <p:cNvPr id="52" name="Private-subnet_32" descr="Private subnet_32"/>
             <p:cNvPicPr>
               <a:picLocks noChangeAspect="1"/>
             </p:cNvPicPr>
@@ -10530,8 +10612,8 @@
           </p:blipFill>
           <p:spPr>
             <a:xfrm>
-              <a:off x="8339667" y="2247900"/>
-              <a:ext cx="254000" cy="254000"/>
+              <a:off x="8341287" y="2426846"/>
+              <a:ext cx="254183" cy="254183"/>
             </a:xfrm>
             <a:prstGeom prst="rect">
               <a:avLst/>
@@ -10540,14 +10622,14 @@
         </p:pic>
         <p:sp>
           <p:nvSpPr>
-            <p:cNvPr id="51" name="TextBox 50"/>
-            <p:cNvSpPr txBox="1"/>
-            <p:nvPr/>
-          </p:nvSpPr>
-          <p:spPr>
-            <a:xfrm>
-              <a:off x="8678333" y="2297642"/>
-              <a:ext cx="1778000" cy="192617"/>
+            <p:cNvPr id="53" name="TextBox 52"/>
+            <p:cNvSpPr txBox="1"/>
+            <p:nvPr/>
+          </p:nvSpPr>
+          <p:spPr>
+            <a:xfrm>
+              <a:off x="8680198" y="2476624"/>
+              <a:ext cx="1779284" cy="192756"/>
             </a:xfrm>
             <a:prstGeom prst="rect">
               <a:avLst/>
@@ -10566,7 +10648,7 @@
                 </a:lnSpc>
               </a:pPr>
               <a:r>
-                <a:rPr sz="1166" b="1" lang="ko-KR">
+                <a:rPr sz="1167" b="1" lang="ko-KR">
                   <a:solidFill>
                     <a:srgbClr val="00A4A6"/>
                   </a:solidFill>
@@ -10581,20 +10663,20 @@
         </p:sp>
         <p:sp>
           <p:nvSpPr>
-            <p:cNvPr id="52" name="Rectangle 51"/>
+            <p:cNvPr id="54" name="Rectangle 53"/>
             <p:cNvSpPr/>
             <p:nvPr/>
           </p:nvSpPr>
           <p:spPr>
             <a:xfrm>
-              <a:off x="8339667" y="4682067"/>
-              <a:ext cx="3111500" cy="1206500"/>
-            </a:xfrm>
-            <a:prstGeom prst="rect">
-              <a:avLst/>
-            </a:prstGeom>
-            <a:noFill/>
-            <a:ln w="15875">
+              <a:off x="8341287" y="4862770"/>
+              <a:ext cx="3113747" cy="1165007"/>
+            </a:xfrm>
+            <a:prstGeom prst="rect">
+              <a:avLst/>
+            </a:prstGeom>
+            <a:noFill/>
+            <a:ln w="15886">
               <a:solidFill>
                 <a:srgbClr val="00A4A6"/>
               </a:solidFill>
@@ -10612,7 +10694,7 @@
         </p:sp>
         <p:pic>
           <p:nvPicPr>
-            <p:cNvPr id="53" name="Private-subnet_32" descr="Private subnet_32"/>
+            <p:cNvPr id="55" name="Private-subnet_32" descr="Private subnet_32"/>
             <p:cNvPicPr>
               <a:picLocks noChangeAspect="1"/>
             </p:cNvPicPr>
@@ -10632,8 +10714,8 @@
           </p:blipFill>
           <p:spPr>
             <a:xfrm>
-              <a:off x="8339667" y="4682067"/>
-              <a:ext cx="254000" cy="254000"/>
+              <a:off x="8341287" y="4862770"/>
+              <a:ext cx="254183" cy="254183"/>
             </a:xfrm>
             <a:prstGeom prst="rect">
               <a:avLst/>
@@ -10642,14 +10724,14 @@
         </p:pic>
         <p:sp>
           <p:nvSpPr>
-            <p:cNvPr id="54" name="TextBox 53"/>
-            <p:cNvSpPr txBox="1"/>
-            <p:nvPr/>
-          </p:nvSpPr>
-          <p:spPr>
-            <a:xfrm>
-              <a:off x="8678333" y="4731808"/>
-              <a:ext cx="1778000" cy="192617"/>
+            <p:cNvPr id="56" name="TextBox 55"/>
+            <p:cNvSpPr txBox="1"/>
+            <p:nvPr/>
+          </p:nvSpPr>
+          <p:spPr>
+            <a:xfrm>
+              <a:off x="8680198" y="4912548"/>
+              <a:ext cx="1779284" cy="192756"/>
             </a:xfrm>
             <a:prstGeom prst="rect">
               <a:avLst/>
@@ -10668,7 +10750,7 @@
                 </a:lnSpc>
               </a:pPr>
               <a:r>
-                <a:rPr sz="1166" b="1" lang="ko-KR">
+                <a:rPr sz="1167" b="1" lang="ko-KR">
                   <a:solidFill>
                     <a:srgbClr val="00A4A6"/>
                   </a:solidFill>
@@ -10683,20 +10765,20 @@
         </p:sp>
         <p:sp>
           <p:nvSpPr>
-            <p:cNvPr id="55" name="Rectangle 54"/>
+            <p:cNvPr id="57" name="Rectangle 56"/>
             <p:cNvSpPr/>
             <p:nvPr/>
           </p:nvSpPr>
           <p:spPr>
             <a:xfrm>
-              <a:off x="10075333" y="2332567"/>
-              <a:ext cx="1291167" cy="3471333"/>
-            </a:xfrm>
-            <a:prstGeom prst="rect">
-              <a:avLst/>
-            </a:prstGeom>
-            <a:noFill/>
-            <a:ln w="15875">
+              <a:off x="10078206" y="2511574"/>
+              <a:ext cx="1292099" cy="3473840"/>
+            </a:xfrm>
+            <a:prstGeom prst="rect">
+              <a:avLst/>
+            </a:prstGeom>
+            <a:noFill/>
+            <a:ln w="15886">
               <a:solidFill>
                 <a:srgbClr val="ED7100"/>
               </a:solidFill>
@@ -10716,7 +10798,7 @@
         </p:sp>
         <p:pic>
           <p:nvPicPr>
-            <p:cNvPr id="56" name="Auto-Scaling-group_32" descr="Auto Scaling group_32"/>
+            <p:cNvPr id="58" name="Auto-Scaling-group_32" descr="Auto Scaling group_32"/>
             <p:cNvPicPr>
               <a:picLocks noChangeAspect="1"/>
             </p:cNvPicPr>
@@ -10736,8 +10818,8 @@
           </p:blipFill>
           <p:spPr>
             <a:xfrm>
-              <a:off x="10075333" y="2332567"/>
-              <a:ext cx="254000" cy="254000"/>
+              <a:off x="10078206" y="2511574"/>
+              <a:ext cx="254183" cy="254183"/>
             </a:xfrm>
             <a:prstGeom prst="rect">
               <a:avLst/>
@@ -10746,14 +10828,14 @@
         </p:pic>
         <p:sp>
           <p:nvSpPr>
-            <p:cNvPr id="57" name="TextBox 56"/>
-            <p:cNvSpPr txBox="1"/>
-            <p:nvPr/>
-          </p:nvSpPr>
-          <p:spPr>
-            <a:xfrm>
-              <a:off x="10414000" y="2382308"/>
-              <a:ext cx="453760" cy="192617"/>
+            <p:cNvPr id="59" name="TextBox 58"/>
+            <p:cNvSpPr txBox="1"/>
+            <p:nvPr/>
+          </p:nvSpPr>
+          <p:spPr>
+            <a:xfrm>
+              <a:off x="10417118" y="2561352"/>
+              <a:ext cx="454088" cy="192756"/>
             </a:xfrm>
             <a:prstGeom prst="rect">
               <a:avLst/>
@@ -10772,7 +10854,7 @@
                 </a:lnSpc>
               </a:pPr>
               <a:r>
-                <a:rPr sz="1166" b="1" lang="ko-KR">
+                <a:rPr sz="1167" b="1" lang="ko-KR">
                   <a:solidFill>
                     <a:srgbClr val="ED7100"/>
                   </a:solidFill>
@@ -10787,7 +10869,7 @@
         </p:sp>
         <p:pic>
           <p:nvPicPr>
-            <p:cNvPr id="58" name="Amazon-EC2" descr="Amazon EC2"/>
+            <p:cNvPr id="60" name="Amazon-EC2" descr="Amazon EC2"/>
             <p:cNvPicPr>
               <a:picLocks noChangeAspect="1"/>
             </p:cNvPicPr>
@@ -10807,8 +10889,8 @@
           </p:blipFill>
           <p:spPr>
             <a:xfrm>
-              <a:off x="10773833" y="2544233"/>
-              <a:ext cx="508000" cy="508000"/>
+              <a:off x="10777211" y="2723394"/>
+              <a:ext cx="508367" cy="508367"/>
             </a:xfrm>
             <a:prstGeom prst="rect">
               <a:avLst/>
@@ -10817,14 +10899,14 @@
         </p:pic>
         <p:sp>
           <p:nvSpPr>
-            <p:cNvPr id="59" name="TextBox 58"/>
-            <p:cNvSpPr txBox="1"/>
-            <p:nvPr/>
-          </p:nvSpPr>
-          <p:spPr>
-            <a:xfrm>
-              <a:off x="10675938" y="3101975"/>
-              <a:ext cx="703792" cy="192617"/>
+            <p:cNvPr id="61" name="TextBox 60"/>
+            <p:cNvSpPr txBox="1"/>
+            <p:nvPr/>
+          </p:nvSpPr>
+          <p:spPr>
+            <a:xfrm>
+              <a:off x="10679244" y="3281538"/>
+              <a:ext cx="704300" cy="192756"/>
             </a:xfrm>
             <a:prstGeom prst="rect">
               <a:avLst/>
@@ -10843,7 +10925,7 @@
                 </a:lnSpc>
               </a:pPr>
               <a:r>
-                <a:rPr sz="1166" b="0" lang="ko-KR">
+                <a:rPr sz="1167" b="0" lang="ko-KR">
                   <a:solidFill>
                     <a:srgbClr val="232F3E"/>
                   </a:solidFill>
@@ -10858,7 +10940,7 @@
         </p:sp>
         <p:pic>
           <p:nvPicPr>
-            <p:cNvPr id="60" name="Amazon-EC2" descr="Amazon EC2"/>
+            <p:cNvPr id="62" name="Amazon-EC2" descr="Amazon EC2"/>
             <p:cNvPicPr>
               <a:picLocks noChangeAspect="1"/>
             </p:cNvPicPr>
@@ -10878,8 +10960,8 @@
           </p:blipFill>
           <p:spPr>
             <a:xfrm>
-              <a:off x="10773833" y="4978400"/>
-              <a:ext cx="508000" cy="508000"/>
+              <a:off x="10777211" y="5159318"/>
+              <a:ext cx="508367" cy="508367"/>
             </a:xfrm>
             <a:prstGeom prst="rect">
               <a:avLst/>
@@ -10888,14 +10970,14 @@
         </p:pic>
         <p:sp>
           <p:nvSpPr>
-            <p:cNvPr id="61" name="TextBox 60"/>
-            <p:cNvSpPr txBox="1"/>
-            <p:nvPr/>
-          </p:nvSpPr>
-          <p:spPr>
-            <a:xfrm>
-              <a:off x="10675938" y="5536142"/>
-              <a:ext cx="703792" cy="192617"/>
+            <p:cNvPr id="63" name="TextBox 62"/>
+            <p:cNvSpPr txBox="1"/>
+            <p:nvPr/>
+          </p:nvSpPr>
+          <p:spPr>
+            <a:xfrm>
+              <a:off x="10679244" y="5717462"/>
+              <a:ext cx="704300" cy="192756"/>
             </a:xfrm>
             <a:prstGeom prst="rect">
               <a:avLst/>
@@ -10914,7 +10996,7 @@
                 </a:lnSpc>
               </a:pPr>
               <a:r>
-                <a:rPr sz="1166" b="0" lang="ko-KR">
+                <a:rPr sz="1167" b="0" lang="ko-KR">
                   <a:solidFill>
                     <a:srgbClr val="232F3E"/>
                   </a:solidFill>
@@ -10929,7 +11011,7 @@
         </p:sp>
         <p:pic>
           <p:nvPicPr>
-            <p:cNvPr id="62" name="Elastic-Load-Balancing_Gateway-Load-Balancer" descr="Elastic Load Balancing_Gateway Load Balancer"/>
+            <p:cNvPr id="64" name="Elastic-Load-Balancing_Gateway-Load-Balancer" descr="Elastic Load Balancing_Gateway Load Balancer"/>
             <p:cNvPicPr>
               <a:picLocks noChangeAspect="1"/>
             </p:cNvPicPr>
@@ -10949,8 +11031,8 @@
           </p:blipFill>
           <p:spPr>
             <a:xfrm>
-              <a:off x="8509000" y="3539067"/>
-              <a:ext cx="508000" cy="508000"/>
+              <a:off x="8510742" y="3718945"/>
+              <a:ext cx="508367" cy="508367"/>
             </a:xfrm>
             <a:prstGeom prst="rect">
               <a:avLst/>
@@ -10959,14 +11041,14 @@
         </p:pic>
         <p:sp>
           <p:nvSpPr>
-            <p:cNvPr id="63" name="TextBox 62"/>
-            <p:cNvSpPr txBox="1"/>
-            <p:nvPr/>
-          </p:nvSpPr>
-          <p:spPr>
-            <a:xfrm>
-              <a:off x="8485188" y="4096808"/>
-              <a:ext cx="555625" cy="192617"/>
+            <p:cNvPr id="65" name="TextBox 64"/>
+            <p:cNvSpPr txBox="1"/>
+            <p:nvPr/>
+          </p:nvSpPr>
+          <p:spPr>
+            <a:xfrm>
+              <a:off x="8486913" y="4277089"/>
+              <a:ext cx="556026" cy="192756"/>
             </a:xfrm>
             <a:prstGeom prst="rect">
               <a:avLst/>
@@ -10985,7 +11067,7 @@
                 </a:lnSpc>
               </a:pPr>
               <a:r>
-                <a:rPr sz="1166" b="0" lang="ko-KR">
+                <a:rPr sz="1167" b="0" lang="ko-KR">
                   <a:solidFill>
                     <a:srgbClr val="232F3E"/>
                   </a:solidFill>
@@ -11000,14 +11082,14 @@
         </p:sp>
         <p:sp>
           <p:nvSpPr>
-            <p:cNvPr id="64" name="Freeform 63"/>
+            <p:cNvPr id="66" name="Freeform 65"/>
             <p:cNvSpPr/>
             <p:nvPr/>
           </p:nvSpPr>
           <p:spPr>
             <a:xfrm>
-              <a:off x="2857500" y="2798233"/>
-              <a:ext cx="1862667" cy="994834"/>
+              <a:off x="2855162" y="2977577"/>
+              <a:ext cx="1864011" cy="995552"/>
             </a:xfrm>
             <a:custGeom>
               <a:avLst/>
@@ -11016,24 +11098,24 @@
               <a:cxnLst/>
               <a:rect l="l" t="t" r="r" b="b"/>
               <a:pathLst>
-                <a:path w="1862667" h="994834">
+                <a:path w="1864011" h="995552">
                   <a:moveTo>
-                    <a:pt x="0" y="994834"/>
+                    <a:pt x="0" y="995552"/>
                   </a:moveTo>
                   <a:lnTo>
-                    <a:pt x="1651000" y="994834"/>
+                    <a:pt x="1652192" y="995552"/>
                   </a:lnTo>
                   <a:lnTo>
-                    <a:pt x="1651000" y="0"/>
+                    <a:pt x="1652192" y="0"/>
                   </a:lnTo>
                   <a:lnTo>
-                    <a:pt x="1862667" y="0"/>
+                    <a:pt x="1864011" y="0"/>
                   </a:lnTo>
                 </a:path>
               </a:pathLst>
             </a:custGeom>
             <a:noFill/>
-            <a:ln w="15875">
+            <a:ln w="15886">
               <a:solidFill>
                 <a:srgbClr val="232F3E"/>
               </a:solidFill>
@@ -11052,14 +11134,14 @@
         </p:sp>
         <p:sp>
           <p:nvSpPr>
-            <p:cNvPr id="65" name="Freeform 64"/>
+            <p:cNvPr id="67" name="Freeform 66"/>
             <p:cNvSpPr/>
             <p:nvPr/>
           </p:nvSpPr>
           <p:spPr>
             <a:xfrm>
-              <a:off x="2857500" y="3793067"/>
-              <a:ext cx="1862667" cy="1439333"/>
+              <a:off x="2855162" y="3973129"/>
+              <a:ext cx="1864011" cy="1440372"/>
             </a:xfrm>
             <a:custGeom>
               <a:avLst/>
@@ -11068,24 +11150,24 @@
               <a:cxnLst/>
               <a:rect l="l" t="t" r="r" b="b"/>
               <a:pathLst>
-                <a:path w="1862667" h="1439333">
+                <a:path w="1864011" h="1440372">
                   <a:moveTo>
                     <a:pt x="0" y="0"/>
                   </a:moveTo>
                   <a:lnTo>
-                    <a:pt x="1651000" y="0"/>
+                    <a:pt x="1652192" y="0"/>
                   </a:lnTo>
                   <a:lnTo>
-                    <a:pt x="1651000" y="1439333"/>
+                    <a:pt x="1652192" y="1440372"/>
                   </a:lnTo>
                   <a:lnTo>
-                    <a:pt x="1862667" y="1439333"/>
+                    <a:pt x="1864011" y="1440372"/>
                   </a:lnTo>
                 </a:path>
               </a:pathLst>
             </a:custGeom>
             <a:noFill/>
-            <a:ln w="15875">
+            <a:ln w="15886">
               <a:solidFill>
                 <a:srgbClr val="232F3E"/>
               </a:solidFill>
@@ -11104,19 +11186,19 @@
         </p:sp>
         <p:cxnSp>
           <p:nvCxnSpPr>
-            <p:cNvPr id="66" name="Connector 65"/>
+            <p:cNvPr id="68" name="Connector 67"/>
             <p:cNvCxnSpPr/>
             <p:nvPr/>
           </p:nvCxnSpPr>
           <p:spPr>
             <a:xfrm>
-              <a:off x="5312833" y="2798233"/>
-              <a:ext cx="920750" cy="0"/>
+              <a:off x="5312268" y="2977577"/>
+              <a:ext cx="921415" cy="0"/>
             </a:xfrm>
             <a:prstGeom prst="line">
               <a:avLst/>
             </a:prstGeom>
-            <a:ln w="15875">
+            <a:ln w="15886">
               <a:solidFill>
                 <a:srgbClr val="232F3E"/>
               </a:solidFill>
@@ -11128,19 +11210,19 @@
         </p:cxnSp>
         <p:cxnSp>
           <p:nvCxnSpPr>
-            <p:cNvPr id="67" name="Connector 66"/>
+            <p:cNvPr id="69" name="Connector 68"/>
             <p:cNvCxnSpPr/>
             <p:nvPr/>
           </p:nvCxnSpPr>
           <p:spPr>
             <a:xfrm>
-              <a:off x="5312833" y="5232400"/>
-              <a:ext cx="920750" cy="0"/>
+              <a:off x="5312268" y="5413501"/>
+              <a:ext cx="921415" cy="0"/>
             </a:xfrm>
             <a:prstGeom prst="line">
               <a:avLst/>
             </a:prstGeom>
-            <a:ln w="15875">
+            <a:ln w="15886">
               <a:solidFill>
                 <a:srgbClr val="232F3E"/>
               </a:solidFill>
@@ -11152,14 +11234,14 @@
         </p:cxnSp>
         <p:sp>
           <p:nvSpPr>
-            <p:cNvPr id="68" name="Freeform 67"/>
+            <p:cNvPr id="70" name="Freeform 69"/>
             <p:cNvSpPr/>
             <p:nvPr/>
           </p:nvSpPr>
           <p:spPr>
             <a:xfrm>
-              <a:off x="5016500" y="3327400"/>
-              <a:ext cx="3450167" cy="381000"/>
+              <a:off x="5015721" y="3507126"/>
+              <a:ext cx="3452657" cy="381275"/>
             </a:xfrm>
             <a:custGeom>
               <a:avLst/>
@@ -11168,12 +11250,12 @@
               <a:cxnLst/>
               <a:rect l="l" t="t" r="r" b="b"/>
               <a:pathLst>
-                <a:path w="3450167" h="381000">
+                <a:path w="3452657" h="381275">
                   <a:moveTo>
-                    <a:pt x="3450167" y="381000"/>
+                    <a:pt x="3452657" y="381275"/>
                   </a:moveTo>
                   <a:lnTo>
-                    <a:pt x="0" y="381000"/>
+                    <a:pt x="0" y="381275"/>
                   </a:lnTo>
                   <a:lnTo>
                     <a:pt x="0" y="0"/>
@@ -11182,7 +11264,7 @@
               </a:pathLst>
             </a:custGeom>
             <a:noFill/>
-            <a:ln w="15875">
+            <a:ln w="15886">
               <a:solidFill>
                 <a:srgbClr val="232F3E"/>
               </a:solidFill>
@@ -11202,14 +11284,14 @@
         </p:sp>
         <p:sp>
           <p:nvSpPr>
-            <p:cNvPr id="69" name="Freeform 68"/>
+            <p:cNvPr id="71" name="Freeform 70"/>
             <p:cNvSpPr/>
             <p:nvPr/>
           </p:nvSpPr>
           <p:spPr>
             <a:xfrm>
-              <a:off x="5016500" y="3877733"/>
-              <a:ext cx="3450167" cy="1058334"/>
+              <a:off x="5015721" y="4057856"/>
+              <a:ext cx="3452657" cy="1059098"/>
             </a:xfrm>
             <a:custGeom>
               <a:avLst/>
@@ -11218,21 +11300,21 @@
               <a:cxnLst/>
               <a:rect l="l" t="t" r="r" b="b"/>
               <a:pathLst>
-                <a:path w="3450167" h="1058334">
+                <a:path w="3452657" h="1059098">
                   <a:moveTo>
-                    <a:pt x="3450167" y="0"/>
+                    <a:pt x="3452657" y="0"/>
                   </a:moveTo>
                   <a:lnTo>
                     <a:pt x="0" y="0"/>
                   </a:lnTo>
                   <a:lnTo>
-                    <a:pt x="0" y="1058334"/>
+                    <a:pt x="0" y="1059098"/>
                   </a:lnTo>
                 </a:path>
               </a:pathLst>
             </a:custGeom>
             <a:noFill/>
-            <a:ln w="15875">
+            <a:ln w="15886">
               <a:solidFill>
                 <a:srgbClr val="232F3E"/>
               </a:solidFill>
@@ -11252,19 +11334,19 @@
         </p:sp>
         <p:cxnSp>
           <p:nvCxnSpPr>
-            <p:cNvPr id="70" name="Connector 69"/>
+            <p:cNvPr id="72" name="Connector 71"/>
             <p:cNvCxnSpPr/>
             <p:nvPr/>
           </p:nvCxnSpPr>
           <p:spPr>
             <a:xfrm>
-              <a:off x="9059333" y="3793067"/>
-              <a:ext cx="973667" cy="0"/>
+              <a:off x="9061473" y="3973129"/>
+              <a:ext cx="974370" cy="0"/>
             </a:xfrm>
             <a:prstGeom prst="line">
               <a:avLst/>
             </a:prstGeom>
-            <a:ln w="15875">
+            <a:ln w="15886">
               <a:solidFill>
                 <a:srgbClr val="232F3E"/>
               </a:solidFill>
@@ -11277,14 +11359,14 @@
         </p:cxnSp>
         <p:sp>
           <p:nvSpPr>
-            <p:cNvPr id="71" name="TextBox 70"/>
-            <p:cNvSpPr txBox="1"/>
-            <p:nvPr/>
-          </p:nvSpPr>
-          <p:spPr>
-            <a:xfrm>
-              <a:off x="8958792" y="3841750"/>
-              <a:ext cx="1174750" cy="165100"/>
+            <p:cNvPr id="73" name="TextBox 72"/>
+            <p:cNvSpPr txBox="1"/>
+            <p:nvPr/>
+          </p:nvSpPr>
+          <p:spPr>
+            <a:xfrm>
+              <a:off x="8960859" y="4021847"/>
+              <a:ext cx="1175598" cy="165219"/>
             </a:xfrm>
             <a:prstGeom prst="rect">
               <a:avLst/>
@@ -11318,14 +11400,14 @@
         </p:sp>
         <p:sp>
           <p:nvSpPr>
-            <p:cNvPr id="72" name="Oval 71"/>
+            <p:cNvPr id="74" name="Oval 73"/>
             <p:cNvSpPr/>
             <p:nvPr/>
           </p:nvSpPr>
           <p:spPr>
             <a:xfrm>
-              <a:off x="3577167" y="3539067"/>
-              <a:ext cx="211667" cy="211667"/>
+              <a:off x="3575348" y="3718945"/>
+              <a:ext cx="211819" cy="211819"/>
             </a:xfrm>
             <a:prstGeom prst="ellipse">
               <a:avLst/>
@@ -11347,14 +11429,14 @@
         </p:sp>
         <p:sp>
           <p:nvSpPr>
-            <p:cNvPr id="73" name="TextBox 72"/>
-            <p:cNvSpPr txBox="1"/>
-            <p:nvPr/>
-          </p:nvSpPr>
-          <p:spPr>
-            <a:xfrm>
-              <a:off x="3575844" y="3566583"/>
-              <a:ext cx="214312" cy="165100"/>
+            <p:cNvPr id="75" name="TextBox 74"/>
+            <p:cNvSpPr txBox="1"/>
+            <p:nvPr/>
+          </p:nvSpPr>
+          <p:spPr>
+            <a:xfrm>
+              <a:off x="3574024" y="3746482"/>
+              <a:ext cx="214467" cy="165219"/>
             </a:xfrm>
             <a:prstGeom prst="rect">
               <a:avLst/>
@@ -11388,14 +11470,14 @@
         </p:sp>
         <p:sp>
           <p:nvSpPr>
-            <p:cNvPr id="74" name="Oval 73"/>
+            <p:cNvPr id="76" name="Oval 75"/>
             <p:cNvSpPr/>
             <p:nvPr/>
           </p:nvSpPr>
           <p:spPr>
             <a:xfrm>
-              <a:off x="7725833" y="3454400"/>
-              <a:ext cx="211667" cy="211667"/>
+              <a:off x="7727010" y="3634217"/>
+              <a:ext cx="211819" cy="211819"/>
             </a:xfrm>
             <a:prstGeom prst="ellipse">
               <a:avLst/>
@@ -11417,14 +11499,14 @@
         </p:sp>
         <p:sp>
           <p:nvSpPr>
-            <p:cNvPr id="75" name="TextBox 74"/>
-            <p:cNvSpPr txBox="1"/>
-            <p:nvPr/>
-          </p:nvSpPr>
-          <p:spPr>
-            <a:xfrm>
-              <a:off x="7724510" y="3481917"/>
-              <a:ext cx="214312" cy="165100"/>
+            <p:cNvPr id="77" name="TextBox 76"/>
+            <p:cNvSpPr txBox="1"/>
+            <p:nvPr/>
+          </p:nvSpPr>
+          <p:spPr>
+            <a:xfrm>
+              <a:off x="7725686" y="3661754"/>
+              <a:ext cx="214467" cy="165219"/>
             </a:xfrm>
             <a:prstGeom prst="rect">
               <a:avLst/>
@@ -11458,14 +11540,14 @@
         </p:sp>
         <p:sp>
           <p:nvSpPr>
-            <p:cNvPr id="76" name="Oval 75"/>
+            <p:cNvPr id="78" name="Oval 77"/>
             <p:cNvSpPr/>
             <p:nvPr/>
           </p:nvSpPr>
           <p:spPr>
             <a:xfrm>
-              <a:off x="9440333" y="3539067"/>
-              <a:ext cx="211667" cy="211667"/>
+              <a:off x="9442748" y="3718945"/>
+              <a:ext cx="211819" cy="211819"/>
             </a:xfrm>
             <a:prstGeom prst="ellipse">
               <a:avLst/>
@@ -11487,14 +11569,14 @@
         </p:sp>
         <p:sp>
           <p:nvSpPr>
-            <p:cNvPr id="77" name="TextBox 76"/>
-            <p:cNvSpPr txBox="1"/>
-            <p:nvPr/>
-          </p:nvSpPr>
-          <p:spPr>
-            <a:xfrm>
-              <a:off x="9439010" y="3566583"/>
-              <a:ext cx="214312" cy="165100"/>
+            <p:cNvPr id="79" name="TextBox 78"/>
+            <p:cNvSpPr txBox="1"/>
+            <p:nvPr/>
+          </p:nvSpPr>
+          <p:spPr>
+            <a:xfrm>
+              <a:off x="9441424" y="3746482"/>
+              <a:ext cx="214467" cy="165219"/>
             </a:xfrm>
             <a:prstGeom prst="rect">
               <a:avLst/>
@@ -11528,14 +11610,14 @@
         </p:sp>
         <p:sp>
           <p:nvSpPr>
-            <p:cNvPr id="78" name="Oval 77"/>
+            <p:cNvPr id="80" name="Oval 79"/>
             <p:cNvSpPr/>
             <p:nvPr/>
           </p:nvSpPr>
           <p:spPr>
             <a:xfrm>
-              <a:off x="5884333" y="2544233"/>
-              <a:ext cx="211667" cy="211667"/>
+              <a:off x="5884181" y="2723394"/>
+              <a:ext cx="211819" cy="211819"/>
             </a:xfrm>
             <a:prstGeom prst="ellipse">
               <a:avLst/>
@@ -11557,14 +11639,14 @@
         </p:sp>
         <p:sp>
           <p:nvSpPr>
-            <p:cNvPr id="79" name="TextBox 78"/>
-            <p:cNvSpPr txBox="1"/>
-            <p:nvPr/>
-          </p:nvSpPr>
-          <p:spPr>
-            <a:xfrm>
-              <a:off x="5883010" y="2571750"/>
-              <a:ext cx="214312" cy="165100"/>
+            <p:cNvPr id="81" name="TextBox 80"/>
+            <p:cNvSpPr txBox="1"/>
+            <p:nvPr/>
+          </p:nvSpPr>
+          <p:spPr>
+            <a:xfrm>
+              <a:off x="5882857" y="2750930"/>
+              <a:ext cx="214467" cy="165219"/>
             </a:xfrm>
             <a:prstGeom prst="rect">
               <a:avLst/>
@@ -11598,14 +11680,14 @@
         </p:sp>
         <p:sp>
           <p:nvSpPr>
-            <p:cNvPr id="80" name="Oval 79"/>
+            <p:cNvPr id="82" name="Oval 81"/>
             <p:cNvSpPr/>
             <p:nvPr/>
           </p:nvSpPr>
           <p:spPr>
             <a:xfrm>
-              <a:off x="5884333" y="4978400"/>
-              <a:ext cx="211667" cy="211667"/>
+              <a:off x="5884181" y="5159318"/>
+              <a:ext cx="211819" cy="211819"/>
             </a:xfrm>
             <a:prstGeom prst="ellipse">
               <a:avLst/>
@@ -11627,14 +11709,14 @@
         </p:sp>
         <p:sp>
           <p:nvSpPr>
-            <p:cNvPr id="81" name="TextBox 80"/>
-            <p:cNvSpPr txBox="1"/>
-            <p:nvPr/>
-          </p:nvSpPr>
-          <p:spPr>
-            <a:xfrm>
-              <a:off x="5883010" y="5005917"/>
-              <a:ext cx="214312" cy="165100"/>
+            <p:cNvPr id="83" name="TextBox 82"/>
+            <p:cNvSpPr txBox="1"/>
+            <p:nvPr/>
+          </p:nvSpPr>
+          <p:spPr>
+            <a:xfrm>
+              <a:off x="5882857" y="5186854"/>
+              <a:ext cx="214467" cy="165219"/>
             </a:xfrm>
             <a:prstGeom prst="rect">
               <a:avLst/>
@@ -11668,19 +11750,19 @@
         </p:sp>
         <p:cxnSp>
           <p:nvCxnSpPr>
-            <p:cNvPr id="82" name="Connector 81"/>
+            <p:cNvPr id="84" name="Connector 83"/>
             <p:cNvCxnSpPr/>
             <p:nvPr/>
           </p:nvCxnSpPr>
           <p:spPr>
             <a:xfrm>
-              <a:off x="867833" y="3793067"/>
-              <a:ext cx="1397000" cy="0"/>
+              <a:off x="864058" y="3973129"/>
+              <a:ext cx="1398009" cy="0"/>
             </a:xfrm>
             <a:prstGeom prst="line">
               <a:avLst/>
             </a:prstGeom>
-            <a:ln w="15875">
+            <a:ln w="15886">
               <a:solidFill>
                 <a:srgbClr val="232F3E"/>
               </a:solidFill>
@@ -11692,14 +11774,14 @@
         </p:cxnSp>
         <p:sp>
           <p:nvSpPr>
-            <p:cNvPr id="83" name="TextBox 82"/>
-            <p:cNvSpPr txBox="1"/>
-            <p:nvPr/>
-          </p:nvSpPr>
-          <p:spPr>
-            <a:xfrm>
-              <a:off x="769937" y="3577167"/>
-              <a:ext cx="1000125" cy="165100"/>
+            <p:cNvPr id="85" name="TextBox 84"/>
+            <p:cNvSpPr txBox="1"/>
+            <p:nvPr/>
+          </p:nvSpPr>
+          <p:spPr>
+            <a:xfrm>
+              <a:off x="766092" y="3757073"/>
+              <a:ext cx="1000847" cy="165219"/>
             </a:xfrm>
             <a:prstGeom prst="rect">
               <a:avLst/>
@@ -11733,14 +11815,14 @@
         </p:sp>
         <p:sp>
           <p:nvSpPr>
-            <p:cNvPr id="84" name="Oval 83"/>
+            <p:cNvPr id="86" name="Oval 85"/>
             <p:cNvSpPr/>
             <p:nvPr/>
           </p:nvSpPr>
           <p:spPr>
             <a:xfrm>
-              <a:off x="1714500" y="6258983"/>
-              <a:ext cx="211667" cy="211667"/>
+              <a:off x="1711336" y="6398462"/>
+              <a:ext cx="211819" cy="211819"/>
             </a:xfrm>
             <a:prstGeom prst="ellipse">
               <a:avLst/>
@@ -11762,14 +11844,14 @@
         </p:sp>
         <p:sp>
           <p:nvSpPr>
-            <p:cNvPr id="85" name="TextBox 84"/>
-            <p:cNvSpPr txBox="1"/>
-            <p:nvPr/>
-          </p:nvSpPr>
-          <p:spPr>
-            <a:xfrm>
-              <a:off x="1713177" y="6286500"/>
-              <a:ext cx="214312" cy="165100"/>
+            <p:cNvPr id="87" name="TextBox 86"/>
+            <p:cNvSpPr txBox="1"/>
+            <p:nvPr/>
+          </p:nvSpPr>
+          <p:spPr>
+            <a:xfrm>
+              <a:off x="1710013" y="6425998"/>
+              <a:ext cx="214467" cy="165219"/>
             </a:xfrm>
             <a:prstGeom prst="rect">
               <a:avLst/>
@@ -11803,14 +11885,14 @@
         </p:sp>
         <p:sp>
           <p:nvSpPr>
-            <p:cNvPr id="86" name="TextBox 85"/>
-            <p:cNvSpPr txBox="1"/>
-            <p:nvPr/>
-          </p:nvSpPr>
-          <p:spPr>
-            <a:xfrm>
-              <a:off x="2010833" y="6286500"/>
-              <a:ext cx="2547938" cy="165100"/>
+            <p:cNvPr id="88" name="TextBox 87"/>
+            <p:cNvSpPr txBox="1"/>
+            <p:nvPr/>
+          </p:nvSpPr>
+          <p:spPr>
+            <a:xfrm>
+              <a:off x="2007884" y="6425998"/>
+              <a:ext cx="2549777" cy="165219"/>
             </a:xfrm>
             <a:prstGeom prst="rect">
               <a:avLst/>
@@ -11844,14 +11926,14 @@
         </p:sp>
         <p:sp>
           <p:nvSpPr>
-            <p:cNvPr id="87" name="Oval 86"/>
+            <p:cNvPr id="89" name="Oval 88"/>
             <p:cNvSpPr/>
             <p:nvPr/>
           </p:nvSpPr>
           <p:spPr>
             <a:xfrm>
-              <a:off x="4068233" y="6258983"/>
-              <a:ext cx="211667" cy="211667"/>
+              <a:off x="4066769" y="6398462"/>
+              <a:ext cx="211819" cy="211819"/>
             </a:xfrm>
             <a:prstGeom prst="ellipse">
               <a:avLst/>
@@ -11873,14 +11955,14 @@
         </p:sp>
         <p:sp>
           <p:nvSpPr>
-            <p:cNvPr id="88" name="TextBox 87"/>
-            <p:cNvSpPr txBox="1"/>
-            <p:nvPr/>
-          </p:nvSpPr>
-          <p:spPr>
-            <a:xfrm>
-              <a:off x="4066910" y="6286500"/>
-              <a:ext cx="214312" cy="165100"/>
+            <p:cNvPr id="90" name="TextBox 89"/>
+            <p:cNvSpPr txBox="1"/>
+            <p:nvPr/>
+          </p:nvSpPr>
+          <p:spPr>
+            <a:xfrm>
+              <a:off x="4065445" y="6425998"/>
+              <a:ext cx="214467" cy="165219"/>
             </a:xfrm>
             <a:prstGeom prst="rect">
               <a:avLst/>
@@ -11914,14 +11996,14 @@
         </p:sp>
         <p:sp>
           <p:nvSpPr>
-            <p:cNvPr id="89" name="TextBox 88"/>
-            <p:cNvSpPr txBox="1"/>
-            <p:nvPr/>
-          </p:nvSpPr>
-          <p:spPr>
-            <a:xfrm>
-              <a:off x="4364567" y="6286500"/>
-              <a:ext cx="1174750" cy="165100"/>
+            <p:cNvPr id="91" name="TextBox 90"/>
+            <p:cNvSpPr txBox="1"/>
+            <p:nvPr/>
+          </p:nvSpPr>
+          <p:spPr>
+            <a:xfrm>
+              <a:off x="4363317" y="6425998"/>
+              <a:ext cx="1175598" cy="165219"/>
             </a:xfrm>
             <a:prstGeom prst="rect">
               <a:avLst/>
@@ -11955,14 +12037,14 @@
         </p:sp>
         <p:sp>
           <p:nvSpPr>
-            <p:cNvPr id="90" name="Oval 89"/>
+            <p:cNvPr id="92" name="Oval 91"/>
             <p:cNvSpPr/>
             <p:nvPr/>
           </p:nvSpPr>
           <p:spPr>
             <a:xfrm>
-              <a:off x="5560483" y="6258983"/>
-              <a:ext cx="211667" cy="211667"/>
+              <a:off x="5560097" y="6398462"/>
+              <a:ext cx="211819" cy="211819"/>
             </a:xfrm>
             <a:prstGeom prst="ellipse">
               <a:avLst/>
@@ -11984,14 +12066,14 @@
         </p:sp>
         <p:sp>
           <p:nvSpPr>
-            <p:cNvPr id="91" name="TextBox 90"/>
-            <p:cNvSpPr txBox="1"/>
-            <p:nvPr/>
-          </p:nvSpPr>
-          <p:spPr>
-            <a:xfrm>
-              <a:off x="5559160" y="6286500"/>
-              <a:ext cx="214312" cy="165100"/>
+            <p:cNvPr id="93" name="TextBox 92"/>
+            <p:cNvSpPr txBox="1"/>
+            <p:nvPr/>
+          </p:nvSpPr>
+          <p:spPr>
+            <a:xfrm>
+              <a:off x="5558773" y="6425998"/>
+              <a:ext cx="214467" cy="165219"/>
             </a:xfrm>
             <a:prstGeom prst="rect">
               <a:avLst/>
@@ -12025,14 +12107,14 @@
         </p:sp>
         <p:sp>
           <p:nvSpPr>
-            <p:cNvPr id="92" name="TextBox 91"/>
-            <p:cNvSpPr txBox="1"/>
-            <p:nvPr/>
-          </p:nvSpPr>
-          <p:spPr>
-            <a:xfrm>
-              <a:off x="5856817" y="6286500"/>
-              <a:ext cx="3738562" cy="165100"/>
+            <p:cNvPr id="94" name="TextBox 93"/>
+            <p:cNvSpPr txBox="1"/>
+            <p:nvPr/>
+          </p:nvSpPr>
+          <p:spPr>
+            <a:xfrm>
+              <a:off x="5856644" y="6425998"/>
+              <a:ext cx="3741262" cy="165219"/>
             </a:xfrm>
             <a:prstGeom prst="rect">
               <a:avLst/>
@@ -12066,14 +12148,14 @@
         </p:sp>
         <p:sp>
           <p:nvSpPr>
-            <p:cNvPr id="93" name="Oval 92"/>
+            <p:cNvPr id="95" name="Oval 94"/>
             <p:cNvSpPr/>
             <p:nvPr/>
           </p:nvSpPr>
           <p:spPr>
             <a:xfrm>
-              <a:off x="8923867" y="6258983"/>
-              <a:ext cx="211667" cy="211667"/>
+              <a:off x="8925908" y="6398462"/>
+              <a:ext cx="211819" cy="211819"/>
             </a:xfrm>
             <a:prstGeom prst="ellipse">
               <a:avLst/>
@@ -12095,14 +12177,14 @@
         </p:sp>
         <p:sp>
           <p:nvSpPr>
-            <p:cNvPr id="94" name="TextBox 93"/>
-            <p:cNvSpPr txBox="1"/>
-            <p:nvPr/>
-          </p:nvSpPr>
-          <p:spPr>
-            <a:xfrm>
-              <a:off x="8922544" y="6286500"/>
-              <a:ext cx="214312" cy="165100"/>
+            <p:cNvPr id="96" name="TextBox 95"/>
+            <p:cNvSpPr txBox="1"/>
+            <p:nvPr/>
+          </p:nvSpPr>
+          <p:spPr>
+            <a:xfrm>
+              <a:off x="8924585" y="6425998"/>
+              <a:ext cx="214467" cy="165219"/>
             </a:xfrm>
             <a:prstGeom prst="rect">
               <a:avLst/>
@@ -12136,14 +12218,14 @@
         </p:sp>
         <p:sp>
           <p:nvSpPr>
-            <p:cNvPr id="95" name="TextBox 94"/>
-            <p:cNvSpPr txBox="1"/>
-            <p:nvPr/>
-          </p:nvSpPr>
-          <p:spPr>
-            <a:xfrm>
-              <a:off x="9220200" y="6286500"/>
-              <a:ext cx="1087438" cy="165100"/>
+            <p:cNvPr id="97" name="TextBox 96"/>
+            <p:cNvSpPr txBox="1"/>
+            <p:nvPr/>
+          </p:nvSpPr>
+          <p:spPr>
+            <a:xfrm>
+              <a:off x="9222456" y="6425998"/>
+              <a:ext cx="1088223" cy="165219"/>
             </a:xfrm>
             <a:prstGeom prst="rect">
               <a:avLst/>
@@ -12171,47 +12253,6 @@
                   <a:cs typeface="Malgun Gothic"/>
                 </a:rPr>
                 <a:t>GWLBe → EC2</a:t>
-              </a:r>
-            </a:p>
-          </p:txBody>
-        </p:sp>
-        <p:sp>
-          <p:nvSpPr>
-            <p:cNvPr id="96" name="TextBox 95"/>
-            <p:cNvSpPr txBox="1"/>
-            <p:nvPr/>
-          </p:nvSpPr>
-          <p:spPr>
-            <a:xfrm>
-              <a:off x="1714500" y="6477000"/>
-              <a:ext cx="11977688" cy="165100"/>
-            </a:xfrm>
-            <a:prstGeom prst="rect">
-              <a:avLst/>
-            </a:prstGeom>
-            <a:noFill/>
-          </p:spPr>
-          <p:txBody>
-            <a:bodyPr wrap="none" lIns="0" rIns="0" tIns="0" bIns="0" anchor="t">
-              <a:noAutofit/>
-            </a:bodyPr>
-            <a:lstStyle/>
-            <a:p>
-              <a:pPr algn="l">
-                <a:lnSpc>
-                  <a:spcPct val="100000"/>
-                </a:lnSpc>
-              </a:pPr>
-              <a:r>
-                <a:rPr sz="1000" b="0" lang="ko-KR">
-                  <a:solidFill>
-                    <a:srgbClr val="545B64"/>
-                  </a:solidFill>
-                  <a:latin typeface="Arial"/>
-                  <a:ea typeface="Malgun Gothic"/>
-                  <a:cs typeface="Malgun Gothic"/>
-                </a:rPr>
-                <a:t>라우팅 (같은 AZ): IGW 엣지 RT 10.0.1.0/24 (AZ1 App) · 10.0.2.0/24 (AZ2 App) → GWLBe · App RT 0.0.0.0/0 → GWLBe · GWLBe RT 0.0.0.0/0 → IGW</a:t>
               </a:r>
             </a:p>
           </p:txBody>
@@ -14470,9 +14511,9 @@
         <p:grpSpPr>
           <a:xfrm>
             <a:off x="316177" y="999067"/>
-            <a:ext cx="14082448" cy="5643033"/>
+            <a:ext cx="11785864" cy="5619750"/>
             <a:chOff x="316177" y="999067"/>
-            <a:chExt cx="14082448" cy="5643033"/>
+            <a:chExt cx="11785864" cy="5619750"/>
           </a:xfrm>
         </p:grpSpPr>
         <p:sp>
@@ -14484,7 +14525,7 @@
           <p:spPr>
             <a:xfrm>
               <a:off x="317500" y="999067"/>
-              <a:ext cx="10752667" cy="5249333"/>
+              <a:ext cx="10752667" cy="5376333"/>
             </a:xfrm>
             <a:prstGeom prst="rect">
               <a:avLst/>
@@ -14586,7 +14627,7 @@
           <p:spPr>
             <a:xfrm>
               <a:off x="529167" y="1358900"/>
-              <a:ext cx="10329333" cy="4804833"/>
+              <a:ext cx="10329333" cy="4931833"/>
             </a:xfrm>
             <a:prstGeom prst="rect">
               <a:avLst/>
@@ -14690,7 +14731,7 @@
           <p:spPr>
             <a:xfrm>
               <a:off x="698500" y="1993900"/>
-              <a:ext cx="2116667" cy="1524000"/>
+              <a:ext cx="2116667" cy="1693333"/>
             </a:xfrm>
             <a:prstGeom prst="rect">
               <a:avLst/>
@@ -14751,7 +14792,7 @@
           <p:spPr>
             <a:xfrm>
               <a:off x="1037167" y="2043642"/>
-              <a:ext cx="1879865" cy="192617"/>
+              <a:ext cx="657490" cy="192617"/>
             </a:xfrm>
             <a:prstGeom prst="rect">
               <a:avLst/>
@@ -14778,20 +14819,61 @@
                   <a:ea typeface="Malgun Gothic"/>
                   <a:cs typeface="Malgun Gothic"/>
                 </a:rPr>
-                <a:t>VPC A 10.1.0.0/16</a:t>
-              </a:r>
-            </a:p>
-          </p:txBody>
-        </p:sp>
-        <p:sp>
-          <p:nvSpPr>
-            <p:cNvPr id="13" name="Rectangle 12"/>
+                <a:t>VPC A</a:t>
+              </a:r>
+            </a:p>
+          </p:txBody>
+        </p:sp>
+        <p:sp>
+          <p:nvSpPr>
+            <p:cNvPr id="13" name="TextBox 12"/>
+            <p:cNvSpPr txBox="1"/>
+            <p:nvPr/>
+          </p:nvSpPr>
+          <p:spPr>
+            <a:xfrm>
+              <a:off x="1037167" y="2233083"/>
+              <a:ext cx="1087438" cy="165100"/>
+            </a:xfrm>
+            <a:prstGeom prst="rect">
+              <a:avLst/>
+            </a:prstGeom>
+            <a:noFill/>
+          </p:spPr>
+          <p:txBody>
+            <a:bodyPr wrap="none" lIns="0" rIns="0" tIns="0" bIns="0" anchor="t">
+              <a:noAutofit/>
+            </a:bodyPr>
+            <a:lstStyle/>
+            <a:p>
+              <a:pPr algn="l">
+                <a:lnSpc>
+                  <a:spcPct val="100000"/>
+                </a:lnSpc>
+              </a:pPr>
+              <a:r>
+                <a:rPr sz="1000" b="0" lang="ko-KR">
+                  <a:solidFill>
+                    <a:srgbClr val="232F3E"/>
+                  </a:solidFill>
+                  <a:latin typeface="Arial"/>
+                  <a:ea typeface="Malgun Gothic"/>
+                  <a:cs typeface="Malgun Gothic"/>
+                </a:rPr>
+                <a:t>10.1.0.0/16</a:t>
+              </a:r>
+            </a:p>
+          </p:txBody>
+        </p:sp>
+        <p:sp>
+          <p:nvSpPr>
+            <p:cNvPr id="14" name="Rectangle 13"/>
             <p:cNvSpPr/>
             <p:nvPr/>
           </p:nvSpPr>
           <p:spPr>
             <a:xfrm>
-              <a:off x="825500" y="2311400"/>
+              <a:off x="825500" y="2480733"/>
               <a:ext cx="1862667" cy="1121833"/>
             </a:xfrm>
             <a:prstGeom prst="rect">
@@ -14816,7 +14898,7 @@
         </p:sp>
         <p:pic>
           <p:nvPicPr>
-            <p:cNvPr id="14" name="Private-subnet_32" descr="Private subnet_32"/>
+            <p:cNvPr id="15" name="Private-subnet_32" descr="Private subnet_32"/>
             <p:cNvPicPr>
               <a:picLocks noChangeAspect="1"/>
             </p:cNvPicPr>
@@ -14836,7 +14918,7 @@
           </p:blipFill>
           <p:spPr>
             <a:xfrm>
-              <a:off x="825500" y="2311400"/>
+              <a:off x="825500" y="2480733"/>
               <a:ext cx="254000" cy="254000"/>
             </a:xfrm>
             <a:prstGeom prst="rect">
@@ -14846,13 +14928,13 @@
         </p:pic>
         <p:sp>
           <p:nvSpPr>
-            <p:cNvPr id="15" name="TextBox 14"/>
-            <p:cNvSpPr txBox="1"/>
-            <p:nvPr/>
-          </p:nvSpPr>
-          <p:spPr>
-            <a:xfrm>
-              <a:off x="1164167" y="2361142"/>
+            <p:cNvPr id="16" name="TextBox 15"/>
+            <p:cNvSpPr txBox="1"/>
+            <p:nvPr/>
+          </p:nvSpPr>
+          <p:spPr>
+            <a:xfrm>
+              <a:off x="1164167" y="2530475"/>
               <a:ext cx="1166813" cy="192617"/>
             </a:xfrm>
             <a:prstGeom prst="rect">
@@ -14887,7 +14969,7 @@
         </p:sp>
         <p:pic>
           <p:nvPicPr>
-            <p:cNvPr id="16" name="Amazon-EC2" descr="Amazon EC2"/>
+            <p:cNvPr id="17" name="Amazon-EC2" descr="Amazon EC2"/>
             <p:cNvPicPr>
               <a:picLocks noChangeAspect="1"/>
             </p:cNvPicPr>
@@ -14907,7 +14989,7 @@
           </p:blipFill>
           <p:spPr>
             <a:xfrm>
-              <a:off x="1502833" y="2607733"/>
+              <a:off x="1502833" y="2777067"/>
               <a:ext cx="508000" cy="508000"/>
             </a:xfrm>
             <a:prstGeom prst="rect">
@@ -14917,13 +14999,13 @@
         </p:pic>
         <p:sp>
           <p:nvSpPr>
-            <p:cNvPr id="17" name="TextBox 16"/>
-            <p:cNvSpPr txBox="1"/>
-            <p:nvPr/>
-          </p:nvSpPr>
-          <p:spPr>
-            <a:xfrm>
-              <a:off x="1529953" y="3165475"/>
+            <p:cNvPr id="18" name="TextBox 17"/>
+            <p:cNvSpPr txBox="1"/>
+            <p:nvPr/>
+          </p:nvSpPr>
+          <p:spPr>
+            <a:xfrm>
+              <a:off x="1529953" y="3334808"/>
               <a:ext cx="453760" cy="192617"/>
             </a:xfrm>
             <a:prstGeom prst="rect">
@@ -14958,14 +15040,14 @@
         </p:sp>
         <p:sp>
           <p:nvSpPr>
-            <p:cNvPr id="18" name="Rectangle 17"/>
+            <p:cNvPr id="19" name="Rectangle 18"/>
             <p:cNvSpPr/>
             <p:nvPr/>
           </p:nvSpPr>
           <p:spPr>
             <a:xfrm>
               <a:off x="698500" y="4428067"/>
-              <a:ext cx="2116667" cy="1524000"/>
+              <a:ext cx="2116667" cy="1693333"/>
             </a:xfrm>
             <a:prstGeom prst="rect">
               <a:avLst/>
@@ -14989,7 +15071,7 @@
         </p:sp>
         <p:pic>
           <p:nvPicPr>
-            <p:cNvPr id="19" name="Virtual-private-cloud-VPC_32" descr="Virtual private cloud VPC_32"/>
+            <p:cNvPr id="20" name="Virtual-private-cloud-VPC_32" descr="Virtual private cloud VPC_32"/>
             <p:cNvPicPr>
               <a:picLocks noChangeAspect="1"/>
             </p:cNvPicPr>
@@ -15019,14 +15101,14 @@
         </p:pic>
         <p:sp>
           <p:nvSpPr>
-            <p:cNvPr id="20" name="TextBox 19"/>
+            <p:cNvPr id="21" name="TextBox 20"/>
             <p:cNvSpPr txBox="1"/>
             <p:nvPr/>
           </p:nvSpPr>
           <p:spPr>
             <a:xfrm>
               <a:off x="1037167" y="4477808"/>
-              <a:ext cx="1879865" cy="192617"/>
+              <a:ext cx="657490" cy="192617"/>
             </a:xfrm>
             <a:prstGeom prst="rect">
               <a:avLst/>
@@ -15053,20 +15135,61 @@
                   <a:ea typeface="Malgun Gothic"/>
                   <a:cs typeface="Malgun Gothic"/>
                 </a:rPr>
-                <a:t>VPC B 10.2.0.0/16</a:t>
-              </a:r>
-            </a:p>
-          </p:txBody>
-        </p:sp>
-        <p:sp>
-          <p:nvSpPr>
-            <p:cNvPr id="21" name="Rectangle 20"/>
+                <a:t>VPC B</a:t>
+              </a:r>
+            </a:p>
+          </p:txBody>
+        </p:sp>
+        <p:sp>
+          <p:nvSpPr>
+            <p:cNvPr id="22" name="TextBox 21"/>
+            <p:cNvSpPr txBox="1"/>
+            <p:nvPr/>
+          </p:nvSpPr>
+          <p:spPr>
+            <a:xfrm>
+              <a:off x="1037167" y="4667250"/>
+              <a:ext cx="1087438" cy="165100"/>
+            </a:xfrm>
+            <a:prstGeom prst="rect">
+              <a:avLst/>
+            </a:prstGeom>
+            <a:noFill/>
+          </p:spPr>
+          <p:txBody>
+            <a:bodyPr wrap="none" lIns="0" rIns="0" tIns="0" bIns="0" anchor="t">
+              <a:noAutofit/>
+            </a:bodyPr>
+            <a:lstStyle/>
+            <a:p>
+              <a:pPr algn="l">
+                <a:lnSpc>
+                  <a:spcPct val="100000"/>
+                </a:lnSpc>
+              </a:pPr>
+              <a:r>
+                <a:rPr sz="1000" b="0" lang="ko-KR">
+                  <a:solidFill>
+                    <a:srgbClr val="232F3E"/>
+                  </a:solidFill>
+                  <a:latin typeface="Arial"/>
+                  <a:ea typeface="Malgun Gothic"/>
+                  <a:cs typeface="Malgun Gothic"/>
+                </a:rPr>
+                <a:t>10.2.0.0/16</a:t>
+              </a:r>
+            </a:p>
+          </p:txBody>
+        </p:sp>
+        <p:sp>
+          <p:nvSpPr>
+            <p:cNvPr id="23" name="Rectangle 22"/>
             <p:cNvSpPr/>
             <p:nvPr/>
           </p:nvSpPr>
           <p:spPr>
             <a:xfrm>
-              <a:off x="825500" y="4745567"/>
+              <a:off x="825500" y="4914900"/>
               <a:ext cx="1862667" cy="1121833"/>
             </a:xfrm>
             <a:prstGeom prst="rect">
@@ -15091,7 +15214,7 @@
         </p:sp>
         <p:pic>
           <p:nvPicPr>
-            <p:cNvPr id="22" name="Private-subnet_32" descr="Private subnet_32"/>
+            <p:cNvPr id="24" name="Private-subnet_32" descr="Private subnet_32"/>
             <p:cNvPicPr>
               <a:picLocks noChangeAspect="1"/>
             </p:cNvPicPr>
@@ -15111,7 +15234,7 @@
           </p:blipFill>
           <p:spPr>
             <a:xfrm>
-              <a:off x="825500" y="4745567"/>
+              <a:off x="825500" y="4914900"/>
               <a:ext cx="254000" cy="254000"/>
             </a:xfrm>
             <a:prstGeom prst="rect">
@@ -15121,13 +15244,13 @@
         </p:pic>
         <p:sp>
           <p:nvSpPr>
-            <p:cNvPr id="23" name="TextBox 22"/>
-            <p:cNvSpPr txBox="1"/>
-            <p:nvPr/>
-          </p:nvSpPr>
-          <p:spPr>
-            <a:xfrm>
-              <a:off x="1164167" y="4795308"/>
+            <p:cNvPr id="25" name="TextBox 24"/>
+            <p:cNvSpPr txBox="1"/>
+            <p:nvPr/>
+          </p:nvSpPr>
+          <p:spPr>
+            <a:xfrm>
+              <a:off x="1164167" y="4964642"/>
               <a:ext cx="1166813" cy="192617"/>
             </a:xfrm>
             <a:prstGeom prst="rect">
@@ -15162,7 +15285,7 @@
         </p:sp>
         <p:pic>
           <p:nvPicPr>
-            <p:cNvPr id="24" name="Amazon-EC2" descr="Amazon EC2"/>
+            <p:cNvPr id="26" name="Amazon-EC2" descr="Amazon EC2"/>
             <p:cNvPicPr>
               <a:picLocks noChangeAspect="1"/>
             </p:cNvPicPr>
@@ -15182,7 +15305,7 @@
           </p:blipFill>
           <p:spPr>
             <a:xfrm>
-              <a:off x="1502833" y="5041900"/>
+              <a:off x="1502833" y="5211233"/>
               <a:ext cx="508000" cy="508000"/>
             </a:xfrm>
             <a:prstGeom prst="rect">
@@ -15192,13 +15315,13 @@
         </p:pic>
         <p:sp>
           <p:nvSpPr>
-            <p:cNvPr id="25" name="TextBox 24"/>
-            <p:cNvSpPr txBox="1"/>
-            <p:nvPr/>
-          </p:nvSpPr>
-          <p:spPr>
-            <a:xfrm>
-              <a:off x="1529953" y="5599642"/>
+            <p:cNvPr id="27" name="TextBox 26"/>
+            <p:cNvSpPr txBox="1"/>
+            <p:nvPr/>
+          </p:nvSpPr>
+          <p:spPr>
+            <a:xfrm>
+              <a:off x="1529953" y="5768975"/>
               <a:ext cx="453760" cy="192617"/>
             </a:xfrm>
             <a:prstGeom prst="rect">
@@ -15233,7 +15356,7 @@
         </p:sp>
         <p:pic>
           <p:nvPicPr>
-            <p:cNvPr id="26" name="AWS-Transit-Gateway" descr="AWS Transit Gateway"/>
+            <p:cNvPr id="28" name="AWS-Transit-Gateway" descr="AWS Transit Gateway"/>
             <p:cNvPicPr>
               <a:picLocks noChangeAspect="1"/>
             </p:cNvPicPr>
@@ -15253,7 +15376,7 @@
           </p:blipFill>
           <p:spPr>
             <a:xfrm>
-              <a:off x="3429000" y="3602567"/>
+              <a:off x="3429000" y="3771900"/>
               <a:ext cx="508000" cy="508000"/>
             </a:xfrm>
             <a:prstGeom prst="rect">
@@ -15263,13 +15386,13 @@
         </p:pic>
         <p:sp>
           <p:nvSpPr>
-            <p:cNvPr id="27" name="TextBox 26"/>
-            <p:cNvSpPr txBox="1"/>
-            <p:nvPr/>
-          </p:nvSpPr>
-          <p:spPr>
-            <a:xfrm>
-              <a:off x="3456120" y="4160308"/>
+            <p:cNvPr id="29" name="TextBox 28"/>
+            <p:cNvSpPr txBox="1"/>
+            <p:nvPr/>
+          </p:nvSpPr>
+          <p:spPr>
+            <a:xfrm>
+              <a:off x="3456120" y="4329642"/>
               <a:ext cx="453760" cy="192617"/>
             </a:xfrm>
             <a:prstGeom prst="rect">
@@ -15304,7 +15427,7 @@
         </p:sp>
         <p:pic>
           <p:nvPicPr>
-            <p:cNvPr id="28" name="Amazon-Route-53_Route-Table" descr="Amazon Route 53_Route Table"/>
+            <p:cNvPr id="30" name="Amazon-Route-53_Route-Table" descr="Amazon Route 53_Route Table"/>
             <p:cNvPicPr>
               <a:picLocks noChangeAspect="1"/>
             </p:cNvPicPr>
@@ -15324,7 +15447,7 @@
           </p:blipFill>
           <p:spPr>
             <a:xfrm>
-              <a:off x="3429000" y="2607733"/>
+              <a:off x="3429000" y="2777067"/>
               <a:ext cx="508000" cy="508000"/>
             </a:xfrm>
             <a:prstGeom prst="rect">
@@ -15334,13 +15457,13 @@
         </p:pic>
         <p:sp>
           <p:nvSpPr>
-            <p:cNvPr id="29" name="TextBox 28"/>
-            <p:cNvSpPr txBox="1"/>
-            <p:nvPr/>
-          </p:nvSpPr>
-          <p:spPr>
-            <a:xfrm>
-              <a:off x="3048661" y="3165475"/>
+            <p:cNvPr id="31" name="TextBox 30"/>
+            <p:cNvSpPr txBox="1"/>
+            <p:nvPr/>
+          </p:nvSpPr>
+          <p:spPr>
+            <a:xfrm>
+              <a:off x="3048661" y="3334808"/>
               <a:ext cx="1268677" cy="192617"/>
             </a:xfrm>
             <a:prstGeom prst="rect">
@@ -15375,13 +15498,13 @@
         </p:sp>
         <p:sp>
           <p:nvSpPr>
-            <p:cNvPr id="30" name="TextBox 29"/>
-            <p:cNvSpPr txBox="1"/>
-            <p:nvPr/>
-          </p:nvSpPr>
-          <p:spPr>
-            <a:xfrm>
-              <a:off x="3024188" y="3354917"/>
+            <p:cNvPr id="32" name="TextBox 31"/>
+            <p:cNvSpPr txBox="1"/>
+            <p:nvPr/>
+          </p:nvSpPr>
+          <p:spPr>
+            <a:xfrm>
+              <a:off x="3024188" y="3524250"/>
               <a:ext cx="1317625" cy="165100"/>
             </a:xfrm>
             <a:prstGeom prst="rect">
@@ -15416,7 +15539,7 @@
         </p:sp>
         <p:pic>
           <p:nvPicPr>
-            <p:cNvPr id="31" name="Amazon-Route-53_Route-Table" descr="Amazon Route 53_Route Table"/>
+            <p:cNvPr id="33" name="Amazon-Route-53_Route-Table" descr="Amazon Route 53_Route Table"/>
             <p:cNvPicPr>
               <a:picLocks noChangeAspect="1"/>
             </p:cNvPicPr>
@@ -15436,7 +15559,7 @@
           </p:blipFill>
           <p:spPr>
             <a:xfrm>
-              <a:off x="3429000" y="5041900"/>
+              <a:off x="3429000" y="5211233"/>
               <a:ext cx="508000" cy="508000"/>
             </a:xfrm>
             <a:prstGeom prst="rect">
@@ -15446,13 +15569,13 @@
         </p:pic>
         <p:sp>
           <p:nvSpPr>
-            <p:cNvPr id="32" name="TextBox 31"/>
-            <p:cNvSpPr txBox="1"/>
-            <p:nvPr/>
-          </p:nvSpPr>
-          <p:spPr>
-            <a:xfrm>
-              <a:off x="3201458" y="5599642"/>
+            <p:cNvPr id="34" name="TextBox 33"/>
+            <p:cNvSpPr txBox="1"/>
+            <p:nvPr/>
+          </p:nvSpPr>
+          <p:spPr>
+            <a:xfrm>
+              <a:off x="3201458" y="5768975"/>
               <a:ext cx="963083" cy="192617"/>
             </a:xfrm>
             <a:prstGeom prst="rect">
@@ -15487,13 +15610,13 @@
         </p:sp>
         <p:sp>
           <p:nvSpPr>
-            <p:cNvPr id="33" name="TextBox 32"/>
-            <p:cNvSpPr txBox="1"/>
-            <p:nvPr/>
-          </p:nvSpPr>
-          <p:spPr>
-            <a:xfrm>
-              <a:off x="2762250" y="5789083"/>
+            <p:cNvPr id="35" name="TextBox 34"/>
+            <p:cNvSpPr txBox="1"/>
+            <p:nvPr/>
+          </p:nvSpPr>
+          <p:spPr>
+            <a:xfrm>
+              <a:off x="2762250" y="5958417"/>
               <a:ext cx="1841500" cy="165100"/>
             </a:xfrm>
             <a:prstGeom prst="rect">
@@ -15528,14 +15651,14 @@
         </p:sp>
         <p:sp>
           <p:nvSpPr>
-            <p:cNvPr id="34" name="Freeform 33"/>
+            <p:cNvPr id="36" name="Freeform 35"/>
             <p:cNvSpPr/>
             <p:nvPr/>
           </p:nvSpPr>
           <p:spPr>
             <a:xfrm>
-              <a:off x="2857500" y="2861733"/>
-              <a:ext cx="529167" cy="910167"/>
+              <a:off x="2857500" y="3031067"/>
+              <a:ext cx="529167" cy="910166"/>
             </a:xfrm>
             <a:custGeom>
               <a:avLst/>
@@ -15544,7 +15667,7 @@
               <a:cxnLst/>
               <a:rect l="l" t="t" r="r" b="b"/>
               <a:pathLst>
-                <a:path w="529167" h="910167">
+                <a:path w="529167" h="910166">
                   <a:moveTo>
                     <a:pt x="0" y="0"/>
                   </a:moveTo>
@@ -15552,10 +15675,10 @@
                     <a:pt x="254000" y="0"/>
                   </a:lnTo>
                   <a:lnTo>
-                    <a:pt x="254000" y="910167"/>
+                    <a:pt x="254000" y="910166"/>
                   </a:lnTo>
                   <a:lnTo>
-                    <a:pt x="529167" y="910167"/>
+                    <a:pt x="529167" y="910166"/>
                   </a:lnTo>
                 </a:path>
               </a:pathLst>
@@ -15581,14 +15704,14 @@
         </p:sp>
         <p:sp>
           <p:nvSpPr>
-            <p:cNvPr id="35" name="Freeform 34"/>
+            <p:cNvPr id="37" name="Freeform 36"/>
             <p:cNvSpPr/>
             <p:nvPr/>
           </p:nvSpPr>
           <p:spPr>
             <a:xfrm>
-              <a:off x="2857500" y="3941233"/>
-              <a:ext cx="529167" cy="1354667"/>
+              <a:off x="2857500" y="4110567"/>
+              <a:ext cx="529167" cy="1354666"/>
             </a:xfrm>
             <a:custGeom>
               <a:avLst/>
@@ -15597,12 +15720,12 @@
               <a:cxnLst/>
               <a:rect l="l" t="t" r="r" b="b"/>
               <a:pathLst>
-                <a:path w="529167" h="1354667">
+                <a:path w="529167" h="1354666">
                   <a:moveTo>
-                    <a:pt x="0" y="1354667"/>
+                    <a:pt x="0" y="1354666"/>
                   </a:moveTo>
                   <a:lnTo>
-                    <a:pt x="254000" y="1354667"/>
+                    <a:pt x="254000" y="1354666"/>
                   </a:lnTo>
                   <a:lnTo>
                     <a:pt x="254000" y="0"/>
@@ -15634,14 +15757,14 @@
         </p:sp>
         <p:sp>
           <p:nvSpPr>
-            <p:cNvPr id="36" name="Rectangle 35"/>
+            <p:cNvPr id="38" name="Rectangle 37"/>
             <p:cNvSpPr/>
             <p:nvPr/>
           </p:nvSpPr>
           <p:spPr>
             <a:xfrm>
               <a:off x="4508500" y="1676400"/>
-              <a:ext cx="5926667" cy="4360333"/>
+              <a:ext cx="5926667" cy="4529667"/>
             </a:xfrm>
             <a:prstGeom prst="rect">
               <a:avLst/>
@@ -15665,7 +15788,7 @@
         </p:sp>
         <p:pic>
           <p:nvPicPr>
-            <p:cNvPr id="37" name="Virtual-private-cloud-VPC_32" descr="Virtual private cloud VPC_32"/>
+            <p:cNvPr id="39" name="Virtual-private-cloud-VPC_32" descr="Virtual private cloud VPC_32"/>
             <p:cNvPicPr>
               <a:picLocks noChangeAspect="1"/>
             </p:cNvPicPr>
@@ -15695,14 +15818,14 @@
         </p:pic>
         <p:sp>
           <p:nvSpPr>
-            <p:cNvPr id="38" name="TextBox 37"/>
+            <p:cNvPr id="40" name="TextBox 39"/>
             <p:cNvSpPr txBox="1"/>
             <p:nvPr/>
           </p:nvSpPr>
           <p:spPr>
             <a:xfrm>
               <a:off x="4847167" y="1726142"/>
-              <a:ext cx="3000375" cy="192617"/>
+              <a:ext cx="1574271" cy="192617"/>
             </a:xfrm>
             <a:prstGeom prst="rect">
               <a:avLst/>
@@ -15729,20 +15852,61 @@
                   <a:ea typeface="Malgun Gothic"/>
                   <a:cs typeface="Malgun Gothic"/>
                 </a:rPr>
-                <a:t>Inspection VPC 100.64.0.0/16</a:t>
-              </a:r>
-            </a:p>
-          </p:txBody>
-        </p:sp>
-        <p:sp>
-          <p:nvSpPr>
-            <p:cNvPr id="39" name="Rectangle 38"/>
+                <a:t>Inspection VPC</a:t>
+              </a:r>
+            </a:p>
+          </p:txBody>
+        </p:sp>
+        <p:sp>
+          <p:nvSpPr>
+            <p:cNvPr id="41" name="TextBox 40"/>
+            <p:cNvSpPr txBox="1"/>
+            <p:nvPr/>
+          </p:nvSpPr>
+          <p:spPr>
+            <a:xfrm>
+              <a:off x="4847167" y="1915583"/>
+              <a:ext cx="1262062" cy="165100"/>
+            </a:xfrm>
+            <a:prstGeom prst="rect">
+              <a:avLst/>
+            </a:prstGeom>
+            <a:noFill/>
+          </p:spPr>
+          <p:txBody>
+            <a:bodyPr wrap="none" lIns="0" rIns="0" tIns="0" bIns="0" anchor="t">
+              <a:noAutofit/>
+            </a:bodyPr>
+            <a:lstStyle/>
+            <a:p>
+              <a:pPr algn="l">
+                <a:lnSpc>
+                  <a:spcPct val="100000"/>
+                </a:lnSpc>
+              </a:pPr>
+              <a:r>
+                <a:rPr sz="1000" b="0" lang="ko-KR">
+                  <a:solidFill>
+                    <a:srgbClr val="232F3E"/>
+                  </a:solidFill>
+                  <a:latin typeface="Arial"/>
+                  <a:ea typeface="Malgun Gothic"/>
+                  <a:cs typeface="Malgun Gothic"/>
+                </a:rPr>
+                <a:t>100.64.0.0/16</a:t>
+              </a:r>
+            </a:p>
+          </p:txBody>
+        </p:sp>
+        <p:sp>
+          <p:nvSpPr>
+            <p:cNvPr id="42" name="Rectangle 41"/>
             <p:cNvSpPr/>
             <p:nvPr/>
           </p:nvSpPr>
           <p:spPr>
             <a:xfrm>
-              <a:off x="4677833" y="1993900"/>
+              <a:off x="4677833" y="2163233"/>
               <a:ext cx="5037667" cy="1524000"/>
             </a:xfrm>
             <a:prstGeom prst="rect">
@@ -15769,13 +15933,13 @@
         </p:sp>
         <p:sp>
           <p:nvSpPr>
-            <p:cNvPr id="40" name="TextBox 39"/>
-            <p:cNvSpPr txBox="1"/>
-            <p:nvPr/>
-          </p:nvSpPr>
-          <p:spPr>
-            <a:xfrm>
-              <a:off x="4804833" y="2043642"/>
+            <p:cNvPr id="43" name="TextBox 42"/>
+            <p:cNvSpPr txBox="1"/>
+            <p:nvPr/>
+          </p:nvSpPr>
+          <p:spPr>
+            <a:xfrm>
+              <a:off x="4804833" y="2212975"/>
               <a:ext cx="2083594" cy="192617"/>
             </a:xfrm>
             <a:prstGeom prst="rect">
@@ -15810,13 +15974,13 @@
         </p:sp>
         <p:sp>
           <p:nvSpPr>
-            <p:cNvPr id="41" name="Rectangle 40"/>
+            <p:cNvPr id="44" name="Rectangle 43"/>
             <p:cNvSpPr/>
             <p:nvPr/>
           </p:nvSpPr>
           <p:spPr>
             <a:xfrm>
-              <a:off x="4677833" y="4428067"/>
+              <a:off x="4677833" y="4597400"/>
               <a:ext cx="5037667" cy="1524000"/>
             </a:xfrm>
             <a:prstGeom prst="rect">
@@ -15843,13 +16007,13 @@
         </p:sp>
         <p:sp>
           <p:nvSpPr>
-            <p:cNvPr id="42" name="TextBox 41"/>
-            <p:cNvSpPr txBox="1"/>
-            <p:nvPr/>
-          </p:nvSpPr>
-          <p:spPr>
-            <a:xfrm>
-              <a:off x="4804833" y="4477808"/>
+            <p:cNvPr id="45" name="TextBox 44"/>
+            <p:cNvSpPr txBox="1"/>
+            <p:nvPr/>
+          </p:nvSpPr>
+          <p:spPr>
+            <a:xfrm>
+              <a:off x="4804833" y="4647142"/>
               <a:ext cx="2083594" cy="192617"/>
             </a:xfrm>
             <a:prstGeom prst="rect">
@@ -15884,13 +16048,13 @@
         </p:sp>
         <p:sp>
           <p:nvSpPr>
-            <p:cNvPr id="43" name="Rectangle 42"/>
+            <p:cNvPr id="46" name="Rectangle 45"/>
             <p:cNvSpPr/>
             <p:nvPr/>
           </p:nvSpPr>
           <p:spPr>
             <a:xfrm>
-              <a:off x="4804833" y="2311400"/>
+              <a:off x="4804833" y="2480733"/>
               <a:ext cx="1439333" cy="1121833"/>
             </a:xfrm>
             <a:prstGeom prst="rect">
@@ -15915,7 +16079,7 @@
         </p:sp>
         <p:pic>
           <p:nvPicPr>
-            <p:cNvPr id="44" name="Private-subnet_32" descr="Private subnet_32"/>
+            <p:cNvPr id="47" name="Private-subnet_32" descr="Private subnet_32"/>
             <p:cNvPicPr>
               <a:picLocks noChangeAspect="1"/>
             </p:cNvPicPr>
@@ -15935,7 +16099,7 @@
           </p:blipFill>
           <p:spPr>
             <a:xfrm>
-              <a:off x="4804833" y="2311400"/>
+              <a:off x="4804833" y="2480733"/>
               <a:ext cx="254000" cy="254000"/>
             </a:xfrm>
             <a:prstGeom prst="rect">
@@ -15945,13 +16109,13 @@
         </p:pic>
         <p:sp>
           <p:nvSpPr>
-            <p:cNvPr id="45" name="TextBox 44"/>
-            <p:cNvSpPr txBox="1"/>
-            <p:nvPr/>
-          </p:nvSpPr>
-          <p:spPr>
-            <a:xfrm>
-              <a:off x="5143500" y="2361142"/>
+            <p:cNvPr id="48" name="TextBox 47"/>
+            <p:cNvSpPr txBox="1"/>
+            <p:nvPr/>
+          </p:nvSpPr>
+          <p:spPr>
+            <a:xfrm>
+              <a:off x="5143500" y="2530475"/>
               <a:ext cx="1166813" cy="192617"/>
             </a:xfrm>
             <a:prstGeom prst="rect">
@@ -15986,13 +16150,13 @@
         </p:sp>
         <p:sp>
           <p:nvSpPr>
-            <p:cNvPr id="46" name="Rectangle 45"/>
+            <p:cNvPr id="49" name="Rectangle 48"/>
             <p:cNvSpPr/>
             <p:nvPr/>
           </p:nvSpPr>
           <p:spPr>
             <a:xfrm>
-              <a:off x="6371167" y="2311400"/>
+              <a:off x="6371167" y="2480733"/>
               <a:ext cx="1608667" cy="1121833"/>
             </a:xfrm>
             <a:prstGeom prst="rect">
@@ -16017,7 +16181,7 @@
         </p:sp>
         <p:pic>
           <p:nvPicPr>
-            <p:cNvPr id="47" name="Private-subnet_32" descr="Private subnet_32"/>
+            <p:cNvPr id="50" name="Private-subnet_32" descr="Private subnet_32"/>
             <p:cNvPicPr>
               <a:picLocks noChangeAspect="1"/>
             </p:cNvPicPr>
@@ -16037,7 +16201,7 @@
           </p:blipFill>
           <p:spPr>
             <a:xfrm>
-              <a:off x="6371167" y="2311400"/>
+              <a:off x="6371167" y="2480733"/>
               <a:ext cx="254000" cy="254000"/>
             </a:xfrm>
             <a:prstGeom prst="rect">
@@ -16047,13 +16211,13 @@
         </p:pic>
         <p:sp>
           <p:nvSpPr>
-            <p:cNvPr id="48" name="TextBox 47"/>
-            <p:cNvSpPr txBox="1"/>
-            <p:nvPr/>
-          </p:nvSpPr>
-          <p:spPr>
-            <a:xfrm>
-              <a:off x="6709833" y="2361142"/>
+            <p:cNvPr id="51" name="TextBox 50"/>
+            <p:cNvSpPr txBox="1"/>
+            <p:nvPr/>
+          </p:nvSpPr>
+          <p:spPr>
+            <a:xfrm>
+              <a:off x="6709833" y="2530475"/>
               <a:ext cx="1676135" cy="192617"/>
             </a:xfrm>
             <a:prstGeom prst="rect">
@@ -16088,13 +16252,13 @@
         </p:sp>
         <p:sp>
           <p:nvSpPr>
-            <p:cNvPr id="49" name="Rectangle 48"/>
+            <p:cNvPr id="52" name="Rectangle 51"/>
             <p:cNvSpPr/>
             <p:nvPr/>
           </p:nvSpPr>
           <p:spPr>
             <a:xfrm>
-              <a:off x="8106833" y="2311400"/>
+              <a:off x="8106833" y="2480733"/>
               <a:ext cx="1481667" cy="1121833"/>
             </a:xfrm>
             <a:prstGeom prst="rect">
@@ -16119,7 +16283,7 @@
         </p:sp>
         <p:pic>
           <p:nvPicPr>
-            <p:cNvPr id="50" name="Public-subnet_32" descr="Public subnet_32"/>
+            <p:cNvPr id="53" name="Public-subnet_32" descr="Public subnet_32"/>
             <p:cNvPicPr>
               <a:picLocks noChangeAspect="1"/>
             </p:cNvPicPr>
@@ -16139,7 +16303,7 @@
           </p:blipFill>
           <p:spPr>
             <a:xfrm>
-              <a:off x="8106833" y="2311400"/>
+              <a:off x="8106833" y="2480733"/>
               <a:ext cx="254000" cy="254000"/>
             </a:xfrm>
             <a:prstGeom prst="rect">
@@ -16149,13 +16313,13 @@
         </p:pic>
         <p:sp>
           <p:nvSpPr>
-            <p:cNvPr id="51" name="TextBox 50"/>
-            <p:cNvSpPr txBox="1"/>
-            <p:nvPr/>
-          </p:nvSpPr>
-          <p:spPr>
-            <a:xfrm>
-              <a:off x="8445500" y="2361142"/>
+            <p:cNvPr id="54" name="TextBox 53"/>
+            <p:cNvSpPr txBox="1"/>
+            <p:nvPr/>
+          </p:nvSpPr>
+          <p:spPr>
+            <a:xfrm>
+              <a:off x="8445500" y="2530475"/>
               <a:ext cx="1472406" cy="192617"/>
             </a:xfrm>
             <a:prstGeom prst="rect">
@@ -16190,13 +16354,13 @@
         </p:sp>
         <p:sp>
           <p:nvSpPr>
-            <p:cNvPr id="52" name="Rectangle 51"/>
+            <p:cNvPr id="55" name="Rectangle 54"/>
             <p:cNvSpPr/>
             <p:nvPr/>
           </p:nvSpPr>
           <p:spPr>
             <a:xfrm>
-              <a:off x="4804833" y="4745567"/>
+              <a:off x="4804833" y="4914900"/>
               <a:ext cx="1439333" cy="1121833"/>
             </a:xfrm>
             <a:prstGeom prst="rect">
@@ -16221,7 +16385,7 @@
         </p:sp>
         <p:pic>
           <p:nvPicPr>
-            <p:cNvPr id="53" name="Private-subnet_32" descr="Private subnet_32"/>
+            <p:cNvPr id="56" name="Private-subnet_32" descr="Private subnet_32"/>
             <p:cNvPicPr>
               <a:picLocks noChangeAspect="1"/>
             </p:cNvPicPr>
@@ -16241,7 +16405,7 @@
           </p:blipFill>
           <p:spPr>
             <a:xfrm>
-              <a:off x="4804833" y="4745567"/>
+              <a:off x="4804833" y="4914900"/>
               <a:ext cx="254000" cy="254000"/>
             </a:xfrm>
             <a:prstGeom prst="rect">
@@ -16251,13 +16415,13 @@
         </p:pic>
         <p:sp>
           <p:nvSpPr>
-            <p:cNvPr id="54" name="TextBox 53"/>
-            <p:cNvSpPr txBox="1"/>
-            <p:nvPr/>
-          </p:nvSpPr>
-          <p:spPr>
-            <a:xfrm>
-              <a:off x="5143500" y="4795308"/>
+            <p:cNvPr id="57" name="TextBox 56"/>
+            <p:cNvSpPr txBox="1"/>
+            <p:nvPr/>
+          </p:nvSpPr>
+          <p:spPr>
+            <a:xfrm>
+              <a:off x="5143500" y="4964642"/>
               <a:ext cx="1166813" cy="192617"/>
             </a:xfrm>
             <a:prstGeom prst="rect">
@@ -16292,13 +16456,13 @@
         </p:sp>
         <p:sp>
           <p:nvSpPr>
-            <p:cNvPr id="55" name="Rectangle 54"/>
+            <p:cNvPr id="58" name="Rectangle 57"/>
             <p:cNvSpPr/>
             <p:nvPr/>
           </p:nvSpPr>
           <p:spPr>
             <a:xfrm>
-              <a:off x="6371167" y="4745567"/>
+              <a:off x="6371167" y="4914900"/>
               <a:ext cx="1608667" cy="1121833"/>
             </a:xfrm>
             <a:prstGeom prst="rect">
@@ -16323,7 +16487,7 @@
         </p:sp>
         <p:pic>
           <p:nvPicPr>
-            <p:cNvPr id="56" name="Private-subnet_32" descr="Private subnet_32"/>
+            <p:cNvPr id="59" name="Private-subnet_32" descr="Private subnet_32"/>
             <p:cNvPicPr>
               <a:picLocks noChangeAspect="1"/>
             </p:cNvPicPr>
@@ -16343,7 +16507,7 @@
           </p:blipFill>
           <p:spPr>
             <a:xfrm>
-              <a:off x="6371167" y="4745567"/>
+              <a:off x="6371167" y="4914900"/>
               <a:ext cx="254000" cy="254000"/>
             </a:xfrm>
             <a:prstGeom prst="rect">
@@ -16353,13 +16517,13 @@
         </p:pic>
         <p:sp>
           <p:nvSpPr>
-            <p:cNvPr id="57" name="TextBox 56"/>
-            <p:cNvSpPr txBox="1"/>
-            <p:nvPr/>
-          </p:nvSpPr>
-          <p:spPr>
-            <a:xfrm>
-              <a:off x="6709833" y="4795308"/>
+            <p:cNvPr id="60" name="TextBox 59"/>
+            <p:cNvSpPr txBox="1"/>
+            <p:nvPr/>
+          </p:nvSpPr>
+          <p:spPr>
+            <a:xfrm>
+              <a:off x="6709833" y="4964642"/>
               <a:ext cx="1676135" cy="192617"/>
             </a:xfrm>
             <a:prstGeom prst="rect">
@@ -16394,13 +16558,13 @@
         </p:sp>
         <p:sp>
           <p:nvSpPr>
-            <p:cNvPr id="58" name="Rectangle 57"/>
+            <p:cNvPr id="61" name="Rectangle 60"/>
             <p:cNvSpPr/>
             <p:nvPr/>
           </p:nvSpPr>
           <p:spPr>
             <a:xfrm>
-              <a:off x="8106833" y="4745567"/>
+              <a:off x="8106833" y="4914900"/>
               <a:ext cx="1481667" cy="1121833"/>
             </a:xfrm>
             <a:prstGeom prst="rect">
@@ -16425,7 +16589,7 @@
         </p:sp>
         <p:pic>
           <p:nvPicPr>
-            <p:cNvPr id="59" name="Public-subnet_32" descr="Public subnet_32"/>
+            <p:cNvPr id="62" name="Public-subnet_32" descr="Public subnet_32"/>
             <p:cNvPicPr>
               <a:picLocks noChangeAspect="1"/>
             </p:cNvPicPr>
@@ -16445,7 +16609,7 @@
           </p:blipFill>
           <p:spPr>
             <a:xfrm>
-              <a:off x="8106833" y="4745567"/>
+              <a:off x="8106833" y="4914900"/>
               <a:ext cx="254000" cy="254000"/>
             </a:xfrm>
             <a:prstGeom prst="rect">
@@ -16455,13 +16619,13 @@
         </p:pic>
         <p:sp>
           <p:nvSpPr>
-            <p:cNvPr id="60" name="TextBox 59"/>
-            <p:cNvSpPr txBox="1"/>
-            <p:nvPr/>
-          </p:nvSpPr>
-          <p:spPr>
-            <a:xfrm>
-              <a:off x="8445500" y="4795308"/>
+            <p:cNvPr id="63" name="TextBox 62"/>
+            <p:cNvSpPr txBox="1"/>
+            <p:nvPr/>
+          </p:nvSpPr>
+          <p:spPr>
+            <a:xfrm>
+              <a:off x="8445500" y="4964642"/>
               <a:ext cx="1472406" cy="192617"/>
             </a:xfrm>
             <a:prstGeom prst="rect">
@@ -16496,7 +16660,7 @@
         </p:sp>
         <p:pic>
           <p:nvPicPr>
-            <p:cNvPr id="61" name="AWS-Transit-Gateway_Attachment" descr="AWS Transit Gateway_Attachment"/>
+            <p:cNvPr id="64" name="AWS-Transit-Gateway_Attachment" descr="AWS Transit Gateway_Attachment"/>
             <p:cNvPicPr>
               <a:picLocks noChangeAspect="1"/>
             </p:cNvPicPr>
@@ -16516,7 +16680,7 @@
           </p:blipFill>
           <p:spPr>
             <a:xfrm>
-              <a:off x="5270500" y="2607733"/>
+              <a:off x="5270500" y="2777067"/>
               <a:ext cx="508000" cy="508000"/>
             </a:xfrm>
             <a:prstGeom prst="rect">
@@ -16526,13 +16690,13 @@
         </p:pic>
         <p:sp>
           <p:nvSpPr>
-            <p:cNvPr id="62" name="TextBox 61"/>
-            <p:cNvSpPr txBox="1"/>
-            <p:nvPr/>
-          </p:nvSpPr>
-          <p:spPr>
-            <a:xfrm>
-              <a:off x="5093891" y="3165475"/>
+            <p:cNvPr id="65" name="TextBox 64"/>
+            <p:cNvSpPr txBox="1"/>
+            <p:nvPr/>
+          </p:nvSpPr>
+          <p:spPr>
+            <a:xfrm>
+              <a:off x="5093891" y="3334808"/>
               <a:ext cx="861219" cy="192617"/>
             </a:xfrm>
             <a:prstGeom prst="rect">
@@ -16567,7 +16731,7 @@
         </p:sp>
         <p:pic>
           <p:nvPicPr>
-            <p:cNvPr id="63" name="AWS-Network-Firewall_Endpoints" descr="AWS Network Firewall_Endpoints"/>
+            <p:cNvPr id="66" name="AWS-Network-Firewall_Endpoints" descr="AWS Network Firewall_Endpoints"/>
             <p:cNvPicPr>
               <a:picLocks noChangeAspect="1"/>
             </p:cNvPicPr>
@@ -16587,7 +16751,7 @@
           </p:blipFill>
           <p:spPr>
             <a:xfrm>
-              <a:off x="6921500" y="2607733"/>
+              <a:off x="6921500" y="2777067"/>
               <a:ext cx="508000" cy="508000"/>
             </a:xfrm>
             <a:prstGeom prst="rect">
@@ -16597,13 +16761,13 @@
         </p:pic>
         <p:sp>
           <p:nvSpPr>
-            <p:cNvPr id="64" name="TextBox 63"/>
-            <p:cNvSpPr txBox="1"/>
-            <p:nvPr/>
-          </p:nvSpPr>
-          <p:spPr>
-            <a:xfrm>
-              <a:off x="6235568" y="3165475"/>
+            <p:cNvPr id="67" name="TextBox 66"/>
+            <p:cNvSpPr txBox="1"/>
+            <p:nvPr/>
+          </p:nvSpPr>
+          <p:spPr>
+            <a:xfrm>
+              <a:off x="6235568" y="3334808"/>
               <a:ext cx="1879865" cy="192617"/>
             </a:xfrm>
             <a:prstGeom prst="rect">
@@ -16638,7 +16802,7 @@
         </p:sp>
         <p:pic>
           <p:nvPicPr>
-            <p:cNvPr id="65" name="Amazon-VPC_NAT-Gateway" descr="Amazon VPC_NAT Gateway"/>
+            <p:cNvPr id="68" name="Amazon-VPC_NAT-Gateway" descr="Amazon VPC_NAT Gateway"/>
             <p:cNvPicPr>
               <a:picLocks noChangeAspect="1"/>
             </p:cNvPicPr>
@@ -16658,7 +16822,7 @@
           </p:blipFill>
           <p:spPr>
             <a:xfrm>
-              <a:off x="8593667" y="2607733"/>
+              <a:off x="8593667" y="2777067"/>
               <a:ext cx="508000" cy="508000"/>
             </a:xfrm>
             <a:prstGeom prst="rect">
@@ -16668,13 +16832,13 @@
         </p:pic>
         <p:sp>
           <p:nvSpPr>
-            <p:cNvPr id="66" name="TextBox 65"/>
-            <p:cNvSpPr txBox="1"/>
-            <p:nvPr/>
-          </p:nvSpPr>
-          <p:spPr>
-            <a:xfrm>
-              <a:off x="8213328" y="3165475"/>
+            <p:cNvPr id="69" name="TextBox 68"/>
+            <p:cNvSpPr txBox="1"/>
+            <p:nvPr/>
+          </p:nvSpPr>
+          <p:spPr>
+            <a:xfrm>
+              <a:off x="8213328" y="3334808"/>
               <a:ext cx="1268677" cy="192617"/>
             </a:xfrm>
             <a:prstGeom prst="rect">
@@ -16709,7 +16873,7 @@
         </p:sp>
         <p:pic>
           <p:nvPicPr>
-            <p:cNvPr id="67" name="AWS-Transit-Gateway_Attachment" descr="AWS Transit Gateway_Attachment"/>
+            <p:cNvPr id="70" name="AWS-Transit-Gateway_Attachment" descr="AWS Transit Gateway_Attachment"/>
             <p:cNvPicPr>
               <a:picLocks noChangeAspect="1"/>
             </p:cNvPicPr>
@@ -16729,7 +16893,7 @@
           </p:blipFill>
           <p:spPr>
             <a:xfrm>
-              <a:off x="5270500" y="5041900"/>
+              <a:off x="5270500" y="5211233"/>
               <a:ext cx="508000" cy="508000"/>
             </a:xfrm>
             <a:prstGeom prst="rect">
@@ -16739,13 +16903,13 @@
         </p:pic>
         <p:sp>
           <p:nvSpPr>
-            <p:cNvPr id="68" name="TextBox 67"/>
-            <p:cNvSpPr txBox="1"/>
-            <p:nvPr/>
-          </p:nvSpPr>
-          <p:spPr>
-            <a:xfrm>
-              <a:off x="5093891" y="5599642"/>
+            <p:cNvPr id="71" name="TextBox 70"/>
+            <p:cNvSpPr txBox="1"/>
+            <p:nvPr/>
+          </p:nvSpPr>
+          <p:spPr>
+            <a:xfrm>
+              <a:off x="5093891" y="5768975"/>
               <a:ext cx="861219" cy="192617"/>
             </a:xfrm>
             <a:prstGeom prst="rect">
@@ -16780,7 +16944,7 @@
         </p:sp>
         <p:pic>
           <p:nvPicPr>
-            <p:cNvPr id="69" name="AWS-Network-Firewall_Endpoints" descr="AWS Network Firewall_Endpoints"/>
+            <p:cNvPr id="72" name="AWS-Network-Firewall_Endpoints" descr="AWS Network Firewall_Endpoints"/>
             <p:cNvPicPr>
               <a:picLocks noChangeAspect="1"/>
             </p:cNvPicPr>
@@ -16800,7 +16964,7 @@
           </p:blipFill>
           <p:spPr>
             <a:xfrm>
-              <a:off x="6921500" y="5041900"/>
+              <a:off x="6921500" y="5211233"/>
               <a:ext cx="508000" cy="508000"/>
             </a:xfrm>
             <a:prstGeom prst="rect">
@@ -16810,13 +16974,13 @@
         </p:pic>
         <p:sp>
           <p:nvSpPr>
-            <p:cNvPr id="70" name="TextBox 69"/>
-            <p:cNvSpPr txBox="1"/>
-            <p:nvPr/>
-          </p:nvSpPr>
-          <p:spPr>
-            <a:xfrm>
-              <a:off x="6235568" y="5599642"/>
+            <p:cNvPr id="73" name="TextBox 72"/>
+            <p:cNvSpPr txBox="1"/>
+            <p:nvPr/>
+          </p:nvSpPr>
+          <p:spPr>
+            <a:xfrm>
+              <a:off x="6235568" y="5768975"/>
               <a:ext cx="1879865" cy="192617"/>
             </a:xfrm>
             <a:prstGeom prst="rect">
@@ -16851,7 +17015,7 @@
         </p:sp>
         <p:pic>
           <p:nvPicPr>
-            <p:cNvPr id="71" name="Amazon-VPC_NAT-Gateway" descr="Amazon VPC_NAT Gateway"/>
+            <p:cNvPr id="74" name="Amazon-VPC_NAT-Gateway" descr="Amazon VPC_NAT Gateway"/>
             <p:cNvPicPr>
               <a:picLocks noChangeAspect="1"/>
             </p:cNvPicPr>
@@ -16871,7 +17035,7 @@
           </p:blipFill>
           <p:spPr>
             <a:xfrm>
-              <a:off x="8593667" y="5041900"/>
+              <a:off x="8593667" y="5211233"/>
               <a:ext cx="508000" cy="508000"/>
             </a:xfrm>
             <a:prstGeom prst="rect">
@@ -16881,13 +17045,13 @@
         </p:pic>
         <p:sp>
           <p:nvSpPr>
-            <p:cNvPr id="72" name="TextBox 71"/>
-            <p:cNvSpPr txBox="1"/>
-            <p:nvPr/>
-          </p:nvSpPr>
-          <p:spPr>
-            <a:xfrm>
-              <a:off x="8213328" y="5599642"/>
+            <p:cNvPr id="75" name="TextBox 74"/>
+            <p:cNvSpPr txBox="1"/>
+            <p:nvPr/>
+          </p:nvSpPr>
+          <p:spPr>
+            <a:xfrm>
+              <a:off x="8213328" y="5768975"/>
               <a:ext cx="1268677" cy="192617"/>
             </a:xfrm>
             <a:prstGeom prst="rect">
@@ -16922,7 +17086,7 @@
         </p:sp>
         <p:pic>
           <p:nvPicPr>
-            <p:cNvPr id="73" name="AWS-Network-Firewall" descr="AWS Network Firewall"/>
+            <p:cNvPr id="76" name="AWS-Network-Firewall" descr="AWS Network Firewall"/>
             <p:cNvPicPr>
               <a:picLocks noChangeAspect="1"/>
             </p:cNvPicPr>
@@ -16942,7 +17106,7 @@
           </p:blipFill>
           <p:spPr>
             <a:xfrm>
-              <a:off x="6921500" y="3602567"/>
+              <a:off x="6921500" y="3771900"/>
               <a:ext cx="508000" cy="508000"/>
             </a:xfrm>
             <a:prstGeom prst="rect">
@@ -16952,13 +17116,13 @@
         </p:pic>
         <p:sp>
           <p:nvSpPr>
-            <p:cNvPr id="74" name="TextBox 73"/>
-            <p:cNvSpPr txBox="1"/>
-            <p:nvPr/>
-          </p:nvSpPr>
-          <p:spPr>
-            <a:xfrm>
-              <a:off x="6082771" y="4160308"/>
+            <p:cNvPr id="77" name="TextBox 76"/>
+            <p:cNvSpPr txBox="1"/>
+            <p:nvPr/>
+          </p:nvSpPr>
+          <p:spPr>
+            <a:xfrm>
+              <a:off x="6082771" y="4329642"/>
               <a:ext cx="2185458" cy="192617"/>
             </a:xfrm>
             <a:prstGeom prst="rect">
@@ -16993,13 +17157,13 @@
         </p:sp>
         <p:sp>
           <p:nvSpPr>
-            <p:cNvPr id="75" name="Rectangle 74"/>
+            <p:cNvPr id="78" name="Rectangle 77"/>
             <p:cNvSpPr/>
             <p:nvPr/>
           </p:nvSpPr>
           <p:spPr>
             <a:xfrm>
-              <a:off x="10181167" y="3602567"/>
+              <a:off x="10181167" y="3771900"/>
               <a:ext cx="508000" cy="740833"/>
             </a:xfrm>
             <a:prstGeom prst="rect">
@@ -17022,7 +17186,7 @@
         </p:sp>
         <p:pic>
           <p:nvPicPr>
-            <p:cNvPr id="76" name="Amazon-VPC_Internet-Gateway" descr="Amazon VPC_Internet Gateway"/>
+            <p:cNvPr id="79" name="Amazon-VPC_Internet-Gateway" descr="Amazon VPC_Internet Gateway"/>
             <p:cNvPicPr>
               <a:picLocks noChangeAspect="1"/>
             </p:cNvPicPr>
@@ -17042,7 +17206,7 @@
           </p:blipFill>
           <p:spPr>
             <a:xfrm>
-              <a:off x="10181167" y="3602567"/>
+              <a:off x="10181167" y="3771900"/>
               <a:ext cx="508000" cy="508000"/>
             </a:xfrm>
             <a:prstGeom prst="rect">
@@ -17052,13 +17216,13 @@
         </p:pic>
         <p:sp>
           <p:nvSpPr>
-            <p:cNvPr id="77" name="TextBox 76"/>
-            <p:cNvSpPr txBox="1"/>
-            <p:nvPr/>
-          </p:nvSpPr>
-          <p:spPr>
-            <a:xfrm>
-              <a:off x="10208286" y="4160308"/>
+            <p:cNvPr id="80" name="TextBox 79"/>
+            <p:cNvSpPr txBox="1"/>
+            <p:nvPr/>
+          </p:nvSpPr>
+          <p:spPr>
+            <a:xfrm>
+              <a:off x="10208286" y="4329642"/>
               <a:ext cx="453760" cy="192617"/>
             </a:xfrm>
             <a:prstGeom prst="rect">
@@ -17093,14 +17257,14 @@
         </p:sp>
         <p:sp>
           <p:nvSpPr>
-            <p:cNvPr id="78" name="Freeform 77"/>
+            <p:cNvPr id="81" name="Freeform 80"/>
             <p:cNvSpPr/>
             <p:nvPr/>
           </p:nvSpPr>
           <p:spPr>
             <a:xfrm>
-              <a:off x="3979333" y="2861733"/>
-              <a:ext cx="1248834" cy="910167"/>
+              <a:off x="3979333" y="3031067"/>
+              <a:ext cx="1248834" cy="910166"/>
             </a:xfrm>
             <a:custGeom>
               <a:avLst/>
@@ -17109,12 +17273,12 @@
               <a:cxnLst/>
               <a:rect l="l" t="t" r="r" b="b"/>
               <a:pathLst>
-                <a:path w="1248834" h="910167">
+                <a:path w="1248834" h="910166">
                   <a:moveTo>
-                    <a:pt x="0" y="910167"/>
+                    <a:pt x="0" y="910166"/>
                   </a:moveTo>
                   <a:lnTo>
-                    <a:pt x="359834" y="910167"/>
+                    <a:pt x="359834" y="910166"/>
                   </a:lnTo>
                   <a:lnTo>
                     <a:pt x="359834" y="0"/>
@@ -17146,14 +17310,14 @@
         </p:sp>
         <p:sp>
           <p:nvSpPr>
-            <p:cNvPr id="79" name="Freeform 78"/>
+            <p:cNvPr id="82" name="Freeform 81"/>
             <p:cNvSpPr/>
             <p:nvPr/>
           </p:nvSpPr>
           <p:spPr>
             <a:xfrm>
-              <a:off x="3979333" y="3941233"/>
-              <a:ext cx="1248834" cy="1354667"/>
+              <a:off x="3979333" y="4110567"/>
+              <a:ext cx="1248834" cy="1354666"/>
             </a:xfrm>
             <a:custGeom>
               <a:avLst/>
@@ -17162,7 +17326,7 @@
               <a:cxnLst/>
               <a:rect l="l" t="t" r="r" b="b"/>
               <a:pathLst>
-                <a:path w="1248834" h="1354667">
+                <a:path w="1248834" h="1354666">
                   <a:moveTo>
                     <a:pt x="0" y="0"/>
                   </a:moveTo>
@@ -17170,10 +17334,10 @@
                     <a:pt x="359834" y="0"/>
                   </a:lnTo>
                   <a:lnTo>
-                    <a:pt x="359834" y="1354667"/>
+                    <a:pt x="359834" y="1354666"/>
                   </a:lnTo>
                   <a:lnTo>
-                    <a:pt x="1248834" y="1354667"/>
+                    <a:pt x="1248834" y="1354666"/>
                   </a:lnTo>
                 </a:path>
               </a:pathLst>
@@ -17199,13 +17363,13 @@
         </p:sp>
         <p:cxnSp>
           <p:nvCxnSpPr>
-            <p:cNvPr id="80" name="Connector 79"/>
+            <p:cNvPr id="83" name="Connector 82"/>
             <p:cNvCxnSpPr/>
             <p:nvPr/>
           </p:nvCxnSpPr>
           <p:spPr>
             <a:xfrm>
-              <a:off x="5820833" y="2861733"/>
+              <a:off x="5820833" y="3031067"/>
               <a:ext cx="1058334" cy="0"/>
             </a:xfrm>
             <a:prstGeom prst="line">
@@ -17224,13 +17388,13 @@
         </p:cxnSp>
         <p:cxnSp>
           <p:nvCxnSpPr>
-            <p:cNvPr id="81" name="Connector 80"/>
+            <p:cNvPr id="84" name="Connector 83"/>
             <p:cNvCxnSpPr/>
             <p:nvPr/>
           </p:nvCxnSpPr>
           <p:spPr>
             <a:xfrm>
-              <a:off x="5820833" y="5295900"/>
+              <a:off x="5820833" y="5465233"/>
               <a:ext cx="1058334" cy="0"/>
             </a:xfrm>
             <a:prstGeom prst="line">
@@ -17249,13 +17413,13 @@
         </p:cxnSp>
         <p:cxnSp>
           <p:nvCxnSpPr>
-            <p:cNvPr id="82" name="Connector 81"/>
+            <p:cNvPr id="85" name="Connector 84"/>
             <p:cNvCxnSpPr/>
             <p:nvPr/>
           </p:nvCxnSpPr>
           <p:spPr>
             <a:xfrm>
-              <a:off x="7471833" y="2861733"/>
+              <a:off x="7471833" y="3031067"/>
               <a:ext cx="1079500" cy="0"/>
             </a:xfrm>
             <a:prstGeom prst="line">
@@ -17273,13 +17437,13 @@
         </p:cxnSp>
         <p:cxnSp>
           <p:nvCxnSpPr>
-            <p:cNvPr id="83" name="Connector 82"/>
+            <p:cNvPr id="86" name="Connector 85"/>
             <p:cNvCxnSpPr/>
             <p:nvPr/>
           </p:nvCxnSpPr>
           <p:spPr>
             <a:xfrm>
-              <a:off x="7471833" y="5295900"/>
+              <a:off x="7471833" y="5465233"/>
               <a:ext cx="1079500" cy="0"/>
             </a:xfrm>
             <a:prstGeom prst="line">
@@ -17297,14 +17461,14 @@
         </p:cxnSp>
         <p:sp>
           <p:nvSpPr>
-            <p:cNvPr id="84" name="Freeform 83"/>
+            <p:cNvPr id="87" name="Freeform 86"/>
             <p:cNvSpPr/>
             <p:nvPr/>
           </p:nvSpPr>
           <p:spPr>
             <a:xfrm>
-              <a:off x="9144000" y="2861733"/>
-              <a:ext cx="994833" cy="994834"/>
+              <a:off x="9144000" y="3031067"/>
+              <a:ext cx="994833" cy="994833"/>
             </a:xfrm>
             <a:custGeom>
               <a:avLst/>
@@ -17313,7 +17477,7 @@
               <a:cxnLst/>
               <a:rect l="l" t="t" r="r" b="b"/>
               <a:pathLst>
-                <a:path w="994833" h="994834">
+                <a:path w="994833" h="994833">
                   <a:moveTo>
                     <a:pt x="0" y="0"/>
                   </a:moveTo>
@@ -17321,10 +17485,10 @@
                     <a:pt x="698500" y="0"/>
                   </a:lnTo>
                   <a:lnTo>
-                    <a:pt x="698500" y="994834"/>
+                    <a:pt x="698500" y="994833"/>
                   </a:lnTo>
                   <a:lnTo>
-                    <a:pt x="994833" y="994834"/>
+                    <a:pt x="994833" y="994833"/>
                   </a:lnTo>
                 </a:path>
               </a:pathLst>
@@ -17349,13 +17513,13 @@
         </p:sp>
         <p:sp>
           <p:nvSpPr>
-            <p:cNvPr id="85" name="Freeform 84"/>
+            <p:cNvPr id="88" name="Freeform 87"/>
             <p:cNvSpPr/>
             <p:nvPr/>
           </p:nvSpPr>
           <p:spPr>
             <a:xfrm>
-              <a:off x="9144000" y="3856567"/>
+              <a:off x="9144000" y="4025900"/>
               <a:ext cx="698500" cy="1439333"/>
             </a:xfrm>
             <a:custGeom>
@@ -17397,7 +17561,7 @@
         </p:sp>
         <p:pic>
           <p:nvPicPr>
-            <p:cNvPr id="86" name="Internet" descr="Internet"/>
+            <p:cNvPr id="89" name="Internet" descr="Internet"/>
             <p:cNvPicPr>
               <a:picLocks noChangeAspect="1"/>
             </p:cNvPicPr>
@@ -17417,7 +17581,7 @@
           </p:blipFill>
           <p:spPr>
             <a:xfrm>
-              <a:off x="11366500" y="3602567"/>
+              <a:off x="11366500" y="3771900"/>
               <a:ext cx="508000" cy="508000"/>
             </a:xfrm>
             <a:prstGeom prst="rect">
@@ -17427,13 +17591,13 @@
         </p:pic>
         <p:sp>
           <p:nvSpPr>
-            <p:cNvPr id="87" name="TextBox 86"/>
-            <p:cNvSpPr txBox="1"/>
-            <p:nvPr/>
-          </p:nvSpPr>
-          <p:spPr>
-            <a:xfrm>
-              <a:off x="11138958" y="4160308"/>
+            <p:cNvPr id="90" name="TextBox 89"/>
+            <p:cNvSpPr txBox="1"/>
+            <p:nvPr/>
+          </p:nvSpPr>
+          <p:spPr>
+            <a:xfrm>
+              <a:off x="11138958" y="4329642"/>
               <a:ext cx="963083" cy="192617"/>
             </a:xfrm>
             <a:prstGeom prst="rect">
@@ -17468,13 +17632,13 @@
         </p:sp>
         <p:cxnSp>
           <p:nvCxnSpPr>
-            <p:cNvPr id="88" name="Connector 87"/>
+            <p:cNvPr id="91" name="Connector 90"/>
             <p:cNvCxnSpPr/>
             <p:nvPr/>
           </p:nvCxnSpPr>
           <p:spPr>
             <a:xfrm>
-              <a:off x="10731500" y="3856567"/>
+              <a:off x="10731500" y="4025900"/>
               <a:ext cx="592667" cy="0"/>
             </a:xfrm>
             <a:prstGeom prst="line">
@@ -17492,13 +17656,13 @@
         </p:cxnSp>
         <p:sp>
           <p:nvSpPr>
-            <p:cNvPr id="89" name="Oval 88"/>
+            <p:cNvPr id="92" name="Oval 91"/>
             <p:cNvSpPr/>
             <p:nvPr/>
           </p:nvSpPr>
           <p:spPr>
             <a:xfrm>
-              <a:off x="3164417" y="3517900"/>
+              <a:off x="3164417" y="3687233"/>
               <a:ext cx="211667" cy="211667"/>
             </a:xfrm>
             <a:prstGeom prst="ellipse">
@@ -17521,13 +17685,13 @@
         </p:sp>
         <p:sp>
           <p:nvSpPr>
-            <p:cNvPr id="90" name="TextBox 89"/>
-            <p:cNvSpPr txBox="1"/>
-            <p:nvPr/>
-          </p:nvSpPr>
-          <p:spPr>
-            <a:xfrm>
-              <a:off x="3163094" y="3545417"/>
+            <p:cNvPr id="93" name="TextBox 92"/>
+            <p:cNvSpPr txBox="1"/>
+            <p:nvPr/>
+          </p:nvSpPr>
+          <p:spPr>
+            <a:xfrm>
+              <a:off x="3163094" y="3714750"/>
               <a:ext cx="214312" cy="165100"/>
             </a:xfrm>
             <a:prstGeom prst="rect">
@@ -17562,13 +17726,13 @@
         </p:sp>
         <p:sp>
           <p:nvSpPr>
-            <p:cNvPr id="91" name="Oval 90"/>
+            <p:cNvPr id="94" name="Oval 93"/>
             <p:cNvSpPr/>
             <p:nvPr/>
           </p:nvSpPr>
           <p:spPr>
             <a:xfrm>
-              <a:off x="4053417" y="3517900"/>
+              <a:off x="4053417" y="3687233"/>
               <a:ext cx="211667" cy="211667"/>
             </a:xfrm>
             <a:prstGeom prst="ellipse">
@@ -17591,13 +17755,13 @@
         </p:sp>
         <p:sp>
           <p:nvSpPr>
-            <p:cNvPr id="92" name="TextBox 91"/>
-            <p:cNvSpPr txBox="1"/>
-            <p:nvPr/>
-          </p:nvSpPr>
-          <p:spPr>
-            <a:xfrm>
-              <a:off x="4052094" y="3545417"/>
+            <p:cNvPr id="95" name="TextBox 94"/>
+            <p:cNvSpPr txBox="1"/>
+            <p:nvPr/>
+          </p:nvSpPr>
+          <p:spPr>
+            <a:xfrm>
+              <a:off x="4052094" y="3714750"/>
               <a:ext cx="214312" cy="165100"/>
             </a:xfrm>
             <a:prstGeom prst="rect">
@@ -17632,13 +17796,13 @@
         </p:sp>
         <p:sp>
           <p:nvSpPr>
-            <p:cNvPr id="93" name="Oval 92"/>
+            <p:cNvPr id="96" name="Oval 95"/>
             <p:cNvSpPr/>
             <p:nvPr/>
           </p:nvSpPr>
           <p:spPr>
             <a:xfrm>
-              <a:off x="6519333" y="2607733"/>
+              <a:off x="6519333" y="2777067"/>
               <a:ext cx="211667" cy="211667"/>
             </a:xfrm>
             <a:prstGeom prst="ellipse">
@@ -17661,13 +17825,13 @@
         </p:sp>
         <p:sp>
           <p:nvSpPr>
-            <p:cNvPr id="94" name="TextBox 93"/>
-            <p:cNvSpPr txBox="1"/>
-            <p:nvPr/>
-          </p:nvSpPr>
-          <p:spPr>
-            <a:xfrm>
-              <a:off x="6518010" y="2635250"/>
+            <p:cNvPr id="97" name="TextBox 96"/>
+            <p:cNvSpPr txBox="1"/>
+            <p:nvPr/>
+          </p:nvSpPr>
+          <p:spPr>
+            <a:xfrm>
+              <a:off x="6518010" y="2804583"/>
               <a:ext cx="214312" cy="165100"/>
             </a:xfrm>
             <a:prstGeom prst="rect">
@@ -17702,13 +17866,13 @@
         </p:sp>
         <p:sp>
           <p:nvSpPr>
-            <p:cNvPr id="95" name="Oval 94"/>
+            <p:cNvPr id="98" name="Oval 97"/>
             <p:cNvSpPr/>
             <p:nvPr/>
           </p:nvSpPr>
           <p:spPr>
             <a:xfrm>
-              <a:off x="7620000" y="2607733"/>
+              <a:off x="7620000" y="2777067"/>
               <a:ext cx="211667" cy="211667"/>
             </a:xfrm>
             <a:prstGeom prst="ellipse">
@@ -17731,13 +17895,13 @@
         </p:sp>
         <p:sp>
           <p:nvSpPr>
-            <p:cNvPr id="96" name="TextBox 95"/>
-            <p:cNvSpPr txBox="1"/>
-            <p:nvPr/>
-          </p:nvSpPr>
-          <p:spPr>
-            <a:xfrm>
-              <a:off x="7618677" y="2635250"/>
+            <p:cNvPr id="99" name="TextBox 98"/>
+            <p:cNvSpPr txBox="1"/>
+            <p:nvPr/>
+          </p:nvSpPr>
+          <p:spPr>
+            <a:xfrm>
+              <a:off x="7618677" y="2804583"/>
               <a:ext cx="214312" cy="165100"/>
             </a:xfrm>
             <a:prstGeom prst="rect">
@@ -17772,13 +17936,13 @@
         </p:sp>
         <p:sp>
           <p:nvSpPr>
-            <p:cNvPr id="97" name="Oval 96"/>
+            <p:cNvPr id="100" name="Oval 99"/>
             <p:cNvSpPr/>
             <p:nvPr/>
           </p:nvSpPr>
           <p:spPr>
             <a:xfrm>
-              <a:off x="9260417" y="2607733"/>
+              <a:off x="9260417" y="2777067"/>
               <a:ext cx="211667" cy="211667"/>
             </a:xfrm>
             <a:prstGeom prst="ellipse">
@@ -17801,13 +17965,13 @@
         </p:sp>
         <p:sp>
           <p:nvSpPr>
-            <p:cNvPr id="98" name="TextBox 97"/>
-            <p:cNvSpPr txBox="1"/>
-            <p:nvPr/>
-          </p:nvSpPr>
-          <p:spPr>
-            <a:xfrm>
-              <a:off x="9259094" y="2635250"/>
+            <p:cNvPr id="101" name="TextBox 100"/>
+            <p:cNvSpPr txBox="1"/>
+            <p:nvPr/>
+          </p:nvSpPr>
+          <p:spPr>
+            <a:xfrm>
+              <a:off x="9259094" y="2804583"/>
               <a:ext cx="214312" cy="165100"/>
             </a:xfrm>
             <a:prstGeom prst="rect">
@@ -17842,13 +18006,13 @@
         </p:sp>
         <p:sp>
           <p:nvSpPr>
-            <p:cNvPr id="99" name="Oval 98"/>
+            <p:cNvPr id="102" name="Oval 101"/>
             <p:cNvSpPr/>
             <p:nvPr/>
           </p:nvSpPr>
           <p:spPr>
             <a:xfrm>
-              <a:off x="317500" y="6280150"/>
+              <a:off x="317500" y="6407150"/>
               <a:ext cx="211667" cy="211667"/>
             </a:xfrm>
             <a:prstGeom prst="ellipse">
@@ -17871,13 +18035,13 @@
         </p:sp>
         <p:sp>
           <p:nvSpPr>
-            <p:cNvPr id="100" name="TextBox 99"/>
-            <p:cNvSpPr txBox="1"/>
-            <p:nvPr/>
-          </p:nvSpPr>
-          <p:spPr>
-            <a:xfrm>
-              <a:off x="316177" y="6307667"/>
+            <p:cNvPr id="103" name="TextBox 102"/>
+            <p:cNvSpPr txBox="1"/>
+            <p:nvPr/>
+          </p:nvSpPr>
+          <p:spPr>
+            <a:xfrm>
+              <a:off x="316177" y="6434667"/>
               <a:ext cx="214312" cy="165100"/>
             </a:xfrm>
             <a:prstGeom prst="rect">
@@ -17912,13 +18076,13 @@
         </p:sp>
         <p:sp>
           <p:nvSpPr>
-            <p:cNvPr id="101" name="TextBox 100"/>
-            <p:cNvSpPr txBox="1"/>
-            <p:nvPr/>
-          </p:nvSpPr>
-          <p:spPr>
-            <a:xfrm>
-              <a:off x="613833" y="6307667"/>
+            <p:cNvPr id="104" name="TextBox 103"/>
+            <p:cNvSpPr txBox="1"/>
+            <p:nvPr/>
+          </p:nvSpPr>
+          <p:spPr>
+            <a:xfrm>
+              <a:off x="613833" y="6434667"/>
               <a:ext cx="912812" cy="165100"/>
             </a:xfrm>
             <a:prstGeom prst="rect">
@@ -17953,13 +18117,13 @@
         </p:sp>
         <p:sp>
           <p:nvSpPr>
-            <p:cNvPr id="102" name="Oval 101"/>
+            <p:cNvPr id="105" name="Oval 104"/>
             <p:cNvSpPr/>
             <p:nvPr/>
           </p:nvSpPr>
           <p:spPr>
             <a:xfrm>
-              <a:off x="1534583" y="6280150"/>
+              <a:off x="1534583" y="6407150"/>
               <a:ext cx="211667" cy="211667"/>
             </a:xfrm>
             <a:prstGeom prst="ellipse">
@@ -17982,13 +18146,13 @@
         </p:sp>
         <p:sp>
           <p:nvSpPr>
-            <p:cNvPr id="103" name="TextBox 102"/>
-            <p:cNvSpPr txBox="1"/>
-            <p:nvPr/>
-          </p:nvSpPr>
-          <p:spPr>
-            <a:xfrm>
-              <a:off x="1533260" y="6307667"/>
+            <p:cNvPr id="106" name="TextBox 105"/>
+            <p:cNvSpPr txBox="1"/>
+            <p:nvPr/>
+          </p:nvSpPr>
+          <p:spPr>
+            <a:xfrm>
+              <a:off x="1533260" y="6434667"/>
               <a:ext cx="214312" cy="165100"/>
             </a:xfrm>
             <a:prstGeom prst="rect">
@@ -18023,13 +18187,13 @@
         </p:sp>
         <p:sp>
           <p:nvSpPr>
-            <p:cNvPr id="104" name="TextBox 103"/>
-            <p:cNvSpPr txBox="1"/>
-            <p:nvPr/>
-          </p:nvSpPr>
-          <p:spPr>
-            <a:xfrm>
-              <a:off x="1830917" y="6307667"/>
+            <p:cNvPr id="107" name="TextBox 106"/>
+            <p:cNvSpPr txBox="1"/>
+            <p:nvPr/>
+          </p:nvSpPr>
+          <p:spPr>
+            <a:xfrm>
+              <a:off x="1830917" y="6434667"/>
               <a:ext cx="4111625" cy="165100"/>
             </a:xfrm>
             <a:prstGeom prst="rect">
@@ -18064,13 +18228,13 @@
         </p:sp>
         <p:sp>
           <p:nvSpPr>
-            <p:cNvPr id="105" name="Oval 104"/>
+            <p:cNvPr id="108" name="Oval 107"/>
             <p:cNvSpPr/>
             <p:nvPr/>
           </p:nvSpPr>
           <p:spPr>
             <a:xfrm>
-              <a:off x="5139267" y="6280150"/>
+              <a:off x="5139267" y="6407150"/>
               <a:ext cx="211667" cy="211667"/>
             </a:xfrm>
             <a:prstGeom prst="ellipse">
@@ -18093,13 +18257,13 @@
         </p:sp>
         <p:sp>
           <p:nvSpPr>
-            <p:cNvPr id="106" name="TextBox 105"/>
-            <p:cNvSpPr txBox="1"/>
-            <p:nvPr/>
-          </p:nvSpPr>
-          <p:spPr>
-            <a:xfrm>
-              <a:off x="5137944" y="6307667"/>
+            <p:cNvPr id="109" name="TextBox 108"/>
+            <p:cNvSpPr txBox="1"/>
+            <p:nvPr/>
+          </p:nvSpPr>
+          <p:spPr>
+            <a:xfrm>
+              <a:off x="5137944" y="6434667"/>
               <a:ext cx="214312" cy="165100"/>
             </a:xfrm>
             <a:prstGeom prst="rect">
@@ -18134,13 +18298,13 @@
         </p:sp>
         <p:sp>
           <p:nvSpPr>
-            <p:cNvPr id="107" name="TextBox 106"/>
-            <p:cNvSpPr txBox="1"/>
-            <p:nvPr/>
-          </p:nvSpPr>
-          <p:spPr>
-            <a:xfrm>
-              <a:off x="5435600" y="6307667"/>
+            <p:cNvPr id="110" name="TextBox 109"/>
+            <p:cNvSpPr txBox="1"/>
+            <p:nvPr/>
+          </p:nvSpPr>
+          <p:spPr>
+            <a:xfrm>
+              <a:off x="5435600" y="6434667"/>
               <a:ext cx="3833812" cy="165100"/>
             </a:xfrm>
             <a:prstGeom prst="rect">
@@ -18175,13 +18339,13 @@
         </p:sp>
         <p:sp>
           <p:nvSpPr>
-            <p:cNvPr id="108" name="Oval 107"/>
+            <p:cNvPr id="111" name="Oval 110"/>
             <p:cNvSpPr/>
             <p:nvPr/>
           </p:nvSpPr>
           <p:spPr>
             <a:xfrm>
-              <a:off x="8464550" y="6280150"/>
+              <a:off x="8464550" y="6407150"/>
               <a:ext cx="211667" cy="211667"/>
             </a:xfrm>
             <a:prstGeom prst="ellipse">
@@ -18204,13 +18368,13 @@
         </p:sp>
         <p:sp>
           <p:nvSpPr>
-            <p:cNvPr id="109" name="TextBox 108"/>
-            <p:cNvSpPr txBox="1"/>
-            <p:nvPr/>
-          </p:nvSpPr>
-          <p:spPr>
-            <a:xfrm>
-              <a:off x="8463227" y="6307667"/>
+            <p:cNvPr id="112" name="TextBox 111"/>
+            <p:cNvSpPr txBox="1"/>
+            <p:nvPr/>
+          </p:nvSpPr>
+          <p:spPr>
+            <a:xfrm>
+              <a:off x="8463227" y="6434667"/>
               <a:ext cx="214312" cy="165100"/>
             </a:xfrm>
             <a:prstGeom prst="rect">
@@ -18245,13 +18409,13 @@
         </p:sp>
         <p:sp>
           <p:nvSpPr>
-            <p:cNvPr id="110" name="TextBox 109"/>
-            <p:cNvSpPr txBox="1"/>
-            <p:nvPr/>
-          </p:nvSpPr>
-          <p:spPr>
-            <a:xfrm>
-              <a:off x="8760883" y="6307667"/>
+            <p:cNvPr id="113" name="TextBox 112"/>
+            <p:cNvSpPr txBox="1"/>
+            <p:nvPr/>
+          </p:nvSpPr>
+          <p:spPr>
+            <a:xfrm>
+              <a:off x="8760883" y="6434667"/>
               <a:ext cx="2024062" cy="165100"/>
             </a:xfrm>
             <a:prstGeom prst="rect">
@@ -18286,13 +18450,13 @@
         </p:sp>
         <p:sp>
           <p:nvSpPr>
-            <p:cNvPr id="111" name="Oval 110"/>
+            <p:cNvPr id="114" name="Oval 113"/>
             <p:cNvSpPr/>
             <p:nvPr/>
           </p:nvSpPr>
           <p:spPr>
             <a:xfrm>
-              <a:off x="10399183" y="6280150"/>
+              <a:off x="10399183" y="6407150"/>
               <a:ext cx="211667" cy="211667"/>
             </a:xfrm>
             <a:prstGeom prst="ellipse">
@@ -18315,13 +18479,13 @@
         </p:sp>
         <p:sp>
           <p:nvSpPr>
-            <p:cNvPr id="112" name="TextBox 111"/>
-            <p:cNvSpPr txBox="1"/>
-            <p:nvPr/>
-          </p:nvSpPr>
-          <p:spPr>
-            <a:xfrm>
-              <a:off x="10397860" y="6307667"/>
+            <p:cNvPr id="115" name="TextBox 114"/>
+            <p:cNvSpPr txBox="1"/>
+            <p:nvPr/>
+          </p:nvSpPr>
+          <p:spPr>
+            <a:xfrm>
+              <a:off x="10397860" y="6434667"/>
               <a:ext cx="214312" cy="165100"/>
             </a:xfrm>
             <a:prstGeom prst="rect">
@@ -18356,13 +18520,13 @@
         </p:sp>
         <p:sp>
           <p:nvSpPr>
-            <p:cNvPr id="113" name="TextBox 112"/>
-            <p:cNvSpPr txBox="1"/>
-            <p:nvPr/>
-          </p:nvSpPr>
-          <p:spPr>
-            <a:xfrm>
-              <a:off x="10695517" y="6307667"/>
+            <p:cNvPr id="116" name="TextBox 115"/>
+            <p:cNvSpPr txBox="1"/>
+            <p:nvPr/>
+          </p:nvSpPr>
+          <p:spPr>
+            <a:xfrm>
+              <a:off x="10695517" y="6434667"/>
               <a:ext cx="912812" cy="165100"/>
             </a:xfrm>
             <a:prstGeom prst="rect">
@@ -18391,47 +18555,6 @@
                   <a:cs typeface="Malgun Gothic"/>
                 </a:rPr>
                 <a:t>NAT → IGW</a:t>
-              </a:r>
-            </a:p>
-          </p:txBody>
-        </p:sp>
-        <p:sp>
-          <p:nvSpPr>
-            <p:cNvPr id="114" name="TextBox 113"/>
-            <p:cNvSpPr txBox="1"/>
-            <p:nvPr/>
-          </p:nvSpPr>
-          <p:spPr>
-            <a:xfrm>
-              <a:off x="317500" y="6477000"/>
-              <a:ext cx="14081125" cy="165100"/>
-            </a:xfrm>
-            <a:prstGeom prst="rect">
-              <a:avLst/>
-            </a:prstGeom>
-            <a:noFill/>
-          </p:spPr>
-          <p:txBody>
-            <a:bodyPr wrap="none" lIns="0" rIns="0" tIns="0" bIns="0" anchor="t">
-              <a:noAutofit/>
-            </a:bodyPr>
-            <a:lstStyle/>
-            <a:p>
-              <a:pPr algn="l">
-                <a:lnSpc>
-                  <a:spcPct val="100000"/>
-                </a:lnSpc>
-              </a:pPr>
-              <a:r>
-                <a:rPr sz="1000" b="0" lang="ko-KR">
-                  <a:solidFill>
-                    <a:srgbClr val="545B64"/>
-                  </a:solidFill>
-                  <a:latin typeface="Arial"/>
-                  <a:ea typeface="Malgun Gothic"/>
-                  <a:cs typeface="Malgun Gothic"/>
-                </a:rPr>
-                <a:t>라우팅(같은 AZ): App 0.0.0.0/0 → TGW · TGW 서브넷 0.0.0.0/0 → 방화벽 · 방화벽 서브넷 0.0.0.0/0 → NAT, 10.0.0.0/8 → TGW · 퍼블릭 0.0.0.0/0 → IGW, 10.0.0.0/8 → 방화벽</a:t>
               </a:r>
             </a:p>
           </p:txBody>

--- a/docs/examples/reference-architectures.pptx
+++ b/docs/examples/reference-architectures.pptx
@@ -3394,8 +3394,8 @@
           </p:nvSpPr>
           <p:spPr>
             <a:xfrm>
-              <a:off x="2151003" y="3597688"/>
-              <a:ext cx="1091480" cy="165714"/>
+              <a:off x="2115152" y="3597688"/>
+              <a:ext cx="1163183" cy="165714"/>
             </a:xfrm>
             <a:prstGeom prst="rect">
               <a:avLst/>
@@ -4018,8 +4018,8 @@
           </p:nvSpPr>
           <p:spPr>
             <a:xfrm>
-              <a:off x="3780257" y="2125385"/>
-              <a:ext cx="5693755" cy="1635892"/>
+              <a:off x="3780257" y="2146630"/>
+              <a:ext cx="5693755" cy="1614647"/>
             </a:xfrm>
             <a:prstGeom prst="rect">
               <a:avLst/>
@@ -4051,7 +4051,7 @@
           </p:nvSpPr>
           <p:spPr>
             <a:xfrm>
-              <a:off x="3907729" y="2175312"/>
+              <a:off x="3907729" y="2196557"/>
               <a:ext cx="2091339" cy="193333"/>
             </a:xfrm>
             <a:prstGeom prst="rect">
@@ -4166,8 +4166,8 @@
           </p:nvSpPr>
           <p:spPr>
             <a:xfrm>
-              <a:off x="3907729" y="2444065"/>
-              <a:ext cx="1699628" cy="1232230"/>
+              <a:off x="3907729" y="2465311"/>
+              <a:ext cx="1699628" cy="1210985"/>
             </a:xfrm>
             <a:prstGeom prst="rect">
               <a:avLst/>
@@ -4211,7 +4211,7 @@
           </p:blipFill>
           <p:spPr>
             <a:xfrm>
-              <a:off x="3907729" y="2444065"/>
+              <a:off x="3907729" y="2465311"/>
               <a:ext cx="254944" cy="254944"/>
             </a:xfrm>
             <a:prstGeom prst="rect">
@@ -4227,7 +4227,7 @@
           </p:nvSpPr>
           <p:spPr>
             <a:xfrm>
-              <a:off x="4247654" y="2493992"/>
+              <a:off x="4247654" y="2515237"/>
               <a:ext cx="1477880" cy="193333"/>
             </a:xfrm>
             <a:prstGeom prst="rect">
@@ -4268,8 +4268,8 @@
           </p:nvSpPr>
           <p:spPr>
             <a:xfrm>
-              <a:off x="5862301" y="2444065"/>
-              <a:ext cx="3484238" cy="1232230"/>
+              <a:off x="5862301" y="2465311"/>
+              <a:ext cx="3484238" cy="1210985"/>
             </a:xfrm>
             <a:prstGeom prst="rect">
               <a:avLst/>
@@ -4313,7 +4313,7 @@
           </p:blipFill>
           <p:spPr>
             <a:xfrm>
-              <a:off x="5862301" y="2444065"/>
+              <a:off x="5862301" y="2465311"/>
               <a:ext cx="254944" cy="254944"/>
             </a:xfrm>
             <a:prstGeom prst="rect">
@@ -4329,7 +4329,7 @@
           </p:nvSpPr>
           <p:spPr>
             <a:xfrm>
-              <a:off x="6202227" y="2493992"/>
+              <a:off x="6202227" y="2515237"/>
               <a:ext cx="1171150" cy="193333"/>
             </a:xfrm>
             <a:prstGeom prst="rect">
@@ -4716,8 +4716,8 @@
           </p:nvSpPr>
           <p:spPr>
             <a:xfrm>
-              <a:off x="7179513" y="2529047"/>
-              <a:ext cx="2039554" cy="3590465"/>
+              <a:off x="7179513" y="2550292"/>
+              <a:ext cx="2039554" cy="3569219"/>
             </a:xfrm>
             <a:prstGeom prst="rect">
               <a:avLst/>
@@ -4763,7 +4763,7 @@
           </p:blipFill>
           <p:spPr>
             <a:xfrm>
-              <a:off x="7179513" y="2529047"/>
+              <a:off x="7179513" y="2550292"/>
               <a:ext cx="254944" cy="254944"/>
             </a:xfrm>
             <a:prstGeom prst="rect">
@@ -4779,7 +4779,7 @@
           </p:nvSpPr>
           <p:spPr>
             <a:xfrm>
-              <a:off x="7519439" y="2578973"/>
+              <a:off x="7519439" y="2600219"/>
               <a:ext cx="1989096" cy="193333"/>
             </a:xfrm>
             <a:prstGeom prst="rect">
@@ -5754,7 +5754,7 @@
           </p:nvSpPr>
           <p:spPr>
             <a:xfrm>
-              <a:off x="323257" y="4361817"/>
+              <a:off x="323257" y="4382999"/>
               <a:ext cx="657964" cy="192756"/>
             </a:xfrm>
             <a:prstGeom prst="rect">
@@ -5927,7 +5927,7 @@
           </p:nvSpPr>
           <p:spPr>
             <a:xfrm>
-              <a:off x="1790769" y="2095349"/>
+              <a:off x="1790769" y="1947075"/>
               <a:ext cx="963779" cy="192756"/>
             </a:xfrm>
             <a:prstGeom prst="rect">
@@ -5968,8 +5968,8 @@
           </p:nvSpPr>
           <p:spPr>
             <a:xfrm>
-              <a:off x="1728547" y="2284927"/>
-              <a:ext cx="1088223" cy="165219"/>
+              <a:off x="1692802" y="2136654"/>
+              <a:ext cx="1159712" cy="165219"/>
             </a:xfrm>
             <a:prstGeom prst="rect">
               <a:avLst/>
@@ -6127,7 +6127,7 @@
           </p:blipFill>
           <p:spPr>
             <a:xfrm>
-              <a:off x="10067616" y="2850485"/>
+              <a:off x="10067616" y="2829303"/>
               <a:ext cx="508367" cy="508367"/>
             </a:xfrm>
             <a:prstGeom prst="rect">
@@ -6239,7 +6239,7 @@
           </p:blipFill>
           <p:spPr>
             <a:xfrm>
-              <a:off x="10067616" y="5286409"/>
+              <a:off x="10067616" y="5265227"/>
               <a:ext cx="508367" cy="508367"/>
             </a:xfrm>
             <a:prstGeom prst="rect">
@@ -6351,7 +6351,7 @@
           </p:blipFill>
           <p:spPr>
             <a:xfrm>
-              <a:off x="11084349" y="2850485"/>
+              <a:off x="11084349" y="2829303"/>
               <a:ext cx="508367" cy="508367"/>
             </a:xfrm>
             <a:prstGeom prst="rect">
@@ -6463,7 +6463,7 @@
           </p:blipFill>
           <p:spPr>
             <a:xfrm>
-              <a:off x="11084349" y="5286409"/>
+              <a:off x="11084349" y="5265227"/>
               <a:ext cx="508367" cy="508367"/>
             </a:xfrm>
             <a:prstGeom prst="rect">
@@ -7478,7 +7478,7 @@
           </p:blipFill>
           <p:spPr>
             <a:xfrm>
-              <a:off x="3861304" y="2850485"/>
+              <a:off x="3861304" y="2829303"/>
               <a:ext cx="508367" cy="508367"/>
             </a:xfrm>
             <a:prstGeom prst="rect">
@@ -7549,7 +7549,7 @@
           </p:blipFill>
           <p:spPr>
             <a:xfrm>
-              <a:off x="3861304" y="5286409"/>
+              <a:off x="3861304" y="5265227"/>
               <a:ext cx="508367" cy="508367"/>
             </a:xfrm>
             <a:prstGeom prst="rect">
@@ -7724,7 +7724,7 @@
           </p:blipFill>
           <p:spPr>
             <a:xfrm>
-              <a:off x="6625549" y="2850485"/>
+              <a:off x="6625549" y="2829303"/>
               <a:ext cx="508367" cy="508367"/>
             </a:xfrm>
             <a:prstGeom prst="rect">
@@ -7795,7 +7795,7 @@
           </p:blipFill>
           <p:spPr>
             <a:xfrm>
-              <a:off x="7642282" y="2850485"/>
+              <a:off x="7642282" y="2829303"/>
               <a:ext cx="508367" cy="508367"/>
             </a:xfrm>
             <a:prstGeom prst="rect">
@@ -7866,7 +7866,7 @@
           </p:blipFill>
           <p:spPr>
             <a:xfrm>
-              <a:off x="6625549" y="5286409"/>
+              <a:off x="6625549" y="5265227"/>
               <a:ext cx="508367" cy="508367"/>
             </a:xfrm>
             <a:prstGeom prst="rect">
@@ -7937,7 +7937,7 @@
           </p:blipFill>
           <p:spPr>
             <a:xfrm>
-              <a:off x="7642282" y="5286409"/>
+              <a:off x="7642282" y="5265227"/>
               <a:ext cx="508367" cy="508367"/>
             </a:xfrm>
             <a:prstGeom prst="rect">
@@ -8008,7 +8008,7 @@
           </p:blipFill>
           <p:spPr>
             <a:xfrm>
-              <a:off x="8828471" y="2850485"/>
+              <a:off x="8828471" y="2829303"/>
               <a:ext cx="508367" cy="508367"/>
             </a:xfrm>
             <a:prstGeom prst="rect">
@@ -8079,7 +8079,7 @@
           </p:blipFill>
           <p:spPr>
             <a:xfrm>
-              <a:off x="8828471" y="5286409"/>
+              <a:off x="8828471" y="5265227"/>
               <a:ext cx="508367" cy="508367"/>
             </a:xfrm>
             <a:prstGeom prst="rect">
@@ -8166,7 +8166,7 @@
           </p:nvSpPr>
           <p:spPr>
             <a:xfrm>
-              <a:off x="3888444" y="4361817"/>
+              <a:off x="3888444" y="4382999"/>
               <a:ext cx="454088" cy="192756"/>
             </a:xfrm>
             <a:prstGeom prst="rect">
@@ -8266,7 +8266,7 @@
           </p:nvSpPr>
           <p:spPr>
             <a:xfrm>
-              <a:off x="2882301" y="4361817"/>
+              <a:off x="2882301" y="4382999"/>
               <a:ext cx="454088" cy="192756"/>
             </a:xfrm>
             <a:prstGeom prst="rect">
@@ -8461,7 +8461,7 @@
           </p:nvCxnSpPr>
           <p:spPr>
             <a:xfrm>
-              <a:off x="8235377" y="3104669"/>
+              <a:off x="8235377" y="3083487"/>
               <a:ext cx="550731" cy="0"/>
             </a:xfrm>
             <a:prstGeom prst="line">
@@ -8485,7 +8485,7 @@
           </p:nvSpPr>
           <p:spPr>
             <a:xfrm>
-              <a:off x="8443225" y="2899204"/>
+              <a:off x="8443225" y="2878022"/>
               <a:ext cx="389218" cy="165219"/>
             </a:xfrm>
             <a:prstGeom prst="rect">
@@ -8618,7 +8618,7 @@
           </p:nvCxnSpPr>
           <p:spPr>
             <a:xfrm flipH="1">
-              <a:off x="4412035" y="3104669"/>
+              <a:off x="4412035" y="3083487"/>
               <a:ext cx="1832239" cy="0"/>
             </a:xfrm>
             <a:prstGeom prst="line">
@@ -8644,7 +8644,7 @@
           </p:nvSpPr>
           <p:spPr>
             <a:xfrm>
-              <a:off x="5169290" y="2899204"/>
+              <a:off x="5169290" y="2878022"/>
               <a:ext cx="921415" cy="165219"/>
             </a:xfrm>
             <a:prstGeom prst="rect">
@@ -8685,7 +8685,7 @@
           </p:nvCxnSpPr>
           <p:spPr>
             <a:xfrm flipH="1">
-              <a:off x="4412035" y="5540593"/>
+              <a:off x="4412035" y="5519411"/>
               <a:ext cx="1832239" cy="0"/>
             </a:xfrm>
             <a:prstGeom prst="line">
@@ -8711,7 +8711,7 @@
           </p:nvSpPr>
           <p:spPr>
             <a:xfrm>
-              <a:off x="5169290" y="5335128"/>
+              <a:off x="5169290" y="5313946"/>
               <a:ext cx="921415" cy="165219"/>
             </a:xfrm>
             <a:prstGeom prst="rect">
@@ -8752,7 +8752,7 @@
           </p:nvSpPr>
           <p:spPr>
             <a:xfrm>
-              <a:off x="9379202" y="3231760"/>
+              <a:off x="9379202" y="3210578"/>
               <a:ext cx="211820" cy="2181741"/>
             </a:xfrm>
             <a:custGeom>
@@ -8902,10 +8902,10 @@
         </p:nvGrpSpPr>
         <p:grpSpPr>
           <a:xfrm>
-            <a:off x="238529" y="944110"/>
-            <a:ext cx="11682507" cy="5666171"/>
-            <a:chOff x="238529" y="944110"/>
-            <a:chExt cx="11682507" cy="5666171"/>
+            <a:off x="285794" y="935411"/>
+            <a:ext cx="11588239" cy="5715000"/>
+            <a:chOff x="285794" y="935411"/>
+            <a:chExt cx="11588239" cy="5715000"/>
           </a:xfrm>
         </p:grpSpPr>
         <p:pic>
@@ -8930,8 +8930,8 @@
           </p:blipFill>
           <p:spPr>
             <a:xfrm>
-              <a:off x="313328" y="3718945"/>
-              <a:ext cx="508367" cy="508367"/>
+              <a:off x="359989" y="3687856"/>
+              <a:ext cx="504265" cy="504265"/>
             </a:xfrm>
             <a:prstGeom prst="rect">
               <a:avLst/>
@@ -8946,8 +8946,8 @@
           </p:nvSpPr>
           <p:spPr>
             <a:xfrm>
-              <a:off x="238529" y="4277089"/>
-              <a:ext cx="657964" cy="192756"/>
+              <a:off x="285794" y="4241497"/>
+              <a:ext cx="652655" cy="191200"/>
             </a:xfrm>
             <a:prstGeom prst="rect">
               <a:avLst/>
@@ -8966,7 +8966,7 @@
                 </a:lnSpc>
               </a:pPr>
               <a:r>
-                <a:rPr sz="1167" b="0" lang="ko-KR">
+                <a:rPr sz="1158" b="0" lang="ko-KR">
                   <a:solidFill>
                     <a:srgbClr val="232F3E"/>
                   </a:solidFill>
@@ -8987,14 +8987,14 @@
           </p:nvSpPr>
           <p:spPr>
             <a:xfrm>
-              <a:off x="1711336" y="944110"/>
-              <a:ext cx="10209700" cy="5422579"/>
-            </a:xfrm>
-            <a:prstGeom prst="rect">
-              <a:avLst/>
-            </a:prstGeom>
-            <a:noFill/>
-            <a:ln w="21182">
+              <a:off x="1746717" y="935411"/>
+              <a:ext cx="10127316" cy="5420846"/>
+            </a:xfrm>
+            <a:prstGeom prst="rect">
+              <a:avLst/>
+            </a:prstGeom>
+            <a:noFill/>
+            <a:ln w="21011">
               <a:solidFill>
                 <a:srgbClr val="232F3E"/>
               </a:solidFill>
@@ -9032,8 +9032,8 @@
           </p:blipFill>
           <p:spPr>
             <a:xfrm>
-              <a:off x="1711336" y="944110"/>
-              <a:ext cx="254183" cy="254183"/>
+              <a:off x="1746717" y="935411"/>
+              <a:ext cx="336176" cy="336176"/>
             </a:xfrm>
             <a:prstGeom prst="rect">
               <a:avLst/>
@@ -9048,8 +9048,8 @@
           </p:nvSpPr>
           <p:spPr>
             <a:xfrm>
-              <a:off x="2050248" y="1026190"/>
-              <a:ext cx="1141839" cy="206524"/>
+              <a:off x="2187949" y="1016829"/>
+              <a:ext cx="1132626" cy="204858"/>
             </a:xfrm>
             <a:prstGeom prst="rect">
               <a:avLst/>
@@ -9068,7 +9068,7 @@
                 </a:lnSpc>
               </a:pPr>
               <a:r>
-                <a:rPr sz="1250" b="1" lang="ko-KR">
+                <a:rPr sz="1240" b="1" lang="ko-KR">
                   <a:solidFill>
                     <a:srgbClr val="232F3E"/>
                   </a:solidFill>
@@ -9089,14 +9089,14 @@
           </p:nvSpPr>
           <p:spPr>
             <a:xfrm>
-              <a:off x="1923156" y="1304203"/>
-              <a:ext cx="9913152" cy="4977758"/>
-            </a:xfrm>
-            <a:prstGeom prst="rect">
-              <a:avLst/>
-            </a:prstGeom>
-            <a:noFill/>
-            <a:ln w="21182">
+              <a:off x="1956827" y="1292599"/>
+              <a:ext cx="9833162" cy="4979614"/>
+            </a:xfrm>
+            <a:prstGeom prst="rect">
+              <a:avLst/>
+            </a:prstGeom>
+            <a:noFill/>
+            <a:ln w="21011">
               <a:solidFill>
                 <a:srgbClr val="00A4A6"/>
               </a:solidFill>
@@ -9136,8 +9136,8 @@
           </p:blipFill>
           <p:spPr>
             <a:xfrm>
-              <a:off x="1923156" y="1304203"/>
-              <a:ext cx="254183" cy="254183"/>
+              <a:off x="1956827" y="1292599"/>
+              <a:ext cx="252132" cy="252132"/>
             </a:xfrm>
             <a:prstGeom prst="rect">
               <a:avLst/>
@@ -9152,8 +9152,8 @@
           </p:nvSpPr>
           <p:spPr>
             <a:xfrm>
-              <a:off x="2262067" y="1353980"/>
-              <a:ext cx="759902" cy="192756"/>
+              <a:off x="2293004" y="1341974"/>
+              <a:ext cx="753771" cy="191200"/>
             </a:xfrm>
             <a:prstGeom prst="rect">
               <a:avLst/>
@@ -9172,7 +9172,7 @@
                 </a:lnSpc>
               </a:pPr>
               <a:r>
-                <a:rPr sz="1167" b="1" lang="ko-KR">
+                <a:rPr sz="1158" b="1" lang="ko-KR">
                   <a:solidFill>
                     <a:srgbClr val="00A4A6"/>
                   </a:solidFill>
@@ -9193,14 +9193,14 @@
           </p:nvSpPr>
           <p:spPr>
             <a:xfrm>
-              <a:off x="2558614" y="1621932"/>
-              <a:ext cx="5104850" cy="4575301"/>
-            </a:xfrm>
-            <a:prstGeom prst="rect">
-              <a:avLst/>
-            </a:prstGeom>
-            <a:noFill/>
-            <a:ln w="21182">
+              <a:off x="2587158" y="1607764"/>
+              <a:ext cx="5063658" cy="4580404"/>
+            </a:xfrm>
+            <a:prstGeom prst="rect">
+              <a:avLst/>
+            </a:prstGeom>
+            <a:noFill/>
+            <a:ln w="21011">
               <a:solidFill>
                 <a:srgbClr val="8C4FFF"/>
               </a:solidFill>
@@ -9238,8 +9238,8 @@
           </p:blipFill>
           <p:spPr>
             <a:xfrm>
-              <a:off x="2558614" y="1621932"/>
-              <a:ext cx="254183" cy="254183"/>
+              <a:off x="2587158" y="1607764"/>
+              <a:ext cx="252132" cy="252132"/>
             </a:xfrm>
             <a:prstGeom prst="rect">
               <a:avLst/>
@@ -9254,8 +9254,8 @@
           </p:nvSpPr>
           <p:spPr>
             <a:xfrm>
-              <a:off x="2897526" y="1671710"/>
-              <a:ext cx="1677346" cy="192756"/>
+              <a:off x="2923335" y="1657140"/>
+              <a:ext cx="1663811" cy="191200"/>
             </a:xfrm>
             <a:prstGeom prst="rect">
               <a:avLst/>
@@ -9274,7 +9274,7 @@
                 </a:lnSpc>
               </a:pPr>
               <a:r>
-                <a:rPr sz="1167" b="1" lang="ko-KR">
+                <a:rPr sz="1158" b="1" lang="ko-KR">
                   <a:solidFill>
                     <a:srgbClr val="8C4FFF"/>
                   </a:solidFill>
@@ -9295,8 +9295,8 @@
           </p:nvSpPr>
           <p:spPr>
             <a:xfrm>
-              <a:off x="2897526" y="1861288"/>
-              <a:ext cx="1088223" cy="165219"/>
+              <a:off x="2923335" y="1845189"/>
+              <a:ext cx="1079442" cy="163886"/>
             </a:xfrm>
             <a:prstGeom prst="rect">
               <a:avLst/>
@@ -9315,7 +9315,7 @@
                 </a:lnSpc>
               </a:pPr>
               <a:r>
-                <a:rPr sz="1000" b="0" lang="ko-KR">
+                <a:rPr sz="992" b="0" lang="ko-KR">
                   <a:solidFill>
                     <a:srgbClr val="232F3E"/>
                   </a:solidFill>
@@ -9336,14 +9336,14 @@
           </p:nvSpPr>
           <p:spPr>
             <a:xfrm>
-              <a:off x="2770434" y="2109117"/>
-              <a:ext cx="4681211" cy="1525100"/>
-            </a:xfrm>
-            <a:prstGeom prst="rect">
-              <a:avLst/>
-            </a:prstGeom>
-            <a:noFill/>
-            <a:ln w="15886">
+              <a:off x="2797268" y="2091018"/>
+              <a:ext cx="4643438" cy="1512794"/>
+            </a:xfrm>
+            <a:prstGeom prst="rect">
+              <a:avLst/>
+            </a:prstGeom>
+            <a:noFill/>
+            <a:ln w="15758">
               <a:solidFill>
                 <a:srgbClr val="00A4A6"/>
               </a:solidFill>
@@ -9369,8 +9369,8 @@
           </p:nvSpPr>
           <p:spPr>
             <a:xfrm>
-              <a:off x="2897526" y="2158895"/>
-              <a:ext cx="2085098" cy="192756"/>
+              <a:off x="2923335" y="2140394"/>
+              <a:ext cx="2068273" cy="191200"/>
             </a:xfrm>
             <a:prstGeom prst="rect">
               <a:avLst/>
@@ -9389,7 +9389,7 @@
                 </a:lnSpc>
               </a:pPr>
               <a:r>
-                <a:rPr sz="1167" b="1" lang="ko-KR">
+                <a:rPr sz="1158" b="1" lang="ko-KR">
                   <a:solidFill>
                     <a:srgbClr val="00A4A6"/>
                   </a:solidFill>
@@ -9410,14 +9410,14 @@
           </p:nvSpPr>
           <p:spPr>
             <a:xfrm>
-              <a:off x="2770434" y="4545041"/>
-              <a:ext cx="4681211" cy="1567464"/>
-            </a:xfrm>
-            <a:prstGeom prst="rect">
-              <a:avLst/>
-            </a:prstGeom>
-            <a:noFill/>
-            <a:ln w="15886">
+              <a:off x="2797268" y="4507286"/>
+              <a:ext cx="4643438" cy="1596838"/>
+            </a:xfrm>
+            <a:prstGeom prst="rect">
+              <a:avLst/>
+            </a:prstGeom>
+            <a:noFill/>
+            <a:ln w="15758">
               <a:solidFill>
                 <a:srgbClr val="00A4A6"/>
               </a:solidFill>
@@ -9443,8 +9443,8 @@
           </p:nvSpPr>
           <p:spPr>
             <a:xfrm>
-              <a:off x="2897526" y="4594819"/>
-              <a:ext cx="2085098" cy="192756"/>
+              <a:off x="2923335" y="4556662"/>
+              <a:ext cx="2068273" cy="191200"/>
             </a:xfrm>
             <a:prstGeom prst="rect">
               <a:avLst/>
@@ -9463,7 +9463,7 @@
                 </a:lnSpc>
               </a:pPr>
               <a:r>
-                <a:rPr sz="1167" b="1" lang="ko-KR">
+                <a:rPr sz="1158" b="1" lang="ko-KR">
                   <a:solidFill>
                     <a:srgbClr val="00A4A6"/>
                   </a:solidFill>
@@ -9484,14 +9484,14 @@
           </p:nvSpPr>
           <p:spPr>
             <a:xfrm>
-              <a:off x="2897526" y="2426846"/>
-              <a:ext cx="2584198" cy="1122643"/>
-            </a:xfrm>
-            <a:prstGeom prst="rect">
-              <a:avLst/>
-            </a:prstGeom>
-            <a:noFill/>
-            <a:ln w="15886">
+              <a:off x="2923335" y="2406183"/>
+              <a:ext cx="2563346" cy="1113585"/>
+            </a:xfrm>
+            <a:prstGeom prst="rect">
+              <a:avLst/>
+            </a:prstGeom>
+            <a:noFill/>
+            <a:ln w="15758">
               <a:solidFill>
                 <a:srgbClr val="7AA116"/>
               </a:solidFill>
@@ -9529,8 +9529,8 @@
           </p:blipFill>
           <p:spPr>
             <a:xfrm>
-              <a:off x="2897526" y="2426846"/>
-              <a:ext cx="254183" cy="254183"/>
+              <a:off x="2923335" y="2406183"/>
+              <a:ext cx="252132" cy="252132"/>
             </a:xfrm>
             <a:prstGeom prst="rect">
               <a:avLst/>
@@ -9545,8 +9545,8 @@
           </p:nvSpPr>
           <p:spPr>
             <a:xfrm>
-              <a:off x="3236437" y="2476624"/>
-              <a:ext cx="1371531" cy="192756"/>
+              <a:off x="3259511" y="2455559"/>
+              <a:ext cx="1360464" cy="191200"/>
             </a:xfrm>
             <a:prstGeom prst="rect">
               <a:avLst/>
@@ -9565,7 +9565,7 @@
                 </a:lnSpc>
               </a:pPr>
               <a:r>
-                <a:rPr sz="1167" b="1" lang="ko-KR">
+                <a:rPr sz="1158" b="1" lang="ko-KR">
                   <a:solidFill>
                     <a:srgbClr val="7AA116"/>
                   </a:solidFill>
@@ -9586,14 +9586,14 @@
           </p:nvSpPr>
           <p:spPr>
             <a:xfrm>
-              <a:off x="5735907" y="2426846"/>
-              <a:ext cx="1588646" cy="1122643"/>
-            </a:xfrm>
-            <a:prstGeom prst="rect">
-              <a:avLst/>
-            </a:prstGeom>
-            <a:noFill/>
-            <a:ln w="15886">
+              <a:off x="5738812" y="2406183"/>
+              <a:ext cx="1575827" cy="1113585"/>
+            </a:xfrm>
+            <a:prstGeom prst="rect">
+              <a:avLst/>
+            </a:prstGeom>
+            <a:noFill/>
+            <a:ln w="15758">
               <a:solidFill>
                 <a:srgbClr val="00A4A6"/>
               </a:solidFill>
@@ -9631,8 +9631,8 @@
           </p:blipFill>
           <p:spPr>
             <a:xfrm>
-              <a:off x="5735907" y="2426846"/>
-              <a:ext cx="254183" cy="254183"/>
+              <a:off x="5738812" y="2406183"/>
+              <a:ext cx="252132" cy="252132"/>
             </a:xfrm>
             <a:prstGeom prst="rect">
               <a:avLst/>
@@ -9647,8 +9647,8 @@
           </p:nvSpPr>
           <p:spPr>
             <a:xfrm>
-              <a:off x="6074818" y="2476624"/>
-              <a:ext cx="1167655" cy="192756"/>
+              <a:off x="6074989" y="2455559"/>
+              <a:ext cx="1158233" cy="191200"/>
             </a:xfrm>
             <a:prstGeom prst="rect">
               <a:avLst/>
@@ -9667,7 +9667,7 @@
                 </a:lnSpc>
               </a:pPr>
               <a:r>
-                <a:rPr sz="1167" b="1" lang="ko-KR">
+                <a:rPr sz="1158" b="1" lang="ko-KR">
                   <a:solidFill>
                     <a:srgbClr val="00A4A6"/>
                   </a:solidFill>
@@ -9688,14 +9688,14 @@
           </p:nvSpPr>
           <p:spPr>
             <a:xfrm>
-              <a:off x="2897526" y="4862770"/>
-              <a:ext cx="2584198" cy="1165007"/>
-            </a:xfrm>
-            <a:prstGeom prst="rect">
-              <a:avLst/>
-            </a:prstGeom>
-            <a:noFill/>
-            <a:ln w="15886">
+              <a:off x="2923335" y="4822451"/>
+              <a:ext cx="2563346" cy="1197629"/>
+            </a:xfrm>
+            <a:prstGeom prst="rect">
+              <a:avLst/>
+            </a:prstGeom>
+            <a:noFill/>
+            <a:ln w="15758">
               <a:solidFill>
                 <a:srgbClr val="7AA116"/>
               </a:solidFill>
@@ -9733,8 +9733,8 @@
           </p:blipFill>
           <p:spPr>
             <a:xfrm>
-              <a:off x="2897526" y="4862770"/>
-              <a:ext cx="254183" cy="254183"/>
+              <a:off x="2923335" y="4822451"/>
+              <a:ext cx="252132" cy="252132"/>
             </a:xfrm>
             <a:prstGeom prst="rect">
               <a:avLst/>
@@ -9749,8 +9749,8 @@
           </p:nvSpPr>
           <p:spPr>
             <a:xfrm>
-              <a:off x="3236437" y="4912548"/>
-              <a:ext cx="1371531" cy="192756"/>
+              <a:off x="3259511" y="4871827"/>
+              <a:ext cx="1360464" cy="191200"/>
             </a:xfrm>
             <a:prstGeom prst="rect">
               <a:avLst/>
@@ -9769,7 +9769,7 @@
                 </a:lnSpc>
               </a:pPr>
               <a:r>
-                <a:rPr sz="1167" b="1" lang="ko-KR">
+                <a:rPr sz="1158" b="1" lang="ko-KR">
                   <a:solidFill>
                     <a:srgbClr val="7AA116"/>
                   </a:solidFill>
@@ -9790,14 +9790,14 @@
           </p:nvSpPr>
           <p:spPr>
             <a:xfrm>
-              <a:off x="5735907" y="4862770"/>
-              <a:ext cx="1588646" cy="1165007"/>
-            </a:xfrm>
-            <a:prstGeom prst="rect">
-              <a:avLst/>
-            </a:prstGeom>
-            <a:noFill/>
-            <a:ln w="15886">
+              <a:off x="5738812" y="4822451"/>
+              <a:ext cx="1575827" cy="1197629"/>
+            </a:xfrm>
+            <a:prstGeom prst="rect">
+              <a:avLst/>
+            </a:prstGeom>
+            <a:noFill/>
+            <a:ln w="15758">
               <a:solidFill>
                 <a:srgbClr val="00A4A6"/>
               </a:solidFill>
@@ -9835,8 +9835,8 @@
           </p:blipFill>
           <p:spPr>
             <a:xfrm>
-              <a:off x="5735907" y="4862770"/>
-              <a:ext cx="254183" cy="254183"/>
+              <a:off x="5738812" y="4822451"/>
+              <a:ext cx="252132" cy="252132"/>
             </a:xfrm>
             <a:prstGeom prst="rect">
               <a:avLst/>
@@ -9851,8 +9851,8 @@
           </p:nvSpPr>
           <p:spPr>
             <a:xfrm>
-              <a:off x="6074818" y="4912548"/>
-              <a:ext cx="1167655" cy="192756"/>
+              <a:off x="6074989" y="4871827"/>
+              <a:ext cx="1158233" cy="191200"/>
             </a:xfrm>
             <a:prstGeom prst="rect">
               <a:avLst/>
@@ -9871,7 +9871,7 @@
                 </a:lnSpc>
               </a:pPr>
               <a:r>
-                <a:rPr sz="1167" b="1" lang="ko-KR">
+                <a:rPr sz="1158" b="1" lang="ko-KR">
                   <a:solidFill>
                     <a:srgbClr val="00A4A6"/>
                   </a:solidFill>
@@ -9906,8 +9906,8 @@
           </p:blipFill>
           <p:spPr>
             <a:xfrm>
-              <a:off x="4761537" y="2723394"/>
-              <a:ext cx="508367" cy="508367"/>
+              <a:off x="4772305" y="2700338"/>
+              <a:ext cx="504265" cy="504265"/>
             </a:xfrm>
             <a:prstGeom prst="rect">
               <a:avLst/>
@@ -9922,8 +9922,8 @@
           </p:nvSpPr>
           <p:spPr>
             <a:xfrm>
-              <a:off x="4686738" y="3281538"/>
-              <a:ext cx="657964" cy="192756"/>
+              <a:off x="4698110" y="3253978"/>
+              <a:ext cx="652655" cy="191200"/>
             </a:xfrm>
             <a:prstGeom prst="rect">
               <a:avLst/>
@@ -9942,7 +9942,7 @@
                 </a:lnSpc>
               </a:pPr>
               <a:r>
-                <a:rPr sz="1167" b="0" lang="ko-KR">
+                <a:rPr sz="1158" b="0" lang="ko-KR">
                   <a:solidFill>
                     <a:srgbClr val="232F3E"/>
                   </a:solidFill>
@@ -9977,8 +9977,8 @@
           </p:blipFill>
           <p:spPr>
             <a:xfrm>
-              <a:off x="4761537" y="5159318"/>
-              <a:ext cx="508367" cy="508367"/>
+              <a:off x="4772305" y="5116606"/>
+              <a:ext cx="504265" cy="504265"/>
             </a:xfrm>
             <a:prstGeom prst="rect">
               <a:avLst/>
@@ -9993,8 +9993,8 @@
           </p:nvSpPr>
           <p:spPr>
             <a:xfrm>
-              <a:off x="4686738" y="5717462"/>
-              <a:ext cx="657964" cy="192756"/>
+              <a:off x="4698110" y="5670247"/>
+              <a:ext cx="652655" cy="191200"/>
             </a:xfrm>
             <a:prstGeom prst="rect">
               <a:avLst/>
@@ -10013,7 +10013,7 @@
                 </a:lnSpc>
               </a:pPr>
               <a:r>
-                <a:rPr sz="1167" b="0" lang="ko-KR">
+                <a:rPr sz="1158" b="0" lang="ko-KR">
                   <a:solidFill>
                     <a:srgbClr val="232F3E"/>
                   </a:solidFill>
@@ -10048,8 +10048,8 @@
           </p:blipFill>
           <p:spPr>
             <a:xfrm>
-              <a:off x="6276047" y="2723394"/>
-              <a:ext cx="508367" cy="508367"/>
+              <a:off x="6274594" y="2700338"/>
+              <a:ext cx="504265" cy="504265"/>
             </a:xfrm>
             <a:prstGeom prst="rect">
               <a:avLst/>
@@ -10064,8 +10064,8 @@
           </p:nvSpPr>
           <p:spPr>
             <a:xfrm>
-              <a:off x="6303186" y="3281538"/>
-              <a:ext cx="454088" cy="192756"/>
+              <a:off x="6301514" y="3253978"/>
+              <a:ext cx="450424" cy="191200"/>
             </a:xfrm>
             <a:prstGeom prst="rect">
               <a:avLst/>
@@ -10084,7 +10084,7 @@
                 </a:lnSpc>
               </a:pPr>
               <a:r>
-                <a:rPr sz="1167" b="0" lang="ko-KR">
+                <a:rPr sz="1158" b="0" lang="ko-KR">
                   <a:solidFill>
                     <a:srgbClr val="232F3E"/>
                   </a:solidFill>
@@ -10119,8 +10119,8 @@
           </p:blipFill>
           <p:spPr>
             <a:xfrm>
-              <a:off x="6276047" y="5159318"/>
-              <a:ext cx="508367" cy="508367"/>
+              <a:off x="6274594" y="5116606"/>
+              <a:ext cx="504265" cy="504265"/>
             </a:xfrm>
             <a:prstGeom prst="rect">
               <a:avLst/>
@@ -10135,8 +10135,8 @@
           </p:nvSpPr>
           <p:spPr>
             <a:xfrm>
-              <a:off x="6303186" y="5717462"/>
-              <a:ext cx="454088" cy="192756"/>
+              <a:off x="6301514" y="5670247"/>
+              <a:ext cx="450424" cy="191200"/>
             </a:xfrm>
             <a:prstGeom prst="rect">
               <a:avLst/>
@@ -10155,7 +10155,7 @@
                 </a:lnSpc>
               </a:pPr>
               <a:r>
-                <a:rPr sz="1167" b="0" lang="ko-KR">
+                <a:rPr sz="1158" b="0" lang="ko-KR">
                   <a:solidFill>
                     <a:srgbClr val="232F3E"/>
                   </a:solidFill>
@@ -10176,8 +10176,8 @@
           </p:nvSpPr>
           <p:spPr>
             <a:xfrm>
-              <a:off x="2304431" y="3718945"/>
-              <a:ext cx="508367" cy="741368"/>
+              <a:off x="2335026" y="3687856"/>
+              <a:ext cx="504265" cy="735386"/>
             </a:xfrm>
             <a:prstGeom prst="rect">
               <a:avLst/>
@@ -10219,8 +10219,8 @@
           </p:blipFill>
           <p:spPr>
             <a:xfrm>
-              <a:off x="2304431" y="3718945"/>
-              <a:ext cx="508367" cy="508367"/>
+              <a:off x="2335026" y="3687856"/>
+              <a:ext cx="504265" cy="504265"/>
             </a:xfrm>
             <a:prstGeom prst="rect">
               <a:avLst/>
@@ -10235,8 +10235,8 @@
           </p:nvSpPr>
           <p:spPr>
             <a:xfrm>
-              <a:off x="2331570" y="4277089"/>
-              <a:ext cx="454088" cy="192756"/>
+              <a:off x="2361946" y="4241497"/>
+              <a:ext cx="450424" cy="191200"/>
             </a:xfrm>
             <a:prstGeom prst="rect">
               <a:avLst/>
@@ -10255,7 +10255,7 @@
                 </a:lnSpc>
               </a:pPr>
               <a:r>
-                <a:rPr sz="1167" b="0" lang="ko-KR">
+                <a:rPr sz="1158" b="0" lang="ko-KR">
                   <a:solidFill>
                     <a:srgbClr val="232F3E"/>
                   </a:solidFill>
@@ -10276,14 +10276,14 @@
           </p:nvSpPr>
           <p:spPr>
             <a:xfrm>
-              <a:off x="8002375" y="1621932"/>
-              <a:ext cx="3749205" cy="4575301"/>
-            </a:xfrm>
-            <a:prstGeom prst="rect">
-              <a:avLst/>
-            </a:prstGeom>
-            <a:noFill/>
-            <a:ln w="21182">
+              <a:off x="7986993" y="1607764"/>
+              <a:ext cx="3718952" cy="4580404"/>
+            </a:xfrm>
+            <a:prstGeom prst="rect">
+              <a:avLst/>
+            </a:prstGeom>
+            <a:noFill/>
+            <a:ln w="21011">
               <a:solidFill>
                 <a:srgbClr val="8C4FFF"/>
               </a:solidFill>
@@ -10321,8 +10321,8 @@
           </p:blipFill>
           <p:spPr>
             <a:xfrm>
-              <a:off x="8002375" y="1621932"/>
-              <a:ext cx="254183" cy="254183"/>
+              <a:off x="7986993" y="1607764"/>
+              <a:ext cx="252132" cy="252132"/>
             </a:xfrm>
             <a:prstGeom prst="rect">
               <a:avLst/>
@@ -10337,8 +10337,8 @@
           </p:nvSpPr>
           <p:spPr>
             <a:xfrm>
-              <a:off x="8341287" y="1671710"/>
-              <a:ext cx="1371531" cy="192756"/>
+              <a:off x="8323169" y="1657140"/>
+              <a:ext cx="1360464" cy="191200"/>
             </a:xfrm>
             <a:prstGeom prst="rect">
               <a:avLst/>
@@ -10357,7 +10357,7 @@
                 </a:lnSpc>
               </a:pPr>
               <a:r>
-                <a:rPr sz="1167" b="1" lang="ko-KR">
+                <a:rPr sz="1158" b="1" lang="ko-KR">
                   <a:solidFill>
                     <a:srgbClr val="8C4FFF"/>
                   </a:solidFill>
@@ -10378,8 +10378,8 @@
           </p:nvSpPr>
           <p:spPr>
             <a:xfrm>
-              <a:off x="8341287" y="1861288"/>
-              <a:ext cx="1088223" cy="165219"/>
+              <a:off x="8323169" y="1845189"/>
+              <a:ext cx="1079442" cy="163886"/>
             </a:xfrm>
             <a:prstGeom prst="rect">
               <a:avLst/>
@@ -10398,7 +10398,7 @@
                 </a:lnSpc>
               </a:pPr>
               <a:r>
-                <a:rPr sz="1000" b="0" lang="ko-KR">
+                <a:rPr sz="992" b="0" lang="ko-KR">
                   <a:solidFill>
                     <a:srgbClr val="232F3E"/>
                   </a:solidFill>
@@ -10419,14 +10419,14 @@
           </p:nvSpPr>
           <p:spPr>
             <a:xfrm>
-              <a:off x="8214195" y="2109117"/>
-              <a:ext cx="3325566" cy="1525100"/>
-            </a:xfrm>
-            <a:prstGeom prst="rect">
-              <a:avLst/>
-            </a:prstGeom>
-            <a:noFill/>
-            <a:ln w="15886">
+              <a:off x="8197103" y="2091018"/>
+              <a:ext cx="3298732" cy="1512794"/>
+            </a:xfrm>
+            <a:prstGeom prst="rect">
+              <a:avLst/>
+            </a:prstGeom>
+            <a:noFill/>
+            <a:ln w="15758">
               <a:solidFill>
                 <a:srgbClr val="00A4A6"/>
               </a:solidFill>
@@ -10452,8 +10452,8 @@
           </p:nvSpPr>
           <p:spPr>
             <a:xfrm>
-              <a:off x="8341287" y="2158895"/>
-              <a:ext cx="2085098" cy="192756"/>
+              <a:off x="8323169" y="2140394"/>
+              <a:ext cx="2068273" cy="191200"/>
             </a:xfrm>
             <a:prstGeom prst="rect">
               <a:avLst/>
@@ -10472,7 +10472,7 @@
                 </a:lnSpc>
               </a:pPr>
               <a:r>
-                <a:rPr sz="1167" b="1" lang="ko-KR">
+                <a:rPr sz="1158" b="1" lang="ko-KR">
                   <a:solidFill>
                     <a:srgbClr val="00A4A6"/>
                   </a:solidFill>
@@ -10493,14 +10493,14 @@
           </p:nvSpPr>
           <p:spPr>
             <a:xfrm>
-              <a:off x="8214195" y="4545041"/>
-              <a:ext cx="3325566" cy="1567464"/>
-            </a:xfrm>
-            <a:prstGeom prst="rect">
-              <a:avLst/>
-            </a:prstGeom>
-            <a:noFill/>
-            <a:ln w="15886">
+              <a:off x="8197103" y="4507286"/>
+              <a:ext cx="3298732" cy="1596838"/>
+            </a:xfrm>
+            <a:prstGeom prst="rect">
+              <a:avLst/>
+            </a:prstGeom>
+            <a:noFill/>
+            <a:ln w="15758">
               <a:solidFill>
                 <a:srgbClr val="00A4A6"/>
               </a:solidFill>
@@ -10526,8 +10526,8 @@
           </p:nvSpPr>
           <p:spPr>
             <a:xfrm>
-              <a:off x="8341287" y="4594819"/>
-              <a:ext cx="2085098" cy="192756"/>
+              <a:off x="8323169" y="4556662"/>
+              <a:ext cx="2068273" cy="191200"/>
             </a:xfrm>
             <a:prstGeom prst="rect">
               <a:avLst/>
@@ -10546,7 +10546,7 @@
                 </a:lnSpc>
               </a:pPr>
               <a:r>
-                <a:rPr sz="1167" b="1" lang="ko-KR">
+                <a:rPr sz="1158" b="1" lang="ko-KR">
                   <a:solidFill>
                     <a:srgbClr val="00A4A6"/>
                   </a:solidFill>
@@ -10567,14 +10567,14 @@
           </p:nvSpPr>
           <p:spPr>
             <a:xfrm>
-              <a:off x="8341287" y="2426846"/>
-              <a:ext cx="3113747" cy="1122643"/>
-            </a:xfrm>
-            <a:prstGeom prst="rect">
-              <a:avLst/>
-            </a:prstGeom>
-            <a:noFill/>
-            <a:ln w="15886">
+              <a:off x="8323169" y="2406183"/>
+              <a:ext cx="3088621" cy="1113585"/>
+            </a:xfrm>
+            <a:prstGeom prst="rect">
+              <a:avLst/>
+            </a:prstGeom>
+            <a:noFill/>
+            <a:ln w="15758">
               <a:solidFill>
                 <a:srgbClr val="00A4A6"/>
               </a:solidFill>
@@ -10612,8 +10612,8 @@
           </p:blipFill>
           <p:spPr>
             <a:xfrm>
-              <a:off x="8341287" y="2426846"/>
-              <a:ext cx="254183" cy="254183"/>
+              <a:off x="8323169" y="2406183"/>
+              <a:ext cx="252132" cy="252132"/>
             </a:xfrm>
             <a:prstGeom prst="rect">
               <a:avLst/>
@@ -10628,8 +10628,8 @@
           </p:nvSpPr>
           <p:spPr>
             <a:xfrm>
-              <a:off x="8680198" y="2476624"/>
-              <a:ext cx="1779284" cy="192756"/>
+              <a:off x="8659346" y="2455559"/>
+              <a:ext cx="1764926" cy="191200"/>
             </a:xfrm>
             <a:prstGeom prst="rect">
               <a:avLst/>
@@ -10648,7 +10648,7 @@
                 </a:lnSpc>
               </a:pPr>
               <a:r>
-                <a:rPr sz="1167" b="1" lang="ko-KR">
+                <a:rPr sz="1158" b="1" lang="ko-KR">
                   <a:solidFill>
                     <a:srgbClr val="00A4A6"/>
                   </a:solidFill>
@@ -10669,14 +10669,14 @@
           </p:nvSpPr>
           <p:spPr>
             <a:xfrm>
-              <a:off x="8341287" y="4862770"/>
-              <a:ext cx="3113747" cy="1165007"/>
-            </a:xfrm>
-            <a:prstGeom prst="rect">
-              <a:avLst/>
-            </a:prstGeom>
-            <a:noFill/>
-            <a:ln w="15886">
+              <a:off x="8323169" y="4822451"/>
+              <a:ext cx="3088621" cy="1197629"/>
+            </a:xfrm>
+            <a:prstGeom prst="rect">
+              <a:avLst/>
+            </a:prstGeom>
+            <a:noFill/>
+            <a:ln w="15758">
               <a:solidFill>
                 <a:srgbClr val="00A4A6"/>
               </a:solidFill>
@@ -10714,8 +10714,8 @@
           </p:blipFill>
           <p:spPr>
             <a:xfrm>
-              <a:off x="8341287" y="4862770"/>
-              <a:ext cx="254183" cy="254183"/>
+              <a:off x="8323169" y="4822451"/>
+              <a:ext cx="252132" cy="252132"/>
             </a:xfrm>
             <a:prstGeom prst="rect">
               <a:avLst/>
@@ -10730,8 +10730,8 @@
           </p:nvSpPr>
           <p:spPr>
             <a:xfrm>
-              <a:off x="8680198" y="4912548"/>
-              <a:ext cx="1779284" cy="192756"/>
+              <a:off x="8659346" y="4871827"/>
+              <a:ext cx="1764926" cy="191200"/>
             </a:xfrm>
             <a:prstGeom prst="rect">
               <a:avLst/>
@@ -10750,7 +10750,7 @@
                 </a:lnSpc>
               </a:pPr>
               <a:r>
-                <a:rPr sz="1167" b="1" lang="ko-KR">
+                <a:rPr sz="1158" b="1" lang="ko-KR">
                   <a:solidFill>
                     <a:srgbClr val="00A4A6"/>
                   </a:solidFill>
@@ -10771,14 +10771,14 @@
           </p:nvSpPr>
           <p:spPr>
             <a:xfrm>
-              <a:off x="10078206" y="2511574"/>
-              <a:ext cx="1292099" cy="3473840"/>
-            </a:xfrm>
-            <a:prstGeom prst="rect">
-              <a:avLst/>
-            </a:prstGeom>
-            <a:noFill/>
-            <a:ln w="15886">
+              <a:off x="10025062" y="2490227"/>
+              <a:ext cx="1302684" cy="3445809"/>
+            </a:xfrm>
+            <a:prstGeom prst="rect">
+              <a:avLst/>
+            </a:prstGeom>
+            <a:noFill/>
+            <a:ln w="15758">
               <a:solidFill>
                 <a:srgbClr val="ED7100"/>
               </a:solidFill>
@@ -10818,8 +10818,8 @@
           </p:blipFill>
           <p:spPr>
             <a:xfrm>
-              <a:off x="10078206" y="2511574"/>
-              <a:ext cx="254183" cy="254183"/>
+              <a:off x="10025062" y="2490227"/>
+              <a:ext cx="252132" cy="252132"/>
             </a:xfrm>
             <a:prstGeom prst="rect">
               <a:avLst/>
@@ -10834,8 +10834,8 @@
           </p:nvSpPr>
           <p:spPr>
             <a:xfrm>
-              <a:off x="10417118" y="2561352"/>
-              <a:ext cx="454088" cy="192756"/>
+              <a:off x="10361239" y="2539603"/>
+              <a:ext cx="450424" cy="191200"/>
             </a:xfrm>
             <a:prstGeom prst="rect">
               <a:avLst/>
@@ -10854,7 +10854,7 @@
                 </a:lnSpc>
               </a:pPr>
               <a:r>
-                <a:rPr sz="1167" b="1" lang="ko-KR">
+                <a:rPr sz="1158" b="1" lang="ko-KR">
                   <a:solidFill>
                     <a:srgbClr val="ED7100"/>
                   </a:solidFill>
@@ -10889,8 +10889,8 @@
           </p:blipFill>
           <p:spPr>
             <a:xfrm>
-              <a:off x="10777211" y="2723394"/>
-              <a:ext cx="508367" cy="508367"/>
+              <a:off x="10739438" y="2700338"/>
+              <a:ext cx="504265" cy="504265"/>
             </a:xfrm>
             <a:prstGeom prst="rect">
               <a:avLst/>
@@ -10905,8 +10905,8 @@
           </p:nvSpPr>
           <p:spPr>
             <a:xfrm>
-              <a:off x="10679244" y="3281538"/>
-              <a:ext cx="704300" cy="192756"/>
+              <a:off x="10642261" y="3253978"/>
+              <a:ext cx="698617" cy="191200"/>
             </a:xfrm>
             <a:prstGeom prst="rect">
               <a:avLst/>
@@ -10925,7 +10925,7 @@
                 </a:lnSpc>
               </a:pPr>
               <a:r>
-                <a:rPr sz="1167" b="0" lang="ko-KR">
+                <a:rPr sz="1158" b="0" lang="ko-KR">
                   <a:solidFill>
                     <a:srgbClr val="232F3E"/>
                   </a:solidFill>
@@ -10960,8 +10960,8 @@
           </p:blipFill>
           <p:spPr>
             <a:xfrm>
-              <a:off x="10777211" y="5159318"/>
-              <a:ext cx="508367" cy="508367"/>
+              <a:off x="10739438" y="5116606"/>
+              <a:ext cx="504265" cy="504265"/>
             </a:xfrm>
             <a:prstGeom prst="rect">
               <a:avLst/>
@@ -10976,8 +10976,8 @@
           </p:nvSpPr>
           <p:spPr>
             <a:xfrm>
-              <a:off x="10679244" y="5717462"/>
-              <a:ext cx="704300" cy="192756"/>
+              <a:off x="10642261" y="5670247"/>
+              <a:ext cx="698617" cy="191200"/>
             </a:xfrm>
             <a:prstGeom prst="rect">
               <a:avLst/>
@@ -10996,7 +10996,7 @@
                 </a:lnSpc>
               </a:pPr>
               <a:r>
-                <a:rPr sz="1167" b="0" lang="ko-KR">
+                <a:rPr sz="1158" b="0" lang="ko-KR">
                   <a:solidFill>
                     <a:srgbClr val="232F3E"/>
                   </a:solidFill>
@@ -11031,8 +11031,8 @@
           </p:blipFill>
           <p:spPr>
             <a:xfrm>
-              <a:off x="8510742" y="3718945"/>
-              <a:ext cx="508367" cy="508367"/>
+              <a:off x="8491257" y="3687856"/>
+              <a:ext cx="504265" cy="504265"/>
             </a:xfrm>
             <a:prstGeom prst="rect">
               <a:avLst/>
@@ -11047,8 +11047,8 @@
           </p:nvSpPr>
           <p:spPr>
             <a:xfrm>
-              <a:off x="8486913" y="4277089"/>
-              <a:ext cx="556026" cy="192756"/>
+              <a:off x="8467620" y="4241497"/>
+              <a:ext cx="551540" cy="191200"/>
             </a:xfrm>
             <a:prstGeom prst="rect">
               <a:avLst/>
@@ -11067,7 +11067,7 @@
                 </a:lnSpc>
               </a:pPr>
               <a:r>
-                <a:rPr sz="1167" b="0" lang="ko-KR">
+                <a:rPr sz="1158" b="0" lang="ko-KR">
                   <a:solidFill>
                     <a:srgbClr val="232F3E"/>
                   </a:solidFill>
@@ -11088,8 +11088,8 @@
           </p:nvSpPr>
           <p:spPr>
             <a:xfrm>
-              <a:off x="2855162" y="2977577"/>
-              <a:ext cx="1864011" cy="995552"/>
+              <a:off x="2881312" y="2952470"/>
+              <a:ext cx="1848971" cy="987518"/>
             </a:xfrm>
             <a:custGeom>
               <a:avLst/>
@@ -11098,24 +11098,24 @@
               <a:cxnLst/>
               <a:rect l="l" t="t" r="r" b="b"/>
               <a:pathLst>
-                <a:path w="1864011" h="995552">
+                <a:path w="1848971" h="987518">
                   <a:moveTo>
-                    <a:pt x="0" y="995552"/>
+                    <a:pt x="0" y="987518"/>
                   </a:moveTo>
                   <a:lnTo>
-                    <a:pt x="1652192" y="995552"/>
+                    <a:pt x="1638861" y="987518"/>
                   </a:lnTo>
                   <a:lnTo>
-                    <a:pt x="1652192" y="0"/>
+                    <a:pt x="1638861" y="0"/>
                   </a:lnTo>
                   <a:lnTo>
-                    <a:pt x="1864011" y="0"/>
+                    <a:pt x="1848971" y="0"/>
                   </a:lnTo>
                 </a:path>
               </a:pathLst>
             </a:custGeom>
             <a:noFill/>
-            <a:ln w="15886">
+            <a:ln w="15758">
               <a:solidFill>
                 <a:srgbClr val="232F3E"/>
               </a:solidFill>
@@ -11140,8 +11140,8 @@
           </p:nvSpPr>
           <p:spPr>
             <a:xfrm>
-              <a:off x="2855162" y="3973129"/>
-              <a:ext cx="1864011" cy="1440372"/>
+              <a:off x="2881312" y="3939988"/>
+              <a:ext cx="1848971" cy="1428750"/>
             </a:xfrm>
             <a:custGeom>
               <a:avLst/>
@@ -11150,24 +11150,24 @@
               <a:cxnLst/>
               <a:rect l="l" t="t" r="r" b="b"/>
               <a:pathLst>
-                <a:path w="1864011" h="1440372">
+                <a:path w="1848971" h="1428750">
                   <a:moveTo>
                     <a:pt x="0" y="0"/>
                   </a:moveTo>
                   <a:lnTo>
-                    <a:pt x="1652192" y="0"/>
+                    <a:pt x="1638861" y="0"/>
                   </a:lnTo>
                   <a:lnTo>
-                    <a:pt x="1652192" y="1440372"/>
+                    <a:pt x="1638861" y="1428750"/>
                   </a:lnTo>
                   <a:lnTo>
-                    <a:pt x="1864011" y="1440372"/>
+                    <a:pt x="1848971" y="1428750"/>
                   </a:lnTo>
                 </a:path>
               </a:pathLst>
             </a:custGeom>
             <a:noFill/>
-            <a:ln w="15886">
+            <a:ln w="15758">
               <a:solidFill>
                 <a:srgbClr val="232F3E"/>
               </a:solidFill>
@@ -11192,13 +11192,13 @@
           </p:nvCxnSpPr>
           <p:spPr>
             <a:xfrm>
-              <a:off x="5312268" y="2977577"/>
-              <a:ext cx="921415" cy="0"/>
+              <a:off x="5318592" y="2952470"/>
+              <a:ext cx="913980" cy="0"/>
             </a:xfrm>
             <a:prstGeom prst="line">
               <a:avLst/>
             </a:prstGeom>
-            <a:ln w="15886">
+            <a:ln w="15758">
               <a:solidFill>
                 <a:srgbClr val="232F3E"/>
               </a:solidFill>
@@ -11216,13 +11216,13 @@
           </p:nvCxnSpPr>
           <p:spPr>
             <a:xfrm>
-              <a:off x="5312268" y="5413501"/>
-              <a:ext cx="921415" cy="0"/>
+              <a:off x="5318592" y="5368738"/>
+              <a:ext cx="913980" cy="0"/>
             </a:xfrm>
             <a:prstGeom prst="line">
               <a:avLst/>
             </a:prstGeom>
-            <a:ln w="15886">
+            <a:ln w="15758">
               <a:solidFill>
                 <a:srgbClr val="232F3E"/>
               </a:solidFill>
@@ -11240,8 +11240,8 @@
           </p:nvSpPr>
           <p:spPr>
             <a:xfrm>
-              <a:off x="5015721" y="3507126"/>
-              <a:ext cx="3452657" cy="381275"/>
+              <a:off x="5024438" y="3477746"/>
+              <a:ext cx="3424797" cy="378198"/>
             </a:xfrm>
             <a:custGeom>
               <a:avLst/>
@@ -11250,12 +11250,12 @@
               <a:cxnLst/>
               <a:rect l="l" t="t" r="r" b="b"/>
               <a:pathLst>
-                <a:path w="3452657" h="381275">
+                <a:path w="3424797" h="378198">
                   <a:moveTo>
-                    <a:pt x="3452657" y="381275"/>
+                    <a:pt x="3424797" y="378198"/>
                   </a:moveTo>
                   <a:lnTo>
-                    <a:pt x="0" y="381275"/>
+                    <a:pt x="0" y="378198"/>
                   </a:lnTo>
                   <a:lnTo>
                     <a:pt x="0" y="0"/>
@@ -11264,7 +11264,7 @@
               </a:pathLst>
             </a:custGeom>
             <a:noFill/>
-            <a:ln w="15886">
+            <a:ln w="15758">
               <a:solidFill>
                 <a:srgbClr val="232F3E"/>
               </a:solidFill>
@@ -11290,8 +11290,8 @@
           </p:nvSpPr>
           <p:spPr>
             <a:xfrm>
-              <a:off x="5015721" y="4057856"/>
-              <a:ext cx="3452657" cy="1059098"/>
+              <a:off x="5024438" y="4024032"/>
+              <a:ext cx="3424797" cy="1050552"/>
             </a:xfrm>
             <a:custGeom>
               <a:avLst/>
@@ -11300,21 +11300,21 @@
               <a:cxnLst/>
               <a:rect l="l" t="t" r="r" b="b"/>
               <a:pathLst>
-                <a:path w="3452657" h="1059098">
+                <a:path w="3424797" h="1050552">
                   <a:moveTo>
-                    <a:pt x="3452657" y="0"/>
+                    <a:pt x="3424797" y="0"/>
                   </a:moveTo>
                   <a:lnTo>
                     <a:pt x="0" y="0"/>
                   </a:lnTo>
                   <a:lnTo>
-                    <a:pt x="0" y="1059098"/>
+                    <a:pt x="0" y="1050552"/>
                   </a:lnTo>
                 </a:path>
               </a:pathLst>
             </a:custGeom>
             <a:noFill/>
-            <a:ln w="15886">
+            <a:ln w="15758">
               <a:solidFill>
                 <a:srgbClr val="232F3E"/>
               </a:solidFill>
@@ -11340,13 +11340,13 @@
           </p:nvCxnSpPr>
           <p:spPr>
             <a:xfrm>
-              <a:off x="9061473" y="3973129"/>
-              <a:ext cx="974370" cy="0"/>
+              <a:off x="9037544" y="3939988"/>
+              <a:ext cx="966507" cy="0"/>
             </a:xfrm>
             <a:prstGeom prst="line">
               <a:avLst/>
             </a:prstGeom>
-            <a:ln w="15886">
+            <a:ln w="15758">
               <a:solidFill>
                 <a:srgbClr val="232F3E"/>
               </a:solidFill>
@@ -11365,8 +11365,8 @@
           </p:nvSpPr>
           <p:spPr>
             <a:xfrm>
-              <a:off x="8960859" y="4021847"/>
-              <a:ext cx="1175598" cy="165219"/>
+              <a:off x="8937742" y="3988314"/>
+              <a:ext cx="1166112" cy="163886"/>
             </a:xfrm>
             <a:prstGeom prst="rect">
               <a:avLst/>
@@ -11385,7 +11385,7 @@
                 </a:lnSpc>
               </a:pPr>
               <a:r>
-                <a:rPr sz="1000" b="0" lang="ko-KR">
+                <a:rPr sz="992" b="0" lang="ko-KR">
                   <a:solidFill>
                     <a:srgbClr val="232F3E"/>
                   </a:solidFill>
@@ -11406,8 +11406,8 @@
           </p:nvSpPr>
           <p:spPr>
             <a:xfrm>
-              <a:off x="3575348" y="3718945"/>
-              <a:ext cx="211819" cy="211819"/>
+              <a:off x="3595687" y="3687856"/>
+              <a:ext cx="210110" cy="210110"/>
             </a:xfrm>
             <a:prstGeom prst="ellipse">
               <a:avLst/>
@@ -11435,8 +11435,8 @@
           </p:nvSpPr>
           <p:spPr>
             <a:xfrm>
-              <a:off x="3574024" y="3746482"/>
-              <a:ext cx="214467" cy="165219"/>
+              <a:off x="3594374" y="3715170"/>
+              <a:ext cx="212737" cy="163886"/>
             </a:xfrm>
             <a:prstGeom prst="rect">
               <a:avLst/>
@@ -11455,7 +11455,7 @@
                 </a:lnSpc>
               </a:pPr>
               <a:r>
-                <a:rPr sz="1000" b="1" lang="ko-KR">
+                <a:rPr sz="992" b="1" lang="ko-KR">
                   <a:solidFill>
                     <a:srgbClr val="FFFFFF"/>
                   </a:solidFill>
@@ -11476,8 +11476,8 @@
           </p:nvSpPr>
           <p:spPr>
             <a:xfrm>
-              <a:off x="7727010" y="3634217"/>
-              <a:ext cx="211819" cy="211819"/>
+              <a:off x="7713849" y="3603812"/>
+              <a:ext cx="210110" cy="210110"/>
             </a:xfrm>
             <a:prstGeom prst="ellipse">
               <a:avLst/>
@@ -11505,8 +11505,8 @@
           </p:nvSpPr>
           <p:spPr>
             <a:xfrm>
-              <a:off x="7725686" y="3661754"/>
-              <a:ext cx="214467" cy="165219"/>
+              <a:off x="7712536" y="3631126"/>
+              <a:ext cx="212737" cy="163886"/>
             </a:xfrm>
             <a:prstGeom prst="rect">
               <a:avLst/>
@@ -11525,7 +11525,7 @@
                 </a:lnSpc>
               </a:pPr>
               <a:r>
-                <a:rPr sz="1000" b="1" lang="ko-KR">
+                <a:rPr sz="992" b="1" lang="ko-KR">
                   <a:solidFill>
                     <a:srgbClr val="FFFFFF"/>
                   </a:solidFill>
@@ -11546,8 +11546,8 @@
           </p:nvSpPr>
           <p:spPr>
             <a:xfrm>
-              <a:off x="9442748" y="3718945"/>
-              <a:ext cx="211819" cy="211819"/>
+              <a:off x="9415743" y="3687856"/>
+              <a:ext cx="210110" cy="210110"/>
             </a:xfrm>
             <a:prstGeom prst="ellipse">
               <a:avLst/>
@@ -11575,8 +11575,8 @@
           </p:nvSpPr>
           <p:spPr>
             <a:xfrm>
-              <a:off x="9441424" y="3746482"/>
-              <a:ext cx="214467" cy="165219"/>
+              <a:off x="9414429" y="3715170"/>
+              <a:ext cx="212737" cy="163886"/>
             </a:xfrm>
             <a:prstGeom prst="rect">
               <a:avLst/>
@@ -11595,7 +11595,7 @@
                 </a:lnSpc>
               </a:pPr>
               <a:r>
-                <a:rPr sz="1000" b="1" lang="ko-KR">
+                <a:rPr sz="992" b="1" lang="ko-KR">
                   <a:solidFill>
                     <a:srgbClr val="FFFFFF"/>
                   </a:solidFill>
@@ -11616,8 +11616,8 @@
           </p:nvSpPr>
           <p:spPr>
             <a:xfrm>
-              <a:off x="5884181" y="2723394"/>
-              <a:ext cx="211819" cy="211819"/>
+              <a:off x="5885890" y="2700338"/>
+              <a:ext cx="210110" cy="210110"/>
             </a:xfrm>
             <a:prstGeom prst="ellipse">
               <a:avLst/>
@@ -11645,8 +11645,8 @@
           </p:nvSpPr>
           <p:spPr>
             <a:xfrm>
-              <a:off x="5882857" y="2750930"/>
-              <a:ext cx="214467" cy="165219"/>
+              <a:off x="5884577" y="2727652"/>
+              <a:ext cx="212737" cy="163886"/>
             </a:xfrm>
             <a:prstGeom prst="rect">
               <a:avLst/>
@@ -11665,7 +11665,7 @@
                 </a:lnSpc>
               </a:pPr>
               <a:r>
-                <a:rPr sz="1000" b="1" lang="ko-KR">
+                <a:rPr sz="992" b="1" lang="ko-KR">
                   <a:solidFill>
                     <a:srgbClr val="FFFFFF"/>
                   </a:solidFill>
@@ -11686,8 +11686,8 @@
           </p:nvSpPr>
           <p:spPr>
             <a:xfrm>
-              <a:off x="5884181" y="5159318"/>
-              <a:ext cx="211819" cy="211819"/>
+              <a:off x="5885890" y="5116606"/>
+              <a:ext cx="210110" cy="210110"/>
             </a:xfrm>
             <a:prstGeom prst="ellipse">
               <a:avLst/>
@@ -11715,8 +11715,8 @@
           </p:nvSpPr>
           <p:spPr>
             <a:xfrm>
-              <a:off x="5882857" y="5186854"/>
-              <a:ext cx="214467" cy="165219"/>
+              <a:off x="5884577" y="5143920"/>
+              <a:ext cx="212737" cy="163886"/>
             </a:xfrm>
             <a:prstGeom prst="rect">
               <a:avLst/>
@@ -11735,7 +11735,7 @@
                 </a:lnSpc>
               </a:pPr>
               <a:r>
-                <a:rPr sz="1000" b="1" lang="ko-KR">
+                <a:rPr sz="992" b="1" lang="ko-KR">
                   <a:solidFill>
                     <a:srgbClr val="FFFFFF"/>
                   </a:solidFill>
@@ -11756,13 +11756,13 @@
           </p:nvCxnSpPr>
           <p:spPr>
             <a:xfrm>
-              <a:off x="864058" y="3973129"/>
-              <a:ext cx="1398009" cy="0"/>
+              <a:off x="906276" y="3939988"/>
+              <a:ext cx="1386728" cy="0"/>
             </a:xfrm>
             <a:prstGeom prst="line">
               <a:avLst/>
             </a:prstGeom>
-            <a:ln w="15886">
+            <a:ln w="15758">
               <a:solidFill>
                 <a:srgbClr val="232F3E"/>
               </a:solidFill>
@@ -11780,8 +11780,8 @@
           </p:nvSpPr>
           <p:spPr>
             <a:xfrm>
-              <a:off x="766092" y="3757073"/>
-              <a:ext cx="1000847" cy="165219"/>
+              <a:off x="809100" y="3725676"/>
+              <a:ext cx="992771" cy="163886"/>
             </a:xfrm>
             <a:prstGeom prst="rect">
               <a:avLst/>
@@ -11800,7 +11800,7 @@
                 </a:lnSpc>
               </a:pPr>
               <a:r>
-                <a:rPr sz="1000" b="0" lang="ko-KR">
+                <a:rPr sz="992" b="0" lang="ko-KR">
                   <a:solidFill>
                     <a:srgbClr val="232F3E"/>
                   </a:solidFill>
@@ -11821,8 +11821,8 @@
           </p:nvSpPr>
           <p:spPr>
             <a:xfrm>
-              <a:off x="1711336" y="6398462"/>
-              <a:ext cx="211819" cy="211819"/>
+              <a:off x="1746717" y="6440301"/>
+              <a:ext cx="210110" cy="210110"/>
             </a:xfrm>
             <a:prstGeom prst="ellipse">
               <a:avLst/>
@@ -11850,8 +11850,8 @@
           </p:nvSpPr>
           <p:spPr>
             <a:xfrm>
-              <a:off x="1710013" y="6425998"/>
-              <a:ext cx="214467" cy="165219"/>
+              <a:off x="1745404" y="6467615"/>
+              <a:ext cx="212737" cy="163886"/>
             </a:xfrm>
             <a:prstGeom prst="rect">
               <a:avLst/>
@@ -11870,7 +11870,7 @@
                 </a:lnSpc>
               </a:pPr>
               <a:r>
-                <a:rPr sz="1000" b="1" lang="ko-KR">
+                <a:rPr sz="992" b="1" lang="ko-KR">
                   <a:solidFill>
                     <a:srgbClr val="FFFFFF"/>
                   </a:solidFill>
@@ -11891,8 +11891,8 @@
           </p:nvSpPr>
           <p:spPr>
             <a:xfrm>
-              <a:off x="2007884" y="6425998"/>
-              <a:ext cx="2549777" cy="165219"/>
+              <a:off x="2040871" y="6467615"/>
+              <a:ext cx="2600115" cy="163886"/>
             </a:xfrm>
             <a:prstGeom prst="rect">
               <a:avLst/>
@@ -11911,7 +11911,7 @@
                 </a:lnSpc>
               </a:pPr>
               <a:r>
-                <a:rPr sz="1000" b="0" lang="ko-KR">
+                <a:rPr sz="992" b="0" lang="ko-KR">
                   <a:solidFill>
                     <a:srgbClr val="545B64"/>
                   </a:solidFill>
@@ -11932,8 +11932,8 @@
           </p:nvSpPr>
           <p:spPr>
             <a:xfrm>
-              <a:off x="4066769" y="6398462"/>
-              <a:ext cx="211819" cy="211819"/>
+              <a:off x="4230221" y="6440301"/>
+              <a:ext cx="210110" cy="210110"/>
             </a:xfrm>
             <a:prstGeom prst="ellipse">
               <a:avLst/>
@@ -11961,8 +11961,8 @@
           </p:nvSpPr>
           <p:spPr>
             <a:xfrm>
-              <a:off x="4065445" y="6425998"/>
-              <a:ext cx="214467" cy="165219"/>
+              <a:off x="4228907" y="6467615"/>
+              <a:ext cx="212737" cy="163886"/>
             </a:xfrm>
             <a:prstGeom prst="rect">
               <a:avLst/>
@@ -11981,7 +11981,7 @@
                 </a:lnSpc>
               </a:pPr>
               <a:r>
-                <a:rPr sz="1000" b="1" lang="ko-KR">
+                <a:rPr sz="992" b="1" lang="ko-KR">
                   <a:solidFill>
                     <a:srgbClr val="FFFFFF"/>
                   </a:solidFill>
@@ -12002,8 +12002,8 @@
           </p:nvSpPr>
           <p:spPr>
             <a:xfrm>
-              <a:off x="4363317" y="6425998"/>
-              <a:ext cx="1175598" cy="165219"/>
+              <a:off x="4524375" y="6467615"/>
+              <a:ext cx="1237024" cy="163886"/>
             </a:xfrm>
             <a:prstGeom prst="rect">
               <a:avLst/>
@@ -12022,7 +12022,7 @@
                 </a:lnSpc>
               </a:pPr>
               <a:r>
-                <a:rPr sz="1000" b="0" lang="ko-KR">
+                <a:rPr sz="992" b="0" lang="ko-KR">
                   <a:solidFill>
                     <a:srgbClr val="545B64"/>
                   </a:solidFill>
@@ -12043,8 +12043,8 @@
           </p:nvSpPr>
           <p:spPr>
             <a:xfrm>
-              <a:off x="5560097" y="6398462"/>
-              <a:ext cx="211819" cy="211819"/>
+              <a:off x="5623252" y="6440301"/>
+              <a:ext cx="210110" cy="210110"/>
             </a:xfrm>
             <a:prstGeom prst="ellipse">
               <a:avLst/>
@@ -12072,8 +12072,8 @@
           </p:nvSpPr>
           <p:spPr>
             <a:xfrm>
-              <a:off x="5558773" y="6425998"/>
-              <a:ext cx="214467" cy="165219"/>
+              <a:off x="5621939" y="6467615"/>
+              <a:ext cx="212737" cy="163886"/>
             </a:xfrm>
             <a:prstGeom prst="rect">
               <a:avLst/>
@@ -12092,7 +12092,7 @@
                 </a:lnSpc>
               </a:pPr>
               <a:r>
-                <a:rPr sz="1000" b="1" lang="ko-KR">
+                <a:rPr sz="992" b="1" lang="ko-KR">
                   <a:solidFill>
                     <a:srgbClr val="FFFFFF"/>
                   </a:solidFill>
@@ -12113,8 +12113,8 @@
           </p:nvSpPr>
           <p:spPr>
             <a:xfrm>
-              <a:off x="5856644" y="6425998"/>
-              <a:ext cx="3741262" cy="165219"/>
+              <a:off x="5917406" y="6467615"/>
+              <a:ext cx="3852898" cy="163886"/>
             </a:xfrm>
             <a:prstGeom prst="rect">
               <a:avLst/>
@@ -12133,7 +12133,7 @@
                 </a:lnSpc>
               </a:pPr>
               <a:r>
-                <a:rPr sz="1000" b="0" lang="ko-KR">
+                <a:rPr sz="992" b="0" lang="ko-KR">
                   <a:solidFill>
                     <a:srgbClr val="545B64"/>
                   </a:solidFill>
@@ -12154,8 +12154,8 @@
           </p:nvSpPr>
           <p:spPr>
             <a:xfrm>
-              <a:off x="8925908" y="6398462"/>
-              <a:ext cx="211819" cy="211819"/>
+              <a:off x="9108982" y="6440301"/>
+              <a:ext cx="210110" cy="210110"/>
             </a:xfrm>
             <a:prstGeom prst="ellipse">
               <a:avLst/>
@@ -12183,8 +12183,8 @@
           </p:nvSpPr>
           <p:spPr>
             <a:xfrm>
-              <a:off x="8924585" y="6425998"/>
-              <a:ext cx="214467" cy="165219"/>
+              <a:off x="9107668" y="6467615"/>
+              <a:ext cx="212737" cy="163886"/>
             </a:xfrm>
             <a:prstGeom prst="rect">
               <a:avLst/>
@@ -12203,7 +12203,7 @@
                 </a:lnSpc>
               </a:pPr>
               <a:r>
-                <a:rPr sz="1000" b="1" lang="ko-KR">
+                <a:rPr sz="992" b="1" lang="ko-KR">
                   <a:solidFill>
                     <a:srgbClr val="FFFFFF"/>
                   </a:solidFill>
@@ -12224,8 +12224,8 @@
           </p:nvSpPr>
           <p:spPr>
             <a:xfrm>
-              <a:off x="9222456" y="6425998"/>
-              <a:ext cx="1088223" cy="165219"/>
+              <a:off x="9403136" y="6467615"/>
+              <a:ext cx="1150354" cy="163886"/>
             </a:xfrm>
             <a:prstGeom prst="rect">
               <a:avLst/>
@@ -12244,7 +12244,7 @@
                 </a:lnSpc>
               </a:pPr>
               <a:r>
-                <a:rPr sz="1000" b="0" lang="ko-KR">
+                <a:rPr sz="992" b="0" lang="ko-KR">
                   <a:solidFill>
                     <a:srgbClr val="545B64"/>
                   </a:solidFill>
@@ -12320,10 +12320,10 @@
         </p:nvGrpSpPr>
         <p:grpSpPr>
           <a:xfrm>
-            <a:off x="402167" y="1083733"/>
-            <a:ext cx="13337646" cy="5526617"/>
-            <a:chOff x="402167" y="1083733"/>
-            <a:chExt cx="13337646" cy="5526617"/>
+            <a:off x="592667" y="1083733"/>
+            <a:ext cx="12472458" cy="5547784"/>
+            <a:chOff x="592667" y="1083733"/>
+            <a:chExt cx="12472458" cy="5547784"/>
           </a:xfrm>
         </p:grpSpPr>
         <p:sp>
@@ -12334,7 +12334,7 @@
           </p:nvSpPr>
           <p:spPr>
             <a:xfrm>
-              <a:off x="402167" y="2988733"/>
+              <a:off x="592667" y="2988733"/>
               <a:ext cx="1820333" cy="1397000"/>
             </a:xfrm>
             <a:prstGeom prst="rect">
@@ -12379,7 +12379,7 @@
           </p:blipFill>
           <p:spPr>
             <a:xfrm>
-              <a:off x="402167" y="2988733"/>
+              <a:off x="592667" y="2988733"/>
               <a:ext cx="254000" cy="254000"/>
             </a:xfrm>
             <a:prstGeom prst="rect">
@@ -12395,7 +12395,7 @@
           </p:nvSpPr>
           <p:spPr>
             <a:xfrm>
-              <a:off x="740833" y="3038475"/>
+              <a:off x="931333" y="3038475"/>
               <a:ext cx="1268677" cy="192617"/>
             </a:xfrm>
             <a:prstGeom prst="rect">
@@ -12450,7 +12450,7 @@
           </p:blipFill>
           <p:spPr>
             <a:xfrm>
-              <a:off x="1058333" y="3348567"/>
+              <a:off x="1248833" y="3348567"/>
               <a:ext cx="508000" cy="508000"/>
             </a:xfrm>
             <a:prstGeom prst="rect">
@@ -12466,7 +12466,7 @@
           </p:nvSpPr>
           <p:spPr>
             <a:xfrm>
-              <a:off x="423333" y="3906308"/>
+              <a:off x="613833" y="3906308"/>
               <a:ext cx="1778000" cy="192617"/>
             </a:xfrm>
             <a:prstGeom prst="rect">
@@ -12507,7 +12507,7 @@
           </p:nvSpPr>
           <p:spPr>
             <a:xfrm>
-              <a:off x="637646" y="4095750"/>
+              <a:off x="828146" y="4095750"/>
               <a:ext cx="1349375" cy="165100"/>
             </a:xfrm>
             <a:prstGeom prst="rect">
@@ -12562,7 +12562,7 @@
           </p:blipFill>
           <p:spPr>
             <a:xfrm>
-              <a:off x="2582333" y="3348567"/>
+              <a:off x="2772833" y="3348567"/>
               <a:ext cx="508000" cy="508000"/>
             </a:xfrm>
             <a:prstGeom prst="rect">
@@ -12578,7 +12578,7 @@
           </p:nvSpPr>
           <p:spPr>
             <a:xfrm>
-              <a:off x="2354792" y="3906308"/>
+              <a:off x="2545292" y="3906308"/>
               <a:ext cx="963083" cy="192617"/>
             </a:xfrm>
             <a:prstGeom prst="rect">
@@ -12619,7 +12619,7 @@
           </p:nvCxnSpPr>
           <p:spPr>
             <a:xfrm>
-              <a:off x="1608667" y="3602567"/>
+              <a:off x="1799167" y="3602567"/>
               <a:ext cx="931333" cy="0"/>
             </a:xfrm>
             <a:prstGeom prst="line">
@@ -12642,7 +12642,7 @@
           </p:nvCxnSpPr>
           <p:spPr>
             <a:xfrm>
-              <a:off x="3132667" y="3602567"/>
+              <a:off x="3323167" y="3602567"/>
               <a:ext cx="529166" cy="0"/>
             </a:xfrm>
             <a:prstGeom prst="line">
@@ -12665,7 +12665,7 @@
           </p:nvSpPr>
           <p:spPr>
             <a:xfrm>
-              <a:off x="3115469" y="3386667"/>
+              <a:off x="3305969" y="3386667"/>
               <a:ext cx="563562" cy="165100"/>
             </a:xfrm>
             <a:prstGeom prst="rect">
@@ -12720,7 +12720,7 @@
           </p:blipFill>
           <p:spPr>
             <a:xfrm>
-              <a:off x="3704167" y="3348567"/>
+              <a:off x="3894667" y="3348567"/>
               <a:ext cx="508000" cy="508000"/>
             </a:xfrm>
             <a:prstGeom prst="rect">
@@ -12736,7 +12736,7 @@
           </p:nvSpPr>
           <p:spPr>
             <a:xfrm>
-              <a:off x="3069167" y="3906308"/>
+              <a:off x="3259667" y="3906308"/>
               <a:ext cx="1778000" cy="192617"/>
             </a:xfrm>
             <a:prstGeom prst="rect">
@@ -12777,7 +12777,7 @@
           </p:nvCxnSpPr>
           <p:spPr>
             <a:xfrm>
-              <a:off x="4254500" y="3602567"/>
+              <a:off x="4445000" y="3602567"/>
               <a:ext cx="1820333" cy="0"/>
             </a:xfrm>
             <a:prstGeom prst="line">
@@ -12800,8 +12800,8 @@
           </p:nvSpPr>
           <p:spPr>
             <a:xfrm>
-              <a:off x="4762500" y="1083733"/>
-              <a:ext cx="7027333" cy="4931833"/>
+              <a:off x="4953000" y="1083733"/>
+              <a:ext cx="6646333" cy="4931833"/>
             </a:xfrm>
             <a:prstGeom prst="rect">
               <a:avLst/>
@@ -12845,7 +12845,7 @@
           </p:blipFill>
           <p:spPr>
             <a:xfrm>
-              <a:off x="4762500" y="1083733"/>
+              <a:off x="4953000" y="1083733"/>
               <a:ext cx="338667" cy="338667"/>
             </a:xfrm>
             <a:prstGeom prst="rect">
@@ -12861,7 +12861,7 @@
           </p:nvSpPr>
           <p:spPr>
             <a:xfrm>
-              <a:off x="5207000" y="1165754"/>
+              <a:off x="5397500" y="1165754"/>
               <a:ext cx="1141016" cy="206375"/>
             </a:xfrm>
             <a:prstGeom prst="rect">
@@ -12902,8 +12902,8 @@
           </p:nvSpPr>
           <p:spPr>
             <a:xfrm>
-              <a:off x="4974167" y="1507067"/>
-              <a:ext cx="3048000" cy="4296833"/>
+              <a:off x="5164667" y="1507067"/>
+              <a:ext cx="2667000" cy="4296833"/>
             </a:xfrm>
             <a:prstGeom prst="rect">
               <a:avLst/>
@@ -12949,7 +12949,7 @@
           </p:blipFill>
           <p:spPr>
             <a:xfrm>
-              <a:off x="4974167" y="1507067"/>
+              <a:off x="5164667" y="1507067"/>
               <a:ext cx="254000" cy="254000"/>
             </a:xfrm>
             <a:prstGeom prst="rect">
@@ -12965,7 +12965,7 @@
           </p:nvSpPr>
           <p:spPr>
             <a:xfrm>
-              <a:off x="5312833" y="1556808"/>
+              <a:off x="5503333" y="1556808"/>
               <a:ext cx="2287323" cy="192617"/>
             </a:xfrm>
             <a:prstGeom prst="rect">
@@ -13020,7 +13020,7 @@
           </p:blipFill>
           <p:spPr>
             <a:xfrm>
-              <a:off x="6117167" y="3348567"/>
+              <a:off x="6307667" y="3348567"/>
               <a:ext cx="508000" cy="508000"/>
             </a:xfrm>
             <a:prstGeom prst="rect">
@@ -13036,7 +13036,7 @@
           </p:nvSpPr>
           <p:spPr>
             <a:xfrm>
-              <a:off x="5431234" y="3906308"/>
+              <a:off x="5621734" y="3906308"/>
               <a:ext cx="1879865" cy="192617"/>
             </a:xfrm>
             <a:prstGeom prst="rect">
@@ -13091,7 +13091,7 @@
           </p:blipFill>
           <p:spPr>
             <a:xfrm>
-              <a:off x="5482167" y="1930400"/>
+              <a:off x="5672667" y="1930400"/>
               <a:ext cx="508000" cy="508000"/>
             </a:xfrm>
             <a:prstGeom prst="rect">
@@ -13107,7 +13107,7 @@
           </p:nvSpPr>
           <p:spPr>
             <a:xfrm>
-              <a:off x="5050896" y="2488142"/>
+              <a:off x="5241396" y="2488142"/>
               <a:ext cx="1370542" cy="192617"/>
             </a:xfrm>
             <a:prstGeom prst="rect">
@@ -13148,7 +13148,7 @@
           </p:nvSpPr>
           <p:spPr>
             <a:xfrm>
-              <a:off x="5192448" y="2677583"/>
+              <a:off x="5382948" y="2677583"/>
               <a:ext cx="1087438" cy="165100"/>
             </a:xfrm>
             <a:prstGeom prst="rect">
@@ -13203,7 +13203,7 @@
           </p:blipFill>
           <p:spPr>
             <a:xfrm>
-              <a:off x="6752167" y="1930400"/>
+              <a:off x="6942667" y="1930400"/>
               <a:ext cx="508000" cy="508000"/>
             </a:xfrm>
             <a:prstGeom prst="rect">
@@ -13219,7 +13219,7 @@
           </p:nvSpPr>
           <p:spPr>
             <a:xfrm>
-              <a:off x="6524625" y="2488142"/>
+              <a:off x="6715125" y="2488142"/>
               <a:ext cx="963083" cy="192617"/>
             </a:xfrm>
             <a:prstGeom prst="rect">
@@ -13260,7 +13260,7 @@
           </p:nvSpPr>
           <p:spPr>
             <a:xfrm>
-              <a:off x="6462448" y="2677583"/>
+              <a:off x="6652948" y="2677583"/>
               <a:ext cx="1087438" cy="165100"/>
             </a:xfrm>
             <a:prstGeom prst="rect">
@@ -13315,7 +13315,7 @@
           </p:blipFill>
           <p:spPr>
             <a:xfrm>
-              <a:off x="5482167" y="4766733"/>
+              <a:off x="5672667" y="4766733"/>
               <a:ext cx="508000" cy="508000"/>
             </a:xfrm>
             <a:prstGeom prst="rect">
@@ -13331,7 +13331,7 @@
           </p:nvSpPr>
           <p:spPr>
             <a:xfrm>
-              <a:off x="5305557" y="5324475"/>
+              <a:off x="5496057" y="5324475"/>
               <a:ext cx="861219" cy="192617"/>
             </a:xfrm>
             <a:prstGeom prst="rect">
@@ -13372,7 +13372,7 @@
           </p:nvSpPr>
           <p:spPr>
             <a:xfrm>
-              <a:off x="5192448" y="5513917"/>
+              <a:off x="5382948" y="5513917"/>
               <a:ext cx="1087438" cy="165100"/>
             </a:xfrm>
             <a:prstGeom prst="rect">
@@ -13427,7 +13427,7 @@
           </p:blipFill>
           <p:spPr>
             <a:xfrm>
-              <a:off x="6752167" y="4766733"/>
+              <a:off x="6942667" y="4766733"/>
               <a:ext cx="508000" cy="508000"/>
             </a:xfrm>
             <a:prstGeom prst="rect">
@@ -13443,7 +13443,7 @@
           </p:nvSpPr>
           <p:spPr>
             <a:xfrm>
-              <a:off x="6524625" y="5324475"/>
+              <a:off x="6715125" y="5324475"/>
               <a:ext cx="963083" cy="192617"/>
             </a:xfrm>
             <a:prstGeom prst="rect">
@@ -13484,7 +13484,7 @@
           </p:nvSpPr>
           <p:spPr>
             <a:xfrm>
-              <a:off x="6462448" y="5513917"/>
+              <a:off x="6652948" y="5513917"/>
               <a:ext cx="1087438" cy="165100"/>
             </a:xfrm>
             <a:prstGeom prst="rect">
@@ -13525,7 +13525,7 @@
           </p:nvSpPr>
           <p:spPr>
             <a:xfrm>
-              <a:off x="5736167" y="2882900"/>
+              <a:off x="5926667" y="2882900"/>
               <a:ext cx="529166" cy="423333"/>
             </a:xfrm>
             <a:custGeom>
@@ -13576,7 +13576,7 @@
           </p:nvSpPr>
           <p:spPr>
             <a:xfrm>
-              <a:off x="6477000" y="2882900"/>
+              <a:off x="6667500" y="2882900"/>
               <a:ext cx="529167" cy="423333"/>
             </a:xfrm>
             <a:custGeom>
@@ -13627,7 +13627,7 @@
           </p:nvSpPr>
           <p:spPr>
             <a:xfrm>
-              <a:off x="5736167" y="4131733"/>
+              <a:off x="5926667" y="4131733"/>
               <a:ext cx="529166" cy="592667"/>
             </a:xfrm>
             <a:custGeom>
@@ -13678,7 +13678,7 @@
           </p:nvSpPr>
           <p:spPr>
             <a:xfrm>
-              <a:off x="6477000" y="4131733"/>
+              <a:off x="6667500" y="4131733"/>
               <a:ext cx="529167" cy="592667"/>
             </a:xfrm>
             <a:custGeom>
@@ -13729,7 +13729,7 @@
           </p:nvSpPr>
           <p:spPr>
             <a:xfrm>
-              <a:off x="9122833" y="1507067"/>
+              <a:off x="8932333" y="1507067"/>
               <a:ext cx="2455333" cy="4296833"/>
             </a:xfrm>
             <a:prstGeom prst="rect">
@@ -13776,7 +13776,7 @@
           </p:blipFill>
           <p:spPr>
             <a:xfrm>
-              <a:off x="9122833" y="1507067"/>
+              <a:off x="8932333" y="1507067"/>
               <a:ext cx="254000" cy="254000"/>
             </a:xfrm>
             <a:prstGeom prst="rect">
@@ -13792,7 +13792,7 @@
           </p:nvSpPr>
           <p:spPr>
             <a:xfrm>
-              <a:off x="9461500" y="1556808"/>
+              <a:off x="9271000" y="1556808"/>
               <a:ext cx="2287323" cy="192617"/>
             </a:xfrm>
             <a:prstGeom prst="rect">
@@ -13847,7 +13847,7 @@
           </p:blipFill>
           <p:spPr>
             <a:xfrm>
-              <a:off x="10054167" y="3348567"/>
+              <a:off x="9863667" y="3348567"/>
               <a:ext cx="508000" cy="508000"/>
             </a:xfrm>
             <a:prstGeom prst="rect">
@@ -13863,7 +13863,7 @@
           </p:nvSpPr>
           <p:spPr>
             <a:xfrm>
-              <a:off x="9368234" y="3906308"/>
+              <a:off x="9177734" y="3906308"/>
               <a:ext cx="1879865" cy="192617"/>
             </a:xfrm>
             <a:prstGeom prst="rect">
@@ -13918,7 +13918,7 @@
           </p:blipFill>
           <p:spPr>
             <a:xfrm>
-              <a:off x="10054167" y="1930400"/>
+              <a:off x="9863667" y="1930400"/>
               <a:ext cx="508000" cy="508000"/>
             </a:xfrm>
             <a:prstGeom prst="rect">
@@ -13934,7 +13934,7 @@
           </p:nvSpPr>
           <p:spPr>
             <a:xfrm>
-              <a:off x="9928490" y="2488142"/>
+              <a:off x="9737990" y="2488142"/>
               <a:ext cx="759354" cy="192617"/>
             </a:xfrm>
             <a:prstGeom prst="rect">
@@ -13975,7 +13975,7 @@
           </p:nvSpPr>
           <p:spPr>
             <a:xfrm>
-              <a:off x="9720792" y="2677583"/>
+              <a:off x="9530292" y="2677583"/>
               <a:ext cx="1174750" cy="165100"/>
             </a:xfrm>
             <a:prstGeom prst="rect">
@@ -14030,7 +14030,7 @@
           </p:blipFill>
           <p:spPr>
             <a:xfrm>
-              <a:off x="10054167" y="4766733"/>
+              <a:off x="9863667" y="4766733"/>
               <a:ext cx="508000" cy="508000"/>
             </a:xfrm>
             <a:prstGeom prst="rect">
@@ -14046,7 +14046,7 @@
           </p:nvSpPr>
           <p:spPr>
             <a:xfrm>
-              <a:off x="9571964" y="5324475"/>
+              <a:off x="9381464" y="5324475"/>
               <a:ext cx="1472406" cy="192617"/>
             </a:xfrm>
             <a:prstGeom prst="rect">
@@ -14087,7 +14087,7 @@
           </p:nvSpPr>
           <p:spPr>
             <a:xfrm>
-              <a:off x="9720792" y="5513917"/>
+              <a:off x="9530292" y="5513917"/>
               <a:ext cx="1174750" cy="165100"/>
             </a:xfrm>
             <a:prstGeom prst="rect">
@@ -14128,7 +14128,7 @@
           </p:nvCxnSpPr>
           <p:spPr>
             <a:xfrm flipV="1">
-              <a:off x="10308167" y="2882900"/>
+              <a:off x="10117667" y="2882900"/>
               <a:ext cx="0" cy="423333"/>
             </a:xfrm>
             <a:prstGeom prst="line">
@@ -14151,7 +14151,7 @@
           </p:nvCxnSpPr>
           <p:spPr>
             <a:xfrm>
-              <a:off x="10308167" y="4131733"/>
+              <a:off x="10117667" y="4131733"/>
               <a:ext cx="0" cy="592667"/>
             </a:xfrm>
             <a:prstGeom prst="line">
@@ -14174,8 +14174,8 @@
           </p:nvCxnSpPr>
           <p:spPr>
             <a:xfrm>
-              <a:off x="6667500" y="3602567"/>
-              <a:ext cx="1608667" cy="0"/>
+              <a:off x="6858000" y="3602567"/>
+              <a:ext cx="1227667" cy="0"/>
             </a:xfrm>
             <a:prstGeom prst="line">
               <a:avLst/>
@@ -14197,7 +14197,7 @@
           </p:nvCxnSpPr>
           <p:spPr>
             <a:xfrm>
-              <a:off x="8868833" y="3602567"/>
+              <a:off x="8678333" y="3602567"/>
               <a:ext cx="1143000" cy="0"/>
             </a:xfrm>
             <a:prstGeom prst="line">
@@ -14234,7 +14234,7 @@
           </p:blipFill>
           <p:spPr>
             <a:xfrm>
-              <a:off x="8318500" y="3348567"/>
+              <a:off x="8128000" y="3348567"/>
               <a:ext cx="508000" cy="508000"/>
             </a:xfrm>
             <a:prstGeom prst="rect">
@@ -14250,7 +14250,7 @@
           </p:nvSpPr>
           <p:spPr>
             <a:xfrm>
-              <a:off x="7938161" y="3906308"/>
+              <a:off x="7747661" y="3906308"/>
               <a:ext cx="1268677" cy="192617"/>
             </a:xfrm>
             <a:prstGeom prst="rect">
@@ -14291,7 +14291,7 @@
           </p:nvSpPr>
           <p:spPr>
             <a:xfrm>
-              <a:off x="8175625" y="4095750"/>
+              <a:off x="7985125" y="4095750"/>
               <a:ext cx="793750" cy="165100"/>
             </a:xfrm>
             <a:prstGeom prst="rect">
@@ -14332,8 +14332,8 @@
           </p:nvSpPr>
           <p:spPr>
             <a:xfrm>
-              <a:off x="4762500" y="6106583"/>
-              <a:ext cx="8977313" cy="165100"/>
+              <a:off x="4953000" y="6127750"/>
+              <a:ext cx="8112125" cy="165100"/>
             </a:xfrm>
             <a:prstGeom prst="rect">
               <a:avLst/>
@@ -14360,7 +14360,7 @@
                   <a:ea typeface="Malgun Gothic"/>
                   <a:cs typeface="Malgun Gothic"/>
                 </a:rPr>
-                <a:t>Hub &amp; spoke: VPC·VPN은 리전 TGW에 attachment로 연결 · VPC CIDR과 VPN(BGP) 경로는 TGW 라우팅 테이블에 전파</a:t>
+                <a:t>Hub &amp; spoke: VPC·VPN은 리전 TGW에 attachment로 연결 · VPC CIDR과 VPN(BGP) 경로는 TGW RT에 전파</a:t>
               </a:r>
             </a:p>
           </p:txBody>
@@ -14373,8 +14373,8 @@
           </p:nvSpPr>
           <p:spPr>
             <a:xfrm>
-              <a:off x="4762500" y="6275917"/>
-              <a:ext cx="4572000" cy="165100"/>
+              <a:off x="4953000" y="6297083"/>
+              <a:ext cx="4643438" cy="165100"/>
             </a:xfrm>
             <a:prstGeom prst="rect">
               <a:avLst/>
@@ -14414,8 +14414,8 @@
           </p:nvSpPr>
           <p:spPr>
             <a:xfrm>
-              <a:off x="4762500" y="6445250"/>
-              <a:ext cx="7659688" cy="165100"/>
+              <a:off x="4953000" y="6466417"/>
+              <a:ext cx="7802563" cy="165100"/>
             </a:xfrm>
             <a:prstGeom prst="rect">
               <a:avLst/>
@@ -14510,10 +14510,10 @@
         </p:nvGrpSpPr>
         <p:grpSpPr>
           <a:xfrm>
-            <a:off x="316177" y="999067"/>
-            <a:ext cx="11785864" cy="5619750"/>
-            <a:chOff x="316177" y="999067"/>
-            <a:chExt cx="11785864" cy="5619750"/>
+            <a:off x="316177" y="935567"/>
+            <a:ext cx="11785864" cy="5715000"/>
+            <a:chOff x="316177" y="935567"/>
+            <a:chExt cx="11785864" cy="5715000"/>
           </a:xfrm>
         </p:grpSpPr>
         <p:sp>
@@ -14524,7 +14524,7 @@
           </p:nvSpPr>
           <p:spPr>
             <a:xfrm>
-              <a:off x="317500" y="999067"/>
+              <a:off x="317500" y="935567"/>
               <a:ext cx="10752667" cy="5376333"/>
             </a:xfrm>
             <a:prstGeom prst="rect">
@@ -14569,7 +14569,7 @@
           </p:blipFill>
           <p:spPr>
             <a:xfrm>
-              <a:off x="317500" y="999067"/>
+              <a:off x="317500" y="935567"/>
               <a:ext cx="338667" cy="338667"/>
             </a:xfrm>
             <a:prstGeom prst="rect">
@@ -14585,7 +14585,7 @@
           </p:nvSpPr>
           <p:spPr>
             <a:xfrm>
-              <a:off x="762000" y="1081088"/>
+              <a:off x="762000" y="1017588"/>
               <a:ext cx="1141016" cy="206375"/>
             </a:xfrm>
             <a:prstGeom prst="rect">
@@ -14626,7 +14626,7 @@
           </p:nvSpPr>
           <p:spPr>
             <a:xfrm>
-              <a:off x="529167" y="1358900"/>
+              <a:off x="529167" y="1295400"/>
               <a:ext cx="10329333" cy="4931833"/>
             </a:xfrm>
             <a:prstGeom prst="rect">
@@ -14673,7 +14673,7 @@
           </p:blipFill>
           <p:spPr>
             <a:xfrm>
-              <a:off x="529167" y="1358900"/>
+              <a:off x="529167" y="1295400"/>
               <a:ext cx="254000" cy="254000"/>
             </a:xfrm>
             <a:prstGeom prst="rect">
@@ -14689,7 +14689,7 @@
           </p:nvSpPr>
           <p:spPr>
             <a:xfrm>
-              <a:off x="867833" y="1408642"/>
+              <a:off x="867833" y="1345142"/>
               <a:ext cx="2287323" cy="192617"/>
             </a:xfrm>
             <a:prstGeom prst="rect">
@@ -14730,8 +14730,8 @@
           </p:nvSpPr>
           <p:spPr>
             <a:xfrm>
-              <a:off x="698500" y="1993900"/>
-              <a:ext cx="2116667" cy="1693333"/>
+              <a:off x="698500" y="1930400"/>
+              <a:ext cx="1735667" cy="1693333"/>
             </a:xfrm>
             <a:prstGeom prst="rect">
               <a:avLst/>
@@ -14775,7 +14775,7 @@
           </p:blipFill>
           <p:spPr>
             <a:xfrm>
-              <a:off x="698500" y="1993900"/>
+              <a:off x="698500" y="1930400"/>
               <a:ext cx="254000" cy="254000"/>
             </a:xfrm>
             <a:prstGeom prst="rect">
@@ -14791,7 +14791,7 @@
           </p:nvSpPr>
           <p:spPr>
             <a:xfrm>
-              <a:off x="1037167" y="2043642"/>
+              <a:off x="1037167" y="1980142"/>
               <a:ext cx="657490" cy="192617"/>
             </a:xfrm>
             <a:prstGeom prst="rect">
@@ -14832,7 +14832,7 @@
           </p:nvSpPr>
           <p:spPr>
             <a:xfrm>
-              <a:off x="1037167" y="2233083"/>
+              <a:off x="1037167" y="2169583"/>
               <a:ext cx="1087438" cy="165100"/>
             </a:xfrm>
             <a:prstGeom prst="rect">
@@ -14873,8 +14873,8 @@
           </p:nvSpPr>
           <p:spPr>
             <a:xfrm>
-              <a:off x="825500" y="2480733"/>
-              <a:ext cx="1862667" cy="1121833"/>
+              <a:off x="825500" y="2417233"/>
+              <a:ext cx="1481667" cy="1121833"/>
             </a:xfrm>
             <a:prstGeom prst="rect">
               <a:avLst/>
@@ -14918,7 +14918,7 @@
           </p:blipFill>
           <p:spPr>
             <a:xfrm>
-              <a:off x="825500" y="2480733"/>
+              <a:off x="825500" y="2417233"/>
               <a:ext cx="254000" cy="254000"/>
             </a:xfrm>
             <a:prstGeom prst="rect">
@@ -14934,7 +14934,7 @@
           </p:nvSpPr>
           <p:spPr>
             <a:xfrm>
-              <a:off x="1164167" y="2530475"/>
+              <a:off x="1164167" y="2466975"/>
               <a:ext cx="1166813" cy="192617"/>
             </a:xfrm>
             <a:prstGeom prst="rect">
@@ -14989,7 +14989,7 @@
           </p:blipFill>
           <p:spPr>
             <a:xfrm>
-              <a:off x="1502833" y="2777067"/>
+              <a:off x="1312333" y="2713567"/>
               <a:ext cx="508000" cy="508000"/>
             </a:xfrm>
             <a:prstGeom prst="rect">
@@ -15005,7 +15005,7 @@
           </p:nvSpPr>
           <p:spPr>
             <a:xfrm>
-              <a:off x="1529953" y="3334808"/>
+              <a:off x="1339453" y="3271308"/>
               <a:ext cx="453760" cy="192617"/>
             </a:xfrm>
             <a:prstGeom prst="rect">
@@ -15046,8 +15046,8 @@
           </p:nvSpPr>
           <p:spPr>
             <a:xfrm>
-              <a:off x="698500" y="4428067"/>
-              <a:ext cx="2116667" cy="1693333"/>
+              <a:off x="698500" y="4364567"/>
+              <a:ext cx="1735667" cy="1693333"/>
             </a:xfrm>
             <a:prstGeom prst="rect">
               <a:avLst/>
@@ -15091,7 +15091,7 @@
           </p:blipFill>
           <p:spPr>
             <a:xfrm>
-              <a:off x="698500" y="4428067"/>
+              <a:off x="698500" y="4364567"/>
               <a:ext cx="254000" cy="254000"/>
             </a:xfrm>
             <a:prstGeom prst="rect">
@@ -15107,7 +15107,7 @@
           </p:nvSpPr>
           <p:spPr>
             <a:xfrm>
-              <a:off x="1037167" y="4477808"/>
+              <a:off x="1037167" y="4414308"/>
               <a:ext cx="657490" cy="192617"/>
             </a:xfrm>
             <a:prstGeom prst="rect">
@@ -15148,7 +15148,7 @@
           </p:nvSpPr>
           <p:spPr>
             <a:xfrm>
-              <a:off x="1037167" y="4667250"/>
+              <a:off x="1037167" y="4603750"/>
               <a:ext cx="1087438" cy="165100"/>
             </a:xfrm>
             <a:prstGeom prst="rect">
@@ -15189,8 +15189,8 @@
           </p:nvSpPr>
           <p:spPr>
             <a:xfrm>
-              <a:off x="825500" y="4914900"/>
-              <a:ext cx="1862667" cy="1121833"/>
+              <a:off x="825500" y="4851400"/>
+              <a:ext cx="1481667" cy="1121833"/>
             </a:xfrm>
             <a:prstGeom prst="rect">
               <a:avLst/>
@@ -15234,7 +15234,7 @@
           </p:blipFill>
           <p:spPr>
             <a:xfrm>
-              <a:off x="825500" y="4914900"/>
+              <a:off x="825500" y="4851400"/>
               <a:ext cx="254000" cy="254000"/>
             </a:xfrm>
             <a:prstGeom prst="rect">
@@ -15250,7 +15250,7 @@
           </p:nvSpPr>
           <p:spPr>
             <a:xfrm>
-              <a:off x="1164167" y="4964642"/>
+              <a:off x="1164167" y="4901142"/>
               <a:ext cx="1166813" cy="192617"/>
             </a:xfrm>
             <a:prstGeom prst="rect">
@@ -15305,7 +15305,7 @@
           </p:blipFill>
           <p:spPr>
             <a:xfrm>
-              <a:off x="1502833" y="5211233"/>
+              <a:off x="1312333" y="5147733"/>
               <a:ext cx="508000" cy="508000"/>
             </a:xfrm>
             <a:prstGeom prst="rect">
@@ -15321,7 +15321,7 @@
           </p:nvSpPr>
           <p:spPr>
             <a:xfrm>
-              <a:off x="1529953" y="5768975"/>
+              <a:off x="1339453" y="5705475"/>
               <a:ext cx="453760" cy="192617"/>
             </a:xfrm>
             <a:prstGeom prst="rect">
@@ -15376,7 +15376,7 @@
           </p:blipFill>
           <p:spPr>
             <a:xfrm>
-              <a:off x="3429000" y="3771900"/>
+              <a:off x="3429000" y="3708400"/>
               <a:ext cx="508000" cy="508000"/>
             </a:xfrm>
             <a:prstGeom prst="rect">
@@ -15392,7 +15392,7 @@
           </p:nvSpPr>
           <p:spPr>
             <a:xfrm>
-              <a:off x="3456120" y="4329642"/>
+              <a:off x="3456120" y="4266142"/>
               <a:ext cx="453760" cy="192617"/>
             </a:xfrm>
             <a:prstGeom prst="rect">
@@ -15447,7 +15447,7 @@
           </p:blipFill>
           <p:spPr>
             <a:xfrm>
-              <a:off x="3429000" y="2777067"/>
+              <a:off x="3429000" y="2713567"/>
               <a:ext cx="508000" cy="508000"/>
             </a:xfrm>
             <a:prstGeom prst="rect">
@@ -15463,7 +15463,7 @@
           </p:nvSpPr>
           <p:spPr>
             <a:xfrm>
-              <a:off x="3048661" y="3334808"/>
+              <a:off x="3048661" y="3271308"/>
               <a:ext cx="1268677" cy="192617"/>
             </a:xfrm>
             <a:prstGeom prst="rect">
@@ -15504,7 +15504,7 @@
           </p:nvSpPr>
           <p:spPr>
             <a:xfrm>
-              <a:off x="3024188" y="3524250"/>
+              <a:off x="3024188" y="3460750"/>
               <a:ext cx="1317625" cy="165100"/>
             </a:xfrm>
             <a:prstGeom prst="rect">
@@ -15559,7 +15559,7 @@
           </p:blipFill>
           <p:spPr>
             <a:xfrm>
-              <a:off x="3429000" y="5211233"/>
+              <a:off x="3429000" y="5147733"/>
               <a:ext cx="508000" cy="508000"/>
             </a:xfrm>
             <a:prstGeom prst="rect">
@@ -15575,7 +15575,7 @@
           </p:nvSpPr>
           <p:spPr>
             <a:xfrm>
-              <a:off x="3201458" y="5768975"/>
+              <a:off x="3201458" y="5705475"/>
               <a:ext cx="963083" cy="192617"/>
             </a:xfrm>
             <a:prstGeom prst="rect">
@@ -15616,8 +15616,8 @@
           </p:nvSpPr>
           <p:spPr>
             <a:xfrm>
-              <a:off x="2762250" y="5958417"/>
-              <a:ext cx="1841500" cy="165100"/>
+              <a:off x="2726531" y="5894917"/>
+              <a:ext cx="1912937" cy="165100"/>
             </a:xfrm>
             <a:prstGeom prst="rect">
               <a:avLst/>
@@ -15657,8 +15657,8 @@
           </p:nvSpPr>
           <p:spPr>
             <a:xfrm>
-              <a:off x="2857500" y="3031067"/>
-              <a:ext cx="529167" cy="910166"/>
+              <a:off x="2476500" y="2967567"/>
+              <a:ext cx="910167" cy="910166"/>
             </a:xfrm>
             <a:custGeom>
               <a:avLst/>
@@ -15667,18 +15667,18 @@
               <a:cxnLst/>
               <a:rect l="l" t="t" r="r" b="b"/>
               <a:pathLst>
-                <a:path w="529167" h="910166">
+                <a:path w="910167" h="910166">
                   <a:moveTo>
                     <a:pt x="0" y="0"/>
                   </a:moveTo>
                   <a:lnTo>
-                    <a:pt x="254000" y="0"/>
+                    <a:pt x="635000" y="0"/>
                   </a:lnTo>
                   <a:lnTo>
-                    <a:pt x="254000" y="910166"/>
+                    <a:pt x="635000" y="910166"/>
                   </a:lnTo>
                   <a:lnTo>
-                    <a:pt x="529167" y="910166"/>
+                    <a:pt x="910167" y="910166"/>
                   </a:lnTo>
                 </a:path>
               </a:pathLst>
@@ -15710,8 +15710,8 @@
           </p:nvSpPr>
           <p:spPr>
             <a:xfrm>
-              <a:off x="2857500" y="4110567"/>
-              <a:ext cx="529167" cy="1354666"/>
+              <a:off x="2476500" y="4047067"/>
+              <a:ext cx="910167" cy="1354666"/>
             </a:xfrm>
             <a:custGeom>
               <a:avLst/>
@@ -15720,18 +15720,18 @@
               <a:cxnLst/>
               <a:rect l="l" t="t" r="r" b="b"/>
               <a:pathLst>
-                <a:path w="529167" h="1354666">
+                <a:path w="910167" h="1354666">
                   <a:moveTo>
                     <a:pt x="0" y="1354666"/>
                   </a:moveTo>
                   <a:lnTo>
-                    <a:pt x="254000" y="1354666"/>
+                    <a:pt x="635000" y="1354666"/>
                   </a:lnTo>
                   <a:lnTo>
-                    <a:pt x="254000" y="0"/>
+                    <a:pt x="635000" y="0"/>
                   </a:lnTo>
                   <a:lnTo>
-                    <a:pt x="529167" y="0"/>
+                    <a:pt x="910167" y="0"/>
                   </a:lnTo>
                 </a:path>
               </a:pathLst>
@@ -15763,7 +15763,7 @@
           </p:nvSpPr>
           <p:spPr>
             <a:xfrm>
-              <a:off x="4508500" y="1676400"/>
+              <a:off x="4508500" y="1612900"/>
               <a:ext cx="5926667" cy="4529667"/>
             </a:xfrm>
             <a:prstGeom prst="rect">
@@ -15808,7 +15808,7 @@
           </p:blipFill>
           <p:spPr>
             <a:xfrm>
-              <a:off x="4508500" y="1676400"/>
+              <a:off x="4508500" y="1612900"/>
               <a:ext cx="254000" cy="254000"/>
             </a:xfrm>
             <a:prstGeom prst="rect">
@@ -15824,7 +15824,7 @@
           </p:nvSpPr>
           <p:spPr>
             <a:xfrm>
-              <a:off x="4847167" y="1726142"/>
+              <a:off x="4847167" y="1662642"/>
               <a:ext cx="1574271" cy="192617"/>
             </a:xfrm>
             <a:prstGeom prst="rect">
@@ -15865,7 +15865,7 @@
           </p:nvSpPr>
           <p:spPr>
             <a:xfrm>
-              <a:off x="4847167" y="1915583"/>
+              <a:off x="4847167" y="1852083"/>
               <a:ext cx="1262062" cy="165100"/>
             </a:xfrm>
             <a:prstGeom prst="rect">
@@ -15906,7 +15906,7 @@
           </p:nvSpPr>
           <p:spPr>
             <a:xfrm>
-              <a:off x="4677833" y="2163233"/>
+              <a:off x="4677833" y="2099733"/>
               <a:ext cx="5037667" cy="1524000"/>
             </a:xfrm>
             <a:prstGeom prst="rect">
@@ -15939,7 +15939,7 @@
           </p:nvSpPr>
           <p:spPr>
             <a:xfrm>
-              <a:off x="4804833" y="2212975"/>
+              <a:off x="4804833" y="2149475"/>
               <a:ext cx="2083594" cy="192617"/>
             </a:xfrm>
             <a:prstGeom prst="rect">
@@ -15980,7 +15980,7 @@
           </p:nvSpPr>
           <p:spPr>
             <a:xfrm>
-              <a:off x="4677833" y="4597400"/>
+              <a:off x="4677833" y="4533900"/>
               <a:ext cx="5037667" cy="1524000"/>
             </a:xfrm>
             <a:prstGeom prst="rect">
@@ -16013,7 +16013,7 @@
           </p:nvSpPr>
           <p:spPr>
             <a:xfrm>
-              <a:off x="4804833" y="4647142"/>
+              <a:off x="4804833" y="4583642"/>
               <a:ext cx="2083594" cy="192617"/>
             </a:xfrm>
             <a:prstGeom prst="rect">
@@ -16054,7 +16054,7 @@
           </p:nvSpPr>
           <p:spPr>
             <a:xfrm>
-              <a:off x="4804833" y="2480733"/>
+              <a:off x="4804833" y="2417233"/>
               <a:ext cx="1439333" cy="1121833"/>
             </a:xfrm>
             <a:prstGeom prst="rect">
@@ -16099,7 +16099,7 @@
           </p:blipFill>
           <p:spPr>
             <a:xfrm>
-              <a:off x="4804833" y="2480733"/>
+              <a:off x="4804833" y="2417233"/>
               <a:ext cx="254000" cy="254000"/>
             </a:xfrm>
             <a:prstGeom prst="rect">
@@ -16115,7 +16115,7 @@
           </p:nvSpPr>
           <p:spPr>
             <a:xfrm>
-              <a:off x="5143500" y="2530475"/>
+              <a:off x="5143500" y="2466975"/>
               <a:ext cx="1166813" cy="192617"/>
             </a:xfrm>
             <a:prstGeom prst="rect">
@@ -16156,7 +16156,7 @@
           </p:nvSpPr>
           <p:spPr>
             <a:xfrm>
-              <a:off x="6371167" y="2480733"/>
+              <a:off x="6371167" y="2417233"/>
               <a:ext cx="1608667" cy="1121833"/>
             </a:xfrm>
             <a:prstGeom prst="rect">
@@ -16201,7 +16201,7 @@
           </p:blipFill>
           <p:spPr>
             <a:xfrm>
-              <a:off x="6371167" y="2480733"/>
+              <a:off x="6371167" y="2417233"/>
               <a:ext cx="254000" cy="254000"/>
             </a:xfrm>
             <a:prstGeom prst="rect">
@@ -16217,7 +16217,7 @@
           </p:nvSpPr>
           <p:spPr>
             <a:xfrm>
-              <a:off x="6709833" y="2530475"/>
+              <a:off x="6709833" y="2466975"/>
               <a:ext cx="1676135" cy="192617"/>
             </a:xfrm>
             <a:prstGeom prst="rect">
@@ -16258,7 +16258,7 @@
           </p:nvSpPr>
           <p:spPr>
             <a:xfrm>
-              <a:off x="8106833" y="2480733"/>
+              <a:off x="8106833" y="2417233"/>
               <a:ext cx="1481667" cy="1121833"/>
             </a:xfrm>
             <a:prstGeom prst="rect">
@@ -16303,7 +16303,7 @@
           </p:blipFill>
           <p:spPr>
             <a:xfrm>
-              <a:off x="8106833" y="2480733"/>
+              <a:off x="8106833" y="2417233"/>
               <a:ext cx="254000" cy="254000"/>
             </a:xfrm>
             <a:prstGeom prst="rect">
@@ -16319,7 +16319,7 @@
           </p:nvSpPr>
           <p:spPr>
             <a:xfrm>
-              <a:off x="8445500" y="2530475"/>
+              <a:off x="8445500" y="2466975"/>
               <a:ext cx="1472406" cy="192617"/>
             </a:xfrm>
             <a:prstGeom prst="rect">
@@ -16360,7 +16360,7 @@
           </p:nvSpPr>
           <p:spPr>
             <a:xfrm>
-              <a:off x="4804833" y="4914900"/>
+              <a:off x="4804833" y="4851400"/>
               <a:ext cx="1439333" cy="1121833"/>
             </a:xfrm>
             <a:prstGeom prst="rect">
@@ -16405,7 +16405,7 @@
           </p:blipFill>
           <p:spPr>
             <a:xfrm>
-              <a:off x="4804833" y="4914900"/>
+              <a:off x="4804833" y="4851400"/>
               <a:ext cx="254000" cy="254000"/>
             </a:xfrm>
             <a:prstGeom prst="rect">
@@ -16421,7 +16421,7 @@
           </p:nvSpPr>
           <p:spPr>
             <a:xfrm>
-              <a:off x="5143500" y="4964642"/>
+              <a:off x="5143500" y="4901142"/>
               <a:ext cx="1166813" cy="192617"/>
             </a:xfrm>
             <a:prstGeom prst="rect">
@@ -16462,7 +16462,7 @@
           </p:nvSpPr>
           <p:spPr>
             <a:xfrm>
-              <a:off x="6371167" y="4914900"/>
+              <a:off x="6371167" y="4851400"/>
               <a:ext cx="1608667" cy="1121833"/>
             </a:xfrm>
             <a:prstGeom prst="rect">
@@ -16507,7 +16507,7 @@
           </p:blipFill>
           <p:spPr>
             <a:xfrm>
-              <a:off x="6371167" y="4914900"/>
+              <a:off x="6371167" y="4851400"/>
               <a:ext cx="254000" cy="254000"/>
             </a:xfrm>
             <a:prstGeom prst="rect">
@@ -16523,7 +16523,7 @@
           </p:nvSpPr>
           <p:spPr>
             <a:xfrm>
-              <a:off x="6709833" y="4964642"/>
+              <a:off x="6709833" y="4901142"/>
               <a:ext cx="1676135" cy="192617"/>
             </a:xfrm>
             <a:prstGeom prst="rect">
@@ -16564,7 +16564,7 @@
           </p:nvSpPr>
           <p:spPr>
             <a:xfrm>
-              <a:off x="8106833" y="4914900"/>
+              <a:off x="8106833" y="4851400"/>
               <a:ext cx="1481667" cy="1121833"/>
             </a:xfrm>
             <a:prstGeom prst="rect">
@@ -16609,7 +16609,7 @@
           </p:blipFill>
           <p:spPr>
             <a:xfrm>
-              <a:off x="8106833" y="4914900"/>
+              <a:off x="8106833" y="4851400"/>
               <a:ext cx="254000" cy="254000"/>
             </a:xfrm>
             <a:prstGeom prst="rect">
@@ -16625,7 +16625,7 @@
           </p:nvSpPr>
           <p:spPr>
             <a:xfrm>
-              <a:off x="8445500" y="4964642"/>
+              <a:off x="8445500" y="4901142"/>
               <a:ext cx="1472406" cy="192617"/>
             </a:xfrm>
             <a:prstGeom prst="rect">
@@ -16680,7 +16680,7 @@
           </p:blipFill>
           <p:spPr>
             <a:xfrm>
-              <a:off x="5270500" y="2777067"/>
+              <a:off x="5270500" y="2713567"/>
               <a:ext cx="508000" cy="508000"/>
             </a:xfrm>
             <a:prstGeom prst="rect">
@@ -16696,7 +16696,7 @@
           </p:nvSpPr>
           <p:spPr>
             <a:xfrm>
-              <a:off x="5093891" y="3334808"/>
+              <a:off x="5093891" y="3271308"/>
               <a:ext cx="861219" cy="192617"/>
             </a:xfrm>
             <a:prstGeom prst="rect">
@@ -16751,7 +16751,7 @@
           </p:blipFill>
           <p:spPr>
             <a:xfrm>
-              <a:off x="6921500" y="2777067"/>
+              <a:off x="6921500" y="2713567"/>
               <a:ext cx="508000" cy="508000"/>
             </a:xfrm>
             <a:prstGeom prst="rect">
@@ -16767,7 +16767,7 @@
           </p:nvSpPr>
           <p:spPr>
             <a:xfrm>
-              <a:off x="6235568" y="3334808"/>
+              <a:off x="6235568" y="3271308"/>
               <a:ext cx="1879865" cy="192617"/>
             </a:xfrm>
             <a:prstGeom prst="rect">
@@ -16822,7 +16822,7 @@
           </p:blipFill>
           <p:spPr>
             <a:xfrm>
-              <a:off x="8593667" y="2777067"/>
+              <a:off x="8593667" y="2713567"/>
               <a:ext cx="508000" cy="508000"/>
             </a:xfrm>
             <a:prstGeom prst="rect">
@@ -16838,7 +16838,7 @@
           </p:nvSpPr>
           <p:spPr>
             <a:xfrm>
-              <a:off x="8213328" y="3334808"/>
+              <a:off x="8213328" y="3271308"/>
               <a:ext cx="1268677" cy="192617"/>
             </a:xfrm>
             <a:prstGeom prst="rect">
@@ -16893,7 +16893,7 @@
           </p:blipFill>
           <p:spPr>
             <a:xfrm>
-              <a:off x="5270500" y="5211233"/>
+              <a:off x="5270500" y="5147733"/>
               <a:ext cx="508000" cy="508000"/>
             </a:xfrm>
             <a:prstGeom prst="rect">
@@ -16909,7 +16909,7 @@
           </p:nvSpPr>
           <p:spPr>
             <a:xfrm>
-              <a:off x="5093891" y="5768975"/>
+              <a:off x="5093891" y="5705475"/>
               <a:ext cx="861219" cy="192617"/>
             </a:xfrm>
             <a:prstGeom prst="rect">
@@ -16964,7 +16964,7 @@
           </p:blipFill>
           <p:spPr>
             <a:xfrm>
-              <a:off x="6921500" y="5211233"/>
+              <a:off x="6921500" y="5147733"/>
               <a:ext cx="508000" cy="508000"/>
             </a:xfrm>
             <a:prstGeom prst="rect">
@@ -16980,7 +16980,7 @@
           </p:nvSpPr>
           <p:spPr>
             <a:xfrm>
-              <a:off x="6235568" y="5768975"/>
+              <a:off x="6235568" y="5705475"/>
               <a:ext cx="1879865" cy="192617"/>
             </a:xfrm>
             <a:prstGeom prst="rect">
@@ -17035,7 +17035,7 @@
           </p:blipFill>
           <p:spPr>
             <a:xfrm>
-              <a:off x="8593667" y="5211233"/>
+              <a:off x="8593667" y="5147733"/>
               <a:ext cx="508000" cy="508000"/>
             </a:xfrm>
             <a:prstGeom prst="rect">
@@ -17051,7 +17051,7 @@
           </p:nvSpPr>
           <p:spPr>
             <a:xfrm>
-              <a:off x="8213328" y="5768975"/>
+              <a:off x="8213328" y="5705475"/>
               <a:ext cx="1268677" cy="192617"/>
             </a:xfrm>
             <a:prstGeom prst="rect">
@@ -17106,7 +17106,7 @@
           </p:blipFill>
           <p:spPr>
             <a:xfrm>
-              <a:off x="6921500" y="3771900"/>
+              <a:off x="6921500" y="3708400"/>
               <a:ext cx="508000" cy="508000"/>
             </a:xfrm>
             <a:prstGeom prst="rect">
@@ -17122,7 +17122,7 @@
           </p:nvSpPr>
           <p:spPr>
             <a:xfrm>
-              <a:off x="6082771" y="4329642"/>
+              <a:off x="6082771" y="4266142"/>
               <a:ext cx="2185458" cy="192617"/>
             </a:xfrm>
             <a:prstGeom prst="rect">
@@ -17163,7 +17163,7 @@
           </p:nvSpPr>
           <p:spPr>
             <a:xfrm>
-              <a:off x="10181167" y="3771900"/>
+              <a:off x="10181167" y="3708400"/>
               <a:ext cx="508000" cy="740833"/>
             </a:xfrm>
             <a:prstGeom prst="rect">
@@ -17206,7 +17206,7 @@
           </p:blipFill>
           <p:spPr>
             <a:xfrm>
-              <a:off x="10181167" y="3771900"/>
+              <a:off x="10181167" y="3708400"/>
               <a:ext cx="508000" cy="508000"/>
             </a:xfrm>
             <a:prstGeom prst="rect">
@@ -17222,7 +17222,7 @@
           </p:nvSpPr>
           <p:spPr>
             <a:xfrm>
-              <a:off x="10208286" y="4329642"/>
+              <a:off x="10208286" y="4266142"/>
               <a:ext cx="453760" cy="192617"/>
             </a:xfrm>
             <a:prstGeom prst="rect">
@@ -17263,7 +17263,7 @@
           </p:nvSpPr>
           <p:spPr>
             <a:xfrm>
-              <a:off x="3979333" y="3031067"/>
+              <a:off x="3979333" y="2967567"/>
               <a:ext cx="1248834" cy="910166"/>
             </a:xfrm>
             <a:custGeom>
@@ -17316,7 +17316,7 @@
           </p:nvSpPr>
           <p:spPr>
             <a:xfrm>
-              <a:off x="3979333" y="4110567"/>
+              <a:off x="3979333" y="4047067"/>
               <a:ext cx="1248834" cy="1354666"/>
             </a:xfrm>
             <a:custGeom>
@@ -17369,7 +17369,7 @@
           </p:nvCxnSpPr>
           <p:spPr>
             <a:xfrm>
-              <a:off x="5820833" y="3031067"/>
+              <a:off x="5820833" y="2967567"/>
               <a:ext cx="1058334" cy="0"/>
             </a:xfrm>
             <a:prstGeom prst="line">
@@ -17394,7 +17394,7 @@
           </p:nvCxnSpPr>
           <p:spPr>
             <a:xfrm>
-              <a:off x="5820833" y="5465233"/>
+              <a:off x="5820833" y="5401733"/>
               <a:ext cx="1058334" cy="0"/>
             </a:xfrm>
             <a:prstGeom prst="line">
@@ -17419,7 +17419,7 @@
           </p:nvCxnSpPr>
           <p:spPr>
             <a:xfrm>
-              <a:off x="7471833" y="3031067"/>
+              <a:off x="7471833" y="2967567"/>
               <a:ext cx="1079500" cy="0"/>
             </a:xfrm>
             <a:prstGeom prst="line">
@@ -17443,7 +17443,7 @@
           </p:nvCxnSpPr>
           <p:spPr>
             <a:xfrm>
-              <a:off x="7471833" y="5465233"/>
+              <a:off x="7471833" y="5401733"/>
               <a:ext cx="1079500" cy="0"/>
             </a:xfrm>
             <a:prstGeom prst="line">
@@ -17467,7 +17467,7 @@
           </p:nvSpPr>
           <p:spPr>
             <a:xfrm>
-              <a:off x="9144000" y="3031067"/>
+              <a:off x="9144000" y="2967567"/>
               <a:ext cx="994833" cy="994833"/>
             </a:xfrm>
             <a:custGeom>
@@ -17519,7 +17519,7 @@
           </p:nvSpPr>
           <p:spPr>
             <a:xfrm>
-              <a:off x="9144000" y="4025900"/>
+              <a:off x="9144000" y="3962400"/>
               <a:ext cx="698500" cy="1439333"/>
             </a:xfrm>
             <a:custGeom>
@@ -17581,7 +17581,7 @@
           </p:blipFill>
           <p:spPr>
             <a:xfrm>
-              <a:off x="11366500" y="3771900"/>
+              <a:off x="11366500" y="3708400"/>
               <a:ext cx="508000" cy="508000"/>
             </a:xfrm>
             <a:prstGeom prst="rect">
@@ -17597,7 +17597,7 @@
           </p:nvSpPr>
           <p:spPr>
             <a:xfrm>
-              <a:off x="11138958" y="4329642"/>
+              <a:off x="11138958" y="4266142"/>
               <a:ext cx="963083" cy="192617"/>
             </a:xfrm>
             <a:prstGeom prst="rect">
@@ -17638,7 +17638,7 @@
           </p:nvCxnSpPr>
           <p:spPr>
             <a:xfrm>
-              <a:off x="10731500" y="4025900"/>
+              <a:off x="10731500" y="3962400"/>
               <a:ext cx="592667" cy="0"/>
             </a:xfrm>
             <a:prstGeom prst="line">
@@ -17662,7 +17662,7 @@
           </p:nvSpPr>
           <p:spPr>
             <a:xfrm>
-              <a:off x="3164417" y="3687233"/>
+              <a:off x="3143250" y="3623733"/>
               <a:ext cx="211667" cy="211667"/>
             </a:xfrm>
             <a:prstGeom prst="ellipse">
@@ -17691,7 +17691,7 @@
           </p:nvSpPr>
           <p:spPr>
             <a:xfrm>
-              <a:off x="3163094" y="3714750"/>
+              <a:off x="3141927" y="3651250"/>
               <a:ext cx="214312" cy="165100"/>
             </a:xfrm>
             <a:prstGeom prst="rect">
@@ -17732,7 +17732,7 @@
           </p:nvSpPr>
           <p:spPr>
             <a:xfrm>
-              <a:off x="4053417" y="3687233"/>
+              <a:off x="4053417" y="3623733"/>
               <a:ext cx="211667" cy="211667"/>
             </a:xfrm>
             <a:prstGeom prst="ellipse">
@@ -17761,7 +17761,7 @@
           </p:nvSpPr>
           <p:spPr>
             <a:xfrm>
-              <a:off x="4052094" y="3714750"/>
+              <a:off x="4052094" y="3651250"/>
               <a:ext cx="214312" cy="165100"/>
             </a:xfrm>
             <a:prstGeom prst="rect">
@@ -17802,7 +17802,7 @@
           </p:nvSpPr>
           <p:spPr>
             <a:xfrm>
-              <a:off x="6519333" y="2777067"/>
+              <a:off x="6519333" y="2713567"/>
               <a:ext cx="211667" cy="211667"/>
             </a:xfrm>
             <a:prstGeom prst="ellipse">
@@ -17831,7 +17831,7 @@
           </p:nvSpPr>
           <p:spPr>
             <a:xfrm>
-              <a:off x="6518010" y="2804583"/>
+              <a:off x="6518010" y="2741083"/>
               <a:ext cx="214312" cy="165100"/>
             </a:xfrm>
             <a:prstGeom prst="rect">
@@ -17872,7 +17872,7 @@
           </p:nvSpPr>
           <p:spPr>
             <a:xfrm>
-              <a:off x="7620000" y="2777067"/>
+              <a:off x="7620000" y="2713567"/>
               <a:ext cx="211667" cy="211667"/>
             </a:xfrm>
             <a:prstGeom prst="ellipse">
@@ -17901,7 +17901,7 @@
           </p:nvSpPr>
           <p:spPr>
             <a:xfrm>
-              <a:off x="7618677" y="2804583"/>
+              <a:off x="7618677" y="2741083"/>
               <a:ext cx="214312" cy="165100"/>
             </a:xfrm>
             <a:prstGeom prst="rect">
@@ -17942,7 +17942,7 @@
           </p:nvSpPr>
           <p:spPr>
             <a:xfrm>
-              <a:off x="9260417" y="2777067"/>
+              <a:off x="9260417" y="2713567"/>
               <a:ext cx="211667" cy="211667"/>
             </a:xfrm>
             <a:prstGeom prst="ellipse">
@@ -17971,7 +17971,7 @@
           </p:nvSpPr>
           <p:spPr>
             <a:xfrm>
-              <a:off x="9259094" y="2804583"/>
+              <a:off x="9259094" y="2741083"/>
               <a:ext cx="214312" cy="165100"/>
             </a:xfrm>
             <a:prstGeom prst="rect">
@@ -18012,7 +18012,7 @@
           </p:nvSpPr>
           <p:spPr>
             <a:xfrm>
-              <a:off x="317500" y="6407150"/>
+              <a:off x="317500" y="6438900"/>
               <a:ext cx="211667" cy="211667"/>
             </a:xfrm>
             <a:prstGeom prst="ellipse">
@@ -18041,7 +18041,7 @@
           </p:nvSpPr>
           <p:spPr>
             <a:xfrm>
-              <a:off x="316177" y="6434667"/>
+              <a:off x="316177" y="6466417"/>
               <a:ext cx="214312" cy="165100"/>
             </a:xfrm>
             <a:prstGeom prst="rect">
@@ -18082,8 +18082,8 @@
           </p:nvSpPr>
           <p:spPr>
             <a:xfrm>
-              <a:off x="613833" y="6434667"/>
-              <a:ext cx="912812" cy="165100"/>
+              <a:off x="613833" y="6466417"/>
+              <a:ext cx="984250" cy="165100"/>
             </a:xfrm>
             <a:prstGeom prst="rect">
               <a:avLst/>
@@ -18123,7 +18123,7 @@
           </p:nvSpPr>
           <p:spPr>
             <a:xfrm>
-              <a:off x="1534583" y="6407150"/>
+              <a:off x="1511300" y="6438900"/>
               <a:ext cx="211667" cy="211667"/>
             </a:xfrm>
             <a:prstGeom prst="ellipse">
@@ -18152,7 +18152,7 @@
           </p:nvSpPr>
           <p:spPr>
             <a:xfrm>
-              <a:off x="1533260" y="6434667"/>
+              <a:off x="1509977" y="6466417"/>
               <a:ext cx="214312" cy="165100"/>
             </a:xfrm>
             <a:prstGeom prst="rect">
@@ -18193,8 +18193,8 @@
           </p:nvSpPr>
           <p:spPr>
             <a:xfrm>
-              <a:off x="1830917" y="6434667"/>
-              <a:ext cx="4111625" cy="165100"/>
+              <a:off x="1807633" y="6466417"/>
+              <a:ext cx="4183063" cy="165100"/>
             </a:xfrm>
             <a:prstGeom prst="rect">
               <a:avLst/>
@@ -18234,7 +18234,7 @@
           </p:nvSpPr>
           <p:spPr>
             <a:xfrm>
-              <a:off x="5139267" y="6407150"/>
+              <a:off x="5264150" y="6438900"/>
               <a:ext cx="211667" cy="211667"/>
             </a:xfrm>
             <a:prstGeom prst="ellipse">
@@ -18263,7 +18263,7 @@
           </p:nvSpPr>
           <p:spPr>
             <a:xfrm>
-              <a:off x="5137944" y="6434667"/>
+              <a:off x="5262827" y="6466417"/>
               <a:ext cx="214312" cy="165100"/>
             </a:xfrm>
             <a:prstGeom prst="rect">
@@ -18304,7 +18304,7 @@
           </p:nvSpPr>
           <p:spPr>
             <a:xfrm>
-              <a:off x="5435600" y="6434667"/>
+              <a:off x="5560483" y="6466417"/>
               <a:ext cx="3833812" cy="165100"/>
             </a:xfrm>
             <a:prstGeom prst="rect">
@@ -18345,7 +18345,7 @@
           </p:nvSpPr>
           <p:spPr>
             <a:xfrm>
-              <a:off x="8464550" y="6407150"/>
+              <a:off x="8737600" y="6438900"/>
               <a:ext cx="211667" cy="211667"/>
             </a:xfrm>
             <a:prstGeom prst="ellipse">
@@ -18374,7 +18374,7 @@
           </p:nvSpPr>
           <p:spPr>
             <a:xfrm>
-              <a:off x="8463227" y="6434667"/>
+              <a:off x="8736277" y="6466417"/>
               <a:ext cx="214312" cy="165100"/>
             </a:xfrm>
             <a:prstGeom prst="rect">
@@ -18415,8 +18415,8 @@
           </p:nvSpPr>
           <p:spPr>
             <a:xfrm>
-              <a:off x="8760883" y="6434667"/>
-              <a:ext cx="2024062" cy="165100"/>
+              <a:off x="9033933" y="6466417"/>
+              <a:ext cx="2095500" cy="165100"/>
             </a:xfrm>
             <a:prstGeom prst="rect">
               <a:avLst/>
@@ -18456,7 +18456,7 @@
           </p:nvSpPr>
           <p:spPr>
             <a:xfrm>
-              <a:off x="10399183" y="6407150"/>
+              <a:off x="10820400" y="6438900"/>
               <a:ext cx="211667" cy="211667"/>
             </a:xfrm>
             <a:prstGeom prst="ellipse">
@@ -18485,7 +18485,7 @@
           </p:nvSpPr>
           <p:spPr>
             <a:xfrm>
-              <a:off x="10397860" y="6434667"/>
+              <a:off x="10819077" y="6466417"/>
               <a:ext cx="214312" cy="165100"/>
             </a:xfrm>
             <a:prstGeom prst="rect">
@@ -18526,8 +18526,8 @@
           </p:nvSpPr>
           <p:spPr>
             <a:xfrm>
-              <a:off x="10695517" y="6434667"/>
-              <a:ext cx="912812" cy="165100"/>
+              <a:off x="11116733" y="6466417"/>
+              <a:ext cx="984250" cy="165100"/>
             </a:xfrm>
             <a:prstGeom prst="rect">
               <a:avLst/>

--- a/docs/examples/reference-architectures.pptx
+++ b/docs/examples/reference-architectures.pptx
@@ -12320,10 +12320,10 @@
         </p:nvGrpSpPr>
         <p:grpSpPr>
           <a:xfrm>
-            <a:off x="592667" y="1083733"/>
-            <a:ext cx="12472458" cy="5547784"/>
-            <a:chOff x="592667" y="1083733"/>
-            <a:chExt cx="12472458" cy="5547784"/>
+            <a:off x="398670" y="1157080"/>
+            <a:ext cx="11590772" cy="5420968"/>
+            <a:chOff x="398670" y="1157080"/>
+            <a:chExt cx="11590772" cy="5420968"/>
           </a:xfrm>
         </p:grpSpPr>
         <p:sp>
@@ -12334,14 +12334,14 @@
           </p:nvSpPr>
           <p:spPr>
             <a:xfrm>
-              <a:off x="592667" y="2988733"/>
-              <a:ext cx="1820333" cy="1397000"/>
-            </a:xfrm>
-            <a:prstGeom prst="rect">
-              <a:avLst/>
-            </a:prstGeom>
-            <a:noFill/>
-            <a:ln w="21167">
+              <a:off x="398670" y="3070363"/>
+              <a:ext cx="1658178" cy="1403074"/>
+            </a:xfrm>
+            <a:prstGeom prst="rect">
+              <a:avLst/>
+            </a:prstGeom>
+            <a:noFill/>
+            <a:ln w="21259">
               <a:solidFill>
                 <a:srgbClr val="7D8998"/>
               </a:solidFill>
@@ -12379,8 +12379,8 @@
           </p:blipFill>
           <p:spPr>
             <a:xfrm>
-              <a:off x="592667" y="2988733"/>
-              <a:ext cx="254000" cy="254000"/>
+              <a:off x="398670" y="3070363"/>
+              <a:ext cx="255104" cy="255104"/>
             </a:xfrm>
             <a:prstGeom prst="rect">
               <a:avLst/>
@@ -12395,8 +12395,8 @@
           </p:nvSpPr>
           <p:spPr>
             <a:xfrm>
-              <a:off x="931333" y="3038475"/>
-              <a:ext cx="1268677" cy="192617"/>
+              <a:off x="738809" y="3120321"/>
+              <a:ext cx="1274193" cy="193454"/>
             </a:xfrm>
             <a:prstGeom prst="rect">
               <a:avLst/>
@@ -12415,7 +12415,7 @@
                 </a:lnSpc>
               </a:pPr>
               <a:r>
-                <a:rPr sz="1166" b="1" lang="ko-KR">
+                <a:rPr sz="1171" b="1" lang="ko-KR">
                   <a:solidFill>
                     <a:srgbClr val="7D8998"/>
                   </a:solidFill>
@@ -12450,8 +12450,8 @@
           </p:blipFill>
           <p:spPr>
             <a:xfrm>
-              <a:off x="1248833" y="3348567"/>
-              <a:ext cx="508000" cy="508000"/>
+              <a:off x="1057689" y="3431761"/>
+              <a:ext cx="510209" cy="510209"/>
             </a:xfrm>
             <a:prstGeom prst="rect">
               <a:avLst/>
@@ -12466,8 +12466,8 @@
           </p:nvSpPr>
           <p:spPr>
             <a:xfrm>
-              <a:off x="613833" y="3906308"/>
-              <a:ext cx="1778000" cy="192617"/>
+              <a:off x="419928" y="3991927"/>
+              <a:ext cx="1785730" cy="193454"/>
             </a:xfrm>
             <a:prstGeom prst="rect">
               <a:avLst/>
@@ -12486,7 +12486,7 @@
                 </a:lnSpc>
               </a:pPr>
               <a:r>
-                <a:rPr sz="1166" b="0" lang="ko-KR">
+                <a:rPr sz="1171" b="0" lang="ko-KR">
                   <a:solidFill>
                     <a:srgbClr val="232F3E"/>
                   </a:solidFill>
@@ -12507,8 +12507,8 @@
           </p:nvSpPr>
           <p:spPr>
             <a:xfrm>
-              <a:off x="828146" y="4095750"/>
-              <a:ext cx="1349375" cy="165100"/>
+              <a:off x="635173" y="4182193"/>
+              <a:ext cx="1355242" cy="165818"/>
             </a:xfrm>
             <a:prstGeom prst="rect">
               <a:avLst/>
@@ -12527,7 +12527,7 @@
                 </a:lnSpc>
               </a:pPr>
               <a:r>
-                <a:rPr sz="1000" b="0" lang="ko-KR">
+                <a:rPr sz="1004" b="0" lang="ko-KR">
                   <a:solidFill>
                     <a:srgbClr val="545B64"/>
                   </a:solidFill>
@@ -12562,8 +12562,8 @@
           </p:blipFill>
           <p:spPr>
             <a:xfrm>
-              <a:off x="2772833" y="3348567"/>
-              <a:ext cx="508000" cy="508000"/>
+              <a:off x="2418246" y="3431761"/>
+              <a:ext cx="510209" cy="510209"/>
             </a:xfrm>
             <a:prstGeom prst="rect">
               <a:avLst/>
@@ -12578,8 +12578,8 @@
           </p:nvSpPr>
           <p:spPr>
             <a:xfrm>
-              <a:off x="2545292" y="3906308"/>
-              <a:ext cx="963083" cy="192617"/>
+              <a:off x="2189715" y="3991927"/>
+              <a:ext cx="967271" cy="193454"/>
             </a:xfrm>
             <a:prstGeom prst="rect">
               <a:avLst/>
@@ -12598,7 +12598,7 @@
                 </a:lnSpc>
               </a:pPr>
               <a:r>
-                <a:rPr sz="1166" b="0" lang="ko-KR">
+                <a:rPr sz="1171" b="0" lang="ko-KR">
                   <a:solidFill>
                     <a:srgbClr val="232F3E"/>
                   </a:solidFill>
@@ -12619,13 +12619,13 @@
           </p:nvCxnSpPr>
           <p:spPr>
             <a:xfrm>
-              <a:off x="1799167" y="3602567"/>
-              <a:ext cx="931333" cy="0"/>
+              <a:off x="1610415" y="3686865"/>
+              <a:ext cx="765313" cy="0"/>
             </a:xfrm>
             <a:prstGeom prst="line">
               <a:avLst/>
             </a:prstGeom>
-            <a:ln w="15875">
+            <a:ln w="15944">
               <a:solidFill>
                 <a:srgbClr val="232F3E"/>
               </a:solidFill>
@@ -12642,13 +12642,13 @@
           </p:nvCxnSpPr>
           <p:spPr>
             <a:xfrm>
-              <a:off x="3323167" y="3602567"/>
-              <a:ext cx="529166" cy="0"/>
+              <a:off x="2970972" y="3686865"/>
+              <a:ext cx="531467" cy="0"/>
             </a:xfrm>
             <a:prstGeom prst="line">
               <a:avLst/>
             </a:prstGeom>
-            <a:ln w="15875">
+            <a:ln w="15944">
               <a:solidFill>
                 <a:srgbClr val="232F3E"/>
               </a:solidFill>
@@ -12665,8 +12665,8 @@
           </p:nvSpPr>
           <p:spPr>
             <a:xfrm>
-              <a:off x="3305969" y="3386667"/>
-              <a:ext cx="563562" cy="165100"/>
+              <a:off x="2953699" y="3735760"/>
+              <a:ext cx="566013" cy="165818"/>
             </a:xfrm>
             <a:prstGeom prst="rect">
               <a:avLst/>
@@ -12685,7 +12685,7 @@
                 </a:lnSpc>
               </a:pPr>
               <a:r>
-                <a:rPr sz="1000" b="0" lang="ko-KR">
+                <a:rPr sz="1004" b="0" lang="ko-KR">
                   <a:solidFill>
                     <a:srgbClr val="232F3E"/>
                   </a:solidFill>
@@ -12720,8 +12720,8 @@
           </p:blipFill>
           <p:spPr>
             <a:xfrm>
-              <a:off x="3894667" y="3348567"/>
-              <a:ext cx="508000" cy="508000"/>
+              <a:off x="3544957" y="3431761"/>
+              <a:ext cx="510209" cy="510209"/>
             </a:xfrm>
             <a:prstGeom prst="rect">
               <a:avLst/>
@@ -12736,8 +12736,8 @@
           </p:nvSpPr>
           <p:spPr>
             <a:xfrm>
-              <a:off x="3259667" y="3906308"/>
-              <a:ext cx="1778000" cy="192617"/>
+              <a:off x="2907196" y="3991927"/>
+              <a:ext cx="1785730" cy="193454"/>
             </a:xfrm>
             <a:prstGeom prst="rect">
               <a:avLst/>
@@ -12756,7 +12756,7 @@
                 </a:lnSpc>
               </a:pPr>
               <a:r>
-                <a:rPr sz="1166" b="0" lang="ko-KR">
+                <a:rPr sz="1171" b="0" lang="ko-KR">
                   <a:solidFill>
                     <a:srgbClr val="232F3E"/>
                   </a:solidFill>
@@ -12777,13 +12777,13 @@
           </p:nvCxnSpPr>
           <p:spPr>
             <a:xfrm>
-              <a:off x="4445000" y="3602567"/>
-              <a:ext cx="1820333" cy="0"/>
+              <a:off x="4097683" y="3686865"/>
+              <a:ext cx="1892024" cy="0"/>
             </a:xfrm>
             <a:prstGeom prst="line">
               <a:avLst/>
             </a:prstGeom>
-            <a:ln w="15875">
+            <a:ln w="15944">
               <a:solidFill>
                 <a:srgbClr val="232F3E"/>
               </a:solidFill>
@@ -12794,20 +12794,61 @@
         </p:cxnSp>
         <p:sp>
           <p:nvSpPr>
-            <p:cNvPr id="18" name="Rectangle 17"/>
+            <p:cNvPr id="18" name="TextBox 17"/>
+            <p:cNvSpPr txBox="1"/>
+            <p:nvPr/>
+          </p:nvSpPr>
+          <p:spPr>
+            <a:xfrm>
+              <a:off x="4631807" y="3714502"/>
+              <a:ext cx="1355242" cy="165818"/>
+            </a:xfrm>
+            <a:prstGeom prst="rect">
+              <a:avLst/>
+            </a:prstGeom>
+            <a:noFill/>
+          </p:spPr>
+          <p:txBody>
+            <a:bodyPr wrap="none" lIns="0" rIns="0" tIns="0" bIns="0" anchor="t">
+              <a:noAutofit/>
+            </a:bodyPr>
+            <a:lstStyle/>
+            <a:p>
+              <a:pPr algn="ctr">
+                <a:lnSpc>
+                  <a:spcPct val="100000"/>
+                </a:lnSpc>
+              </a:pPr>
+              <a:r>
+                <a:rPr sz="1004" b="0" lang="ko-KR">
+                  <a:solidFill>
+                    <a:srgbClr val="545B64"/>
+                  </a:solidFill>
+                  <a:latin typeface="Arial"/>
+                  <a:ea typeface="Malgun Gothic"/>
+                  <a:cs typeface="Malgun Gothic"/>
+                </a:rPr>
+                <a:t>VPN attachment</a:t>
+              </a:r>
+            </a:p>
+          </p:txBody>
+        </p:sp>
+        <p:sp>
+          <p:nvSpPr>
+            <p:cNvPr id="19" name="Rectangle 18"/>
             <p:cNvSpPr/>
             <p:nvPr/>
           </p:nvSpPr>
           <p:spPr>
             <a:xfrm>
-              <a:off x="4953000" y="1083733"/>
-              <a:ext cx="6646333" cy="4931833"/>
-            </a:xfrm>
-            <a:prstGeom prst="rect">
-              <a:avLst/>
-            </a:prstGeom>
-            <a:noFill/>
-            <a:ln w="21167">
+              <a:off x="4544115" y="1157080"/>
+              <a:ext cx="7249215" cy="5123346"/>
+            </a:xfrm>
+            <a:prstGeom prst="rect">
+              <a:avLst/>
+            </a:prstGeom>
+            <a:noFill/>
+            <a:ln w="21259">
               <a:solidFill>
                 <a:srgbClr val="232F3E"/>
               </a:solidFill>
@@ -12825,7 +12866,7 @@
         </p:sp>
         <p:pic>
           <p:nvPicPr>
-            <p:cNvPr id="19" name="AWS-Cloud-logo_32" descr="AWS Cloud logo_32"/>
+            <p:cNvPr id="20" name="AWS-Cloud-logo_32" descr="AWS Cloud logo_32"/>
             <p:cNvPicPr>
               <a:picLocks noChangeAspect="1"/>
             </p:cNvPicPr>
@@ -12845,8 +12886,8 @@
           </p:blipFill>
           <p:spPr>
             <a:xfrm>
-              <a:off x="4953000" y="1083733"/>
-              <a:ext cx="338667" cy="338667"/>
+              <a:off x="4544115" y="1157080"/>
+              <a:ext cx="340139" cy="340139"/>
             </a:xfrm>
             <a:prstGeom prst="rect">
               <a:avLst/>
@@ -12855,14 +12896,14 @@
         </p:pic>
         <p:sp>
           <p:nvSpPr>
-            <p:cNvPr id="20" name="TextBox 19"/>
-            <p:cNvSpPr txBox="1"/>
-            <p:nvPr/>
-          </p:nvSpPr>
-          <p:spPr>
-            <a:xfrm>
-              <a:off x="5397500" y="1165754"/>
-              <a:ext cx="1141016" cy="206375"/>
+            <p:cNvPr id="21" name="TextBox 20"/>
+            <p:cNvSpPr txBox="1"/>
+            <p:nvPr/>
+          </p:nvSpPr>
+          <p:spPr>
+            <a:xfrm>
+              <a:off x="4990548" y="1239458"/>
+              <a:ext cx="1145977" cy="207272"/>
             </a:xfrm>
             <a:prstGeom prst="rect">
               <a:avLst/>
@@ -12881,7 +12922,7 @@
                 </a:lnSpc>
               </a:pPr>
               <a:r>
-                <a:rPr sz="1250" b="1" lang="ko-KR">
+                <a:rPr sz="1255" b="1" lang="ko-KR">
                   <a:solidFill>
                     <a:srgbClr val="232F3E"/>
                   </a:solidFill>
@@ -12896,20 +12937,20 @@
         </p:sp>
         <p:sp>
           <p:nvSpPr>
-            <p:cNvPr id="21" name="Rectangle 20"/>
+            <p:cNvPr id="22" name="Rectangle 21"/>
             <p:cNvSpPr/>
             <p:nvPr/>
           </p:nvSpPr>
           <p:spPr>
             <a:xfrm>
-              <a:off x="5164667" y="1507067"/>
-              <a:ext cx="2667000" cy="4296833"/>
-            </a:xfrm>
-            <a:prstGeom prst="rect">
-              <a:avLst/>
-            </a:prstGeom>
-            <a:noFill/>
-            <a:ln w="21167">
+              <a:off x="4629150" y="1582254"/>
+              <a:ext cx="3210063" cy="4613137"/>
+            </a:xfrm>
+            <a:prstGeom prst="rect">
+              <a:avLst/>
+            </a:prstGeom>
+            <a:noFill/>
+            <a:ln w="21259">
               <a:solidFill>
                 <a:srgbClr val="00A4A6"/>
               </a:solidFill>
@@ -12929,7 +12970,7 @@
         </p:sp>
         <p:pic>
           <p:nvPicPr>
-            <p:cNvPr id="22" name="Region_32" descr="Region_32"/>
+            <p:cNvPr id="23" name="Region_32" descr="Region_32"/>
             <p:cNvPicPr>
               <a:picLocks noChangeAspect="1"/>
             </p:cNvPicPr>
@@ -12949,8 +12990,8 @@
           </p:blipFill>
           <p:spPr>
             <a:xfrm>
-              <a:off x="5164667" y="1507067"/>
-              <a:ext cx="254000" cy="254000"/>
+              <a:off x="4629150" y="1582254"/>
+              <a:ext cx="255104" cy="255104"/>
             </a:xfrm>
             <a:prstGeom prst="rect">
               <a:avLst/>
@@ -12959,14 +13000,14 @@
         </p:pic>
         <p:sp>
           <p:nvSpPr>
-            <p:cNvPr id="23" name="TextBox 22"/>
-            <p:cNvSpPr txBox="1"/>
-            <p:nvPr/>
-          </p:nvSpPr>
-          <p:spPr>
-            <a:xfrm>
-              <a:off x="5503333" y="1556808"/>
-              <a:ext cx="2287323" cy="192617"/>
+            <p:cNvPr id="24" name="TextBox 23"/>
+            <p:cNvSpPr txBox="1"/>
+            <p:nvPr/>
+          </p:nvSpPr>
+          <p:spPr>
+            <a:xfrm>
+              <a:off x="4969289" y="1632212"/>
+              <a:ext cx="2297268" cy="193454"/>
             </a:xfrm>
             <a:prstGeom prst="rect">
               <a:avLst/>
@@ -12985,7 +13026,7 @@
                 </a:lnSpc>
               </a:pPr>
               <a:r>
-                <a:rPr sz="1166" b="1" lang="ko-KR">
+                <a:rPr sz="1171" b="1" lang="ko-KR">
                   <a:solidFill>
                     <a:srgbClr val="00A4A6"/>
                   </a:solidFill>
@@ -13000,7 +13041,7 @@
         </p:sp>
         <p:pic>
           <p:nvPicPr>
-            <p:cNvPr id="24" name="AWS-Transit-Gateway" descr="AWS Transit Gateway"/>
+            <p:cNvPr id="25" name="AWS-Transit-Gateway" descr="AWS Transit Gateway"/>
             <p:cNvPicPr>
               <a:picLocks noChangeAspect="1"/>
             </p:cNvPicPr>
@@ -13020,8 +13061,8 @@
           </p:blipFill>
           <p:spPr>
             <a:xfrm>
-              <a:off x="6307667" y="3348567"/>
-              <a:ext cx="508000" cy="508000"/>
+              <a:off x="6032224" y="3431761"/>
+              <a:ext cx="510209" cy="510209"/>
             </a:xfrm>
             <a:prstGeom prst="rect">
               <a:avLst/>
@@ -13030,14 +13071,14 @@
         </p:pic>
         <p:sp>
           <p:nvSpPr>
-            <p:cNvPr id="25" name="TextBox 24"/>
-            <p:cNvSpPr txBox="1"/>
-            <p:nvPr/>
-          </p:nvSpPr>
-          <p:spPr>
-            <a:xfrm>
-              <a:off x="5621734" y="3906308"/>
-              <a:ext cx="1879865" cy="192617"/>
+            <p:cNvPr id="26" name="TextBox 25"/>
+            <p:cNvSpPr txBox="1"/>
+            <p:nvPr/>
+          </p:nvSpPr>
+          <p:spPr>
+            <a:xfrm>
+              <a:off x="5343309" y="3991927"/>
+              <a:ext cx="1888038" cy="193454"/>
             </a:xfrm>
             <a:prstGeom prst="rect">
               <a:avLst/>
@@ -13056,7 +13097,7 @@
                 </a:lnSpc>
               </a:pPr>
               <a:r>
-                <a:rPr sz="1166" b="0" lang="ko-KR">
+                <a:rPr sz="1171" b="0" lang="ko-KR">
                   <a:solidFill>
                     <a:srgbClr val="232F3E"/>
                   </a:solidFill>
@@ -13071,7 +13112,7 @@
         </p:sp>
         <p:pic>
           <p:nvPicPr>
-            <p:cNvPr id="26" name="Amazon-Virtual-Private-Cloud" descr="Amazon Virtual Private Cloud"/>
+            <p:cNvPr id="27" name="Amazon-Virtual-Private-Cloud" descr="Amazon Virtual Private Cloud"/>
             <p:cNvPicPr>
               <a:picLocks noChangeAspect="1"/>
             </p:cNvPicPr>
@@ -13091,8 +13132,8 @@
           </p:blipFill>
           <p:spPr>
             <a:xfrm>
-              <a:off x="5672667" y="1930400"/>
-              <a:ext cx="508000" cy="508000"/>
+              <a:off x="4969289" y="2007428"/>
+              <a:ext cx="510209" cy="510209"/>
             </a:xfrm>
             <a:prstGeom prst="rect">
               <a:avLst/>
@@ -13101,14 +13142,14 @@
         </p:pic>
         <p:sp>
           <p:nvSpPr>
-            <p:cNvPr id="27" name="TextBox 26"/>
-            <p:cNvSpPr txBox="1"/>
-            <p:nvPr/>
-          </p:nvSpPr>
-          <p:spPr>
-            <a:xfrm>
-              <a:off x="5241396" y="2488142"/>
-              <a:ext cx="1370542" cy="192617"/>
+            <p:cNvPr id="28" name="TextBox 27"/>
+            <p:cNvSpPr txBox="1"/>
+            <p:nvPr/>
+          </p:nvSpPr>
+          <p:spPr>
+            <a:xfrm>
+              <a:off x="4536143" y="2567595"/>
+              <a:ext cx="1376501" cy="193454"/>
             </a:xfrm>
             <a:prstGeom prst="rect">
               <a:avLst/>
@@ -13127,7 +13168,7 @@
                 </a:lnSpc>
               </a:pPr>
               <a:r>
-                <a:rPr sz="1166" b="0" lang="ko-KR">
+                <a:rPr sz="1171" b="0" lang="ko-KR">
                   <a:solidFill>
                     <a:srgbClr val="232F3E"/>
                   </a:solidFill>
@@ -13142,14 +13183,14 @@
         </p:sp>
         <p:sp>
           <p:nvSpPr>
-            <p:cNvPr id="28" name="TextBox 27"/>
-            <p:cNvSpPr txBox="1"/>
-            <p:nvPr/>
-          </p:nvSpPr>
-          <p:spPr>
-            <a:xfrm>
-              <a:off x="5382948" y="2677583"/>
-              <a:ext cx="1087438" cy="165100"/>
+            <p:cNvPr id="29" name="TextBox 28"/>
+            <p:cNvSpPr txBox="1"/>
+            <p:nvPr/>
+          </p:nvSpPr>
+          <p:spPr>
+            <a:xfrm>
+              <a:off x="4678311" y="2757860"/>
+              <a:ext cx="1092165" cy="165818"/>
             </a:xfrm>
             <a:prstGeom prst="rect">
               <a:avLst/>
@@ -13168,7 +13209,7 @@
                 </a:lnSpc>
               </a:pPr>
               <a:r>
-                <a:rPr sz="1000" b="0" lang="ko-KR">
+                <a:rPr sz="1004" b="0" lang="ko-KR">
                   <a:solidFill>
                     <a:srgbClr val="545B64"/>
                   </a:solidFill>
@@ -13183,7 +13224,7 @@
         </p:sp>
         <p:pic>
           <p:nvPicPr>
-            <p:cNvPr id="29" name="Amazon-Virtual-Private-Cloud" descr="Amazon Virtual Private Cloud"/>
+            <p:cNvPr id="30" name="Amazon-Virtual-Private-Cloud" descr="Amazon Virtual Private Cloud"/>
             <p:cNvPicPr>
               <a:picLocks noChangeAspect="1"/>
             </p:cNvPicPr>
@@ -13203,8 +13244,8 @@
           </p:blipFill>
           <p:spPr>
             <a:xfrm>
-              <a:off x="6942667" y="1930400"/>
-              <a:ext cx="508000" cy="508000"/>
+              <a:off x="7095159" y="2007428"/>
+              <a:ext cx="510209" cy="510209"/>
             </a:xfrm>
             <a:prstGeom prst="rect">
               <a:avLst/>
@@ -13213,14 +13254,14 @@
         </p:pic>
         <p:sp>
           <p:nvSpPr>
-            <p:cNvPr id="30" name="TextBox 29"/>
-            <p:cNvSpPr txBox="1"/>
-            <p:nvPr/>
-          </p:nvSpPr>
-          <p:spPr>
-            <a:xfrm>
-              <a:off x="6715125" y="2488142"/>
-              <a:ext cx="963083" cy="192617"/>
+            <p:cNvPr id="31" name="TextBox 30"/>
+            <p:cNvSpPr txBox="1"/>
+            <p:nvPr/>
+          </p:nvSpPr>
+          <p:spPr>
+            <a:xfrm>
+              <a:off x="6866628" y="2567595"/>
+              <a:ext cx="967271" cy="193454"/>
             </a:xfrm>
             <a:prstGeom prst="rect">
               <a:avLst/>
@@ -13239,7 +13280,7 @@
                 </a:lnSpc>
               </a:pPr>
               <a:r>
-                <a:rPr sz="1166" b="0" lang="ko-KR">
+                <a:rPr sz="1171" b="0" lang="ko-KR">
                   <a:solidFill>
                     <a:srgbClr val="232F3E"/>
                   </a:solidFill>
@@ -13254,14 +13295,14 @@
         </p:sp>
         <p:sp>
           <p:nvSpPr>
-            <p:cNvPr id="31" name="TextBox 30"/>
-            <p:cNvSpPr txBox="1"/>
-            <p:nvPr/>
-          </p:nvSpPr>
-          <p:spPr>
-            <a:xfrm>
-              <a:off x="6652948" y="2677583"/>
-              <a:ext cx="1087438" cy="165100"/>
+            <p:cNvPr id="32" name="TextBox 31"/>
+            <p:cNvSpPr txBox="1"/>
+            <p:nvPr/>
+          </p:nvSpPr>
+          <p:spPr>
+            <a:xfrm>
+              <a:off x="6804180" y="2757860"/>
+              <a:ext cx="1092165" cy="165818"/>
             </a:xfrm>
             <a:prstGeom prst="rect">
               <a:avLst/>
@@ -13280,7 +13321,7 @@
                 </a:lnSpc>
               </a:pPr>
               <a:r>
-                <a:rPr sz="1000" b="0" lang="ko-KR">
+                <a:rPr sz="1004" b="0" lang="ko-KR">
                   <a:solidFill>
                     <a:srgbClr val="545B64"/>
                   </a:solidFill>
@@ -13295,7 +13336,7 @@
         </p:sp>
         <p:pic>
           <p:nvPicPr>
-            <p:cNvPr id="32" name="Amazon-Virtual-Private-Cloud" descr="Amazon Virtual Private Cloud"/>
+            <p:cNvPr id="33" name="Amazon-Virtual-Private-Cloud" descr="Amazon Virtual Private Cloud"/>
             <p:cNvPicPr>
               <a:picLocks noChangeAspect="1"/>
             </p:cNvPicPr>
@@ -13315,8 +13356,8 @@
           </p:blipFill>
           <p:spPr>
             <a:xfrm>
-              <a:off x="5672667" y="4766733"/>
-              <a:ext cx="508000" cy="508000"/>
+              <a:off x="4969289" y="4856093"/>
+              <a:ext cx="510209" cy="510209"/>
             </a:xfrm>
             <a:prstGeom prst="rect">
               <a:avLst/>
@@ -13325,14 +13366,14 @@
         </p:pic>
         <p:sp>
           <p:nvSpPr>
-            <p:cNvPr id="33" name="TextBox 32"/>
-            <p:cNvSpPr txBox="1"/>
-            <p:nvPr/>
-          </p:nvSpPr>
-          <p:spPr>
-            <a:xfrm>
-              <a:off x="5496057" y="5324475"/>
-              <a:ext cx="861219" cy="192617"/>
+            <p:cNvPr id="34" name="TextBox 33"/>
+            <p:cNvSpPr txBox="1"/>
+            <p:nvPr/>
+          </p:nvSpPr>
+          <p:spPr>
+            <a:xfrm>
+              <a:off x="4791912" y="5416260"/>
+              <a:ext cx="864963" cy="193454"/>
             </a:xfrm>
             <a:prstGeom prst="rect">
               <a:avLst/>
@@ -13351,7 +13392,7 @@
                 </a:lnSpc>
               </a:pPr>
               <a:r>
-                <a:rPr sz="1166" b="0" lang="ko-KR">
+                <a:rPr sz="1171" b="0" lang="ko-KR">
                   <a:solidFill>
                     <a:srgbClr val="232F3E"/>
                   </a:solidFill>
@@ -13366,14 +13407,14 @@
         </p:sp>
         <p:sp>
           <p:nvSpPr>
-            <p:cNvPr id="34" name="TextBox 33"/>
-            <p:cNvSpPr txBox="1"/>
-            <p:nvPr/>
-          </p:nvSpPr>
-          <p:spPr>
-            <a:xfrm>
-              <a:off x="5382948" y="5513917"/>
-              <a:ext cx="1087438" cy="165100"/>
+            <p:cNvPr id="35" name="TextBox 34"/>
+            <p:cNvSpPr txBox="1"/>
+            <p:nvPr/>
+          </p:nvSpPr>
+          <p:spPr>
+            <a:xfrm>
+              <a:off x="4678311" y="5606525"/>
+              <a:ext cx="1092165" cy="165818"/>
             </a:xfrm>
             <a:prstGeom prst="rect">
               <a:avLst/>
@@ -13392,7 +13433,7 @@
                 </a:lnSpc>
               </a:pPr>
               <a:r>
-                <a:rPr sz="1000" b="0" lang="ko-KR">
+                <a:rPr sz="1004" b="0" lang="ko-KR">
                   <a:solidFill>
                     <a:srgbClr val="545B64"/>
                   </a:solidFill>
@@ -13407,7 +13448,7 @@
         </p:sp>
         <p:pic>
           <p:nvPicPr>
-            <p:cNvPr id="35" name="Amazon-Virtual-Private-Cloud" descr="Amazon Virtual Private Cloud"/>
+            <p:cNvPr id="36" name="Amazon-Virtual-Private-Cloud" descr="Amazon Virtual Private Cloud"/>
             <p:cNvPicPr>
               <a:picLocks noChangeAspect="1"/>
             </p:cNvPicPr>
@@ -13427,8 +13468,8 @@
           </p:blipFill>
           <p:spPr>
             <a:xfrm>
-              <a:off x="6942667" y="4766733"/>
-              <a:ext cx="508000" cy="508000"/>
+              <a:off x="7095159" y="4856093"/>
+              <a:ext cx="510209" cy="510209"/>
             </a:xfrm>
             <a:prstGeom prst="rect">
               <a:avLst/>
@@ -13437,14 +13478,14 @@
         </p:pic>
         <p:sp>
           <p:nvSpPr>
-            <p:cNvPr id="36" name="TextBox 35"/>
-            <p:cNvSpPr txBox="1"/>
-            <p:nvPr/>
-          </p:nvSpPr>
-          <p:spPr>
-            <a:xfrm>
-              <a:off x="6715125" y="5324475"/>
-              <a:ext cx="963083" cy="192617"/>
+            <p:cNvPr id="37" name="TextBox 36"/>
+            <p:cNvSpPr txBox="1"/>
+            <p:nvPr/>
+          </p:nvSpPr>
+          <p:spPr>
+            <a:xfrm>
+              <a:off x="6866628" y="5416260"/>
+              <a:ext cx="967271" cy="193454"/>
             </a:xfrm>
             <a:prstGeom prst="rect">
               <a:avLst/>
@@ -13463,7 +13504,7 @@
                 </a:lnSpc>
               </a:pPr>
               <a:r>
-                <a:rPr sz="1166" b="0" lang="ko-KR">
+                <a:rPr sz="1171" b="0" lang="ko-KR">
                   <a:solidFill>
                     <a:srgbClr val="232F3E"/>
                   </a:solidFill>
@@ -13478,14 +13519,14 @@
         </p:sp>
         <p:sp>
           <p:nvSpPr>
-            <p:cNvPr id="37" name="TextBox 36"/>
-            <p:cNvSpPr txBox="1"/>
-            <p:nvPr/>
-          </p:nvSpPr>
-          <p:spPr>
-            <a:xfrm>
-              <a:off x="6652948" y="5513917"/>
-              <a:ext cx="1087438" cy="165100"/>
+            <p:cNvPr id="38" name="TextBox 37"/>
+            <p:cNvSpPr txBox="1"/>
+            <p:nvPr/>
+          </p:nvSpPr>
+          <p:spPr>
+            <a:xfrm>
+              <a:off x="6804180" y="5606525"/>
+              <a:ext cx="1092165" cy="165818"/>
             </a:xfrm>
             <a:prstGeom prst="rect">
               <a:avLst/>
@@ -13504,7 +13545,7 @@
                 </a:lnSpc>
               </a:pPr>
               <a:r>
-                <a:rPr sz="1000" b="0" lang="ko-KR">
+                <a:rPr sz="1004" b="0" lang="ko-KR">
                   <a:solidFill>
                     <a:srgbClr val="545B64"/>
                   </a:solidFill>
@@ -13517,16 +13558,169 @@
             </a:p>
           </p:txBody>
         </p:sp>
-        <p:sp>
-          <p:nvSpPr>
-            <p:cNvPr id="38" name="Freeform 37"/>
+        <p:pic>
+          <p:nvPicPr>
+            <p:cNvPr id="39" name="Amazon-Route-53_Route-Table" descr="Amazon Route 53_Route Table"/>
+            <p:cNvPicPr>
+              <a:picLocks noChangeAspect="1"/>
+            </p:cNvPicPr>
+            <p:nvPr/>
+          </p:nvPicPr>
+          <p:blipFill>
+            <a:blip r:embed="rId18">
+              <a:extLst>
+                <a:ext uri="{96DAC541-7B7A-43D3-8B79-37D633B846F1}">
+                  <asvg:svgBlip xmlns:asvg="http://schemas.microsoft.com/office/drawing/2016/SVG/main" r:embed="rId19"/>
+                </a:ext>
+              </a:extLst>
+            </a:blip>
+            <a:stretch>
+              <a:fillRect/>
+            </a:stretch>
+          </p:blipFill>
+          <p:spPr>
+            <a:xfrm>
+              <a:off x="6032224" y="4856093"/>
+              <a:ext cx="510209" cy="510209"/>
+            </a:xfrm>
+            <a:prstGeom prst="rect">
+              <a:avLst/>
+            </a:prstGeom>
+          </p:spPr>
+        </p:pic>
+        <p:sp>
+          <p:nvSpPr>
+            <p:cNvPr id="40" name="TextBox 39"/>
+            <p:cNvSpPr txBox="1"/>
+            <p:nvPr/>
+          </p:nvSpPr>
+          <p:spPr>
+            <a:xfrm>
+              <a:off x="5803693" y="5416260"/>
+              <a:ext cx="967271" cy="193454"/>
+            </a:xfrm>
+            <a:prstGeom prst="rect">
+              <a:avLst/>
+            </a:prstGeom>
+            <a:noFill/>
+          </p:spPr>
+          <p:txBody>
+            <a:bodyPr wrap="none" lIns="0" rIns="0" tIns="0" bIns="0" anchor="t">
+              <a:noAutofit/>
+            </a:bodyPr>
+            <a:lstStyle/>
+            <a:p>
+              <a:pPr algn="ctr">
+                <a:lnSpc>
+                  <a:spcPct val="100000"/>
+                </a:lnSpc>
+              </a:pPr>
+              <a:r>
+                <a:rPr sz="1171" b="0" lang="ko-KR">
+                  <a:solidFill>
+                    <a:srgbClr val="232F3E"/>
+                  </a:solidFill>
+                  <a:latin typeface="Arial"/>
+                  <a:ea typeface="Malgun Gothic"/>
+                  <a:cs typeface="Malgun Gothic"/>
+                </a:rPr>
+                <a:t>TGW A RT</a:t>
+              </a:r>
+            </a:p>
+          </p:txBody>
+        </p:sp>
+        <p:sp>
+          <p:nvSpPr>
+            <p:cNvPr id="41" name="TextBox 40"/>
+            <p:cNvSpPr txBox="1"/>
+            <p:nvPr/>
+          </p:nvSpPr>
+          <p:spPr>
+            <a:xfrm>
+              <a:off x="5510057" y="5606525"/>
+              <a:ext cx="1554542" cy="165818"/>
+            </a:xfrm>
+            <a:prstGeom prst="rect">
+              <a:avLst/>
+            </a:prstGeom>
+            <a:noFill/>
+          </p:spPr>
+          <p:txBody>
+            <a:bodyPr wrap="none" lIns="0" rIns="0" tIns="0" bIns="0" anchor="t">
+              <a:noAutofit/>
+            </a:bodyPr>
+            <a:lstStyle/>
+            <a:p>
+              <a:pPr algn="ctr">
+                <a:lnSpc>
+                  <a:spcPct val="100000"/>
+                </a:lnSpc>
+              </a:pPr>
+              <a:r>
+                <a:rPr sz="1004" b="0" lang="ko-KR">
+                  <a:solidFill>
+                    <a:srgbClr val="545B64"/>
+                  </a:solidFill>
+                  <a:latin typeface="Arial"/>
+                  <a:ea typeface="Malgun Gothic"/>
+                  <a:cs typeface="Malgun Gothic"/>
+                </a:rPr>
+                <a:t>VPC·VPN 경로 전파</a:t>
+              </a:r>
+            </a:p>
+          </p:txBody>
+        </p:sp>
+        <p:sp>
+          <p:nvSpPr>
+            <p:cNvPr id="42" name="TextBox 41"/>
+            <p:cNvSpPr txBox="1"/>
+            <p:nvPr/>
+          </p:nvSpPr>
+          <p:spPr>
+            <a:xfrm>
+              <a:off x="5223065" y="5776595"/>
+              <a:ext cx="2128527" cy="165818"/>
+            </a:xfrm>
+            <a:prstGeom prst="rect">
+              <a:avLst/>
+            </a:prstGeom>
+            <a:noFill/>
+          </p:spPr>
+          <p:txBody>
+            <a:bodyPr wrap="none" lIns="0" rIns="0" tIns="0" bIns="0" anchor="t">
+              <a:noAutofit/>
+            </a:bodyPr>
+            <a:lstStyle/>
+            <a:p>
+              <a:pPr algn="ctr">
+                <a:lnSpc>
+                  <a:spcPct val="100000"/>
+                </a:lnSpc>
+              </a:pPr>
+              <a:r>
+                <a:rPr sz="1004" b="0" lang="ko-KR">
+                  <a:solidFill>
+                    <a:srgbClr val="545B64"/>
+                  </a:solidFill>
+                  <a:latin typeface="Arial"/>
+                  <a:ea typeface="Malgun Gothic"/>
+                  <a:cs typeface="Malgun Gothic"/>
+                </a:rPr>
+                <a:t>10.16.0.0/13 → peering</a:t>
+              </a:r>
+            </a:p>
+          </p:txBody>
+        </p:sp>
+        <p:sp>
+          <p:nvSpPr>
+            <p:cNvPr id="43" name="Freeform 42"/>
             <p:cNvSpPr/>
             <p:nvPr/>
           </p:nvSpPr>
           <p:spPr>
             <a:xfrm>
-              <a:off x="5926667" y="2882900"/>
-              <a:ext cx="529166" cy="423333"/>
+              <a:off x="5224393" y="2964070"/>
+              <a:ext cx="956642" cy="425173"/>
             </a:xfrm>
             <a:custGeom>
               <a:avLst/>
@@ -13535,15 +13729,15 @@
               <a:cxnLst/>
               <a:rect l="l" t="t" r="r" b="b"/>
               <a:pathLst>
-                <a:path w="529166" h="423333">
+                <a:path w="956642" h="425173">
                   <a:moveTo>
-                    <a:pt x="529166" y="423333"/>
+                    <a:pt x="956642" y="425173"/>
                   </a:moveTo>
                   <a:lnTo>
-                    <a:pt x="529166" y="211667"/>
+                    <a:pt x="956642" y="297621"/>
                   </a:lnTo>
                   <a:lnTo>
-                    <a:pt x="0" y="211667"/>
+                    <a:pt x="0" y="297621"/>
                   </a:lnTo>
                   <a:lnTo>
                     <a:pt x="0" y="0"/>
@@ -13552,7 +13746,7 @@
               </a:pathLst>
             </a:custGeom>
             <a:noFill/>
-            <a:ln w="15875">
+            <a:ln w="15944">
               <a:solidFill>
                 <a:srgbClr val="232F3E"/>
               </a:solidFill>
@@ -13570,14 +13764,14 @@
         </p:sp>
         <p:sp>
           <p:nvSpPr>
-            <p:cNvPr id="39" name="Freeform 38"/>
+            <p:cNvPr id="44" name="Freeform 43"/>
             <p:cNvSpPr/>
             <p:nvPr/>
           </p:nvSpPr>
           <p:spPr>
             <a:xfrm>
-              <a:off x="6667500" y="2882900"/>
-              <a:ext cx="529167" cy="423333"/>
+              <a:off x="6393622" y="2964070"/>
+              <a:ext cx="956641" cy="425173"/>
             </a:xfrm>
             <a:custGeom>
               <a:avLst/>
@@ -13586,24 +13780,24 @@
               <a:cxnLst/>
               <a:rect l="l" t="t" r="r" b="b"/>
               <a:pathLst>
-                <a:path w="529167" h="423333">
+                <a:path w="956641" h="425173">
                   <a:moveTo>
-                    <a:pt x="0" y="423333"/>
+                    <a:pt x="0" y="425173"/>
                   </a:moveTo>
                   <a:lnTo>
-                    <a:pt x="0" y="211667"/>
+                    <a:pt x="0" y="297621"/>
                   </a:lnTo>
                   <a:lnTo>
-                    <a:pt x="529167" y="211667"/>
+                    <a:pt x="956641" y="297621"/>
                   </a:lnTo>
                   <a:lnTo>
-                    <a:pt x="529167" y="0"/>
+                    <a:pt x="956641" y="0"/>
                   </a:lnTo>
                 </a:path>
               </a:pathLst>
             </a:custGeom>
             <a:noFill/>
-            <a:ln w="15875">
+            <a:ln w="15944">
               <a:solidFill>
                 <a:srgbClr val="232F3E"/>
               </a:solidFill>
@@ -13621,14 +13815,14 @@
         </p:sp>
         <p:sp>
           <p:nvSpPr>
-            <p:cNvPr id="40" name="Freeform 39"/>
+            <p:cNvPr id="45" name="Freeform 44"/>
             <p:cNvSpPr/>
             <p:nvPr/>
           </p:nvSpPr>
           <p:spPr>
             <a:xfrm>
-              <a:off x="5926667" y="4131733"/>
-              <a:ext cx="529166" cy="592667"/>
+              <a:off x="5224393" y="4218333"/>
+              <a:ext cx="956642" cy="595243"/>
             </a:xfrm>
             <a:custGeom>
               <a:avLst/>
@@ -13637,24 +13831,24 @@
               <a:cxnLst/>
               <a:rect l="l" t="t" r="r" b="b"/>
               <a:pathLst>
-                <a:path w="529166" h="592667">
+                <a:path w="956642" h="595243">
                   <a:moveTo>
-                    <a:pt x="529166" y="0"/>
+                    <a:pt x="956642" y="0"/>
                   </a:moveTo>
                   <a:lnTo>
-                    <a:pt x="529166" y="296334"/>
+                    <a:pt x="956642" y="297621"/>
                   </a:lnTo>
                   <a:lnTo>
-                    <a:pt x="0" y="296334"/>
+                    <a:pt x="0" y="297621"/>
                   </a:lnTo>
                   <a:lnTo>
-                    <a:pt x="0" y="592667"/>
+                    <a:pt x="0" y="595243"/>
                   </a:lnTo>
                 </a:path>
               </a:pathLst>
             </a:custGeom>
             <a:noFill/>
-            <a:ln w="15875">
+            <a:ln w="15944">
               <a:solidFill>
                 <a:srgbClr val="232F3E"/>
               </a:solidFill>
@@ -13672,14 +13866,14 @@
         </p:sp>
         <p:sp>
           <p:nvSpPr>
-            <p:cNvPr id="41" name="Freeform 40"/>
+            <p:cNvPr id="46" name="Freeform 45"/>
             <p:cNvSpPr/>
             <p:nvPr/>
           </p:nvSpPr>
           <p:spPr>
             <a:xfrm>
-              <a:off x="6667500" y="4131733"/>
-              <a:ext cx="529167" cy="592667"/>
+              <a:off x="6393622" y="4218333"/>
+              <a:ext cx="956641" cy="595243"/>
             </a:xfrm>
             <a:custGeom>
               <a:avLst/>
@@ -13688,24 +13882,24 @@
               <a:cxnLst/>
               <a:rect l="l" t="t" r="r" b="b"/>
               <a:pathLst>
-                <a:path w="529167" h="592667">
+                <a:path w="956641" h="595243">
                   <a:moveTo>
                     <a:pt x="0" y="0"/>
                   </a:moveTo>
                   <a:lnTo>
-                    <a:pt x="0" y="296334"/>
+                    <a:pt x="0" y="297621"/>
                   </a:lnTo>
                   <a:lnTo>
-                    <a:pt x="529167" y="296334"/>
+                    <a:pt x="956641" y="297621"/>
                   </a:lnTo>
                   <a:lnTo>
-                    <a:pt x="529167" y="592667"/>
+                    <a:pt x="956641" y="595243"/>
                   </a:lnTo>
                 </a:path>
               </a:pathLst>
             </a:custGeom>
             <a:noFill/>
-            <a:ln w="15875">
+            <a:ln w="15944">
               <a:solidFill>
                 <a:srgbClr val="232F3E"/>
               </a:solidFill>
@@ -13723,20 +13917,219 @@
         </p:sp>
         <p:sp>
           <p:nvSpPr>
-            <p:cNvPr id="42" name="Rectangle 41"/>
+            <p:cNvPr id="47" name="TextBox 46"/>
+            <p:cNvSpPr txBox="1"/>
+            <p:nvPr/>
+          </p:nvSpPr>
+          <p:spPr>
+            <a:xfrm>
+              <a:off x="5099499" y="3055482"/>
+              <a:ext cx="1355242" cy="165818"/>
+            </a:xfrm>
+            <a:prstGeom prst="rect">
+              <a:avLst/>
+            </a:prstGeom>
+            <a:noFill/>
+          </p:spPr>
+          <p:txBody>
+            <a:bodyPr wrap="none" lIns="0" rIns="0" tIns="0" bIns="0" anchor="t">
+              <a:noAutofit/>
+            </a:bodyPr>
+            <a:lstStyle/>
+            <a:p>
+              <a:pPr algn="ctr">
+                <a:lnSpc>
+                  <a:spcPct val="100000"/>
+                </a:lnSpc>
+              </a:pPr>
+              <a:r>
+                <a:rPr sz="1004" b="0" lang="ko-KR">
+                  <a:solidFill>
+                    <a:srgbClr val="545B64"/>
+                  </a:solidFill>
+                  <a:latin typeface="Arial"/>
+                  <a:ea typeface="Malgun Gothic"/>
+                  <a:cs typeface="Malgun Gothic"/>
+                </a:rPr>
+                <a:t>VPC attachment</a:t>
+              </a:r>
+            </a:p>
+          </p:txBody>
+        </p:sp>
+        <p:cxnSp>
+          <p:nvCxnSpPr>
+            <p:cNvPr id="48" name="Connector 47"/>
+            <p:cNvCxnSpPr/>
+            <p:nvPr/>
+          </p:nvCxnSpPr>
+          <p:spPr>
+            <a:xfrm>
+              <a:off x="6584950" y="3686865"/>
+              <a:ext cx="1679437" cy="0"/>
+            </a:xfrm>
+            <a:prstGeom prst="line">
+              <a:avLst/>
+            </a:prstGeom>
+            <a:ln w="15944">
+              <a:solidFill>
+                <a:srgbClr val="232F3E"/>
+              </a:solidFill>
+              <a:prstDash val="solid"/>
+              <a:miter lim="800000"/>
+            </a:ln>
+          </p:spPr>
+        </p:cxnSp>
+        <p:cxnSp>
+          <p:nvCxnSpPr>
+            <p:cNvPr id="49" name="Connector 48"/>
+            <p:cNvCxnSpPr/>
+            <p:nvPr/>
+          </p:nvCxnSpPr>
+          <p:spPr>
+            <a:xfrm>
+              <a:off x="8859630" y="3686865"/>
+              <a:ext cx="1275522" cy="0"/>
+            </a:xfrm>
+            <a:prstGeom prst="line">
+              <a:avLst/>
+            </a:prstGeom>
+            <a:ln w="15944">
+              <a:solidFill>
+                <a:srgbClr val="232F3E"/>
+              </a:solidFill>
+              <a:prstDash val="solid"/>
+              <a:miter lim="800000"/>
+            </a:ln>
+          </p:spPr>
+        </p:cxnSp>
+        <p:pic>
+          <p:nvPicPr>
+            <p:cNvPr id="50" name="Amazon-VPC_Peering-Connection" descr="Amazon VPC_Peering Connection"/>
+            <p:cNvPicPr>
+              <a:picLocks noChangeAspect="1"/>
+            </p:cNvPicPr>
+            <p:nvPr/>
+          </p:nvPicPr>
+          <p:blipFill>
+            <a:blip r:embed="rId20">
+              <a:extLst>
+                <a:ext uri="{96DAC541-7B7A-43D3-8B79-37D633B846F1}">
+                  <asvg:svgBlip xmlns:asvg="http://schemas.microsoft.com/office/drawing/2016/SVG/main" r:embed="rId21"/>
+                </a:ext>
+              </a:extLst>
+            </a:blip>
+            <a:stretch>
+              <a:fillRect/>
+            </a:stretch>
+          </p:blipFill>
+          <p:spPr>
+            <a:xfrm>
+              <a:off x="8306904" y="3431761"/>
+              <a:ext cx="510209" cy="510209"/>
+            </a:xfrm>
+            <a:prstGeom prst="rect">
+              <a:avLst/>
+            </a:prstGeom>
+          </p:spPr>
+        </p:pic>
+        <p:sp>
+          <p:nvSpPr>
+            <p:cNvPr id="51" name="TextBox 50"/>
+            <p:cNvSpPr txBox="1"/>
+            <p:nvPr/>
+          </p:nvSpPr>
+          <p:spPr>
+            <a:xfrm>
+              <a:off x="7924912" y="3991927"/>
+              <a:ext cx="1274193" cy="193454"/>
+            </a:xfrm>
+            <a:prstGeom prst="rect">
+              <a:avLst/>
+            </a:prstGeom>
+            <a:noFill/>
+          </p:spPr>
+          <p:txBody>
+            <a:bodyPr wrap="none" lIns="0" rIns="0" tIns="0" bIns="0" anchor="t">
+              <a:noAutofit/>
+            </a:bodyPr>
+            <a:lstStyle/>
+            <a:p>
+              <a:pPr algn="ctr">
+                <a:lnSpc>
+                  <a:spcPct val="100000"/>
+                </a:lnSpc>
+              </a:pPr>
+              <a:r>
+                <a:rPr sz="1171" b="0" lang="ko-KR">
+                  <a:solidFill>
+                    <a:srgbClr val="232F3E"/>
+                  </a:solidFill>
+                  <a:latin typeface="Arial"/>
+                  <a:ea typeface="Malgun Gothic"/>
+                  <a:cs typeface="Malgun Gothic"/>
+                </a:rPr>
+                <a:t>TGW peering</a:t>
+              </a:r>
+            </a:p>
+          </p:txBody>
+        </p:sp>
+        <p:sp>
+          <p:nvSpPr>
+            <p:cNvPr id="52" name="TextBox 51"/>
+            <p:cNvSpPr txBox="1"/>
+            <p:nvPr/>
+          </p:nvSpPr>
+          <p:spPr>
+            <a:xfrm>
+              <a:off x="7709004" y="4182193"/>
+              <a:ext cx="1706010" cy="165818"/>
+            </a:xfrm>
+            <a:prstGeom prst="rect">
+              <a:avLst/>
+            </a:prstGeom>
+            <a:noFill/>
+          </p:spPr>
+          <p:txBody>
+            <a:bodyPr wrap="none" lIns="0" rIns="0" tIns="0" bIns="0" anchor="t">
+              <a:noAutofit/>
+            </a:bodyPr>
+            <a:lstStyle/>
+            <a:p>
+              <a:pPr algn="ctr">
+                <a:lnSpc>
+                  <a:spcPct val="100000"/>
+                </a:lnSpc>
+              </a:pPr>
+              <a:r>
+                <a:rPr sz="1004" b="0" lang="ko-KR">
+                  <a:solidFill>
+                    <a:srgbClr val="545B64"/>
+                  </a:solidFill>
+                  <a:latin typeface="Arial"/>
+                  <a:ea typeface="Malgun Gothic"/>
+                  <a:cs typeface="Malgun Gothic"/>
+                </a:rPr>
+                <a:t>peering attachment</a:t>
+              </a:r>
+            </a:p>
+          </p:txBody>
+        </p:sp>
+        <p:sp>
+          <p:nvSpPr>
+            <p:cNvPr id="53" name="Rectangle 52"/>
             <p:cNvSpPr/>
             <p:nvPr/>
           </p:nvSpPr>
           <p:spPr>
             <a:xfrm>
-              <a:off x="8932333" y="1507067"/>
-              <a:ext cx="2455333" cy="4296833"/>
-            </a:xfrm>
-            <a:prstGeom prst="rect">
-              <a:avLst/>
-            </a:prstGeom>
-            <a:noFill/>
-            <a:ln w="21167">
+              <a:off x="9284804" y="1582254"/>
+              <a:ext cx="2423491" cy="4613137"/>
+            </a:xfrm>
+            <a:prstGeom prst="rect">
+              <a:avLst/>
+            </a:prstGeom>
+            <a:noFill/>
+            <a:ln w="21259">
               <a:solidFill>
                 <a:srgbClr val="00A4A6"/>
               </a:solidFill>
@@ -13756,7 +14149,7 @@
         </p:sp>
         <p:pic>
           <p:nvPicPr>
-            <p:cNvPr id="43" name="Region_32" descr="Region_32"/>
+            <p:cNvPr id="54" name="Region_32" descr="Region_32"/>
             <p:cNvPicPr>
               <a:picLocks noChangeAspect="1"/>
             </p:cNvPicPr>
@@ -13776,8 +14169,8 @@
           </p:blipFill>
           <p:spPr>
             <a:xfrm>
-              <a:off x="8932333" y="1507067"/>
-              <a:ext cx="254000" cy="254000"/>
+              <a:off x="9284804" y="1582254"/>
+              <a:ext cx="255104" cy="255104"/>
             </a:xfrm>
             <a:prstGeom prst="rect">
               <a:avLst/>
@@ -13786,14 +14179,14 @@
         </p:pic>
         <p:sp>
           <p:nvSpPr>
-            <p:cNvPr id="44" name="TextBox 43"/>
-            <p:cNvSpPr txBox="1"/>
-            <p:nvPr/>
-          </p:nvSpPr>
-          <p:spPr>
-            <a:xfrm>
-              <a:off x="9271000" y="1556808"/>
-              <a:ext cx="2287323" cy="192617"/>
+            <p:cNvPr id="55" name="TextBox 54"/>
+            <p:cNvSpPr txBox="1"/>
+            <p:nvPr/>
+          </p:nvSpPr>
+          <p:spPr>
+            <a:xfrm>
+              <a:off x="9624943" y="1632212"/>
+              <a:ext cx="2297268" cy="193454"/>
             </a:xfrm>
             <a:prstGeom prst="rect">
               <a:avLst/>
@@ -13812,7 +14205,7 @@
                 </a:lnSpc>
               </a:pPr>
               <a:r>
-                <a:rPr sz="1166" b="1" lang="ko-KR">
+                <a:rPr sz="1171" b="1" lang="ko-KR">
                   <a:solidFill>
                     <a:srgbClr val="00A4A6"/>
                   </a:solidFill>
@@ -13827,7 +14220,7 @@
         </p:sp>
         <p:pic>
           <p:nvPicPr>
-            <p:cNvPr id="45" name="AWS-Transit-Gateway" descr="AWS Transit Gateway"/>
+            <p:cNvPr id="56" name="AWS-Transit-Gateway" descr="AWS Transit Gateway"/>
             <p:cNvPicPr>
               <a:picLocks noChangeAspect="1"/>
             </p:cNvPicPr>
@@ -13847,8 +14240,8 @@
           </p:blipFill>
           <p:spPr>
             <a:xfrm>
-              <a:off x="9863667" y="3348567"/>
-              <a:ext cx="508000" cy="508000"/>
+              <a:off x="10177670" y="3431761"/>
+              <a:ext cx="510209" cy="510209"/>
             </a:xfrm>
             <a:prstGeom prst="rect">
               <a:avLst/>
@@ -13857,14 +14250,14 @@
         </p:pic>
         <p:sp>
           <p:nvSpPr>
-            <p:cNvPr id="46" name="TextBox 45"/>
-            <p:cNvSpPr txBox="1"/>
-            <p:nvPr/>
-          </p:nvSpPr>
-          <p:spPr>
-            <a:xfrm>
-              <a:off x="9177734" y="3906308"/>
-              <a:ext cx="1879865" cy="192617"/>
+            <p:cNvPr id="57" name="TextBox 56"/>
+            <p:cNvSpPr txBox="1"/>
+            <p:nvPr/>
+          </p:nvSpPr>
+          <p:spPr>
+            <a:xfrm>
+              <a:off x="9488755" y="3991927"/>
+              <a:ext cx="1888038" cy="193454"/>
             </a:xfrm>
             <a:prstGeom prst="rect">
               <a:avLst/>
@@ -13883,7 +14276,7 @@
                 </a:lnSpc>
               </a:pPr>
               <a:r>
-                <a:rPr sz="1166" b="0" lang="ko-KR">
+                <a:rPr sz="1171" b="0" lang="ko-KR">
                   <a:solidFill>
                     <a:srgbClr val="232F3E"/>
                   </a:solidFill>
@@ -13898,7 +14291,7 @@
         </p:sp>
         <p:pic>
           <p:nvPicPr>
-            <p:cNvPr id="47" name="Amazon-Virtual-Private-Cloud" descr="Amazon Virtual Private Cloud"/>
+            <p:cNvPr id="58" name="Amazon-Virtual-Private-Cloud" descr="Amazon Virtual Private Cloud"/>
             <p:cNvPicPr>
               <a:picLocks noChangeAspect="1"/>
             </p:cNvPicPr>
@@ -13918,8 +14311,8 @@
           </p:blipFill>
           <p:spPr>
             <a:xfrm>
-              <a:off x="9863667" y="1930400"/>
-              <a:ext cx="508000" cy="508000"/>
+              <a:off x="9539909" y="2007428"/>
+              <a:ext cx="510209" cy="510209"/>
             </a:xfrm>
             <a:prstGeom prst="rect">
               <a:avLst/>
@@ -13928,14 +14321,14 @@
         </p:pic>
         <p:sp>
           <p:nvSpPr>
-            <p:cNvPr id="48" name="TextBox 47"/>
-            <p:cNvSpPr txBox="1"/>
-            <p:nvPr/>
-          </p:nvSpPr>
-          <p:spPr>
-            <a:xfrm>
-              <a:off x="9737990" y="2488142"/>
-              <a:ext cx="759354" cy="192617"/>
+            <p:cNvPr id="59" name="TextBox 58"/>
+            <p:cNvSpPr txBox="1"/>
+            <p:nvPr/>
+          </p:nvSpPr>
+          <p:spPr>
+            <a:xfrm>
+              <a:off x="9413685" y="2567595"/>
+              <a:ext cx="762656" cy="193454"/>
             </a:xfrm>
             <a:prstGeom prst="rect">
               <a:avLst/>
@@ -13954,7 +14347,7 @@
                 </a:lnSpc>
               </a:pPr>
               <a:r>
-                <a:rPr sz="1166" b="0" lang="ko-KR">
+                <a:rPr sz="1171" b="0" lang="ko-KR">
                   <a:solidFill>
                     <a:srgbClr val="232F3E"/>
                   </a:solidFill>
@@ -13969,14 +14362,14 @@
         </p:sp>
         <p:sp>
           <p:nvSpPr>
-            <p:cNvPr id="49" name="TextBox 48"/>
-            <p:cNvSpPr txBox="1"/>
-            <p:nvPr/>
-          </p:nvSpPr>
-          <p:spPr>
-            <a:xfrm>
-              <a:off x="9530292" y="2677583"/>
-              <a:ext cx="1174750" cy="165100"/>
+            <p:cNvPr id="60" name="TextBox 59"/>
+            <p:cNvSpPr txBox="1"/>
+            <p:nvPr/>
+          </p:nvSpPr>
+          <p:spPr>
+            <a:xfrm>
+              <a:off x="9205084" y="2757860"/>
+              <a:ext cx="1179858" cy="165818"/>
             </a:xfrm>
             <a:prstGeom prst="rect">
               <a:avLst/>
@@ -13995,7 +14388,7 @@
                 </a:lnSpc>
               </a:pPr>
               <a:r>
-                <a:rPr sz="1000" b="0" lang="ko-KR">
+                <a:rPr sz="1004" b="0" lang="ko-KR">
                   <a:solidFill>
                     <a:srgbClr val="545B64"/>
                   </a:solidFill>
@@ -14010,7 +14403,7 @@
         </p:sp>
         <p:pic>
           <p:nvPicPr>
-            <p:cNvPr id="50" name="Amazon-Virtual-Private-Cloud" descr="Amazon Virtual Private Cloud"/>
+            <p:cNvPr id="61" name="Amazon-Virtual-Private-Cloud" descr="Amazon Virtual Private Cloud"/>
             <p:cNvPicPr>
               <a:picLocks noChangeAspect="1"/>
             </p:cNvPicPr>
@@ -14030,8 +14423,8 @@
           </p:blipFill>
           <p:spPr>
             <a:xfrm>
-              <a:off x="9863667" y="4766733"/>
-              <a:ext cx="508000" cy="508000"/>
+              <a:off x="10815430" y="2007428"/>
+              <a:ext cx="510209" cy="510209"/>
             </a:xfrm>
             <a:prstGeom prst="rect">
               <a:avLst/>
@@ -14040,14 +14433,14 @@
         </p:pic>
         <p:sp>
           <p:nvSpPr>
-            <p:cNvPr id="51" name="TextBox 50"/>
-            <p:cNvSpPr txBox="1"/>
-            <p:nvPr/>
-          </p:nvSpPr>
-          <p:spPr>
-            <a:xfrm>
-              <a:off x="9381464" y="5324475"/>
-              <a:ext cx="1472406" cy="192617"/>
+            <p:cNvPr id="62" name="TextBox 61"/>
+            <p:cNvSpPr txBox="1"/>
+            <p:nvPr/>
+          </p:nvSpPr>
+          <p:spPr>
+            <a:xfrm>
+              <a:off x="10331131" y="2567595"/>
+              <a:ext cx="1478808" cy="193454"/>
             </a:xfrm>
             <a:prstGeom prst="rect">
               <a:avLst/>
@@ -14066,7 +14459,7 @@
                 </a:lnSpc>
               </a:pPr>
               <a:r>
-                <a:rPr sz="1166" b="0" lang="ko-KR">
+                <a:rPr sz="1171" b="0" lang="ko-KR">
                   <a:solidFill>
                     <a:srgbClr val="232F3E"/>
                   </a:solidFill>
@@ -14081,14 +14474,14 @@
         </p:sp>
         <p:sp>
           <p:nvSpPr>
-            <p:cNvPr id="52" name="TextBox 51"/>
-            <p:cNvSpPr txBox="1"/>
-            <p:nvPr/>
-          </p:nvSpPr>
-          <p:spPr>
-            <a:xfrm>
-              <a:off x="9530292" y="5513917"/>
-              <a:ext cx="1174750" cy="165100"/>
+            <p:cNvPr id="63" name="TextBox 62"/>
+            <p:cNvSpPr txBox="1"/>
+            <p:nvPr/>
+          </p:nvSpPr>
+          <p:spPr>
+            <a:xfrm>
+              <a:off x="10480606" y="2757860"/>
+              <a:ext cx="1179858" cy="165818"/>
             </a:xfrm>
             <a:prstGeom prst="rect">
               <a:avLst/>
@@ -14107,7 +14500,7 @@
                 </a:lnSpc>
               </a:pPr>
               <a:r>
-                <a:rPr sz="1000" b="0" lang="ko-KR">
+                <a:rPr sz="1004" b="0" lang="ko-KR">
                   <a:solidFill>
                     <a:srgbClr val="545B64"/>
                   </a:solidFill>
@@ -14120,101 +14513,9 @@
             </a:p>
           </p:txBody>
         </p:sp>
-        <p:cxnSp>
-          <p:nvCxnSpPr>
-            <p:cNvPr id="53" name="Connector 52"/>
-            <p:cNvCxnSpPr/>
-            <p:nvPr/>
-          </p:nvCxnSpPr>
-          <p:spPr>
-            <a:xfrm flipV="1">
-              <a:off x="10117667" y="2882900"/>
-              <a:ext cx="0" cy="423333"/>
-            </a:xfrm>
-            <a:prstGeom prst="line">
-              <a:avLst/>
-            </a:prstGeom>
-            <a:ln w="15875">
-              <a:solidFill>
-                <a:srgbClr val="232F3E"/>
-              </a:solidFill>
-              <a:prstDash val="solid"/>
-              <a:miter lim="800000"/>
-            </a:ln>
-          </p:spPr>
-        </p:cxnSp>
-        <p:cxnSp>
-          <p:nvCxnSpPr>
-            <p:cNvPr id="54" name="Connector 53"/>
-            <p:cNvCxnSpPr/>
-            <p:nvPr/>
-          </p:nvCxnSpPr>
-          <p:spPr>
-            <a:xfrm>
-              <a:off x="10117667" y="4131733"/>
-              <a:ext cx="0" cy="592667"/>
-            </a:xfrm>
-            <a:prstGeom prst="line">
-              <a:avLst/>
-            </a:prstGeom>
-            <a:ln w="15875">
-              <a:solidFill>
-                <a:srgbClr val="232F3E"/>
-              </a:solidFill>
-              <a:prstDash val="solid"/>
-              <a:miter lim="800000"/>
-            </a:ln>
-          </p:spPr>
-        </p:cxnSp>
-        <p:cxnSp>
-          <p:nvCxnSpPr>
-            <p:cNvPr id="55" name="Connector 54"/>
-            <p:cNvCxnSpPr/>
-            <p:nvPr/>
-          </p:nvCxnSpPr>
-          <p:spPr>
-            <a:xfrm>
-              <a:off x="6858000" y="3602567"/>
-              <a:ext cx="1227667" cy="0"/>
-            </a:xfrm>
-            <a:prstGeom prst="line">
-              <a:avLst/>
-            </a:prstGeom>
-            <a:ln w="15875">
-              <a:solidFill>
-                <a:srgbClr val="232F3E"/>
-              </a:solidFill>
-              <a:prstDash val="solid"/>
-              <a:miter lim="800000"/>
-            </a:ln>
-          </p:spPr>
-        </p:cxnSp>
-        <p:cxnSp>
-          <p:nvCxnSpPr>
-            <p:cNvPr id="56" name="Connector 55"/>
-            <p:cNvCxnSpPr/>
-            <p:nvPr/>
-          </p:nvCxnSpPr>
-          <p:spPr>
-            <a:xfrm>
-              <a:off x="8678333" y="3602567"/>
-              <a:ext cx="1143000" cy="0"/>
-            </a:xfrm>
-            <a:prstGeom prst="line">
-              <a:avLst/>
-            </a:prstGeom>
-            <a:ln w="15875">
-              <a:solidFill>
-                <a:srgbClr val="232F3E"/>
-              </a:solidFill>
-              <a:prstDash val="solid"/>
-              <a:miter lim="800000"/>
-            </a:ln>
-          </p:spPr>
-        </p:cxnSp>
         <p:pic>
           <p:nvPicPr>
-            <p:cNvPr id="57" name="Amazon-VPC_Peering-Connection" descr="Amazon VPC_Peering Connection"/>
+            <p:cNvPr id="64" name="Amazon-Route-53_Route-Table" descr="Amazon Route 53_Route Table"/>
             <p:cNvPicPr>
               <a:picLocks noChangeAspect="1"/>
             </p:cNvPicPr>
@@ -14234,8 +14535,8 @@
           </p:blipFill>
           <p:spPr>
             <a:xfrm>
-              <a:off x="8128000" y="3348567"/>
-              <a:ext cx="508000" cy="508000"/>
+              <a:off x="10177670" y="4856093"/>
+              <a:ext cx="510209" cy="510209"/>
             </a:xfrm>
             <a:prstGeom prst="rect">
               <a:avLst/>
@@ -14244,14 +14545,14 @@
         </p:pic>
         <p:sp>
           <p:nvSpPr>
-            <p:cNvPr id="58" name="TextBox 57"/>
-            <p:cNvSpPr txBox="1"/>
-            <p:nvPr/>
-          </p:nvSpPr>
-          <p:spPr>
-            <a:xfrm>
-              <a:off x="7747661" y="3906308"/>
-              <a:ext cx="1268677" cy="192617"/>
+            <p:cNvPr id="65" name="TextBox 64"/>
+            <p:cNvSpPr txBox="1"/>
+            <p:nvPr/>
+          </p:nvSpPr>
+          <p:spPr>
+            <a:xfrm>
+              <a:off x="9949139" y="5416260"/>
+              <a:ext cx="967271" cy="193454"/>
             </a:xfrm>
             <a:prstGeom prst="rect">
               <a:avLst/>
@@ -14270,7 +14571,7 @@
                 </a:lnSpc>
               </a:pPr>
               <a:r>
-                <a:rPr sz="1166" b="0" lang="ko-KR">
+                <a:rPr sz="1171" b="0" lang="ko-KR">
                   <a:solidFill>
                     <a:srgbClr val="232F3E"/>
                   </a:solidFill>
@@ -14278,21 +14579,21 @@
                   <a:ea typeface="Malgun Gothic"/>
                   <a:cs typeface="Malgun Gothic"/>
                 </a:rPr>
-                <a:t>TGW peering</a:t>
-              </a:r>
-            </a:p>
-          </p:txBody>
-        </p:sp>
-        <p:sp>
-          <p:nvSpPr>
-            <p:cNvPr id="59" name="TextBox 58"/>
-            <p:cNvSpPr txBox="1"/>
-            <p:nvPr/>
-          </p:nvSpPr>
-          <p:spPr>
-            <a:xfrm>
-              <a:off x="7985125" y="4095750"/>
-              <a:ext cx="793750" cy="165100"/>
+                <a:t>TGW B RT</a:t>
+              </a:r>
+            </a:p>
+          </p:txBody>
+        </p:sp>
+        <p:sp>
+          <p:nvSpPr>
+            <p:cNvPr id="66" name="TextBox 65"/>
+            <p:cNvSpPr txBox="1"/>
+            <p:nvPr/>
+          </p:nvSpPr>
+          <p:spPr>
+            <a:xfrm>
+              <a:off x="9830887" y="5606525"/>
+              <a:ext cx="1203774" cy="165818"/>
             </a:xfrm>
             <a:prstGeom prst="rect">
               <a:avLst/>
@@ -14311,7 +14612,7 @@
                 </a:lnSpc>
               </a:pPr>
               <a:r>
-                <a:rPr sz="1000" b="0" lang="ko-KR">
+                <a:rPr sz="1004" b="0" lang="ko-KR">
                   <a:solidFill>
                     <a:srgbClr val="545B64"/>
                   </a:solidFill>
@@ -14319,21 +14620,555 @@
                   <a:ea typeface="Malgun Gothic"/>
                   <a:cs typeface="Malgun Gothic"/>
                 </a:rPr>
-                <a:t>AWS 백본</a:t>
-              </a:r>
-            </a:p>
-          </p:txBody>
-        </p:sp>
-        <p:sp>
-          <p:nvSpPr>
-            <p:cNvPr id="60" name="TextBox 59"/>
-            <p:cNvSpPr txBox="1"/>
-            <p:nvPr/>
-          </p:nvSpPr>
-          <p:spPr>
-            <a:xfrm>
-              <a:off x="4953000" y="6127750"/>
-              <a:ext cx="8112125" cy="165100"/>
+                <a:t>VPC 경로 전파</a:t>
+              </a:r>
+            </a:p>
+          </p:txBody>
+        </p:sp>
+        <p:sp>
+          <p:nvSpPr>
+            <p:cNvPr id="67" name="TextBox 66"/>
+            <p:cNvSpPr txBox="1"/>
+            <p:nvPr/>
+          </p:nvSpPr>
+          <p:spPr>
+            <a:xfrm>
+              <a:off x="9141308" y="5776595"/>
+              <a:ext cx="2582932" cy="165818"/>
+            </a:xfrm>
+            <a:prstGeom prst="rect">
+              <a:avLst/>
+            </a:prstGeom>
+            <a:noFill/>
+          </p:spPr>
+          <p:txBody>
+            <a:bodyPr wrap="none" lIns="0" rIns="0" tIns="0" bIns="0" anchor="t">
+              <a:noAutofit/>
+            </a:bodyPr>
+            <a:lstStyle/>
+            <a:p>
+              <a:pPr algn="ctr">
+                <a:lnSpc>
+                  <a:spcPct val="100000"/>
+                </a:lnSpc>
+              </a:pPr>
+              <a:r>
+                <a:rPr sz="1004" b="0" lang="ko-KR">
+                  <a:solidFill>
+                    <a:srgbClr val="545B64"/>
+                  </a:solidFill>
+                  <a:latin typeface="Arial"/>
+                  <a:ea typeface="Malgun Gothic"/>
+                  <a:cs typeface="Malgun Gothic"/>
+                </a:rPr>
+                <a:t>10.0.0.0/13 · 192.168.0.0/16</a:t>
+              </a:r>
+            </a:p>
+          </p:txBody>
+        </p:sp>
+        <p:sp>
+          <p:nvSpPr>
+            <p:cNvPr id="68" name="TextBox 67"/>
+            <p:cNvSpPr txBox="1"/>
+            <p:nvPr/>
+          </p:nvSpPr>
+          <p:spPr>
+            <a:xfrm>
+              <a:off x="9938509" y="5946665"/>
+              <a:ext cx="988529" cy="165818"/>
+            </a:xfrm>
+            <a:prstGeom prst="rect">
+              <a:avLst/>
+            </a:prstGeom>
+            <a:noFill/>
+          </p:spPr>
+          <p:txBody>
+            <a:bodyPr wrap="none" lIns="0" rIns="0" tIns="0" bIns="0" anchor="t">
+              <a:noAutofit/>
+            </a:bodyPr>
+            <a:lstStyle/>
+            <a:p>
+              <a:pPr algn="ctr">
+                <a:lnSpc>
+                  <a:spcPct val="100000"/>
+                </a:lnSpc>
+              </a:pPr>
+              <a:r>
+                <a:rPr sz="1004" b="0" lang="ko-KR">
+                  <a:solidFill>
+                    <a:srgbClr val="545B64"/>
+                  </a:solidFill>
+                  <a:latin typeface="Arial"/>
+                  <a:ea typeface="Malgun Gothic"/>
+                  <a:cs typeface="Malgun Gothic"/>
+                </a:rPr>
+                <a:t>→ peering</a:t>
+              </a:r>
+            </a:p>
+          </p:txBody>
+        </p:sp>
+        <p:sp>
+          <p:nvSpPr>
+            <p:cNvPr id="69" name="Freeform 68"/>
+            <p:cNvSpPr/>
+            <p:nvPr/>
+          </p:nvSpPr>
+          <p:spPr>
+            <a:xfrm>
+              <a:off x="9795013" y="2964070"/>
+              <a:ext cx="531467" cy="425173"/>
+            </a:xfrm>
+            <a:custGeom>
+              <a:avLst/>
+              <a:gdLst/>
+              <a:ahLst/>
+              <a:cxnLst/>
+              <a:rect l="l" t="t" r="r" b="b"/>
+              <a:pathLst>
+                <a:path w="531467" h="425173">
+                  <a:moveTo>
+                    <a:pt x="531467" y="425173"/>
+                  </a:moveTo>
+                  <a:lnTo>
+                    <a:pt x="531467" y="297621"/>
+                  </a:lnTo>
+                  <a:lnTo>
+                    <a:pt x="0" y="297621"/>
+                  </a:lnTo>
+                  <a:lnTo>
+                    <a:pt x="0" y="0"/>
+                  </a:lnTo>
+                </a:path>
+              </a:pathLst>
+            </a:custGeom>
+            <a:noFill/>
+            <a:ln w="15944">
+              <a:solidFill>
+                <a:srgbClr val="232F3E"/>
+              </a:solidFill>
+              <a:prstDash val="solid"/>
+              <a:miter lim="800000"/>
+            </a:ln>
+          </p:spPr>
+          <p:txBody>
+            <a:bodyPr rtlCol="0" anchor="ctr"/>
+            <a:lstStyle/>
+            <a:p>
+              <a:pPr algn="ctr"/>
+            </a:p>
+          </p:txBody>
+        </p:sp>
+        <p:sp>
+          <p:nvSpPr>
+            <p:cNvPr id="70" name="Freeform 69"/>
+            <p:cNvSpPr/>
+            <p:nvPr/>
+          </p:nvSpPr>
+          <p:spPr>
+            <a:xfrm>
+              <a:off x="10539067" y="2964070"/>
+              <a:ext cx="531468" cy="425173"/>
+            </a:xfrm>
+            <a:custGeom>
+              <a:avLst/>
+              <a:gdLst/>
+              <a:ahLst/>
+              <a:cxnLst/>
+              <a:rect l="l" t="t" r="r" b="b"/>
+              <a:pathLst>
+                <a:path w="531468" h="425173">
+                  <a:moveTo>
+                    <a:pt x="0" y="425173"/>
+                  </a:moveTo>
+                  <a:lnTo>
+                    <a:pt x="0" y="297621"/>
+                  </a:lnTo>
+                  <a:lnTo>
+                    <a:pt x="531468" y="297621"/>
+                  </a:lnTo>
+                  <a:lnTo>
+                    <a:pt x="531468" y="0"/>
+                  </a:lnTo>
+                </a:path>
+              </a:pathLst>
+            </a:custGeom>
+            <a:noFill/>
+            <a:ln w="15944">
+              <a:solidFill>
+                <a:srgbClr val="232F3E"/>
+              </a:solidFill>
+              <a:prstDash val="solid"/>
+              <a:miter lim="800000"/>
+            </a:ln>
+          </p:spPr>
+          <p:txBody>
+            <a:bodyPr rtlCol="0" anchor="ctr"/>
+            <a:lstStyle/>
+            <a:p>
+              <a:pPr algn="ctr"/>
+            </a:p>
+          </p:txBody>
+        </p:sp>
+        <p:sp>
+          <p:nvSpPr>
+            <p:cNvPr id="71" name="Oval 70"/>
+            <p:cNvSpPr/>
+            <p:nvPr/>
+          </p:nvSpPr>
+          <p:spPr>
+            <a:xfrm>
+              <a:off x="3130412" y="3431761"/>
+              <a:ext cx="212587" cy="212587"/>
+            </a:xfrm>
+            <a:prstGeom prst="ellipse">
+              <a:avLst/>
+            </a:prstGeom>
+            <a:solidFill>
+              <a:srgbClr val="232F3E"/>
+            </a:solidFill>
+            <a:ln>
+              <a:noFill/>
+            </a:ln>
+          </p:spPr>
+          <p:txBody>
+            <a:bodyPr rtlCol="0" anchor="ctr"/>
+            <a:lstStyle/>
+            <a:p>
+              <a:pPr algn="ctr"/>
+            </a:p>
+          </p:txBody>
+        </p:sp>
+        <p:sp>
+          <p:nvSpPr>
+            <p:cNvPr id="72" name="TextBox 71"/>
+            <p:cNvSpPr txBox="1"/>
+            <p:nvPr/>
+          </p:nvSpPr>
+          <p:spPr>
+            <a:xfrm>
+              <a:off x="3129083" y="3459397"/>
+              <a:ext cx="215244" cy="165818"/>
+            </a:xfrm>
+            <a:prstGeom prst="rect">
+              <a:avLst/>
+            </a:prstGeom>
+            <a:noFill/>
+          </p:spPr>
+          <p:txBody>
+            <a:bodyPr wrap="none" lIns="0" rIns="0" tIns="0" bIns="0" anchor="t">
+              <a:noAutofit/>
+            </a:bodyPr>
+            <a:lstStyle/>
+            <a:p>
+              <a:pPr algn="ctr">
+                <a:lnSpc>
+                  <a:spcPct val="100000"/>
+                </a:lnSpc>
+              </a:pPr>
+              <a:r>
+                <a:rPr sz="1004" b="1" lang="ko-KR">
+                  <a:solidFill>
+                    <a:srgbClr val="FFFFFF"/>
+                  </a:solidFill>
+                  <a:latin typeface="Arial"/>
+                  <a:ea typeface="Malgun Gothic"/>
+                  <a:cs typeface="Malgun Gothic"/>
+                </a:rPr>
+                <a:t>1</a:t>
+              </a:r>
+            </a:p>
+          </p:txBody>
+        </p:sp>
+        <p:sp>
+          <p:nvSpPr>
+            <p:cNvPr id="73" name="Oval 72"/>
+            <p:cNvSpPr/>
+            <p:nvPr/>
+          </p:nvSpPr>
+          <p:spPr>
+            <a:xfrm>
+              <a:off x="5203135" y="3431761"/>
+              <a:ext cx="212587" cy="212587"/>
+            </a:xfrm>
+            <a:prstGeom prst="ellipse">
+              <a:avLst/>
+            </a:prstGeom>
+            <a:solidFill>
+              <a:srgbClr val="232F3E"/>
+            </a:solidFill>
+            <a:ln>
+              <a:noFill/>
+            </a:ln>
+          </p:spPr>
+          <p:txBody>
+            <a:bodyPr rtlCol="0" anchor="ctr"/>
+            <a:lstStyle/>
+            <a:p>
+              <a:pPr algn="ctr"/>
+            </a:p>
+          </p:txBody>
+        </p:sp>
+        <p:sp>
+          <p:nvSpPr>
+            <p:cNvPr id="74" name="TextBox 73"/>
+            <p:cNvSpPr txBox="1"/>
+            <p:nvPr/>
+          </p:nvSpPr>
+          <p:spPr>
+            <a:xfrm>
+              <a:off x="5201806" y="3459397"/>
+              <a:ext cx="215244" cy="165818"/>
+            </a:xfrm>
+            <a:prstGeom prst="rect">
+              <a:avLst/>
+            </a:prstGeom>
+            <a:noFill/>
+          </p:spPr>
+          <p:txBody>
+            <a:bodyPr wrap="none" lIns="0" rIns="0" tIns="0" bIns="0" anchor="t">
+              <a:noAutofit/>
+            </a:bodyPr>
+            <a:lstStyle/>
+            <a:p>
+              <a:pPr algn="ctr">
+                <a:lnSpc>
+                  <a:spcPct val="100000"/>
+                </a:lnSpc>
+              </a:pPr>
+              <a:r>
+                <a:rPr sz="1004" b="1" lang="ko-KR">
+                  <a:solidFill>
+                    <a:srgbClr val="FFFFFF"/>
+                  </a:solidFill>
+                  <a:latin typeface="Arial"/>
+                  <a:ea typeface="Malgun Gothic"/>
+                  <a:cs typeface="Malgun Gothic"/>
+                </a:rPr>
+                <a:t>2</a:t>
+              </a:r>
+            </a:p>
+          </p:txBody>
+        </p:sp>
+        <p:sp>
+          <p:nvSpPr>
+            <p:cNvPr id="75" name="Oval 74"/>
+            <p:cNvSpPr/>
+            <p:nvPr/>
+          </p:nvSpPr>
+          <p:spPr>
+            <a:xfrm>
+              <a:off x="7966765" y="3431761"/>
+              <a:ext cx="212587" cy="212587"/>
+            </a:xfrm>
+            <a:prstGeom prst="ellipse">
+              <a:avLst/>
+            </a:prstGeom>
+            <a:solidFill>
+              <a:srgbClr val="232F3E"/>
+            </a:solidFill>
+            <a:ln>
+              <a:noFill/>
+            </a:ln>
+          </p:spPr>
+          <p:txBody>
+            <a:bodyPr rtlCol="0" anchor="ctr"/>
+            <a:lstStyle/>
+            <a:p>
+              <a:pPr algn="ctr"/>
+            </a:p>
+          </p:txBody>
+        </p:sp>
+        <p:sp>
+          <p:nvSpPr>
+            <p:cNvPr id="76" name="TextBox 75"/>
+            <p:cNvSpPr txBox="1"/>
+            <p:nvPr/>
+          </p:nvSpPr>
+          <p:spPr>
+            <a:xfrm>
+              <a:off x="7965437" y="3459397"/>
+              <a:ext cx="215244" cy="165818"/>
+            </a:xfrm>
+            <a:prstGeom prst="rect">
+              <a:avLst/>
+            </a:prstGeom>
+            <a:noFill/>
+          </p:spPr>
+          <p:txBody>
+            <a:bodyPr wrap="none" lIns="0" rIns="0" tIns="0" bIns="0" anchor="t">
+              <a:noAutofit/>
+            </a:bodyPr>
+            <a:lstStyle/>
+            <a:p>
+              <a:pPr algn="ctr">
+                <a:lnSpc>
+                  <a:spcPct val="100000"/>
+                </a:lnSpc>
+              </a:pPr>
+              <a:r>
+                <a:rPr sz="1004" b="1" lang="ko-KR">
+                  <a:solidFill>
+                    <a:srgbClr val="FFFFFF"/>
+                  </a:solidFill>
+                  <a:latin typeface="Arial"/>
+                  <a:ea typeface="Malgun Gothic"/>
+                  <a:cs typeface="Malgun Gothic"/>
+                </a:rPr>
+                <a:t>3</a:t>
+              </a:r>
+            </a:p>
+          </p:txBody>
+        </p:sp>
+        <p:sp>
+          <p:nvSpPr>
+            <p:cNvPr id="77" name="Oval 76"/>
+            <p:cNvSpPr/>
+            <p:nvPr/>
+          </p:nvSpPr>
+          <p:spPr>
+            <a:xfrm>
+              <a:off x="9954453" y="3006587"/>
+              <a:ext cx="212587" cy="212587"/>
+            </a:xfrm>
+            <a:prstGeom prst="ellipse">
+              <a:avLst/>
+            </a:prstGeom>
+            <a:solidFill>
+              <a:srgbClr val="232F3E"/>
+            </a:solidFill>
+            <a:ln>
+              <a:noFill/>
+            </a:ln>
+          </p:spPr>
+          <p:txBody>
+            <a:bodyPr rtlCol="0" anchor="ctr"/>
+            <a:lstStyle/>
+            <a:p>
+              <a:pPr algn="ctr"/>
+            </a:p>
+          </p:txBody>
+        </p:sp>
+        <p:sp>
+          <p:nvSpPr>
+            <p:cNvPr id="78" name="TextBox 77"/>
+            <p:cNvSpPr txBox="1"/>
+            <p:nvPr/>
+          </p:nvSpPr>
+          <p:spPr>
+            <a:xfrm>
+              <a:off x="9953125" y="3034223"/>
+              <a:ext cx="215244" cy="165818"/>
+            </a:xfrm>
+            <a:prstGeom prst="rect">
+              <a:avLst/>
+            </a:prstGeom>
+            <a:noFill/>
+          </p:spPr>
+          <p:txBody>
+            <a:bodyPr wrap="none" lIns="0" rIns="0" tIns="0" bIns="0" anchor="t">
+              <a:noAutofit/>
+            </a:bodyPr>
+            <a:lstStyle/>
+            <a:p>
+              <a:pPr algn="ctr">
+                <a:lnSpc>
+                  <a:spcPct val="100000"/>
+                </a:lnSpc>
+              </a:pPr>
+              <a:r>
+                <a:rPr sz="1004" b="1" lang="ko-KR">
+                  <a:solidFill>
+                    <a:srgbClr val="FFFFFF"/>
+                  </a:solidFill>
+                  <a:latin typeface="Arial"/>
+                  <a:ea typeface="Malgun Gothic"/>
+                  <a:cs typeface="Malgun Gothic"/>
+                </a:rPr>
+                <a:t>4</a:t>
+              </a:r>
+            </a:p>
+          </p:txBody>
+        </p:sp>
+        <p:sp>
+          <p:nvSpPr>
+            <p:cNvPr id="79" name="Oval 78"/>
+            <p:cNvSpPr/>
+            <p:nvPr/>
+          </p:nvSpPr>
+          <p:spPr>
+            <a:xfrm>
+              <a:off x="4544115" y="6365461"/>
+              <a:ext cx="212587" cy="212587"/>
+            </a:xfrm>
+            <a:prstGeom prst="ellipse">
+              <a:avLst/>
+            </a:prstGeom>
+            <a:solidFill>
+              <a:srgbClr val="232F3E"/>
+            </a:solidFill>
+            <a:ln>
+              <a:noFill/>
+            </a:ln>
+          </p:spPr>
+          <p:txBody>
+            <a:bodyPr rtlCol="0" anchor="ctr"/>
+            <a:lstStyle/>
+            <a:p>
+              <a:pPr algn="ctr"/>
+            </a:p>
+          </p:txBody>
+        </p:sp>
+        <p:sp>
+          <p:nvSpPr>
+            <p:cNvPr id="80" name="TextBox 79"/>
+            <p:cNvSpPr txBox="1"/>
+            <p:nvPr/>
+          </p:nvSpPr>
+          <p:spPr>
+            <a:xfrm>
+              <a:off x="4542787" y="6393097"/>
+              <a:ext cx="215244" cy="165818"/>
+            </a:xfrm>
+            <a:prstGeom prst="rect">
+              <a:avLst/>
+            </a:prstGeom>
+            <a:noFill/>
+          </p:spPr>
+          <p:txBody>
+            <a:bodyPr wrap="none" lIns="0" rIns="0" tIns="0" bIns="0" anchor="t">
+              <a:noAutofit/>
+            </a:bodyPr>
+            <a:lstStyle/>
+            <a:p>
+              <a:pPr algn="ctr">
+                <a:lnSpc>
+                  <a:spcPct val="100000"/>
+                </a:lnSpc>
+              </a:pPr>
+              <a:r>
+                <a:rPr sz="1004" b="1" lang="ko-KR">
+                  <a:solidFill>
+                    <a:srgbClr val="FFFFFF"/>
+                  </a:solidFill>
+                  <a:latin typeface="Arial"/>
+                  <a:ea typeface="Malgun Gothic"/>
+                  <a:cs typeface="Malgun Gothic"/>
+                </a:rPr>
+                <a:t>1</a:t>
+              </a:r>
+            </a:p>
+          </p:txBody>
+        </p:sp>
+        <p:sp>
+          <p:nvSpPr>
+            <p:cNvPr id="81" name="TextBox 80"/>
+            <p:cNvSpPr txBox="1"/>
+            <p:nvPr/>
+          </p:nvSpPr>
+          <p:spPr>
+            <a:xfrm>
+              <a:off x="4841737" y="6393097"/>
+              <a:ext cx="2128527" cy="165818"/>
             </a:xfrm>
             <a:prstGeom prst="rect">
               <a:avLst/>
@@ -14352,7 +15187,7 @@
                 </a:lnSpc>
               </a:pPr>
               <a:r>
-                <a:rPr sz="1000" b="0" lang="ko-KR">
+                <a:rPr sz="1004" b="0" lang="ko-KR">
                   <a:solidFill>
                     <a:srgbClr val="545B64"/>
                   </a:solidFill>
@@ -14360,21 +15195,91 @@
                   <a:ea typeface="Malgun Gothic"/>
                   <a:cs typeface="Malgun Gothic"/>
                 </a:rPr>
-                <a:t>Hub &amp; spoke: VPC·VPN은 리전 TGW에 attachment로 연결 · VPC CIDR과 VPN(BGP) 경로는 TGW RT에 전파</a:t>
-              </a:r>
-            </a:p>
-          </p:txBody>
-        </p:sp>
-        <p:sp>
-          <p:nvSpPr>
-            <p:cNvPr id="61" name="TextBox 60"/>
-            <p:cNvSpPr txBox="1"/>
-            <p:nvPr/>
-          </p:nvSpPr>
-          <p:spPr>
-            <a:xfrm>
-              <a:off x="4953000" y="6297083"/>
-              <a:ext cx="4643438" cy="165100"/>
+                <a:t>CGW → VPN (IPsec, BGP)</a:t>
+              </a:r>
+            </a:p>
+          </p:txBody>
+        </p:sp>
+        <p:sp>
+          <p:nvSpPr>
+            <p:cNvPr id="82" name="Oval 81"/>
+            <p:cNvSpPr/>
+            <p:nvPr/>
+          </p:nvSpPr>
+          <p:spPr>
+            <a:xfrm>
+              <a:off x="6655104" y="6365461"/>
+              <a:ext cx="212587" cy="212587"/>
+            </a:xfrm>
+            <a:prstGeom prst="ellipse">
+              <a:avLst/>
+            </a:prstGeom>
+            <a:solidFill>
+              <a:srgbClr val="232F3E"/>
+            </a:solidFill>
+            <a:ln>
+              <a:noFill/>
+            </a:ln>
+          </p:spPr>
+          <p:txBody>
+            <a:bodyPr rtlCol="0" anchor="ctr"/>
+            <a:lstStyle/>
+            <a:p>
+              <a:pPr algn="ctr"/>
+            </a:p>
+          </p:txBody>
+        </p:sp>
+        <p:sp>
+          <p:nvSpPr>
+            <p:cNvPr id="83" name="TextBox 82"/>
+            <p:cNvSpPr txBox="1"/>
+            <p:nvPr/>
+          </p:nvSpPr>
+          <p:spPr>
+            <a:xfrm>
+              <a:off x="6653775" y="6393097"/>
+              <a:ext cx="215244" cy="165818"/>
+            </a:xfrm>
+            <a:prstGeom prst="rect">
+              <a:avLst/>
+            </a:prstGeom>
+            <a:noFill/>
+          </p:spPr>
+          <p:txBody>
+            <a:bodyPr wrap="none" lIns="0" rIns="0" tIns="0" bIns="0" anchor="t">
+              <a:noAutofit/>
+            </a:bodyPr>
+            <a:lstStyle/>
+            <a:p>
+              <a:pPr algn="ctr">
+                <a:lnSpc>
+                  <a:spcPct val="100000"/>
+                </a:lnSpc>
+              </a:pPr>
+              <a:r>
+                <a:rPr sz="1004" b="1" lang="ko-KR">
+                  <a:solidFill>
+                    <a:srgbClr val="FFFFFF"/>
+                  </a:solidFill>
+                  <a:latin typeface="Arial"/>
+                  <a:ea typeface="Malgun Gothic"/>
+                  <a:cs typeface="Malgun Gothic"/>
+                </a:rPr>
+                <a:t>2</a:t>
+              </a:r>
+            </a:p>
+          </p:txBody>
+        </p:sp>
+        <p:sp>
+          <p:nvSpPr>
+            <p:cNvPr id="84" name="TextBox 83"/>
+            <p:cNvSpPr txBox="1"/>
+            <p:nvPr/>
+          </p:nvSpPr>
+          <p:spPr>
+            <a:xfrm>
+              <a:off x="6952725" y="6393097"/>
+              <a:ext cx="1163914" cy="165818"/>
             </a:xfrm>
             <a:prstGeom prst="rect">
               <a:avLst/>
@@ -14393,7 +15298,7 @@
                 </a:lnSpc>
               </a:pPr>
               <a:r>
-                <a:rPr sz="1000" b="0" lang="ko-KR">
+                <a:rPr sz="1004" b="0" lang="ko-KR">
                   <a:solidFill>
                     <a:srgbClr val="545B64"/>
                   </a:solidFill>
@@ -14401,21 +15306,91 @@
                   <a:ea typeface="Malgun Gothic"/>
                   <a:cs typeface="Malgun Gothic"/>
                 </a:rPr>
-                <a:t>라우팅: VPC 서브넷 10.0.0.0/8 · 192.168.0.0/16 → TGW</a:t>
-              </a:r>
-            </a:p>
-          </p:txBody>
-        </p:sp>
-        <p:sp>
-          <p:nvSpPr>
-            <p:cNvPr id="62" name="TextBox 61"/>
-            <p:cNvSpPr txBox="1"/>
-            <p:nvPr/>
-          </p:nvSpPr>
-          <p:spPr>
-            <a:xfrm>
-              <a:off x="4953000" y="6466417"/>
-              <a:ext cx="7802563" cy="165100"/>
+                <a:t>VPN → TGW A</a:t>
+              </a:r>
+            </a:p>
+          </p:txBody>
+        </p:sp>
+        <p:sp>
+          <p:nvSpPr>
+            <p:cNvPr id="85" name="Oval 84"/>
+            <p:cNvSpPr/>
+            <p:nvPr/>
+          </p:nvSpPr>
+          <p:spPr>
+            <a:xfrm>
+              <a:off x="7994402" y="6365461"/>
+              <a:ext cx="212587" cy="212587"/>
+            </a:xfrm>
+            <a:prstGeom prst="ellipse">
+              <a:avLst/>
+            </a:prstGeom>
+            <a:solidFill>
+              <a:srgbClr val="232F3E"/>
+            </a:solidFill>
+            <a:ln>
+              <a:noFill/>
+            </a:ln>
+          </p:spPr>
+          <p:txBody>
+            <a:bodyPr rtlCol="0" anchor="ctr"/>
+            <a:lstStyle/>
+            <a:p>
+              <a:pPr algn="ctr"/>
+            </a:p>
+          </p:txBody>
+        </p:sp>
+        <p:sp>
+          <p:nvSpPr>
+            <p:cNvPr id="86" name="TextBox 85"/>
+            <p:cNvSpPr txBox="1"/>
+            <p:nvPr/>
+          </p:nvSpPr>
+          <p:spPr>
+            <a:xfrm>
+              <a:off x="7993073" y="6393097"/>
+              <a:ext cx="215244" cy="165818"/>
+            </a:xfrm>
+            <a:prstGeom prst="rect">
+              <a:avLst/>
+            </a:prstGeom>
+            <a:noFill/>
+          </p:spPr>
+          <p:txBody>
+            <a:bodyPr wrap="none" lIns="0" rIns="0" tIns="0" bIns="0" anchor="t">
+              <a:noAutofit/>
+            </a:bodyPr>
+            <a:lstStyle/>
+            <a:p>
+              <a:pPr algn="ctr">
+                <a:lnSpc>
+                  <a:spcPct val="100000"/>
+                </a:lnSpc>
+              </a:pPr>
+              <a:r>
+                <a:rPr sz="1004" b="1" lang="ko-KR">
+                  <a:solidFill>
+                    <a:srgbClr val="FFFFFF"/>
+                  </a:solidFill>
+                  <a:latin typeface="Arial"/>
+                  <a:ea typeface="Malgun Gothic"/>
+                  <a:cs typeface="Malgun Gothic"/>
+                </a:rPr>
+                <a:t>3</a:t>
+              </a:r>
+            </a:p>
+          </p:txBody>
+        </p:sp>
+        <p:sp>
+          <p:nvSpPr>
+            <p:cNvPr id="87" name="TextBox 86"/>
+            <p:cNvSpPr txBox="1"/>
+            <p:nvPr/>
+          </p:nvSpPr>
+          <p:spPr>
+            <a:xfrm>
+              <a:off x="8292023" y="6393097"/>
+              <a:ext cx="2327827" cy="165818"/>
             </a:xfrm>
             <a:prstGeom prst="rect">
               <a:avLst/>
@@ -14434,7 +15409,7 @@
                 </a:lnSpc>
               </a:pPr>
               <a:r>
-                <a:rPr sz="1000" b="0" lang="ko-KR">
+                <a:rPr sz="1004" b="0" lang="ko-KR">
                   <a:solidFill>
                     <a:srgbClr val="545B64"/>
                   </a:solidFill>
@@ -14442,7 +15417,118 @@
                   <a:ea typeface="Malgun Gothic"/>
                   <a:cs typeface="Malgun Gothic"/>
                 </a:rPr>
-                <a:t>TGW RT: A 10.16.0.0/13 → peering · B 10.0.0.0/13 · 192.168.0.0/16 → peering (정적 경로)</a:t>
+                <a:t>TGW A → TGW B (정적 경로)</a:t>
+              </a:r>
+            </a:p>
+          </p:txBody>
+        </p:sp>
+        <p:sp>
+          <p:nvSpPr>
+            <p:cNvPr id="88" name="Oval 87"/>
+            <p:cNvSpPr/>
+            <p:nvPr/>
+          </p:nvSpPr>
+          <p:spPr>
+            <a:xfrm>
+              <a:off x="10264830" y="6365461"/>
+              <a:ext cx="212587" cy="212587"/>
+            </a:xfrm>
+            <a:prstGeom prst="ellipse">
+              <a:avLst/>
+            </a:prstGeom>
+            <a:solidFill>
+              <a:srgbClr val="232F3E"/>
+            </a:solidFill>
+            <a:ln>
+              <a:noFill/>
+            </a:ln>
+          </p:spPr>
+          <p:txBody>
+            <a:bodyPr rtlCol="0" anchor="ctr"/>
+            <a:lstStyle/>
+            <a:p>
+              <a:pPr algn="ctr"/>
+            </a:p>
+          </p:txBody>
+        </p:sp>
+        <p:sp>
+          <p:nvSpPr>
+            <p:cNvPr id="89" name="TextBox 88"/>
+            <p:cNvSpPr txBox="1"/>
+            <p:nvPr/>
+          </p:nvSpPr>
+          <p:spPr>
+            <a:xfrm>
+              <a:off x="10263502" y="6393097"/>
+              <a:ext cx="215244" cy="165818"/>
+            </a:xfrm>
+            <a:prstGeom prst="rect">
+              <a:avLst/>
+            </a:prstGeom>
+            <a:noFill/>
+          </p:spPr>
+          <p:txBody>
+            <a:bodyPr wrap="none" lIns="0" rIns="0" tIns="0" bIns="0" anchor="t">
+              <a:noAutofit/>
+            </a:bodyPr>
+            <a:lstStyle/>
+            <a:p>
+              <a:pPr algn="ctr">
+                <a:lnSpc>
+                  <a:spcPct val="100000"/>
+                </a:lnSpc>
+              </a:pPr>
+              <a:r>
+                <a:rPr sz="1004" b="1" lang="ko-KR">
+                  <a:solidFill>
+                    <a:srgbClr val="FFFFFF"/>
+                  </a:solidFill>
+                  <a:latin typeface="Arial"/>
+                  <a:ea typeface="Malgun Gothic"/>
+                  <a:cs typeface="Malgun Gothic"/>
+                </a:rPr>
+                <a:t>4</a:t>
+              </a:r>
+            </a:p>
+          </p:txBody>
+        </p:sp>
+        <p:sp>
+          <p:nvSpPr>
+            <p:cNvPr id="90" name="TextBox 89"/>
+            <p:cNvSpPr txBox="1"/>
+            <p:nvPr/>
+          </p:nvSpPr>
+          <p:spPr>
+            <a:xfrm>
+              <a:off x="10562452" y="6393097"/>
+              <a:ext cx="1426990" cy="165818"/>
+            </a:xfrm>
+            <a:prstGeom prst="rect">
+              <a:avLst/>
+            </a:prstGeom>
+            <a:noFill/>
+          </p:spPr>
+          <p:txBody>
+            <a:bodyPr wrap="none" lIns="0" rIns="0" tIns="0" bIns="0" anchor="t">
+              <a:noAutofit/>
+            </a:bodyPr>
+            <a:lstStyle/>
+            <a:p>
+              <a:pPr algn="l">
+                <a:lnSpc>
+                  <a:spcPct val="100000"/>
+                </a:lnSpc>
+              </a:pPr>
+              <a:r>
+                <a:rPr sz="1004" b="0" lang="ko-KR">
+                  <a:solidFill>
+                    <a:srgbClr val="545B64"/>
+                  </a:solidFill>
+                  <a:latin typeface="Arial"/>
+                  <a:ea typeface="Malgun Gothic"/>
+                  <a:cs typeface="Malgun Gothic"/>
+                </a:rPr>
+                <a:t>TGW B → DR VPC</a:t>
               </a:r>
             </a:p>
           </p:txBody>
@@ -14731,7 +15817,7 @@
           <p:spPr>
             <a:xfrm>
               <a:off x="698500" y="1930400"/>
-              <a:ext cx="1735667" cy="1693333"/>
+              <a:ext cx="1481667" cy="1693333"/>
             </a:xfrm>
             <a:prstGeom prst="rect">
               <a:avLst/>
@@ -14874,7 +15960,7 @@
           <p:spPr>
             <a:xfrm>
               <a:off x="825500" y="2417233"/>
-              <a:ext cx="1481667" cy="1121833"/>
+              <a:ext cx="1227667" cy="1121833"/>
             </a:xfrm>
             <a:prstGeom prst="rect">
               <a:avLst/>
@@ -14989,7 +16075,7 @@
           </p:blipFill>
           <p:spPr>
             <a:xfrm>
-              <a:off x="1312333" y="2713567"/>
+              <a:off x="1185333" y="2713567"/>
               <a:ext cx="508000" cy="508000"/>
             </a:xfrm>
             <a:prstGeom prst="rect">
@@ -15005,7 +16091,7 @@
           </p:nvSpPr>
           <p:spPr>
             <a:xfrm>
-              <a:off x="1339453" y="3271308"/>
+              <a:off x="1212453" y="3271308"/>
               <a:ext cx="453760" cy="192617"/>
             </a:xfrm>
             <a:prstGeom prst="rect">
@@ -15047,7 +16133,7 @@
           <p:spPr>
             <a:xfrm>
               <a:off x="698500" y="4364567"/>
-              <a:ext cx="1735667" cy="1693333"/>
+              <a:ext cx="1481667" cy="1693333"/>
             </a:xfrm>
             <a:prstGeom prst="rect">
               <a:avLst/>
@@ -15190,7 +16276,7 @@
           <p:spPr>
             <a:xfrm>
               <a:off x="825500" y="4851400"/>
-              <a:ext cx="1481667" cy="1121833"/>
+              <a:ext cx="1227667" cy="1121833"/>
             </a:xfrm>
             <a:prstGeom prst="rect">
               <a:avLst/>
@@ -15305,7 +16391,7 @@
           </p:blipFill>
           <p:spPr>
             <a:xfrm>
-              <a:off x="1312333" y="5147733"/>
+              <a:off x="1185333" y="5147733"/>
               <a:ext cx="508000" cy="508000"/>
             </a:xfrm>
             <a:prstGeom prst="rect">
@@ -15321,7 +16407,7 @@
           </p:nvSpPr>
           <p:spPr>
             <a:xfrm>
-              <a:off x="1339453" y="5705475"/>
+              <a:off x="1212453" y="5705475"/>
               <a:ext cx="453760" cy="192617"/>
             </a:xfrm>
             <a:prstGeom prst="rect">
@@ -15657,8 +16743,8 @@
           </p:nvSpPr>
           <p:spPr>
             <a:xfrm>
-              <a:off x="2476500" y="2967567"/>
-              <a:ext cx="910167" cy="910166"/>
+              <a:off x="2222500" y="2967567"/>
+              <a:ext cx="1164167" cy="910166"/>
             </a:xfrm>
             <a:custGeom>
               <a:avLst/>
@@ -15667,18 +16753,18 @@
               <a:cxnLst/>
               <a:rect l="l" t="t" r="r" b="b"/>
               <a:pathLst>
-                <a:path w="910167" h="910166">
+                <a:path w="1164167" h="910166">
                   <a:moveTo>
                     <a:pt x="0" y="0"/>
                   </a:moveTo>
                   <a:lnTo>
-                    <a:pt x="635000" y="0"/>
+                    <a:pt x="931333" y="0"/>
                   </a:lnTo>
                   <a:lnTo>
-                    <a:pt x="635000" y="910166"/>
+                    <a:pt x="931333" y="910166"/>
                   </a:lnTo>
                   <a:lnTo>
-                    <a:pt x="910167" y="910166"/>
+                    <a:pt x="1164167" y="910166"/>
                   </a:lnTo>
                 </a:path>
               </a:pathLst>
@@ -15710,8 +16796,8 @@
           </p:nvSpPr>
           <p:spPr>
             <a:xfrm>
-              <a:off x="2476500" y="4047067"/>
-              <a:ext cx="910167" cy="1354666"/>
+              <a:off x="2222500" y="4047067"/>
+              <a:ext cx="1164167" cy="1354666"/>
             </a:xfrm>
             <a:custGeom>
               <a:avLst/>
@@ -15720,18 +16806,18 @@
               <a:cxnLst/>
               <a:rect l="l" t="t" r="r" b="b"/>
               <a:pathLst>
-                <a:path w="910167" h="1354666">
+                <a:path w="1164167" h="1354666">
                   <a:moveTo>
                     <a:pt x="0" y="1354666"/>
                   </a:moveTo>
                   <a:lnTo>
-                    <a:pt x="635000" y="1354666"/>
+                    <a:pt x="931333" y="1354666"/>
                   </a:lnTo>
                   <a:lnTo>
-                    <a:pt x="635000" y="0"/>
+                    <a:pt x="931333" y="0"/>
                   </a:lnTo>
                   <a:lnTo>
-                    <a:pt x="910167" y="0"/>
+                    <a:pt x="1164167" y="0"/>
                   </a:lnTo>
                 </a:path>
               </a:pathLst>
@@ -15757,7 +16843,48 @@
         </p:sp>
         <p:sp>
           <p:nvSpPr>
-            <p:cNvPr id="38" name="Rectangle 37"/>
+            <p:cNvPr id="38" name="TextBox 37"/>
+            <p:cNvSpPr txBox="1"/>
+            <p:nvPr/>
+          </p:nvSpPr>
+          <p:spPr>
+            <a:xfrm>
+              <a:off x="2098146" y="2762250"/>
+              <a:ext cx="1349375" cy="165100"/>
+            </a:xfrm>
+            <a:prstGeom prst="rect">
+              <a:avLst/>
+            </a:prstGeom>
+            <a:noFill/>
+          </p:spPr>
+          <p:txBody>
+            <a:bodyPr wrap="none" lIns="0" rIns="0" tIns="0" bIns="0" anchor="t">
+              <a:noAutofit/>
+            </a:bodyPr>
+            <a:lstStyle/>
+            <a:p>
+              <a:pPr algn="ctr">
+                <a:lnSpc>
+                  <a:spcPct val="100000"/>
+                </a:lnSpc>
+              </a:pPr>
+              <a:r>
+                <a:rPr sz="1000" b="0" lang="ko-KR">
+                  <a:solidFill>
+                    <a:srgbClr val="545B64"/>
+                  </a:solidFill>
+                  <a:latin typeface="Arial"/>
+                  <a:ea typeface="Malgun Gothic"/>
+                  <a:cs typeface="Malgun Gothic"/>
+                </a:rPr>
+                <a:t>VPC attachment</a:t>
+              </a:r>
+            </a:p>
+          </p:txBody>
+        </p:sp>
+        <p:sp>
+          <p:nvSpPr>
+            <p:cNvPr id="39" name="Rectangle 38"/>
             <p:cNvSpPr/>
             <p:nvPr/>
           </p:nvSpPr>
@@ -15788,7 +16915,7 @@
         </p:sp>
         <p:pic>
           <p:nvPicPr>
-            <p:cNvPr id="39" name="Virtual-private-cloud-VPC_32" descr="Virtual private cloud VPC_32"/>
+            <p:cNvPr id="40" name="Virtual-private-cloud-VPC_32" descr="Virtual private cloud VPC_32"/>
             <p:cNvPicPr>
               <a:picLocks noChangeAspect="1"/>
             </p:cNvPicPr>
@@ -15818,7 +16945,7 @@
         </p:pic>
         <p:sp>
           <p:nvSpPr>
-            <p:cNvPr id="40" name="TextBox 39"/>
+            <p:cNvPr id="41" name="TextBox 40"/>
             <p:cNvSpPr txBox="1"/>
             <p:nvPr/>
           </p:nvSpPr>
@@ -15859,7 +16986,7 @@
         </p:sp>
         <p:sp>
           <p:nvSpPr>
-            <p:cNvPr id="41" name="TextBox 40"/>
+            <p:cNvPr id="42" name="TextBox 41"/>
             <p:cNvSpPr txBox="1"/>
             <p:nvPr/>
           </p:nvSpPr>
@@ -15900,7 +17027,7 @@
         </p:sp>
         <p:sp>
           <p:nvSpPr>
-            <p:cNvPr id="42" name="Rectangle 41"/>
+            <p:cNvPr id="43" name="Rectangle 42"/>
             <p:cNvSpPr/>
             <p:nvPr/>
           </p:nvSpPr>
@@ -15933,7 +17060,7 @@
         </p:sp>
         <p:sp>
           <p:nvSpPr>
-            <p:cNvPr id="43" name="TextBox 42"/>
+            <p:cNvPr id="44" name="TextBox 43"/>
             <p:cNvSpPr txBox="1"/>
             <p:nvPr/>
           </p:nvSpPr>
@@ -15974,7 +17101,7 @@
         </p:sp>
         <p:sp>
           <p:nvSpPr>
-            <p:cNvPr id="44" name="Rectangle 43"/>
+            <p:cNvPr id="45" name="Rectangle 44"/>
             <p:cNvSpPr/>
             <p:nvPr/>
           </p:nvSpPr>
@@ -16007,7 +17134,7 @@
         </p:sp>
         <p:sp>
           <p:nvSpPr>
-            <p:cNvPr id="45" name="TextBox 44"/>
+            <p:cNvPr id="46" name="TextBox 45"/>
             <p:cNvSpPr txBox="1"/>
             <p:nvPr/>
           </p:nvSpPr>
@@ -16048,7 +17175,7 @@
         </p:sp>
         <p:sp>
           <p:nvSpPr>
-            <p:cNvPr id="46" name="Rectangle 45"/>
+            <p:cNvPr id="47" name="Rectangle 46"/>
             <p:cNvSpPr/>
             <p:nvPr/>
           </p:nvSpPr>
@@ -16079,7 +17206,7 @@
         </p:sp>
         <p:pic>
           <p:nvPicPr>
-            <p:cNvPr id="47" name="Private-subnet_32" descr="Private subnet_32"/>
+            <p:cNvPr id="48" name="Private-subnet_32" descr="Private subnet_32"/>
             <p:cNvPicPr>
               <a:picLocks noChangeAspect="1"/>
             </p:cNvPicPr>
@@ -16109,7 +17236,7 @@
         </p:pic>
         <p:sp>
           <p:nvSpPr>
-            <p:cNvPr id="48" name="TextBox 47"/>
+            <p:cNvPr id="49" name="TextBox 48"/>
             <p:cNvSpPr txBox="1"/>
             <p:nvPr/>
           </p:nvSpPr>
@@ -16150,7 +17277,7 @@
         </p:sp>
         <p:sp>
           <p:nvSpPr>
-            <p:cNvPr id="49" name="Rectangle 48"/>
+            <p:cNvPr id="50" name="Rectangle 49"/>
             <p:cNvSpPr/>
             <p:nvPr/>
           </p:nvSpPr>
@@ -16181,7 +17308,7 @@
         </p:sp>
         <p:pic>
           <p:nvPicPr>
-            <p:cNvPr id="50" name="Private-subnet_32" descr="Private subnet_32"/>
+            <p:cNvPr id="51" name="Private-subnet_32" descr="Private subnet_32"/>
             <p:cNvPicPr>
               <a:picLocks noChangeAspect="1"/>
             </p:cNvPicPr>
@@ -16211,7 +17338,7 @@
         </p:pic>
         <p:sp>
           <p:nvSpPr>
-            <p:cNvPr id="51" name="TextBox 50"/>
+            <p:cNvPr id="52" name="TextBox 51"/>
             <p:cNvSpPr txBox="1"/>
             <p:nvPr/>
           </p:nvSpPr>
@@ -16252,7 +17379,7 @@
         </p:sp>
         <p:sp>
           <p:nvSpPr>
-            <p:cNvPr id="52" name="Rectangle 51"/>
+            <p:cNvPr id="53" name="Rectangle 52"/>
             <p:cNvSpPr/>
             <p:nvPr/>
           </p:nvSpPr>
@@ -16283,7 +17410,7 @@
         </p:sp>
         <p:pic>
           <p:nvPicPr>
-            <p:cNvPr id="53" name="Public-subnet_32" descr="Public subnet_32"/>
+            <p:cNvPr id="54" name="Public-subnet_32" descr="Public subnet_32"/>
             <p:cNvPicPr>
               <a:picLocks noChangeAspect="1"/>
             </p:cNvPicPr>
@@ -16313,7 +17440,7 @@
         </p:pic>
         <p:sp>
           <p:nvSpPr>
-            <p:cNvPr id="54" name="TextBox 53"/>
+            <p:cNvPr id="55" name="TextBox 54"/>
             <p:cNvSpPr txBox="1"/>
             <p:nvPr/>
           </p:nvSpPr>
@@ -16354,7 +17481,7 @@
         </p:sp>
         <p:sp>
           <p:nvSpPr>
-            <p:cNvPr id="55" name="Rectangle 54"/>
+            <p:cNvPr id="56" name="Rectangle 55"/>
             <p:cNvSpPr/>
             <p:nvPr/>
           </p:nvSpPr>
@@ -16385,7 +17512,7 @@
         </p:sp>
         <p:pic>
           <p:nvPicPr>
-            <p:cNvPr id="56" name="Private-subnet_32" descr="Private subnet_32"/>
+            <p:cNvPr id="57" name="Private-subnet_32" descr="Private subnet_32"/>
             <p:cNvPicPr>
               <a:picLocks noChangeAspect="1"/>
             </p:cNvPicPr>
@@ -16415,7 +17542,7 @@
         </p:pic>
         <p:sp>
           <p:nvSpPr>
-            <p:cNvPr id="57" name="TextBox 56"/>
+            <p:cNvPr id="58" name="TextBox 57"/>
             <p:cNvSpPr txBox="1"/>
             <p:nvPr/>
           </p:nvSpPr>
@@ -16456,7 +17583,7 @@
         </p:sp>
         <p:sp>
           <p:nvSpPr>
-            <p:cNvPr id="58" name="Rectangle 57"/>
+            <p:cNvPr id="59" name="Rectangle 58"/>
             <p:cNvSpPr/>
             <p:nvPr/>
           </p:nvSpPr>
@@ -16487,7 +17614,7 @@
         </p:sp>
         <p:pic>
           <p:nvPicPr>
-            <p:cNvPr id="59" name="Private-subnet_32" descr="Private subnet_32"/>
+            <p:cNvPr id="60" name="Private-subnet_32" descr="Private subnet_32"/>
             <p:cNvPicPr>
               <a:picLocks noChangeAspect="1"/>
             </p:cNvPicPr>
@@ -16517,7 +17644,7 @@
         </p:pic>
         <p:sp>
           <p:nvSpPr>
-            <p:cNvPr id="60" name="TextBox 59"/>
+            <p:cNvPr id="61" name="TextBox 60"/>
             <p:cNvSpPr txBox="1"/>
             <p:nvPr/>
           </p:nvSpPr>
@@ -16558,7 +17685,7 @@
         </p:sp>
         <p:sp>
           <p:nvSpPr>
-            <p:cNvPr id="61" name="Rectangle 60"/>
+            <p:cNvPr id="62" name="Rectangle 61"/>
             <p:cNvSpPr/>
             <p:nvPr/>
           </p:nvSpPr>
@@ -16589,7 +17716,7 @@
         </p:sp>
         <p:pic>
           <p:nvPicPr>
-            <p:cNvPr id="62" name="Public-subnet_32" descr="Public subnet_32"/>
+            <p:cNvPr id="63" name="Public-subnet_32" descr="Public subnet_32"/>
             <p:cNvPicPr>
               <a:picLocks noChangeAspect="1"/>
             </p:cNvPicPr>
@@ -16619,7 +17746,7 @@
         </p:pic>
         <p:sp>
           <p:nvSpPr>
-            <p:cNvPr id="63" name="TextBox 62"/>
+            <p:cNvPr id="64" name="TextBox 63"/>
             <p:cNvSpPr txBox="1"/>
             <p:nvPr/>
           </p:nvSpPr>
@@ -16660,7 +17787,7 @@
         </p:sp>
         <p:pic>
           <p:nvPicPr>
-            <p:cNvPr id="64" name="AWS-Transit-Gateway_Attachment" descr="AWS Transit Gateway_Attachment"/>
+            <p:cNvPr id="65" name="AWS-Transit-Gateway_Attachment" descr="AWS Transit Gateway_Attachment"/>
             <p:cNvPicPr>
               <a:picLocks noChangeAspect="1"/>
             </p:cNvPicPr>
@@ -16690,7 +17817,7 @@
         </p:pic>
         <p:sp>
           <p:nvSpPr>
-            <p:cNvPr id="65" name="TextBox 64"/>
+            <p:cNvPr id="66" name="TextBox 65"/>
             <p:cNvSpPr txBox="1"/>
             <p:nvPr/>
           </p:nvSpPr>
@@ -16731,7 +17858,7 @@
         </p:sp>
         <p:pic>
           <p:nvPicPr>
-            <p:cNvPr id="66" name="AWS-Network-Firewall_Endpoints" descr="AWS Network Firewall_Endpoints"/>
+            <p:cNvPr id="67" name="AWS-Network-Firewall_Endpoints" descr="AWS Network Firewall_Endpoints"/>
             <p:cNvPicPr>
               <a:picLocks noChangeAspect="1"/>
             </p:cNvPicPr>
@@ -16761,7 +17888,7 @@
         </p:pic>
         <p:sp>
           <p:nvSpPr>
-            <p:cNvPr id="67" name="TextBox 66"/>
+            <p:cNvPr id="68" name="TextBox 67"/>
             <p:cNvSpPr txBox="1"/>
             <p:nvPr/>
           </p:nvSpPr>
@@ -16802,7 +17929,7 @@
         </p:sp>
         <p:pic>
           <p:nvPicPr>
-            <p:cNvPr id="68" name="Amazon-VPC_NAT-Gateway" descr="Amazon VPC_NAT Gateway"/>
+            <p:cNvPr id="69" name="Amazon-VPC_NAT-Gateway" descr="Amazon VPC_NAT Gateway"/>
             <p:cNvPicPr>
               <a:picLocks noChangeAspect="1"/>
             </p:cNvPicPr>
@@ -16832,7 +17959,7 @@
         </p:pic>
         <p:sp>
           <p:nvSpPr>
-            <p:cNvPr id="69" name="TextBox 68"/>
+            <p:cNvPr id="70" name="TextBox 69"/>
             <p:cNvSpPr txBox="1"/>
             <p:nvPr/>
           </p:nvSpPr>
@@ -16873,7 +18000,7 @@
         </p:sp>
         <p:pic>
           <p:nvPicPr>
-            <p:cNvPr id="70" name="AWS-Transit-Gateway_Attachment" descr="AWS Transit Gateway_Attachment"/>
+            <p:cNvPr id="71" name="AWS-Transit-Gateway_Attachment" descr="AWS Transit Gateway_Attachment"/>
             <p:cNvPicPr>
               <a:picLocks noChangeAspect="1"/>
             </p:cNvPicPr>
@@ -16903,7 +18030,7 @@
         </p:pic>
         <p:sp>
           <p:nvSpPr>
-            <p:cNvPr id="71" name="TextBox 70"/>
+            <p:cNvPr id="72" name="TextBox 71"/>
             <p:cNvSpPr txBox="1"/>
             <p:nvPr/>
           </p:nvSpPr>
@@ -16944,7 +18071,7 @@
         </p:sp>
         <p:pic>
           <p:nvPicPr>
-            <p:cNvPr id="72" name="AWS-Network-Firewall_Endpoints" descr="AWS Network Firewall_Endpoints"/>
+            <p:cNvPr id="73" name="AWS-Network-Firewall_Endpoints" descr="AWS Network Firewall_Endpoints"/>
             <p:cNvPicPr>
               <a:picLocks noChangeAspect="1"/>
             </p:cNvPicPr>
@@ -16974,7 +18101,7 @@
         </p:pic>
         <p:sp>
           <p:nvSpPr>
-            <p:cNvPr id="73" name="TextBox 72"/>
+            <p:cNvPr id="74" name="TextBox 73"/>
             <p:cNvSpPr txBox="1"/>
             <p:nvPr/>
           </p:nvSpPr>
@@ -17015,7 +18142,7 @@
         </p:sp>
         <p:pic>
           <p:nvPicPr>
-            <p:cNvPr id="74" name="Amazon-VPC_NAT-Gateway" descr="Amazon VPC_NAT Gateway"/>
+            <p:cNvPr id="75" name="Amazon-VPC_NAT-Gateway" descr="Amazon VPC_NAT Gateway"/>
             <p:cNvPicPr>
               <a:picLocks noChangeAspect="1"/>
             </p:cNvPicPr>
@@ -17045,7 +18172,7 @@
         </p:pic>
         <p:sp>
           <p:nvSpPr>
-            <p:cNvPr id="75" name="TextBox 74"/>
+            <p:cNvPr id="76" name="TextBox 75"/>
             <p:cNvSpPr txBox="1"/>
             <p:nvPr/>
           </p:nvSpPr>
@@ -17086,7 +18213,7 @@
         </p:sp>
         <p:pic>
           <p:nvPicPr>
-            <p:cNvPr id="76" name="AWS-Network-Firewall" descr="AWS Network Firewall"/>
+            <p:cNvPr id="77" name="AWS-Network-Firewall" descr="AWS Network Firewall"/>
             <p:cNvPicPr>
               <a:picLocks noChangeAspect="1"/>
             </p:cNvPicPr>
@@ -17116,7 +18243,7 @@
         </p:pic>
         <p:sp>
           <p:nvSpPr>
-            <p:cNvPr id="77" name="TextBox 76"/>
+            <p:cNvPr id="78" name="TextBox 77"/>
             <p:cNvSpPr txBox="1"/>
             <p:nvPr/>
           </p:nvSpPr>
@@ -17157,7 +18284,7 @@
         </p:sp>
         <p:sp>
           <p:nvSpPr>
-            <p:cNvPr id="78" name="Rectangle 77"/>
+            <p:cNvPr id="79" name="Rectangle 78"/>
             <p:cNvSpPr/>
             <p:nvPr/>
           </p:nvSpPr>
@@ -17186,7 +18313,7 @@
         </p:sp>
         <p:pic>
           <p:nvPicPr>
-            <p:cNvPr id="79" name="Amazon-VPC_Internet-Gateway" descr="Amazon VPC_Internet Gateway"/>
+            <p:cNvPr id="80" name="Amazon-VPC_Internet-Gateway" descr="Amazon VPC_Internet Gateway"/>
             <p:cNvPicPr>
               <a:picLocks noChangeAspect="1"/>
             </p:cNvPicPr>
@@ -17216,7 +18343,7 @@
         </p:pic>
         <p:sp>
           <p:nvSpPr>
-            <p:cNvPr id="80" name="TextBox 79"/>
+            <p:cNvPr id="81" name="TextBox 80"/>
             <p:cNvSpPr txBox="1"/>
             <p:nvPr/>
           </p:nvSpPr>
@@ -17257,7 +18384,7 @@
         </p:sp>
         <p:sp>
           <p:nvSpPr>
-            <p:cNvPr id="81" name="Freeform 80"/>
+            <p:cNvPr id="82" name="Freeform 81"/>
             <p:cNvSpPr/>
             <p:nvPr/>
           </p:nvSpPr>
@@ -17310,7 +18437,7 @@
         </p:sp>
         <p:sp>
           <p:nvSpPr>
-            <p:cNvPr id="82" name="Freeform 81"/>
+            <p:cNvPr id="83" name="Freeform 82"/>
             <p:cNvSpPr/>
             <p:nvPr/>
           </p:nvSpPr>
@@ -17363,7 +18490,7 @@
         </p:sp>
         <p:cxnSp>
           <p:nvCxnSpPr>
-            <p:cNvPr id="83" name="Connector 82"/>
+            <p:cNvPr id="84" name="Connector 83"/>
             <p:cNvCxnSpPr/>
             <p:nvPr/>
           </p:nvCxnSpPr>
@@ -17388,7 +18515,7 @@
         </p:cxnSp>
         <p:cxnSp>
           <p:nvCxnSpPr>
-            <p:cNvPr id="84" name="Connector 83"/>
+            <p:cNvPr id="85" name="Connector 84"/>
             <p:cNvCxnSpPr/>
             <p:nvPr/>
           </p:nvCxnSpPr>
@@ -17413,7 +18540,7 @@
         </p:cxnSp>
         <p:cxnSp>
           <p:nvCxnSpPr>
-            <p:cNvPr id="85" name="Connector 84"/>
+            <p:cNvPr id="86" name="Connector 85"/>
             <p:cNvCxnSpPr/>
             <p:nvPr/>
           </p:nvCxnSpPr>
@@ -17437,7 +18564,7 @@
         </p:cxnSp>
         <p:cxnSp>
           <p:nvCxnSpPr>
-            <p:cNvPr id="86" name="Connector 85"/>
+            <p:cNvPr id="87" name="Connector 86"/>
             <p:cNvCxnSpPr/>
             <p:nvPr/>
           </p:nvCxnSpPr>
@@ -17461,7 +18588,7 @@
         </p:cxnSp>
         <p:sp>
           <p:nvSpPr>
-            <p:cNvPr id="87" name="Freeform 86"/>
+            <p:cNvPr id="88" name="Freeform 87"/>
             <p:cNvSpPr/>
             <p:nvPr/>
           </p:nvSpPr>
@@ -17513,7 +18640,7 @@
         </p:sp>
         <p:sp>
           <p:nvSpPr>
-            <p:cNvPr id="88" name="Freeform 87"/>
+            <p:cNvPr id="89" name="Freeform 88"/>
             <p:cNvSpPr/>
             <p:nvPr/>
           </p:nvSpPr>
@@ -17561,7 +18688,7 @@
         </p:sp>
         <p:pic>
           <p:nvPicPr>
-            <p:cNvPr id="89" name="Internet" descr="Internet"/>
+            <p:cNvPr id="90" name="Internet" descr="Internet"/>
             <p:cNvPicPr>
               <a:picLocks noChangeAspect="1"/>
             </p:cNvPicPr>
@@ -17591,7 +18718,7 @@
         </p:pic>
         <p:sp>
           <p:nvSpPr>
-            <p:cNvPr id="90" name="TextBox 89"/>
+            <p:cNvPr id="91" name="TextBox 90"/>
             <p:cNvSpPr txBox="1"/>
             <p:nvPr/>
           </p:nvSpPr>
@@ -17632,7 +18759,7 @@
         </p:sp>
         <p:cxnSp>
           <p:nvCxnSpPr>
-            <p:cNvPr id="91" name="Connector 90"/>
+            <p:cNvPr id="92" name="Connector 91"/>
             <p:cNvCxnSpPr/>
             <p:nvPr/>
           </p:nvCxnSpPr>
@@ -17656,13 +18783,13 @@
         </p:cxnSp>
         <p:sp>
           <p:nvSpPr>
-            <p:cNvPr id="92" name="Oval 91"/>
+            <p:cNvPr id="93" name="Oval 92"/>
             <p:cNvSpPr/>
             <p:nvPr/>
           </p:nvSpPr>
           <p:spPr>
             <a:xfrm>
-              <a:off x="3143250" y="3623733"/>
+              <a:off x="3164417" y="3623733"/>
               <a:ext cx="211667" cy="211667"/>
             </a:xfrm>
             <a:prstGeom prst="ellipse">
@@ -17685,13 +18812,13 @@
         </p:sp>
         <p:sp>
           <p:nvSpPr>
-            <p:cNvPr id="93" name="TextBox 92"/>
-            <p:cNvSpPr txBox="1"/>
-            <p:nvPr/>
-          </p:nvSpPr>
-          <p:spPr>
-            <a:xfrm>
-              <a:off x="3141927" y="3651250"/>
+            <p:cNvPr id="94" name="TextBox 93"/>
+            <p:cNvSpPr txBox="1"/>
+            <p:nvPr/>
+          </p:nvSpPr>
+          <p:spPr>
+            <a:xfrm>
+              <a:off x="3163094" y="3651250"/>
               <a:ext cx="214312" cy="165100"/>
             </a:xfrm>
             <a:prstGeom prst="rect">
@@ -17726,7 +18853,7 @@
         </p:sp>
         <p:sp>
           <p:nvSpPr>
-            <p:cNvPr id="94" name="Oval 93"/>
+            <p:cNvPr id="95" name="Oval 94"/>
             <p:cNvSpPr/>
             <p:nvPr/>
           </p:nvSpPr>
@@ -17755,7 +18882,7 @@
         </p:sp>
         <p:sp>
           <p:nvSpPr>
-            <p:cNvPr id="95" name="TextBox 94"/>
+            <p:cNvPr id="96" name="TextBox 95"/>
             <p:cNvSpPr txBox="1"/>
             <p:nvPr/>
           </p:nvSpPr>
@@ -17796,7 +18923,7 @@
         </p:sp>
         <p:sp>
           <p:nvSpPr>
-            <p:cNvPr id="96" name="Oval 95"/>
+            <p:cNvPr id="97" name="Oval 96"/>
             <p:cNvSpPr/>
             <p:nvPr/>
           </p:nvSpPr>
@@ -17825,7 +18952,7 @@
         </p:sp>
         <p:sp>
           <p:nvSpPr>
-            <p:cNvPr id="97" name="TextBox 96"/>
+            <p:cNvPr id="98" name="TextBox 97"/>
             <p:cNvSpPr txBox="1"/>
             <p:nvPr/>
           </p:nvSpPr>
@@ -17866,7 +18993,7 @@
         </p:sp>
         <p:sp>
           <p:nvSpPr>
-            <p:cNvPr id="98" name="Oval 97"/>
+            <p:cNvPr id="99" name="Oval 98"/>
             <p:cNvSpPr/>
             <p:nvPr/>
           </p:nvSpPr>
@@ -17895,7 +19022,7 @@
         </p:sp>
         <p:sp>
           <p:nvSpPr>
-            <p:cNvPr id="99" name="TextBox 98"/>
+            <p:cNvPr id="100" name="TextBox 99"/>
             <p:cNvSpPr txBox="1"/>
             <p:nvPr/>
           </p:nvSpPr>
@@ -17936,7 +19063,7 @@
         </p:sp>
         <p:sp>
           <p:nvSpPr>
-            <p:cNvPr id="100" name="Oval 99"/>
+            <p:cNvPr id="101" name="Oval 100"/>
             <p:cNvSpPr/>
             <p:nvPr/>
           </p:nvSpPr>
@@ -17965,7 +19092,7 @@
         </p:sp>
         <p:sp>
           <p:nvSpPr>
-            <p:cNvPr id="101" name="TextBox 100"/>
+            <p:cNvPr id="102" name="TextBox 101"/>
             <p:cNvSpPr txBox="1"/>
             <p:nvPr/>
           </p:nvSpPr>
@@ -18006,7 +19133,7 @@
         </p:sp>
         <p:sp>
           <p:nvSpPr>
-            <p:cNvPr id="102" name="Oval 101"/>
+            <p:cNvPr id="103" name="Oval 102"/>
             <p:cNvSpPr/>
             <p:nvPr/>
           </p:nvSpPr>
@@ -18035,7 +19162,7 @@
         </p:sp>
         <p:sp>
           <p:nvSpPr>
-            <p:cNvPr id="103" name="TextBox 102"/>
+            <p:cNvPr id="104" name="TextBox 103"/>
             <p:cNvSpPr txBox="1"/>
             <p:nvPr/>
           </p:nvSpPr>
@@ -18076,7 +19203,7 @@
         </p:sp>
         <p:sp>
           <p:nvSpPr>
-            <p:cNvPr id="104" name="TextBox 103"/>
+            <p:cNvPr id="105" name="TextBox 104"/>
             <p:cNvSpPr txBox="1"/>
             <p:nvPr/>
           </p:nvSpPr>
@@ -18117,7 +19244,7 @@
         </p:sp>
         <p:sp>
           <p:nvSpPr>
-            <p:cNvPr id="105" name="Oval 104"/>
+            <p:cNvPr id="106" name="Oval 105"/>
             <p:cNvSpPr/>
             <p:nvPr/>
           </p:nvSpPr>
@@ -18146,7 +19273,7 @@
         </p:sp>
         <p:sp>
           <p:nvSpPr>
-            <p:cNvPr id="106" name="TextBox 105"/>
+            <p:cNvPr id="107" name="TextBox 106"/>
             <p:cNvSpPr txBox="1"/>
             <p:nvPr/>
           </p:nvSpPr>
@@ -18187,7 +19314,7 @@
         </p:sp>
         <p:sp>
           <p:nvSpPr>
-            <p:cNvPr id="107" name="TextBox 106"/>
+            <p:cNvPr id="108" name="TextBox 107"/>
             <p:cNvSpPr txBox="1"/>
             <p:nvPr/>
           </p:nvSpPr>
@@ -18228,7 +19355,7 @@
         </p:sp>
         <p:sp>
           <p:nvSpPr>
-            <p:cNvPr id="108" name="Oval 107"/>
+            <p:cNvPr id="109" name="Oval 108"/>
             <p:cNvSpPr/>
             <p:nvPr/>
           </p:nvSpPr>
@@ -18257,7 +19384,7 @@
         </p:sp>
         <p:sp>
           <p:nvSpPr>
-            <p:cNvPr id="109" name="TextBox 108"/>
+            <p:cNvPr id="110" name="TextBox 109"/>
             <p:cNvSpPr txBox="1"/>
             <p:nvPr/>
           </p:nvSpPr>
@@ -18298,7 +19425,7 @@
         </p:sp>
         <p:sp>
           <p:nvSpPr>
-            <p:cNvPr id="110" name="TextBox 109"/>
+            <p:cNvPr id="111" name="TextBox 110"/>
             <p:cNvSpPr txBox="1"/>
             <p:nvPr/>
           </p:nvSpPr>
@@ -18339,7 +19466,7 @@
         </p:sp>
         <p:sp>
           <p:nvSpPr>
-            <p:cNvPr id="111" name="Oval 110"/>
+            <p:cNvPr id="112" name="Oval 111"/>
             <p:cNvSpPr/>
             <p:nvPr/>
           </p:nvSpPr>
@@ -18368,7 +19495,7 @@
         </p:sp>
         <p:sp>
           <p:nvSpPr>
-            <p:cNvPr id="112" name="TextBox 111"/>
+            <p:cNvPr id="113" name="TextBox 112"/>
             <p:cNvSpPr txBox="1"/>
             <p:nvPr/>
           </p:nvSpPr>
@@ -18409,7 +19536,7 @@
         </p:sp>
         <p:sp>
           <p:nvSpPr>
-            <p:cNvPr id="113" name="TextBox 112"/>
+            <p:cNvPr id="114" name="TextBox 113"/>
             <p:cNvSpPr txBox="1"/>
             <p:nvPr/>
           </p:nvSpPr>
@@ -18450,7 +19577,7 @@
         </p:sp>
         <p:sp>
           <p:nvSpPr>
-            <p:cNvPr id="114" name="Oval 113"/>
+            <p:cNvPr id="115" name="Oval 114"/>
             <p:cNvSpPr/>
             <p:nvPr/>
           </p:nvSpPr>
@@ -18479,7 +19606,7 @@
         </p:sp>
         <p:sp>
           <p:nvSpPr>
-            <p:cNvPr id="115" name="TextBox 114"/>
+            <p:cNvPr id="116" name="TextBox 115"/>
             <p:cNvSpPr txBox="1"/>
             <p:nvPr/>
           </p:nvSpPr>
@@ -18520,7 +19647,7 @@
         </p:sp>
         <p:sp>
           <p:nvSpPr>
-            <p:cNvPr id="116" name="TextBox 115"/>
+            <p:cNvPr id="117" name="TextBox 116"/>
             <p:cNvSpPr txBox="1"/>
             <p:nvPr/>
           </p:nvSpPr>
